--- a/docs/test/stress/e2e-outputs/income_pro_pr02.pptx
+++ b/docs/test/stress/e2e-outputs/income_pro_pr02.pptx
@@ -19,10 +19,9 @@
     <p:sldId id="267" r:id="rId13"/>
     <p:sldId id="268" r:id="rId14"/>
     <p:sldId id="269" r:id="rId15"/>
-    <p:sldId id="270" r:id="rId16"/>
   </p:sldIdLst>
   <p:notesMasterIdLst>
-    <p:notesMasterId r:id="rId17"/>
+    <p:notesMasterId r:id="rId16"/>
   </p:notesMasterIdLst>
   <p:sldSz cx="12192000" cy="6858000"/>
   <p:notesSz cx="6858000" cy="12192000"/>
@@ -980,94 +979,6 @@
             <a:fld id="{F7021451-1387-4CA6-816F-3879F97B5CBC}" type="slidenum">
               <a:rPr lang="en-US"/>
               <a:t>14</a:t>
-            </a:fld>
-            <a:endParaRPr lang="en-US"/>
-          </a:p>
-        </p:txBody>
-      </p:sp>
-    </p:spTree>
-    <p:extLst>
-      <p:ext uri="{BB962C8B-B14F-4D97-AF65-F5344CB8AC3E}">
-        <p14:creationId xmlns:p14="http://schemas.microsoft.com/office/powerpoint/2010/main" val="1024086991"/>
-      </p:ext>
-    </p:extLst>
-  </p:cSld>
-  <p:clrMapOvr>
-    <a:masterClrMapping/>
-  </p:clrMapOvr>
-</p:notes>
-</file>
-
-<file path=ppt/notesSlides/notesSlide15.xml><?xml version="1.0" encoding="utf-8"?>
-<p:notes xmlns:a="http://schemas.openxmlformats.org/drawingml/2006/main" xmlns:r="http://schemas.openxmlformats.org/officeDocument/2006/relationships" xmlns:p="http://schemas.openxmlformats.org/presentationml/2006/main">
-  <p:cSld>
-    <p:spTree>
-      <p:nvGrpSpPr>
-        <p:cNvPr id="1" name=""/>
-        <p:cNvGrpSpPr/>
-        <p:nvPr/>
-      </p:nvGrpSpPr>
-      <p:grpSpPr>
-        <a:xfrm>
-          <a:off x="0" y="0"/>
-          <a:ext cx="0" cy="0"/>
-          <a:chOff x="0" y="0"/>
-          <a:chExt cx="0" cy="0"/>
-        </a:xfrm>
-      </p:grpSpPr>
-      <p:sp>
-        <p:nvSpPr>
-          <p:cNvPr id="2" name="Slide Image Placeholder 1"/>
-          <p:cNvSpPr>
-            <a:spLocks noGrp="1" noRot="1" noChangeAspect="1"/>
-          </p:cNvSpPr>
-          <p:nvPr>
-            <p:ph type="sldImg"/>
-          </p:nvPr>
-        </p:nvSpPr>
-        <p:spPr/>
-      </p:sp>
-      <p:sp>
-        <p:nvSpPr>
-          <p:cNvPr id="3" name="Notes Placeholder 2"/>
-          <p:cNvSpPr>
-            <a:spLocks noGrp="1"/>
-          </p:cNvSpPr>
-          <p:nvPr>
-            <p:ph type="body" idx="1"/>
-          </p:nvPr>
-        </p:nvSpPr>
-        <p:spPr/>
-        <p:txBody>
-          <a:bodyPr/>
-          <a:lstStyle/>
-          <a:p>
-            <a:r>
-              <a:rPr lang="en-US" dirty="0"/>
-              <a:t/>
-            </a:r>
-            <a:endParaRPr lang="en-US" dirty="0"/>
-          </a:p>
-        </p:txBody>
-      </p:sp>
-      <p:sp>
-        <p:nvSpPr>
-          <p:cNvPr id="4" name="Slide Number Placeholder 3"/>
-          <p:cNvSpPr>
-            <a:spLocks noGrp="1"/>
-          </p:cNvSpPr>
-          <p:nvPr>
-            <p:ph type="sldNum" sz="quarter" idx="10"/>
-          </p:nvPr>
-        </p:nvSpPr>
-        <p:spPr/>
-        <p:txBody>
-          <a:bodyPr/>
-          <a:lstStyle/>
-          <a:p>
-            <a:fld id="{F7021451-1387-4CA6-816F-3879F97B5CBC}" type="slidenum">
-              <a:rPr lang="en-US"/>
-              <a:t>15</a:t>
             </a:fld>
             <a:endParaRPr lang="en-US"/>
           </a:p>
@@ -2442,8 +2353,8 @@
         </p:nvSpPr>
         <p:spPr>
           <a:xfrm>
-            <a:off x="566928" y="3584448"/>
-            <a:ext cx="1097280" cy="310896"/>
+            <a:off x="566928" y="3685032"/>
+            <a:ext cx="1097280" cy="292608"/>
           </a:xfrm>
           <a:prstGeom prst="roundRect">
             <a:avLst>
@@ -2464,8 +2375,8 @@
         </p:nvSpPr>
         <p:spPr>
           <a:xfrm>
-            <a:off x="566928" y="3584448"/>
-            <a:ext cx="1097280" cy="310896"/>
+            <a:off x="566928" y="3685032"/>
+            <a:ext cx="1097280" cy="292608"/>
           </a:xfrm>
           <a:prstGeom prst="rect">
             <a:avLst/>
@@ -2481,7 +2392,7 @@
               <a:buNone/>
             </a:pPr>
             <a:r>
-              <a:rPr lang="en-US" sz="1000" b="1" dirty="0">
+              <a:rPr lang="en-US" sz="950" b="1" dirty="0">
                 <a:solidFill>
                   <a:srgbClr val="FFFFFF"/>
                 </a:solidFill>
@@ -2491,7 +2402,7 @@
               </a:rPr>
               <a:t>메디컬빌딩</a:t>
             </a:r>
-            <a:endParaRPr lang="en-US" sz="1000" dirty="0"/>
+            <a:endParaRPr lang="en-US" sz="950" dirty="0"/>
           </a:p>
         </p:txBody>
       </p:sp>
@@ -2503,8 +2414,8 @@
         </p:nvSpPr>
         <p:spPr>
           <a:xfrm>
-            <a:off x="1773936" y="3584448"/>
-            <a:ext cx="1097280" cy="310896"/>
+            <a:off x="1755648" y="3685032"/>
+            <a:ext cx="1005840" cy="292608"/>
           </a:xfrm>
           <a:prstGeom prst="roundRect">
             <a:avLst>
@@ -2525,8 +2436,8 @@
         </p:nvSpPr>
         <p:spPr>
           <a:xfrm>
-            <a:off x="1773936" y="3584448"/>
-            <a:ext cx="1097280" cy="310896"/>
+            <a:off x="1755648" y="3685032"/>
+            <a:ext cx="1005840" cy="292608"/>
           </a:xfrm>
           <a:prstGeom prst="rect">
             <a:avLst/>
@@ -2542,7 +2453,7 @@
               <a:buNone/>
             </a:pPr>
             <a:r>
-              <a:rPr lang="en-US" sz="1000" b="1" dirty="0">
+              <a:rPr lang="en-US" sz="950" b="1" dirty="0">
                 <a:solidFill>
                   <a:srgbClr val="FFFFFF"/>
                 </a:solidFill>
@@ -2552,7 +2463,7 @@
               </a:rPr>
               <a:t>165억</a:t>
             </a:r>
-            <a:endParaRPr lang="en-US" sz="1000" dirty="0"/>
+            <a:endParaRPr lang="en-US" sz="950" dirty="0"/>
           </a:p>
         </p:txBody>
       </p:sp>
@@ -2564,12 +2475,12 @@
         </p:nvSpPr>
         <p:spPr>
           <a:xfrm>
-            <a:off x="566928" y="4224528"/>
-            <a:ext cx="6858000" cy="1225296"/>
+            <a:off x="566928" y="4187952"/>
+            <a:ext cx="6858000" cy="1051560"/>
           </a:xfrm>
           <a:prstGeom prst="roundRect">
             <a:avLst>
-              <a:gd name="adj" fmla="val 2985"/>
+              <a:gd name="adj" fmla="val 3478"/>
             </a:avLst>
           </a:prstGeom>
           <a:solidFill>
@@ -2591,8 +2502,8 @@
         </p:nvSpPr>
         <p:spPr>
           <a:xfrm>
-            <a:off x="822960" y="4425696"/>
-            <a:ext cx="6345936" cy="822960"/>
+            <a:off x="822960" y="4297680"/>
+            <a:ext cx="6345936" cy="832104"/>
           </a:xfrm>
           <a:prstGeom prst="rect">
             <a:avLst/>
@@ -2608,7 +2519,7 @@
               <a:buNone/>
             </a:pPr>
             <a:r>
-              <a:rPr lang="en-US" sz="2200" b="1" dirty="0">
+              <a:rPr lang="en-US" sz="2100" b="1" dirty="0">
                 <a:solidFill>
                   <a:srgbClr val="F3EBDA"/>
                 </a:solidFill>
@@ -2618,7 +2529,7 @@
               </a:rPr>
               <a:t>165억</a:t>
             </a:r>
-            <a:endParaRPr lang="en-US" sz="2200" dirty="0"/>
+            <a:endParaRPr lang="en-US" sz="2100" dirty="0"/>
           </a:p>
         </p:txBody>
       </p:sp>
@@ -2630,26 +2541,26 @@
         </p:nvSpPr>
         <p:spPr>
           <a:xfrm>
-            <a:off x="566928" y="786384"/>
-            <a:ext cx="5486400" cy="219456"/>
-          </a:xfrm>
-          <a:prstGeom prst="rect">
-            <a:avLst/>
-          </a:prstGeom>
-          <a:noFill/>
-          <a:ln/>
-        </p:spPr>
-        <p:txBody>
-          <a:bodyPr wrap="square" lIns="0" tIns="0" rIns="0" bIns="0" rtlCol="0" anchor="ctr"/>
-          <a:lstStyle/>
-          <a:p>
-            <a:pPr indent="0" marL="0">
-              <a:buNone/>
-            </a:pPr>
-            <a:r>
-              <a:rPr lang="en-US" sz="950" dirty="0">
-                <a:solidFill>
-                  <a:srgbClr val="718096"/>
+            <a:off x="566928" y="1700784"/>
+            <a:ext cx="7315200" cy="256032"/>
+          </a:xfrm>
+          <a:prstGeom prst="rect">
+            <a:avLst/>
+          </a:prstGeom>
+          <a:noFill/>
+          <a:ln/>
+        </p:spPr>
+        <p:txBody>
+          <a:bodyPr wrap="square" lIns="0" tIns="0" rIns="0" bIns="0" rtlCol="0" anchor="ctr"/>
+          <a:lstStyle/>
+          <a:p>
+            <a:pPr algn="l" indent="0" marL="0">
+              <a:buNone/>
+            </a:pPr>
+            <a:r>
+              <a:rPr lang="en-US" sz="1100" dirty="0">
+                <a:solidFill>
+                  <a:srgbClr val="E2E8F0"/>
                 </a:solidFill>
                 <a:latin typeface="Pretendard" pitchFamily="34" charset="0"/>
                 <a:ea typeface="Pretendard" pitchFamily="34" charset="-122"/>
@@ -2657,7 +2568,7 @@
               </a:rPr>
               <a:t>리얼티코리아</a:t>
             </a:r>
-            <a:endParaRPr lang="en-US" sz="950" dirty="0"/>
+            <a:endParaRPr lang="en-US" sz="1100" dirty="0"/>
           </a:p>
         </p:txBody>
       </p:sp>
@@ -2863,7 +2774,7 @@
                 <a:ea typeface="Arial" pitchFamily="34" charset="-122"/>
                 <a:cs typeface="Arial" pitchFamily="34" charset="-120"/>
               </a:rPr>
-              <a:t>09</a:t>
+              <a:t>10</a:t>
             </a:r>
             <a:endParaRPr lang="en-US" sz="1300" dirty="0"/>
           </a:p>
@@ -2902,7 +2813,7 @@
                 <a:ea typeface="Arial" pitchFamily="34" charset="-122"/>
                 <a:cs typeface="Arial" pitchFamily="34" charset="-120"/>
               </a:rPr>
-              <a:t>Sensitivity</a:t>
+              <a:t>Thesis</a:t>
             </a:r>
             <a:endParaRPr lang="en-US" sz="950" dirty="0"/>
           </a:p>
@@ -2941,7 +2852,7 @@
                 <a:ea typeface="Pretendard" pitchFamily="34" charset="-122"/>
                 <a:cs typeface="Pretendard" pitchFamily="34" charset="-120"/>
               </a:rPr>
-              <a:t>수익률 민감도</a:t>
+              <a:t>투자 논거</a:t>
             </a:r>
             <a:endParaRPr lang="en-US" sz="2300" dirty="0"/>
           </a:p>
@@ -2949,14 +2860,41 @@
       </p:sp>
       <p:sp>
         <p:nvSpPr>
-          <p:cNvPr id="6" name="Text 4"/>
-          <p:cNvSpPr/>
-          <p:nvPr/>
-        </p:nvSpPr>
-        <p:spPr>
-          <a:xfrm>
-            <a:off x="566928" y="1325880"/>
-            <a:ext cx="11057839" cy="237744"/>
+          <p:cNvPr id="6" name="Shape 4"/>
+          <p:cNvSpPr/>
+          <p:nvPr/>
+        </p:nvSpPr>
+        <p:spPr>
+          <a:xfrm>
+            <a:off x="566928" y="4983480"/>
+            <a:ext cx="11057839" cy="804672"/>
+          </a:xfrm>
+          <a:prstGeom prst="roundRect">
+            <a:avLst>
+              <a:gd name="adj" fmla="val 6818"/>
+            </a:avLst>
+          </a:prstGeom>
+          <a:solidFill>
+            <a:srgbClr val="F3EBDA"/>
+          </a:solidFill>
+          <a:ln w="10160">
+            <a:solidFill>
+              <a:srgbClr val="D9B668"/>
+            </a:solidFill>
+            <a:prstDash val="solid"/>
+          </a:ln>
+        </p:spPr>
+      </p:sp>
+      <p:sp>
+        <p:nvSpPr>
+          <p:cNvPr id="7" name="Text 5"/>
+          <p:cNvSpPr/>
+          <p:nvPr/>
+        </p:nvSpPr>
+        <p:spPr>
+          <a:xfrm>
+            <a:off x="749808" y="5093208"/>
+            <a:ext cx="1691640" cy="256032"/>
           </a:xfrm>
           <a:prstGeom prst="rect">
             <a:avLst/>
@@ -2972,95 +2910,30 @@
               <a:buNone/>
             </a:pPr>
             <a:r>
-              <a:rPr lang="en-US" sz="1100" b="1" dirty="0">
-                <a:solidFill>
-                  <a:srgbClr val="10161F"/>
+              <a:rPr lang="en-US" sz="1050" b="1" dirty="0">
+                <a:solidFill>
+                  <a:srgbClr val="977024"/>
                 </a:solidFill>
                 <a:latin typeface="Pretendard" pitchFamily="34" charset="0"/>
                 <a:ea typeface="Pretendard" pitchFamily="34" charset="-122"/>
                 <a:cs typeface="Pretendard" pitchFamily="34" charset="-120"/>
               </a:rPr>
-              <a:t>수익률 민감도 분석</a:t>
-            </a:r>
-            <a:endParaRPr lang="en-US" sz="1100" dirty="0"/>
-          </a:p>
-        </p:txBody>
-      </p:sp>
-      <p:sp>
-        <p:nvSpPr>
-          <p:cNvPr id="7" name="Shape 5"/>
-          <p:cNvSpPr/>
-          <p:nvPr/>
-        </p:nvSpPr>
-        <p:spPr>
-          <a:xfrm>
-            <a:off x="566928" y="1737360"/>
-            <a:ext cx="11057839" cy="0"/>
-          </a:xfrm>
-          <a:prstGeom prst="line">
-            <a:avLst/>
-          </a:prstGeom>
-          <a:noFill/>
-          <a:ln w="19050">
-            <a:solidFill>
-              <a:srgbClr val="B98A2E"/>
-            </a:solidFill>
-            <a:prstDash val="solid"/>
-          </a:ln>
-        </p:spPr>
-      </p:sp>
-      <p:sp>
-        <p:nvSpPr>
-          <p:cNvPr id="8" name="Shape 6"/>
-          <p:cNvSpPr/>
-          <p:nvPr/>
-        </p:nvSpPr>
-        <p:spPr>
-          <a:xfrm>
-            <a:off x="566928" y="2057400"/>
-            <a:ext cx="11057839" cy="1280160"/>
-          </a:xfrm>
-          <a:prstGeom prst="roundRect">
-            <a:avLst>
-              <a:gd name="adj" fmla="val 4286"/>
-            </a:avLst>
-          </a:prstGeom>
-          <a:solidFill>
-            <a:srgbClr val="BEE3F8"/>
-          </a:solidFill>
-          <a:ln/>
-        </p:spPr>
-      </p:sp>
-      <p:sp>
-        <p:nvSpPr>
-          <p:cNvPr id="9" name="Shape 7"/>
-          <p:cNvSpPr/>
-          <p:nvPr/>
-        </p:nvSpPr>
-        <p:spPr>
-          <a:xfrm>
-            <a:off x="566928" y="2112264"/>
-            <a:ext cx="36576" cy="1170432"/>
-          </a:xfrm>
-          <a:prstGeom prst="rect">
-            <a:avLst/>
-          </a:prstGeom>
-          <a:solidFill>
-            <a:srgbClr val="2B6CB0"/>
-          </a:solidFill>
-          <a:ln/>
-        </p:spPr>
-      </p:sp>
-      <p:sp>
-        <p:nvSpPr>
-          <p:cNvPr id="10" name="Text 8"/>
-          <p:cNvSpPr/>
-          <p:nvPr/>
-        </p:nvSpPr>
-        <p:spPr>
-          <a:xfrm>
-            <a:off x="749808" y="2167128"/>
-            <a:ext cx="10728655" cy="201168"/>
+              <a:t>종합 가치 제안</a:t>
+            </a:r>
+            <a:endParaRPr lang="en-US" sz="1050" dirty="0"/>
+          </a:p>
+        </p:txBody>
+      </p:sp>
+      <p:sp>
+        <p:nvSpPr>
+          <p:cNvPr id="8" name="Text 6"/>
+          <p:cNvSpPr/>
+          <p:nvPr/>
+        </p:nvSpPr>
+        <p:spPr>
+          <a:xfrm>
+            <a:off x="2487168" y="5056632"/>
+            <a:ext cx="8954719" cy="658368"/>
           </a:xfrm>
           <a:prstGeom prst="rect">
             <a:avLst/>
@@ -3073,98 +2946,59 @@
           <a:lstStyle/>
           <a:p>
             <a:pPr indent="0" marL="0">
-              <a:buNone/>
-            </a:pPr>
-            <a:r>
-              <a:rPr lang="en-US" sz="1050" b="1" dirty="0">
-                <a:solidFill>
-                  <a:srgbClr val="2B6CB0"/>
+              <a:lnSpc>
+                <a:spcPct val="125000"/>
+              </a:lnSpc>
+              <a:buNone/>
+            </a:pPr>
+            <a:r>
+              <a:rPr lang="en-US" sz="1100" dirty="0">
+                <a:solidFill>
+                  <a:srgbClr val="10161F"/>
                 </a:solidFill>
                 <a:latin typeface="Pretendard" pitchFamily="34" charset="0"/>
                 <a:ea typeface="Pretendard" pitchFamily="34" charset="-122"/>
                 <a:cs typeface="Pretendard" pitchFamily="34" charset="-120"/>
               </a:rPr>
-              <a:t>주의</a:t>
-            </a:r>
-            <a:endParaRPr lang="en-US" sz="1050" dirty="0"/>
-          </a:p>
-        </p:txBody>
-      </p:sp>
-      <p:sp>
-        <p:nvSpPr>
-          <p:cNvPr id="11" name="Text 9"/>
-          <p:cNvSpPr/>
-          <p:nvPr/>
-        </p:nvSpPr>
-        <p:spPr>
-          <a:xfrm>
-            <a:off x="749808" y="2386584"/>
-            <a:ext cx="10728655" cy="877824"/>
-          </a:xfrm>
-          <a:prstGeom prst="rect">
-            <a:avLst/>
-          </a:prstGeom>
-          <a:noFill/>
-          <a:ln/>
-        </p:spPr>
-        <p:txBody>
-          <a:bodyPr wrap="square" lIns="0" tIns="0" rIns="0" bIns="0" rtlCol="0" anchor="t"/>
+              <a:t>관점에서 안정적 월 임대수익과 우량 메디컬 테넌트를 보유한 핵심 투자 자산입니다.</a:t>
+            </a:r>
+            <a:endParaRPr lang="en-US" sz="1100" dirty="0"/>
+          </a:p>
+        </p:txBody>
+      </p:sp>
+      <p:sp>
+        <p:nvSpPr>
+          <p:cNvPr id="9" name="Text 7"/>
+          <p:cNvSpPr/>
+          <p:nvPr/>
+        </p:nvSpPr>
+        <p:spPr>
+          <a:xfrm>
+            <a:off x="566928" y="6382512"/>
+            <a:ext cx="7315200" cy="219456"/>
+          </a:xfrm>
+          <a:prstGeom prst="rect">
+            <a:avLst/>
+          </a:prstGeom>
+          <a:noFill/>
+          <a:ln/>
+        </p:spPr>
+        <p:txBody>
+          <a:bodyPr wrap="square" lIns="0" tIns="0" rIns="0" bIns="0" rtlCol="0" anchor="ctr"/>
           <a:lstStyle/>
           <a:p>
             <a:pPr indent="0" marL="0">
-              <a:lnSpc>
-                <a:spcPct val="120000"/>
-              </a:lnSpc>
-              <a:buNone/>
-            </a:pPr>
-            <a:r>
-              <a:rPr lang="en-US" sz="930" dirty="0">
-                <a:solidFill>
-                  <a:srgbClr val="10161F"/>
+              <a:buNone/>
+            </a:pPr>
+            <a:r>
+              <a:rPr lang="en-US" sz="800" dirty="0">
+                <a:solidFill>
+                  <a:srgbClr val="718096"/>
                 </a:solidFill>
                 <a:latin typeface="Pretendard" pitchFamily="34" charset="0"/>
                 <a:ea typeface="Pretendard" pitchFamily="34" charset="-122"/>
                 <a:cs typeface="Pretendard" pitchFamily="34" charset="-120"/>
               </a:rPr>
-              <a:t>실제 민감도는 Pro IM 상세 정보 입력 후 산출됩니다.</a:t>
-            </a:r>
-            <a:endParaRPr lang="en-US" sz="930" dirty="0"/>
-          </a:p>
-        </p:txBody>
-      </p:sp>
-      <p:sp>
-        <p:nvSpPr>
-          <p:cNvPr id="12" name="Text 10"/>
-          <p:cNvSpPr/>
-          <p:nvPr/>
-        </p:nvSpPr>
-        <p:spPr>
-          <a:xfrm>
-            <a:off x="566928" y="6382512"/>
-            <a:ext cx="7315200" cy="219456"/>
-          </a:xfrm>
-          <a:prstGeom prst="rect">
-            <a:avLst/>
-          </a:prstGeom>
-          <a:noFill/>
-          <a:ln/>
-        </p:spPr>
-        <p:txBody>
-          <a:bodyPr wrap="square" lIns="0" tIns="0" rIns="0" bIns="0" rtlCol="0" anchor="ctr"/>
-          <a:lstStyle/>
-          <a:p>
-            <a:pPr indent="0" marL="0">
-              <a:buNone/>
-            </a:pPr>
-            <a:r>
-              <a:rPr lang="en-US" sz="800" dirty="0">
-                <a:solidFill>
-                  <a:srgbClr val="718096"/>
-                </a:solidFill>
-                <a:latin typeface="Pretendard" pitchFamily="34" charset="0"/>
-                <a:ea typeface="Pretendard" pitchFamily="34" charset="-122"/>
-                <a:cs typeface="Pretendard" pitchFamily="34" charset="-120"/>
-              </a:rPr>
               <a:t>크리딜   |   </a:t>
             </a:r>
             <a:endParaRPr lang="en-US" sz="800" dirty="0"/>
@@ -3173,7 +3007,7 @@
       </p:sp>
       <p:sp>
         <p:nvSpPr>
-          <p:cNvPr id="13" name="Text 11"/>
+          <p:cNvPr id="10" name="Text 8"/>
           <p:cNvSpPr/>
           <p:nvPr/>
         </p:nvSpPr>
@@ -3204,7 +3038,7 @@
                 <a:ea typeface="Arial" pitchFamily="34" charset="-122"/>
                 <a:cs typeface="Arial" pitchFamily="34" charset="-120"/>
               </a:rPr>
-              <a:t>9</a:t>
+              <a:t>10</a:t>
             </a:r>
             <a:endParaRPr lang="en-US" sz="900" dirty="0"/>
           </a:p>
@@ -3295,7 +3129,7 @@
                 <a:ea typeface="Arial" pitchFamily="34" charset="-122"/>
                 <a:cs typeface="Arial" pitchFamily="34" charset="-120"/>
               </a:rPr>
-              <a:t>10</a:t>
+              <a:t>11</a:t>
             </a:r>
             <a:endParaRPr lang="en-US" sz="1300" dirty="0"/>
           </a:p>
@@ -3334,7 +3168,7 @@
                 <a:ea typeface="Arial" pitchFamily="34" charset="-122"/>
                 <a:cs typeface="Arial" pitchFamily="34" charset="-120"/>
               </a:rPr>
-              <a:t>Thesis</a:t>
+              <a:t>Risk</a:t>
             </a:r>
             <a:endParaRPr lang="en-US" sz="950" dirty="0"/>
           </a:p>
@@ -3373,7 +3207,7 @@
                 <a:ea typeface="Pretendard" pitchFamily="34" charset="-122"/>
                 <a:cs typeface="Pretendard" pitchFamily="34" charset="-120"/>
               </a:rPr>
-              <a:t>투자 포인트</a:t>
+              <a:t>리스크</a:t>
             </a:r>
             <a:endParaRPr lang="en-US" sz="2300" dirty="0"/>
           </a:p>
@@ -3387,20 +3221,20 @@
         </p:nvSpPr>
         <p:spPr>
           <a:xfrm>
-            <a:off x="566928" y="4983480"/>
-            <a:ext cx="11057839" cy="804672"/>
+            <a:off x="566928" y="1417320"/>
+            <a:ext cx="5400904" cy="3657600"/>
           </a:xfrm>
           <a:prstGeom prst="roundRect">
             <a:avLst>
-              <a:gd name="adj" fmla="val 6818"/>
+              <a:gd name="adj" fmla="val 1500"/>
             </a:avLst>
           </a:prstGeom>
           <a:solidFill>
-            <a:srgbClr val="F3EBDA"/>
+            <a:srgbClr val="F7FAFC"/>
           </a:solidFill>
-          <a:ln w="10160">
+          <a:ln w="6350">
             <a:solidFill>
-              <a:srgbClr val="D9B668"/>
+              <a:srgbClr val="CBD5E0"/>
             </a:solidFill>
             <a:prstDash val="solid"/>
           </a:ln>
@@ -3408,14 +3242,34 @@
       </p:sp>
       <p:sp>
         <p:nvSpPr>
-          <p:cNvPr id="7" name="Text 5"/>
-          <p:cNvSpPr/>
-          <p:nvPr/>
-        </p:nvSpPr>
-        <p:spPr>
-          <a:xfrm>
-            <a:off x="749808" y="5093208"/>
-            <a:ext cx="1691640" cy="256032"/>
+          <p:cNvPr id="7" name="Shape 5"/>
+          <p:cNvSpPr/>
+          <p:nvPr/>
+        </p:nvSpPr>
+        <p:spPr>
+          <a:xfrm>
+            <a:off x="566928" y="1417320"/>
+            <a:ext cx="5400904" cy="45720"/>
+          </a:xfrm>
+          <a:prstGeom prst="rect">
+            <a:avLst/>
+          </a:prstGeom>
+          <a:solidFill>
+            <a:srgbClr val="B98A2E"/>
+          </a:solidFill>
+          <a:ln/>
+        </p:spPr>
+      </p:sp>
+      <p:sp>
+        <p:nvSpPr>
+          <p:cNvPr id="8" name="Text 6"/>
+          <p:cNvSpPr/>
+          <p:nvPr/>
+        </p:nvSpPr>
+        <p:spPr>
+          <a:xfrm>
+            <a:off x="795528" y="1618488"/>
+            <a:ext cx="4943704" cy="292608"/>
           </a:xfrm>
           <a:prstGeom prst="rect">
             <a:avLst/>
@@ -3431,7 +3285,7 @@
               <a:buNone/>
             </a:pPr>
             <a:r>
-              <a:rPr lang="en-US" sz="1050" b="1" dirty="0">
+              <a:rPr lang="en-US" sz="1350" b="1" dirty="0">
                 <a:solidFill>
                   <a:srgbClr val="977024"/>
                 </a:solidFill>
@@ -3439,38 +3293,82 @@
                 <a:ea typeface="Pretendard" pitchFamily="34" charset="-122"/>
                 <a:cs typeface="Pretendard" pitchFamily="34" charset="-120"/>
               </a:rPr>
-              <a:t>종합 가치 제안</a:t>
-            </a:r>
-            <a:endParaRPr lang="en-US" sz="1050" dirty="0"/>
-          </a:p>
-        </p:txBody>
-      </p:sp>
-      <p:sp>
-        <p:nvSpPr>
-          <p:cNvPr id="8" name="Text 6"/>
-          <p:cNvSpPr/>
-          <p:nvPr/>
-        </p:nvSpPr>
-        <p:spPr>
-          <a:xfrm>
-            <a:off x="2487168" y="5056632"/>
-            <a:ext cx="8954719" cy="658368"/>
-          </a:xfrm>
-          <a:prstGeom prst="rect">
-            <a:avLst/>
-          </a:prstGeom>
-          <a:noFill/>
-          <a:ln/>
-        </p:spPr>
-        <p:txBody>
-          <a:bodyPr wrap="square" lIns="0" tIns="0" rIns="0" bIns="0" rtlCol="0" anchor="ctr"/>
+              <a:t>메디컬 단일업종 집중</a:t>
+            </a:r>
+            <a:endParaRPr lang="en-US" sz="1350" dirty="0"/>
+          </a:p>
+        </p:txBody>
+      </p:sp>
+      <p:sp>
+        <p:nvSpPr>
+          <p:cNvPr id="9" name="Text 7"/>
+          <p:cNvSpPr/>
+          <p:nvPr/>
+        </p:nvSpPr>
+        <p:spPr>
+          <a:xfrm>
+            <a:off x="795528" y="1947672"/>
+            <a:ext cx="4943704" cy="365760"/>
+          </a:xfrm>
+          <a:prstGeom prst="rect">
+            <a:avLst/>
+          </a:prstGeom>
+          <a:noFill/>
+          <a:ln/>
+        </p:spPr>
+        <p:txBody>
+          <a:bodyPr wrap="square" lIns="0" tIns="0" rIns="0" bIns="0" rtlCol="0" anchor="ctr">
+            <a:normAutofit/>
+          </a:bodyPr>
           <a:lstStyle/>
           <a:p>
             <a:pPr indent="0" marL="0">
+              <a:buNone/>
+            </a:pPr>
+            <a:r>
+              <a:rPr lang="en-US" sz="1250" b="1" dirty="0">
+                <a:solidFill>
+                  <a:srgbClr val="10161F"/>
+                </a:solidFill>
+                <a:latin typeface="Pretendard" pitchFamily="34" charset="0"/>
+                <a:ea typeface="Pretendard" pitchFamily="34" charset="-122"/>
+                <a:cs typeface="Pretendard" pitchFamily="34" charset="-120"/>
+              </a:rPr>
+              <a:t>전층 의료</a:t>
+            </a:r>
+            <a:endParaRPr lang="en-US" sz="1250" dirty="0"/>
+          </a:p>
+        </p:txBody>
+      </p:sp>
+      <p:sp>
+        <p:nvSpPr>
+          <p:cNvPr id="10" name="Text 8"/>
+          <p:cNvSpPr/>
+          <p:nvPr/>
+        </p:nvSpPr>
+        <p:spPr>
+          <a:xfrm>
+            <a:off x="795528" y="2377440"/>
+            <a:ext cx="4943704" cy="2606040"/>
+          </a:xfrm>
+          <a:prstGeom prst="rect">
+            <a:avLst/>
+          </a:prstGeom>
+          <a:noFill/>
+          <a:ln/>
+        </p:spPr>
+        <p:txBody>
+          <a:bodyPr wrap="square" lIns="0" tIns="0" rIns="0" bIns="0" rtlCol="0" anchor="t">
+            <a:normAutofit/>
+          </a:bodyPr>
+          <a:lstStyle/>
+          <a:p>
+            <a:pPr marL="342900" indent="-342900">
               <a:lnSpc>
                 <a:spcPct val="125000"/>
               </a:lnSpc>
-              <a:buNone/>
+              <a:buSzPct val="100000"/>
+              <a:buChar char="•"/>
             </a:pPr>
             <a:r>
               <a:rPr lang="en-US" sz="1100" dirty="0">
@@ -3481,7 +3379,7 @@
                 <a:ea typeface="Pretendard" pitchFamily="34" charset="-122"/>
                 <a:cs typeface="Pretendard" pitchFamily="34" charset="-120"/>
               </a:rPr>
-              <a:t>관점에서 안정적 월 임대수익과 우량 메디컬 테넌트를 보유한 핵심 투자 자산입니다.</a:t>
+              <a:t>업종 다각화 검토</a:t>
             </a:r>
             <a:endParaRPr lang="en-US" sz="1100" dirty="0"/>
           </a:p>
@@ -3489,14 +3387,61 @@
       </p:sp>
       <p:sp>
         <p:nvSpPr>
-          <p:cNvPr id="9" name="Text 7"/>
-          <p:cNvSpPr/>
-          <p:nvPr/>
-        </p:nvSpPr>
-        <p:spPr>
-          <a:xfrm>
-            <a:off x="566928" y="6382512"/>
-            <a:ext cx="7315200" cy="219456"/>
+          <p:cNvPr id="11" name="Shape 9"/>
+          <p:cNvSpPr/>
+          <p:nvPr/>
+        </p:nvSpPr>
+        <p:spPr>
+          <a:xfrm>
+            <a:off x="6223864" y="1417320"/>
+            <a:ext cx="5400904" cy="3657600"/>
+          </a:xfrm>
+          <a:prstGeom prst="roundRect">
+            <a:avLst>
+              <a:gd name="adj" fmla="val 1500"/>
+            </a:avLst>
+          </a:prstGeom>
+          <a:solidFill>
+            <a:srgbClr val="F7FAFC"/>
+          </a:solidFill>
+          <a:ln w="6350">
+            <a:solidFill>
+              <a:srgbClr val="CBD5E0"/>
+            </a:solidFill>
+            <a:prstDash val="solid"/>
+          </a:ln>
+        </p:spPr>
+      </p:sp>
+      <p:sp>
+        <p:nvSpPr>
+          <p:cNvPr id="12" name="Shape 10"/>
+          <p:cNvSpPr/>
+          <p:nvPr/>
+        </p:nvSpPr>
+        <p:spPr>
+          <a:xfrm>
+            <a:off x="6223864" y="1417320"/>
+            <a:ext cx="5400904" cy="45720"/>
+          </a:xfrm>
+          <a:prstGeom prst="rect">
+            <a:avLst/>
+          </a:prstGeom>
+          <a:solidFill>
+            <a:srgbClr val="B98A2E"/>
+          </a:solidFill>
+          <a:ln/>
+        </p:spPr>
+      </p:sp>
+      <p:sp>
+        <p:nvSpPr>
+          <p:cNvPr id="13" name="Text 11"/>
+          <p:cNvSpPr/>
+          <p:nvPr/>
+        </p:nvSpPr>
+        <p:spPr>
+          <a:xfrm>
+            <a:off x="6452464" y="1618488"/>
+            <a:ext cx="4943704" cy="292608"/>
           </a:xfrm>
           <a:prstGeom prst="rect">
             <a:avLst/>
@@ -3512,14 +3457,205 @@
               <a:buNone/>
             </a:pPr>
             <a:r>
-              <a:rPr lang="en-US" sz="800" dirty="0">
-                <a:solidFill>
-                  <a:srgbClr val="718096"/>
+              <a:rPr lang="en-US" sz="1350" b="1" dirty="0">
+                <a:solidFill>
+                  <a:srgbClr val="977024"/>
                 </a:solidFill>
                 <a:latin typeface="Pretendard" pitchFamily="34" charset="0"/>
                 <a:ea typeface="Pretendard" pitchFamily="34" charset="-122"/>
                 <a:cs typeface="Pretendard" pitchFamily="34" charset="-120"/>
               </a:rPr>
+              <a:t>금리 변동</a:t>
+            </a:r>
+            <a:endParaRPr lang="en-US" sz="1350" dirty="0"/>
+          </a:p>
+        </p:txBody>
+      </p:sp>
+      <p:sp>
+        <p:nvSpPr>
+          <p:cNvPr id="14" name="Text 12"/>
+          <p:cNvSpPr/>
+          <p:nvPr/>
+        </p:nvSpPr>
+        <p:spPr>
+          <a:xfrm>
+            <a:off x="6452464" y="1947672"/>
+            <a:ext cx="4943704" cy="365760"/>
+          </a:xfrm>
+          <a:prstGeom prst="rect">
+            <a:avLst/>
+          </a:prstGeom>
+          <a:noFill/>
+          <a:ln/>
+        </p:spPr>
+        <p:txBody>
+          <a:bodyPr wrap="square" lIns="0" tIns="0" rIns="0" bIns="0" rtlCol="0" anchor="ctr">
+            <a:normAutofit/>
+          </a:bodyPr>
+          <a:lstStyle/>
+          <a:p>
+            <a:pPr indent="0" marL="0">
+              <a:buNone/>
+            </a:pPr>
+            <a:r>
+              <a:rPr lang="en-US" sz="1250" b="1" dirty="0">
+                <a:solidFill>
+                  <a:srgbClr val="10161F"/>
+                </a:solidFill>
+                <a:latin typeface="Pretendard" pitchFamily="34" charset="0"/>
+                <a:ea typeface="Pretendard" pitchFamily="34" charset="-122"/>
+                <a:cs typeface="Pretendard" pitchFamily="34" charset="-120"/>
+              </a:rPr>
+              <a:t>4.1% 고정</a:t>
+            </a:r>
+            <a:endParaRPr lang="en-US" sz="1250" dirty="0"/>
+          </a:p>
+        </p:txBody>
+      </p:sp>
+      <p:sp>
+        <p:nvSpPr>
+          <p:cNvPr id="15" name="Text 13"/>
+          <p:cNvSpPr/>
+          <p:nvPr/>
+        </p:nvSpPr>
+        <p:spPr>
+          <a:xfrm>
+            <a:off x="6452464" y="2377440"/>
+            <a:ext cx="4943704" cy="2606040"/>
+          </a:xfrm>
+          <a:prstGeom prst="rect">
+            <a:avLst/>
+          </a:prstGeom>
+          <a:noFill/>
+          <a:ln/>
+        </p:spPr>
+        <p:txBody>
+          <a:bodyPr wrap="square" lIns="0" tIns="0" rIns="0" bIns="0" rtlCol="0" anchor="t">
+            <a:normAutofit/>
+          </a:bodyPr>
+          <a:lstStyle/>
+          <a:p>
+            <a:pPr marL="342900" indent="-342900">
+              <a:lnSpc>
+                <a:spcPct val="125000"/>
+              </a:lnSpc>
+              <a:buSzPct val="100000"/>
+              <a:buChar char="•"/>
+            </a:pPr>
+            <a:r>
+              <a:rPr lang="en-US" sz="1100" dirty="0">
+                <a:solidFill>
+                  <a:srgbClr val="10161F"/>
+                </a:solidFill>
+                <a:latin typeface="Pretendard" pitchFamily="34" charset="0"/>
+                <a:ea typeface="Pretendard" pitchFamily="34" charset="-122"/>
+                <a:cs typeface="Pretendard" pitchFamily="34" charset="-120"/>
+              </a:rPr>
+              <a:t>승계 대출 활용</a:t>
+            </a:r>
+            <a:endParaRPr lang="en-US" sz="1100" dirty="0"/>
+          </a:p>
+        </p:txBody>
+      </p:sp>
+      <p:sp>
+        <p:nvSpPr>
+          <p:cNvPr id="16" name="Shape 14"/>
+          <p:cNvSpPr/>
+          <p:nvPr/>
+        </p:nvSpPr>
+        <p:spPr>
+          <a:xfrm>
+            <a:off x="566928" y="5193792"/>
+            <a:ext cx="11057839" cy="621792"/>
+          </a:xfrm>
+          <a:prstGeom prst="roundRect">
+            <a:avLst>
+              <a:gd name="adj" fmla="val 8824"/>
+            </a:avLst>
+          </a:prstGeom>
+          <a:solidFill>
+            <a:srgbClr val="F7FAFC"/>
+          </a:solidFill>
+          <a:ln w="6350">
+            <a:solidFill>
+              <a:srgbClr val="CBD5E0"/>
+            </a:solidFill>
+            <a:prstDash val="solid"/>
+          </a:ln>
+        </p:spPr>
+      </p:sp>
+      <p:sp>
+        <p:nvSpPr>
+          <p:cNvPr id="17" name="Text 15"/>
+          <p:cNvSpPr/>
+          <p:nvPr/>
+        </p:nvSpPr>
+        <p:spPr>
+          <a:xfrm>
+            <a:off x="795528" y="5193792"/>
+            <a:ext cx="10600639" cy="621792"/>
+          </a:xfrm>
+          <a:prstGeom prst="rect">
+            <a:avLst/>
+          </a:prstGeom>
+          <a:noFill/>
+          <a:ln/>
+        </p:spPr>
+        <p:txBody>
+          <a:bodyPr wrap="square" lIns="0" tIns="0" rIns="0" bIns="0" rtlCol="0" anchor="ctr"/>
+          <a:lstStyle/>
+          <a:p>
+            <a:pPr indent="0" marL="0">
+              <a:buNone/>
+            </a:pPr>
+            <a:r>
+              <a:rPr lang="en-US" sz="1100" dirty="0">
+                <a:solidFill>
+                  <a:srgbClr val="10161F"/>
+                </a:solidFill>
+                <a:latin typeface="Pretendard" pitchFamily="34" charset="0"/>
+                <a:ea typeface="Pretendard" pitchFamily="34" charset="-122"/>
+                <a:cs typeface="Pretendard" pitchFamily="34" charset="-120"/>
+              </a:rPr>
+              <a:t>※ 본 리스크 체크는 공부 및 브로커 확인 기반이며, 매수 전 전문 실사팀(변호사/건축사)을 통한 정밀 실사가 필요합니다.</a:t>
+            </a:r>
+            <a:endParaRPr lang="en-US" sz="1100" dirty="0"/>
+          </a:p>
+        </p:txBody>
+      </p:sp>
+      <p:sp>
+        <p:nvSpPr>
+          <p:cNvPr id="18" name="Text 16"/>
+          <p:cNvSpPr/>
+          <p:nvPr/>
+        </p:nvSpPr>
+        <p:spPr>
+          <a:xfrm>
+            <a:off x="566928" y="6382512"/>
+            <a:ext cx="7315200" cy="219456"/>
+          </a:xfrm>
+          <a:prstGeom prst="rect">
+            <a:avLst/>
+          </a:prstGeom>
+          <a:noFill/>
+          <a:ln/>
+        </p:spPr>
+        <p:txBody>
+          <a:bodyPr wrap="square" lIns="0" tIns="0" rIns="0" bIns="0" rtlCol="0" anchor="ctr"/>
+          <a:lstStyle/>
+          <a:p>
+            <a:pPr indent="0" marL="0">
+              <a:buNone/>
+            </a:pPr>
+            <a:r>
+              <a:rPr lang="en-US" sz="800" dirty="0">
+                <a:solidFill>
+                  <a:srgbClr val="718096"/>
+                </a:solidFill>
+                <a:latin typeface="Pretendard" pitchFamily="34" charset="0"/>
+                <a:ea typeface="Pretendard" pitchFamily="34" charset="-122"/>
+                <a:cs typeface="Pretendard" pitchFamily="34" charset="-120"/>
+              </a:rPr>
               <a:t>크리딜   |   </a:t>
             </a:r>
             <a:endParaRPr lang="en-US" sz="800" dirty="0"/>
@@ -3528,7 +3664,7 @@
       </p:sp>
       <p:sp>
         <p:nvSpPr>
-          <p:cNvPr id="10" name="Text 8"/>
+          <p:cNvPr id="19" name="Text 17"/>
           <p:cNvSpPr/>
           <p:nvPr/>
         </p:nvSpPr>
@@ -3559,7 +3695,7 @@
                 <a:ea typeface="Arial" pitchFamily="34" charset="-122"/>
                 <a:cs typeface="Arial" pitchFamily="34" charset="-120"/>
               </a:rPr>
-              <a:t>10</a:t>
+              <a:t>11</a:t>
             </a:r>
             <a:endParaRPr lang="en-US" sz="900" dirty="0"/>
           </a:p>
@@ -3650,7 +3786,7 @@
                 <a:ea typeface="Arial" pitchFamily="34" charset="-122"/>
                 <a:cs typeface="Arial" pitchFamily="34" charset="-120"/>
               </a:rPr>
-              <a:t>11</a:t>
+              <a:t>12</a:t>
             </a:r>
             <a:endParaRPr lang="en-US" sz="1300" dirty="0"/>
           </a:p>
@@ -3689,7 +3825,7 @@
                 <a:ea typeface="Arial" pitchFamily="34" charset="-122"/>
                 <a:cs typeface="Arial" pitchFamily="34" charset="-120"/>
               </a:rPr>
-              <a:t>Risk</a:t>
+              <a:t>Checklist</a:t>
             </a:r>
             <a:endParaRPr lang="en-US" sz="950" dirty="0"/>
           </a:p>
@@ -3728,7 +3864,7 @@
                 <a:ea typeface="Pretendard" pitchFamily="34" charset="-122"/>
                 <a:cs typeface="Pretendard" pitchFamily="34" charset="-120"/>
               </a:rPr>
-              <a:t>리스크 점검</a:t>
+              <a:t>실사 체크리스트</a:t>
             </a:r>
             <a:endParaRPr lang="en-US" sz="2300" dirty="0"/>
           </a:p>
@@ -3736,26 +3872,63 @@
       </p:sp>
       <p:sp>
         <p:nvSpPr>
-          <p:cNvPr id="6" name="Shape 4"/>
-          <p:cNvSpPr/>
-          <p:nvPr/>
-        </p:nvSpPr>
-        <p:spPr>
-          <a:xfrm>
-            <a:off x="566928" y="1417320"/>
-            <a:ext cx="5400904" cy="3657600"/>
-          </a:xfrm>
-          <a:prstGeom prst="roundRect">
-            <a:avLst>
-              <a:gd name="adj" fmla="val 1500"/>
-            </a:avLst>
+          <p:cNvPr id="6" name="Text 4"/>
+          <p:cNvSpPr/>
+          <p:nvPr/>
+        </p:nvSpPr>
+        <p:spPr>
+          <a:xfrm>
+            <a:off x="566928" y="1371600"/>
+            <a:ext cx="11057839" cy="237744"/>
+          </a:xfrm>
+          <a:prstGeom prst="rect">
+            <a:avLst/>
+          </a:prstGeom>
+          <a:noFill/>
+          <a:ln/>
+        </p:spPr>
+        <p:txBody>
+          <a:bodyPr wrap="square" lIns="0" tIns="0" rIns="0" bIns="0" rtlCol="0" anchor="ctr"/>
+          <a:lstStyle/>
+          <a:p>
+            <a:pPr indent="0" marL="0">
+              <a:buNone/>
+            </a:pPr>
+            <a:r>
+              <a:rPr lang="en-US" sz="1100" b="1" dirty="0">
+                <a:solidFill>
+                  <a:srgbClr val="10161F"/>
+                </a:solidFill>
+                <a:latin typeface="Pretendard" pitchFamily="34" charset="0"/>
+                <a:ea typeface="Pretendard" pitchFamily="34" charset="-122"/>
+                <a:cs typeface="Pretendard" pitchFamily="34" charset="-120"/>
+              </a:rPr>
+              <a:t>거래 안정성 확보를 위한 필수 법률·물리·임대차 실사 점검 항목 (총 6건)</a:t>
+            </a:r>
+            <a:endParaRPr lang="en-US" sz="1100" dirty="0"/>
+          </a:p>
+        </p:txBody>
+      </p:sp>
+      <p:sp>
+        <p:nvSpPr>
+          <p:cNvPr id="7" name="Shape 5"/>
+          <p:cNvSpPr/>
+          <p:nvPr/>
+        </p:nvSpPr>
+        <p:spPr>
+          <a:xfrm>
+            <a:off x="566928" y="1719072"/>
+            <a:ext cx="5368900" cy="868680"/>
+          </a:xfrm>
+          <a:prstGeom prst="rect">
+            <a:avLst/>
           </a:prstGeom>
           <a:solidFill>
             <a:srgbClr val="F7FAFC"/>
           </a:solidFill>
           <a:ln w="6350">
             <a:solidFill>
-              <a:srgbClr val="CBD5E0"/>
+              <a:srgbClr val="D9B668"/>
             </a:solidFill>
             <a:prstDash val="solid"/>
           </a:ln>
@@ -3763,91 +3936,92 @@
       </p:sp>
       <p:sp>
         <p:nvSpPr>
-          <p:cNvPr id="7" name="Shape 5"/>
-          <p:cNvSpPr/>
-          <p:nvPr/>
-        </p:nvSpPr>
-        <p:spPr>
-          <a:xfrm>
-            <a:off x="566928" y="1417320"/>
-            <a:ext cx="5400904" cy="45720"/>
+          <p:cNvPr id="8" name="Shape 6"/>
+          <p:cNvSpPr/>
+          <p:nvPr/>
+        </p:nvSpPr>
+        <p:spPr>
+          <a:xfrm>
+            <a:off x="704088" y="1883664"/>
+            <a:ext cx="320040" cy="320040"/>
           </a:xfrm>
           <a:prstGeom prst="rect">
             <a:avLst/>
           </a:prstGeom>
           <a:solidFill>
-            <a:srgbClr val="B98A2E"/>
+            <a:srgbClr val="977024"/>
           </a:solidFill>
           <a:ln/>
         </p:spPr>
       </p:sp>
       <p:sp>
         <p:nvSpPr>
-          <p:cNvPr id="8" name="Text 6"/>
-          <p:cNvSpPr/>
-          <p:nvPr/>
-        </p:nvSpPr>
-        <p:spPr>
-          <a:xfrm>
-            <a:off x="795528" y="1618488"/>
-            <a:ext cx="4943704" cy="292608"/>
-          </a:xfrm>
-          <a:prstGeom prst="rect">
-            <a:avLst/>
-          </a:prstGeom>
-          <a:noFill/>
-          <a:ln/>
-        </p:spPr>
-        <p:txBody>
-          <a:bodyPr wrap="square" lIns="0" tIns="0" rIns="0" bIns="0" rtlCol="0" anchor="ctr"/>
-          <a:lstStyle/>
-          <a:p>
-            <a:pPr indent="0" marL="0">
-              <a:buNone/>
-            </a:pPr>
-            <a:r>
-              <a:rPr lang="en-US" sz="1350" b="1" dirty="0">
-                <a:solidFill>
-                  <a:srgbClr val="977024"/>
+          <p:cNvPr id="9" name="Text 7"/>
+          <p:cNvSpPr/>
+          <p:nvPr/>
+        </p:nvSpPr>
+        <p:spPr>
+          <a:xfrm>
+            <a:off x="704088" y="1883664"/>
+            <a:ext cx="320040" cy="320040"/>
+          </a:xfrm>
+          <a:prstGeom prst="rect">
+            <a:avLst/>
+          </a:prstGeom>
+          <a:noFill/>
+          <a:ln/>
+        </p:spPr>
+        <p:txBody>
+          <a:bodyPr wrap="square" rtlCol="0" anchor="ctr"/>
+          <a:lstStyle/>
+          <a:p>
+            <a:pPr algn="ctr" indent="0" marL="0">
+              <a:buNone/>
+            </a:pPr>
+            <a:r>
+              <a:rPr lang="en-US" sz="1100" b="1" dirty="0">
+                <a:solidFill>
+                  <a:srgbClr val="000000"/>
                 </a:solidFill>
                 <a:latin typeface="Pretendard" pitchFamily="34" charset="0"/>
                 <a:ea typeface="Pretendard" pitchFamily="34" charset="-122"/>
                 <a:cs typeface="Pretendard" pitchFamily="34" charset="-120"/>
               </a:rPr>
-              <a:t>메디컬 단일업종 집중</a:t>
-            </a:r>
-            <a:endParaRPr lang="en-US" sz="1350" dirty="0"/>
-          </a:p>
-        </p:txBody>
-      </p:sp>
-      <p:sp>
-        <p:nvSpPr>
-          <p:cNvPr id="9" name="Text 7"/>
-          <p:cNvSpPr/>
-          <p:nvPr/>
-        </p:nvSpPr>
-        <p:spPr>
-          <a:xfrm>
-            <a:off x="795528" y="1947672"/>
-            <a:ext cx="4943704" cy="365760"/>
-          </a:xfrm>
-          <a:prstGeom prst="rect">
-            <a:avLst/>
-          </a:prstGeom>
-          <a:noFill/>
-          <a:ln/>
-        </p:spPr>
-        <p:txBody>
-          <a:bodyPr wrap="square" lIns="0" tIns="0" rIns="0" bIns="0" rtlCol="0" anchor="ctr">
-            <a:normAutofit/>
-          </a:bodyPr>
+              <a:t>✓</a:t>
+            </a:r>
+            <a:endParaRPr lang="en-US" sz="1100" dirty="0"/>
+          </a:p>
+        </p:txBody>
+      </p:sp>
+      <p:sp>
+        <p:nvSpPr>
+          <p:cNvPr id="10" name="Text 8"/>
+          <p:cNvSpPr/>
+          <p:nvPr/>
+        </p:nvSpPr>
+        <p:spPr>
+          <a:xfrm>
+            <a:off x="1115568" y="1810512"/>
+            <a:ext cx="4683100" cy="722376"/>
+          </a:xfrm>
+          <a:prstGeom prst="rect">
+            <a:avLst/>
+          </a:prstGeom>
+          <a:noFill/>
+          <a:ln/>
+        </p:spPr>
+        <p:txBody>
+          <a:bodyPr wrap="square" rtlCol="0" anchor="ctr"/>
           <a:lstStyle/>
           <a:p>
             <a:pPr indent="0" marL="0">
-              <a:buNone/>
-            </a:pPr>
-            <a:r>
-              <a:rPr lang="en-US" sz="1250" b="1" dirty="0">
+              <a:lnSpc>
+                <a:spcPct val="110000"/>
+              </a:lnSpc>
+              <a:buNone/>
+            </a:pPr>
+            <a:r>
+              <a:rPr lang="en-US" sz="950" dirty="0">
                 <a:solidFill>
                   <a:srgbClr val="10161F"/>
                 </a:solidFill>
@@ -3855,54 +4029,9 @@
                 <a:ea typeface="Pretendard" pitchFamily="34" charset="-122"/>
                 <a:cs typeface="Pretendard" pitchFamily="34" charset="-120"/>
               </a:rPr>
-              <a:t>전층 의료</a:t>
-            </a:r>
-            <a:endParaRPr lang="en-US" sz="1250" dirty="0"/>
-          </a:p>
-        </p:txBody>
-      </p:sp>
-      <p:sp>
-        <p:nvSpPr>
-          <p:cNvPr id="10" name="Text 8"/>
-          <p:cNvSpPr/>
-          <p:nvPr/>
-        </p:nvSpPr>
-        <p:spPr>
-          <a:xfrm>
-            <a:off x="795528" y="2377440"/>
-            <a:ext cx="4943704" cy="2606040"/>
-          </a:xfrm>
-          <a:prstGeom prst="rect">
-            <a:avLst/>
-          </a:prstGeom>
-          <a:noFill/>
-          <a:ln/>
-        </p:spPr>
-        <p:txBody>
-          <a:bodyPr wrap="square" lIns="0" tIns="0" rIns="0" bIns="0" rtlCol="0" anchor="t">
-            <a:normAutofit/>
-          </a:bodyPr>
-          <a:lstStyle/>
-          <a:p>
-            <a:pPr marL="342900" indent="-342900">
-              <a:lnSpc>
-                <a:spcPct val="125000"/>
-              </a:lnSpc>
-              <a:buSzPct val="100000"/>
-              <a:buChar char="•"/>
-            </a:pPr>
-            <a:r>
-              <a:rPr lang="en-US" sz="1100" dirty="0">
-                <a:solidFill>
-                  <a:srgbClr val="10161F"/>
-                </a:solidFill>
-                <a:latin typeface="Pretendard" pitchFamily="34" charset="0"/>
-                <a:ea typeface="Pretendard" pitchFamily="34" charset="-122"/>
-                <a:cs typeface="Pretendard" pitchFamily="34" charset="-120"/>
-              </a:rPr>
-              <a:t>업종 다각화 검토</a:t>
-            </a:r>
-            <a:endParaRPr lang="en-US" sz="1100" dirty="0"/>
+              <a:t>등기부등본 갑구/을구 권리관계 및 근저당 채권최고액 전액 말소 조건 원본 대조</a:t>
+            </a:r>
+            <a:endParaRPr lang="en-US" sz="950" dirty="0"/>
           </a:p>
         </p:txBody>
       </p:sp>
@@ -3914,20 +4043,18 @@
         </p:nvSpPr>
         <p:spPr>
           <a:xfrm>
-            <a:off x="6223864" y="1417320"/>
-            <a:ext cx="5400904" cy="3657600"/>
-          </a:xfrm>
-          <a:prstGeom prst="roundRect">
-            <a:avLst>
-              <a:gd name="adj" fmla="val 1500"/>
-            </a:avLst>
+            <a:off x="566928" y="2715768"/>
+            <a:ext cx="5368900" cy="868680"/>
+          </a:xfrm>
+          <a:prstGeom prst="rect">
+            <a:avLst/>
           </a:prstGeom>
           <a:solidFill>
             <a:srgbClr val="F7FAFC"/>
           </a:solidFill>
           <a:ln w="6350">
             <a:solidFill>
-              <a:srgbClr val="CBD5E0"/>
+              <a:srgbClr val="D9B668"/>
             </a:solidFill>
             <a:prstDash val="solid"/>
           </a:ln>
@@ -3941,14 +4068,14 @@
         </p:nvSpPr>
         <p:spPr>
           <a:xfrm>
-            <a:off x="6223864" y="1417320"/>
-            <a:ext cx="5400904" cy="45720"/>
+            <a:off x="704088" y="2880360"/>
+            <a:ext cx="320040" cy="320040"/>
           </a:xfrm>
           <a:prstGeom prst="rect">
             <a:avLst/>
           </a:prstGeom>
           <a:solidFill>
-            <a:srgbClr val="B98A2E"/>
+            <a:srgbClr val="977024"/>
           </a:solidFill>
           <a:ln/>
         </p:spPr>
@@ -3961,34 +4088,34 @@
         </p:nvSpPr>
         <p:spPr>
           <a:xfrm>
-            <a:off x="6452464" y="1618488"/>
-            <a:ext cx="4943704" cy="292608"/>
-          </a:xfrm>
-          <a:prstGeom prst="rect">
-            <a:avLst/>
-          </a:prstGeom>
-          <a:noFill/>
-          <a:ln/>
-        </p:spPr>
-        <p:txBody>
-          <a:bodyPr wrap="square" lIns="0" tIns="0" rIns="0" bIns="0" rtlCol="0" anchor="ctr"/>
-          <a:lstStyle/>
-          <a:p>
-            <a:pPr indent="0" marL="0">
-              <a:buNone/>
-            </a:pPr>
-            <a:r>
-              <a:rPr lang="en-US" sz="1350" b="1" dirty="0">
-                <a:solidFill>
-                  <a:srgbClr val="977024"/>
+            <a:off x="704088" y="2880360"/>
+            <a:ext cx="320040" cy="320040"/>
+          </a:xfrm>
+          <a:prstGeom prst="rect">
+            <a:avLst/>
+          </a:prstGeom>
+          <a:noFill/>
+          <a:ln/>
+        </p:spPr>
+        <p:txBody>
+          <a:bodyPr wrap="square" rtlCol="0" anchor="ctr"/>
+          <a:lstStyle/>
+          <a:p>
+            <a:pPr algn="ctr" indent="0" marL="0">
+              <a:buNone/>
+            </a:pPr>
+            <a:r>
+              <a:rPr lang="en-US" sz="1100" b="1" dirty="0">
+                <a:solidFill>
+                  <a:srgbClr val="000000"/>
                 </a:solidFill>
                 <a:latin typeface="Pretendard" pitchFamily="34" charset="0"/>
                 <a:ea typeface="Pretendard" pitchFamily="34" charset="-122"/>
                 <a:cs typeface="Pretendard" pitchFamily="34" charset="-120"/>
               </a:rPr>
-              <a:t>금리 변동</a:t>
-            </a:r>
-            <a:endParaRPr lang="en-US" sz="1350" dirty="0"/>
+              <a:t>✓</a:t>
+            </a:r>
+            <a:endParaRPr lang="en-US" sz="1100" dirty="0"/>
           </a:p>
         </p:txBody>
       </p:sp>
@@ -4000,26 +4127,27 @@
         </p:nvSpPr>
         <p:spPr>
           <a:xfrm>
-            <a:off x="6452464" y="1947672"/>
-            <a:ext cx="4943704" cy="365760"/>
-          </a:xfrm>
-          <a:prstGeom prst="rect">
-            <a:avLst/>
-          </a:prstGeom>
-          <a:noFill/>
-          <a:ln/>
-        </p:spPr>
-        <p:txBody>
-          <a:bodyPr wrap="square" lIns="0" tIns="0" rIns="0" bIns="0" rtlCol="0" anchor="ctr">
-            <a:normAutofit/>
-          </a:bodyPr>
+            <a:off x="1115568" y="2807208"/>
+            <a:ext cx="4683100" cy="722376"/>
+          </a:xfrm>
+          <a:prstGeom prst="rect">
+            <a:avLst/>
+          </a:prstGeom>
+          <a:noFill/>
+          <a:ln/>
+        </p:spPr>
+        <p:txBody>
+          <a:bodyPr wrap="square" rtlCol="0" anchor="ctr"/>
           <a:lstStyle/>
           <a:p>
             <a:pPr indent="0" marL="0">
-              <a:buNone/>
-            </a:pPr>
-            <a:r>
-              <a:rPr lang="en-US" sz="1250" b="1" dirty="0">
+              <a:lnSpc>
+                <a:spcPct val="110000"/>
+              </a:lnSpc>
+              <a:buNone/>
+            </a:pPr>
+            <a:r>
+              <a:rPr lang="en-US" sz="950" dirty="0">
                 <a:solidFill>
                   <a:srgbClr val="10161F"/>
                 </a:solidFill>
@@ -4027,79 +4155,32 @@
                 <a:ea typeface="Pretendard" pitchFamily="34" charset="-122"/>
                 <a:cs typeface="Pretendard" pitchFamily="34" charset="-120"/>
               </a:rPr>
-              <a:t>4.1% 고정</a:t>
-            </a:r>
-            <a:endParaRPr lang="en-US" sz="1250" dirty="0"/>
-          </a:p>
-        </p:txBody>
-      </p:sp>
-      <p:sp>
-        <p:nvSpPr>
-          <p:cNvPr id="15" name="Text 13"/>
-          <p:cNvSpPr/>
-          <p:nvPr/>
-        </p:nvSpPr>
-        <p:spPr>
-          <a:xfrm>
-            <a:off x="6452464" y="2377440"/>
-            <a:ext cx="4943704" cy="2606040"/>
-          </a:xfrm>
-          <a:prstGeom prst="rect">
-            <a:avLst/>
-          </a:prstGeom>
-          <a:noFill/>
-          <a:ln/>
-        </p:spPr>
-        <p:txBody>
-          <a:bodyPr wrap="square" lIns="0" tIns="0" rIns="0" bIns="0" rtlCol="0" anchor="t">
-            <a:normAutofit/>
-          </a:bodyPr>
-          <a:lstStyle/>
-          <a:p>
-            <a:pPr marL="342900" indent="-342900">
-              <a:lnSpc>
-                <a:spcPct val="125000"/>
-              </a:lnSpc>
-              <a:buSzPct val="100000"/>
-              <a:buChar char="•"/>
-            </a:pPr>
-            <a:r>
-              <a:rPr lang="en-US" sz="1100" dirty="0">
-                <a:solidFill>
-                  <a:srgbClr val="10161F"/>
-                </a:solidFill>
-                <a:latin typeface="Pretendard" pitchFamily="34" charset="0"/>
-                <a:ea typeface="Pretendard" pitchFamily="34" charset="-122"/>
-                <a:cs typeface="Pretendard" pitchFamily="34" charset="-120"/>
-              </a:rPr>
-              <a:t>승계 대출 활용</a:t>
-            </a:r>
-            <a:endParaRPr lang="en-US" sz="1100" dirty="0"/>
-          </a:p>
-        </p:txBody>
-      </p:sp>
-      <p:sp>
-        <p:nvSpPr>
-          <p:cNvPr id="16" name="Shape 14"/>
-          <p:cNvSpPr/>
-          <p:nvPr/>
-        </p:nvSpPr>
-        <p:spPr>
-          <a:xfrm>
-            <a:off x="566928" y="5193792"/>
-            <a:ext cx="11057839" cy="621792"/>
-          </a:xfrm>
-          <a:prstGeom prst="roundRect">
-            <a:avLst>
-              <a:gd name="adj" fmla="val 8824"/>
-            </a:avLst>
+              <a:t>임대차 원본 계약서 대조 (보증금, 월임대료, 관리비 실입금 내역 및 제소전화해조서)</a:t>
+            </a:r>
+            <a:endParaRPr lang="en-US" sz="950" dirty="0"/>
+          </a:p>
+        </p:txBody>
+      </p:sp>
+      <p:sp>
+        <p:nvSpPr>
+          <p:cNvPr id="15" name="Shape 13"/>
+          <p:cNvSpPr/>
+          <p:nvPr/>
+        </p:nvSpPr>
+        <p:spPr>
+          <a:xfrm>
+            <a:off x="566928" y="3712464"/>
+            <a:ext cx="5368900" cy="868680"/>
+          </a:xfrm>
+          <a:prstGeom prst="rect">
+            <a:avLst/>
           </a:prstGeom>
           <a:solidFill>
             <a:srgbClr val="F7FAFC"/>
           </a:solidFill>
           <a:ln w="6350">
             <a:solidFill>
-              <a:srgbClr val="CBD5E0"/>
+              <a:srgbClr val="D9B668"/>
             </a:solidFill>
             <a:prstDash val="solid"/>
           </a:ln>
@@ -4107,38 +4188,58 @@
       </p:sp>
       <p:sp>
         <p:nvSpPr>
+          <p:cNvPr id="16" name="Shape 14"/>
+          <p:cNvSpPr/>
+          <p:nvPr/>
+        </p:nvSpPr>
+        <p:spPr>
+          <a:xfrm>
+            <a:off x="704088" y="3877056"/>
+            <a:ext cx="320040" cy="320040"/>
+          </a:xfrm>
+          <a:prstGeom prst="rect">
+            <a:avLst/>
+          </a:prstGeom>
+          <a:solidFill>
+            <a:srgbClr val="977024"/>
+          </a:solidFill>
+          <a:ln/>
+        </p:spPr>
+      </p:sp>
+      <p:sp>
+        <p:nvSpPr>
           <p:cNvPr id="17" name="Text 15"/>
           <p:cNvSpPr/>
           <p:nvPr/>
         </p:nvSpPr>
         <p:spPr>
           <a:xfrm>
-            <a:off x="795528" y="5193792"/>
-            <a:ext cx="10600639" cy="621792"/>
-          </a:xfrm>
-          <a:prstGeom prst="rect">
-            <a:avLst/>
-          </a:prstGeom>
-          <a:noFill/>
-          <a:ln/>
-        </p:spPr>
-        <p:txBody>
-          <a:bodyPr wrap="square" lIns="0" tIns="0" rIns="0" bIns="0" rtlCol="0" anchor="ctr"/>
-          <a:lstStyle/>
-          <a:p>
-            <a:pPr indent="0" marL="0">
-              <a:buNone/>
-            </a:pPr>
-            <a:r>
-              <a:rPr lang="en-US" sz="1100" dirty="0">
-                <a:solidFill>
-                  <a:srgbClr val="10161F"/>
+            <a:off x="704088" y="3877056"/>
+            <a:ext cx="320040" cy="320040"/>
+          </a:xfrm>
+          <a:prstGeom prst="rect">
+            <a:avLst/>
+          </a:prstGeom>
+          <a:noFill/>
+          <a:ln/>
+        </p:spPr>
+        <p:txBody>
+          <a:bodyPr wrap="square" rtlCol="0" anchor="ctr"/>
+          <a:lstStyle/>
+          <a:p>
+            <a:pPr algn="ctr" indent="0" marL="0">
+              <a:buNone/>
+            </a:pPr>
+            <a:r>
+              <a:rPr lang="en-US" sz="1100" b="1" dirty="0">
+                <a:solidFill>
+                  <a:srgbClr val="000000"/>
                 </a:solidFill>
                 <a:latin typeface="Pretendard" pitchFamily="34" charset="0"/>
                 <a:ea typeface="Pretendard" pitchFamily="34" charset="-122"/>
                 <a:cs typeface="Pretendard" pitchFamily="34" charset="-120"/>
               </a:rPr>
-              <a:t>※ 본 리스크 체크는 공부 및 브로커 확인 기반이며, 매수 전 전문 실사팀(변호사/건축사)을 통한 정밀 실사가 필요합니다.</a:t>
+              <a:t>✓</a:t>
             </a:r>
             <a:endParaRPr lang="en-US" sz="1100" dirty="0"/>
           </a:p>
@@ -4152,31 +4253,510 @@
         </p:nvSpPr>
         <p:spPr>
           <a:xfrm>
-            <a:off x="566928" y="6382512"/>
-            <a:ext cx="7315200" cy="219456"/>
-          </a:xfrm>
-          <a:prstGeom prst="rect">
-            <a:avLst/>
-          </a:prstGeom>
-          <a:noFill/>
-          <a:ln/>
-        </p:spPr>
-        <p:txBody>
-          <a:bodyPr wrap="square" lIns="0" tIns="0" rIns="0" bIns="0" rtlCol="0" anchor="ctr"/>
+            <a:off x="1115568" y="3803904"/>
+            <a:ext cx="4683100" cy="722376"/>
+          </a:xfrm>
+          <a:prstGeom prst="rect">
+            <a:avLst/>
+          </a:prstGeom>
+          <a:noFill/>
+          <a:ln/>
+        </p:spPr>
+        <p:txBody>
+          <a:bodyPr wrap="square" rtlCol="0" anchor="ctr"/>
           <a:lstStyle/>
           <a:p>
             <a:pPr indent="0" marL="0">
-              <a:buNone/>
-            </a:pPr>
-            <a:r>
-              <a:rPr lang="en-US" sz="800" dirty="0">
-                <a:solidFill>
-                  <a:srgbClr val="718096"/>
+              <a:lnSpc>
+                <a:spcPct val="110000"/>
+              </a:lnSpc>
+              <a:buNone/>
+            </a:pPr>
+            <a:r>
+              <a:rPr lang="en-US" sz="950" dirty="0">
+                <a:solidFill>
+                  <a:srgbClr val="10161F"/>
                 </a:solidFill>
                 <a:latin typeface="Pretendard" pitchFamily="34" charset="0"/>
                 <a:ea typeface="Pretendard" pitchFamily="34" charset="-122"/>
                 <a:cs typeface="Pretendard" pitchFamily="34" charset="-120"/>
               </a:rPr>
+              <a:t>건축물대장상 위반건축물 등재 여부 및 불법 증축·용도변경 이행강제금 납부 이력 점검</a:t>
+            </a:r>
+            <a:endParaRPr lang="en-US" sz="950" dirty="0"/>
+          </a:p>
+        </p:txBody>
+      </p:sp>
+      <p:sp>
+        <p:nvSpPr>
+          <p:cNvPr id="19" name="Shape 17"/>
+          <p:cNvSpPr/>
+          <p:nvPr/>
+        </p:nvSpPr>
+        <p:spPr>
+          <a:xfrm>
+            <a:off x="6255868" y="1719072"/>
+            <a:ext cx="5368900" cy="868680"/>
+          </a:xfrm>
+          <a:prstGeom prst="rect">
+            <a:avLst/>
+          </a:prstGeom>
+          <a:solidFill>
+            <a:srgbClr val="F7FAFC"/>
+          </a:solidFill>
+          <a:ln w="6350">
+            <a:solidFill>
+              <a:srgbClr val="D9B668"/>
+            </a:solidFill>
+            <a:prstDash val="solid"/>
+          </a:ln>
+        </p:spPr>
+      </p:sp>
+      <p:sp>
+        <p:nvSpPr>
+          <p:cNvPr id="20" name="Shape 18"/>
+          <p:cNvSpPr/>
+          <p:nvPr/>
+        </p:nvSpPr>
+        <p:spPr>
+          <a:xfrm>
+            <a:off x="6393028" y="1883664"/>
+            <a:ext cx="320040" cy="320040"/>
+          </a:xfrm>
+          <a:prstGeom prst="rect">
+            <a:avLst/>
+          </a:prstGeom>
+          <a:solidFill>
+            <a:srgbClr val="977024"/>
+          </a:solidFill>
+          <a:ln/>
+        </p:spPr>
+      </p:sp>
+      <p:sp>
+        <p:nvSpPr>
+          <p:cNvPr id="21" name="Text 19"/>
+          <p:cNvSpPr/>
+          <p:nvPr/>
+        </p:nvSpPr>
+        <p:spPr>
+          <a:xfrm>
+            <a:off x="6393028" y="1883664"/>
+            <a:ext cx="320040" cy="320040"/>
+          </a:xfrm>
+          <a:prstGeom prst="rect">
+            <a:avLst/>
+          </a:prstGeom>
+          <a:noFill/>
+          <a:ln/>
+        </p:spPr>
+        <p:txBody>
+          <a:bodyPr wrap="square" rtlCol="0" anchor="ctr"/>
+          <a:lstStyle/>
+          <a:p>
+            <a:pPr algn="ctr" indent="0" marL="0">
+              <a:buNone/>
+            </a:pPr>
+            <a:r>
+              <a:rPr lang="en-US" sz="1100" b="1" dirty="0">
+                <a:solidFill>
+                  <a:srgbClr val="000000"/>
+                </a:solidFill>
+                <a:latin typeface="Pretendard" pitchFamily="34" charset="0"/>
+                <a:ea typeface="Pretendard" pitchFamily="34" charset="-122"/>
+                <a:cs typeface="Pretendard" pitchFamily="34" charset="-120"/>
+              </a:rPr>
+              <a:t>✓</a:t>
+            </a:r>
+            <a:endParaRPr lang="en-US" sz="1100" dirty="0"/>
+          </a:p>
+        </p:txBody>
+      </p:sp>
+      <p:sp>
+        <p:nvSpPr>
+          <p:cNvPr id="22" name="Text 20"/>
+          <p:cNvSpPr/>
+          <p:nvPr/>
+        </p:nvSpPr>
+        <p:spPr>
+          <a:xfrm>
+            <a:off x="6804508" y="1810512"/>
+            <a:ext cx="4683100" cy="722376"/>
+          </a:xfrm>
+          <a:prstGeom prst="rect">
+            <a:avLst/>
+          </a:prstGeom>
+          <a:noFill/>
+          <a:ln/>
+        </p:spPr>
+        <p:txBody>
+          <a:bodyPr wrap="square" rtlCol="0" anchor="ctr"/>
+          <a:lstStyle/>
+          <a:p>
+            <a:pPr indent="0" marL="0">
+              <a:lnSpc>
+                <a:spcPct val="110000"/>
+              </a:lnSpc>
+              <a:buNone/>
+            </a:pPr>
+            <a:r>
+              <a:rPr lang="en-US" sz="950" dirty="0">
+                <a:solidFill>
+                  <a:srgbClr val="10161F"/>
+                </a:solidFill>
+                <a:latin typeface="Pretendard" pitchFamily="34" charset="0"/>
+                <a:ea typeface="Pretendard" pitchFamily="34" charset="-122"/>
+                <a:cs typeface="Pretendard" pitchFamily="34" charset="-120"/>
+              </a:rPr>
+              <a:t>토지이용계획확인원상 도시계획시설 저촉, 건축선 후퇴, 지구단위계획 특별계획구역 확인</a:t>
+            </a:r>
+            <a:endParaRPr lang="en-US" sz="950" dirty="0"/>
+          </a:p>
+        </p:txBody>
+      </p:sp>
+      <p:sp>
+        <p:nvSpPr>
+          <p:cNvPr id="23" name="Shape 21"/>
+          <p:cNvSpPr/>
+          <p:nvPr/>
+        </p:nvSpPr>
+        <p:spPr>
+          <a:xfrm>
+            <a:off x="6255868" y="2715768"/>
+            <a:ext cx="5368900" cy="868680"/>
+          </a:xfrm>
+          <a:prstGeom prst="rect">
+            <a:avLst/>
+          </a:prstGeom>
+          <a:solidFill>
+            <a:srgbClr val="F7FAFC"/>
+          </a:solidFill>
+          <a:ln w="6350">
+            <a:solidFill>
+              <a:srgbClr val="D9B668"/>
+            </a:solidFill>
+            <a:prstDash val="solid"/>
+          </a:ln>
+        </p:spPr>
+      </p:sp>
+      <p:sp>
+        <p:nvSpPr>
+          <p:cNvPr id="24" name="Shape 22"/>
+          <p:cNvSpPr/>
+          <p:nvPr/>
+        </p:nvSpPr>
+        <p:spPr>
+          <a:xfrm>
+            <a:off x="6393028" y="2880360"/>
+            <a:ext cx="320040" cy="320040"/>
+          </a:xfrm>
+          <a:prstGeom prst="rect">
+            <a:avLst/>
+          </a:prstGeom>
+          <a:solidFill>
+            <a:srgbClr val="977024"/>
+          </a:solidFill>
+          <a:ln/>
+        </p:spPr>
+      </p:sp>
+      <p:sp>
+        <p:nvSpPr>
+          <p:cNvPr id="25" name="Text 23"/>
+          <p:cNvSpPr/>
+          <p:nvPr/>
+        </p:nvSpPr>
+        <p:spPr>
+          <a:xfrm>
+            <a:off x="6393028" y="2880360"/>
+            <a:ext cx="320040" cy="320040"/>
+          </a:xfrm>
+          <a:prstGeom prst="rect">
+            <a:avLst/>
+          </a:prstGeom>
+          <a:noFill/>
+          <a:ln/>
+        </p:spPr>
+        <p:txBody>
+          <a:bodyPr wrap="square" rtlCol="0" anchor="ctr"/>
+          <a:lstStyle/>
+          <a:p>
+            <a:pPr algn="ctr" indent="0" marL="0">
+              <a:buNone/>
+            </a:pPr>
+            <a:r>
+              <a:rPr lang="en-US" sz="1100" b="1" dirty="0">
+                <a:solidFill>
+                  <a:srgbClr val="000000"/>
+                </a:solidFill>
+                <a:latin typeface="Pretendard" pitchFamily="34" charset="0"/>
+                <a:ea typeface="Pretendard" pitchFamily="34" charset="-122"/>
+                <a:cs typeface="Pretendard" pitchFamily="34" charset="-120"/>
+              </a:rPr>
+              <a:t>✓</a:t>
+            </a:r>
+            <a:endParaRPr lang="en-US" sz="1100" dirty="0"/>
+          </a:p>
+        </p:txBody>
+      </p:sp>
+      <p:sp>
+        <p:nvSpPr>
+          <p:cNvPr id="26" name="Text 24"/>
+          <p:cNvSpPr/>
+          <p:nvPr/>
+        </p:nvSpPr>
+        <p:spPr>
+          <a:xfrm>
+            <a:off x="6804508" y="2807208"/>
+            <a:ext cx="4683100" cy="722376"/>
+          </a:xfrm>
+          <a:prstGeom prst="rect">
+            <a:avLst/>
+          </a:prstGeom>
+          <a:noFill/>
+          <a:ln/>
+        </p:spPr>
+        <p:txBody>
+          <a:bodyPr wrap="square" rtlCol="0" anchor="ctr"/>
+          <a:lstStyle/>
+          <a:p>
+            <a:pPr indent="0" marL="0">
+              <a:lnSpc>
+                <a:spcPct val="110000"/>
+              </a:lnSpc>
+              <a:buNone/>
+            </a:pPr>
+            <a:r>
+              <a:rPr lang="en-US" sz="950" dirty="0">
+                <a:solidFill>
+                  <a:srgbClr val="10161F"/>
+                </a:solidFill>
+                <a:latin typeface="Pretendard" pitchFamily="34" charset="0"/>
+                <a:ea typeface="Pretendard" pitchFamily="34" charset="-122"/>
+                <a:cs typeface="Pretendard" pitchFamily="34" charset="-120"/>
+              </a:rPr>
+              <a:t>기계식 주차기 정기 안전점검 합격증, 승강기 검사필증, 소방 완비증명서 실물 실사</a:t>
+            </a:r>
+            <a:endParaRPr lang="en-US" sz="950" dirty="0"/>
+          </a:p>
+        </p:txBody>
+      </p:sp>
+      <p:sp>
+        <p:nvSpPr>
+          <p:cNvPr id="27" name="Shape 25"/>
+          <p:cNvSpPr/>
+          <p:nvPr/>
+        </p:nvSpPr>
+        <p:spPr>
+          <a:xfrm>
+            <a:off x="6255868" y="3712464"/>
+            <a:ext cx="5368900" cy="868680"/>
+          </a:xfrm>
+          <a:prstGeom prst="rect">
+            <a:avLst/>
+          </a:prstGeom>
+          <a:solidFill>
+            <a:srgbClr val="F7FAFC"/>
+          </a:solidFill>
+          <a:ln w="6350">
+            <a:solidFill>
+              <a:srgbClr val="D9B668"/>
+            </a:solidFill>
+            <a:prstDash val="solid"/>
+          </a:ln>
+        </p:spPr>
+      </p:sp>
+      <p:sp>
+        <p:nvSpPr>
+          <p:cNvPr id="28" name="Shape 26"/>
+          <p:cNvSpPr/>
+          <p:nvPr/>
+        </p:nvSpPr>
+        <p:spPr>
+          <a:xfrm>
+            <a:off x="6393028" y="3877056"/>
+            <a:ext cx="320040" cy="320040"/>
+          </a:xfrm>
+          <a:prstGeom prst="rect">
+            <a:avLst/>
+          </a:prstGeom>
+          <a:solidFill>
+            <a:srgbClr val="977024"/>
+          </a:solidFill>
+          <a:ln/>
+        </p:spPr>
+      </p:sp>
+      <p:sp>
+        <p:nvSpPr>
+          <p:cNvPr id="29" name="Text 27"/>
+          <p:cNvSpPr/>
+          <p:nvPr/>
+        </p:nvSpPr>
+        <p:spPr>
+          <a:xfrm>
+            <a:off x="6393028" y="3877056"/>
+            <a:ext cx="320040" cy="320040"/>
+          </a:xfrm>
+          <a:prstGeom prst="rect">
+            <a:avLst/>
+          </a:prstGeom>
+          <a:noFill/>
+          <a:ln/>
+        </p:spPr>
+        <p:txBody>
+          <a:bodyPr wrap="square" rtlCol="0" anchor="ctr"/>
+          <a:lstStyle/>
+          <a:p>
+            <a:pPr algn="ctr" indent="0" marL="0">
+              <a:buNone/>
+            </a:pPr>
+            <a:r>
+              <a:rPr lang="en-US" sz="1100" b="1" dirty="0">
+                <a:solidFill>
+                  <a:srgbClr val="000000"/>
+                </a:solidFill>
+                <a:latin typeface="Pretendard" pitchFamily="34" charset="0"/>
+                <a:ea typeface="Pretendard" pitchFamily="34" charset="-122"/>
+                <a:cs typeface="Pretendard" pitchFamily="34" charset="-120"/>
+              </a:rPr>
+              <a:t>✓</a:t>
+            </a:r>
+            <a:endParaRPr lang="en-US" sz="1100" dirty="0"/>
+          </a:p>
+        </p:txBody>
+      </p:sp>
+      <p:sp>
+        <p:nvSpPr>
+          <p:cNvPr id="30" name="Text 28"/>
+          <p:cNvSpPr/>
+          <p:nvPr/>
+        </p:nvSpPr>
+        <p:spPr>
+          <a:xfrm>
+            <a:off x="6804508" y="3803904"/>
+            <a:ext cx="4683100" cy="722376"/>
+          </a:xfrm>
+          <a:prstGeom prst="rect">
+            <a:avLst/>
+          </a:prstGeom>
+          <a:noFill/>
+          <a:ln/>
+        </p:spPr>
+        <p:txBody>
+          <a:bodyPr wrap="square" rtlCol="0" anchor="ctr"/>
+          <a:lstStyle/>
+          <a:p>
+            <a:pPr indent="0" marL="0">
+              <a:lnSpc>
+                <a:spcPct val="110000"/>
+              </a:lnSpc>
+              <a:buNone/>
+            </a:pPr>
+            <a:r>
+              <a:rPr lang="en-US" sz="950" dirty="0">
+                <a:solidFill>
+                  <a:srgbClr val="10161F"/>
+                </a:solidFill>
+                <a:latin typeface="Pretendard" pitchFamily="34" charset="0"/>
+                <a:ea typeface="Pretendard" pitchFamily="34" charset="-122"/>
+                <a:cs typeface="Pretendard" pitchFamily="34" charset="-120"/>
+              </a:rPr>
+              <a:t>정화조 용량 대비 현 업종 적합성 및 하수도 원인자부담금 추가 부과 대상 여부 확인</a:t>
+            </a:r>
+            <a:endParaRPr lang="en-US" sz="950" dirty="0"/>
+          </a:p>
+        </p:txBody>
+      </p:sp>
+      <p:sp>
+        <p:nvSpPr>
+          <p:cNvPr id="31" name="Shape 29"/>
+          <p:cNvSpPr/>
+          <p:nvPr/>
+        </p:nvSpPr>
+        <p:spPr>
+          <a:xfrm>
+            <a:off x="566928" y="5760720"/>
+            <a:ext cx="11057839" cy="594360"/>
+          </a:xfrm>
+          <a:prstGeom prst="rect">
+            <a:avLst/>
+          </a:prstGeom>
+          <a:solidFill>
+            <a:srgbClr val="D9B668"/>
+          </a:solidFill>
+          <a:ln/>
+        </p:spPr>
+      </p:sp>
+      <p:sp>
+        <p:nvSpPr>
+          <p:cNvPr id="32" name="Text 30"/>
+          <p:cNvSpPr/>
+          <p:nvPr/>
+        </p:nvSpPr>
+        <p:spPr>
+          <a:xfrm>
+            <a:off x="749808" y="5833872"/>
+            <a:ext cx="10692079" cy="448056"/>
+          </a:xfrm>
+          <a:prstGeom prst="rect">
+            <a:avLst/>
+          </a:prstGeom>
+          <a:noFill/>
+          <a:ln/>
+        </p:spPr>
+        <p:txBody>
+          <a:bodyPr wrap="square" rtlCol="0" anchor="ctr"/>
+          <a:lstStyle/>
+          <a:p>
+            <a:pPr indent="0" marL="0">
+              <a:buNone/>
+            </a:pPr>
+            <a:r>
+              <a:rPr lang="en-US" sz="950" b="1" dirty="0">
+                <a:solidFill>
+                  <a:srgbClr val="977024"/>
+                </a:solidFill>
+                <a:latin typeface="Pretendard" pitchFamily="34" charset="0"/>
+                <a:ea typeface="Pretendard" pitchFamily="34" charset="-122"/>
+                <a:cs typeface="Pretendard" pitchFamily="34" charset="-120"/>
+              </a:rPr>
+              <a:t>※ 본 체크리스트는 계약 전 매수인의 안전한 자산 인수를 위한 필수 확인 사항이며, 실사(Due Diligence) 결과에 따라 매매 조건 및 잔금 일정이 조정될 수 있습니다.</a:t>
+            </a:r>
+            <a:endParaRPr lang="en-US" sz="950" dirty="0"/>
+          </a:p>
+        </p:txBody>
+      </p:sp>
+      <p:sp>
+        <p:nvSpPr>
+          <p:cNvPr id="33" name="Text 31"/>
+          <p:cNvSpPr/>
+          <p:nvPr/>
+        </p:nvSpPr>
+        <p:spPr>
+          <a:xfrm>
+            <a:off x="566928" y="6382512"/>
+            <a:ext cx="7315200" cy="219456"/>
+          </a:xfrm>
+          <a:prstGeom prst="rect">
+            <a:avLst/>
+          </a:prstGeom>
+          <a:noFill/>
+          <a:ln/>
+        </p:spPr>
+        <p:txBody>
+          <a:bodyPr wrap="square" lIns="0" tIns="0" rIns="0" bIns="0" rtlCol="0" anchor="ctr"/>
+          <a:lstStyle/>
+          <a:p>
+            <a:pPr indent="0" marL="0">
+              <a:buNone/>
+            </a:pPr>
+            <a:r>
+              <a:rPr lang="en-US" sz="800" dirty="0">
+                <a:solidFill>
+                  <a:srgbClr val="718096"/>
+                </a:solidFill>
+                <a:latin typeface="Pretendard" pitchFamily="34" charset="0"/>
+                <a:ea typeface="Pretendard" pitchFamily="34" charset="-122"/>
+                <a:cs typeface="Pretendard" pitchFamily="34" charset="-120"/>
+              </a:rPr>
               <a:t>크리딜   |   </a:t>
             </a:r>
             <a:endParaRPr lang="en-US" sz="800" dirty="0"/>
@@ -4185,7 +4765,7 @@
       </p:sp>
       <p:sp>
         <p:nvSpPr>
-          <p:cNvPr id="19" name="Text 17"/>
+          <p:cNvPr id="34" name="Text 32"/>
           <p:cNvSpPr/>
           <p:nvPr/>
         </p:nvSpPr>
@@ -4216,7 +4796,7 @@
                 <a:ea typeface="Arial" pitchFamily="34" charset="-122"/>
                 <a:cs typeface="Arial" pitchFamily="34" charset="-120"/>
               </a:rPr>
-              <a:t>11</a:t>
+              <a:t>12</a:t>
             </a:r>
             <a:endParaRPr lang="en-US" sz="900" dirty="0"/>
           </a:p>
@@ -4307,7 +4887,7 @@
                 <a:ea typeface="Arial" pitchFamily="34" charset="-122"/>
                 <a:cs typeface="Arial" pitchFamily="34" charset="-120"/>
               </a:rPr>
-              <a:t>12</a:t>
+              <a:t>13</a:t>
             </a:r>
             <a:endParaRPr lang="en-US" sz="1300" dirty="0"/>
           </a:p>
@@ -4346,7 +4926,7 @@
                 <a:ea typeface="Arial" pitchFamily="34" charset="-122"/>
                 <a:cs typeface="Arial" pitchFamily="34" charset="-120"/>
               </a:rPr>
-              <a:t>Checklist</a:t>
+              <a:t>Process</a:t>
             </a:r>
             <a:endParaRPr lang="en-US" sz="950" dirty="0"/>
           </a:p>
@@ -4385,7 +4965,7 @@
                 <a:ea typeface="Pretendard" pitchFamily="34" charset="-122"/>
                 <a:cs typeface="Pretendard" pitchFamily="34" charset="-120"/>
               </a:rPr>
-              <a:t>실사 및 확인 필요사항</a:t>
+              <a:t>진행 절차</a:t>
             </a:r>
             <a:endParaRPr lang="en-US" sz="2300" dirty="0"/>
           </a:p>
@@ -4393,63 +4973,26 @@
       </p:sp>
       <p:sp>
         <p:nvSpPr>
-          <p:cNvPr id="6" name="Text 4"/>
-          <p:cNvSpPr/>
-          <p:nvPr/>
-        </p:nvSpPr>
-        <p:spPr>
-          <a:xfrm>
-            <a:off x="566928" y="1371600"/>
-            <a:ext cx="11057839" cy="237744"/>
-          </a:xfrm>
-          <a:prstGeom prst="rect">
-            <a:avLst/>
-          </a:prstGeom>
-          <a:noFill/>
-          <a:ln/>
-        </p:spPr>
-        <p:txBody>
-          <a:bodyPr wrap="square" lIns="0" tIns="0" rIns="0" bIns="0" rtlCol="0" anchor="ctr"/>
-          <a:lstStyle/>
-          <a:p>
-            <a:pPr indent="0" marL="0">
-              <a:buNone/>
-            </a:pPr>
-            <a:r>
-              <a:rPr lang="en-US" sz="1100" b="1" dirty="0">
-                <a:solidFill>
-                  <a:srgbClr val="10161F"/>
-                </a:solidFill>
-                <a:latin typeface="Pretendard" pitchFamily="34" charset="0"/>
-                <a:ea typeface="Pretendard" pitchFamily="34" charset="-122"/>
-                <a:cs typeface="Pretendard" pitchFamily="34" charset="-120"/>
-              </a:rPr>
-              <a:t>거래 안정성 확보를 위한 필수 법률·물리·임대차 실사 점검 항목 (총 6건)</a:t>
-            </a:r>
-            <a:endParaRPr lang="en-US" sz="1100" dirty="0"/>
-          </a:p>
-        </p:txBody>
-      </p:sp>
-      <p:sp>
-        <p:nvSpPr>
-          <p:cNvPr id="7" name="Shape 5"/>
-          <p:cNvSpPr/>
-          <p:nvPr/>
-        </p:nvSpPr>
-        <p:spPr>
-          <a:xfrm>
-            <a:off x="566928" y="1719072"/>
-            <a:ext cx="5368900" cy="868680"/>
-          </a:xfrm>
-          <a:prstGeom prst="rect">
-            <a:avLst/>
+          <p:cNvPr id="6" name="Shape 4"/>
+          <p:cNvSpPr/>
+          <p:nvPr/>
+        </p:nvSpPr>
+        <p:spPr>
+          <a:xfrm>
+            <a:off x="566928" y="1572768"/>
+            <a:ext cx="11057839" cy="3200400"/>
+          </a:xfrm>
+          <a:prstGeom prst="roundRect">
+            <a:avLst>
+              <a:gd name="adj" fmla="val 1714"/>
+            </a:avLst>
           </a:prstGeom>
           <a:solidFill>
             <a:srgbClr val="F7FAFC"/>
           </a:solidFill>
           <a:ln w="6350">
             <a:solidFill>
-              <a:srgbClr val="D9B668"/>
+              <a:srgbClr val="CBD5E0"/>
             </a:solidFill>
             <a:prstDash val="solid"/>
           </a:ln>
@@ -4457,34 +5000,73 @@
       </p:sp>
       <p:sp>
         <p:nvSpPr>
-          <p:cNvPr id="8" name="Shape 6"/>
-          <p:cNvSpPr/>
-          <p:nvPr/>
-        </p:nvSpPr>
-        <p:spPr>
-          <a:xfrm>
-            <a:off x="704088" y="1883664"/>
-            <a:ext cx="320040" cy="320040"/>
-          </a:xfrm>
-          <a:prstGeom prst="rect">
+          <p:cNvPr id="7" name="Shape 5"/>
+          <p:cNvSpPr/>
+          <p:nvPr/>
+        </p:nvSpPr>
+        <p:spPr>
+          <a:xfrm>
+            <a:off x="786384" y="1792224"/>
+            <a:ext cx="438912" cy="438912"/>
+          </a:xfrm>
+          <a:prstGeom prst="ellipse">
             <a:avLst/>
           </a:prstGeom>
           <a:solidFill>
-            <a:srgbClr val="977024"/>
+            <a:srgbClr val="B98A2E"/>
           </a:solidFill>
           <a:ln/>
         </p:spPr>
       </p:sp>
       <p:sp>
         <p:nvSpPr>
+          <p:cNvPr id="8" name="Text 6"/>
+          <p:cNvSpPr/>
+          <p:nvPr/>
+        </p:nvSpPr>
+        <p:spPr>
+          <a:xfrm>
+            <a:off x="786384" y="1792224"/>
+            <a:ext cx="438912" cy="438912"/>
+          </a:xfrm>
+          <a:prstGeom prst="rect">
+            <a:avLst/>
+          </a:prstGeom>
+          <a:noFill/>
+          <a:ln/>
+        </p:spPr>
+        <p:txBody>
+          <a:bodyPr wrap="square" lIns="0" tIns="0" rIns="0" bIns="0" rtlCol="0" anchor="ctr"/>
+          <a:lstStyle/>
+          <a:p>
+            <a:pPr algn="ctr" indent="0" marL="0">
+              <a:buNone/>
+            </a:pPr>
+            <a:r>
+              <a:rPr lang="en-US" sz="1400" b="1" dirty="0">
+                <a:solidFill>
+                  <a:srgbClr val="FFFFFF"/>
+                </a:solidFill>
+                <a:latin typeface="Arial" pitchFamily="34" charset="0"/>
+                <a:ea typeface="Arial" pitchFamily="34" charset="-122"/>
+                <a:cs typeface="Arial" pitchFamily="34" charset="-120"/>
+              </a:rPr>
+              <a:t>01</a:t>
+            </a:r>
+            <a:endParaRPr lang="en-US" sz="1400" dirty="0"/>
+          </a:p>
+        </p:txBody>
+      </p:sp>
+      <p:sp>
+        <p:nvSpPr>
           <p:cNvPr id="9" name="Text 7"/>
           <p:cNvSpPr/>
           <p:nvPr/>
         </p:nvSpPr>
         <p:spPr>
           <a:xfrm>
-            <a:off x="704088" y="1883664"/>
-            <a:ext cx="320040" cy="320040"/>
+            <a:off x="786384" y="2304288"/>
+            <a:ext cx="10618927" cy="365760"/>
           </a:xfrm>
           <a:prstGeom prst="rect">
             <a:avLst/>
@@ -4496,21 +5078,21 @@
           <a:bodyPr wrap="square" rtlCol="0" anchor="ctr"/>
           <a:lstStyle/>
           <a:p>
-            <a:pPr algn="ctr" indent="0" marL="0">
-              <a:buNone/>
-            </a:pPr>
-            <a:r>
-              <a:rPr lang="en-US" sz="1100" b="1" dirty="0">
-                <a:solidFill>
-                  <a:srgbClr val="000000"/>
+            <a:pPr indent="0" marL="0">
+              <a:buNone/>
+            </a:pPr>
+            <a:r>
+              <a:rPr lang="en-US" sz="1600" b="1" dirty="0">
+                <a:solidFill>
+                  <a:srgbClr val="10161F"/>
                 </a:solidFill>
                 <a:latin typeface="Pretendard" pitchFamily="34" charset="0"/>
                 <a:ea typeface="Pretendard" pitchFamily="34" charset="-122"/>
                 <a:cs typeface="Pretendard" pitchFamily="34" charset="-120"/>
               </a:rPr>
-              <a:t>✓</a:t>
-            </a:r>
-            <a:endParaRPr lang="en-US" sz="1100" dirty="0"/>
+              <a:t>1단계</a:t>
+            </a:r>
+            <a:endParaRPr lang="en-US" sz="1600" dirty="0"/>
           </a:p>
         </p:txBody>
       </p:sp>
@@ -4522,27 +5104,24 @@
         </p:nvSpPr>
         <p:spPr>
           <a:xfrm>
-            <a:off x="1115568" y="1828800"/>
-            <a:ext cx="4683100" cy="685800"/>
-          </a:xfrm>
-          <a:prstGeom prst="rect">
-            <a:avLst/>
-          </a:prstGeom>
-          <a:noFill/>
-          <a:ln/>
-        </p:spPr>
-        <p:txBody>
-          <a:bodyPr wrap="square" rtlCol="0" anchor="ctr"/>
+            <a:off x="786384" y="2761488"/>
+            <a:ext cx="10618927" cy="1828800"/>
+          </a:xfrm>
+          <a:prstGeom prst="rect">
+            <a:avLst/>
+          </a:prstGeom>
+          <a:noFill/>
+          <a:ln/>
+        </p:spPr>
+        <p:txBody>
+          <a:bodyPr wrap="square" rtlCol="0" anchor="t"/>
           <a:lstStyle/>
           <a:p>
             <a:pPr indent="0" marL="0">
-              <a:lnSpc>
-                <a:spcPct val="115000"/>
-              </a:lnSpc>
-              <a:buNone/>
-            </a:pPr>
-            <a:r>
-              <a:rPr lang="en-US" sz="1050" dirty="0">
+              <a:buNone/>
+            </a:pPr>
+            <a:r>
+              <a:rPr lang="en-US" sz="1100" dirty="0">
                 <a:solidFill>
                   <a:srgbClr val="10161F"/>
                 </a:solidFill>
@@ -4550,91 +5129,24 @@
                 <a:ea typeface="Pretendard" pitchFamily="34" charset="-122"/>
                 <a:cs typeface="Pretendard" pitchFamily="34" charset="-120"/>
               </a:rPr>
-              <a:t>등기부등본 갑구/을구 권리관계 및 근저당 채권최고액 전액 말소 조건 원본 대조</a:t>
-            </a:r>
-            <a:endParaRPr lang="en-US" sz="1050" dirty="0"/>
-          </a:p>
-        </p:txBody>
-      </p:sp>
-      <p:sp>
-        <p:nvSpPr>
-          <p:cNvPr id="11" name="Shape 9"/>
-          <p:cNvSpPr/>
-          <p:nvPr/>
-        </p:nvSpPr>
-        <p:spPr>
-          <a:xfrm>
-            <a:off x="566928" y="2715768"/>
-            <a:ext cx="5368900" cy="868680"/>
-          </a:xfrm>
-          <a:prstGeom prst="rect">
-            <a:avLst/>
-          </a:prstGeom>
-          <a:solidFill>
-            <a:srgbClr val="F7FAFC"/>
-          </a:solidFill>
-          <a:ln w="6350">
-            <a:solidFill>
-              <a:srgbClr val="D9B668"/>
-            </a:solidFill>
-            <a:prstDash val="solid"/>
-          </a:ln>
-        </p:spPr>
-      </p:sp>
-      <p:sp>
-        <p:nvSpPr>
-          <p:cNvPr id="12" name="Shape 10"/>
-          <p:cNvSpPr/>
-          <p:nvPr/>
-        </p:nvSpPr>
-        <p:spPr>
-          <a:xfrm>
-            <a:off x="704088" y="2880360"/>
-            <a:ext cx="320040" cy="320040"/>
-          </a:xfrm>
-          <a:prstGeom prst="rect">
-            <a:avLst/>
-          </a:prstGeom>
-          <a:solidFill>
-            <a:srgbClr val="977024"/>
-          </a:solidFill>
-          <a:ln/>
-        </p:spPr>
-      </p:sp>
-      <p:sp>
-        <p:nvSpPr>
-          <p:cNvPr id="13" name="Text 11"/>
-          <p:cNvSpPr/>
-          <p:nvPr/>
-        </p:nvSpPr>
-        <p:spPr>
-          <a:xfrm>
-            <a:off x="704088" y="2880360"/>
-            <a:ext cx="320040" cy="320040"/>
-          </a:xfrm>
-          <a:prstGeom prst="rect">
-            <a:avLst/>
-          </a:prstGeom>
-          <a:noFill/>
-          <a:ln/>
-        </p:spPr>
-        <p:txBody>
-          <a:bodyPr wrap="square" rtlCol="0" anchor="ctr"/>
-          <a:lstStyle/>
-          <a:p>
-            <a:pPr algn="ctr" indent="0" marL="0">
-              <a:buNone/>
-            </a:pPr>
-            <a:r>
-              <a:rPr lang="en-US" sz="1100" b="1" dirty="0">
-                <a:solidFill>
-                  <a:srgbClr val="000000"/>
+              <a:t>현장 실사 및 임대차계약서 원본 확인을 권장합니다.</a:t>
+            </a:r>
+            <a:endParaRPr lang="en-US" sz="1100" dirty="0"/>
+          </a:p>
+          <a:p>
+            <a:pPr indent="0" marL="0">
+              <a:buNone/>
+            </a:pPr>
+            <a:r>
+              <a:rPr lang="en-US" sz="1100" dirty="0">
+                <a:solidFill>
+                  <a:srgbClr val="10161F"/>
                 </a:solidFill>
                 <a:latin typeface="Pretendard" pitchFamily="34" charset="0"/>
                 <a:ea typeface="Pretendard" pitchFamily="34" charset="-122"/>
                 <a:cs typeface="Pretendard" pitchFamily="34" charset="-120"/>
               </a:rPr>
-              <a:t>✓</a:t>
+              <a:t>현장 실사 및 임대차계약서 원본 확인을 권장합니다.</a:t>
             </a:r>
             <a:endParaRPr lang="en-US" sz="1100" dirty="0"/>
           </a:p>
@@ -4642,642 +5154,37 @@
       </p:sp>
       <p:sp>
         <p:nvSpPr>
-          <p:cNvPr id="14" name="Text 12"/>
-          <p:cNvSpPr/>
-          <p:nvPr/>
-        </p:nvSpPr>
-        <p:spPr>
-          <a:xfrm>
-            <a:off x="1115568" y="2825496"/>
-            <a:ext cx="4683100" cy="685800"/>
-          </a:xfrm>
-          <a:prstGeom prst="rect">
-            <a:avLst/>
-          </a:prstGeom>
-          <a:noFill/>
-          <a:ln/>
-        </p:spPr>
-        <p:txBody>
-          <a:bodyPr wrap="square" rtlCol="0" anchor="ctr"/>
+          <p:cNvPr id="11" name="Text 9"/>
+          <p:cNvSpPr/>
+          <p:nvPr/>
+        </p:nvSpPr>
+        <p:spPr>
+          <a:xfrm>
+            <a:off x="566928" y="6382512"/>
+            <a:ext cx="7315200" cy="219456"/>
+          </a:xfrm>
+          <a:prstGeom prst="rect">
+            <a:avLst/>
+          </a:prstGeom>
+          <a:noFill/>
+          <a:ln/>
+        </p:spPr>
+        <p:txBody>
+          <a:bodyPr wrap="square" lIns="0" tIns="0" rIns="0" bIns="0" rtlCol="0" anchor="ctr"/>
           <a:lstStyle/>
           <a:p>
             <a:pPr indent="0" marL="0">
-              <a:lnSpc>
-                <a:spcPct val="115000"/>
-              </a:lnSpc>
-              <a:buNone/>
-            </a:pPr>
-            <a:r>
-              <a:rPr lang="en-US" sz="1050" dirty="0">
-                <a:solidFill>
-                  <a:srgbClr val="10161F"/>
+              <a:buNone/>
+            </a:pPr>
+            <a:r>
+              <a:rPr lang="en-US" sz="800" dirty="0">
+                <a:solidFill>
+                  <a:srgbClr val="718096"/>
                 </a:solidFill>
                 <a:latin typeface="Pretendard" pitchFamily="34" charset="0"/>
                 <a:ea typeface="Pretendard" pitchFamily="34" charset="-122"/>
                 <a:cs typeface="Pretendard" pitchFamily="34" charset="-120"/>
               </a:rPr>
-              <a:t>임대차 원본 계약서 대조 (보증금, 월임대료, 관리비 실입금 내역 및 제소전화해조서)</a:t>
-            </a:r>
-            <a:endParaRPr lang="en-US" sz="1050" dirty="0"/>
-          </a:p>
-        </p:txBody>
-      </p:sp>
-      <p:sp>
-        <p:nvSpPr>
-          <p:cNvPr id="15" name="Shape 13"/>
-          <p:cNvSpPr/>
-          <p:nvPr/>
-        </p:nvSpPr>
-        <p:spPr>
-          <a:xfrm>
-            <a:off x="566928" y="3712464"/>
-            <a:ext cx="5368900" cy="868680"/>
-          </a:xfrm>
-          <a:prstGeom prst="rect">
-            <a:avLst/>
-          </a:prstGeom>
-          <a:solidFill>
-            <a:srgbClr val="F7FAFC"/>
-          </a:solidFill>
-          <a:ln w="6350">
-            <a:solidFill>
-              <a:srgbClr val="D9B668"/>
-            </a:solidFill>
-            <a:prstDash val="solid"/>
-          </a:ln>
-        </p:spPr>
-      </p:sp>
-      <p:sp>
-        <p:nvSpPr>
-          <p:cNvPr id="16" name="Shape 14"/>
-          <p:cNvSpPr/>
-          <p:nvPr/>
-        </p:nvSpPr>
-        <p:spPr>
-          <a:xfrm>
-            <a:off x="704088" y="3877056"/>
-            <a:ext cx="320040" cy="320040"/>
-          </a:xfrm>
-          <a:prstGeom prst="rect">
-            <a:avLst/>
-          </a:prstGeom>
-          <a:solidFill>
-            <a:srgbClr val="977024"/>
-          </a:solidFill>
-          <a:ln/>
-        </p:spPr>
-      </p:sp>
-      <p:sp>
-        <p:nvSpPr>
-          <p:cNvPr id="17" name="Text 15"/>
-          <p:cNvSpPr/>
-          <p:nvPr/>
-        </p:nvSpPr>
-        <p:spPr>
-          <a:xfrm>
-            <a:off x="704088" y="3877056"/>
-            <a:ext cx="320040" cy="320040"/>
-          </a:xfrm>
-          <a:prstGeom prst="rect">
-            <a:avLst/>
-          </a:prstGeom>
-          <a:noFill/>
-          <a:ln/>
-        </p:spPr>
-        <p:txBody>
-          <a:bodyPr wrap="square" rtlCol="0" anchor="ctr"/>
-          <a:lstStyle/>
-          <a:p>
-            <a:pPr algn="ctr" indent="0" marL="0">
-              <a:buNone/>
-            </a:pPr>
-            <a:r>
-              <a:rPr lang="en-US" sz="1100" b="1" dirty="0">
-                <a:solidFill>
-                  <a:srgbClr val="000000"/>
-                </a:solidFill>
-                <a:latin typeface="Pretendard" pitchFamily="34" charset="0"/>
-                <a:ea typeface="Pretendard" pitchFamily="34" charset="-122"/>
-                <a:cs typeface="Pretendard" pitchFamily="34" charset="-120"/>
-              </a:rPr>
-              <a:t>✓</a:t>
-            </a:r>
-            <a:endParaRPr lang="en-US" sz="1100" dirty="0"/>
-          </a:p>
-        </p:txBody>
-      </p:sp>
-      <p:sp>
-        <p:nvSpPr>
-          <p:cNvPr id="18" name="Text 16"/>
-          <p:cNvSpPr/>
-          <p:nvPr/>
-        </p:nvSpPr>
-        <p:spPr>
-          <a:xfrm>
-            <a:off x="1115568" y="3822192"/>
-            <a:ext cx="4683100" cy="685800"/>
-          </a:xfrm>
-          <a:prstGeom prst="rect">
-            <a:avLst/>
-          </a:prstGeom>
-          <a:noFill/>
-          <a:ln/>
-        </p:spPr>
-        <p:txBody>
-          <a:bodyPr wrap="square" rtlCol="0" anchor="ctr"/>
-          <a:lstStyle/>
-          <a:p>
-            <a:pPr indent="0" marL="0">
-              <a:lnSpc>
-                <a:spcPct val="115000"/>
-              </a:lnSpc>
-              <a:buNone/>
-            </a:pPr>
-            <a:r>
-              <a:rPr lang="en-US" sz="1050" dirty="0">
-                <a:solidFill>
-                  <a:srgbClr val="10161F"/>
-                </a:solidFill>
-                <a:latin typeface="Pretendard" pitchFamily="34" charset="0"/>
-                <a:ea typeface="Pretendard" pitchFamily="34" charset="-122"/>
-                <a:cs typeface="Pretendard" pitchFamily="34" charset="-120"/>
-              </a:rPr>
-              <a:t>건축물대장상 위반건축물 등재 여부 및 불법 증축·용도변경 이행강제금 납부 이력 점검</a:t>
-            </a:r>
-            <a:endParaRPr lang="en-US" sz="1050" dirty="0"/>
-          </a:p>
-        </p:txBody>
-      </p:sp>
-      <p:sp>
-        <p:nvSpPr>
-          <p:cNvPr id="19" name="Shape 17"/>
-          <p:cNvSpPr/>
-          <p:nvPr/>
-        </p:nvSpPr>
-        <p:spPr>
-          <a:xfrm>
-            <a:off x="6255868" y="1719072"/>
-            <a:ext cx="5368900" cy="868680"/>
-          </a:xfrm>
-          <a:prstGeom prst="rect">
-            <a:avLst/>
-          </a:prstGeom>
-          <a:solidFill>
-            <a:srgbClr val="F7FAFC"/>
-          </a:solidFill>
-          <a:ln w="6350">
-            <a:solidFill>
-              <a:srgbClr val="D9B668"/>
-            </a:solidFill>
-            <a:prstDash val="solid"/>
-          </a:ln>
-        </p:spPr>
-      </p:sp>
-      <p:sp>
-        <p:nvSpPr>
-          <p:cNvPr id="20" name="Shape 18"/>
-          <p:cNvSpPr/>
-          <p:nvPr/>
-        </p:nvSpPr>
-        <p:spPr>
-          <a:xfrm>
-            <a:off x="6393028" y="1883664"/>
-            <a:ext cx="320040" cy="320040"/>
-          </a:xfrm>
-          <a:prstGeom prst="rect">
-            <a:avLst/>
-          </a:prstGeom>
-          <a:solidFill>
-            <a:srgbClr val="977024"/>
-          </a:solidFill>
-          <a:ln/>
-        </p:spPr>
-      </p:sp>
-      <p:sp>
-        <p:nvSpPr>
-          <p:cNvPr id="21" name="Text 19"/>
-          <p:cNvSpPr/>
-          <p:nvPr/>
-        </p:nvSpPr>
-        <p:spPr>
-          <a:xfrm>
-            <a:off x="6393028" y="1883664"/>
-            <a:ext cx="320040" cy="320040"/>
-          </a:xfrm>
-          <a:prstGeom prst="rect">
-            <a:avLst/>
-          </a:prstGeom>
-          <a:noFill/>
-          <a:ln/>
-        </p:spPr>
-        <p:txBody>
-          <a:bodyPr wrap="square" rtlCol="0" anchor="ctr"/>
-          <a:lstStyle/>
-          <a:p>
-            <a:pPr algn="ctr" indent="0" marL="0">
-              <a:buNone/>
-            </a:pPr>
-            <a:r>
-              <a:rPr lang="en-US" sz="1100" b="1" dirty="0">
-                <a:solidFill>
-                  <a:srgbClr val="000000"/>
-                </a:solidFill>
-                <a:latin typeface="Pretendard" pitchFamily="34" charset="0"/>
-                <a:ea typeface="Pretendard" pitchFamily="34" charset="-122"/>
-                <a:cs typeface="Pretendard" pitchFamily="34" charset="-120"/>
-              </a:rPr>
-              <a:t>✓</a:t>
-            </a:r>
-            <a:endParaRPr lang="en-US" sz="1100" dirty="0"/>
-          </a:p>
-        </p:txBody>
-      </p:sp>
-      <p:sp>
-        <p:nvSpPr>
-          <p:cNvPr id="22" name="Text 20"/>
-          <p:cNvSpPr/>
-          <p:nvPr/>
-        </p:nvSpPr>
-        <p:spPr>
-          <a:xfrm>
-            <a:off x="6804508" y="1828800"/>
-            <a:ext cx="4683100" cy="685800"/>
-          </a:xfrm>
-          <a:prstGeom prst="rect">
-            <a:avLst/>
-          </a:prstGeom>
-          <a:noFill/>
-          <a:ln/>
-        </p:spPr>
-        <p:txBody>
-          <a:bodyPr wrap="square" rtlCol="0" anchor="ctr"/>
-          <a:lstStyle/>
-          <a:p>
-            <a:pPr indent="0" marL="0">
-              <a:lnSpc>
-                <a:spcPct val="115000"/>
-              </a:lnSpc>
-              <a:buNone/>
-            </a:pPr>
-            <a:r>
-              <a:rPr lang="en-US" sz="1050" dirty="0">
-                <a:solidFill>
-                  <a:srgbClr val="10161F"/>
-                </a:solidFill>
-                <a:latin typeface="Pretendard" pitchFamily="34" charset="0"/>
-                <a:ea typeface="Pretendard" pitchFamily="34" charset="-122"/>
-                <a:cs typeface="Pretendard" pitchFamily="34" charset="-120"/>
-              </a:rPr>
-              <a:t>토지이용계획확인원상 도시계획시설 저촉, 건축선 후퇴, 지구단위계획 특별계획구역 확인</a:t>
-            </a:r>
-            <a:endParaRPr lang="en-US" sz="1050" dirty="0"/>
-          </a:p>
-        </p:txBody>
-      </p:sp>
-      <p:sp>
-        <p:nvSpPr>
-          <p:cNvPr id="23" name="Shape 21"/>
-          <p:cNvSpPr/>
-          <p:nvPr/>
-        </p:nvSpPr>
-        <p:spPr>
-          <a:xfrm>
-            <a:off x="6255868" y="2715768"/>
-            <a:ext cx="5368900" cy="868680"/>
-          </a:xfrm>
-          <a:prstGeom prst="rect">
-            <a:avLst/>
-          </a:prstGeom>
-          <a:solidFill>
-            <a:srgbClr val="F7FAFC"/>
-          </a:solidFill>
-          <a:ln w="6350">
-            <a:solidFill>
-              <a:srgbClr val="D9B668"/>
-            </a:solidFill>
-            <a:prstDash val="solid"/>
-          </a:ln>
-        </p:spPr>
-      </p:sp>
-      <p:sp>
-        <p:nvSpPr>
-          <p:cNvPr id="24" name="Shape 22"/>
-          <p:cNvSpPr/>
-          <p:nvPr/>
-        </p:nvSpPr>
-        <p:spPr>
-          <a:xfrm>
-            <a:off x="6393028" y="2880360"/>
-            <a:ext cx="320040" cy="320040"/>
-          </a:xfrm>
-          <a:prstGeom prst="rect">
-            <a:avLst/>
-          </a:prstGeom>
-          <a:solidFill>
-            <a:srgbClr val="977024"/>
-          </a:solidFill>
-          <a:ln/>
-        </p:spPr>
-      </p:sp>
-      <p:sp>
-        <p:nvSpPr>
-          <p:cNvPr id="25" name="Text 23"/>
-          <p:cNvSpPr/>
-          <p:nvPr/>
-        </p:nvSpPr>
-        <p:spPr>
-          <a:xfrm>
-            <a:off x="6393028" y="2880360"/>
-            <a:ext cx="320040" cy="320040"/>
-          </a:xfrm>
-          <a:prstGeom prst="rect">
-            <a:avLst/>
-          </a:prstGeom>
-          <a:noFill/>
-          <a:ln/>
-        </p:spPr>
-        <p:txBody>
-          <a:bodyPr wrap="square" rtlCol="0" anchor="ctr"/>
-          <a:lstStyle/>
-          <a:p>
-            <a:pPr algn="ctr" indent="0" marL="0">
-              <a:buNone/>
-            </a:pPr>
-            <a:r>
-              <a:rPr lang="en-US" sz="1100" b="1" dirty="0">
-                <a:solidFill>
-                  <a:srgbClr val="000000"/>
-                </a:solidFill>
-                <a:latin typeface="Pretendard" pitchFamily="34" charset="0"/>
-                <a:ea typeface="Pretendard" pitchFamily="34" charset="-122"/>
-                <a:cs typeface="Pretendard" pitchFamily="34" charset="-120"/>
-              </a:rPr>
-              <a:t>✓</a:t>
-            </a:r>
-            <a:endParaRPr lang="en-US" sz="1100" dirty="0"/>
-          </a:p>
-        </p:txBody>
-      </p:sp>
-      <p:sp>
-        <p:nvSpPr>
-          <p:cNvPr id="26" name="Text 24"/>
-          <p:cNvSpPr/>
-          <p:nvPr/>
-        </p:nvSpPr>
-        <p:spPr>
-          <a:xfrm>
-            <a:off x="6804508" y="2825496"/>
-            <a:ext cx="4683100" cy="685800"/>
-          </a:xfrm>
-          <a:prstGeom prst="rect">
-            <a:avLst/>
-          </a:prstGeom>
-          <a:noFill/>
-          <a:ln/>
-        </p:spPr>
-        <p:txBody>
-          <a:bodyPr wrap="square" rtlCol="0" anchor="ctr"/>
-          <a:lstStyle/>
-          <a:p>
-            <a:pPr indent="0" marL="0">
-              <a:lnSpc>
-                <a:spcPct val="115000"/>
-              </a:lnSpc>
-              <a:buNone/>
-            </a:pPr>
-            <a:r>
-              <a:rPr lang="en-US" sz="1050" dirty="0">
-                <a:solidFill>
-                  <a:srgbClr val="10161F"/>
-                </a:solidFill>
-                <a:latin typeface="Pretendard" pitchFamily="34" charset="0"/>
-                <a:ea typeface="Pretendard" pitchFamily="34" charset="-122"/>
-                <a:cs typeface="Pretendard" pitchFamily="34" charset="-120"/>
-              </a:rPr>
-              <a:t>기계식 주차기 정기 안전점검 합격증, 승강기 검사필증, 소방 완비증명서 실물 실사</a:t>
-            </a:r>
-            <a:endParaRPr lang="en-US" sz="1050" dirty="0"/>
-          </a:p>
-        </p:txBody>
-      </p:sp>
-      <p:sp>
-        <p:nvSpPr>
-          <p:cNvPr id="27" name="Shape 25"/>
-          <p:cNvSpPr/>
-          <p:nvPr/>
-        </p:nvSpPr>
-        <p:spPr>
-          <a:xfrm>
-            <a:off x="6255868" y="3712464"/>
-            <a:ext cx="5368900" cy="868680"/>
-          </a:xfrm>
-          <a:prstGeom prst="rect">
-            <a:avLst/>
-          </a:prstGeom>
-          <a:solidFill>
-            <a:srgbClr val="F7FAFC"/>
-          </a:solidFill>
-          <a:ln w="6350">
-            <a:solidFill>
-              <a:srgbClr val="D9B668"/>
-            </a:solidFill>
-            <a:prstDash val="solid"/>
-          </a:ln>
-        </p:spPr>
-      </p:sp>
-      <p:sp>
-        <p:nvSpPr>
-          <p:cNvPr id="28" name="Shape 26"/>
-          <p:cNvSpPr/>
-          <p:nvPr/>
-        </p:nvSpPr>
-        <p:spPr>
-          <a:xfrm>
-            <a:off x="6393028" y="3877056"/>
-            <a:ext cx="320040" cy="320040"/>
-          </a:xfrm>
-          <a:prstGeom prst="rect">
-            <a:avLst/>
-          </a:prstGeom>
-          <a:solidFill>
-            <a:srgbClr val="977024"/>
-          </a:solidFill>
-          <a:ln/>
-        </p:spPr>
-      </p:sp>
-      <p:sp>
-        <p:nvSpPr>
-          <p:cNvPr id="29" name="Text 27"/>
-          <p:cNvSpPr/>
-          <p:nvPr/>
-        </p:nvSpPr>
-        <p:spPr>
-          <a:xfrm>
-            <a:off x="6393028" y="3877056"/>
-            <a:ext cx="320040" cy="320040"/>
-          </a:xfrm>
-          <a:prstGeom prst="rect">
-            <a:avLst/>
-          </a:prstGeom>
-          <a:noFill/>
-          <a:ln/>
-        </p:spPr>
-        <p:txBody>
-          <a:bodyPr wrap="square" rtlCol="0" anchor="ctr"/>
-          <a:lstStyle/>
-          <a:p>
-            <a:pPr algn="ctr" indent="0" marL="0">
-              <a:buNone/>
-            </a:pPr>
-            <a:r>
-              <a:rPr lang="en-US" sz="1100" b="1" dirty="0">
-                <a:solidFill>
-                  <a:srgbClr val="000000"/>
-                </a:solidFill>
-                <a:latin typeface="Pretendard" pitchFamily="34" charset="0"/>
-                <a:ea typeface="Pretendard" pitchFamily="34" charset="-122"/>
-                <a:cs typeface="Pretendard" pitchFamily="34" charset="-120"/>
-              </a:rPr>
-              <a:t>✓</a:t>
-            </a:r>
-            <a:endParaRPr lang="en-US" sz="1100" dirty="0"/>
-          </a:p>
-        </p:txBody>
-      </p:sp>
-      <p:sp>
-        <p:nvSpPr>
-          <p:cNvPr id="30" name="Text 28"/>
-          <p:cNvSpPr/>
-          <p:nvPr/>
-        </p:nvSpPr>
-        <p:spPr>
-          <a:xfrm>
-            <a:off x="6804508" y="3822192"/>
-            <a:ext cx="4683100" cy="685800"/>
-          </a:xfrm>
-          <a:prstGeom prst="rect">
-            <a:avLst/>
-          </a:prstGeom>
-          <a:noFill/>
-          <a:ln/>
-        </p:spPr>
-        <p:txBody>
-          <a:bodyPr wrap="square" rtlCol="0" anchor="ctr"/>
-          <a:lstStyle/>
-          <a:p>
-            <a:pPr indent="0" marL="0">
-              <a:lnSpc>
-                <a:spcPct val="115000"/>
-              </a:lnSpc>
-              <a:buNone/>
-            </a:pPr>
-            <a:r>
-              <a:rPr lang="en-US" sz="1050" dirty="0">
-                <a:solidFill>
-                  <a:srgbClr val="10161F"/>
-                </a:solidFill>
-                <a:latin typeface="Pretendard" pitchFamily="34" charset="0"/>
-                <a:ea typeface="Pretendard" pitchFamily="34" charset="-122"/>
-                <a:cs typeface="Pretendard" pitchFamily="34" charset="-120"/>
-              </a:rPr>
-              <a:t>정화조 용량 대비 현 업종 적합성 및 하수도 원인자부담금 추가 부과 대상 여부 확인</a:t>
-            </a:r>
-            <a:endParaRPr lang="en-US" sz="1050" dirty="0"/>
-          </a:p>
-        </p:txBody>
-      </p:sp>
-      <p:sp>
-        <p:nvSpPr>
-          <p:cNvPr id="31" name="Shape 29"/>
-          <p:cNvSpPr/>
-          <p:nvPr/>
-        </p:nvSpPr>
-        <p:spPr>
-          <a:xfrm>
-            <a:off x="566928" y="5760720"/>
-            <a:ext cx="11057839" cy="594360"/>
-          </a:xfrm>
-          <a:prstGeom prst="rect">
-            <a:avLst/>
-          </a:prstGeom>
-          <a:solidFill>
-            <a:srgbClr val="D9B668"/>
-          </a:solidFill>
-          <a:ln/>
-        </p:spPr>
-      </p:sp>
-      <p:sp>
-        <p:nvSpPr>
-          <p:cNvPr id="32" name="Text 30"/>
-          <p:cNvSpPr/>
-          <p:nvPr/>
-        </p:nvSpPr>
-        <p:spPr>
-          <a:xfrm>
-            <a:off x="749808" y="5833872"/>
-            <a:ext cx="10692079" cy="448056"/>
-          </a:xfrm>
-          <a:prstGeom prst="rect">
-            <a:avLst/>
-          </a:prstGeom>
-          <a:noFill/>
-          <a:ln/>
-        </p:spPr>
-        <p:txBody>
-          <a:bodyPr wrap="square" rtlCol="0" anchor="ctr"/>
-          <a:lstStyle/>
-          <a:p>
-            <a:pPr indent="0" marL="0">
-              <a:buNone/>
-            </a:pPr>
-            <a:r>
-              <a:rPr lang="en-US" sz="950" b="1" dirty="0">
-                <a:solidFill>
-                  <a:srgbClr val="977024"/>
-                </a:solidFill>
-                <a:latin typeface="Pretendard" pitchFamily="34" charset="0"/>
-                <a:ea typeface="Pretendard" pitchFamily="34" charset="-122"/>
-                <a:cs typeface="Pretendard" pitchFamily="34" charset="-120"/>
-              </a:rPr>
-              <a:t>※ 본 체크리스트는 계약 전 매수인의 안전한 자산 인수를 위한 필수 확인 사항이며, 실사(Due Diligence) 결과에 따라 매매 조건 및 잔금 일정이 조정될 수 있습니다.</a:t>
-            </a:r>
-            <a:endParaRPr lang="en-US" sz="950" dirty="0"/>
-          </a:p>
-        </p:txBody>
-      </p:sp>
-      <p:sp>
-        <p:nvSpPr>
-          <p:cNvPr id="33" name="Text 31"/>
-          <p:cNvSpPr/>
-          <p:nvPr/>
-        </p:nvSpPr>
-        <p:spPr>
-          <a:xfrm>
-            <a:off x="566928" y="6382512"/>
-            <a:ext cx="7315200" cy="219456"/>
-          </a:xfrm>
-          <a:prstGeom prst="rect">
-            <a:avLst/>
-          </a:prstGeom>
-          <a:noFill/>
-          <a:ln/>
-        </p:spPr>
-        <p:txBody>
-          <a:bodyPr wrap="square" lIns="0" tIns="0" rIns="0" bIns="0" rtlCol="0" anchor="ctr"/>
-          <a:lstStyle/>
-          <a:p>
-            <a:pPr indent="0" marL="0">
-              <a:buNone/>
-            </a:pPr>
-            <a:r>
-              <a:rPr lang="en-US" sz="800" dirty="0">
-                <a:solidFill>
-                  <a:srgbClr val="718096"/>
-                </a:solidFill>
-                <a:latin typeface="Pretendard" pitchFamily="34" charset="0"/>
-                <a:ea typeface="Pretendard" pitchFamily="34" charset="-122"/>
-                <a:cs typeface="Pretendard" pitchFamily="34" charset="-120"/>
-              </a:rPr>
               <a:t>크리딜   |   </a:t>
             </a:r>
             <a:endParaRPr lang="en-US" sz="800" dirty="0"/>
@@ -5286,7 +5193,7 @@
       </p:sp>
       <p:sp>
         <p:nvSpPr>
-          <p:cNvPr id="34" name="Text 32"/>
+          <p:cNvPr id="12" name="Text 10"/>
           <p:cNvSpPr/>
           <p:nvPr/>
         </p:nvSpPr>
@@ -5317,7 +5224,7 @@
                 <a:ea typeface="Arial" pitchFamily="34" charset="-122"/>
                 <a:cs typeface="Arial" pitchFamily="34" charset="-120"/>
               </a:rPr>
-              <a:t>12</a:t>
+              <a:t>13</a:t>
             </a:r>
             <a:endParaRPr lang="en-US" sz="900" dirty="0"/>
           </a:p>
@@ -5334,434 +5241,6 @@
 <file path=ppt/slides/slide14.xml><?xml version="1.0" encoding="utf-8"?>
 <p:sld xmlns:a="http://schemas.openxmlformats.org/drawingml/2006/main" xmlns:r="http://schemas.openxmlformats.org/officeDocument/2006/relationships" xmlns:p="http://schemas.openxmlformats.org/presentationml/2006/main">
   <p:cSld name="Slide 14">
-    <p:bg>
-      <p:bgPr>
-        <a:solidFill>
-          <a:srgbClr val="FFFFFF"/>
-        </a:solidFill>
-      </p:bgPr>
-    </p:bg>
-    <p:spTree>
-      <p:nvGrpSpPr>
-        <p:cNvPr id="1" name=""/>
-        <p:cNvGrpSpPr/>
-        <p:nvPr/>
-      </p:nvGrpSpPr>
-      <p:grpSpPr>
-        <a:xfrm>
-          <a:off x="0" y="0"/>
-          <a:ext cx="0" cy="0"/>
-          <a:chOff x="0" y="0"/>
-          <a:chExt cx="0" cy="0"/>
-        </a:xfrm>
-      </p:grpSpPr>
-      <p:sp>
-        <p:nvSpPr>
-          <p:cNvPr id="2" name="Shape 0"/>
-          <p:cNvSpPr/>
-          <p:nvPr/>
-        </p:nvSpPr>
-        <p:spPr>
-          <a:xfrm>
-            <a:off x="566928" y="457200"/>
-            <a:ext cx="384048" cy="384048"/>
-          </a:xfrm>
-          <a:prstGeom prst="ellipse">
-            <a:avLst/>
-          </a:prstGeom>
-          <a:solidFill>
-            <a:srgbClr val="B98A2E"/>
-          </a:solidFill>
-          <a:ln/>
-        </p:spPr>
-      </p:sp>
-      <p:sp>
-        <p:nvSpPr>
-          <p:cNvPr id="3" name="Text 1"/>
-          <p:cNvSpPr/>
-          <p:nvPr/>
-        </p:nvSpPr>
-        <p:spPr>
-          <a:xfrm>
-            <a:off x="566928" y="457200"/>
-            <a:ext cx="384048" cy="384048"/>
-          </a:xfrm>
-          <a:prstGeom prst="rect">
-            <a:avLst/>
-          </a:prstGeom>
-          <a:noFill/>
-          <a:ln/>
-        </p:spPr>
-        <p:txBody>
-          <a:bodyPr wrap="square" lIns="0" tIns="0" rIns="0" bIns="0" rtlCol="0" anchor="ctr"/>
-          <a:lstStyle/>
-          <a:p>
-            <a:pPr algn="ctr" indent="0" marL="0">
-              <a:buNone/>
-            </a:pPr>
-            <a:r>
-              <a:rPr lang="en-US" sz="1300" b="1" dirty="0">
-                <a:solidFill>
-                  <a:srgbClr val="FFFFFF"/>
-                </a:solidFill>
-                <a:latin typeface="Arial" pitchFamily="34" charset="0"/>
-                <a:ea typeface="Arial" pitchFamily="34" charset="-122"/>
-                <a:cs typeface="Arial" pitchFamily="34" charset="-120"/>
-              </a:rPr>
-              <a:t>13</a:t>
-            </a:r>
-            <a:endParaRPr lang="en-US" sz="1300" dirty="0"/>
-          </a:p>
-        </p:txBody>
-      </p:sp>
-      <p:sp>
-        <p:nvSpPr>
-          <p:cNvPr id="4" name="Text 2"/>
-          <p:cNvSpPr/>
-          <p:nvPr/>
-        </p:nvSpPr>
-        <p:spPr>
-          <a:xfrm>
-            <a:off x="1133856" y="457200"/>
-            <a:ext cx="10490911" cy="182880"/>
-          </a:xfrm>
-          <a:prstGeom prst="rect">
-            <a:avLst/>
-          </a:prstGeom>
-          <a:noFill/>
-          <a:ln/>
-        </p:spPr>
-        <p:txBody>
-          <a:bodyPr wrap="square" lIns="0" tIns="0" rIns="0" bIns="0" rtlCol="0" anchor="ctr"/>
-          <a:lstStyle/>
-          <a:p>
-            <a:pPr indent="0" marL="0">
-              <a:buNone/>
-            </a:pPr>
-            <a:r>
-              <a:rPr lang="en-US" sz="950" b="1" spc="200" kern="0" dirty="0">
-                <a:solidFill>
-                  <a:srgbClr val="B98A2E"/>
-                </a:solidFill>
-                <a:latin typeface="Arial" pitchFamily="34" charset="0"/>
-                <a:ea typeface="Arial" pitchFamily="34" charset="-122"/>
-                <a:cs typeface="Arial" pitchFamily="34" charset="-120"/>
-              </a:rPr>
-              <a:t>Process</a:t>
-            </a:r>
-            <a:endParaRPr lang="en-US" sz="950" dirty="0"/>
-          </a:p>
-        </p:txBody>
-      </p:sp>
-      <p:sp>
-        <p:nvSpPr>
-          <p:cNvPr id="5" name="Text 3"/>
-          <p:cNvSpPr/>
-          <p:nvPr/>
-        </p:nvSpPr>
-        <p:spPr>
-          <a:xfrm>
-            <a:off x="1133856" y="640080"/>
-            <a:ext cx="10490911" cy="365760"/>
-          </a:xfrm>
-          <a:prstGeom prst="rect">
-            <a:avLst/>
-          </a:prstGeom>
-          <a:noFill/>
-          <a:ln/>
-        </p:spPr>
-        <p:txBody>
-          <a:bodyPr wrap="square" lIns="0" tIns="0" rIns="0" bIns="0" rtlCol="0" anchor="ctr"/>
-          <a:lstStyle/>
-          <a:p>
-            <a:pPr indent="0" marL="0">
-              <a:buNone/>
-            </a:pPr>
-            <a:r>
-              <a:rPr lang="en-US" sz="2300" b="1" dirty="0">
-                <a:solidFill>
-                  <a:srgbClr val="10161F"/>
-                </a:solidFill>
-                <a:latin typeface="Pretendard" pitchFamily="34" charset="0"/>
-                <a:ea typeface="Pretendard" pitchFamily="34" charset="-122"/>
-                <a:cs typeface="Pretendard" pitchFamily="34" charset="-120"/>
-              </a:rPr>
-              <a:t>다음 단계</a:t>
-            </a:r>
-            <a:endParaRPr lang="en-US" sz="2300" dirty="0"/>
-          </a:p>
-        </p:txBody>
-      </p:sp>
-      <p:sp>
-        <p:nvSpPr>
-          <p:cNvPr id="6" name="Shape 4"/>
-          <p:cNvSpPr/>
-          <p:nvPr/>
-        </p:nvSpPr>
-        <p:spPr>
-          <a:xfrm>
-            <a:off x="566928" y="1572768"/>
-            <a:ext cx="11057839" cy="3200400"/>
-          </a:xfrm>
-          <a:prstGeom prst="roundRect">
-            <a:avLst>
-              <a:gd name="adj" fmla="val 1714"/>
-            </a:avLst>
-          </a:prstGeom>
-          <a:solidFill>
-            <a:srgbClr val="F7FAFC"/>
-          </a:solidFill>
-          <a:ln w="6350">
-            <a:solidFill>
-              <a:srgbClr val="CBD5E0"/>
-            </a:solidFill>
-            <a:prstDash val="solid"/>
-          </a:ln>
-        </p:spPr>
-      </p:sp>
-      <p:sp>
-        <p:nvSpPr>
-          <p:cNvPr id="7" name="Shape 5"/>
-          <p:cNvSpPr/>
-          <p:nvPr/>
-        </p:nvSpPr>
-        <p:spPr>
-          <a:xfrm>
-            <a:off x="786384" y="1792224"/>
-            <a:ext cx="438912" cy="438912"/>
-          </a:xfrm>
-          <a:prstGeom prst="ellipse">
-            <a:avLst/>
-          </a:prstGeom>
-          <a:solidFill>
-            <a:srgbClr val="B98A2E"/>
-          </a:solidFill>
-          <a:ln/>
-        </p:spPr>
-      </p:sp>
-      <p:sp>
-        <p:nvSpPr>
-          <p:cNvPr id="8" name="Text 6"/>
-          <p:cNvSpPr/>
-          <p:nvPr/>
-        </p:nvSpPr>
-        <p:spPr>
-          <a:xfrm>
-            <a:off x="786384" y="1792224"/>
-            <a:ext cx="438912" cy="438912"/>
-          </a:xfrm>
-          <a:prstGeom prst="rect">
-            <a:avLst/>
-          </a:prstGeom>
-          <a:noFill/>
-          <a:ln/>
-        </p:spPr>
-        <p:txBody>
-          <a:bodyPr wrap="square" lIns="0" tIns="0" rIns="0" bIns="0" rtlCol="0" anchor="ctr"/>
-          <a:lstStyle/>
-          <a:p>
-            <a:pPr algn="ctr" indent="0" marL="0">
-              <a:buNone/>
-            </a:pPr>
-            <a:r>
-              <a:rPr lang="en-US" sz="1400" b="1" dirty="0">
-                <a:solidFill>
-                  <a:srgbClr val="FFFFFF"/>
-                </a:solidFill>
-                <a:latin typeface="Arial" pitchFamily="34" charset="0"/>
-                <a:ea typeface="Arial" pitchFamily="34" charset="-122"/>
-                <a:cs typeface="Arial" pitchFamily="34" charset="-120"/>
-              </a:rPr>
-              <a:t>01</a:t>
-            </a:r>
-            <a:endParaRPr lang="en-US" sz="1400" dirty="0"/>
-          </a:p>
-        </p:txBody>
-      </p:sp>
-      <p:sp>
-        <p:nvSpPr>
-          <p:cNvPr id="9" name="Text 7"/>
-          <p:cNvSpPr/>
-          <p:nvPr/>
-        </p:nvSpPr>
-        <p:spPr>
-          <a:xfrm>
-            <a:off x="786384" y="2304288"/>
-            <a:ext cx="10618927" cy="365760"/>
-          </a:xfrm>
-          <a:prstGeom prst="rect">
-            <a:avLst/>
-          </a:prstGeom>
-          <a:noFill/>
-          <a:ln/>
-        </p:spPr>
-        <p:txBody>
-          <a:bodyPr wrap="square" rtlCol="0" anchor="ctr"/>
-          <a:lstStyle/>
-          <a:p>
-            <a:pPr indent="0" marL="0">
-              <a:buNone/>
-            </a:pPr>
-            <a:r>
-              <a:rPr lang="en-US" sz="1600" b="1" dirty="0">
-                <a:solidFill>
-                  <a:srgbClr val="10161F"/>
-                </a:solidFill>
-                <a:latin typeface="Pretendard" pitchFamily="34" charset="0"/>
-                <a:ea typeface="Pretendard" pitchFamily="34" charset="-122"/>
-                <a:cs typeface="Pretendard" pitchFamily="34" charset="-120"/>
-              </a:rPr>
-              <a:t>1단계</a:t>
-            </a:r>
-            <a:endParaRPr lang="en-US" sz="1600" dirty="0"/>
-          </a:p>
-        </p:txBody>
-      </p:sp>
-      <p:sp>
-        <p:nvSpPr>
-          <p:cNvPr id="10" name="Text 8"/>
-          <p:cNvSpPr/>
-          <p:nvPr/>
-        </p:nvSpPr>
-        <p:spPr>
-          <a:xfrm>
-            <a:off x="786384" y="2761488"/>
-            <a:ext cx="10618927" cy="1828800"/>
-          </a:xfrm>
-          <a:prstGeom prst="rect">
-            <a:avLst/>
-          </a:prstGeom>
-          <a:noFill/>
-          <a:ln/>
-        </p:spPr>
-        <p:txBody>
-          <a:bodyPr wrap="square" rtlCol="0" anchor="t"/>
-          <a:lstStyle/>
-          <a:p>
-            <a:pPr indent="0" marL="0">
-              <a:buNone/>
-            </a:pPr>
-            <a:r>
-              <a:rPr lang="en-US" sz="1100" dirty="0">
-                <a:solidFill>
-                  <a:srgbClr val="10161F"/>
-                </a:solidFill>
-                <a:latin typeface="Pretendard" pitchFamily="34" charset="0"/>
-                <a:ea typeface="Pretendard" pitchFamily="34" charset="-122"/>
-                <a:cs typeface="Pretendard" pitchFamily="34" charset="-120"/>
-              </a:rPr>
-              <a:t>현장 실사 및 임대차계약서 원본 확인을 권장합니다.</a:t>
-            </a:r>
-            <a:endParaRPr lang="en-US" sz="1100" dirty="0"/>
-          </a:p>
-          <a:p>
-            <a:pPr indent="0" marL="0">
-              <a:buNone/>
-            </a:pPr>
-            <a:r>
-              <a:rPr lang="en-US" sz="1100" dirty="0">
-                <a:solidFill>
-                  <a:srgbClr val="10161F"/>
-                </a:solidFill>
-                <a:latin typeface="Pretendard" pitchFamily="34" charset="0"/>
-                <a:ea typeface="Pretendard" pitchFamily="34" charset="-122"/>
-                <a:cs typeface="Pretendard" pitchFamily="34" charset="-120"/>
-              </a:rPr>
-              <a:t>현장 실사 및 임대차계약서 원본 확인을 권장합니다.</a:t>
-            </a:r>
-            <a:endParaRPr lang="en-US" sz="1100" dirty="0"/>
-          </a:p>
-        </p:txBody>
-      </p:sp>
-      <p:sp>
-        <p:nvSpPr>
-          <p:cNvPr id="11" name="Text 9"/>
-          <p:cNvSpPr/>
-          <p:nvPr/>
-        </p:nvSpPr>
-        <p:spPr>
-          <a:xfrm>
-            <a:off x="566928" y="6382512"/>
-            <a:ext cx="7315200" cy="219456"/>
-          </a:xfrm>
-          <a:prstGeom prst="rect">
-            <a:avLst/>
-          </a:prstGeom>
-          <a:noFill/>
-          <a:ln/>
-        </p:spPr>
-        <p:txBody>
-          <a:bodyPr wrap="square" lIns="0" tIns="0" rIns="0" bIns="0" rtlCol="0" anchor="ctr"/>
-          <a:lstStyle/>
-          <a:p>
-            <a:pPr indent="0" marL="0">
-              <a:buNone/>
-            </a:pPr>
-            <a:r>
-              <a:rPr lang="en-US" sz="800" dirty="0">
-                <a:solidFill>
-                  <a:srgbClr val="718096"/>
-                </a:solidFill>
-                <a:latin typeface="Pretendard" pitchFamily="34" charset="0"/>
-                <a:ea typeface="Pretendard" pitchFamily="34" charset="-122"/>
-                <a:cs typeface="Pretendard" pitchFamily="34" charset="-120"/>
-              </a:rPr>
-              <a:t>크리딜   |   </a:t>
-            </a:r>
-            <a:endParaRPr lang="en-US" sz="800" dirty="0"/>
-          </a:p>
-        </p:txBody>
-      </p:sp>
-      <p:sp>
-        <p:nvSpPr>
-          <p:cNvPr id="12" name="Text 10"/>
-          <p:cNvSpPr/>
-          <p:nvPr/>
-        </p:nvSpPr>
-        <p:spPr>
-          <a:xfrm>
-            <a:off x="10710367" y="6382512"/>
-            <a:ext cx="914400" cy="219456"/>
-          </a:xfrm>
-          <a:prstGeom prst="rect">
-            <a:avLst/>
-          </a:prstGeom>
-          <a:noFill/>
-          <a:ln/>
-        </p:spPr>
-        <p:txBody>
-          <a:bodyPr wrap="square" lIns="0" tIns="0" rIns="0" bIns="0" rtlCol="0" anchor="ctr"/>
-          <a:lstStyle/>
-          <a:p>
-            <a:pPr algn="r" indent="0" marL="0">
-              <a:buNone/>
-            </a:pPr>
-            <a:r>
-              <a:rPr lang="en-US" sz="900" b="1" dirty="0">
-                <a:solidFill>
-                  <a:srgbClr val="B98A2E"/>
-                </a:solidFill>
-                <a:latin typeface="Arial" pitchFamily="34" charset="0"/>
-                <a:ea typeface="Arial" pitchFamily="34" charset="-122"/>
-                <a:cs typeface="Arial" pitchFamily="34" charset="-120"/>
-              </a:rPr>
-              <a:t>13</a:t>
-            </a:r>
-            <a:endParaRPr lang="en-US" sz="900" dirty="0"/>
-          </a:p>
-        </p:txBody>
-      </p:sp>
-    </p:spTree>
-  </p:cSld>
-  <p:clrMapOvr>
-    <a:masterClrMapping/>
-  </p:clrMapOvr>
-</p:sld>
-</file>
-
-<file path=ppt/slides/slide15.xml><?xml version="1.0" encoding="utf-8"?>
-<p:sld xmlns:a="http://schemas.openxmlformats.org/drawingml/2006/main" xmlns:r="http://schemas.openxmlformats.org/officeDocument/2006/relationships" xmlns:p="http://schemas.openxmlformats.org/presentationml/2006/main">
-  <p:cSld name="Slide 15">
     <p:bg>
       <p:bgPr>
         <a:solidFill>
@@ -7022,7 +6501,7 @@
         </p:nvSpPr>
         <p:spPr>
           <a:xfrm>
-            <a:off x="6492240" y="2395728"/>
+            <a:off x="6492240" y="2414016"/>
             <a:ext cx="5129784" cy="237744"/>
           </a:xfrm>
           <a:prstGeom prst="rect">
@@ -7062,11 +6541,11 @@
         <p:spPr>
           <a:xfrm>
             <a:off x="6492240" y="2724912"/>
-            <a:ext cx="5129784" cy="1645920"/>
+            <a:ext cx="5129784" cy="1005840"/>
           </a:xfrm>
           <a:prstGeom prst="roundRect">
             <a:avLst>
-              <a:gd name="adj" fmla="val 2222"/>
+              <a:gd name="adj" fmla="val 3636"/>
             </a:avLst>
           </a:prstGeom>
           <a:solidFill>
@@ -7084,7 +6563,7 @@
         <p:spPr>
           <a:xfrm>
             <a:off x="6675120" y="2834640"/>
-            <a:ext cx="4764024" cy="1426464"/>
+            <a:ext cx="4764024" cy="786384"/>
           </a:xfrm>
           <a:prstGeom prst="rect">
             <a:avLst/>
@@ -7417,7 +6896,7 @@
                 <a:ea typeface="Pretendard" pitchFamily="34" charset="-122"/>
                 <a:cs typeface="Pretendard" pitchFamily="34" charset="-120"/>
               </a:rPr>
-              <a:t>핵심요약</a:t>
+              <a:t>핵심 투자 지표 요약</a:t>
             </a:r>
             <a:endParaRPr lang="en-US" sz="2300" dirty="0"/>
           </a:p>
@@ -7494,11 +6973,11 @@
         <p:spPr>
           <a:xfrm>
             <a:off x="566928" y="1965960"/>
-            <a:ext cx="2627300" cy="1280160"/>
+            <a:ext cx="2641016" cy="960120"/>
           </a:xfrm>
           <a:prstGeom prst="roundRect">
             <a:avLst>
-              <a:gd name="adj" fmla="val 4286"/>
+              <a:gd name="adj" fmla="val 5714"/>
             </a:avLst>
           </a:prstGeom>
           <a:solidFill>
@@ -7521,7 +7000,7 @@
         <p:spPr>
           <a:xfrm>
             <a:off x="731520" y="2093976"/>
-            <a:ext cx="2298116" cy="201168"/>
+            <a:ext cx="2311832" cy="201168"/>
           </a:xfrm>
           <a:prstGeom prst="rect">
             <a:avLst/>
@@ -7545,7 +7024,7 @@
                 <a:ea typeface="Pretendard" pitchFamily="34" charset="-122"/>
                 <a:cs typeface="Pretendard" pitchFamily="34" charset="-120"/>
               </a:rPr>
-              <a:t>대지면적</a:t>
+              <a:t>매매 희망가</a:t>
             </a:r>
             <a:endParaRPr lang="en-US" sz="950" dirty="0"/>
           </a:p>
@@ -7560,7 +7039,7 @@
         <p:spPr>
           <a:xfrm>
             <a:off x="731520" y="2313432"/>
-            <a:ext cx="2298116" cy="402336"/>
+            <a:ext cx="2311832" cy="274320"/>
           </a:xfrm>
           <a:prstGeom prst="rect">
             <a:avLst/>
@@ -7578,17 +7057,17 @@
               <a:buNone/>
             </a:pPr>
             <a:r>
-              <a:rPr lang="en-US" sz="2000" b="1" dirty="0">
+              <a:rPr lang="en-US" sz="1700" b="1" dirty="0">
                 <a:solidFill>
                   <a:srgbClr val="10161F"/>
                 </a:solidFill>
-                <a:latin typeface="Pretendard" pitchFamily="34" charset="0"/>
-                <a:ea typeface="Pretendard" pitchFamily="34" charset="-122"/>
-                <a:cs typeface="Pretendard" pitchFamily="34" charset="-120"/>
-              </a:rPr>
-              <a:t>142.5평</a:t>
-            </a:r>
-            <a:endParaRPr lang="en-US" sz="2000" dirty="0"/>
+                <a:latin typeface="Arial" pitchFamily="34" charset="0"/>
+                <a:ea typeface="Arial" pitchFamily="34" charset="-122"/>
+                <a:cs typeface="Arial" pitchFamily="34" charset="-120"/>
+              </a:rPr>
+              <a:t>-</a:t>
+            </a:r>
+            <a:endParaRPr lang="en-US" sz="1700" dirty="0"/>
           </a:p>
         </p:txBody>
       </p:sp>
@@ -7600,12 +7079,12 @@
         </p:nvSpPr>
         <p:spPr>
           <a:xfrm>
-            <a:off x="3377108" y="1965960"/>
-            <a:ext cx="2627300" cy="1280160"/>
+            <a:off x="3372536" y="1965960"/>
+            <a:ext cx="2641016" cy="960120"/>
           </a:xfrm>
           <a:prstGeom prst="roundRect">
             <a:avLst>
-              <a:gd name="adj" fmla="val 4286"/>
+              <a:gd name="adj" fmla="val 5714"/>
             </a:avLst>
           </a:prstGeom>
           <a:solidFill>
@@ -7627,8 +7106,8 @@
         </p:nvSpPr>
         <p:spPr>
           <a:xfrm>
-            <a:off x="3541700" y="2093976"/>
-            <a:ext cx="2298116" cy="201168"/>
+            <a:off x="3537128" y="2093976"/>
+            <a:ext cx="2311832" cy="201168"/>
           </a:xfrm>
           <a:prstGeom prst="rect">
             <a:avLst/>
@@ -7652,7 +7131,7 @@
                 <a:ea typeface="Pretendard" pitchFamily="34" charset="-122"/>
                 <a:cs typeface="Pretendard" pitchFamily="34" charset="-120"/>
               </a:rPr>
-              <a:t>연면적</a:t>
+              <a:t>대지면적</a:t>
             </a:r>
             <a:endParaRPr lang="en-US" sz="950" dirty="0"/>
           </a:p>
@@ -7666,8 +7145,8 @@
         </p:nvSpPr>
         <p:spPr>
           <a:xfrm>
-            <a:off x="3541700" y="2313432"/>
-            <a:ext cx="2298116" cy="402336"/>
+            <a:off x="3537128" y="2313432"/>
+            <a:ext cx="2311832" cy="274320"/>
           </a:xfrm>
           <a:prstGeom prst="rect">
             <a:avLst/>
@@ -7685,7 +7164,7 @@
               <a:buNone/>
             </a:pPr>
             <a:r>
-              <a:rPr lang="en-US" sz="2000" b="1" dirty="0">
+              <a:rPr lang="en-US" sz="1700" b="1" dirty="0">
                 <a:solidFill>
                   <a:srgbClr val="10161F"/>
                 </a:solidFill>
@@ -7693,9 +7172,9 @@
                 <a:ea typeface="Pretendard" pitchFamily="34" charset="-122"/>
                 <a:cs typeface="Pretendard" pitchFamily="34" charset="-120"/>
               </a:rPr>
-              <a:t>620.8평</a:t>
-            </a:r>
-            <a:endParaRPr lang="en-US" sz="2000" dirty="0"/>
+              <a:t>142.5평</a:t>
+            </a:r>
+            <a:endParaRPr lang="en-US" sz="1700" dirty="0"/>
           </a:p>
         </p:txBody>
       </p:sp>
@@ -7707,12 +7186,12 @@
         </p:nvSpPr>
         <p:spPr>
           <a:xfrm>
-            <a:off x="6187288" y="1965960"/>
-            <a:ext cx="2627300" cy="1280160"/>
+            <a:off x="6178144" y="1965960"/>
+            <a:ext cx="2641016" cy="960120"/>
           </a:xfrm>
           <a:prstGeom prst="roundRect">
             <a:avLst>
-              <a:gd name="adj" fmla="val 4286"/>
+              <a:gd name="adj" fmla="val 5714"/>
             </a:avLst>
           </a:prstGeom>
           <a:solidFill>
@@ -7734,8 +7213,8 @@
         </p:nvSpPr>
         <p:spPr>
           <a:xfrm>
-            <a:off x="6351880" y="2093976"/>
-            <a:ext cx="2298116" cy="201168"/>
+            <a:off x="6342736" y="2093976"/>
+            <a:ext cx="2311832" cy="201168"/>
           </a:xfrm>
           <a:prstGeom prst="rect">
             <a:avLst/>
@@ -7759,7 +7238,7 @@
                 <a:ea typeface="Pretendard" pitchFamily="34" charset="-122"/>
                 <a:cs typeface="Pretendard" pitchFamily="34" charset="-120"/>
               </a:rPr>
-              <a:t>준공</a:t>
+              <a:t>연면적</a:t>
             </a:r>
             <a:endParaRPr lang="en-US" sz="950" dirty="0"/>
           </a:p>
@@ -7773,8 +7252,8 @@
         </p:nvSpPr>
         <p:spPr>
           <a:xfrm>
-            <a:off x="6351880" y="2313432"/>
-            <a:ext cx="2298116" cy="402336"/>
+            <a:off x="6342736" y="2313432"/>
+            <a:ext cx="2311832" cy="274320"/>
           </a:xfrm>
           <a:prstGeom prst="rect">
             <a:avLst/>
@@ -7792,7 +7271,7 @@
               <a:buNone/>
             </a:pPr>
             <a:r>
-              <a:rPr lang="en-US" sz="2000" b="1" dirty="0">
+              <a:rPr lang="en-US" sz="1700" b="1" dirty="0">
                 <a:solidFill>
                   <a:srgbClr val="10161F"/>
                 </a:solidFill>
@@ -7800,9 +7279,9 @@
                 <a:ea typeface="Pretendard" pitchFamily="34" charset="-122"/>
                 <a:cs typeface="Pretendard" pitchFamily="34" charset="-120"/>
               </a:rPr>
-              <a:t>2017년</a:t>
-            </a:r>
-            <a:endParaRPr lang="en-US" sz="2000" dirty="0"/>
+              <a:t>620.8평</a:t>
+            </a:r>
+            <a:endParaRPr lang="en-US" sz="1700" dirty="0"/>
           </a:p>
         </p:txBody>
       </p:sp>
@@ -7814,12 +7293,12 @@
         </p:nvSpPr>
         <p:spPr>
           <a:xfrm>
-            <a:off x="8997467" y="1965960"/>
-            <a:ext cx="2627300" cy="1280160"/>
+            <a:off x="8983751" y="1965960"/>
+            <a:ext cx="2641016" cy="960120"/>
           </a:xfrm>
           <a:prstGeom prst="roundRect">
             <a:avLst>
-              <a:gd name="adj" fmla="val 4286"/>
+              <a:gd name="adj" fmla="val 5714"/>
             </a:avLst>
           </a:prstGeom>
           <a:solidFill>
@@ -7841,8 +7320,8 @@
         </p:nvSpPr>
         <p:spPr>
           <a:xfrm>
-            <a:off x="9162059" y="2093976"/>
-            <a:ext cx="2298116" cy="201168"/>
+            <a:off x="9148343" y="2093976"/>
+            <a:ext cx="2311832" cy="201168"/>
           </a:xfrm>
           <a:prstGeom prst="rect">
             <a:avLst/>
@@ -7866,7 +7345,7 @@
                 <a:ea typeface="Pretendard" pitchFamily="34" charset="-122"/>
                 <a:cs typeface="Pretendard" pitchFamily="34" charset="-120"/>
               </a:rPr>
-              <a:t>서초 메디컬 빌딩은 지하2</a:t>
+              <a:t>준공</a:t>
             </a:r>
             <a:endParaRPr lang="en-US" sz="950" dirty="0"/>
           </a:p>
@@ -7880,8 +7359,8 @@
         </p:nvSpPr>
         <p:spPr>
           <a:xfrm>
-            <a:off x="9162059" y="2313432"/>
-            <a:ext cx="2298116" cy="402336"/>
+            <a:off x="9148343" y="2313432"/>
+            <a:ext cx="2311832" cy="274320"/>
           </a:xfrm>
           <a:prstGeom prst="rect">
             <a:avLst/>
@@ -7899,7 +7378,7 @@
               <a:buNone/>
             </a:pPr>
             <a:r>
-              <a:rPr lang="en-US" sz="2000" b="1" dirty="0">
+              <a:rPr lang="en-US" sz="1700" b="1" dirty="0">
                 <a:solidFill>
                   <a:srgbClr val="10161F"/>
                 </a:solidFill>
@@ -7907,22 +7386,49 @@
                 <a:ea typeface="Pretendard" pitchFamily="34" charset="-122"/>
                 <a:cs typeface="Pretendard" pitchFamily="34" charset="-120"/>
               </a:rPr>
-              <a:t>2층</a:t>
-            </a:r>
-            <a:endParaRPr lang="en-US" sz="2000" dirty="0"/>
-          </a:p>
-        </p:txBody>
-      </p:sp>
-      <p:sp>
-        <p:nvSpPr>
-          <p:cNvPr id="20" name="Text 18"/>
-          <p:cNvSpPr/>
-          <p:nvPr/>
-        </p:nvSpPr>
-        <p:spPr>
-          <a:xfrm>
-            <a:off x="566928" y="3502152"/>
-            <a:ext cx="11057839" cy="274320"/>
+              <a:t>2017년</a:t>
+            </a:r>
+            <a:endParaRPr lang="en-US" sz="1700" dirty="0"/>
+          </a:p>
+        </p:txBody>
+      </p:sp>
+      <p:sp>
+        <p:nvSpPr>
+          <p:cNvPr id="20" name="Shape 18"/>
+          <p:cNvSpPr/>
+          <p:nvPr/>
+        </p:nvSpPr>
+        <p:spPr>
+          <a:xfrm>
+            <a:off x="566928" y="3090672"/>
+            <a:ext cx="2641016" cy="960120"/>
+          </a:xfrm>
+          <a:prstGeom prst="roundRect">
+            <a:avLst>
+              <a:gd name="adj" fmla="val 5714"/>
+            </a:avLst>
+          </a:prstGeom>
+          <a:solidFill>
+            <a:srgbClr val="F7FAFC"/>
+          </a:solidFill>
+          <a:ln w="6350">
+            <a:solidFill>
+              <a:srgbClr val="CBD5E0"/>
+            </a:solidFill>
+            <a:prstDash val="solid"/>
+          </a:ln>
+        </p:spPr>
+      </p:sp>
+      <p:sp>
+        <p:nvSpPr>
+          <p:cNvPr id="21" name="Text 19"/>
+          <p:cNvSpPr/>
+          <p:nvPr/>
+        </p:nvSpPr>
+        <p:spPr>
+          <a:xfrm>
+            <a:off x="731520" y="3218688"/>
+            <a:ext cx="2311832" cy="201168"/>
           </a:xfrm>
           <a:prstGeom prst="rect">
             <a:avLst/>
@@ -7938,34 +7444,435 @@
               <a:buNone/>
             </a:pPr>
             <a:r>
-              <a:rPr lang="en-US" sz="1250" b="1" dirty="0">
-                <a:solidFill>
-                  <a:srgbClr val="977024"/>
+              <a:rPr lang="en-US" sz="950" dirty="0">
+                <a:solidFill>
+                  <a:srgbClr val="718096"/>
                 </a:solidFill>
                 <a:latin typeface="Pretendard" pitchFamily="34" charset="0"/>
                 <a:ea typeface="Pretendard" pitchFamily="34" charset="-122"/>
                 <a:cs typeface="Pretendard" pitchFamily="34" charset="-120"/>
               </a:rPr>
-              <a:t>3대 핵심 투자 포인트 (Investment Highlights)</a:t>
-            </a:r>
-            <a:endParaRPr lang="en-US" sz="1250" dirty="0"/>
-          </a:p>
-        </p:txBody>
-      </p:sp>
-      <p:sp>
-        <p:nvSpPr>
-          <p:cNvPr id="21" name="Shape 19"/>
-          <p:cNvSpPr/>
-          <p:nvPr/>
-        </p:nvSpPr>
-        <p:spPr>
-          <a:xfrm>
-            <a:off x="566928" y="3831336"/>
-            <a:ext cx="11057839" cy="585216"/>
+              <a:t>서초 메디컬 빌딩은 지하2</a:t>
+            </a:r>
+            <a:endParaRPr lang="en-US" sz="950" dirty="0"/>
+          </a:p>
+        </p:txBody>
+      </p:sp>
+      <p:sp>
+        <p:nvSpPr>
+          <p:cNvPr id="22" name="Text 20"/>
+          <p:cNvSpPr/>
+          <p:nvPr/>
+        </p:nvSpPr>
+        <p:spPr>
+          <a:xfrm>
+            <a:off x="731520" y="3438144"/>
+            <a:ext cx="2311832" cy="274320"/>
+          </a:xfrm>
+          <a:prstGeom prst="rect">
+            <a:avLst/>
+          </a:prstGeom>
+          <a:noFill/>
+          <a:ln/>
+        </p:spPr>
+        <p:txBody>
+          <a:bodyPr wrap="square" lIns="0" tIns="0" rIns="0" bIns="0" rtlCol="0" anchor="ctr">
+            <a:normAutofit/>
+          </a:bodyPr>
+          <a:lstStyle/>
+          <a:p>
+            <a:pPr indent="0" marL="0">
+              <a:buNone/>
+            </a:pPr>
+            <a:r>
+              <a:rPr lang="en-US" sz="1700" b="1" dirty="0">
+                <a:solidFill>
+                  <a:srgbClr val="10161F"/>
+                </a:solidFill>
+                <a:latin typeface="Pretendard" pitchFamily="34" charset="0"/>
+                <a:ea typeface="Pretendard" pitchFamily="34" charset="-122"/>
+                <a:cs typeface="Pretendard" pitchFamily="34" charset="-120"/>
+              </a:rPr>
+              <a:t>2층</a:t>
+            </a:r>
+            <a:endParaRPr lang="en-US" sz="1700" dirty="0"/>
+          </a:p>
+        </p:txBody>
+      </p:sp>
+      <p:sp>
+        <p:nvSpPr>
+          <p:cNvPr id="23" name="Shape 21"/>
+          <p:cNvSpPr/>
+          <p:nvPr/>
+        </p:nvSpPr>
+        <p:spPr>
+          <a:xfrm>
+            <a:off x="3372536" y="3090672"/>
+            <a:ext cx="2641016" cy="960120"/>
           </a:xfrm>
           <a:prstGeom prst="roundRect">
             <a:avLst>
-              <a:gd name="adj" fmla="val 7813"/>
+              <a:gd name="adj" fmla="val 5714"/>
+            </a:avLst>
+          </a:prstGeom>
+          <a:solidFill>
+            <a:srgbClr val="F7FAFC"/>
+          </a:solidFill>
+          <a:ln w="6350">
+            <a:solidFill>
+              <a:srgbClr val="CBD5E0"/>
+            </a:solidFill>
+            <a:prstDash val="solid"/>
+          </a:ln>
+        </p:spPr>
+      </p:sp>
+      <p:sp>
+        <p:nvSpPr>
+          <p:cNvPr id="24" name="Text 22"/>
+          <p:cNvSpPr/>
+          <p:nvPr/>
+        </p:nvSpPr>
+        <p:spPr>
+          <a:xfrm>
+            <a:off x="3537128" y="3218688"/>
+            <a:ext cx="2311832" cy="201168"/>
+          </a:xfrm>
+          <a:prstGeom prst="rect">
+            <a:avLst/>
+          </a:prstGeom>
+          <a:noFill/>
+          <a:ln/>
+        </p:spPr>
+        <p:txBody>
+          <a:bodyPr wrap="square" lIns="0" tIns="0" rIns="0" bIns="0" rtlCol="0" anchor="ctr"/>
+          <a:lstStyle/>
+          <a:p>
+            <a:pPr indent="0" marL="0">
+              <a:buNone/>
+            </a:pPr>
+            <a:r>
+              <a:rPr lang="en-US" sz="950" dirty="0">
+                <a:solidFill>
+                  <a:srgbClr val="718096"/>
+                </a:solidFill>
+                <a:latin typeface="Pretendard" pitchFamily="34" charset="0"/>
+                <a:ea typeface="Pretendard" pitchFamily="34" charset="-122"/>
+                <a:cs typeface="Pretendard" pitchFamily="34" charset="-120"/>
+              </a:rPr>
+              <a:t>연 수익률(Cap Rate)</a:t>
+            </a:r>
+            <a:endParaRPr lang="en-US" sz="950" dirty="0"/>
+          </a:p>
+        </p:txBody>
+      </p:sp>
+      <p:sp>
+        <p:nvSpPr>
+          <p:cNvPr id="25" name="Text 23"/>
+          <p:cNvSpPr/>
+          <p:nvPr/>
+        </p:nvSpPr>
+        <p:spPr>
+          <a:xfrm>
+            <a:off x="3537128" y="3438144"/>
+            <a:ext cx="2311832" cy="274320"/>
+          </a:xfrm>
+          <a:prstGeom prst="rect">
+            <a:avLst/>
+          </a:prstGeom>
+          <a:noFill/>
+          <a:ln/>
+        </p:spPr>
+        <p:txBody>
+          <a:bodyPr wrap="square" lIns="0" tIns="0" rIns="0" bIns="0" rtlCol="0" anchor="ctr">
+            <a:normAutofit/>
+          </a:bodyPr>
+          <a:lstStyle/>
+          <a:p>
+            <a:pPr indent="0" marL="0">
+              <a:buNone/>
+            </a:pPr>
+            <a:r>
+              <a:rPr lang="en-US" sz="1700" b="1" dirty="0">
+                <a:solidFill>
+                  <a:srgbClr val="10161F"/>
+                </a:solidFill>
+                <a:latin typeface="Arial" pitchFamily="34" charset="0"/>
+                <a:ea typeface="Arial" pitchFamily="34" charset="-122"/>
+                <a:cs typeface="Arial" pitchFamily="34" charset="-120"/>
+              </a:rPr>
+              <a:t>-</a:t>
+            </a:r>
+            <a:endParaRPr lang="en-US" sz="1700" dirty="0"/>
+          </a:p>
+        </p:txBody>
+      </p:sp>
+      <p:sp>
+        <p:nvSpPr>
+          <p:cNvPr id="26" name="Shape 24"/>
+          <p:cNvSpPr/>
+          <p:nvPr/>
+        </p:nvSpPr>
+        <p:spPr>
+          <a:xfrm>
+            <a:off x="6178144" y="3090672"/>
+            <a:ext cx="2641016" cy="960120"/>
+          </a:xfrm>
+          <a:prstGeom prst="roundRect">
+            <a:avLst>
+              <a:gd name="adj" fmla="val 5714"/>
+            </a:avLst>
+          </a:prstGeom>
+          <a:solidFill>
+            <a:srgbClr val="F7FAFC"/>
+          </a:solidFill>
+          <a:ln w="6350">
+            <a:solidFill>
+              <a:srgbClr val="CBD5E0"/>
+            </a:solidFill>
+            <a:prstDash val="solid"/>
+          </a:ln>
+        </p:spPr>
+      </p:sp>
+      <p:sp>
+        <p:nvSpPr>
+          <p:cNvPr id="27" name="Text 25"/>
+          <p:cNvSpPr/>
+          <p:nvPr/>
+        </p:nvSpPr>
+        <p:spPr>
+          <a:xfrm>
+            <a:off x="6342736" y="3218688"/>
+            <a:ext cx="2311832" cy="201168"/>
+          </a:xfrm>
+          <a:prstGeom prst="rect">
+            <a:avLst/>
+          </a:prstGeom>
+          <a:noFill/>
+          <a:ln/>
+        </p:spPr>
+        <p:txBody>
+          <a:bodyPr wrap="square" lIns="0" tIns="0" rIns="0" bIns="0" rtlCol="0" anchor="ctr"/>
+          <a:lstStyle/>
+          <a:p>
+            <a:pPr indent="0" marL="0">
+              <a:buNone/>
+            </a:pPr>
+            <a:r>
+              <a:rPr lang="en-US" sz="950" dirty="0">
+                <a:solidFill>
+                  <a:srgbClr val="718096"/>
+                </a:solidFill>
+                <a:latin typeface="Pretendard" pitchFamily="34" charset="0"/>
+                <a:ea typeface="Pretendard" pitchFamily="34" charset="-122"/>
+                <a:cs typeface="Pretendard" pitchFamily="34" charset="-120"/>
+              </a:rPr>
+              <a:t>실투자금</a:t>
+            </a:r>
+            <a:endParaRPr lang="en-US" sz="950" dirty="0"/>
+          </a:p>
+        </p:txBody>
+      </p:sp>
+      <p:sp>
+        <p:nvSpPr>
+          <p:cNvPr id="28" name="Text 26"/>
+          <p:cNvSpPr/>
+          <p:nvPr/>
+        </p:nvSpPr>
+        <p:spPr>
+          <a:xfrm>
+            <a:off x="6342736" y="3438144"/>
+            <a:ext cx="2311832" cy="274320"/>
+          </a:xfrm>
+          <a:prstGeom prst="rect">
+            <a:avLst/>
+          </a:prstGeom>
+          <a:noFill/>
+          <a:ln/>
+        </p:spPr>
+        <p:txBody>
+          <a:bodyPr wrap="square" lIns="0" tIns="0" rIns="0" bIns="0" rtlCol="0" anchor="ctr">
+            <a:normAutofit/>
+          </a:bodyPr>
+          <a:lstStyle/>
+          <a:p>
+            <a:pPr indent="0" marL="0">
+              <a:buNone/>
+            </a:pPr>
+            <a:r>
+              <a:rPr lang="en-US" sz="1700" b="1" dirty="0">
+                <a:solidFill>
+                  <a:srgbClr val="10161F"/>
+                </a:solidFill>
+                <a:latin typeface="Arial" pitchFamily="34" charset="0"/>
+                <a:ea typeface="Arial" pitchFamily="34" charset="-122"/>
+                <a:cs typeface="Arial" pitchFamily="34" charset="-120"/>
+              </a:rPr>
+              <a:t>-</a:t>
+            </a:r>
+            <a:endParaRPr lang="en-US" sz="1700" dirty="0"/>
+          </a:p>
+        </p:txBody>
+      </p:sp>
+      <p:sp>
+        <p:nvSpPr>
+          <p:cNvPr id="29" name="Shape 27"/>
+          <p:cNvSpPr/>
+          <p:nvPr/>
+        </p:nvSpPr>
+        <p:spPr>
+          <a:xfrm>
+            <a:off x="8983751" y="3090672"/>
+            <a:ext cx="2641016" cy="960120"/>
+          </a:xfrm>
+          <a:prstGeom prst="roundRect">
+            <a:avLst>
+              <a:gd name="adj" fmla="val 5714"/>
+            </a:avLst>
+          </a:prstGeom>
+          <a:solidFill>
+            <a:srgbClr val="F7FAFC"/>
+          </a:solidFill>
+          <a:ln w="6350">
+            <a:solidFill>
+              <a:srgbClr val="CBD5E0"/>
+            </a:solidFill>
+            <a:prstDash val="solid"/>
+          </a:ln>
+        </p:spPr>
+      </p:sp>
+      <p:sp>
+        <p:nvSpPr>
+          <p:cNvPr id="30" name="Text 28"/>
+          <p:cNvSpPr/>
+          <p:nvPr/>
+        </p:nvSpPr>
+        <p:spPr>
+          <a:xfrm>
+            <a:off x="9148343" y="3218688"/>
+            <a:ext cx="2311832" cy="201168"/>
+          </a:xfrm>
+          <a:prstGeom prst="rect">
+            <a:avLst/>
+          </a:prstGeom>
+          <a:noFill/>
+          <a:ln/>
+        </p:spPr>
+        <p:txBody>
+          <a:bodyPr wrap="square" lIns="0" tIns="0" rIns="0" bIns="0" rtlCol="0" anchor="ctr"/>
+          <a:lstStyle/>
+          <a:p>
+            <a:pPr indent="0" marL="0">
+              <a:buNone/>
+            </a:pPr>
+            <a:r>
+              <a:rPr lang="en-US" sz="950" dirty="0">
+                <a:solidFill>
+                  <a:srgbClr val="718096"/>
+                </a:solidFill>
+                <a:latin typeface="Pretendard" pitchFamily="34" charset="0"/>
+                <a:ea typeface="Pretendard" pitchFamily="34" charset="-122"/>
+                <a:cs typeface="Pretendard" pitchFamily="34" charset="-120"/>
+              </a:rPr>
+              <a:t>공실 현황</a:t>
+            </a:r>
+            <a:endParaRPr lang="en-US" sz="950" dirty="0"/>
+          </a:p>
+        </p:txBody>
+      </p:sp>
+      <p:sp>
+        <p:nvSpPr>
+          <p:cNvPr id="31" name="Text 29"/>
+          <p:cNvSpPr/>
+          <p:nvPr/>
+        </p:nvSpPr>
+        <p:spPr>
+          <a:xfrm>
+            <a:off x="9148343" y="3438144"/>
+            <a:ext cx="2311832" cy="274320"/>
+          </a:xfrm>
+          <a:prstGeom prst="rect">
+            <a:avLst/>
+          </a:prstGeom>
+          <a:noFill/>
+          <a:ln/>
+        </p:spPr>
+        <p:txBody>
+          <a:bodyPr wrap="square" lIns="0" tIns="0" rIns="0" bIns="0" rtlCol="0" anchor="ctr">
+            <a:normAutofit/>
+          </a:bodyPr>
+          <a:lstStyle/>
+          <a:p>
+            <a:pPr indent="0" marL="0">
+              <a:buNone/>
+            </a:pPr>
+            <a:r>
+              <a:rPr lang="en-US" sz="1700" b="1" dirty="0">
+                <a:solidFill>
+                  <a:srgbClr val="10161F"/>
+                </a:solidFill>
+                <a:latin typeface="Pretendard" pitchFamily="34" charset="0"/>
+                <a:ea typeface="Pretendard" pitchFamily="34" charset="-122"/>
+                <a:cs typeface="Pretendard" pitchFamily="34" charset="-120"/>
+              </a:rPr>
+              <a:t>확인 중</a:t>
+            </a:r>
+            <a:endParaRPr lang="en-US" sz="1700" dirty="0"/>
+          </a:p>
+        </p:txBody>
+      </p:sp>
+      <p:sp>
+        <p:nvSpPr>
+          <p:cNvPr id="32" name="Text 30"/>
+          <p:cNvSpPr/>
+          <p:nvPr/>
+        </p:nvSpPr>
+        <p:spPr>
+          <a:xfrm>
+            <a:off x="566928" y="4306824"/>
+            <a:ext cx="11057839" cy="274320"/>
+          </a:xfrm>
+          <a:prstGeom prst="rect">
+            <a:avLst/>
+          </a:prstGeom>
+          <a:noFill/>
+          <a:ln/>
+        </p:spPr>
+        <p:txBody>
+          <a:bodyPr wrap="square" lIns="0" tIns="0" rIns="0" bIns="0" rtlCol="0" anchor="ctr"/>
+          <a:lstStyle/>
+          <a:p>
+            <a:pPr indent="0" marL="0">
+              <a:buNone/>
+            </a:pPr>
+            <a:r>
+              <a:rPr lang="en-US" sz="1250" b="1" dirty="0">
+                <a:solidFill>
+                  <a:srgbClr val="977024"/>
+                </a:solidFill>
+                <a:latin typeface="Pretendard" pitchFamily="34" charset="0"/>
+                <a:ea typeface="Pretendard" pitchFamily="34" charset="-122"/>
+                <a:cs typeface="Pretendard" pitchFamily="34" charset="-120"/>
+              </a:rPr>
+              <a:t>3대 핵심 투자 포인트 (Investment Highlights)</a:t>
+            </a:r>
+            <a:endParaRPr lang="en-US" sz="1250" dirty="0"/>
+          </a:p>
+        </p:txBody>
+      </p:sp>
+      <p:sp>
+        <p:nvSpPr>
+          <p:cNvPr id="33" name="Shape 31"/>
+          <p:cNvSpPr/>
+          <p:nvPr/>
+        </p:nvSpPr>
+        <p:spPr>
+          <a:xfrm>
+            <a:off x="566928" y="4636008"/>
+            <a:ext cx="11057839" cy="396240"/>
+          </a:xfrm>
+          <a:prstGeom prst="roundRect">
+            <a:avLst>
+              <a:gd name="adj" fmla="val 11538"/>
             </a:avLst>
           </a:prstGeom>
           <a:solidFill>
@@ -7981,18 +7888,18 @@
       </p:sp>
       <p:sp>
         <p:nvSpPr>
-          <p:cNvPr id="22" name="Shape 20"/>
-          <p:cNvSpPr/>
-          <p:nvPr/>
-        </p:nvSpPr>
-        <p:spPr>
-          <a:xfrm>
-            <a:off x="676656" y="3941064"/>
-            <a:ext cx="411480" cy="365760"/>
+          <p:cNvPr id="34" name="Shape 32"/>
+          <p:cNvSpPr/>
+          <p:nvPr/>
+        </p:nvSpPr>
+        <p:spPr>
+          <a:xfrm>
+            <a:off x="676656" y="4709160"/>
+            <a:ext cx="411480" cy="249936"/>
           </a:xfrm>
           <a:prstGeom prst="roundRect">
             <a:avLst>
-              <a:gd name="adj" fmla="val 10000"/>
+              <a:gd name="adj" fmla="val 14634"/>
             </a:avLst>
           </a:prstGeom>
           <a:solidFill>
@@ -8008,14 +7915,14 @@
       </p:sp>
       <p:sp>
         <p:nvSpPr>
-          <p:cNvPr id="23" name="Text 21"/>
-          <p:cNvSpPr/>
-          <p:nvPr/>
-        </p:nvSpPr>
-        <p:spPr>
-          <a:xfrm>
-            <a:off x="676656" y="3941064"/>
-            <a:ext cx="411480" cy="365760"/>
+          <p:cNvPr id="35" name="Text 33"/>
+          <p:cNvSpPr/>
+          <p:nvPr/>
+        </p:nvSpPr>
+        <p:spPr>
+          <a:xfrm>
+            <a:off x="676656" y="4709160"/>
+            <a:ext cx="411480" cy="249936"/>
           </a:xfrm>
           <a:prstGeom prst="rect">
             <a:avLst/>
@@ -8047,14 +7954,14 @@
       </p:sp>
       <p:sp>
         <p:nvSpPr>
-          <p:cNvPr id="24" name="Text 22"/>
-          <p:cNvSpPr/>
-          <p:nvPr/>
-        </p:nvSpPr>
-        <p:spPr>
-          <a:xfrm>
-            <a:off x="1207008" y="3904488"/>
-            <a:ext cx="10280599" cy="438912"/>
+          <p:cNvPr id="36" name="Text 34"/>
+          <p:cNvSpPr/>
+          <p:nvPr/>
+        </p:nvSpPr>
+        <p:spPr>
+          <a:xfrm>
+            <a:off x="1207008" y="4672584"/>
+            <a:ext cx="10280599" cy="323088"/>
           </a:xfrm>
           <a:prstGeom prst="rect">
             <a:avLst/>
@@ -8070,7 +7977,7 @@
               <a:buNone/>
             </a:pPr>
             <a:r>
-              <a:rPr lang="en-US" sz="1150" dirty="0">
+              <a:rPr lang="en-US" sz="1000" dirty="0">
                 <a:solidFill>
                   <a:srgbClr val="10161F"/>
                 </a:solidFill>
@@ -8078,26 +7985,26 @@
                 <a:ea typeface="Pretendard" pitchFamily="34" charset="-122"/>
                 <a:cs typeface="Pretendard" pitchFamily="34" charset="-120"/>
               </a:rPr>
-              <a:t>입지 분석: 핵심권역 소재 자산의 입지 특성 및 대지 지분 가치 확인 필요</a:t>
-            </a:r>
-            <a:endParaRPr lang="en-US" sz="1150" dirty="0"/>
-          </a:p>
-        </p:txBody>
-      </p:sp>
-      <p:sp>
-        <p:nvSpPr>
-          <p:cNvPr id="25" name="Shape 23"/>
-          <p:cNvSpPr/>
-          <p:nvPr/>
-        </p:nvSpPr>
-        <p:spPr>
-          <a:xfrm>
-            <a:off x="566928" y="4526280"/>
-            <a:ext cx="11057839" cy="585216"/>
+              <a:t>입지 가치: 대중교통 역세권 입지, 해당 권역 업무·상업 중심지 배후 수요 확보</a:t>
+            </a:r>
+            <a:endParaRPr lang="en-US" sz="1000" dirty="0"/>
+          </a:p>
+        </p:txBody>
+      </p:sp>
+      <p:sp>
+        <p:nvSpPr>
+          <p:cNvPr id="37" name="Shape 35"/>
+          <p:cNvSpPr/>
+          <p:nvPr/>
+        </p:nvSpPr>
+        <p:spPr>
+          <a:xfrm>
+            <a:off x="566928" y="5114544"/>
+            <a:ext cx="11057839" cy="396240"/>
           </a:xfrm>
           <a:prstGeom prst="roundRect">
             <a:avLst>
-              <a:gd name="adj" fmla="val 7813"/>
+              <a:gd name="adj" fmla="val 11538"/>
             </a:avLst>
           </a:prstGeom>
           <a:solidFill>
@@ -8113,18 +8020,18 @@
       </p:sp>
       <p:sp>
         <p:nvSpPr>
-          <p:cNvPr id="26" name="Shape 24"/>
-          <p:cNvSpPr/>
-          <p:nvPr/>
-        </p:nvSpPr>
-        <p:spPr>
-          <a:xfrm>
-            <a:off x="676656" y="4636008"/>
-            <a:ext cx="411480" cy="365760"/>
+          <p:cNvPr id="38" name="Shape 36"/>
+          <p:cNvSpPr/>
+          <p:nvPr/>
+        </p:nvSpPr>
+        <p:spPr>
+          <a:xfrm>
+            <a:off x="676656" y="5187696"/>
+            <a:ext cx="411480" cy="249936"/>
           </a:xfrm>
           <a:prstGeom prst="roundRect">
             <a:avLst>
-              <a:gd name="adj" fmla="val 10000"/>
+              <a:gd name="adj" fmla="val 14634"/>
             </a:avLst>
           </a:prstGeom>
           <a:solidFill>
@@ -8140,14 +8047,14 @@
       </p:sp>
       <p:sp>
         <p:nvSpPr>
-          <p:cNvPr id="27" name="Text 25"/>
-          <p:cNvSpPr/>
-          <p:nvPr/>
-        </p:nvSpPr>
-        <p:spPr>
-          <a:xfrm>
-            <a:off x="676656" y="4636008"/>
-            <a:ext cx="411480" cy="365760"/>
+          <p:cNvPr id="39" name="Text 37"/>
+          <p:cNvSpPr/>
+          <p:nvPr/>
+        </p:nvSpPr>
+        <p:spPr>
+          <a:xfrm>
+            <a:off x="676656" y="5187696"/>
+            <a:ext cx="411480" cy="249936"/>
           </a:xfrm>
           <a:prstGeom prst="rect">
             <a:avLst/>
@@ -8179,14 +8086,14 @@
       </p:sp>
       <p:sp>
         <p:nvSpPr>
-          <p:cNvPr id="28" name="Text 26"/>
-          <p:cNvSpPr/>
-          <p:nvPr/>
-        </p:nvSpPr>
-        <p:spPr>
-          <a:xfrm>
-            <a:off x="1207008" y="4599432"/>
-            <a:ext cx="10280599" cy="438912"/>
+          <p:cNvPr id="40" name="Text 38"/>
+          <p:cNvSpPr/>
+          <p:nvPr/>
+        </p:nvSpPr>
+        <p:spPr>
+          <a:xfrm>
+            <a:off x="1207008" y="5151120"/>
+            <a:ext cx="10280599" cy="323088"/>
           </a:xfrm>
           <a:prstGeom prst="rect">
             <a:avLst/>
@@ -8202,7 +8109,7 @@
               <a:buNone/>
             </a:pPr>
             <a:r>
-              <a:rPr lang="en-US" sz="1150" dirty="0">
+              <a:rPr lang="en-US" sz="1000" dirty="0">
                 <a:solidFill>
                   <a:srgbClr val="10161F"/>
                 </a:solidFill>
@@ -8210,26 +8117,26 @@
                 <a:ea typeface="Pretendard" pitchFamily="34" charset="-122"/>
                 <a:cs typeface="Pretendard" pitchFamily="34" charset="-120"/>
               </a:rPr>
-              <a:t>수익 구조: 매매 시장 적정가 수준 대비 임대수익 현황 분석 필요</a:t>
-            </a:r>
-            <a:endParaRPr lang="en-US" sz="1150" dirty="0"/>
-          </a:p>
-        </p:txBody>
-      </p:sp>
-      <p:sp>
-        <p:nvSpPr>
-          <p:cNvPr id="29" name="Shape 27"/>
-          <p:cNvSpPr/>
-          <p:nvPr/>
-        </p:nvSpPr>
-        <p:spPr>
-          <a:xfrm>
-            <a:off x="566928" y="5221224"/>
-            <a:ext cx="11057839" cy="585216"/>
+              <a:t>자산 규모: 해당 권역 소재 단독 빌딩 매입 기회</a:t>
+            </a:r>
+            <a:endParaRPr lang="en-US" sz="1000" dirty="0"/>
+          </a:p>
+        </p:txBody>
+      </p:sp>
+      <p:sp>
+        <p:nvSpPr>
+          <p:cNvPr id="41" name="Shape 39"/>
+          <p:cNvSpPr/>
+          <p:nvPr/>
+        </p:nvSpPr>
+        <p:spPr>
+          <a:xfrm>
+            <a:off x="566928" y="5593080"/>
+            <a:ext cx="11057839" cy="396240"/>
           </a:xfrm>
           <a:prstGeom prst="roundRect">
             <a:avLst>
-              <a:gd name="adj" fmla="val 7813"/>
+              <a:gd name="adj" fmla="val 11538"/>
             </a:avLst>
           </a:prstGeom>
           <a:solidFill>
@@ -8245,18 +8152,18 @@
       </p:sp>
       <p:sp>
         <p:nvSpPr>
-          <p:cNvPr id="30" name="Shape 28"/>
-          <p:cNvSpPr/>
-          <p:nvPr/>
-        </p:nvSpPr>
-        <p:spPr>
-          <a:xfrm>
-            <a:off x="676656" y="5330952"/>
-            <a:ext cx="411480" cy="365760"/>
+          <p:cNvPr id="42" name="Shape 40"/>
+          <p:cNvSpPr/>
+          <p:nvPr/>
+        </p:nvSpPr>
+        <p:spPr>
+          <a:xfrm>
+            <a:off x="676656" y="5666232"/>
+            <a:ext cx="411480" cy="249936"/>
           </a:xfrm>
           <a:prstGeom prst="roundRect">
             <a:avLst>
-              <a:gd name="adj" fmla="val 10000"/>
+              <a:gd name="adj" fmla="val 14634"/>
             </a:avLst>
           </a:prstGeom>
           <a:solidFill>
@@ -8272,14 +8179,14 @@
       </p:sp>
       <p:sp>
         <p:nvSpPr>
-          <p:cNvPr id="31" name="Text 29"/>
-          <p:cNvSpPr/>
-          <p:nvPr/>
-        </p:nvSpPr>
-        <p:spPr>
-          <a:xfrm>
-            <a:off x="676656" y="5330952"/>
-            <a:ext cx="411480" cy="365760"/>
+          <p:cNvPr id="43" name="Text 41"/>
+          <p:cNvSpPr/>
+          <p:nvPr/>
+        </p:nvSpPr>
+        <p:spPr>
+          <a:xfrm>
+            <a:off x="676656" y="5666232"/>
+            <a:ext cx="411480" cy="249936"/>
           </a:xfrm>
           <a:prstGeom prst="rect">
             <a:avLst/>
@@ -8311,14 +8218,14 @@
       </p:sp>
       <p:sp>
         <p:nvSpPr>
-          <p:cNvPr id="32" name="Text 30"/>
-          <p:cNvSpPr/>
-          <p:nvPr/>
-        </p:nvSpPr>
-        <p:spPr>
-          <a:xfrm>
-            <a:off x="1207008" y="5294376"/>
-            <a:ext cx="10280599" cy="438912"/>
+          <p:cNvPr id="44" name="Text 42"/>
+          <p:cNvSpPr/>
+          <p:nvPr/>
+        </p:nvSpPr>
+        <p:spPr>
+          <a:xfrm>
+            <a:off x="1207008" y="5629656"/>
+            <a:ext cx="10280599" cy="323088"/>
           </a:xfrm>
           <a:prstGeom prst="rect">
             <a:avLst/>
@@ -8334,7 +8241,7 @@
               <a:buNone/>
             </a:pPr>
             <a:r>
-              <a:rPr lang="en-US" sz="1150" dirty="0">
+              <a:rPr lang="en-US" sz="1000" dirty="0">
                 <a:solidFill>
                   <a:srgbClr val="10161F"/>
                 </a:solidFill>
@@ -8342,15 +8249,15 @@
                 <a:ea typeface="Pretendard" pitchFamily="34" charset="-122"/>
                 <a:cs typeface="Pretendard" pitchFamily="34" charset="-120"/>
               </a:rPr>
-              <a:t>향후 검토: 권역 개발 동향 및 공법상 변경 가능성 확인 필요</a:t>
-            </a:r>
-            <a:endParaRPr lang="en-US" sz="1150" dirty="0"/>
-          </a:p>
-        </p:txBody>
-      </p:sp>
-      <p:sp>
-        <p:nvSpPr>
-          <p:cNvPr id="33" name="Text 31"/>
+              <a:t>수익 안정성: 안정적 임대수익 기반 투자 매물</a:t>
+            </a:r>
+            <a:endParaRPr lang="en-US" sz="1000" dirty="0"/>
+          </a:p>
+        </p:txBody>
+      </p:sp>
+      <p:sp>
+        <p:nvSpPr>
+          <p:cNvPr id="45" name="Text 43"/>
           <p:cNvSpPr/>
           <p:nvPr/>
         </p:nvSpPr>
@@ -8389,7 +8296,7 @@
       </p:sp>
       <p:sp>
         <p:nvSpPr>
-          <p:cNvPr id="34" name="Text 32"/>
+          <p:cNvPr id="46" name="Text 44"/>
           <p:cNvSpPr/>
           <p:nvPr/>
         </p:nvSpPr>
@@ -8550,7 +8457,7 @@
                 <a:ea typeface="Arial" pitchFamily="34" charset="-122"/>
                 <a:cs typeface="Arial" pitchFamily="34" charset="-120"/>
               </a:rPr>
-              <a:t>Location</a:t>
+              <a:t>Land</a:t>
             </a:r>
             <a:endParaRPr lang="en-US" sz="950" dirty="0"/>
           </a:p>
@@ -8589,7 +8496,7 @@
                 <a:ea typeface="Pretendard" pitchFamily="34" charset="-122"/>
                 <a:cs typeface="Pretendard" pitchFamily="34" charset="-120"/>
               </a:rPr>
-              <a:t>입지 및 교통</a:t>
+              <a:t>토지 현황</a:t>
             </a:r>
             <a:endParaRPr lang="en-US" sz="2300" dirty="0"/>
           </a:p>
@@ -8603,8 +8510,8 @@
         </p:nvSpPr>
         <p:spPr>
           <a:xfrm>
-            <a:off x="566928" y="6382512"/>
-            <a:ext cx="7315200" cy="219456"/>
+            <a:off x="566928" y="1371600"/>
+            <a:ext cx="6858000" cy="237744"/>
           </a:xfrm>
           <a:prstGeom prst="rect">
             <a:avLst/>
@@ -8620,14 +8527,599 @@
               <a:buNone/>
             </a:pPr>
             <a:r>
-              <a:rPr lang="en-US" sz="800" dirty="0">
-                <a:solidFill>
-                  <a:srgbClr val="718096"/>
+              <a:rPr lang="en-US" sz="1100" b="1" dirty="0">
+                <a:solidFill>
+                  <a:srgbClr val="10161F"/>
                 </a:solidFill>
                 <a:latin typeface="Pretendard" pitchFamily="34" charset="0"/>
                 <a:ea typeface="Pretendard" pitchFamily="34" charset="-122"/>
                 <a:cs typeface="Pretendard" pitchFamily="34" charset="-120"/>
               </a:rPr>
+              <a:t>토지 현황</a:t>
+            </a:r>
+            <a:endParaRPr lang="en-US" sz="1100" dirty="0"/>
+          </a:p>
+        </p:txBody>
+      </p:sp>
+      <p:sp>
+        <p:nvSpPr>
+          <p:cNvPr id="7" name="Text 5"/>
+          <p:cNvSpPr/>
+          <p:nvPr/>
+        </p:nvSpPr>
+        <p:spPr>
+          <a:xfrm>
+            <a:off x="566928" y="1645920"/>
+            <a:ext cx="2606040" cy="438912"/>
+          </a:xfrm>
+          <a:prstGeom prst="rect">
+            <a:avLst/>
+          </a:prstGeom>
+          <a:noFill/>
+          <a:ln/>
+        </p:spPr>
+        <p:txBody>
+          <a:bodyPr wrap="square" lIns="0" tIns="0" rIns="0" bIns="0" rtlCol="0" anchor="ctr"/>
+          <a:lstStyle/>
+          <a:p>
+            <a:pPr indent="0" marL="0">
+              <a:lnSpc>
+                <a:spcPct val="120000"/>
+              </a:lnSpc>
+              <a:buNone/>
+            </a:pPr>
+            <a:r>
+              <a:rPr lang="en-US" sz="1350" dirty="0">
+                <a:solidFill>
+                  <a:srgbClr val="718096"/>
+                </a:solidFill>
+                <a:latin typeface="Pretendard" pitchFamily="34" charset="0"/>
+                <a:ea typeface="Pretendard" pitchFamily="34" charset="-122"/>
+                <a:cs typeface="Pretendard" pitchFamily="34" charset="-120"/>
+              </a:rPr>
+              <a:t>대지면적</a:t>
+            </a:r>
+            <a:endParaRPr lang="en-US" sz="1350" dirty="0"/>
+          </a:p>
+        </p:txBody>
+      </p:sp>
+      <p:sp>
+        <p:nvSpPr>
+          <p:cNvPr id="8" name="Text 6"/>
+          <p:cNvSpPr/>
+          <p:nvPr/>
+        </p:nvSpPr>
+        <p:spPr>
+          <a:xfrm>
+            <a:off x="3172968" y="1645920"/>
+            <a:ext cx="4251960" cy="438912"/>
+          </a:xfrm>
+          <a:prstGeom prst="rect">
+            <a:avLst/>
+          </a:prstGeom>
+          <a:noFill/>
+          <a:ln/>
+        </p:spPr>
+        <p:txBody>
+          <a:bodyPr wrap="square" lIns="0" tIns="0" rIns="0" bIns="0" rtlCol="0" anchor="ctr"/>
+          <a:lstStyle/>
+          <a:p>
+            <a:pPr indent="0" marL="0">
+              <a:lnSpc>
+                <a:spcPct val="120000"/>
+              </a:lnSpc>
+              <a:buNone/>
+            </a:pPr>
+            <a:r>
+              <a:rPr lang="en-US" sz="1350" b="1" dirty="0">
+                <a:solidFill>
+                  <a:srgbClr val="10161F"/>
+                </a:solidFill>
+                <a:latin typeface="Pretendard" pitchFamily="34" charset="0"/>
+                <a:ea typeface="Pretendard" pitchFamily="34" charset="-122"/>
+                <a:cs typeface="Pretendard" pitchFamily="34" charset="-120"/>
+              </a:rPr>
+              <a:t>142.5평</a:t>
+            </a:r>
+            <a:endParaRPr lang="en-US" sz="1350" dirty="0"/>
+          </a:p>
+        </p:txBody>
+      </p:sp>
+      <p:sp>
+        <p:nvSpPr>
+          <p:cNvPr id="9" name="Shape 7"/>
+          <p:cNvSpPr/>
+          <p:nvPr/>
+        </p:nvSpPr>
+        <p:spPr>
+          <a:xfrm>
+            <a:off x="566928" y="2084832"/>
+            <a:ext cx="6858000" cy="0"/>
+          </a:xfrm>
+          <a:prstGeom prst="line">
+            <a:avLst/>
+          </a:prstGeom>
+          <a:noFill/>
+          <a:ln w="3810">
+            <a:solidFill>
+              <a:srgbClr val="CBD5E0"/>
+            </a:solidFill>
+            <a:prstDash val="solid"/>
+          </a:ln>
+        </p:spPr>
+      </p:sp>
+      <p:sp>
+        <p:nvSpPr>
+          <p:cNvPr id="10" name="Text 8"/>
+          <p:cNvSpPr/>
+          <p:nvPr/>
+        </p:nvSpPr>
+        <p:spPr>
+          <a:xfrm>
+            <a:off x="566928" y="2084832"/>
+            <a:ext cx="2606040" cy="438912"/>
+          </a:xfrm>
+          <a:prstGeom prst="rect">
+            <a:avLst/>
+          </a:prstGeom>
+          <a:noFill/>
+          <a:ln/>
+        </p:spPr>
+        <p:txBody>
+          <a:bodyPr wrap="square" lIns="0" tIns="0" rIns="0" bIns="0" rtlCol="0" anchor="ctr"/>
+          <a:lstStyle/>
+          <a:p>
+            <a:pPr indent="0" marL="0">
+              <a:lnSpc>
+                <a:spcPct val="120000"/>
+              </a:lnSpc>
+              <a:buNone/>
+            </a:pPr>
+            <a:r>
+              <a:rPr lang="en-US" sz="1350" dirty="0">
+                <a:solidFill>
+                  <a:srgbClr val="718096"/>
+                </a:solidFill>
+                <a:latin typeface="Pretendard" pitchFamily="34" charset="0"/>
+                <a:ea typeface="Pretendard" pitchFamily="34" charset="-122"/>
+                <a:cs typeface="Pretendard" pitchFamily="34" charset="-120"/>
+              </a:rPr>
+              <a:t>연면적</a:t>
+            </a:r>
+            <a:endParaRPr lang="en-US" sz="1350" dirty="0"/>
+          </a:p>
+        </p:txBody>
+      </p:sp>
+      <p:sp>
+        <p:nvSpPr>
+          <p:cNvPr id="11" name="Text 9"/>
+          <p:cNvSpPr/>
+          <p:nvPr/>
+        </p:nvSpPr>
+        <p:spPr>
+          <a:xfrm>
+            <a:off x="3172968" y="2084832"/>
+            <a:ext cx="4251960" cy="438912"/>
+          </a:xfrm>
+          <a:prstGeom prst="rect">
+            <a:avLst/>
+          </a:prstGeom>
+          <a:noFill/>
+          <a:ln/>
+        </p:spPr>
+        <p:txBody>
+          <a:bodyPr wrap="square" lIns="0" tIns="0" rIns="0" bIns="0" rtlCol="0" anchor="ctr"/>
+          <a:lstStyle/>
+          <a:p>
+            <a:pPr indent="0" marL="0">
+              <a:lnSpc>
+                <a:spcPct val="120000"/>
+              </a:lnSpc>
+              <a:buNone/>
+            </a:pPr>
+            <a:r>
+              <a:rPr lang="en-US" sz="1350" b="1" dirty="0">
+                <a:solidFill>
+                  <a:srgbClr val="10161F"/>
+                </a:solidFill>
+                <a:latin typeface="Pretendard" pitchFamily="34" charset="0"/>
+                <a:ea typeface="Pretendard" pitchFamily="34" charset="-122"/>
+                <a:cs typeface="Pretendard" pitchFamily="34" charset="-120"/>
+              </a:rPr>
+              <a:t>620.8평</a:t>
+            </a:r>
+            <a:endParaRPr lang="en-US" sz="1350" dirty="0"/>
+          </a:p>
+        </p:txBody>
+      </p:sp>
+      <p:sp>
+        <p:nvSpPr>
+          <p:cNvPr id="12" name="Shape 10"/>
+          <p:cNvSpPr/>
+          <p:nvPr/>
+        </p:nvSpPr>
+        <p:spPr>
+          <a:xfrm>
+            <a:off x="7604608" y="1371600"/>
+            <a:ext cx="0" cy="4754880"/>
+          </a:xfrm>
+          <a:prstGeom prst="line">
+            <a:avLst/>
+          </a:prstGeom>
+          <a:noFill/>
+          <a:ln w="8890">
+            <a:solidFill>
+              <a:srgbClr val="B98A2E"/>
+            </a:solidFill>
+            <a:prstDash val="solid"/>
+          </a:ln>
+        </p:spPr>
+      </p:sp>
+      <p:sp>
+        <p:nvSpPr>
+          <p:cNvPr id="13" name="Shape 11"/>
+          <p:cNvSpPr/>
+          <p:nvPr/>
+        </p:nvSpPr>
+        <p:spPr>
+          <a:xfrm>
+            <a:off x="7784287" y="1645920"/>
+            <a:ext cx="3840480" cy="2103120"/>
+          </a:xfrm>
+          <a:prstGeom prst="roundRect">
+            <a:avLst>
+              <a:gd name="adj" fmla="val 2609"/>
+            </a:avLst>
+          </a:prstGeom>
+          <a:solidFill>
+            <a:srgbClr val="BEE3F8"/>
+          </a:solidFill>
+          <a:ln/>
+        </p:spPr>
+      </p:sp>
+      <p:sp>
+        <p:nvSpPr>
+          <p:cNvPr id="14" name="Shape 12"/>
+          <p:cNvSpPr/>
+          <p:nvPr/>
+        </p:nvSpPr>
+        <p:spPr>
+          <a:xfrm>
+            <a:off x="7784287" y="1700784"/>
+            <a:ext cx="36576" cy="1993392"/>
+          </a:xfrm>
+          <a:prstGeom prst="rect">
+            <a:avLst/>
+          </a:prstGeom>
+          <a:solidFill>
+            <a:srgbClr val="2B6CB0"/>
+          </a:solidFill>
+          <a:ln/>
+        </p:spPr>
+      </p:sp>
+      <p:sp>
+        <p:nvSpPr>
+          <p:cNvPr id="15" name="Text 13"/>
+          <p:cNvSpPr/>
+          <p:nvPr/>
+        </p:nvSpPr>
+        <p:spPr>
+          <a:xfrm>
+            <a:off x="7967167" y="1755648"/>
+            <a:ext cx="3511296" cy="201168"/>
+          </a:xfrm>
+          <a:prstGeom prst="rect">
+            <a:avLst/>
+          </a:prstGeom>
+          <a:noFill/>
+          <a:ln/>
+        </p:spPr>
+        <p:txBody>
+          <a:bodyPr wrap="square" lIns="0" tIns="0" rIns="0" bIns="0" rtlCol="0" anchor="ctr"/>
+          <a:lstStyle/>
+          <a:p>
+            <a:pPr indent="0" marL="0">
+              <a:buNone/>
+            </a:pPr>
+            <a:r>
+              <a:rPr lang="en-US" sz="1050" b="1" dirty="0">
+                <a:solidFill>
+                  <a:srgbClr val="2B6CB0"/>
+                </a:solidFill>
+                <a:latin typeface="Pretendard" pitchFamily="34" charset="0"/>
+                <a:ea typeface="Pretendard" pitchFamily="34" charset="-122"/>
+                <a:cs typeface="Pretendard" pitchFamily="34" charset="-120"/>
+              </a:rPr>
+              <a:t>토지 및 건축 규제 포인트</a:t>
+            </a:r>
+            <a:endParaRPr lang="en-US" sz="1050" dirty="0"/>
+          </a:p>
+        </p:txBody>
+      </p:sp>
+      <p:sp>
+        <p:nvSpPr>
+          <p:cNvPr id="16" name="Text 14"/>
+          <p:cNvSpPr/>
+          <p:nvPr/>
+        </p:nvSpPr>
+        <p:spPr>
+          <a:xfrm>
+            <a:off x="7967167" y="1975104"/>
+            <a:ext cx="3511296" cy="1700784"/>
+          </a:xfrm>
+          <a:prstGeom prst="rect">
+            <a:avLst/>
+          </a:prstGeom>
+          <a:noFill/>
+          <a:ln/>
+        </p:spPr>
+        <p:txBody>
+          <a:bodyPr wrap="square" lIns="0" tIns="0" rIns="0" bIns="0" rtlCol="0" anchor="t"/>
+          <a:lstStyle/>
+          <a:p>
+            <a:pPr marL="342900" indent="-342900">
+              <a:lnSpc>
+                <a:spcPct val="120000"/>
+              </a:lnSpc>
+              <a:buSzPct val="100000"/>
+              <a:buChar char="•"/>
+            </a:pPr>
+            <a:r>
+              <a:rPr lang="en-US" sz="930" dirty="0">
+                <a:solidFill>
+                  <a:srgbClr val="10161F"/>
+                </a:solidFill>
+                <a:latin typeface="Pretendard" pitchFamily="34" charset="0"/>
+                <a:ea typeface="Pretendard" pitchFamily="34" charset="-122"/>
+                <a:cs typeface="Pretendard" pitchFamily="34" charset="-120"/>
+              </a:rPr>
+              <a:t>용도지역·용도지구 기준 건폐율/용적률 상한 확인</a:t>
+            </a:r>
+            <a:endParaRPr lang="en-US" sz="930" dirty="0"/>
+          </a:p>
+          <a:p>
+            <a:pPr marL="342900" indent="-342900">
+              <a:lnSpc>
+                <a:spcPct val="120000"/>
+              </a:lnSpc>
+              <a:buSzPct val="100000"/>
+              <a:buChar char="•"/>
+            </a:pPr>
+            <a:r>
+              <a:rPr lang="en-US" sz="930" dirty="0">
+                <a:solidFill>
+                  <a:srgbClr val="10161F"/>
+                </a:solidFill>
+                <a:latin typeface="Pretendard" pitchFamily="34" charset="0"/>
+                <a:ea typeface="Pretendard" pitchFamily="34" charset="-122"/>
+                <a:cs typeface="Pretendard" pitchFamily="34" charset="-120"/>
+              </a:rPr>
+              <a:t>필지 형상 및 접도 조건에 따른 건축 가능 면적 검토</a:t>
+            </a:r>
+            <a:endParaRPr lang="en-US" sz="930" dirty="0"/>
+          </a:p>
+          <a:p>
+            <a:pPr marL="342900" indent="-342900">
+              <a:lnSpc>
+                <a:spcPct val="120000"/>
+              </a:lnSpc>
+              <a:buSzPct val="100000"/>
+              <a:buChar char="•"/>
+            </a:pPr>
+            <a:r>
+              <a:rPr lang="en-US" sz="930" dirty="0">
+                <a:solidFill>
+                  <a:srgbClr val="10161F"/>
+                </a:solidFill>
+                <a:latin typeface="Pretendard" pitchFamily="34" charset="0"/>
+                <a:ea typeface="Pretendard" pitchFamily="34" charset="-122"/>
+                <a:cs typeface="Pretendard" pitchFamily="34" charset="-120"/>
+              </a:rPr>
+              <a:t>토지이용계획 열람 및 개발행위허가 제한 여부 확인</a:t>
+            </a:r>
+            <a:endParaRPr lang="en-US" sz="930" dirty="0"/>
+          </a:p>
+        </p:txBody>
+      </p:sp>
+      <p:sp>
+        <p:nvSpPr>
+          <p:cNvPr id="17" name="Shape 15"/>
+          <p:cNvSpPr/>
+          <p:nvPr/>
+        </p:nvSpPr>
+        <p:spPr>
+          <a:xfrm>
+            <a:off x="7784287" y="3977640"/>
+            <a:ext cx="3840480" cy="2148840"/>
+          </a:xfrm>
+          <a:prstGeom prst="roundRect">
+            <a:avLst>
+              <a:gd name="adj" fmla="val 2553"/>
+            </a:avLst>
+          </a:prstGeom>
+          <a:solidFill>
+            <a:srgbClr val="BEE3F8"/>
+          </a:solidFill>
+          <a:ln/>
+        </p:spPr>
+      </p:sp>
+      <p:sp>
+        <p:nvSpPr>
+          <p:cNvPr id="18" name="Shape 16"/>
+          <p:cNvSpPr/>
+          <p:nvPr/>
+        </p:nvSpPr>
+        <p:spPr>
+          <a:xfrm>
+            <a:off x="7784287" y="4032504"/>
+            <a:ext cx="36576" cy="2039112"/>
+          </a:xfrm>
+          <a:prstGeom prst="rect">
+            <a:avLst/>
+          </a:prstGeom>
+          <a:solidFill>
+            <a:srgbClr val="2B6CB0"/>
+          </a:solidFill>
+          <a:ln/>
+        </p:spPr>
+      </p:sp>
+      <p:sp>
+        <p:nvSpPr>
+          <p:cNvPr id="19" name="Text 17"/>
+          <p:cNvSpPr/>
+          <p:nvPr/>
+        </p:nvSpPr>
+        <p:spPr>
+          <a:xfrm>
+            <a:off x="7967167" y="4087368"/>
+            <a:ext cx="3511296" cy="201168"/>
+          </a:xfrm>
+          <a:prstGeom prst="rect">
+            <a:avLst/>
+          </a:prstGeom>
+          <a:noFill/>
+          <a:ln/>
+        </p:spPr>
+        <p:txBody>
+          <a:bodyPr wrap="square" lIns="0" tIns="0" rIns="0" bIns="0" rtlCol="0" anchor="ctr"/>
+          <a:lstStyle/>
+          <a:p>
+            <a:pPr indent="0" marL="0">
+              <a:buNone/>
+            </a:pPr>
+            <a:r>
+              <a:rPr lang="en-US" sz="1050" b="1" dirty="0">
+                <a:solidFill>
+                  <a:srgbClr val="2B6CB0"/>
+                </a:solidFill>
+                <a:latin typeface="Pretendard" pitchFamily="34" charset="0"/>
+                <a:ea typeface="Pretendard" pitchFamily="34" charset="-122"/>
+                <a:cs typeface="Pretendard" pitchFamily="34" charset="-120"/>
+              </a:rPr>
+              <a:t>권리관계 및 공적장부</a:t>
+            </a:r>
+            <a:endParaRPr lang="en-US" sz="1050" dirty="0"/>
+          </a:p>
+        </p:txBody>
+      </p:sp>
+      <p:sp>
+        <p:nvSpPr>
+          <p:cNvPr id="20" name="Text 18"/>
+          <p:cNvSpPr/>
+          <p:nvPr/>
+        </p:nvSpPr>
+        <p:spPr>
+          <a:xfrm>
+            <a:off x="7967167" y="4306824"/>
+            <a:ext cx="3511296" cy="1746504"/>
+          </a:xfrm>
+          <a:prstGeom prst="rect">
+            <a:avLst/>
+          </a:prstGeom>
+          <a:noFill/>
+          <a:ln/>
+        </p:spPr>
+        <p:txBody>
+          <a:bodyPr wrap="square" lIns="0" tIns="0" rIns="0" bIns="0" rtlCol="0" anchor="t"/>
+          <a:lstStyle/>
+          <a:p>
+            <a:pPr marL="342900" indent="-342900">
+              <a:lnSpc>
+                <a:spcPct val="120000"/>
+              </a:lnSpc>
+              <a:buSzPct val="100000"/>
+              <a:buChar char="•"/>
+            </a:pPr>
+            <a:r>
+              <a:rPr lang="en-US" sz="930" dirty="0">
+                <a:solidFill>
+                  <a:srgbClr val="10161F"/>
+                </a:solidFill>
+                <a:latin typeface="Pretendard" pitchFamily="34" charset="0"/>
+                <a:ea typeface="Pretendard" pitchFamily="34" charset="-122"/>
+                <a:cs typeface="Pretendard" pitchFamily="34" charset="-120"/>
+              </a:rPr>
+              <a:t>등기부등본 갑구 소유권 및 을구 근저당·가압류 확인</a:t>
+            </a:r>
+            <a:endParaRPr lang="en-US" sz="930" dirty="0"/>
+          </a:p>
+          <a:p>
+            <a:pPr marL="342900" indent="-342900">
+              <a:lnSpc>
+                <a:spcPct val="120000"/>
+              </a:lnSpc>
+              <a:buSzPct val="100000"/>
+              <a:buChar char="•"/>
+            </a:pPr>
+            <a:r>
+              <a:rPr lang="en-US" sz="930" dirty="0">
+                <a:solidFill>
+                  <a:srgbClr val="10161F"/>
+                </a:solidFill>
+                <a:latin typeface="Pretendard" pitchFamily="34" charset="0"/>
+                <a:ea typeface="Pretendard" pitchFamily="34" charset="-122"/>
+                <a:cs typeface="Pretendard" pitchFamily="34" charset="-120"/>
+              </a:rPr>
+              <a:t>건축물대장 기재 사항과 실물 현황 대조 점검</a:t>
+            </a:r>
+            <a:endParaRPr lang="en-US" sz="930" dirty="0"/>
+          </a:p>
+          <a:p>
+            <a:pPr marL="342900" indent="-342900">
+              <a:lnSpc>
+                <a:spcPct val="120000"/>
+              </a:lnSpc>
+              <a:buSzPct val="100000"/>
+              <a:buChar char="•"/>
+            </a:pPr>
+            <a:r>
+              <a:rPr lang="en-US" sz="930" dirty="0">
+                <a:solidFill>
+                  <a:srgbClr val="10161F"/>
+                </a:solidFill>
+                <a:latin typeface="Pretendard" pitchFamily="34" charset="0"/>
+                <a:ea typeface="Pretendard" pitchFamily="34" charset="-122"/>
+                <a:cs typeface="Pretendard" pitchFamily="34" charset="-120"/>
+              </a:rPr>
+              <a:t>개별공시지가 및 실거래가 비교 분석</a:t>
+            </a:r>
+            <a:endParaRPr lang="en-US" sz="930" dirty="0"/>
+          </a:p>
+        </p:txBody>
+      </p:sp>
+      <p:sp>
+        <p:nvSpPr>
+          <p:cNvPr id="21" name="Text 19"/>
+          <p:cNvSpPr/>
+          <p:nvPr/>
+        </p:nvSpPr>
+        <p:spPr>
+          <a:xfrm>
+            <a:off x="566928" y="6382512"/>
+            <a:ext cx="7315200" cy="219456"/>
+          </a:xfrm>
+          <a:prstGeom prst="rect">
+            <a:avLst/>
+          </a:prstGeom>
+          <a:noFill/>
+          <a:ln/>
+        </p:spPr>
+        <p:txBody>
+          <a:bodyPr wrap="square" lIns="0" tIns="0" rIns="0" bIns="0" rtlCol="0" anchor="ctr"/>
+          <a:lstStyle/>
+          <a:p>
+            <a:pPr indent="0" marL="0">
+              <a:buNone/>
+            </a:pPr>
+            <a:r>
+              <a:rPr lang="en-US" sz="800" dirty="0">
+                <a:solidFill>
+                  <a:srgbClr val="718096"/>
+                </a:solidFill>
+                <a:latin typeface="Pretendard" pitchFamily="34" charset="0"/>
+                <a:ea typeface="Pretendard" pitchFamily="34" charset="-122"/>
+                <a:cs typeface="Pretendard" pitchFamily="34" charset="-120"/>
+              </a:rPr>
               <a:t>크리딜   |   </a:t>
             </a:r>
             <a:endParaRPr lang="en-US" sz="800" dirty="0"/>
@@ -8636,7 +9128,7 @@
       </p:sp>
       <p:sp>
         <p:nvSpPr>
-          <p:cNvPr id="7" name="Text 5"/>
+          <p:cNvPr id="22" name="Text 20"/>
           <p:cNvSpPr/>
           <p:nvPr/>
         </p:nvSpPr>
@@ -8758,7 +9250,7 @@
                 <a:ea typeface="Arial" pitchFamily="34" charset="-122"/>
                 <a:cs typeface="Arial" pitchFamily="34" charset="-120"/>
               </a:rPr>
-              <a:t>03</a:t>
+              <a:t>04</a:t>
             </a:r>
             <a:endParaRPr lang="en-US" sz="1300" dirty="0"/>
           </a:p>
@@ -8797,7 +9289,7 @@
                 <a:ea typeface="Arial" pitchFamily="34" charset="-122"/>
                 <a:cs typeface="Arial" pitchFamily="34" charset="-120"/>
               </a:rPr>
-              <a:t>Rent Roll</a:t>
+              <a:t>Building</a:t>
             </a:r>
             <a:endParaRPr lang="en-US" sz="950" dirty="0"/>
           </a:p>
@@ -8836,7 +9328,726 @@
                 <a:ea typeface="Pretendard" pitchFamily="34" charset="-122"/>
                 <a:cs typeface="Pretendard" pitchFamily="34" charset="-120"/>
               </a:rPr>
-              <a:t>임대차 현황</a:t>
+              <a:t>건물 개요</a:t>
+            </a:r>
+            <a:endParaRPr lang="en-US" sz="2300" dirty="0"/>
+          </a:p>
+        </p:txBody>
+      </p:sp>
+      <p:sp>
+        <p:nvSpPr>
+          <p:cNvPr id="6" name="Text 4"/>
+          <p:cNvSpPr/>
+          <p:nvPr/>
+        </p:nvSpPr>
+        <p:spPr>
+          <a:xfrm>
+            <a:off x="566928" y="1371600"/>
+            <a:ext cx="6858000" cy="237744"/>
+          </a:xfrm>
+          <a:prstGeom prst="rect">
+            <a:avLst/>
+          </a:prstGeom>
+          <a:noFill/>
+          <a:ln/>
+        </p:spPr>
+        <p:txBody>
+          <a:bodyPr wrap="square" lIns="0" tIns="0" rIns="0" bIns="0" rtlCol="0" anchor="ctr"/>
+          <a:lstStyle/>
+          <a:p>
+            <a:pPr indent="0" marL="0">
+              <a:buNone/>
+            </a:pPr>
+            <a:r>
+              <a:rPr lang="en-US" sz="1100" b="1" dirty="0">
+                <a:solidFill>
+                  <a:srgbClr val="10161F"/>
+                </a:solidFill>
+                <a:latin typeface="Pretendard" pitchFamily="34" charset="0"/>
+                <a:ea typeface="Pretendard" pitchFamily="34" charset="-122"/>
+                <a:cs typeface="Pretendard" pitchFamily="34" charset="-120"/>
+              </a:rPr>
+              <a:t>건축물 개요 및 물리 스펙</a:t>
+            </a:r>
+            <a:endParaRPr lang="en-US" sz="1100" dirty="0"/>
+          </a:p>
+        </p:txBody>
+      </p:sp>
+      <p:sp>
+        <p:nvSpPr>
+          <p:cNvPr id="7" name="Text 5"/>
+          <p:cNvSpPr/>
+          <p:nvPr/>
+        </p:nvSpPr>
+        <p:spPr>
+          <a:xfrm>
+            <a:off x="566928" y="1645920"/>
+            <a:ext cx="2606040" cy="438912"/>
+          </a:xfrm>
+          <a:prstGeom prst="rect">
+            <a:avLst/>
+          </a:prstGeom>
+          <a:noFill/>
+          <a:ln/>
+        </p:spPr>
+        <p:txBody>
+          <a:bodyPr wrap="square" lIns="0" tIns="0" rIns="0" bIns="0" rtlCol="0" anchor="ctr"/>
+          <a:lstStyle/>
+          <a:p>
+            <a:pPr indent="0" marL="0">
+              <a:lnSpc>
+                <a:spcPct val="120000"/>
+              </a:lnSpc>
+              <a:buNone/>
+            </a:pPr>
+            <a:r>
+              <a:rPr lang="en-US" sz="1350" dirty="0">
+                <a:solidFill>
+                  <a:srgbClr val="718096"/>
+                </a:solidFill>
+                <a:latin typeface="Pretendard" pitchFamily="34" charset="0"/>
+                <a:ea typeface="Pretendard" pitchFamily="34" charset="-122"/>
+                <a:cs typeface="Pretendard" pitchFamily="34" charset="-120"/>
+              </a:rPr>
+              <a:t>대지면적</a:t>
+            </a:r>
+            <a:endParaRPr lang="en-US" sz="1350" dirty="0"/>
+          </a:p>
+        </p:txBody>
+      </p:sp>
+      <p:sp>
+        <p:nvSpPr>
+          <p:cNvPr id="8" name="Text 6"/>
+          <p:cNvSpPr/>
+          <p:nvPr/>
+        </p:nvSpPr>
+        <p:spPr>
+          <a:xfrm>
+            <a:off x="3172968" y="1645920"/>
+            <a:ext cx="4251960" cy="438912"/>
+          </a:xfrm>
+          <a:prstGeom prst="rect">
+            <a:avLst/>
+          </a:prstGeom>
+          <a:noFill/>
+          <a:ln/>
+        </p:spPr>
+        <p:txBody>
+          <a:bodyPr wrap="square" lIns="0" tIns="0" rIns="0" bIns="0" rtlCol="0" anchor="ctr"/>
+          <a:lstStyle/>
+          <a:p>
+            <a:pPr indent="0" marL="0">
+              <a:lnSpc>
+                <a:spcPct val="120000"/>
+              </a:lnSpc>
+              <a:buNone/>
+            </a:pPr>
+            <a:r>
+              <a:rPr lang="en-US" sz="1350" b="1" dirty="0">
+                <a:solidFill>
+                  <a:srgbClr val="10161F"/>
+                </a:solidFill>
+                <a:latin typeface="Pretendard" pitchFamily="34" charset="0"/>
+                <a:ea typeface="Pretendard" pitchFamily="34" charset="-122"/>
+                <a:cs typeface="Pretendard" pitchFamily="34" charset="-120"/>
+              </a:rPr>
+              <a:t>142.5평</a:t>
+            </a:r>
+            <a:endParaRPr lang="en-US" sz="1350" dirty="0"/>
+          </a:p>
+        </p:txBody>
+      </p:sp>
+      <p:sp>
+        <p:nvSpPr>
+          <p:cNvPr id="9" name="Shape 7"/>
+          <p:cNvSpPr/>
+          <p:nvPr/>
+        </p:nvSpPr>
+        <p:spPr>
+          <a:xfrm>
+            <a:off x="566928" y="2084832"/>
+            <a:ext cx="6858000" cy="0"/>
+          </a:xfrm>
+          <a:prstGeom prst="line">
+            <a:avLst/>
+          </a:prstGeom>
+          <a:noFill/>
+          <a:ln w="3810">
+            <a:solidFill>
+              <a:srgbClr val="CBD5E0"/>
+            </a:solidFill>
+            <a:prstDash val="solid"/>
+          </a:ln>
+        </p:spPr>
+      </p:sp>
+      <p:sp>
+        <p:nvSpPr>
+          <p:cNvPr id="10" name="Text 8"/>
+          <p:cNvSpPr/>
+          <p:nvPr/>
+        </p:nvSpPr>
+        <p:spPr>
+          <a:xfrm>
+            <a:off x="566928" y="2084832"/>
+            <a:ext cx="2606040" cy="438912"/>
+          </a:xfrm>
+          <a:prstGeom prst="rect">
+            <a:avLst/>
+          </a:prstGeom>
+          <a:noFill/>
+          <a:ln/>
+        </p:spPr>
+        <p:txBody>
+          <a:bodyPr wrap="square" lIns="0" tIns="0" rIns="0" bIns="0" rtlCol="0" anchor="ctr"/>
+          <a:lstStyle/>
+          <a:p>
+            <a:pPr indent="0" marL="0">
+              <a:lnSpc>
+                <a:spcPct val="120000"/>
+              </a:lnSpc>
+              <a:buNone/>
+            </a:pPr>
+            <a:r>
+              <a:rPr lang="en-US" sz="1350" dirty="0">
+                <a:solidFill>
+                  <a:srgbClr val="718096"/>
+                </a:solidFill>
+                <a:latin typeface="Pretendard" pitchFamily="34" charset="0"/>
+                <a:ea typeface="Pretendard" pitchFamily="34" charset="-122"/>
+                <a:cs typeface="Pretendard" pitchFamily="34" charset="-120"/>
+              </a:rPr>
+              <a:t>연면적</a:t>
+            </a:r>
+            <a:endParaRPr lang="en-US" sz="1350" dirty="0"/>
+          </a:p>
+        </p:txBody>
+      </p:sp>
+      <p:sp>
+        <p:nvSpPr>
+          <p:cNvPr id="11" name="Text 9"/>
+          <p:cNvSpPr/>
+          <p:nvPr/>
+        </p:nvSpPr>
+        <p:spPr>
+          <a:xfrm>
+            <a:off x="3172968" y="2084832"/>
+            <a:ext cx="4251960" cy="438912"/>
+          </a:xfrm>
+          <a:prstGeom prst="rect">
+            <a:avLst/>
+          </a:prstGeom>
+          <a:noFill/>
+          <a:ln/>
+        </p:spPr>
+        <p:txBody>
+          <a:bodyPr wrap="square" lIns="0" tIns="0" rIns="0" bIns="0" rtlCol="0" anchor="ctr"/>
+          <a:lstStyle/>
+          <a:p>
+            <a:pPr indent="0" marL="0">
+              <a:lnSpc>
+                <a:spcPct val="120000"/>
+              </a:lnSpc>
+              <a:buNone/>
+            </a:pPr>
+            <a:r>
+              <a:rPr lang="en-US" sz="1350" b="1" dirty="0">
+                <a:solidFill>
+                  <a:srgbClr val="10161F"/>
+                </a:solidFill>
+                <a:latin typeface="Pretendard" pitchFamily="34" charset="0"/>
+                <a:ea typeface="Pretendard" pitchFamily="34" charset="-122"/>
+                <a:cs typeface="Pretendard" pitchFamily="34" charset="-120"/>
+              </a:rPr>
+              <a:t>620.8평</a:t>
+            </a:r>
+            <a:endParaRPr lang="en-US" sz="1350" dirty="0"/>
+          </a:p>
+        </p:txBody>
+      </p:sp>
+      <p:sp>
+        <p:nvSpPr>
+          <p:cNvPr id="12" name="Shape 10"/>
+          <p:cNvSpPr/>
+          <p:nvPr/>
+        </p:nvSpPr>
+        <p:spPr>
+          <a:xfrm>
+            <a:off x="566928" y="2523744"/>
+            <a:ext cx="6858000" cy="0"/>
+          </a:xfrm>
+          <a:prstGeom prst="line">
+            <a:avLst/>
+          </a:prstGeom>
+          <a:noFill/>
+          <a:ln w="3810">
+            <a:solidFill>
+              <a:srgbClr val="CBD5E0"/>
+            </a:solidFill>
+            <a:prstDash val="solid"/>
+          </a:ln>
+        </p:spPr>
+      </p:sp>
+      <p:sp>
+        <p:nvSpPr>
+          <p:cNvPr id="13" name="Text 11"/>
+          <p:cNvSpPr/>
+          <p:nvPr/>
+        </p:nvSpPr>
+        <p:spPr>
+          <a:xfrm>
+            <a:off x="566928" y="2523744"/>
+            <a:ext cx="2606040" cy="438912"/>
+          </a:xfrm>
+          <a:prstGeom prst="rect">
+            <a:avLst/>
+          </a:prstGeom>
+          <a:noFill/>
+          <a:ln/>
+        </p:spPr>
+        <p:txBody>
+          <a:bodyPr wrap="square" lIns="0" tIns="0" rIns="0" bIns="0" rtlCol="0" anchor="ctr"/>
+          <a:lstStyle/>
+          <a:p>
+            <a:pPr indent="0" marL="0">
+              <a:lnSpc>
+                <a:spcPct val="120000"/>
+              </a:lnSpc>
+              <a:buNone/>
+            </a:pPr>
+            <a:r>
+              <a:rPr lang="en-US" sz="1350" dirty="0">
+                <a:solidFill>
+                  <a:srgbClr val="718096"/>
+                </a:solidFill>
+                <a:latin typeface="Pretendard" pitchFamily="34" charset="0"/>
+                <a:ea typeface="Pretendard" pitchFamily="34" charset="-122"/>
+                <a:cs typeface="Pretendard" pitchFamily="34" charset="-120"/>
+              </a:rPr>
+              <a:t>준공</a:t>
+            </a:r>
+            <a:endParaRPr lang="en-US" sz="1350" dirty="0"/>
+          </a:p>
+        </p:txBody>
+      </p:sp>
+      <p:sp>
+        <p:nvSpPr>
+          <p:cNvPr id="14" name="Text 12"/>
+          <p:cNvSpPr/>
+          <p:nvPr/>
+        </p:nvSpPr>
+        <p:spPr>
+          <a:xfrm>
+            <a:off x="3172968" y="2523744"/>
+            <a:ext cx="4251960" cy="438912"/>
+          </a:xfrm>
+          <a:prstGeom prst="rect">
+            <a:avLst/>
+          </a:prstGeom>
+          <a:noFill/>
+          <a:ln/>
+        </p:spPr>
+        <p:txBody>
+          <a:bodyPr wrap="square" lIns="0" tIns="0" rIns="0" bIns="0" rtlCol="0" anchor="ctr"/>
+          <a:lstStyle/>
+          <a:p>
+            <a:pPr indent="0" marL="0">
+              <a:lnSpc>
+                <a:spcPct val="120000"/>
+              </a:lnSpc>
+              <a:buNone/>
+            </a:pPr>
+            <a:r>
+              <a:rPr lang="en-US" sz="1350" b="1" dirty="0">
+                <a:solidFill>
+                  <a:srgbClr val="10161F"/>
+                </a:solidFill>
+                <a:latin typeface="Pretendard" pitchFamily="34" charset="0"/>
+                <a:ea typeface="Pretendard" pitchFamily="34" charset="-122"/>
+                <a:cs typeface="Pretendard" pitchFamily="34" charset="-120"/>
+              </a:rPr>
+              <a:t>2017년</a:t>
+            </a:r>
+            <a:endParaRPr lang="en-US" sz="1350" dirty="0"/>
+          </a:p>
+        </p:txBody>
+      </p:sp>
+      <p:sp>
+        <p:nvSpPr>
+          <p:cNvPr id="15" name="Shape 13"/>
+          <p:cNvSpPr/>
+          <p:nvPr/>
+        </p:nvSpPr>
+        <p:spPr>
+          <a:xfrm>
+            <a:off x="7604608" y="1371600"/>
+            <a:ext cx="0" cy="4754880"/>
+          </a:xfrm>
+          <a:prstGeom prst="line">
+            <a:avLst/>
+          </a:prstGeom>
+          <a:noFill/>
+          <a:ln w="8890">
+            <a:solidFill>
+              <a:srgbClr val="B98A2E"/>
+            </a:solidFill>
+            <a:prstDash val="solid"/>
+          </a:ln>
+        </p:spPr>
+      </p:sp>
+      <p:sp>
+        <p:nvSpPr>
+          <p:cNvPr id="16" name="Shape 14"/>
+          <p:cNvSpPr/>
+          <p:nvPr/>
+        </p:nvSpPr>
+        <p:spPr>
+          <a:xfrm>
+            <a:off x="7784287" y="1645920"/>
+            <a:ext cx="3840480" cy="1645920"/>
+          </a:xfrm>
+          <a:prstGeom prst="roundRect">
+            <a:avLst>
+              <a:gd name="adj" fmla="val 3333"/>
+            </a:avLst>
+          </a:prstGeom>
+          <a:solidFill>
+            <a:srgbClr val="F3EBDA"/>
+          </a:solidFill>
+          <a:ln/>
+        </p:spPr>
+      </p:sp>
+      <p:sp>
+        <p:nvSpPr>
+          <p:cNvPr id="17" name="Shape 15"/>
+          <p:cNvSpPr/>
+          <p:nvPr/>
+        </p:nvSpPr>
+        <p:spPr>
+          <a:xfrm>
+            <a:off x="7784287" y="1700784"/>
+            <a:ext cx="36576" cy="1536192"/>
+          </a:xfrm>
+          <a:prstGeom prst="rect">
+            <a:avLst/>
+          </a:prstGeom>
+          <a:solidFill>
+            <a:srgbClr val="977024"/>
+          </a:solidFill>
+          <a:ln/>
+        </p:spPr>
+      </p:sp>
+      <p:sp>
+        <p:nvSpPr>
+          <p:cNvPr id="18" name="Text 16"/>
+          <p:cNvSpPr/>
+          <p:nvPr/>
+        </p:nvSpPr>
+        <p:spPr>
+          <a:xfrm>
+            <a:off x="7967167" y="1755648"/>
+            <a:ext cx="3511296" cy="201168"/>
+          </a:xfrm>
+          <a:prstGeom prst="rect">
+            <a:avLst/>
+          </a:prstGeom>
+          <a:noFill/>
+          <a:ln/>
+        </p:spPr>
+        <p:txBody>
+          <a:bodyPr wrap="square" lIns="0" tIns="0" rIns="0" bIns="0" rtlCol="0" anchor="ctr"/>
+          <a:lstStyle/>
+          <a:p>
+            <a:pPr indent="0" marL="0">
+              <a:buNone/>
+            </a:pPr>
+            <a:endParaRPr lang="en-US" sz="1050" dirty="0"/>
+          </a:p>
+        </p:txBody>
+      </p:sp>
+      <p:sp>
+        <p:nvSpPr>
+          <p:cNvPr id="19" name="Text 17"/>
+          <p:cNvSpPr/>
+          <p:nvPr/>
+        </p:nvSpPr>
+        <p:spPr>
+          <a:xfrm>
+            <a:off x="7967167" y="1975104"/>
+            <a:ext cx="3511296" cy="1243584"/>
+          </a:xfrm>
+          <a:prstGeom prst="rect">
+            <a:avLst/>
+          </a:prstGeom>
+          <a:noFill/>
+          <a:ln/>
+        </p:spPr>
+        <p:txBody>
+          <a:bodyPr wrap="square" lIns="0" tIns="0" rIns="0" bIns="0" rtlCol="0" anchor="t"/>
+          <a:lstStyle/>
+          <a:p>
+            <a:pPr indent="0" marL="0">
+              <a:lnSpc>
+                <a:spcPct val="120000"/>
+              </a:lnSpc>
+              <a:buNone/>
+            </a:pPr>
+            <a:r>
+              <a:rPr lang="en-US" sz="930" dirty="0">
+                <a:solidFill>
+                  <a:srgbClr val="10161F"/>
+                </a:solidFill>
+                <a:latin typeface="Pretendard" pitchFamily="34" charset="0"/>
+                <a:ea typeface="Pretendard" pitchFamily="34" charset="-122"/>
+                <a:cs typeface="Pretendard" pitchFamily="34" charset="-120"/>
+              </a:rPr>
+              <a:t>서초 메디컬 빌딩은 지하2층~지상7층 규모의 올근생 빌딩입니다.</a:t>
+            </a:r>
+            <a:endParaRPr lang="en-US" sz="930" dirty="0"/>
+          </a:p>
+        </p:txBody>
+      </p:sp>
+      <p:sp>
+        <p:nvSpPr>
+          <p:cNvPr id="20" name="Text 18"/>
+          <p:cNvSpPr/>
+          <p:nvPr/>
+        </p:nvSpPr>
+        <p:spPr>
+          <a:xfrm>
+            <a:off x="566928" y="6382512"/>
+            <a:ext cx="7315200" cy="219456"/>
+          </a:xfrm>
+          <a:prstGeom prst="rect">
+            <a:avLst/>
+          </a:prstGeom>
+          <a:noFill/>
+          <a:ln/>
+        </p:spPr>
+        <p:txBody>
+          <a:bodyPr wrap="square" lIns="0" tIns="0" rIns="0" bIns="0" rtlCol="0" anchor="ctr"/>
+          <a:lstStyle/>
+          <a:p>
+            <a:pPr indent="0" marL="0">
+              <a:buNone/>
+            </a:pPr>
+            <a:r>
+              <a:rPr lang="en-US" sz="800" dirty="0">
+                <a:solidFill>
+                  <a:srgbClr val="718096"/>
+                </a:solidFill>
+                <a:latin typeface="Pretendard" pitchFamily="34" charset="0"/>
+                <a:ea typeface="Pretendard" pitchFamily="34" charset="-122"/>
+                <a:cs typeface="Pretendard" pitchFamily="34" charset="-120"/>
+              </a:rPr>
+              <a:t>크리딜   |   </a:t>
+            </a:r>
+            <a:endParaRPr lang="en-US" sz="800" dirty="0"/>
+          </a:p>
+        </p:txBody>
+      </p:sp>
+      <p:sp>
+        <p:nvSpPr>
+          <p:cNvPr id="21" name="Text 19"/>
+          <p:cNvSpPr/>
+          <p:nvPr/>
+        </p:nvSpPr>
+        <p:spPr>
+          <a:xfrm>
+            <a:off x="10710367" y="6382512"/>
+            <a:ext cx="914400" cy="219456"/>
+          </a:xfrm>
+          <a:prstGeom prst="rect">
+            <a:avLst/>
+          </a:prstGeom>
+          <a:noFill/>
+          <a:ln/>
+        </p:spPr>
+        <p:txBody>
+          <a:bodyPr wrap="square" lIns="0" tIns="0" rIns="0" bIns="0" rtlCol="0" anchor="ctr"/>
+          <a:lstStyle/>
+          <a:p>
+            <a:pPr algn="r" indent="0" marL="0">
+              <a:buNone/>
+            </a:pPr>
+            <a:r>
+              <a:rPr lang="en-US" sz="900" b="1" dirty="0">
+                <a:solidFill>
+                  <a:srgbClr val="B98A2E"/>
+                </a:solidFill>
+                <a:latin typeface="Arial" pitchFamily="34" charset="0"/>
+                <a:ea typeface="Arial" pitchFamily="34" charset="-122"/>
+                <a:cs typeface="Arial" pitchFamily="34" charset="-120"/>
+              </a:rPr>
+              <a:t>4</a:t>
+            </a:r>
+            <a:endParaRPr lang="en-US" sz="900" dirty="0"/>
+          </a:p>
+        </p:txBody>
+      </p:sp>
+    </p:spTree>
+  </p:cSld>
+  <p:clrMapOvr>
+    <a:masterClrMapping/>
+  </p:clrMapOvr>
+</p:sld>
+</file>
+
+<file path=ppt/slides/slide5.xml><?xml version="1.0" encoding="utf-8"?>
+<p:sld xmlns:a="http://schemas.openxmlformats.org/drawingml/2006/main" xmlns:r="http://schemas.openxmlformats.org/officeDocument/2006/relationships" xmlns:p="http://schemas.openxmlformats.org/presentationml/2006/main">
+  <p:cSld name="Slide 5">
+    <p:bg>
+      <p:bgPr>
+        <a:solidFill>
+          <a:srgbClr val="FFFFFF"/>
+        </a:solidFill>
+      </p:bgPr>
+    </p:bg>
+    <p:spTree>
+      <p:nvGrpSpPr>
+        <p:cNvPr id="1" name=""/>
+        <p:cNvGrpSpPr/>
+        <p:nvPr/>
+      </p:nvGrpSpPr>
+      <p:grpSpPr>
+        <a:xfrm>
+          <a:off x="0" y="0"/>
+          <a:ext cx="0" cy="0"/>
+          <a:chOff x="0" y="0"/>
+          <a:chExt cx="0" cy="0"/>
+        </a:xfrm>
+      </p:grpSpPr>
+      <p:sp>
+        <p:nvSpPr>
+          <p:cNvPr id="2" name="Shape 0"/>
+          <p:cNvSpPr/>
+          <p:nvPr/>
+        </p:nvSpPr>
+        <p:spPr>
+          <a:xfrm>
+            <a:off x="566928" y="457200"/>
+            <a:ext cx="384048" cy="384048"/>
+          </a:xfrm>
+          <a:prstGeom prst="ellipse">
+            <a:avLst/>
+          </a:prstGeom>
+          <a:solidFill>
+            <a:srgbClr val="B98A2E"/>
+          </a:solidFill>
+          <a:ln/>
+        </p:spPr>
+      </p:sp>
+      <p:sp>
+        <p:nvSpPr>
+          <p:cNvPr id="3" name="Text 1"/>
+          <p:cNvSpPr/>
+          <p:nvPr/>
+        </p:nvSpPr>
+        <p:spPr>
+          <a:xfrm>
+            <a:off x="566928" y="457200"/>
+            <a:ext cx="384048" cy="384048"/>
+          </a:xfrm>
+          <a:prstGeom prst="rect">
+            <a:avLst/>
+          </a:prstGeom>
+          <a:noFill/>
+          <a:ln/>
+        </p:spPr>
+        <p:txBody>
+          <a:bodyPr wrap="square" lIns="0" tIns="0" rIns="0" bIns="0" rtlCol="0" anchor="ctr"/>
+          <a:lstStyle/>
+          <a:p>
+            <a:pPr algn="ctr" indent="0" marL="0">
+              <a:buNone/>
+            </a:pPr>
+            <a:r>
+              <a:rPr lang="en-US" sz="1300" b="1" dirty="0">
+                <a:solidFill>
+                  <a:srgbClr val="FFFFFF"/>
+                </a:solidFill>
+                <a:latin typeface="Arial" pitchFamily="34" charset="0"/>
+                <a:ea typeface="Arial" pitchFamily="34" charset="-122"/>
+                <a:cs typeface="Arial" pitchFamily="34" charset="-120"/>
+              </a:rPr>
+              <a:t>05</a:t>
+            </a:r>
+            <a:endParaRPr lang="en-US" sz="1300" dirty="0"/>
+          </a:p>
+        </p:txBody>
+      </p:sp>
+      <p:sp>
+        <p:nvSpPr>
+          <p:cNvPr id="4" name="Text 2"/>
+          <p:cNvSpPr/>
+          <p:nvPr/>
+        </p:nvSpPr>
+        <p:spPr>
+          <a:xfrm>
+            <a:off x="1133856" y="457200"/>
+            <a:ext cx="10490911" cy="182880"/>
+          </a:xfrm>
+          <a:prstGeom prst="rect">
+            <a:avLst/>
+          </a:prstGeom>
+          <a:noFill/>
+          <a:ln/>
+        </p:spPr>
+        <p:txBody>
+          <a:bodyPr wrap="square" lIns="0" tIns="0" rIns="0" bIns="0" rtlCol="0" anchor="ctr"/>
+          <a:lstStyle/>
+          <a:p>
+            <a:pPr indent="0" marL="0">
+              <a:buNone/>
+            </a:pPr>
+            <a:r>
+              <a:rPr lang="en-US" sz="950" b="1" spc="200" kern="0" dirty="0">
+                <a:solidFill>
+                  <a:srgbClr val="B98A2E"/>
+                </a:solidFill>
+                <a:latin typeface="Arial" pitchFamily="34" charset="0"/>
+                <a:ea typeface="Arial" pitchFamily="34" charset="-122"/>
+                <a:cs typeface="Arial" pitchFamily="34" charset="-120"/>
+              </a:rPr>
+              <a:t>Rent Roll</a:t>
+            </a:r>
+            <a:endParaRPr lang="en-US" sz="950" dirty="0"/>
+          </a:p>
+        </p:txBody>
+      </p:sp>
+      <p:sp>
+        <p:nvSpPr>
+          <p:cNvPr id="5" name="Text 3"/>
+          <p:cNvSpPr/>
+          <p:nvPr/>
+        </p:nvSpPr>
+        <p:spPr>
+          <a:xfrm>
+            <a:off x="1133856" y="640080"/>
+            <a:ext cx="10490911" cy="365760"/>
+          </a:xfrm>
+          <a:prstGeom prst="rect">
+            <a:avLst/>
+          </a:prstGeom>
+          <a:noFill/>
+          <a:ln/>
+        </p:spPr>
+        <p:txBody>
+          <a:bodyPr wrap="square" lIns="0" tIns="0" rIns="0" bIns="0" rtlCol="0" anchor="ctr"/>
+          <a:lstStyle/>
+          <a:p>
+            <a:pPr indent="0" marL="0">
+              <a:buNone/>
+            </a:pPr>
+            <a:r>
+              <a:rPr lang="en-US" sz="2300" b="1" dirty="0">
+                <a:solidFill>
+                  <a:srgbClr val="10161F"/>
+                </a:solidFill>
+                <a:latin typeface="Pretendard" pitchFamily="34" charset="0"/>
+                <a:ea typeface="Pretendard" pitchFamily="34" charset="-122"/>
+                <a:cs typeface="Pretendard" pitchFamily="34" charset="-120"/>
+              </a:rPr>
+              <a:t>렌트롤</a:t>
             </a:r>
             <a:endParaRPr lang="en-US" sz="2300" dirty="0"/>
           </a:p>
@@ -8844,7 +10055,7 @@
       </p:sp>
       <p:graphicFrame>
         <p:nvGraphicFramePr>
-          <p:cNvPr id="5" name="Table 0"/>
+          <p:cNvPr id="6" name="Table 0"/>
           <p:cNvGraphicFramePr>
             <a:graphicFrameLocks noGrp="1"/>
           </p:cNvGraphicFramePr>
@@ -9768,619 +10979,7 @@
                 <a:ea typeface="Arial" pitchFamily="34" charset="-122"/>
                 <a:cs typeface="Arial" pitchFamily="34" charset="-120"/>
               </a:rPr>
-              <a:t>3</a:t>
-            </a:r>
-            <a:endParaRPr lang="en-US" sz="900" dirty="0"/>
-          </a:p>
-        </p:txBody>
-      </p:sp>
-    </p:spTree>
-  </p:cSld>
-  <p:clrMapOvr>
-    <a:masterClrMapping/>
-  </p:clrMapOvr>
-</p:sld>
-</file>
-
-<file path=ppt/slides/slide5.xml><?xml version="1.0" encoding="utf-8"?>
-<p:sld xmlns:a="http://schemas.openxmlformats.org/drawingml/2006/main" xmlns:r="http://schemas.openxmlformats.org/officeDocument/2006/relationships" xmlns:p="http://schemas.openxmlformats.org/presentationml/2006/main">
-  <p:cSld name="Slide 5">
-    <p:bg>
-      <p:bgPr>
-        <a:solidFill>
-          <a:srgbClr val="FFFFFF"/>
-        </a:solidFill>
-      </p:bgPr>
-    </p:bg>
-    <p:spTree>
-      <p:nvGrpSpPr>
-        <p:cNvPr id="1" name=""/>
-        <p:cNvGrpSpPr/>
-        <p:nvPr/>
-      </p:nvGrpSpPr>
-      <p:grpSpPr>
-        <a:xfrm>
-          <a:off x="0" y="0"/>
-          <a:ext cx="0" cy="0"/>
-          <a:chOff x="0" y="0"/>
-          <a:chExt cx="0" cy="0"/>
-        </a:xfrm>
-      </p:grpSpPr>
-      <p:sp>
-        <p:nvSpPr>
-          <p:cNvPr id="2" name="Shape 0"/>
-          <p:cNvSpPr/>
-          <p:nvPr/>
-        </p:nvSpPr>
-        <p:spPr>
-          <a:xfrm>
-            <a:off x="566928" y="457200"/>
-            <a:ext cx="384048" cy="384048"/>
-          </a:xfrm>
-          <a:prstGeom prst="ellipse">
-            <a:avLst/>
-          </a:prstGeom>
-          <a:solidFill>
-            <a:srgbClr val="B98A2E"/>
-          </a:solidFill>
-          <a:ln/>
-        </p:spPr>
-      </p:sp>
-      <p:sp>
-        <p:nvSpPr>
-          <p:cNvPr id="3" name="Text 1"/>
-          <p:cNvSpPr/>
-          <p:nvPr/>
-        </p:nvSpPr>
-        <p:spPr>
-          <a:xfrm>
-            <a:off x="566928" y="457200"/>
-            <a:ext cx="384048" cy="384048"/>
-          </a:xfrm>
-          <a:prstGeom prst="rect">
-            <a:avLst/>
-          </a:prstGeom>
-          <a:noFill/>
-          <a:ln/>
-        </p:spPr>
-        <p:txBody>
-          <a:bodyPr wrap="square" lIns="0" tIns="0" rIns="0" bIns="0" rtlCol="0" anchor="ctr"/>
-          <a:lstStyle/>
-          <a:p>
-            <a:pPr algn="ctr" indent="0" marL="0">
-              <a:buNone/>
-            </a:pPr>
-            <a:r>
-              <a:rPr lang="en-US" sz="1300" b="1" dirty="0">
-                <a:solidFill>
-                  <a:srgbClr val="FFFFFF"/>
-                </a:solidFill>
-                <a:latin typeface="Arial" pitchFamily="34" charset="0"/>
-                <a:ea typeface="Arial" pitchFamily="34" charset="-122"/>
-                <a:cs typeface="Arial" pitchFamily="34" charset="-120"/>
-              </a:rPr>
-              <a:t>04</a:t>
-            </a:r>
-            <a:endParaRPr lang="en-US" sz="1300" dirty="0"/>
-          </a:p>
-        </p:txBody>
-      </p:sp>
-      <p:sp>
-        <p:nvSpPr>
-          <p:cNvPr id="4" name="Text 2"/>
-          <p:cNvSpPr/>
-          <p:nvPr/>
-        </p:nvSpPr>
-        <p:spPr>
-          <a:xfrm>
-            <a:off x="1133856" y="457200"/>
-            <a:ext cx="10490911" cy="182880"/>
-          </a:xfrm>
-          <a:prstGeom prst="rect">
-            <a:avLst/>
-          </a:prstGeom>
-          <a:noFill/>
-          <a:ln/>
-        </p:spPr>
-        <p:txBody>
-          <a:bodyPr wrap="square" lIns="0" tIns="0" rIns="0" bIns="0" rtlCol="0" anchor="ctr"/>
-          <a:lstStyle/>
-          <a:p>
-            <a:pPr indent="0" marL="0">
-              <a:buNone/>
-            </a:pPr>
-            <a:r>
-              <a:rPr lang="en-US" sz="950" b="1" spc="200" kern="0" dirty="0">
-                <a:solidFill>
-                  <a:srgbClr val="B98A2E"/>
-                </a:solidFill>
-                <a:latin typeface="Arial" pitchFamily="34" charset="0"/>
-                <a:ea typeface="Arial" pitchFamily="34" charset="-122"/>
-                <a:cs typeface="Arial" pitchFamily="34" charset="-120"/>
-              </a:rPr>
-              <a:t>Stability</a:t>
-            </a:r>
-            <a:endParaRPr lang="en-US" sz="950" dirty="0"/>
-          </a:p>
-        </p:txBody>
-      </p:sp>
-      <p:sp>
-        <p:nvSpPr>
-          <p:cNvPr id="5" name="Text 3"/>
-          <p:cNvSpPr/>
-          <p:nvPr/>
-        </p:nvSpPr>
-        <p:spPr>
-          <a:xfrm>
-            <a:off x="1133856" y="640080"/>
-            <a:ext cx="10490911" cy="365760"/>
-          </a:xfrm>
-          <a:prstGeom prst="rect">
-            <a:avLst/>
-          </a:prstGeom>
-          <a:noFill/>
-          <a:ln/>
-        </p:spPr>
-        <p:txBody>
-          <a:bodyPr wrap="square" lIns="0" tIns="0" rIns="0" bIns="0" rtlCol="0" anchor="ctr"/>
-          <a:lstStyle/>
-          <a:p>
-            <a:pPr indent="0" marL="0">
-              <a:buNone/>
-            </a:pPr>
-            <a:r>
-              <a:rPr lang="en-US" sz="2300" b="1" dirty="0">
-                <a:solidFill>
-                  <a:srgbClr val="10161F"/>
-                </a:solidFill>
-                <a:latin typeface="Pretendard" pitchFamily="34" charset="0"/>
-                <a:ea typeface="Pretendard" pitchFamily="34" charset="-122"/>
-                <a:cs typeface="Pretendard" pitchFamily="34" charset="-120"/>
-              </a:rPr>
-              <a:t>임대안정성</a:t>
-            </a:r>
-            <a:endParaRPr lang="en-US" sz="2300" dirty="0"/>
-          </a:p>
-        </p:txBody>
-      </p:sp>
-      <p:sp>
-        <p:nvSpPr>
-          <p:cNvPr id="6" name="Text 4"/>
-          <p:cNvSpPr/>
-          <p:nvPr/>
-        </p:nvSpPr>
-        <p:spPr>
-          <a:xfrm>
-            <a:off x="566928" y="1371600"/>
-            <a:ext cx="6858000" cy="237744"/>
-          </a:xfrm>
-          <a:prstGeom prst="rect">
-            <a:avLst/>
-          </a:prstGeom>
-          <a:noFill/>
-          <a:ln/>
-        </p:spPr>
-        <p:txBody>
-          <a:bodyPr wrap="square" lIns="0" tIns="0" rIns="0" bIns="0" rtlCol="0" anchor="ctr"/>
-          <a:lstStyle/>
-          <a:p>
-            <a:pPr indent="0" marL="0">
-              <a:buNone/>
-            </a:pPr>
-            <a:r>
-              <a:rPr lang="en-US" sz="1100" b="1" dirty="0">
-                <a:solidFill>
-                  <a:srgbClr val="10161F"/>
-                </a:solidFill>
-                <a:latin typeface="Pretendard" pitchFamily="34" charset="0"/>
-                <a:ea typeface="Pretendard" pitchFamily="34" charset="-122"/>
-                <a:cs typeface="Pretendard" pitchFamily="34" charset="-120"/>
-              </a:rPr>
-              <a:t>건축물 개요 및 물리 스펙</a:t>
-            </a:r>
-            <a:endParaRPr lang="en-US" sz="1100" dirty="0"/>
-          </a:p>
-        </p:txBody>
-      </p:sp>
-      <p:sp>
-        <p:nvSpPr>
-          <p:cNvPr id="7" name="Text 5"/>
-          <p:cNvSpPr/>
-          <p:nvPr/>
-        </p:nvSpPr>
-        <p:spPr>
-          <a:xfrm>
-            <a:off x="566928" y="1645920"/>
-            <a:ext cx="2606040" cy="438912"/>
-          </a:xfrm>
-          <a:prstGeom prst="rect">
-            <a:avLst/>
-          </a:prstGeom>
-          <a:noFill/>
-          <a:ln/>
-        </p:spPr>
-        <p:txBody>
-          <a:bodyPr wrap="square" lIns="0" tIns="0" rIns="0" bIns="0" rtlCol="0" anchor="ctr"/>
-          <a:lstStyle/>
-          <a:p>
-            <a:pPr indent="0" marL="0">
-              <a:lnSpc>
-                <a:spcPct val="120000"/>
-              </a:lnSpc>
-              <a:buNone/>
-            </a:pPr>
-            <a:r>
-              <a:rPr lang="en-US" sz="1350" dirty="0">
-                <a:solidFill>
-                  <a:srgbClr val="718096"/>
-                </a:solidFill>
-                <a:latin typeface="Pretendard" pitchFamily="34" charset="0"/>
-                <a:ea typeface="Pretendard" pitchFamily="34" charset="-122"/>
-                <a:cs typeface="Pretendard" pitchFamily="34" charset="-120"/>
-              </a:rPr>
-              <a:t>1F</a:t>
-            </a:r>
-            <a:endParaRPr lang="en-US" sz="1350" dirty="0"/>
-          </a:p>
-        </p:txBody>
-      </p:sp>
-      <p:sp>
-        <p:nvSpPr>
-          <p:cNvPr id="8" name="Text 6"/>
-          <p:cNvSpPr/>
-          <p:nvPr/>
-        </p:nvSpPr>
-        <p:spPr>
-          <a:xfrm>
-            <a:off x="3172968" y="1645920"/>
-            <a:ext cx="4251960" cy="438912"/>
-          </a:xfrm>
-          <a:prstGeom prst="rect">
-            <a:avLst/>
-          </a:prstGeom>
-          <a:noFill/>
-          <a:ln/>
-        </p:spPr>
-        <p:txBody>
-          <a:bodyPr wrap="square" lIns="0" tIns="0" rIns="0" bIns="0" rtlCol="0" anchor="ctr"/>
-          <a:lstStyle/>
-          <a:p>
-            <a:pPr indent="0" marL="0">
-              <a:lnSpc>
-                <a:spcPct val="120000"/>
-              </a:lnSpc>
-              <a:buNone/>
-            </a:pPr>
-            <a:r>
-              <a:rPr lang="en-US" sz="1350" b="1" dirty="0">
-                <a:solidFill>
-                  <a:srgbClr val="10161F"/>
-                </a:solidFill>
-                <a:latin typeface="Pretendard" pitchFamily="34" charset="0"/>
-                <a:ea typeface="Pretendard" pitchFamily="34" charset="-122"/>
-                <a:cs typeface="Pretendard" pitchFamily="34" charset="-120"/>
-              </a:rPr>
-              <a:t>약국 (3억)</a:t>
-            </a:r>
-            <a:endParaRPr lang="en-US" sz="1350" dirty="0"/>
-          </a:p>
-        </p:txBody>
-      </p:sp>
-      <p:sp>
-        <p:nvSpPr>
-          <p:cNvPr id="9" name="Shape 7"/>
-          <p:cNvSpPr/>
-          <p:nvPr/>
-        </p:nvSpPr>
-        <p:spPr>
-          <a:xfrm>
-            <a:off x="566928" y="2084832"/>
-            <a:ext cx="6858000" cy="0"/>
-          </a:xfrm>
-          <a:prstGeom prst="line">
-            <a:avLst/>
-          </a:prstGeom>
-          <a:noFill/>
-          <a:ln w="3810">
-            <a:solidFill>
-              <a:srgbClr val="CBD5E0"/>
-            </a:solidFill>
-            <a:prstDash val="solid"/>
-          </a:ln>
-        </p:spPr>
-      </p:sp>
-      <p:sp>
-        <p:nvSpPr>
-          <p:cNvPr id="10" name="Text 8"/>
-          <p:cNvSpPr/>
-          <p:nvPr/>
-        </p:nvSpPr>
-        <p:spPr>
-          <a:xfrm>
-            <a:off x="566928" y="2084832"/>
-            <a:ext cx="2606040" cy="438912"/>
-          </a:xfrm>
-          <a:prstGeom prst="rect">
-            <a:avLst/>
-          </a:prstGeom>
-          <a:noFill/>
-          <a:ln/>
-        </p:spPr>
-        <p:txBody>
-          <a:bodyPr wrap="square" lIns="0" tIns="0" rIns="0" bIns="0" rtlCol="0" anchor="ctr"/>
-          <a:lstStyle/>
-          <a:p>
-            <a:pPr indent="0" marL="0">
-              <a:lnSpc>
-                <a:spcPct val="120000"/>
-              </a:lnSpc>
-              <a:buNone/>
-            </a:pPr>
-            <a:r>
-              <a:rPr lang="en-US" sz="1350" dirty="0">
-                <a:solidFill>
-                  <a:srgbClr val="718096"/>
-                </a:solidFill>
-                <a:latin typeface="Pretendard" pitchFamily="34" charset="0"/>
-                <a:ea typeface="Pretendard" pitchFamily="34" charset="-122"/>
-                <a:cs typeface="Pretendard" pitchFamily="34" charset="-120"/>
-              </a:rPr>
-              <a:t>2F</a:t>
-            </a:r>
-            <a:endParaRPr lang="en-US" sz="1350" dirty="0"/>
-          </a:p>
-        </p:txBody>
-      </p:sp>
-      <p:sp>
-        <p:nvSpPr>
-          <p:cNvPr id="11" name="Text 9"/>
-          <p:cNvSpPr/>
-          <p:nvPr/>
-        </p:nvSpPr>
-        <p:spPr>
-          <a:xfrm>
-            <a:off x="3172968" y="2084832"/>
-            <a:ext cx="4251960" cy="438912"/>
-          </a:xfrm>
-          <a:prstGeom prst="rect">
-            <a:avLst/>
-          </a:prstGeom>
-          <a:noFill/>
-          <a:ln/>
-        </p:spPr>
-        <p:txBody>
-          <a:bodyPr wrap="square" lIns="0" tIns="0" rIns="0" bIns="0" rtlCol="0" anchor="ctr"/>
-          <a:lstStyle/>
-          <a:p>
-            <a:pPr indent="0" marL="0">
-              <a:lnSpc>
-                <a:spcPct val="120000"/>
-              </a:lnSpc>
-              <a:buNone/>
-            </a:pPr>
-            <a:r>
-              <a:rPr lang="en-US" sz="1350" b="1" dirty="0">
-                <a:solidFill>
-                  <a:srgbClr val="10161F"/>
-                </a:solidFill>
-                <a:latin typeface="Pretendard" pitchFamily="34" charset="0"/>
-                <a:ea typeface="Pretendard" pitchFamily="34" charset="-122"/>
-                <a:cs typeface="Pretendard" pitchFamily="34" charset="-120"/>
-              </a:rPr>
-              <a:t>안과 (2억)</a:t>
-            </a:r>
-            <a:endParaRPr lang="en-US" sz="1350" dirty="0"/>
-          </a:p>
-        </p:txBody>
-      </p:sp>
-      <p:sp>
-        <p:nvSpPr>
-          <p:cNvPr id="12" name="Shape 10"/>
-          <p:cNvSpPr/>
-          <p:nvPr/>
-        </p:nvSpPr>
-        <p:spPr>
-          <a:xfrm>
-            <a:off x="7604608" y="1371600"/>
-            <a:ext cx="0" cy="4754880"/>
-          </a:xfrm>
-          <a:prstGeom prst="line">
-            <a:avLst/>
-          </a:prstGeom>
-          <a:noFill/>
-          <a:ln w="8890">
-            <a:solidFill>
-              <a:srgbClr val="B98A2E"/>
-            </a:solidFill>
-            <a:prstDash val="solid"/>
-          </a:ln>
-        </p:spPr>
-      </p:sp>
-      <p:sp>
-        <p:nvSpPr>
-          <p:cNvPr id="13" name="Shape 11"/>
-          <p:cNvSpPr/>
-          <p:nvPr/>
-        </p:nvSpPr>
-        <p:spPr>
-          <a:xfrm>
-            <a:off x="7784287" y="1645920"/>
-            <a:ext cx="3840480" cy="1645920"/>
-          </a:xfrm>
-          <a:prstGeom prst="roundRect">
-            <a:avLst>
-              <a:gd name="adj" fmla="val 3333"/>
-            </a:avLst>
-          </a:prstGeom>
-          <a:solidFill>
-            <a:srgbClr val="F3EBDA"/>
-          </a:solidFill>
-          <a:ln/>
-        </p:spPr>
-      </p:sp>
-      <p:sp>
-        <p:nvSpPr>
-          <p:cNvPr id="14" name="Shape 12"/>
-          <p:cNvSpPr/>
-          <p:nvPr/>
-        </p:nvSpPr>
-        <p:spPr>
-          <a:xfrm>
-            <a:off x="7784287" y="1700784"/>
-            <a:ext cx="36576" cy="1536192"/>
-          </a:xfrm>
-          <a:prstGeom prst="rect">
-            <a:avLst/>
-          </a:prstGeom>
-          <a:solidFill>
-            <a:srgbClr val="977024"/>
-          </a:solidFill>
-          <a:ln/>
-        </p:spPr>
-      </p:sp>
-      <p:sp>
-        <p:nvSpPr>
-          <p:cNvPr id="15" name="Text 13"/>
-          <p:cNvSpPr/>
-          <p:nvPr/>
-        </p:nvSpPr>
-        <p:spPr>
-          <a:xfrm>
-            <a:off x="7967167" y="1755648"/>
-            <a:ext cx="3511296" cy="201168"/>
-          </a:xfrm>
-          <a:prstGeom prst="rect">
-            <a:avLst/>
-          </a:prstGeom>
-          <a:noFill/>
-          <a:ln/>
-        </p:spPr>
-        <p:txBody>
-          <a:bodyPr wrap="square" lIns="0" tIns="0" rIns="0" bIns="0" rtlCol="0" anchor="ctr"/>
-          <a:lstStyle/>
-          <a:p>
-            <a:pPr indent="0" marL="0">
-              <a:buNone/>
-            </a:pPr>
-            <a:endParaRPr lang="en-US" sz="1050" dirty="0"/>
-          </a:p>
-        </p:txBody>
-      </p:sp>
-      <p:sp>
-        <p:nvSpPr>
-          <p:cNvPr id="16" name="Text 14"/>
-          <p:cNvSpPr/>
-          <p:nvPr/>
-        </p:nvSpPr>
-        <p:spPr>
-          <a:xfrm>
-            <a:off x="7967167" y="1975104"/>
-            <a:ext cx="3511296" cy="1243584"/>
-          </a:xfrm>
-          <a:prstGeom prst="rect">
-            <a:avLst/>
-          </a:prstGeom>
-          <a:noFill/>
-          <a:ln/>
-        </p:spPr>
-        <p:txBody>
-          <a:bodyPr wrap="square" lIns="0" tIns="0" rIns="0" bIns="0" rtlCol="0" anchor="t"/>
-          <a:lstStyle/>
-          <a:p>
-            <a:pPr indent="0" marL="0">
-              <a:lnSpc>
-                <a:spcPct val="120000"/>
-              </a:lnSpc>
-              <a:buNone/>
-            </a:pPr>
-            <a:r>
-              <a:rPr lang="en-US" sz="930" dirty="0">
-                <a:solidFill>
-                  <a:srgbClr val="10161F"/>
-                </a:solidFill>
-                <a:latin typeface="Pretendard" pitchFamily="34" charset="0"/>
-                <a:ea typeface="Pretendard" pitchFamily="34" charset="-122"/>
-                <a:cs typeface="Pretendard" pitchFamily="34" charset="-120"/>
-              </a:rPr>
-              <a:t>전층 메디컬 만실 운영 중이며 WALE 평균 3.5년입니다.</a:t>
-            </a:r>
-            <a:endParaRPr lang="en-US" sz="930" dirty="0"/>
-          </a:p>
-        </p:txBody>
-      </p:sp>
-      <p:sp>
-        <p:nvSpPr>
-          <p:cNvPr id="17" name="Text 15"/>
-          <p:cNvSpPr/>
-          <p:nvPr/>
-        </p:nvSpPr>
-        <p:spPr>
-          <a:xfrm>
-            <a:off x="566928" y="6382512"/>
-            <a:ext cx="7315200" cy="219456"/>
-          </a:xfrm>
-          <a:prstGeom prst="rect">
-            <a:avLst/>
-          </a:prstGeom>
-          <a:noFill/>
-          <a:ln/>
-        </p:spPr>
-        <p:txBody>
-          <a:bodyPr wrap="square" lIns="0" tIns="0" rIns="0" bIns="0" rtlCol="0" anchor="ctr"/>
-          <a:lstStyle/>
-          <a:p>
-            <a:pPr indent="0" marL="0">
-              <a:buNone/>
-            </a:pPr>
-            <a:r>
-              <a:rPr lang="en-US" sz="800" dirty="0">
-                <a:solidFill>
-                  <a:srgbClr val="718096"/>
-                </a:solidFill>
-                <a:latin typeface="Pretendard" pitchFamily="34" charset="0"/>
-                <a:ea typeface="Pretendard" pitchFamily="34" charset="-122"/>
-                <a:cs typeface="Pretendard" pitchFamily="34" charset="-120"/>
-              </a:rPr>
-              <a:t>크리딜   |   </a:t>
-            </a:r>
-            <a:endParaRPr lang="en-US" sz="800" dirty="0"/>
-          </a:p>
-        </p:txBody>
-      </p:sp>
-      <p:sp>
-        <p:nvSpPr>
-          <p:cNvPr id="18" name="Text 16"/>
-          <p:cNvSpPr/>
-          <p:nvPr/>
-        </p:nvSpPr>
-        <p:spPr>
-          <a:xfrm>
-            <a:off x="10710367" y="6382512"/>
-            <a:ext cx="914400" cy="219456"/>
-          </a:xfrm>
-          <a:prstGeom prst="rect">
-            <a:avLst/>
-          </a:prstGeom>
-          <a:noFill/>
-          <a:ln/>
-        </p:spPr>
-        <p:txBody>
-          <a:bodyPr wrap="square" lIns="0" tIns="0" rIns="0" bIns="0" rtlCol="0" anchor="ctr"/>
-          <a:lstStyle/>
-          <a:p>
-            <a:pPr algn="r" indent="0" marL="0">
-              <a:buNone/>
-            </a:pPr>
-            <a:r>
-              <a:rPr lang="en-US" sz="900" b="1" dirty="0">
-                <a:solidFill>
-                  <a:srgbClr val="B98A2E"/>
-                </a:solidFill>
-                <a:latin typeface="Arial" pitchFamily="34" charset="0"/>
-                <a:ea typeface="Arial" pitchFamily="34" charset="-122"/>
-                <a:cs typeface="Arial" pitchFamily="34" charset="-120"/>
-              </a:rPr>
-              <a:t>4</a:t>
+              <a:t>5</a:t>
             </a:r>
             <a:endParaRPr lang="en-US" sz="900" dirty="0"/>
           </a:p>
@@ -10471,7 +11070,7 @@
                 <a:ea typeface="Arial" pitchFamily="34" charset="-122"/>
                 <a:cs typeface="Arial" pitchFamily="34" charset="-120"/>
               </a:rPr>
-              <a:t>05</a:t>
+              <a:t>06</a:t>
             </a:r>
             <a:endParaRPr lang="en-US" sz="1300" dirty="0"/>
           </a:p>
@@ -10510,7 +11109,7 @@
                 <a:ea typeface="Arial" pitchFamily="34" charset="-122"/>
                 <a:cs typeface="Arial" pitchFamily="34" charset="-120"/>
               </a:rPr>
-              <a:t>Profit</a:t>
+              <a:t>Stability</a:t>
             </a:r>
             <a:endParaRPr lang="en-US" sz="950" dirty="0"/>
           </a:p>
@@ -10549,7 +11148,7 @@
                 <a:ea typeface="Pretendard" pitchFamily="34" charset="-122"/>
                 <a:cs typeface="Pretendard" pitchFamily="34" charset="-120"/>
               </a:rPr>
-              <a:t>수익성 분석</a:t>
+              <a:t>임대안정성</a:t>
             </a:r>
             <a:endParaRPr lang="en-US" sz="2300" dirty="0"/>
           </a:p>
@@ -10557,20 +11156,250 @@
       </p:sp>
       <p:sp>
         <p:nvSpPr>
-          <p:cNvPr id="6" name="Shape 4"/>
-          <p:cNvSpPr/>
-          <p:nvPr/>
-        </p:nvSpPr>
-        <p:spPr>
-          <a:xfrm>
-            <a:off x="566928" y="1325880"/>
-            <a:ext cx="11057839" cy="0"/>
+          <p:cNvPr id="6" name="Text 4"/>
+          <p:cNvSpPr/>
+          <p:nvPr/>
+        </p:nvSpPr>
+        <p:spPr>
+          <a:xfrm>
+            <a:off x="566928" y="1371600"/>
+            <a:ext cx="6858000" cy="237744"/>
+          </a:xfrm>
+          <a:prstGeom prst="rect">
+            <a:avLst/>
+          </a:prstGeom>
+          <a:noFill/>
+          <a:ln/>
+        </p:spPr>
+        <p:txBody>
+          <a:bodyPr wrap="square" lIns="0" tIns="0" rIns="0" bIns="0" rtlCol="0" anchor="ctr"/>
+          <a:lstStyle/>
+          <a:p>
+            <a:pPr indent="0" marL="0">
+              <a:buNone/>
+            </a:pPr>
+            <a:r>
+              <a:rPr lang="en-US" sz="1100" b="1" dirty="0">
+                <a:solidFill>
+                  <a:srgbClr val="10161F"/>
+                </a:solidFill>
+                <a:latin typeface="Pretendard" pitchFamily="34" charset="0"/>
+                <a:ea typeface="Pretendard" pitchFamily="34" charset="-122"/>
+                <a:cs typeface="Pretendard" pitchFamily="34" charset="-120"/>
+              </a:rPr>
+              <a:t>건축물 개요 및 물리 스펙</a:t>
+            </a:r>
+            <a:endParaRPr lang="en-US" sz="1100" dirty="0"/>
+          </a:p>
+        </p:txBody>
+      </p:sp>
+      <p:sp>
+        <p:nvSpPr>
+          <p:cNvPr id="7" name="Text 5"/>
+          <p:cNvSpPr/>
+          <p:nvPr/>
+        </p:nvSpPr>
+        <p:spPr>
+          <a:xfrm>
+            <a:off x="566928" y="1645920"/>
+            <a:ext cx="2606040" cy="438912"/>
+          </a:xfrm>
+          <a:prstGeom prst="rect">
+            <a:avLst/>
+          </a:prstGeom>
+          <a:noFill/>
+          <a:ln/>
+        </p:spPr>
+        <p:txBody>
+          <a:bodyPr wrap="square" lIns="0" tIns="0" rIns="0" bIns="0" rtlCol="0" anchor="ctr"/>
+          <a:lstStyle/>
+          <a:p>
+            <a:pPr indent="0" marL="0">
+              <a:lnSpc>
+                <a:spcPct val="120000"/>
+              </a:lnSpc>
+              <a:buNone/>
+            </a:pPr>
+            <a:r>
+              <a:rPr lang="en-US" sz="1350" dirty="0">
+                <a:solidFill>
+                  <a:srgbClr val="718096"/>
+                </a:solidFill>
+                <a:latin typeface="Pretendard" pitchFamily="34" charset="0"/>
+                <a:ea typeface="Pretendard" pitchFamily="34" charset="-122"/>
+                <a:cs typeface="Pretendard" pitchFamily="34" charset="-120"/>
+              </a:rPr>
+              <a:t>1F</a:t>
+            </a:r>
+            <a:endParaRPr lang="en-US" sz="1350" dirty="0"/>
+          </a:p>
+        </p:txBody>
+      </p:sp>
+      <p:sp>
+        <p:nvSpPr>
+          <p:cNvPr id="8" name="Text 6"/>
+          <p:cNvSpPr/>
+          <p:nvPr/>
+        </p:nvSpPr>
+        <p:spPr>
+          <a:xfrm>
+            <a:off x="3172968" y="1645920"/>
+            <a:ext cx="4251960" cy="438912"/>
+          </a:xfrm>
+          <a:prstGeom prst="rect">
+            <a:avLst/>
+          </a:prstGeom>
+          <a:noFill/>
+          <a:ln/>
+        </p:spPr>
+        <p:txBody>
+          <a:bodyPr wrap="square" lIns="0" tIns="0" rIns="0" bIns="0" rtlCol="0" anchor="ctr"/>
+          <a:lstStyle/>
+          <a:p>
+            <a:pPr indent="0" marL="0">
+              <a:lnSpc>
+                <a:spcPct val="120000"/>
+              </a:lnSpc>
+              <a:buNone/>
+            </a:pPr>
+            <a:r>
+              <a:rPr lang="en-US" sz="1350" b="1" dirty="0">
+                <a:solidFill>
+                  <a:srgbClr val="10161F"/>
+                </a:solidFill>
+                <a:latin typeface="Pretendard" pitchFamily="34" charset="0"/>
+                <a:ea typeface="Pretendard" pitchFamily="34" charset="-122"/>
+                <a:cs typeface="Pretendard" pitchFamily="34" charset="-120"/>
+              </a:rPr>
+              <a:t>약국 (3억)</a:t>
+            </a:r>
+            <a:endParaRPr lang="en-US" sz="1350" dirty="0"/>
+          </a:p>
+        </p:txBody>
+      </p:sp>
+      <p:sp>
+        <p:nvSpPr>
+          <p:cNvPr id="9" name="Shape 7"/>
+          <p:cNvSpPr/>
+          <p:nvPr/>
+        </p:nvSpPr>
+        <p:spPr>
+          <a:xfrm>
+            <a:off x="566928" y="2084832"/>
+            <a:ext cx="6858000" cy="0"/>
           </a:xfrm>
           <a:prstGeom prst="line">
             <a:avLst/>
           </a:prstGeom>
           <a:noFill/>
-          <a:ln w="19050">
+          <a:ln w="3810">
+            <a:solidFill>
+              <a:srgbClr val="CBD5E0"/>
+            </a:solidFill>
+            <a:prstDash val="solid"/>
+          </a:ln>
+        </p:spPr>
+      </p:sp>
+      <p:sp>
+        <p:nvSpPr>
+          <p:cNvPr id="10" name="Text 8"/>
+          <p:cNvSpPr/>
+          <p:nvPr/>
+        </p:nvSpPr>
+        <p:spPr>
+          <a:xfrm>
+            <a:off x="566928" y="2084832"/>
+            <a:ext cx="2606040" cy="438912"/>
+          </a:xfrm>
+          <a:prstGeom prst="rect">
+            <a:avLst/>
+          </a:prstGeom>
+          <a:noFill/>
+          <a:ln/>
+        </p:spPr>
+        <p:txBody>
+          <a:bodyPr wrap="square" lIns="0" tIns="0" rIns="0" bIns="0" rtlCol="0" anchor="ctr"/>
+          <a:lstStyle/>
+          <a:p>
+            <a:pPr indent="0" marL="0">
+              <a:lnSpc>
+                <a:spcPct val="120000"/>
+              </a:lnSpc>
+              <a:buNone/>
+            </a:pPr>
+            <a:r>
+              <a:rPr lang="en-US" sz="1350" dirty="0">
+                <a:solidFill>
+                  <a:srgbClr val="718096"/>
+                </a:solidFill>
+                <a:latin typeface="Pretendard" pitchFamily="34" charset="0"/>
+                <a:ea typeface="Pretendard" pitchFamily="34" charset="-122"/>
+                <a:cs typeface="Pretendard" pitchFamily="34" charset="-120"/>
+              </a:rPr>
+              <a:t>2F</a:t>
+            </a:r>
+            <a:endParaRPr lang="en-US" sz="1350" dirty="0"/>
+          </a:p>
+        </p:txBody>
+      </p:sp>
+      <p:sp>
+        <p:nvSpPr>
+          <p:cNvPr id="11" name="Text 9"/>
+          <p:cNvSpPr/>
+          <p:nvPr/>
+        </p:nvSpPr>
+        <p:spPr>
+          <a:xfrm>
+            <a:off x="3172968" y="2084832"/>
+            <a:ext cx="4251960" cy="438912"/>
+          </a:xfrm>
+          <a:prstGeom prst="rect">
+            <a:avLst/>
+          </a:prstGeom>
+          <a:noFill/>
+          <a:ln/>
+        </p:spPr>
+        <p:txBody>
+          <a:bodyPr wrap="square" lIns="0" tIns="0" rIns="0" bIns="0" rtlCol="0" anchor="ctr"/>
+          <a:lstStyle/>
+          <a:p>
+            <a:pPr indent="0" marL="0">
+              <a:lnSpc>
+                <a:spcPct val="120000"/>
+              </a:lnSpc>
+              <a:buNone/>
+            </a:pPr>
+            <a:r>
+              <a:rPr lang="en-US" sz="1350" b="1" dirty="0">
+                <a:solidFill>
+                  <a:srgbClr val="10161F"/>
+                </a:solidFill>
+                <a:latin typeface="Pretendard" pitchFamily="34" charset="0"/>
+                <a:ea typeface="Pretendard" pitchFamily="34" charset="-122"/>
+                <a:cs typeface="Pretendard" pitchFamily="34" charset="-120"/>
+              </a:rPr>
+              <a:t>안과 (2억)</a:t>
+            </a:r>
+            <a:endParaRPr lang="en-US" sz="1350" dirty="0"/>
+          </a:p>
+        </p:txBody>
+      </p:sp>
+      <p:sp>
+        <p:nvSpPr>
+          <p:cNvPr id="12" name="Shape 10"/>
+          <p:cNvSpPr/>
+          <p:nvPr/>
+        </p:nvSpPr>
+        <p:spPr>
+          <a:xfrm>
+            <a:off x="7604608" y="1371600"/>
+            <a:ext cx="0" cy="4754880"/>
+          </a:xfrm>
+          <a:prstGeom prst="line">
+            <a:avLst/>
+          </a:prstGeom>
+          <a:noFill/>
+          <a:ln w="8890">
             <a:solidFill>
               <a:srgbClr val="B98A2E"/>
             </a:solidFill>
@@ -10580,41 +11409,56 @@
       </p:sp>
       <p:sp>
         <p:nvSpPr>
-          <p:cNvPr id="7" name="Shape 5"/>
-          <p:cNvSpPr/>
-          <p:nvPr/>
-        </p:nvSpPr>
-        <p:spPr>
-          <a:xfrm>
-            <a:off x="566928" y="1554480"/>
-            <a:ext cx="3576218" cy="1188720"/>
+          <p:cNvPr id="13" name="Shape 11"/>
+          <p:cNvSpPr/>
+          <p:nvPr/>
+        </p:nvSpPr>
+        <p:spPr>
+          <a:xfrm>
+            <a:off x="7784287" y="1645920"/>
+            <a:ext cx="3840480" cy="1645920"/>
           </a:xfrm>
           <a:prstGeom prst="roundRect">
             <a:avLst>
-              <a:gd name="adj" fmla="val 4615"/>
+              <a:gd name="adj" fmla="val 3333"/>
             </a:avLst>
           </a:prstGeom>
           <a:solidFill>
-            <a:srgbClr val="F7FAFC"/>
+            <a:srgbClr val="F3EBDA"/>
           </a:solidFill>
-          <a:ln w="6350">
-            <a:solidFill>
-              <a:srgbClr val="CBD5E0"/>
-            </a:solidFill>
-            <a:prstDash val="solid"/>
-          </a:ln>
-        </p:spPr>
-      </p:sp>
-      <p:sp>
-        <p:nvSpPr>
-          <p:cNvPr id="8" name="Text 6"/>
-          <p:cNvSpPr/>
-          <p:nvPr/>
-        </p:nvSpPr>
-        <p:spPr>
-          <a:xfrm>
-            <a:off x="731520" y="1682496"/>
-            <a:ext cx="3247034" cy="201168"/>
+          <a:ln/>
+        </p:spPr>
+      </p:sp>
+      <p:sp>
+        <p:nvSpPr>
+          <p:cNvPr id="14" name="Shape 12"/>
+          <p:cNvSpPr/>
+          <p:nvPr/>
+        </p:nvSpPr>
+        <p:spPr>
+          <a:xfrm>
+            <a:off x="7784287" y="1700784"/>
+            <a:ext cx="36576" cy="1536192"/>
+          </a:xfrm>
+          <a:prstGeom prst="rect">
+            <a:avLst/>
+          </a:prstGeom>
+          <a:solidFill>
+            <a:srgbClr val="977024"/>
+          </a:solidFill>
+          <a:ln/>
+        </p:spPr>
+      </p:sp>
+      <p:sp>
+        <p:nvSpPr>
+          <p:cNvPr id="15" name="Text 13"/>
+          <p:cNvSpPr/>
+          <p:nvPr/>
+        </p:nvSpPr>
+        <p:spPr>
+          <a:xfrm>
+            <a:off x="7967167" y="1755648"/>
+            <a:ext cx="3511296" cy="201168"/>
           </a:xfrm>
           <a:prstGeom prst="rect">
             <a:avLst/>
@@ -10629,367 +11473,20 @@
             <a:pPr indent="0" marL="0">
               <a:buNone/>
             </a:pPr>
-            <a:r>
-              <a:rPr lang="en-US" sz="950" dirty="0">
-                <a:solidFill>
-                  <a:srgbClr val="718096"/>
-                </a:solidFill>
-                <a:latin typeface="Pretendard" pitchFamily="34" charset="0"/>
-                <a:ea typeface="Pretendard" pitchFamily="34" charset="-122"/>
-                <a:cs typeface="Pretendard" pitchFamily="34" charset="-120"/>
-              </a:rPr>
-              <a:t>실투자금</a:t>
-            </a:r>
-            <a:endParaRPr lang="en-US" sz="950" dirty="0"/>
-          </a:p>
-        </p:txBody>
-      </p:sp>
-      <p:sp>
-        <p:nvSpPr>
-          <p:cNvPr id="9" name="Text 7"/>
-          <p:cNvSpPr/>
-          <p:nvPr/>
-        </p:nvSpPr>
-        <p:spPr>
-          <a:xfrm>
-            <a:off x="731520" y="1901952"/>
-            <a:ext cx="3247034" cy="402336"/>
-          </a:xfrm>
-          <a:prstGeom prst="rect">
-            <a:avLst/>
-          </a:prstGeom>
-          <a:noFill/>
-          <a:ln/>
-        </p:spPr>
-        <p:txBody>
-          <a:bodyPr wrap="square" lIns="0" tIns="0" rIns="0" bIns="0" rtlCol="0" anchor="ctr">
-            <a:normAutofit/>
-          </a:bodyPr>
-          <a:lstStyle/>
-          <a:p>
-            <a:pPr indent="0" marL="0">
-              <a:buNone/>
-            </a:pPr>
-            <a:r>
-              <a:rPr lang="en-US" sz="2200" b="1" dirty="0">
-                <a:solidFill>
-                  <a:srgbClr val="10161F"/>
-                </a:solidFill>
-                <a:latin typeface="Pretendard" pitchFamily="34" charset="0"/>
-                <a:ea typeface="Pretendard" pitchFamily="34" charset="-122"/>
-                <a:cs typeface="Pretendard" pitchFamily="34" charset="-120"/>
-              </a:rPr>
-              <a:t>약 69억 원</a:t>
-            </a:r>
-            <a:endParaRPr lang="en-US" sz="2200" dirty="0"/>
-          </a:p>
-        </p:txBody>
-      </p:sp>
-      <p:sp>
-        <p:nvSpPr>
-          <p:cNvPr id="10" name="Shape 8"/>
-          <p:cNvSpPr/>
-          <p:nvPr/>
-        </p:nvSpPr>
-        <p:spPr>
-          <a:xfrm>
-            <a:off x="4307738" y="1554480"/>
-            <a:ext cx="3576218" cy="1188720"/>
-          </a:xfrm>
-          <a:prstGeom prst="roundRect">
-            <a:avLst>
-              <a:gd name="adj" fmla="val 4615"/>
-            </a:avLst>
-          </a:prstGeom>
-          <a:solidFill>
-            <a:srgbClr val="F7FAFC"/>
-          </a:solidFill>
-          <a:ln w="6350">
-            <a:solidFill>
-              <a:srgbClr val="CBD5E0"/>
-            </a:solidFill>
-            <a:prstDash val="solid"/>
-          </a:ln>
-        </p:spPr>
-      </p:sp>
-      <p:sp>
-        <p:nvSpPr>
-          <p:cNvPr id="11" name="Text 9"/>
-          <p:cNvSpPr/>
-          <p:nvPr/>
-        </p:nvSpPr>
-        <p:spPr>
-          <a:xfrm>
-            <a:off x="4472330" y="1682496"/>
-            <a:ext cx="3247034" cy="201168"/>
-          </a:xfrm>
-          <a:prstGeom prst="rect">
-            <a:avLst/>
-          </a:prstGeom>
-          <a:noFill/>
-          <a:ln/>
-        </p:spPr>
-        <p:txBody>
-          <a:bodyPr wrap="square" lIns="0" tIns="0" rIns="0" bIns="0" rtlCol="0" anchor="ctr"/>
-          <a:lstStyle/>
-          <a:p>
-            <a:pPr indent="0" marL="0">
-              <a:buNone/>
-            </a:pPr>
-            <a:r>
-              <a:rPr lang="en-US" sz="950" dirty="0">
-                <a:solidFill>
-                  <a:srgbClr val="718096"/>
-                </a:solidFill>
-                <a:latin typeface="Pretendard" pitchFamily="34" charset="0"/>
-                <a:ea typeface="Pretendard" pitchFamily="34" charset="-122"/>
-                <a:cs typeface="Pretendard" pitchFamily="34" charset="-120"/>
-              </a:rPr>
-              <a:t>순수익(매월)</a:t>
-            </a:r>
-            <a:endParaRPr lang="en-US" sz="950" dirty="0"/>
-          </a:p>
-        </p:txBody>
-      </p:sp>
-      <p:sp>
-        <p:nvSpPr>
-          <p:cNvPr id="12" name="Text 10"/>
-          <p:cNvSpPr/>
-          <p:nvPr/>
-        </p:nvSpPr>
-        <p:spPr>
-          <a:xfrm>
-            <a:off x="4472330" y="1901952"/>
-            <a:ext cx="3247034" cy="402336"/>
-          </a:xfrm>
-          <a:prstGeom prst="rect">
-            <a:avLst/>
-          </a:prstGeom>
-          <a:noFill/>
-          <a:ln/>
-        </p:spPr>
-        <p:txBody>
-          <a:bodyPr wrap="square" lIns="0" tIns="0" rIns="0" bIns="0" rtlCol="0" anchor="ctr">
-            <a:normAutofit/>
-          </a:bodyPr>
-          <a:lstStyle/>
-          <a:p>
-            <a:pPr indent="0" marL="0">
-              <a:buNone/>
-            </a:pPr>
-            <a:r>
-              <a:rPr lang="en-US" sz="2200" b="1" dirty="0">
-                <a:solidFill>
-                  <a:srgbClr val="10161F"/>
-                </a:solidFill>
-                <a:latin typeface="Pretendard" pitchFamily="34" charset="0"/>
-                <a:ea typeface="Pretendard" pitchFamily="34" charset="-122"/>
-                <a:cs typeface="Pretendard" pitchFamily="34" charset="-120"/>
-              </a:rPr>
-              <a:t>약 3,650만 원</a:t>
-            </a:r>
-            <a:endParaRPr lang="en-US" sz="2200" dirty="0"/>
-          </a:p>
-        </p:txBody>
-      </p:sp>
-      <p:sp>
-        <p:nvSpPr>
-          <p:cNvPr id="13" name="Shape 11"/>
-          <p:cNvSpPr/>
-          <p:nvPr/>
-        </p:nvSpPr>
-        <p:spPr>
-          <a:xfrm>
-            <a:off x="8048549" y="1554480"/>
-            <a:ext cx="3576218" cy="1188720"/>
-          </a:xfrm>
-          <a:prstGeom prst="roundRect">
-            <a:avLst>
-              <a:gd name="adj" fmla="val 4615"/>
-            </a:avLst>
-          </a:prstGeom>
-          <a:solidFill>
-            <a:srgbClr val="F7FAFC"/>
-          </a:solidFill>
-          <a:ln w="6350">
-            <a:solidFill>
-              <a:srgbClr val="CBD5E0"/>
-            </a:solidFill>
-            <a:prstDash val="solid"/>
-          </a:ln>
-        </p:spPr>
-      </p:sp>
-      <p:sp>
-        <p:nvSpPr>
-          <p:cNvPr id="14" name="Text 12"/>
-          <p:cNvSpPr/>
-          <p:nvPr/>
-        </p:nvSpPr>
-        <p:spPr>
-          <a:xfrm>
-            <a:off x="8213141" y="1682496"/>
-            <a:ext cx="3247034" cy="201168"/>
-          </a:xfrm>
-          <a:prstGeom prst="rect">
-            <a:avLst/>
-          </a:prstGeom>
-          <a:noFill/>
-          <a:ln/>
-        </p:spPr>
-        <p:txBody>
-          <a:bodyPr wrap="square" lIns="0" tIns="0" rIns="0" bIns="0" rtlCol="0" anchor="ctr"/>
-          <a:lstStyle/>
-          <a:p>
-            <a:pPr indent="0" marL="0">
-              <a:buNone/>
-            </a:pPr>
-            <a:r>
-              <a:rPr lang="en-US" sz="950" dirty="0">
-                <a:solidFill>
-                  <a:srgbClr val="718096"/>
-                </a:solidFill>
-                <a:latin typeface="Pretendard" pitchFamily="34" charset="0"/>
-                <a:ea typeface="Pretendard" pitchFamily="34" charset="-122"/>
-                <a:cs typeface="Pretendard" pitchFamily="34" charset="-120"/>
-              </a:rPr>
-              <a:t>레버리지 수익률</a:t>
-            </a:r>
-            <a:endParaRPr lang="en-US" sz="950" dirty="0"/>
-          </a:p>
-        </p:txBody>
-      </p:sp>
-      <p:sp>
-        <p:nvSpPr>
-          <p:cNvPr id="15" name="Text 13"/>
-          <p:cNvSpPr/>
-          <p:nvPr/>
-        </p:nvSpPr>
-        <p:spPr>
-          <a:xfrm>
-            <a:off x="8213141" y="1901952"/>
-            <a:ext cx="3247034" cy="402336"/>
-          </a:xfrm>
-          <a:prstGeom prst="rect">
-            <a:avLst/>
-          </a:prstGeom>
-          <a:noFill/>
-          <a:ln/>
-        </p:spPr>
-        <p:txBody>
-          <a:bodyPr wrap="square" lIns="0" tIns="0" rIns="0" bIns="0" rtlCol="0" anchor="ctr">
-            <a:normAutofit/>
-          </a:bodyPr>
-          <a:lstStyle/>
-          <a:p>
-            <a:pPr indent="0" marL="0">
-              <a:buNone/>
-            </a:pPr>
-            <a:r>
-              <a:rPr lang="en-US" sz="2200" b="1" dirty="0">
-                <a:solidFill>
-                  <a:srgbClr val="10161F"/>
-                </a:solidFill>
-                <a:latin typeface="Pretendard" pitchFamily="34" charset="0"/>
-                <a:ea typeface="Pretendard" pitchFamily="34" charset="-122"/>
-                <a:cs typeface="Pretendard" pitchFamily="34" charset="-120"/>
-              </a:rPr>
-              <a:t>약 5.8%</a:t>
-            </a:r>
-            <a:endParaRPr lang="en-US" sz="2200" dirty="0"/>
-          </a:p>
-        </p:txBody>
-      </p:sp>
-      <p:sp>
-        <p:nvSpPr>
-          <p:cNvPr id="16" name="Shape 14"/>
-          <p:cNvSpPr/>
-          <p:nvPr/>
-        </p:nvSpPr>
-        <p:spPr>
-          <a:xfrm>
-            <a:off x="566928" y="2999232"/>
-            <a:ext cx="11057839" cy="1280160"/>
-          </a:xfrm>
-          <a:prstGeom prst="roundRect">
-            <a:avLst>
-              <a:gd name="adj" fmla="val 4286"/>
-            </a:avLst>
-          </a:prstGeom>
-          <a:solidFill>
-            <a:srgbClr val="BEE3F8"/>
-          </a:solidFill>
-          <a:ln/>
-        </p:spPr>
-      </p:sp>
-      <p:sp>
-        <p:nvSpPr>
-          <p:cNvPr id="17" name="Shape 15"/>
-          <p:cNvSpPr/>
-          <p:nvPr/>
-        </p:nvSpPr>
-        <p:spPr>
-          <a:xfrm>
-            <a:off x="566928" y="3054096"/>
-            <a:ext cx="36576" cy="1170432"/>
-          </a:xfrm>
-          <a:prstGeom prst="rect">
-            <a:avLst/>
-          </a:prstGeom>
-          <a:solidFill>
-            <a:srgbClr val="2B6CB0"/>
-          </a:solidFill>
-          <a:ln/>
-        </p:spPr>
-      </p:sp>
-      <p:sp>
-        <p:nvSpPr>
-          <p:cNvPr id="18" name="Text 16"/>
-          <p:cNvSpPr/>
-          <p:nvPr/>
-        </p:nvSpPr>
-        <p:spPr>
-          <a:xfrm>
-            <a:off x="749808" y="3108960"/>
-            <a:ext cx="10728655" cy="201168"/>
-          </a:xfrm>
-          <a:prstGeom prst="rect">
-            <a:avLst/>
-          </a:prstGeom>
-          <a:noFill/>
-          <a:ln/>
-        </p:spPr>
-        <p:txBody>
-          <a:bodyPr wrap="square" lIns="0" tIns="0" rIns="0" bIns="0" rtlCol="0" anchor="ctr"/>
-          <a:lstStyle/>
-          <a:p>
-            <a:pPr indent="0" marL="0">
-              <a:buNone/>
-            </a:pPr>
-            <a:r>
-              <a:rPr lang="en-US" sz="1050" b="1" dirty="0">
-                <a:solidFill>
-                  <a:srgbClr val="2B6CB0"/>
-                </a:solidFill>
-                <a:latin typeface="Pretendard" pitchFamily="34" charset="0"/>
-                <a:ea typeface="Pretendard" pitchFamily="34" charset="-122"/>
-                <a:cs typeface="Pretendard" pitchFamily="34" charset="-120"/>
-              </a:rPr>
-              <a:t>투자 가치 제안</a:t>
-            </a:r>
             <a:endParaRPr lang="en-US" sz="1050" dirty="0"/>
           </a:p>
         </p:txBody>
       </p:sp>
       <p:sp>
         <p:nvSpPr>
-          <p:cNvPr id="19" name="Text 17"/>
-          <p:cNvSpPr/>
-          <p:nvPr/>
-        </p:nvSpPr>
-        <p:spPr>
-          <a:xfrm>
-            <a:off x="749808" y="3328416"/>
-            <a:ext cx="10728655" cy="877824"/>
+          <p:cNvPr id="16" name="Text 14"/>
+          <p:cNvSpPr/>
+          <p:nvPr/>
+        </p:nvSpPr>
+        <p:spPr>
+          <a:xfrm>
+            <a:off x="7967167" y="1975104"/>
+            <a:ext cx="3511296" cy="1243584"/>
           </a:xfrm>
           <a:prstGeom prst="rect">
             <a:avLst/>
@@ -11016,7 +11513,7 @@
                 <a:ea typeface="Pretendard" pitchFamily="34" charset="-122"/>
                 <a:cs typeface="Pretendard" pitchFamily="34" charset="-120"/>
               </a:rPr>
-              <a:t>연 순영업소득(NOI) 약 7.14억 원, 매입 Cap Rate 4.62%입니다.</a:t>
+              <a:t>전층 메디컬 만실 운영 중이며 WALE 평균 3.5년입니다.</a:t>
             </a:r>
             <a:endParaRPr lang="en-US" sz="930" dirty="0"/>
           </a:p>
@@ -11024,7 +11521,7 @@
       </p:sp>
       <p:sp>
         <p:nvSpPr>
-          <p:cNvPr id="20" name="Text 18"/>
+          <p:cNvPr id="17" name="Text 15"/>
           <p:cNvSpPr/>
           <p:nvPr/>
         </p:nvSpPr>
@@ -11063,7 +11560,7 @@
       </p:sp>
       <p:sp>
         <p:nvSpPr>
-          <p:cNvPr id="21" name="Text 19"/>
+          <p:cNvPr id="18" name="Text 16"/>
           <p:cNvSpPr/>
           <p:nvPr/>
         </p:nvSpPr>
@@ -11094,7 +11591,7 @@
                 <a:ea typeface="Arial" pitchFamily="34" charset="-122"/>
                 <a:cs typeface="Arial" pitchFamily="34" charset="-120"/>
               </a:rPr>
-              <a:t>5</a:t>
+              <a:t>6</a:t>
             </a:r>
             <a:endParaRPr lang="en-US" sz="900" dirty="0"/>
           </a:p>
@@ -11185,7 +11682,7 @@
                 <a:ea typeface="Arial" pitchFamily="34" charset="-122"/>
                 <a:cs typeface="Arial" pitchFamily="34" charset="-120"/>
               </a:rPr>
-              <a:t>06</a:t>
+              <a:t>07</a:t>
             </a:r>
             <a:endParaRPr lang="en-US" sz="1300" dirty="0"/>
           </a:p>
@@ -11224,7 +11721,7 @@
                 <a:ea typeface="Arial" pitchFamily="34" charset="-122"/>
                 <a:cs typeface="Arial" pitchFamily="34" charset="-120"/>
               </a:rPr>
-              <a:t>Comps</a:t>
+              <a:t>Capital</a:t>
             </a:r>
             <a:endParaRPr lang="en-US" sz="950" dirty="0"/>
           </a:p>
@@ -11263,552 +11760,7 @@
                 <a:ea typeface="Pretendard" pitchFamily="34" charset="-122"/>
                 <a:cs typeface="Pretendard" pitchFamily="34" charset="-120"/>
               </a:rPr>
-              <a:t>비교사례</a:t>
-            </a:r>
-            <a:endParaRPr lang="en-US" sz="2300" dirty="0"/>
-          </a:p>
-        </p:txBody>
-      </p:sp>
-      <p:sp>
-        <p:nvSpPr>
-          <p:cNvPr id="6" name="Text 4"/>
-          <p:cNvSpPr/>
-          <p:nvPr/>
-        </p:nvSpPr>
-        <p:spPr>
-          <a:xfrm>
-            <a:off x="566928" y="1645920"/>
-            <a:ext cx="4201979" cy="402336"/>
-          </a:xfrm>
-          <a:prstGeom prst="rect">
-            <a:avLst/>
-          </a:prstGeom>
-          <a:noFill/>
-          <a:ln/>
-        </p:spPr>
-        <p:txBody>
-          <a:bodyPr wrap="square" lIns="0" tIns="0" rIns="0" bIns="0" rtlCol="0" anchor="ctr"/>
-          <a:lstStyle/>
-          <a:p>
-            <a:pPr indent="0" marL="0">
-              <a:lnSpc>
-                <a:spcPct val="120000"/>
-              </a:lnSpc>
-              <a:buNone/>
-            </a:pPr>
-            <a:r>
-              <a:rPr lang="en-US" sz="1400" dirty="0">
-                <a:solidFill>
-                  <a:srgbClr val="718096"/>
-                </a:solidFill>
-                <a:latin typeface="Pretendard" pitchFamily="34" charset="0"/>
-                <a:ea typeface="Pretendard" pitchFamily="34" charset="-122"/>
-                <a:cs typeface="Pretendard" pitchFamily="34" charset="-120"/>
-              </a:rPr>
-              <a:t>- 실투자금</a:t>
-            </a:r>
-            <a:endParaRPr lang="en-US" sz="1400" dirty="0"/>
-          </a:p>
-        </p:txBody>
-      </p:sp>
-      <p:sp>
-        <p:nvSpPr>
-          <p:cNvPr id="7" name="Text 5"/>
-          <p:cNvSpPr/>
-          <p:nvPr/>
-        </p:nvSpPr>
-        <p:spPr>
-          <a:xfrm>
-            <a:off x="4768907" y="1645920"/>
-            <a:ext cx="6855860" cy="402336"/>
-          </a:xfrm>
-          <a:prstGeom prst="rect">
-            <a:avLst/>
-          </a:prstGeom>
-          <a:noFill/>
-          <a:ln/>
-        </p:spPr>
-        <p:txBody>
-          <a:bodyPr wrap="square" lIns="0" tIns="0" rIns="0" bIns="0" rtlCol="0" anchor="ctr"/>
-          <a:lstStyle/>
-          <a:p>
-            <a:pPr indent="0" marL="0">
-              <a:lnSpc>
-                <a:spcPct val="120000"/>
-              </a:lnSpc>
-              <a:buNone/>
-            </a:pPr>
-            <a:r>
-              <a:rPr lang="en-US" sz="1400" b="1" dirty="0">
-                <a:solidFill>
-                  <a:srgbClr val="10161F"/>
-                </a:solidFill>
-                <a:latin typeface="Pretendard" pitchFamily="34" charset="0"/>
-                <a:ea typeface="Pretendard" pitchFamily="34" charset="-122"/>
-                <a:cs typeface="Pretendard" pitchFamily="34" charset="-120"/>
-              </a:rPr>
-              <a:t>약 69억 원</a:t>
-            </a:r>
-            <a:endParaRPr lang="en-US" sz="1400" dirty="0"/>
-          </a:p>
-        </p:txBody>
-      </p:sp>
-      <p:sp>
-        <p:nvSpPr>
-          <p:cNvPr id="8" name="Shape 6"/>
-          <p:cNvSpPr/>
-          <p:nvPr/>
-        </p:nvSpPr>
-        <p:spPr>
-          <a:xfrm>
-            <a:off x="566928" y="2048256"/>
-            <a:ext cx="11057839" cy="0"/>
-          </a:xfrm>
-          <a:prstGeom prst="line">
-            <a:avLst/>
-          </a:prstGeom>
-          <a:noFill/>
-          <a:ln w="3810">
-            <a:solidFill>
-              <a:srgbClr val="CBD5E0"/>
-            </a:solidFill>
-            <a:prstDash val="solid"/>
-          </a:ln>
-        </p:spPr>
-      </p:sp>
-      <p:sp>
-        <p:nvSpPr>
-          <p:cNvPr id="9" name="Text 7"/>
-          <p:cNvSpPr/>
-          <p:nvPr/>
-        </p:nvSpPr>
-        <p:spPr>
-          <a:xfrm>
-            <a:off x="566928" y="2048256"/>
-            <a:ext cx="4201979" cy="402336"/>
-          </a:xfrm>
-          <a:prstGeom prst="rect">
-            <a:avLst/>
-          </a:prstGeom>
-          <a:noFill/>
-          <a:ln/>
-        </p:spPr>
-        <p:txBody>
-          <a:bodyPr wrap="square" lIns="0" tIns="0" rIns="0" bIns="0" rtlCol="0" anchor="ctr"/>
-          <a:lstStyle/>
-          <a:p>
-            <a:pPr indent="0" marL="0">
-              <a:lnSpc>
-                <a:spcPct val="120000"/>
-              </a:lnSpc>
-              <a:buNone/>
-            </a:pPr>
-            <a:r>
-              <a:rPr lang="en-US" sz="1400" dirty="0">
-                <a:solidFill>
-                  <a:srgbClr val="718096"/>
-                </a:solidFill>
-                <a:latin typeface="Pretendard" pitchFamily="34" charset="0"/>
-                <a:ea typeface="Pretendard" pitchFamily="34" charset="-122"/>
-                <a:cs typeface="Pretendard" pitchFamily="34" charset="-120"/>
-              </a:rPr>
-              <a:t>- 순수익(매월)</a:t>
-            </a:r>
-            <a:endParaRPr lang="en-US" sz="1400" dirty="0"/>
-          </a:p>
-        </p:txBody>
-      </p:sp>
-      <p:sp>
-        <p:nvSpPr>
-          <p:cNvPr id="10" name="Text 8"/>
-          <p:cNvSpPr/>
-          <p:nvPr/>
-        </p:nvSpPr>
-        <p:spPr>
-          <a:xfrm>
-            <a:off x="4768907" y="2048256"/>
-            <a:ext cx="6855860" cy="402336"/>
-          </a:xfrm>
-          <a:prstGeom prst="rect">
-            <a:avLst/>
-          </a:prstGeom>
-          <a:noFill/>
-          <a:ln/>
-        </p:spPr>
-        <p:txBody>
-          <a:bodyPr wrap="square" lIns="0" tIns="0" rIns="0" bIns="0" rtlCol="0" anchor="ctr"/>
-          <a:lstStyle/>
-          <a:p>
-            <a:pPr indent="0" marL="0">
-              <a:lnSpc>
-                <a:spcPct val="120000"/>
-              </a:lnSpc>
-              <a:buNone/>
-            </a:pPr>
-            <a:r>
-              <a:rPr lang="en-US" sz="1400" b="1" dirty="0">
-                <a:solidFill>
-                  <a:srgbClr val="10161F"/>
-                </a:solidFill>
-                <a:latin typeface="Pretendard" pitchFamily="34" charset="0"/>
-                <a:ea typeface="Pretendard" pitchFamily="34" charset="-122"/>
-                <a:cs typeface="Pretendard" pitchFamily="34" charset="-120"/>
-              </a:rPr>
-              <a:t>약 3,650만 원</a:t>
-            </a:r>
-            <a:endParaRPr lang="en-US" sz="1400" dirty="0"/>
-          </a:p>
-        </p:txBody>
-      </p:sp>
-      <p:sp>
-        <p:nvSpPr>
-          <p:cNvPr id="11" name="Shape 9"/>
-          <p:cNvSpPr/>
-          <p:nvPr/>
-        </p:nvSpPr>
-        <p:spPr>
-          <a:xfrm>
-            <a:off x="566928" y="2450592"/>
-            <a:ext cx="11057839" cy="0"/>
-          </a:xfrm>
-          <a:prstGeom prst="line">
-            <a:avLst/>
-          </a:prstGeom>
-          <a:noFill/>
-          <a:ln w="3810">
-            <a:solidFill>
-              <a:srgbClr val="CBD5E0"/>
-            </a:solidFill>
-            <a:prstDash val="solid"/>
-          </a:ln>
-        </p:spPr>
-      </p:sp>
-      <p:sp>
-        <p:nvSpPr>
-          <p:cNvPr id="12" name="Text 10"/>
-          <p:cNvSpPr/>
-          <p:nvPr/>
-        </p:nvSpPr>
-        <p:spPr>
-          <a:xfrm>
-            <a:off x="566928" y="2450592"/>
-            <a:ext cx="4201979" cy="402336"/>
-          </a:xfrm>
-          <a:prstGeom prst="rect">
-            <a:avLst/>
-          </a:prstGeom>
-          <a:noFill/>
-          <a:ln/>
-        </p:spPr>
-        <p:txBody>
-          <a:bodyPr wrap="square" lIns="0" tIns="0" rIns="0" bIns="0" rtlCol="0" anchor="ctr"/>
-          <a:lstStyle/>
-          <a:p>
-            <a:pPr indent="0" marL="0">
-              <a:lnSpc>
-                <a:spcPct val="120000"/>
-              </a:lnSpc>
-              <a:buNone/>
-            </a:pPr>
-            <a:r>
-              <a:rPr lang="en-US" sz="1400" dirty="0">
-                <a:solidFill>
-                  <a:srgbClr val="718096"/>
-                </a:solidFill>
-                <a:latin typeface="Pretendard" pitchFamily="34" charset="0"/>
-                <a:ea typeface="Pretendard" pitchFamily="34" charset="-122"/>
-                <a:cs typeface="Pretendard" pitchFamily="34" charset="-120"/>
-              </a:rPr>
-              <a:t>- 레버리지 수익률</a:t>
-            </a:r>
-            <a:endParaRPr lang="en-US" sz="1400" dirty="0"/>
-          </a:p>
-        </p:txBody>
-      </p:sp>
-      <p:sp>
-        <p:nvSpPr>
-          <p:cNvPr id="13" name="Text 11"/>
-          <p:cNvSpPr/>
-          <p:nvPr/>
-        </p:nvSpPr>
-        <p:spPr>
-          <a:xfrm>
-            <a:off x="4768907" y="2450592"/>
-            <a:ext cx="6855860" cy="402336"/>
-          </a:xfrm>
-          <a:prstGeom prst="rect">
-            <a:avLst/>
-          </a:prstGeom>
-          <a:noFill/>
-          <a:ln/>
-        </p:spPr>
-        <p:txBody>
-          <a:bodyPr wrap="square" lIns="0" tIns="0" rIns="0" bIns="0" rtlCol="0" anchor="ctr"/>
-          <a:lstStyle/>
-          <a:p>
-            <a:pPr indent="0" marL="0">
-              <a:lnSpc>
-                <a:spcPct val="120000"/>
-              </a:lnSpc>
-              <a:buNone/>
-            </a:pPr>
-            <a:r>
-              <a:rPr lang="en-US" sz="1400" b="1" dirty="0">
-                <a:solidFill>
-                  <a:srgbClr val="10161F"/>
-                </a:solidFill>
-                <a:latin typeface="Pretendard" pitchFamily="34" charset="0"/>
-                <a:ea typeface="Pretendard" pitchFamily="34" charset="-122"/>
-                <a:cs typeface="Pretendard" pitchFamily="34" charset="-120"/>
-              </a:rPr>
-              <a:t>약 5.8%</a:t>
-            </a:r>
-            <a:endParaRPr lang="en-US" sz="1400" dirty="0"/>
-          </a:p>
-        </p:txBody>
-      </p:sp>
-      <p:sp>
-        <p:nvSpPr>
-          <p:cNvPr id="14" name="Text 12"/>
-          <p:cNvSpPr/>
-          <p:nvPr/>
-        </p:nvSpPr>
-        <p:spPr>
-          <a:xfrm>
-            <a:off x="566928" y="6382512"/>
-            <a:ext cx="7315200" cy="219456"/>
-          </a:xfrm>
-          <a:prstGeom prst="rect">
-            <a:avLst/>
-          </a:prstGeom>
-          <a:noFill/>
-          <a:ln/>
-        </p:spPr>
-        <p:txBody>
-          <a:bodyPr wrap="square" lIns="0" tIns="0" rIns="0" bIns="0" rtlCol="0" anchor="ctr"/>
-          <a:lstStyle/>
-          <a:p>
-            <a:pPr indent="0" marL="0">
-              <a:buNone/>
-            </a:pPr>
-            <a:r>
-              <a:rPr lang="en-US" sz="800" dirty="0">
-                <a:solidFill>
-                  <a:srgbClr val="718096"/>
-                </a:solidFill>
-                <a:latin typeface="Pretendard" pitchFamily="34" charset="0"/>
-                <a:ea typeface="Pretendard" pitchFamily="34" charset="-122"/>
-                <a:cs typeface="Pretendard" pitchFamily="34" charset="-120"/>
-              </a:rPr>
-              <a:t>크리딜   |   </a:t>
-            </a:r>
-            <a:endParaRPr lang="en-US" sz="800" dirty="0"/>
-          </a:p>
-        </p:txBody>
-      </p:sp>
-      <p:sp>
-        <p:nvSpPr>
-          <p:cNvPr id="15" name="Text 13"/>
-          <p:cNvSpPr/>
-          <p:nvPr/>
-        </p:nvSpPr>
-        <p:spPr>
-          <a:xfrm>
-            <a:off x="10710367" y="6382512"/>
-            <a:ext cx="914400" cy="219456"/>
-          </a:xfrm>
-          <a:prstGeom prst="rect">
-            <a:avLst/>
-          </a:prstGeom>
-          <a:noFill/>
-          <a:ln/>
-        </p:spPr>
-        <p:txBody>
-          <a:bodyPr wrap="square" lIns="0" tIns="0" rIns="0" bIns="0" rtlCol="0" anchor="ctr"/>
-          <a:lstStyle/>
-          <a:p>
-            <a:pPr algn="r" indent="0" marL="0">
-              <a:buNone/>
-            </a:pPr>
-            <a:r>
-              <a:rPr lang="en-US" sz="900" b="1" dirty="0">
-                <a:solidFill>
-                  <a:srgbClr val="B98A2E"/>
-                </a:solidFill>
-                <a:latin typeface="Arial" pitchFamily="34" charset="0"/>
-                <a:ea typeface="Arial" pitchFamily="34" charset="-122"/>
-                <a:cs typeface="Arial" pitchFamily="34" charset="-120"/>
-              </a:rPr>
-              <a:t>6</a:t>
-            </a:r>
-            <a:endParaRPr lang="en-US" sz="900" dirty="0"/>
-          </a:p>
-        </p:txBody>
-      </p:sp>
-    </p:spTree>
-  </p:cSld>
-  <p:clrMapOvr>
-    <a:masterClrMapping/>
-  </p:clrMapOvr>
-</p:sld>
-</file>
-
-<file path=ppt/slides/slide8.xml><?xml version="1.0" encoding="utf-8"?>
-<p:sld xmlns:a="http://schemas.openxmlformats.org/drawingml/2006/main" xmlns:r="http://schemas.openxmlformats.org/officeDocument/2006/relationships" xmlns:p="http://schemas.openxmlformats.org/presentationml/2006/main">
-  <p:cSld name="Slide 8">
-    <p:bg>
-      <p:bgPr>
-        <a:solidFill>
-          <a:srgbClr val="FFFFFF"/>
-        </a:solidFill>
-      </p:bgPr>
-    </p:bg>
-    <p:spTree>
-      <p:nvGrpSpPr>
-        <p:cNvPr id="1" name=""/>
-        <p:cNvGrpSpPr/>
-        <p:nvPr/>
-      </p:nvGrpSpPr>
-      <p:grpSpPr>
-        <a:xfrm>
-          <a:off x="0" y="0"/>
-          <a:ext cx="0" cy="0"/>
-          <a:chOff x="0" y="0"/>
-          <a:chExt cx="0" cy="0"/>
-        </a:xfrm>
-      </p:grpSpPr>
-      <p:sp>
-        <p:nvSpPr>
-          <p:cNvPr id="2" name="Shape 0"/>
-          <p:cNvSpPr/>
-          <p:nvPr/>
-        </p:nvSpPr>
-        <p:spPr>
-          <a:xfrm>
-            <a:off x="566928" y="457200"/>
-            <a:ext cx="384048" cy="384048"/>
-          </a:xfrm>
-          <a:prstGeom prst="ellipse">
-            <a:avLst/>
-          </a:prstGeom>
-          <a:solidFill>
-            <a:srgbClr val="B98A2E"/>
-          </a:solidFill>
-          <a:ln/>
-        </p:spPr>
-      </p:sp>
-      <p:sp>
-        <p:nvSpPr>
-          <p:cNvPr id="3" name="Text 1"/>
-          <p:cNvSpPr/>
-          <p:nvPr/>
-        </p:nvSpPr>
-        <p:spPr>
-          <a:xfrm>
-            <a:off x="566928" y="457200"/>
-            <a:ext cx="384048" cy="384048"/>
-          </a:xfrm>
-          <a:prstGeom prst="rect">
-            <a:avLst/>
-          </a:prstGeom>
-          <a:noFill/>
-          <a:ln/>
-        </p:spPr>
-        <p:txBody>
-          <a:bodyPr wrap="square" lIns="0" tIns="0" rIns="0" bIns="0" rtlCol="0" anchor="ctr"/>
-          <a:lstStyle/>
-          <a:p>
-            <a:pPr algn="ctr" indent="0" marL="0">
-              <a:buNone/>
-            </a:pPr>
-            <a:r>
-              <a:rPr lang="en-US" sz="1300" b="1" dirty="0">
-                <a:solidFill>
-                  <a:srgbClr val="FFFFFF"/>
-                </a:solidFill>
-                <a:latin typeface="Arial" pitchFamily="34" charset="0"/>
-                <a:ea typeface="Arial" pitchFamily="34" charset="-122"/>
-                <a:cs typeface="Arial" pitchFamily="34" charset="-120"/>
-              </a:rPr>
-              <a:t>07</a:t>
-            </a:r>
-            <a:endParaRPr lang="en-US" sz="1300" dirty="0"/>
-          </a:p>
-        </p:txBody>
-      </p:sp>
-      <p:sp>
-        <p:nvSpPr>
-          <p:cNvPr id="4" name="Text 2"/>
-          <p:cNvSpPr/>
-          <p:nvPr/>
-        </p:nvSpPr>
-        <p:spPr>
-          <a:xfrm>
-            <a:off x="1133856" y="457200"/>
-            <a:ext cx="10490911" cy="182880"/>
-          </a:xfrm>
-          <a:prstGeom prst="rect">
-            <a:avLst/>
-          </a:prstGeom>
-          <a:noFill/>
-          <a:ln/>
-        </p:spPr>
-        <p:txBody>
-          <a:bodyPr wrap="square" lIns="0" tIns="0" rIns="0" bIns="0" rtlCol="0" anchor="ctr"/>
-          <a:lstStyle/>
-          <a:p>
-            <a:pPr indent="0" marL="0">
-              <a:buNone/>
-            </a:pPr>
-            <a:r>
-              <a:rPr lang="en-US" sz="950" b="1" spc="200" kern="0" dirty="0">
-                <a:solidFill>
-                  <a:srgbClr val="B98A2E"/>
-                </a:solidFill>
-                <a:latin typeface="Arial" pitchFamily="34" charset="0"/>
-                <a:ea typeface="Arial" pitchFamily="34" charset="-122"/>
-                <a:cs typeface="Arial" pitchFamily="34" charset="-120"/>
-              </a:rPr>
-              <a:t>Capital</a:t>
-            </a:r>
-            <a:endParaRPr lang="en-US" sz="950" dirty="0"/>
-          </a:p>
-        </p:txBody>
-      </p:sp>
-      <p:sp>
-        <p:nvSpPr>
-          <p:cNvPr id="5" name="Text 3"/>
-          <p:cNvSpPr/>
-          <p:nvPr/>
-        </p:nvSpPr>
-        <p:spPr>
-          <a:xfrm>
-            <a:off x="1133856" y="640080"/>
-            <a:ext cx="10490911" cy="365760"/>
-          </a:xfrm>
-          <a:prstGeom prst="rect">
-            <a:avLst/>
-          </a:prstGeom>
-          <a:noFill/>
-          <a:ln/>
-        </p:spPr>
-        <p:txBody>
-          <a:bodyPr wrap="square" lIns="0" tIns="0" rIns="0" bIns="0" rtlCol="0" anchor="ctr"/>
-          <a:lstStyle/>
-          <a:p>
-            <a:pPr indent="0" marL="0">
-              <a:buNone/>
-            </a:pPr>
-            <a:r>
-              <a:rPr lang="en-US" sz="2300" b="1" dirty="0">
-                <a:solidFill>
-                  <a:srgbClr val="10161F"/>
-                </a:solidFill>
-                <a:latin typeface="Pretendard" pitchFamily="34" charset="0"/>
-                <a:ea typeface="Pretendard" pitchFamily="34" charset="-122"/>
-                <a:cs typeface="Pretendard" pitchFamily="34" charset="-120"/>
-              </a:rPr>
-              <a:t>투자 및 자본 조달 구조 분석</a:t>
+              <a:t>자본구조</a:t>
             </a:r>
             <a:endParaRPr lang="en-US" sz="2300" dirty="0"/>
           </a:p>
@@ -12674,7 +12626,7 @@
       </p:sp>
       <p:graphicFrame>
         <p:nvGraphicFramePr>
-          <p:cNvPr id="9" name="Table 0"/>
+          <p:cNvPr id="8" name="Table 0"/>
           <p:cNvGraphicFramePr>
             <a:graphicFrameLocks noGrp="1"/>
           </p:cNvGraphicFramePr>
@@ -14395,6 +14347,276 @@
 </p:sld>
 </file>
 
+<file path=ppt/slides/slide8.xml><?xml version="1.0" encoding="utf-8"?>
+<p:sld xmlns:a="http://schemas.openxmlformats.org/drawingml/2006/main" xmlns:r="http://schemas.openxmlformats.org/officeDocument/2006/relationships" xmlns:p="http://schemas.openxmlformats.org/presentationml/2006/main">
+  <p:cSld name="Slide 8">
+    <p:bg>
+      <p:bgPr>
+        <a:solidFill>
+          <a:srgbClr val="FFFFFF"/>
+        </a:solidFill>
+      </p:bgPr>
+    </p:bg>
+    <p:spTree>
+      <p:nvGrpSpPr>
+        <p:cNvPr id="1" name=""/>
+        <p:cNvGrpSpPr/>
+        <p:nvPr/>
+      </p:nvGrpSpPr>
+      <p:grpSpPr>
+        <a:xfrm>
+          <a:off x="0" y="0"/>
+          <a:ext cx="0" cy="0"/>
+          <a:chOff x="0" y="0"/>
+          <a:chExt cx="0" cy="0"/>
+        </a:xfrm>
+      </p:grpSpPr>
+      <p:sp>
+        <p:nvSpPr>
+          <p:cNvPr id="2" name="Shape 0"/>
+          <p:cNvSpPr/>
+          <p:nvPr/>
+        </p:nvSpPr>
+        <p:spPr>
+          <a:xfrm>
+            <a:off x="566928" y="457200"/>
+            <a:ext cx="384048" cy="384048"/>
+          </a:xfrm>
+          <a:prstGeom prst="ellipse">
+            <a:avLst/>
+          </a:prstGeom>
+          <a:solidFill>
+            <a:srgbClr val="B98A2E"/>
+          </a:solidFill>
+          <a:ln/>
+        </p:spPr>
+      </p:sp>
+      <p:sp>
+        <p:nvSpPr>
+          <p:cNvPr id="3" name="Text 1"/>
+          <p:cNvSpPr/>
+          <p:nvPr/>
+        </p:nvSpPr>
+        <p:spPr>
+          <a:xfrm>
+            <a:off x="566928" y="457200"/>
+            <a:ext cx="384048" cy="384048"/>
+          </a:xfrm>
+          <a:prstGeom prst="rect">
+            <a:avLst/>
+          </a:prstGeom>
+          <a:noFill/>
+          <a:ln/>
+        </p:spPr>
+        <p:txBody>
+          <a:bodyPr wrap="square" lIns="0" tIns="0" rIns="0" bIns="0" rtlCol="0" anchor="ctr"/>
+          <a:lstStyle/>
+          <a:p>
+            <a:pPr algn="ctr" indent="0" marL="0">
+              <a:buNone/>
+            </a:pPr>
+            <a:r>
+              <a:rPr lang="en-US" sz="1300" b="1" dirty="0">
+                <a:solidFill>
+                  <a:srgbClr val="FFFFFF"/>
+                </a:solidFill>
+                <a:latin typeface="Arial" pitchFamily="34" charset="0"/>
+                <a:ea typeface="Arial" pitchFamily="34" charset="-122"/>
+                <a:cs typeface="Arial" pitchFamily="34" charset="-120"/>
+              </a:rPr>
+              <a:t>08</a:t>
+            </a:r>
+            <a:endParaRPr lang="en-US" sz="1300" dirty="0"/>
+          </a:p>
+        </p:txBody>
+      </p:sp>
+      <p:sp>
+        <p:nvSpPr>
+          <p:cNvPr id="4" name="Text 2"/>
+          <p:cNvSpPr/>
+          <p:nvPr/>
+        </p:nvSpPr>
+        <p:spPr>
+          <a:xfrm>
+            <a:off x="1133856" y="457200"/>
+            <a:ext cx="10490911" cy="182880"/>
+          </a:xfrm>
+          <a:prstGeom prst="rect">
+            <a:avLst/>
+          </a:prstGeom>
+          <a:noFill/>
+          <a:ln/>
+        </p:spPr>
+        <p:txBody>
+          <a:bodyPr wrap="square" lIns="0" tIns="0" rIns="0" bIns="0" rtlCol="0" anchor="ctr"/>
+          <a:lstStyle/>
+          <a:p>
+            <a:pPr indent="0" marL="0">
+              <a:buNone/>
+            </a:pPr>
+            <a:r>
+              <a:rPr lang="en-US" sz="950" b="1" spc="200" kern="0" dirty="0">
+                <a:solidFill>
+                  <a:srgbClr val="B98A2E"/>
+                </a:solidFill>
+                <a:latin typeface="Arial" pitchFamily="34" charset="0"/>
+                <a:ea typeface="Arial" pitchFamily="34" charset="-122"/>
+                <a:cs typeface="Arial" pitchFamily="34" charset="-120"/>
+              </a:rPr>
+              <a:t>DCF</a:t>
+            </a:r>
+            <a:endParaRPr lang="en-US" sz="950" dirty="0"/>
+          </a:p>
+        </p:txBody>
+      </p:sp>
+      <p:sp>
+        <p:nvSpPr>
+          <p:cNvPr id="5" name="Text 3"/>
+          <p:cNvSpPr/>
+          <p:nvPr/>
+        </p:nvSpPr>
+        <p:spPr>
+          <a:xfrm>
+            <a:off x="1133856" y="640080"/>
+            <a:ext cx="10490911" cy="365760"/>
+          </a:xfrm>
+          <a:prstGeom prst="rect">
+            <a:avLst/>
+          </a:prstGeom>
+          <a:noFill/>
+          <a:ln/>
+        </p:spPr>
+        <p:txBody>
+          <a:bodyPr wrap="square" lIns="0" tIns="0" rIns="0" bIns="0" rtlCol="0" anchor="ctr"/>
+          <a:lstStyle/>
+          <a:p>
+            <a:pPr indent="0" marL="0">
+              <a:buNone/>
+            </a:pPr>
+            <a:r>
+              <a:rPr lang="en-US" sz="2300" b="1" dirty="0">
+                <a:solidFill>
+                  <a:srgbClr val="10161F"/>
+                </a:solidFill>
+                <a:latin typeface="Pretendard" pitchFamily="34" charset="0"/>
+                <a:ea typeface="Pretendard" pitchFamily="34" charset="-122"/>
+                <a:cs typeface="Pretendard" pitchFamily="34" charset="-120"/>
+              </a:rPr>
+              <a:t>DCF 분석</a:t>
+            </a:r>
+            <a:endParaRPr lang="en-US" sz="2300" dirty="0"/>
+          </a:p>
+        </p:txBody>
+      </p:sp>
+      <p:sp>
+        <p:nvSpPr>
+          <p:cNvPr id="6" name="Shape 4"/>
+          <p:cNvSpPr/>
+          <p:nvPr/>
+        </p:nvSpPr>
+        <p:spPr>
+          <a:xfrm>
+            <a:off x="566928" y="1325880"/>
+            <a:ext cx="11057839" cy="0"/>
+          </a:xfrm>
+          <a:prstGeom prst="line">
+            <a:avLst/>
+          </a:prstGeom>
+          <a:noFill/>
+          <a:ln w="19050">
+            <a:solidFill>
+              <a:srgbClr val="B98A2E"/>
+            </a:solidFill>
+            <a:prstDash val="solid"/>
+          </a:ln>
+        </p:spPr>
+      </p:sp>
+      <p:sp>
+        <p:nvSpPr>
+          <p:cNvPr id="7" name="Text 5"/>
+          <p:cNvSpPr/>
+          <p:nvPr/>
+        </p:nvSpPr>
+        <p:spPr>
+          <a:xfrm>
+            <a:off x="566928" y="6382512"/>
+            <a:ext cx="7315200" cy="219456"/>
+          </a:xfrm>
+          <a:prstGeom prst="rect">
+            <a:avLst/>
+          </a:prstGeom>
+          <a:noFill/>
+          <a:ln/>
+        </p:spPr>
+        <p:txBody>
+          <a:bodyPr wrap="square" lIns="0" tIns="0" rIns="0" bIns="0" rtlCol="0" anchor="ctr"/>
+          <a:lstStyle/>
+          <a:p>
+            <a:pPr indent="0" marL="0">
+              <a:buNone/>
+            </a:pPr>
+            <a:r>
+              <a:rPr lang="en-US" sz="800" dirty="0">
+                <a:solidFill>
+                  <a:srgbClr val="718096"/>
+                </a:solidFill>
+                <a:latin typeface="Pretendard" pitchFamily="34" charset="0"/>
+                <a:ea typeface="Pretendard" pitchFamily="34" charset="-122"/>
+                <a:cs typeface="Pretendard" pitchFamily="34" charset="-120"/>
+              </a:rPr>
+              <a:t>크리딜   |   </a:t>
+            </a:r>
+            <a:endParaRPr lang="en-US" sz="800" dirty="0"/>
+          </a:p>
+        </p:txBody>
+      </p:sp>
+      <p:sp>
+        <p:nvSpPr>
+          <p:cNvPr id="8" name="Text 6"/>
+          <p:cNvSpPr/>
+          <p:nvPr/>
+        </p:nvSpPr>
+        <p:spPr>
+          <a:xfrm>
+            <a:off x="10710367" y="6382512"/>
+            <a:ext cx="914400" cy="219456"/>
+          </a:xfrm>
+          <a:prstGeom prst="rect">
+            <a:avLst/>
+          </a:prstGeom>
+          <a:noFill/>
+          <a:ln/>
+        </p:spPr>
+        <p:txBody>
+          <a:bodyPr wrap="square" lIns="0" tIns="0" rIns="0" bIns="0" rtlCol="0" anchor="ctr"/>
+          <a:lstStyle/>
+          <a:p>
+            <a:pPr algn="r" indent="0" marL="0">
+              <a:buNone/>
+            </a:pPr>
+            <a:r>
+              <a:rPr lang="en-US" sz="900" b="1" dirty="0">
+                <a:solidFill>
+                  <a:srgbClr val="B98A2E"/>
+                </a:solidFill>
+                <a:latin typeface="Arial" pitchFamily="34" charset="0"/>
+                <a:ea typeface="Arial" pitchFamily="34" charset="-122"/>
+                <a:cs typeface="Arial" pitchFamily="34" charset="-120"/>
+              </a:rPr>
+              <a:t>8</a:t>
+            </a:r>
+            <a:endParaRPr lang="en-US" sz="900" dirty="0"/>
+          </a:p>
+        </p:txBody>
+      </p:sp>
+    </p:spTree>
+  </p:cSld>
+  <p:clrMapOvr>
+    <a:masterClrMapping/>
+  </p:clrMapOvr>
+</p:sld>
+</file>
+
 <file path=ppt/slides/slide9.xml><?xml version="1.0" encoding="utf-8"?>
 <p:sld xmlns:a="http://schemas.openxmlformats.org/drawingml/2006/main" xmlns:r="http://schemas.openxmlformats.org/officeDocument/2006/relationships" xmlns:p="http://schemas.openxmlformats.org/presentationml/2006/main">
   <p:cSld name="Slide 9">
@@ -14472,7 +14694,7 @@
                 <a:ea typeface="Arial" pitchFamily="34" charset="-122"/>
                 <a:cs typeface="Arial" pitchFamily="34" charset="-120"/>
               </a:rPr>
-              <a:t>08</a:t>
+              <a:t>09</a:t>
             </a:r>
             <a:endParaRPr lang="en-US" sz="1300" dirty="0"/>
           </a:p>
@@ -14511,7 +14733,7 @@
                 <a:ea typeface="Arial" pitchFamily="34" charset="-122"/>
                 <a:cs typeface="Arial" pitchFamily="34" charset="-120"/>
               </a:rPr>
-              <a:t>DCF</a:t>
+              <a:t>Sensitivity</a:t>
             </a:r>
             <a:endParaRPr lang="en-US" sz="950" dirty="0"/>
           </a:p>
@@ -14550,7 +14772,7 @@
                 <a:ea typeface="Pretendard" pitchFamily="34" charset="-122"/>
                 <a:cs typeface="Pretendard" pitchFamily="34" charset="-120"/>
               </a:rPr>
-              <a:t>DCF 분석</a:t>
+              <a:t>수익률 민감도</a:t>
             </a:r>
             <a:endParaRPr lang="en-US" sz="2300" dirty="0"/>
           </a:p>
@@ -14558,13 +14780,52 @@
       </p:sp>
       <p:sp>
         <p:nvSpPr>
-          <p:cNvPr id="6" name="Shape 4"/>
+          <p:cNvPr id="6" name="Text 4"/>
           <p:cNvSpPr/>
           <p:nvPr/>
         </p:nvSpPr>
         <p:spPr>
           <a:xfrm>
             <a:off x="566928" y="1325880"/>
+            <a:ext cx="11057839" cy="237744"/>
+          </a:xfrm>
+          <a:prstGeom prst="rect">
+            <a:avLst/>
+          </a:prstGeom>
+          <a:noFill/>
+          <a:ln/>
+        </p:spPr>
+        <p:txBody>
+          <a:bodyPr wrap="square" lIns="0" tIns="0" rIns="0" bIns="0" rtlCol="0" anchor="ctr"/>
+          <a:lstStyle/>
+          <a:p>
+            <a:pPr indent="0" marL="0">
+              <a:buNone/>
+            </a:pPr>
+            <a:r>
+              <a:rPr lang="en-US" sz="1100" b="1" dirty="0">
+                <a:solidFill>
+                  <a:srgbClr val="10161F"/>
+                </a:solidFill>
+                <a:latin typeface="Pretendard" pitchFamily="34" charset="0"/>
+                <a:ea typeface="Pretendard" pitchFamily="34" charset="-122"/>
+                <a:cs typeface="Pretendard" pitchFamily="34" charset="-120"/>
+              </a:rPr>
+              <a:t>수익률 민감도 분석</a:t>
+            </a:r>
+            <a:endParaRPr lang="en-US" sz="1100" dirty="0"/>
+          </a:p>
+        </p:txBody>
+      </p:sp>
+      <p:sp>
+        <p:nvSpPr>
+          <p:cNvPr id="7" name="Shape 5"/>
+          <p:cNvSpPr/>
+          <p:nvPr/>
+        </p:nvSpPr>
+        <p:spPr>
+          <a:xfrm>
+            <a:off x="566928" y="1737360"/>
             <a:ext cx="11057839" cy="0"/>
           </a:xfrm>
           <a:prstGeom prst="line">
@@ -14581,14 +14842,56 @@
       </p:sp>
       <p:sp>
         <p:nvSpPr>
-          <p:cNvPr id="7" name="Text 5"/>
-          <p:cNvSpPr/>
-          <p:nvPr/>
-        </p:nvSpPr>
-        <p:spPr>
-          <a:xfrm>
-            <a:off x="566928" y="6382512"/>
-            <a:ext cx="7315200" cy="219456"/>
+          <p:cNvPr id="8" name="Shape 6"/>
+          <p:cNvSpPr/>
+          <p:nvPr/>
+        </p:nvSpPr>
+        <p:spPr>
+          <a:xfrm>
+            <a:off x="566928" y="2057400"/>
+            <a:ext cx="11057839" cy="1280160"/>
+          </a:xfrm>
+          <a:prstGeom prst="roundRect">
+            <a:avLst>
+              <a:gd name="adj" fmla="val 4286"/>
+            </a:avLst>
+          </a:prstGeom>
+          <a:solidFill>
+            <a:srgbClr val="BEE3F8"/>
+          </a:solidFill>
+          <a:ln/>
+        </p:spPr>
+      </p:sp>
+      <p:sp>
+        <p:nvSpPr>
+          <p:cNvPr id="9" name="Shape 7"/>
+          <p:cNvSpPr/>
+          <p:nvPr/>
+        </p:nvSpPr>
+        <p:spPr>
+          <a:xfrm>
+            <a:off x="566928" y="2112264"/>
+            <a:ext cx="36576" cy="1170432"/>
+          </a:xfrm>
+          <a:prstGeom prst="rect">
+            <a:avLst/>
+          </a:prstGeom>
+          <a:solidFill>
+            <a:srgbClr val="2B6CB0"/>
+          </a:solidFill>
+          <a:ln/>
+        </p:spPr>
+      </p:sp>
+      <p:sp>
+        <p:nvSpPr>
+          <p:cNvPr id="10" name="Text 8"/>
+          <p:cNvSpPr/>
+          <p:nvPr/>
+        </p:nvSpPr>
+        <p:spPr>
+          <a:xfrm>
+            <a:off x="749808" y="2167128"/>
+            <a:ext cx="10728655" cy="201168"/>
           </a:xfrm>
           <a:prstGeom prst="rect">
             <a:avLst/>
@@ -14604,14 +14907,95 @@
               <a:buNone/>
             </a:pPr>
             <a:r>
-              <a:rPr lang="en-US" sz="800" dirty="0">
-                <a:solidFill>
-                  <a:srgbClr val="718096"/>
+              <a:rPr lang="en-US" sz="1050" b="1" dirty="0">
+                <a:solidFill>
+                  <a:srgbClr val="2B6CB0"/>
                 </a:solidFill>
                 <a:latin typeface="Pretendard" pitchFamily="34" charset="0"/>
                 <a:ea typeface="Pretendard" pitchFamily="34" charset="-122"/>
                 <a:cs typeface="Pretendard" pitchFamily="34" charset="-120"/>
               </a:rPr>
+              <a:t>주의</a:t>
+            </a:r>
+            <a:endParaRPr lang="en-US" sz="1050" dirty="0"/>
+          </a:p>
+        </p:txBody>
+      </p:sp>
+      <p:sp>
+        <p:nvSpPr>
+          <p:cNvPr id="11" name="Text 9"/>
+          <p:cNvSpPr/>
+          <p:nvPr/>
+        </p:nvSpPr>
+        <p:spPr>
+          <a:xfrm>
+            <a:off x="749808" y="2386584"/>
+            <a:ext cx="10728655" cy="877824"/>
+          </a:xfrm>
+          <a:prstGeom prst="rect">
+            <a:avLst/>
+          </a:prstGeom>
+          <a:noFill/>
+          <a:ln/>
+        </p:spPr>
+        <p:txBody>
+          <a:bodyPr wrap="square" lIns="0" tIns="0" rIns="0" bIns="0" rtlCol="0" anchor="t"/>
+          <a:lstStyle/>
+          <a:p>
+            <a:pPr indent="0" marL="0">
+              <a:lnSpc>
+                <a:spcPct val="120000"/>
+              </a:lnSpc>
+              <a:buNone/>
+            </a:pPr>
+            <a:r>
+              <a:rPr lang="en-US" sz="930" dirty="0">
+                <a:solidFill>
+                  <a:srgbClr val="10161F"/>
+                </a:solidFill>
+                <a:latin typeface="Pretendard" pitchFamily="34" charset="0"/>
+                <a:ea typeface="Pretendard" pitchFamily="34" charset="-122"/>
+                <a:cs typeface="Pretendard" pitchFamily="34" charset="-120"/>
+              </a:rPr>
+              <a:t>실제 민감도는 Pro IM 상세 정보 입력 후 산출됩니다.</a:t>
+            </a:r>
+            <a:endParaRPr lang="en-US" sz="930" dirty="0"/>
+          </a:p>
+        </p:txBody>
+      </p:sp>
+      <p:sp>
+        <p:nvSpPr>
+          <p:cNvPr id="12" name="Text 10"/>
+          <p:cNvSpPr/>
+          <p:nvPr/>
+        </p:nvSpPr>
+        <p:spPr>
+          <a:xfrm>
+            <a:off x="566928" y="6382512"/>
+            <a:ext cx="7315200" cy="219456"/>
+          </a:xfrm>
+          <a:prstGeom prst="rect">
+            <a:avLst/>
+          </a:prstGeom>
+          <a:noFill/>
+          <a:ln/>
+        </p:spPr>
+        <p:txBody>
+          <a:bodyPr wrap="square" lIns="0" tIns="0" rIns="0" bIns="0" rtlCol="0" anchor="ctr"/>
+          <a:lstStyle/>
+          <a:p>
+            <a:pPr indent="0" marL="0">
+              <a:buNone/>
+            </a:pPr>
+            <a:r>
+              <a:rPr lang="en-US" sz="800" dirty="0">
+                <a:solidFill>
+                  <a:srgbClr val="718096"/>
+                </a:solidFill>
+                <a:latin typeface="Pretendard" pitchFamily="34" charset="0"/>
+                <a:ea typeface="Pretendard" pitchFamily="34" charset="-122"/>
+                <a:cs typeface="Pretendard" pitchFamily="34" charset="-120"/>
+              </a:rPr>
               <a:t>크리딜   |   </a:t>
             </a:r>
             <a:endParaRPr lang="en-US" sz="800" dirty="0"/>
@@ -14620,7 +15004,7 @@
       </p:sp>
       <p:sp>
         <p:nvSpPr>
-          <p:cNvPr id="8" name="Text 6"/>
+          <p:cNvPr id="13" name="Text 11"/>
           <p:cNvSpPr/>
           <p:nvPr/>
         </p:nvSpPr>
@@ -14651,7 +15035,7 @@
                 <a:ea typeface="Arial" pitchFamily="34" charset="-122"/>
                 <a:cs typeface="Arial" pitchFamily="34" charset="-120"/>
               </a:rPr>
-              <a:t>8</a:t>
+              <a:t>9</a:t>
             </a:r>
             <a:endParaRPr lang="en-US" sz="900" dirty="0"/>
           </a:p>

--- a/docs/test/stress/e2e-outputs/income_pro_pr02.pptx
+++ b/docs/test/stress/e2e-outputs/income_pro_pr02.pptx
@@ -19,9 +19,10 @@
     <p:sldId id="267" r:id="rId13"/>
     <p:sldId id="268" r:id="rId14"/>
     <p:sldId id="269" r:id="rId15"/>
+    <p:sldId id="270" r:id="rId16"/>
   </p:sldIdLst>
   <p:notesMasterIdLst>
-    <p:notesMasterId r:id="rId16"/>
+    <p:notesMasterId r:id="rId17"/>
   </p:notesMasterIdLst>
   <p:sldSz cx="12192000" cy="6858000"/>
   <p:notesSz cx="6858000" cy="12192000"/>
@@ -979,6 +980,94 @@
             <a:fld id="{F7021451-1387-4CA6-816F-3879F97B5CBC}" type="slidenum">
               <a:rPr lang="en-US"/>
               <a:t>14</a:t>
+            </a:fld>
+            <a:endParaRPr lang="en-US"/>
+          </a:p>
+        </p:txBody>
+      </p:sp>
+    </p:spTree>
+    <p:extLst>
+      <p:ext uri="{BB962C8B-B14F-4D97-AF65-F5344CB8AC3E}">
+        <p14:creationId xmlns:p14="http://schemas.microsoft.com/office/powerpoint/2010/main" val="1024086991"/>
+      </p:ext>
+    </p:extLst>
+  </p:cSld>
+  <p:clrMapOvr>
+    <a:masterClrMapping/>
+  </p:clrMapOvr>
+</p:notes>
+</file>
+
+<file path=ppt/notesSlides/notesSlide15.xml><?xml version="1.0" encoding="utf-8"?>
+<p:notes xmlns:a="http://schemas.openxmlformats.org/drawingml/2006/main" xmlns:r="http://schemas.openxmlformats.org/officeDocument/2006/relationships" xmlns:p="http://schemas.openxmlformats.org/presentationml/2006/main">
+  <p:cSld>
+    <p:spTree>
+      <p:nvGrpSpPr>
+        <p:cNvPr id="1" name=""/>
+        <p:cNvGrpSpPr/>
+        <p:nvPr/>
+      </p:nvGrpSpPr>
+      <p:grpSpPr>
+        <a:xfrm>
+          <a:off x="0" y="0"/>
+          <a:ext cx="0" cy="0"/>
+          <a:chOff x="0" y="0"/>
+          <a:chExt cx="0" cy="0"/>
+        </a:xfrm>
+      </p:grpSpPr>
+      <p:sp>
+        <p:nvSpPr>
+          <p:cNvPr id="2" name="Slide Image Placeholder 1"/>
+          <p:cNvSpPr>
+            <a:spLocks noGrp="1" noRot="1" noChangeAspect="1"/>
+          </p:cNvSpPr>
+          <p:nvPr>
+            <p:ph type="sldImg"/>
+          </p:nvPr>
+        </p:nvSpPr>
+        <p:spPr/>
+      </p:sp>
+      <p:sp>
+        <p:nvSpPr>
+          <p:cNvPr id="3" name="Notes Placeholder 2"/>
+          <p:cNvSpPr>
+            <a:spLocks noGrp="1"/>
+          </p:cNvSpPr>
+          <p:nvPr>
+            <p:ph type="body" idx="1"/>
+          </p:nvPr>
+        </p:nvSpPr>
+        <p:spPr/>
+        <p:txBody>
+          <a:bodyPr/>
+          <a:lstStyle/>
+          <a:p>
+            <a:r>
+              <a:rPr lang="en-US" dirty="0"/>
+              <a:t/>
+            </a:r>
+            <a:endParaRPr lang="en-US" dirty="0"/>
+          </a:p>
+        </p:txBody>
+      </p:sp>
+      <p:sp>
+        <p:nvSpPr>
+          <p:cNvPr id="4" name="Slide Number Placeholder 3"/>
+          <p:cNvSpPr>
+            <a:spLocks noGrp="1"/>
+          </p:cNvSpPr>
+          <p:nvPr>
+            <p:ph type="sldNum" sz="quarter" idx="10"/>
+          </p:nvPr>
+        </p:nvSpPr>
+        <p:spPr/>
+        <p:txBody>
+          <a:bodyPr/>
+          <a:lstStyle/>
+          <a:p>
+            <a:fld id="{F7021451-1387-4CA6-816F-3879F97B5CBC}" type="slidenum">
+              <a:rPr lang="en-US"/>
+              <a:t>15</a:t>
             </a:fld>
             <a:endParaRPr lang="en-US"/>
           </a:p>
@@ -2047,7 +2136,7 @@
             <a:avLst/>
           </a:prstGeom>
           <a:solidFill>
-            <a:srgbClr val="2A2118"/>
+            <a:srgbClr val="0D2233"/>
           </a:solidFill>
           <a:ln/>
         </p:spPr>
@@ -2067,7 +2156,7 @@
             <a:avLst/>
           </a:prstGeom>
           <a:solidFill>
-            <a:srgbClr val="3D2E1A"/>
+            <a:srgbClr val="1A3A4A"/>
           </a:solidFill>
           <a:ln/>
         </p:spPr>
@@ -2087,7 +2176,7 @@
             <a:avLst/>
           </a:prstGeom>
           <a:solidFill>
-            <a:srgbClr val="33271A"/>
+            <a:srgbClr val="132A3A"/>
           </a:solidFill>
           <a:ln/>
         </p:spPr>
@@ -2183,7 +2272,7 @@
         </p:nvSpPr>
         <p:spPr>
           <a:xfrm>
-            <a:off x="566928" y="475488"/>
+            <a:off x="502920" y="475488"/>
             <a:ext cx="2743200" cy="365760"/>
           </a:xfrm>
           <a:prstGeom prst="rect">
@@ -2236,7 +2325,7 @@
         </p:nvSpPr>
         <p:spPr>
           <a:xfrm>
-            <a:off x="566928" y="2029968"/>
+            <a:off x="502920" y="2029968"/>
             <a:ext cx="7315200" cy="274320"/>
           </a:xfrm>
           <a:prstGeom prst="rect">
@@ -2275,7 +2364,7 @@
         </p:nvSpPr>
         <p:spPr>
           <a:xfrm>
-            <a:off x="566928" y="2304288"/>
+            <a:off x="502920" y="2304288"/>
             <a:ext cx="7315200" cy="731520"/>
           </a:xfrm>
           <a:prstGeom prst="rect">
@@ -2314,7 +2403,7 @@
         </p:nvSpPr>
         <p:spPr>
           <a:xfrm>
-            <a:off x="566928" y="3090672"/>
+            <a:off x="502920" y="3090672"/>
             <a:ext cx="7315200" cy="365760"/>
           </a:xfrm>
           <a:prstGeom prst="rect">
@@ -2353,7 +2442,7 @@
         </p:nvSpPr>
         <p:spPr>
           <a:xfrm>
-            <a:off x="566928" y="3685032"/>
+            <a:off x="502920" y="3685032"/>
             <a:ext cx="1097280" cy="292608"/>
           </a:xfrm>
           <a:prstGeom prst="roundRect">
@@ -2375,7 +2464,7 @@
         </p:nvSpPr>
         <p:spPr>
           <a:xfrm>
-            <a:off x="566928" y="3685032"/>
+            <a:off x="502920" y="3685032"/>
             <a:ext cx="1097280" cy="292608"/>
           </a:xfrm>
           <a:prstGeom prst="rect">
@@ -2414,7 +2503,7 @@
         </p:nvSpPr>
         <p:spPr>
           <a:xfrm>
-            <a:off x="1755648" y="3685032"/>
+            <a:off x="1691640" y="3685032"/>
             <a:ext cx="1005840" cy="292608"/>
           </a:xfrm>
           <a:prstGeom prst="roundRect">
@@ -2436,7 +2525,7 @@
         </p:nvSpPr>
         <p:spPr>
           <a:xfrm>
-            <a:off x="1755648" y="3685032"/>
+            <a:off x="1691640" y="3685032"/>
             <a:ext cx="1005840" cy="292608"/>
           </a:xfrm>
           <a:prstGeom prst="rect">
@@ -2475,7 +2564,7 @@
         </p:nvSpPr>
         <p:spPr>
           <a:xfrm>
-            <a:off x="566928" y="4187952"/>
+            <a:off x="502920" y="4187952"/>
             <a:ext cx="6858000" cy="1051560"/>
           </a:xfrm>
           <a:prstGeom prst="roundRect">
@@ -2502,7 +2591,7 @@
         </p:nvSpPr>
         <p:spPr>
           <a:xfrm>
-            <a:off x="822960" y="4297680"/>
+            <a:off x="758952" y="4297680"/>
             <a:ext cx="6345936" cy="832104"/>
           </a:xfrm>
           <a:prstGeom prst="rect">
@@ -2541,7 +2630,7 @@
         </p:nvSpPr>
         <p:spPr>
           <a:xfrm>
-            <a:off x="566928" y="1700784"/>
+            <a:off x="502920" y="1700784"/>
             <a:ext cx="7315200" cy="256032"/>
           </a:xfrm>
           <a:prstGeom prst="rect">
@@ -2580,7 +2669,7 @@
         </p:nvSpPr>
         <p:spPr>
           <a:xfrm>
-            <a:off x="566928" y="6035040"/>
+            <a:off x="502920" y="6035040"/>
             <a:ext cx="11057839" cy="274320"/>
           </a:xfrm>
           <a:prstGeom prst="rect">
@@ -2619,7 +2708,7 @@
         </p:nvSpPr>
         <p:spPr>
           <a:xfrm>
-            <a:off x="566928" y="6382512"/>
+            <a:off x="502920" y="6382512"/>
             <a:ext cx="7315200" cy="219456"/>
           </a:xfrm>
           <a:prstGeom prst="rect">
@@ -2658,7 +2747,7 @@
         </p:nvSpPr>
         <p:spPr>
           <a:xfrm>
-            <a:off x="10710367" y="6382512"/>
+            <a:off x="10774375" y="6382512"/>
             <a:ext cx="914400" cy="219456"/>
           </a:xfrm>
           <a:prstGeom prst="rect">
@@ -2729,7 +2818,7 @@
         </p:nvSpPr>
         <p:spPr>
           <a:xfrm>
-            <a:off x="566928" y="457200"/>
+            <a:off x="502920" y="457200"/>
             <a:ext cx="384048" cy="384048"/>
           </a:xfrm>
           <a:prstGeom prst="ellipse">
@@ -2749,7 +2838,7 @@
         </p:nvSpPr>
         <p:spPr>
           <a:xfrm>
-            <a:off x="566928" y="457200"/>
+            <a:off x="502920" y="457200"/>
             <a:ext cx="384048" cy="384048"/>
           </a:xfrm>
           <a:prstGeom prst="rect">
@@ -2788,7 +2877,7 @@
         </p:nvSpPr>
         <p:spPr>
           <a:xfrm>
-            <a:off x="1133856" y="457200"/>
+            <a:off x="1069848" y="457200"/>
             <a:ext cx="10490911" cy="182880"/>
           </a:xfrm>
           <a:prstGeom prst="rect">
@@ -2813,7 +2902,7 @@
                 <a:ea typeface="Arial" pitchFamily="34" charset="-122"/>
                 <a:cs typeface="Arial" pitchFamily="34" charset="-120"/>
               </a:rPr>
-              <a:t>Thesis</a:t>
+              <a:t>Sensitivity</a:t>
             </a:r>
             <a:endParaRPr lang="en-US" sz="950" dirty="0"/>
           </a:p>
@@ -2827,7 +2916,7 @@
         </p:nvSpPr>
         <p:spPr>
           <a:xfrm>
-            <a:off x="1133856" y="640080"/>
+            <a:off x="1069848" y="640080"/>
             <a:ext cx="10490911" cy="365760"/>
           </a:xfrm>
           <a:prstGeom prst="rect">
@@ -2852,7 +2941,7 @@
                 <a:ea typeface="Pretendard" pitchFamily="34" charset="-122"/>
                 <a:cs typeface="Pretendard" pitchFamily="34" charset="-120"/>
               </a:rPr>
-              <a:t>투자 논거</a:t>
+              <a:t>수익률 민감도</a:t>
             </a:r>
             <a:endParaRPr lang="en-US" sz="2300" dirty="0"/>
           </a:p>
@@ -2860,26 +2949,61 @@
       </p:sp>
       <p:sp>
         <p:nvSpPr>
-          <p:cNvPr id="6" name="Shape 4"/>
-          <p:cNvSpPr/>
-          <p:nvPr/>
-        </p:nvSpPr>
-        <p:spPr>
-          <a:xfrm>
-            <a:off x="566928" y="4983480"/>
-            <a:ext cx="11057839" cy="804672"/>
-          </a:xfrm>
-          <a:prstGeom prst="roundRect">
-            <a:avLst>
-              <a:gd name="adj" fmla="val 6818"/>
-            </a:avLst>
-          </a:prstGeom>
-          <a:solidFill>
-            <a:srgbClr val="F3EBDA"/>
-          </a:solidFill>
-          <a:ln w="10160">
+          <p:cNvPr id="6" name="Text 4"/>
+          <p:cNvSpPr/>
+          <p:nvPr/>
+        </p:nvSpPr>
+        <p:spPr>
+          <a:xfrm>
+            <a:off x="502920" y="1325880"/>
+            <a:ext cx="11057839" cy="237744"/>
+          </a:xfrm>
+          <a:prstGeom prst="rect">
+            <a:avLst/>
+          </a:prstGeom>
+          <a:noFill/>
+          <a:ln/>
+        </p:spPr>
+        <p:txBody>
+          <a:bodyPr wrap="square" lIns="0" tIns="0" rIns="0" bIns="0" rtlCol="0" anchor="ctr"/>
+          <a:lstStyle/>
+          <a:p>
+            <a:pPr indent="0" marL="0">
+              <a:buNone/>
+            </a:pPr>
+            <a:r>
+              <a:rPr lang="en-US" sz="1100" b="1" dirty="0">
+                <a:solidFill>
+                  <a:srgbClr val="10161F"/>
+                </a:solidFill>
+                <a:latin typeface="Pretendard" pitchFamily="34" charset="0"/>
+                <a:ea typeface="Pretendard" pitchFamily="34" charset="-122"/>
+                <a:cs typeface="Pretendard" pitchFamily="34" charset="-120"/>
+              </a:rPr>
+              <a:t>수익률 민감도 분석</a:t>
+            </a:r>
+            <a:endParaRPr lang="en-US" sz="1100" dirty="0"/>
+          </a:p>
+        </p:txBody>
+      </p:sp>
+      <p:sp>
+        <p:nvSpPr>
+          <p:cNvPr id="7" name="Shape 5"/>
+          <p:cNvSpPr/>
+          <p:nvPr/>
+        </p:nvSpPr>
+        <p:spPr>
+          <a:xfrm>
+            <a:off x="502920" y="1737360"/>
+            <a:ext cx="11057839" cy="0"/>
+          </a:xfrm>
+          <a:prstGeom prst="line">
+            <a:avLst/>
+          </a:prstGeom>
+          <a:noFill/>
+          <a:ln w="19050">
             <a:solidFill>
-              <a:srgbClr val="D9B668"/>
+              <a:srgbClr val="B98A2E"/>
             </a:solidFill>
             <a:prstDash val="solid"/>
           </a:ln>
@@ -2887,14 +3011,56 @@
       </p:sp>
       <p:sp>
         <p:nvSpPr>
-          <p:cNvPr id="7" name="Text 5"/>
-          <p:cNvSpPr/>
-          <p:nvPr/>
-        </p:nvSpPr>
-        <p:spPr>
-          <a:xfrm>
-            <a:off x="749808" y="5093208"/>
-            <a:ext cx="1691640" cy="256032"/>
+          <p:cNvPr id="8" name="Shape 6"/>
+          <p:cNvSpPr/>
+          <p:nvPr/>
+        </p:nvSpPr>
+        <p:spPr>
+          <a:xfrm>
+            <a:off x="502920" y="2057400"/>
+            <a:ext cx="11057839" cy="1280160"/>
+          </a:xfrm>
+          <a:prstGeom prst="roundRect">
+            <a:avLst>
+              <a:gd name="adj" fmla="val 4286"/>
+            </a:avLst>
+          </a:prstGeom>
+          <a:solidFill>
+            <a:srgbClr val="BEE3F8"/>
+          </a:solidFill>
+          <a:ln/>
+        </p:spPr>
+      </p:sp>
+      <p:sp>
+        <p:nvSpPr>
+          <p:cNvPr id="9" name="Shape 7"/>
+          <p:cNvSpPr/>
+          <p:nvPr/>
+        </p:nvSpPr>
+        <p:spPr>
+          <a:xfrm>
+            <a:off x="502920" y="2112264"/>
+            <a:ext cx="36576" cy="1170432"/>
+          </a:xfrm>
+          <a:prstGeom prst="rect">
+            <a:avLst/>
+          </a:prstGeom>
+          <a:solidFill>
+            <a:srgbClr val="2B6CB0"/>
+          </a:solidFill>
+          <a:ln/>
+        </p:spPr>
+      </p:sp>
+      <p:sp>
+        <p:nvSpPr>
+          <p:cNvPr id="10" name="Text 8"/>
+          <p:cNvSpPr/>
+          <p:nvPr/>
+        </p:nvSpPr>
+        <p:spPr>
+          <a:xfrm>
+            <a:off x="649224" y="2148840"/>
+            <a:ext cx="10801807" cy="201168"/>
           </a:xfrm>
           <a:prstGeom prst="rect">
             <a:avLst/>
@@ -2912,13 +3078,13 @@
             <a:r>
               <a:rPr lang="en-US" sz="1050" b="1" dirty="0">
                 <a:solidFill>
-                  <a:srgbClr val="977024"/>
+                  <a:srgbClr val="2B6CB0"/>
                 </a:solidFill>
                 <a:latin typeface="Pretendard" pitchFamily="34" charset="0"/>
                 <a:ea typeface="Pretendard" pitchFamily="34" charset="-122"/>
                 <a:cs typeface="Pretendard" pitchFamily="34" charset="-120"/>
               </a:rPr>
-              <a:t>종합 가치 제안</a:t>
+              <a:t>주의</a:t>
             </a:r>
             <a:endParaRPr lang="en-US" sz="1050" dirty="0"/>
           </a:p>
@@ -2926,33 +3092,33 @@
       </p:sp>
       <p:sp>
         <p:nvSpPr>
-          <p:cNvPr id="8" name="Text 6"/>
-          <p:cNvSpPr/>
-          <p:nvPr/>
-        </p:nvSpPr>
-        <p:spPr>
-          <a:xfrm>
-            <a:off x="2487168" y="5056632"/>
-            <a:ext cx="8954719" cy="658368"/>
-          </a:xfrm>
-          <a:prstGeom prst="rect">
-            <a:avLst/>
-          </a:prstGeom>
-          <a:noFill/>
-          <a:ln/>
-        </p:spPr>
-        <p:txBody>
-          <a:bodyPr wrap="square" lIns="0" tIns="0" rIns="0" bIns="0" rtlCol="0" anchor="ctr"/>
+          <p:cNvPr id="11" name="Text 9"/>
+          <p:cNvSpPr/>
+          <p:nvPr/>
+        </p:nvSpPr>
+        <p:spPr>
+          <a:xfrm>
+            <a:off x="649224" y="2350008"/>
+            <a:ext cx="10801807" cy="950976"/>
+          </a:xfrm>
+          <a:prstGeom prst="rect">
+            <a:avLst/>
+          </a:prstGeom>
+          <a:noFill/>
+          <a:ln/>
+        </p:spPr>
+        <p:txBody>
+          <a:bodyPr wrap="square" lIns="0" tIns="0" rIns="0" bIns="0" rtlCol="0" anchor="t"/>
           <a:lstStyle/>
           <a:p>
             <a:pPr indent="0" marL="0">
               <a:lnSpc>
-                <a:spcPct val="125000"/>
+                <a:spcPct val="108000"/>
               </a:lnSpc>
               <a:buNone/>
             </a:pPr>
             <a:r>
-              <a:rPr lang="en-US" sz="1100" dirty="0">
+              <a:rPr lang="en-US" sz="980" dirty="0">
                 <a:solidFill>
                   <a:srgbClr val="10161F"/>
                 </a:solidFill>
@@ -2960,21 +3126,21 @@
                 <a:ea typeface="Pretendard" pitchFamily="34" charset="-122"/>
                 <a:cs typeface="Pretendard" pitchFamily="34" charset="-120"/>
               </a:rPr>
-              <a:t>관점에서 안정적 월 임대수익과 우량 메디컬 테넌트를 보유한 핵심 투자 자산입니다.</a:t>
-            </a:r>
-            <a:endParaRPr lang="en-US" sz="1100" dirty="0"/>
-          </a:p>
-        </p:txBody>
-      </p:sp>
-      <p:sp>
-        <p:nvSpPr>
-          <p:cNvPr id="9" name="Text 7"/>
-          <p:cNvSpPr/>
-          <p:nvPr/>
-        </p:nvSpPr>
-        <p:spPr>
-          <a:xfrm>
-            <a:off x="566928" y="6382512"/>
+              <a:t>실제 민감도는 Pro IM 상세 정보 입력 후 산출됩니다.</a:t>
+            </a:r>
+            <a:endParaRPr lang="en-US" sz="980" dirty="0"/>
+          </a:p>
+        </p:txBody>
+      </p:sp>
+      <p:sp>
+        <p:nvSpPr>
+          <p:cNvPr id="12" name="Text 10"/>
+          <p:cNvSpPr/>
+          <p:nvPr/>
+        </p:nvSpPr>
+        <p:spPr>
+          <a:xfrm>
+            <a:off x="502920" y="6382512"/>
             <a:ext cx="7315200" cy="219456"/>
           </a:xfrm>
           <a:prstGeom prst="rect">
@@ -3007,13 +3173,13 @@
       </p:sp>
       <p:sp>
         <p:nvSpPr>
-          <p:cNvPr id="10" name="Text 8"/>
-          <p:cNvSpPr/>
-          <p:nvPr/>
-        </p:nvSpPr>
-        <p:spPr>
-          <a:xfrm>
-            <a:off x="10710367" y="6382512"/>
+          <p:cNvPr id="13" name="Text 11"/>
+          <p:cNvSpPr/>
+          <p:nvPr/>
+        </p:nvSpPr>
+        <p:spPr>
+          <a:xfrm>
+            <a:off x="10774375" y="6382512"/>
             <a:ext cx="914400" cy="219456"/>
           </a:xfrm>
           <a:prstGeom prst="rect">
@@ -3084,7 +3250,7 @@
         </p:nvSpPr>
         <p:spPr>
           <a:xfrm>
-            <a:off x="566928" y="457200"/>
+            <a:off x="502920" y="457200"/>
             <a:ext cx="384048" cy="384048"/>
           </a:xfrm>
           <a:prstGeom prst="ellipse">
@@ -3104,7 +3270,7 @@
         </p:nvSpPr>
         <p:spPr>
           <a:xfrm>
-            <a:off x="566928" y="457200"/>
+            <a:off x="502920" y="457200"/>
             <a:ext cx="384048" cy="384048"/>
           </a:xfrm>
           <a:prstGeom prst="rect">
@@ -3143,7 +3309,7 @@
         </p:nvSpPr>
         <p:spPr>
           <a:xfrm>
-            <a:off x="1133856" y="457200"/>
+            <a:off x="1069848" y="457200"/>
             <a:ext cx="10490911" cy="182880"/>
           </a:xfrm>
           <a:prstGeom prst="rect">
@@ -3168,7 +3334,7 @@
                 <a:ea typeface="Arial" pitchFamily="34" charset="-122"/>
                 <a:cs typeface="Arial" pitchFamily="34" charset="-120"/>
               </a:rPr>
-              <a:t>Risk</a:t>
+              <a:t>Thesis</a:t>
             </a:r>
             <a:endParaRPr lang="en-US" sz="950" dirty="0"/>
           </a:p>
@@ -3182,7 +3348,7 @@
         </p:nvSpPr>
         <p:spPr>
           <a:xfrm>
-            <a:off x="1133856" y="640080"/>
+            <a:off x="1069848" y="640080"/>
             <a:ext cx="10490911" cy="365760"/>
           </a:xfrm>
           <a:prstGeom prst="rect">
@@ -3207,7 +3373,7 @@
                 <a:ea typeface="Pretendard" pitchFamily="34" charset="-122"/>
                 <a:cs typeface="Pretendard" pitchFamily="34" charset="-120"/>
               </a:rPr>
-              <a:t>리스크</a:t>
+              <a:t>투자 논거</a:t>
             </a:r>
             <a:endParaRPr lang="en-US" sz="2300" dirty="0"/>
           </a:p>
@@ -3221,20 +3387,20 @@
         </p:nvSpPr>
         <p:spPr>
           <a:xfrm>
-            <a:off x="566928" y="1417320"/>
-            <a:ext cx="5400904" cy="3657600"/>
+            <a:off x="502920" y="4937760"/>
+            <a:ext cx="11057839" cy="804672"/>
           </a:xfrm>
           <a:prstGeom prst="roundRect">
             <a:avLst>
-              <a:gd name="adj" fmla="val 1500"/>
+              <a:gd name="adj" fmla="val 6818"/>
             </a:avLst>
           </a:prstGeom>
           <a:solidFill>
-            <a:srgbClr val="F7FAFC"/>
+            <a:srgbClr val="F3EBDA"/>
           </a:solidFill>
-          <a:ln w="6350">
+          <a:ln w="10160">
             <a:solidFill>
-              <a:srgbClr val="CBD5E0"/>
+              <a:srgbClr val="D9B668"/>
             </a:solidFill>
             <a:prstDash val="solid"/>
           </a:ln>
@@ -3242,34 +3408,14 @@
       </p:sp>
       <p:sp>
         <p:nvSpPr>
-          <p:cNvPr id="7" name="Shape 5"/>
-          <p:cNvSpPr/>
-          <p:nvPr/>
-        </p:nvSpPr>
-        <p:spPr>
-          <a:xfrm>
-            <a:off x="566928" y="1417320"/>
-            <a:ext cx="5400904" cy="45720"/>
-          </a:xfrm>
-          <a:prstGeom prst="rect">
-            <a:avLst/>
-          </a:prstGeom>
-          <a:solidFill>
-            <a:srgbClr val="B98A2E"/>
-          </a:solidFill>
-          <a:ln/>
-        </p:spPr>
-      </p:sp>
-      <p:sp>
-        <p:nvSpPr>
-          <p:cNvPr id="8" name="Text 6"/>
-          <p:cNvSpPr/>
-          <p:nvPr/>
-        </p:nvSpPr>
-        <p:spPr>
-          <a:xfrm>
-            <a:off x="795528" y="1618488"/>
-            <a:ext cx="4943704" cy="292608"/>
+          <p:cNvPr id="7" name="Text 5"/>
+          <p:cNvSpPr/>
+          <p:nvPr/>
+        </p:nvSpPr>
+        <p:spPr>
+          <a:xfrm>
+            <a:off x="685800" y="5047488"/>
+            <a:ext cx="1691640" cy="256032"/>
           </a:xfrm>
           <a:prstGeom prst="rect">
             <a:avLst/>
@@ -3285,7 +3431,7 @@
               <a:buNone/>
             </a:pPr>
             <a:r>
-              <a:rPr lang="en-US" sz="1350" b="1" dirty="0">
+              <a:rPr lang="en-US" sz="1050" b="1" dirty="0">
                 <a:solidFill>
                   <a:srgbClr val="977024"/>
                 </a:solidFill>
@@ -3293,40 +3439,41 @@
                 <a:ea typeface="Pretendard" pitchFamily="34" charset="-122"/>
                 <a:cs typeface="Pretendard" pitchFamily="34" charset="-120"/>
               </a:rPr>
-              <a:t>메디컬 단일업종 집중</a:t>
-            </a:r>
-            <a:endParaRPr lang="en-US" sz="1350" dirty="0"/>
-          </a:p>
-        </p:txBody>
-      </p:sp>
-      <p:sp>
-        <p:nvSpPr>
-          <p:cNvPr id="9" name="Text 7"/>
-          <p:cNvSpPr/>
-          <p:nvPr/>
-        </p:nvSpPr>
-        <p:spPr>
-          <a:xfrm>
-            <a:off x="795528" y="1947672"/>
-            <a:ext cx="4943704" cy="365760"/>
-          </a:xfrm>
-          <a:prstGeom prst="rect">
-            <a:avLst/>
-          </a:prstGeom>
-          <a:noFill/>
-          <a:ln/>
-        </p:spPr>
-        <p:txBody>
-          <a:bodyPr wrap="square" lIns="0" tIns="0" rIns="0" bIns="0" rtlCol="0" anchor="ctr">
-            <a:normAutofit/>
-          </a:bodyPr>
+              <a:t>종합 가치 제안</a:t>
+            </a:r>
+            <a:endParaRPr lang="en-US" sz="1050" dirty="0"/>
+          </a:p>
+        </p:txBody>
+      </p:sp>
+      <p:sp>
+        <p:nvSpPr>
+          <p:cNvPr id="8" name="Text 6"/>
+          <p:cNvSpPr/>
+          <p:nvPr/>
+        </p:nvSpPr>
+        <p:spPr>
+          <a:xfrm>
+            <a:off x="2423160" y="5010912"/>
+            <a:ext cx="8954719" cy="658368"/>
+          </a:xfrm>
+          <a:prstGeom prst="rect">
+            <a:avLst/>
+          </a:prstGeom>
+          <a:noFill/>
+          <a:ln/>
+        </p:spPr>
+        <p:txBody>
+          <a:bodyPr wrap="square" lIns="0" tIns="0" rIns="0" bIns="0" rtlCol="0" anchor="ctr"/>
           <a:lstStyle/>
           <a:p>
             <a:pPr indent="0" marL="0">
-              <a:buNone/>
-            </a:pPr>
-            <a:r>
-              <a:rPr lang="en-US" sz="1250" b="1" dirty="0">
+              <a:lnSpc>
+                <a:spcPct val="125000"/>
+              </a:lnSpc>
+              <a:buNone/>
+            </a:pPr>
+            <a:r>
+              <a:rPr lang="en-US" sz="1100" dirty="0">
                 <a:solidFill>
                   <a:srgbClr val="10161F"/>
                 </a:solidFill>
@@ -3334,328 +3481,45 @@
                 <a:ea typeface="Pretendard" pitchFamily="34" charset="-122"/>
                 <a:cs typeface="Pretendard" pitchFamily="34" charset="-120"/>
               </a:rPr>
-              <a:t>전층 의료</a:t>
-            </a:r>
-            <a:endParaRPr lang="en-US" sz="1250" dirty="0"/>
-          </a:p>
-        </p:txBody>
-      </p:sp>
-      <p:sp>
-        <p:nvSpPr>
-          <p:cNvPr id="10" name="Text 8"/>
-          <p:cNvSpPr/>
-          <p:nvPr/>
-        </p:nvSpPr>
-        <p:spPr>
-          <a:xfrm>
-            <a:off x="795528" y="2377440"/>
-            <a:ext cx="4943704" cy="2606040"/>
-          </a:xfrm>
-          <a:prstGeom prst="rect">
-            <a:avLst/>
-          </a:prstGeom>
-          <a:noFill/>
-          <a:ln/>
-        </p:spPr>
-        <p:txBody>
-          <a:bodyPr wrap="square" lIns="0" tIns="0" rIns="0" bIns="0" rtlCol="0" anchor="t">
-            <a:normAutofit/>
-          </a:bodyPr>
-          <a:lstStyle/>
-          <a:p>
-            <a:pPr marL="342900" indent="-342900">
-              <a:lnSpc>
-                <a:spcPct val="125000"/>
-              </a:lnSpc>
-              <a:buSzPct val="100000"/>
-              <a:buChar char="•"/>
-            </a:pPr>
-            <a:r>
-              <a:rPr lang="en-US" sz="1100" dirty="0">
-                <a:solidFill>
-                  <a:srgbClr val="10161F"/>
+              <a:t>관점에서 안정적 월 임대수익과 우량 메디컬 테넌트를 보유한 핵심 투자 자산입니다.</a:t>
+            </a:r>
+            <a:endParaRPr lang="en-US" sz="1100" dirty="0"/>
+          </a:p>
+        </p:txBody>
+      </p:sp>
+      <p:sp>
+        <p:nvSpPr>
+          <p:cNvPr id="9" name="Text 7"/>
+          <p:cNvSpPr/>
+          <p:nvPr/>
+        </p:nvSpPr>
+        <p:spPr>
+          <a:xfrm>
+            <a:off x="502920" y="6382512"/>
+            <a:ext cx="7315200" cy="219456"/>
+          </a:xfrm>
+          <a:prstGeom prst="rect">
+            <a:avLst/>
+          </a:prstGeom>
+          <a:noFill/>
+          <a:ln/>
+        </p:spPr>
+        <p:txBody>
+          <a:bodyPr wrap="square" lIns="0" tIns="0" rIns="0" bIns="0" rtlCol="0" anchor="ctr"/>
+          <a:lstStyle/>
+          <a:p>
+            <a:pPr indent="0" marL="0">
+              <a:buNone/>
+            </a:pPr>
+            <a:r>
+              <a:rPr lang="en-US" sz="800" dirty="0">
+                <a:solidFill>
+                  <a:srgbClr val="718096"/>
                 </a:solidFill>
                 <a:latin typeface="Pretendard" pitchFamily="34" charset="0"/>
                 <a:ea typeface="Pretendard" pitchFamily="34" charset="-122"/>
                 <a:cs typeface="Pretendard" pitchFamily="34" charset="-120"/>
               </a:rPr>
-              <a:t>업종 다각화 검토</a:t>
-            </a:r>
-            <a:endParaRPr lang="en-US" sz="1100" dirty="0"/>
-          </a:p>
-        </p:txBody>
-      </p:sp>
-      <p:sp>
-        <p:nvSpPr>
-          <p:cNvPr id="11" name="Shape 9"/>
-          <p:cNvSpPr/>
-          <p:nvPr/>
-        </p:nvSpPr>
-        <p:spPr>
-          <a:xfrm>
-            <a:off x="6223864" y="1417320"/>
-            <a:ext cx="5400904" cy="3657600"/>
-          </a:xfrm>
-          <a:prstGeom prst="roundRect">
-            <a:avLst>
-              <a:gd name="adj" fmla="val 1500"/>
-            </a:avLst>
-          </a:prstGeom>
-          <a:solidFill>
-            <a:srgbClr val="F7FAFC"/>
-          </a:solidFill>
-          <a:ln w="6350">
-            <a:solidFill>
-              <a:srgbClr val="CBD5E0"/>
-            </a:solidFill>
-            <a:prstDash val="solid"/>
-          </a:ln>
-        </p:spPr>
-      </p:sp>
-      <p:sp>
-        <p:nvSpPr>
-          <p:cNvPr id="12" name="Shape 10"/>
-          <p:cNvSpPr/>
-          <p:nvPr/>
-        </p:nvSpPr>
-        <p:spPr>
-          <a:xfrm>
-            <a:off x="6223864" y="1417320"/>
-            <a:ext cx="5400904" cy="45720"/>
-          </a:xfrm>
-          <a:prstGeom prst="rect">
-            <a:avLst/>
-          </a:prstGeom>
-          <a:solidFill>
-            <a:srgbClr val="B98A2E"/>
-          </a:solidFill>
-          <a:ln/>
-        </p:spPr>
-      </p:sp>
-      <p:sp>
-        <p:nvSpPr>
-          <p:cNvPr id="13" name="Text 11"/>
-          <p:cNvSpPr/>
-          <p:nvPr/>
-        </p:nvSpPr>
-        <p:spPr>
-          <a:xfrm>
-            <a:off x="6452464" y="1618488"/>
-            <a:ext cx="4943704" cy="292608"/>
-          </a:xfrm>
-          <a:prstGeom prst="rect">
-            <a:avLst/>
-          </a:prstGeom>
-          <a:noFill/>
-          <a:ln/>
-        </p:spPr>
-        <p:txBody>
-          <a:bodyPr wrap="square" lIns="0" tIns="0" rIns="0" bIns="0" rtlCol="0" anchor="ctr"/>
-          <a:lstStyle/>
-          <a:p>
-            <a:pPr indent="0" marL="0">
-              <a:buNone/>
-            </a:pPr>
-            <a:r>
-              <a:rPr lang="en-US" sz="1350" b="1" dirty="0">
-                <a:solidFill>
-                  <a:srgbClr val="977024"/>
-                </a:solidFill>
-                <a:latin typeface="Pretendard" pitchFamily="34" charset="0"/>
-                <a:ea typeface="Pretendard" pitchFamily="34" charset="-122"/>
-                <a:cs typeface="Pretendard" pitchFamily="34" charset="-120"/>
-              </a:rPr>
-              <a:t>금리 변동</a:t>
-            </a:r>
-            <a:endParaRPr lang="en-US" sz="1350" dirty="0"/>
-          </a:p>
-        </p:txBody>
-      </p:sp>
-      <p:sp>
-        <p:nvSpPr>
-          <p:cNvPr id="14" name="Text 12"/>
-          <p:cNvSpPr/>
-          <p:nvPr/>
-        </p:nvSpPr>
-        <p:spPr>
-          <a:xfrm>
-            <a:off x="6452464" y="1947672"/>
-            <a:ext cx="4943704" cy="365760"/>
-          </a:xfrm>
-          <a:prstGeom prst="rect">
-            <a:avLst/>
-          </a:prstGeom>
-          <a:noFill/>
-          <a:ln/>
-        </p:spPr>
-        <p:txBody>
-          <a:bodyPr wrap="square" lIns="0" tIns="0" rIns="0" bIns="0" rtlCol="0" anchor="ctr">
-            <a:normAutofit/>
-          </a:bodyPr>
-          <a:lstStyle/>
-          <a:p>
-            <a:pPr indent="0" marL="0">
-              <a:buNone/>
-            </a:pPr>
-            <a:r>
-              <a:rPr lang="en-US" sz="1250" b="1" dirty="0">
-                <a:solidFill>
-                  <a:srgbClr val="10161F"/>
-                </a:solidFill>
-                <a:latin typeface="Pretendard" pitchFamily="34" charset="0"/>
-                <a:ea typeface="Pretendard" pitchFamily="34" charset="-122"/>
-                <a:cs typeface="Pretendard" pitchFamily="34" charset="-120"/>
-              </a:rPr>
-              <a:t>4.1% 고정</a:t>
-            </a:r>
-            <a:endParaRPr lang="en-US" sz="1250" dirty="0"/>
-          </a:p>
-        </p:txBody>
-      </p:sp>
-      <p:sp>
-        <p:nvSpPr>
-          <p:cNvPr id="15" name="Text 13"/>
-          <p:cNvSpPr/>
-          <p:nvPr/>
-        </p:nvSpPr>
-        <p:spPr>
-          <a:xfrm>
-            <a:off x="6452464" y="2377440"/>
-            <a:ext cx="4943704" cy="2606040"/>
-          </a:xfrm>
-          <a:prstGeom prst="rect">
-            <a:avLst/>
-          </a:prstGeom>
-          <a:noFill/>
-          <a:ln/>
-        </p:spPr>
-        <p:txBody>
-          <a:bodyPr wrap="square" lIns="0" tIns="0" rIns="0" bIns="0" rtlCol="0" anchor="t">
-            <a:normAutofit/>
-          </a:bodyPr>
-          <a:lstStyle/>
-          <a:p>
-            <a:pPr marL="342900" indent="-342900">
-              <a:lnSpc>
-                <a:spcPct val="125000"/>
-              </a:lnSpc>
-              <a:buSzPct val="100000"/>
-              <a:buChar char="•"/>
-            </a:pPr>
-            <a:r>
-              <a:rPr lang="en-US" sz="1100" dirty="0">
-                <a:solidFill>
-                  <a:srgbClr val="10161F"/>
-                </a:solidFill>
-                <a:latin typeface="Pretendard" pitchFamily="34" charset="0"/>
-                <a:ea typeface="Pretendard" pitchFamily="34" charset="-122"/>
-                <a:cs typeface="Pretendard" pitchFamily="34" charset="-120"/>
-              </a:rPr>
-              <a:t>승계 대출 활용</a:t>
-            </a:r>
-            <a:endParaRPr lang="en-US" sz="1100" dirty="0"/>
-          </a:p>
-        </p:txBody>
-      </p:sp>
-      <p:sp>
-        <p:nvSpPr>
-          <p:cNvPr id="16" name="Shape 14"/>
-          <p:cNvSpPr/>
-          <p:nvPr/>
-        </p:nvSpPr>
-        <p:spPr>
-          <a:xfrm>
-            <a:off x="566928" y="5193792"/>
-            <a:ext cx="11057839" cy="621792"/>
-          </a:xfrm>
-          <a:prstGeom prst="roundRect">
-            <a:avLst>
-              <a:gd name="adj" fmla="val 8824"/>
-            </a:avLst>
-          </a:prstGeom>
-          <a:solidFill>
-            <a:srgbClr val="F7FAFC"/>
-          </a:solidFill>
-          <a:ln w="6350">
-            <a:solidFill>
-              <a:srgbClr val="CBD5E0"/>
-            </a:solidFill>
-            <a:prstDash val="solid"/>
-          </a:ln>
-        </p:spPr>
-      </p:sp>
-      <p:sp>
-        <p:nvSpPr>
-          <p:cNvPr id="17" name="Text 15"/>
-          <p:cNvSpPr/>
-          <p:nvPr/>
-        </p:nvSpPr>
-        <p:spPr>
-          <a:xfrm>
-            <a:off x="795528" y="5193792"/>
-            <a:ext cx="10600639" cy="621792"/>
-          </a:xfrm>
-          <a:prstGeom prst="rect">
-            <a:avLst/>
-          </a:prstGeom>
-          <a:noFill/>
-          <a:ln/>
-        </p:spPr>
-        <p:txBody>
-          <a:bodyPr wrap="square" lIns="0" tIns="0" rIns="0" bIns="0" rtlCol="0" anchor="ctr"/>
-          <a:lstStyle/>
-          <a:p>
-            <a:pPr indent="0" marL="0">
-              <a:buNone/>
-            </a:pPr>
-            <a:r>
-              <a:rPr lang="en-US" sz="1100" dirty="0">
-                <a:solidFill>
-                  <a:srgbClr val="10161F"/>
-                </a:solidFill>
-                <a:latin typeface="Pretendard" pitchFamily="34" charset="0"/>
-                <a:ea typeface="Pretendard" pitchFamily="34" charset="-122"/>
-                <a:cs typeface="Pretendard" pitchFamily="34" charset="-120"/>
-              </a:rPr>
-              <a:t>※ 본 리스크 체크는 공부 및 브로커 확인 기반이며, 매수 전 전문 실사팀(변호사/건축사)을 통한 정밀 실사가 필요합니다.</a:t>
-            </a:r>
-            <a:endParaRPr lang="en-US" sz="1100" dirty="0"/>
-          </a:p>
-        </p:txBody>
-      </p:sp>
-      <p:sp>
-        <p:nvSpPr>
-          <p:cNvPr id="18" name="Text 16"/>
-          <p:cNvSpPr/>
-          <p:nvPr/>
-        </p:nvSpPr>
-        <p:spPr>
-          <a:xfrm>
-            <a:off x="566928" y="6382512"/>
-            <a:ext cx="7315200" cy="219456"/>
-          </a:xfrm>
-          <a:prstGeom prst="rect">
-            <a:avLst/>
-          </a:prstGeom>
-          <a:noFill/>
-          <a:ln/>
-        </p:spPr>
-        <p:txBody>
-          <a:bodyPr wrap="square" lIns="0" tIns="0" rIns="0" bIns="0" rtlCol="0" anchor="ctr"/>
-          <a:lstStyle/>
-          <a:p>
-            <a:pPr indent="0" marL="0">
-              <a:buNone/>
-            </a:pPr>
-            <a:r>
-              <a:rPr lang="en-US" sz="800" dirty="0">
-                <a:solidFill>
-                  <a:srgbClr val="718096"/>
-                </a:solidFill>
-                <a:latin typeface="Pretendard" pitchFamily="34" charset="0"/>
-                <a:ea typeface="Pretendard" pitchFamily="34" charset="-122"/>
-                <a:cs typeface="Pretendard" pitchFamily="34" charset="-120"/>
-              </a:rPr>
               <a:t>크리딜   |   </a:t>
             </a:r>
             <a:endParaRPr lang="en-US" sz="800" dirty="0"/>
@@ -3664,13 +3528,13 @@
       </p:sp>
       <p:sp>
         <p:nvSpPr>
-          <p:cNvPr id="19" name="Text 17"/>
-          <p:cNvSpPr/>
-          <p:nvPr/>
-        </p:nvSpPr>
-        <p:spPr>
-          <a:xfrm>
-            <a:off x="10710367" y="6382512"/>
+          <p:cNvPr id="10" name="Text 8"/>
+          <p:cNvSpPr/>
+          <p:nvPr/>
+        </p:nvSpPr>
+        <p:spPr>
+          <a:xfrm>
+            <a:off x="10774375" y="6382512"/>
             <a:ext cx="914400" cy="219456"/>
           </a:xfrm>
           <a:prstGeom prst="rect">
@@ -3741,7 +3605,7 @@
         </p:nvSpPr>
         <p:spPr>
           <a:xfrm>
-            <a:off x="566928" y="457200"/>
+            <a:off x="502920" y="457200"/>
             <a:ext cx="384048" cy="384048"/>
           </a:xfrm>
           <a:prstGeom prst="ellipse">
@@ -3761,7 +3625,7 @@
         </p:nvSpPr>
         <p:spPr>
           <a:xfrm>
-            <a:off x="566928" y="457200"/>
+            <a:off x="502920" y="457200"/>
             <a:ext cx="384048" cy="384048"/>
           </a:xfrm>
           <a:prstGeom prst="rect">
@@ -3800,7 +3664,7 @@
         </p:nvSpPr>
         <p:spPr>
           <a:xfrm>
-            <a:off x="1133856" y="457200"/>
+            <a:off x="1069848" y="457200"/>
             <a:ext cx="10490911" cy="182880"/>
           </a:xfrm>
           <a:prstGeom prst="rect">
@@ -3825,7 +3689,7 @@
                 <a:ea typeface="Arial" pitchFamily="34" charset="-122"/>
                 <a:cs typeface="Arial" pitchFamily="34" charset="-120"/>
               </a:rPr>
-              <a:t>Checklist</a:t>
+              <a:t>Risk</a:t>
             </a:r>
             <a:endParaRPr lang="en-US" sz="950" dirty="0"/>
           </a:p>
@@ -3839,7 +3703,7 @@
         </p:nvSpPr>
         <p:spPr>
           <a:xfrm>
-            <a:off x="1133856" y="640080"/>
+            <a:off x="1069848" y="640080"/>
             <a:ext cx="10490911" cy="365760"/>
           </a:xfrm>
           <a:prstGeom prst="rect">
@@ -3864,7 +3728,7 @@
                 <a:ea typeface="Pretendard" pitchFamily="34" charset="-122"/>
                 <a:cs typeface="Pretendard" pitchFamily="34" charset="-120"/>
               </a:rPr>
-              <a:t>실사 체크리스트</a:t>
+              <a:t>리스크</a:t>
             </a:r>
             <a:endParaRPr lang="en-US" sz="2300" dirty="0"/>
           </a:p>
@@ -3872,63 +3736,26 @@
       </p:sp>
       <p:sp>
         <p:nvSpPr>
-          <p:cNvPr id="6" name="Text 4"/>
-          <p:cNvSpPr/>
-          <p:nvPr/>
-        </p:nvSpPr>
-        <p:spPr>
-          <a:xfrm>
-            <a:off x="566928" y="1371600"/>
-            <a:ext cx="11057839" cy="237744"/>
-          </a:xfrm>
-          <a:prstGeom prst="rect">
-            <a:avLst/>
-          </a:prstGeom>
-          <a:noFill/>
-          <a:ln/>
-        </p:spPr>
-        <p:txBody>
-          <a:bodyPr wrap="square" lIns="0" tIns="0" rIns="0" bIns="0" rtlCol="0" anchor="ctr"/>
-          <a:lstStyle/>
-          <a:p>
-            <a:pPr indent="0" marL="0">
-              <a:buNone/>
-            </a:pPr>
-            <a:r>
-              <a:rPr lang="en-US" sz="1100" b="1" dirty="0">
-                <a:solidFill>
-                  <a:srgbClr val="10161F"/>
-                </a:solidFill>
-                <a:latin typeface="Pretendard" pitchFamily="34" charset="0"/>
-                <a:ea typeface="Pretendard" pitchFamily="34" charset="-122"/>
-                <a:cs typeface="Pretendard" pitchFamily="34" charset="-120"/>
-              </a:rPr>
-              <a:t>거래 안정성 확보를 위한 필수 법률·물리·임대차 실사 점검 항목 (총 6건)</a:t>
-            </a:r>
-            <a:endParaRPr lang="en-US" sz="1100" dirty="0"/>
-          </a:p>
-        </p:txBody>
-      </p:sp>
-      <p:sp>
-        <p:nvSpPr>
-          <p:cNvPr id="7" name="Shape 5"/>
-          <p:cNvSpPr/>
-          <p:nvPr/>
-        </p:nvSpPr>
-        <p:spPr>
-          <a:xfrm>
-            <a:off x="566928" y="1719072"/>
-            <a:ext cx="5368900" cy="868680"/>
-          </a:xfrm>
-          <a:prstGeom prst="rect">
-            <a:avLst/>
+          <p:cNvPr id="6" name="Shape 4"/>
+          <p:cNvSpPr/>
+          <p:nvPr/>
+        </p:nvSpPr>
+        <p:spPr>
+          <a:xfrm>
+            <a:off x="502920" y="1417320"/>
+            <a:ext cx="5400904" cy="3657600"/>
+          </a:xfrm>
+          <a:prstGeom prst="roundRect">
+            <a:avLst>
+              <a:gd name="adj" fmla="val 1500"/>
+            </a:avLst>
           </a:prstGeom>
           <a:solidFill>
             <a:srgbClr val="F7FAFC"/>
           </a:solidFill>
           <a:ln w="6350">
             <a:solidFill>
-              <a:srgbClr val="D9B668"/>
+              <a:srgbClr val="CBD5E0"/>
             </a:solidFill>
             <a:prstDash val="solid"/>
           </a:ln>
@@ -3936,92 +3763,91 @@
       </p:sp>
       <p:sp>
         <p:nvSpPr>
-          <p:cNvPr id="8" name="Shape 6"/>
-          <p:cNvSpPr/>
-          <p:nvPr/>
-        </p:nvSpPr>
-        <p:spPr>
-          <a:xfrm>
-            <a:off x="704088" y="1883664"/>
-            <a:ext cx="320040" cy="320040"/>
+          <p:cNvPr id="7" name="Shape 5"/>
+          <p:cNvSpPr/>
+          <p:nvPr/>
+        </p:nvSpPr>
+        <p:spPr>
+          <a:xfrm>
+            <a:off x="502920" y="1417320"/>
+            <a:ext cx="5400904" cy="45720"/>
           </a:xfrm>
           <a:prstGeom prst="rect">
             <a:avLst/>
           </a:prstGeom>
           <a:solidFill>
-            <a:srgbClr val="977024"/>
+            <a:srgbClr val="B98A2E"/>
           </a:solidFill>
           <a:ln/>
         </p:spPr>
       </p:sp>
       <p:sp>
         <p:nvSpPr>
-          <p:cNvPr id="9" name="Text 7"/>
-          <p:cNvSpPr/>
-          <p:nvPr/>
-        </p:nvSpPr>
-        <p:spPr>
-          <a:xfrm>
-            <a:off x="704088" y="1883664"/>
-            <a:ext cx="320040" cy="320040"/>
-          </a:xfrm>
-          <a:prstGeom prst="rect">
-            <a:avLst/>
-          </a:prstGeom>
-          <a:noFill/>
-          <a:ln/>
-        </p:spPr>
-        <p:txBody>
-          <a:bodyPr wrap="square" rtlCol="0" anchor="ctr"/>
-          <a:lstStyle/>
-          <a:p>
-            <a:pPr algn="ctr" indent="0" marL="0">
-              <a:buNone/>
-            </a:pPr>
-            <a:r>
-              <a:rPr lang="en-US" sz="1100" b="1" dirty="0">
-                <a:solidFill>
-                  <a:srgbClr val="000000"/>
+          <p:cNvPr id="8" name="Text 6"/>
+          <p:cNvSpPr/>
+          <p:nvPr/>
+        </p:nvSpPr>
+        <p:spPr>
+          <a:xfrm>
+            <a:off x="731520" y="1618488"/>
+            <a:ext cx="4943704" cy="292608"/>
+          </a:xfrm>
+          <a:prstGeom prst="rect">
+            <a:avLst/>
+          </a:prstGeom>
+          <a:noFill/>
+          <a:ln/>
+        </p:spPr>
+        <p:txBody>
+          <a:bodyPr wrap="square" lIns="0" tIns="0" rIns="0" bIns="0" rtlCol="0" anchor="ctr"/>
+          <a:lstStyle/>
+          <a:p>
+            <a:pPr indent="0" marL="0">
+              <a:buNone/>
+            </a:pPr>
+            <a:r>
+              <a:rPr lang="en-US" sz="1350" b="1" dirty="0">
+                <a:solidFill>
+                  <a:srgbClr val="977024"/>
                 </a:solidFill>
                 <a:latin typeface="Pretendard" pitchFamily="34" charset="0"/>
                 <a:ea typeface="Pretendard" pitchFamily="34" charset="-122"/>
                 <a:cs typeface="Pretendard" pitchFamily="34" charset="-120"/>
               </a:rPr>
-              <a:t>✓</a:t>
-            </a:r>
-            <a:endParaRPr lang="en-US" sz="1100" dirty="0"/>
-          </a:p>
-        </p:txBody>
-      </p:sp>
-      <p:sp>
-        <p:nvSpPr>
-          <p:cNvPr id="10" name="Text 8"/>
-          <p:cNvSpPr/>
-          <p:nvPr/>
-        </p:nvSpPr>
-        <p:spPr>
-          <a:xfrm>
-            <a:off x="1115568" y="1810512"/>
-            <a:ext cx="4683100" cy="722376"/>
-          </a:xfrm>
-          <a:prstGeom prst="rect">
-            <a:avLst/>
-          </a:prstGeom>
-          <a:noFill/>
-          <a:ln/>
-        </p:spPr>
-        <p:txBody>
-          <a:bodyPr wrap="square" rtlCol="0" anchor="ctr"/>
+              <a:t>메디컬 단일업종 집중</a:t>
+            </a:r>
+            <a:endParaRPr lang="en-US" sz="1350" dirty="0"/>
+          </a:p>
+        </p:txBody>
+      </p:sp>
+      <p:sp>
+        <p:nvSpPr>
+          <p:cNvPr id="9" name="Text 7"/>
+          <p:cNvSpPr/>
+          <p:nvPr/>
+        </p:nvSpPr>
+        <p:spPr>
+          <a:xfrm>
+            <a:off x="731520" y="1947672"/>
+            <a:ext cx="4943704" cy="365760"/>
+          </a:xfrm>
+          <a:prstGeom prst="rect">
+            <a:avLst/>
+          </a:prstGeom>
+          <a:noFill/>
+          <a:ln/>
+        </p:spPr>
+        <p:txBody>
+          <a:bodyPr wrap="square" lIns="0" tIns="0" rIns="0" bIns="0" rtlCol="0" anchor="ctr">
+            <a:normAutofit/>
+          </a:bodyPr>
           <a:lstStyle/>
           <a:p>
             <a:pPr indent="0" marL="0">
-              <a:lnSpc>
-                <a:spcPct val="110000"/>
-              </a:lnSpc>
-              <a:buNone/>
-            </a:pPr>
-            <a:r>
-              <a:rPr lang="en-US" sz="950" dirty="0">
+              <a:buNone/>
+            </a:pPr>
+            <a:r>
+              <a:rPr lang="en-US" sz="1250" b="1" dirty="0">
                 <a:solidFill>
                   <a:srgbClr val="10161F"/>
                 </a:solidFill>
@@ -4029,9 +3855,54 @@
                 <a:ea typeface="Pretendard" pitchFamily="34" charset="-122"/>
                 <a:cs typeface="Pretendard" pitchFamily="34" charset="-120"/>
               </a:rPr>
-              <a:t>등기부등본 갑구/을구 권리관계 및 근저당 채권최고액 전액 말소 조건 원본 대조</a:t>
-            </a:r>
-            <a:endParaRPr lang="en-US" sz="950" dirty="0"/>
+              <a:t>전층 의료</a:t>
+            </a:r>
+            <a:endParaRPr lang="en-US" sz="1250" dirty="0"/>
+          </a:p>
+        </p:txBody>
+      </p:sp>
+      <p:sp>
+        <p:nvSpPr>
+          <p:cNvPr id="10" name="Text 8"/>
+          <p:cNvSpPr/>
+          <p:nvPr/>
+        </p:nvSpPr>
+        <p:spPr>
+          <a:xfrm>
+            <a:off x="731520" y="2377440"/>
+            <a:ext cx="4943704" cy="2606040"/>
+          </a:xfrm>
+          <a:prstGeom prst="rect">
+            <a:avLst/>
+          </a:prstGeom>
+          <a:noFill/>
+          <a:ln/>
+        </p:spPr>
+        <p:txBody>
+          <a:bodyPr wrap="square" lIns="0" tIns="0" rIns="0" bIns="0" rtlCol="0" anchor="t">
+            <a:normAutofit/>
+          </a:bodyPr>
+          <a:lstStyle/>
+          <a:p>
+            <a:pPr marL="342900" indent="-342900">
+              <a:lnSpc>
+                <a:spcPct val="115000"/>
+              </a:lnSpc>
+              <a:buSzPct val="100000"/>
+              <a:buChar char="•"/>
+            </a:pPr>
+            <a:r>
+              <a:rPr lang="en-US" sz="1100" dirty="0">
+                <a:solidFill>
+                  <a:srgbClr val="10161F"/>
+                </a:solidFill>
+                <a:latin typeface="Pretendard" pitchFamily="34" charset="0"/>
+                <a:ea typeface="Pretendard" pitchFamily="34" charset="-122"/>
+                <a:cs typeface="Pretendard" pitchFamily="34" charset="-120"/>
+              </a:rPr>
+              <a:t>업종 다각화 검토</a:t>
+            </a:r>
+            <a:endParaRPr lang="en-US" sz="1100" dirty="0"/>
           </a:p>
         </p:txBody>
       </p:sp>
@@ -4043,18 +3914,20 @@
         </p:nvSpPr>
         <p:spPr>
           <a:xfrm>
-            <a:off x="566928" y="2715768"/>
-            <a:ext cx="5368900" cy="868680"/>
-          </a:xfrm>
-          <a:prstGeom prst="rect">
-            <a:avLst/>
+            <a:off x="6159856" y="1417320"/>
+            <a:ext cx="5400904" cy="3657600"/>
+          </a:xfrm>
+          <a:prstGeom prst="roundRect">
+            <a:avLst>
+              <a:gd name="adj" fmla="val 1500"/>
+            </a:avLst>
           </a:prstGeom>
           <a:solidFill>
             <a:srgbClr val="F7FAFC"/>
           </a:solidFill>
           <a:ln w="6350">
             <a:solidFill>
-              <a:srgbClr val="D9B668"/>
+              <a:srgbClr val="CBD5E0"/>
             </a:solidFill>
             <a:prstDash val="solid"/>
           </a:ln>
@@ -4068,14 +3941,14 @@
         </p:nvSpPr>
         <p:spPr>
           <a:xfrm>
-            <a:off x="704088" y="2880360"/>
-            <a:ext cx="320040" cy="320040"/>
+            <a:off x="6159856" y="1417320"/>
+            <a:ext cx="5400904" cy="45720"/>
           </a:xfrm>
           <a:prstGeom prst="rect">
             <a:avLst/>
           </a:prstGeom>
           <a:solidFill>
-            <a:srgbClr val="977024"/>
+            <a:srgbClr val="B98A2E"/>
           </a:solidFill>
           <a:ln/>
         </p:spPr>
@@ -4088,34 +3961,34 @@
         </p:nvSpPr>
         <p:spPr>
           <a:xfrm>
-            <a:off x="704088" y="2880360"/>
-            <a:ext cx="320040" cy="320040"/>
-          </a:xfrm>
-          <a:prstGeom prst="rect">
-            <a:avLst/>
-          </a:prstGeom>
-          <a:noFill/>
-          <a:ln/>
-        </p:spPr>
-        <p:txBody>
-          <a:bodyPr wrap="square" rtlCol="0" anchor="ctr"/>
-          <a:lstStyle/>
-          <a:p>
-            <a:pPr algn="ctr" indent="0" marL="0">
-              <a:buNone/>
-            </a:pPr>
-            <a:r>
-              <a:rPr lang="en-US" sz="1100" b="1" dirty="0">
-                <a:solidFill>
-                  <a:srgbClr val="000000"/>
+            <a:off x="6388456" y="1618488"/>
+            <a:ext cx="4943704" cy="292608"/>
+          </a:xfrm>
+          <a:prstGeom prst="rect">
+            <a:avLst/>
+          </a:prstGeom>
+          <a:noFill/>
+          <a:ln/>
+        </p:spPr>
+        <p:txBody>
+          <a:bodyPr wrap="square" lIns="0" tIns="0" rIns="0" bIns="0" rtlCol="0" anchor="ctr"/>
+          <a:lstStyle/>
+          <a:p>
+            <a:pPr indent="0" marL="0">
+              <a:buNone/>
+            </a:pPr>
+            <a:r>
+              <a:rPr lang="en-US" sz="1350" b="1" dirty="0">
+                <a:solidFill>
+                  <a:srgbClr val="977024"/>
                 </a:solidFill>
                 <a:latin typeface="Pretendard" pitchFamily="34" charset="0"/>
                 <a:ea typeface="Pretendard" pitchFamily="34" charset="-122"/>
                 <a:cs typeface="Pretendard" pitchFamily="34" charset="-120"/>
               </a:rPr>
-              <a:t>✓</a:t>
-            </a:r>
-            <a:endParaRPr lang="en-US" sz="1100" dirty="0"/>
+              <a:t>금리 변동</a:t>
+            </a:r>
+            <a:endParaRPr lang="en-US" sz="1350" dirty="0"/>
           </a:p>
         </p:txBody>
       </p:sp>
@@ -4127,27 +4000,26 @@
         </p:nvSpPr>
         <p:spPr>
           <a:xfrm>
-            <a:off x="1115568" y="2807208"/>
-            <a:ext cx="4683100" cy="722376"/>
-          </a:xfrm>
-          <a:prstGeom prst="rect">
-            <a:avLst/>
-          </a:prstGeom>
-          <a:noFill/>
-          <a:ln/>
-        </p:spPr>
-        <p:txBody>
-          <a:bodyPr wrap="square" rtlCol="0" anchor="ctr"/>
+            <a:off x="6388456" y="1947672"/>
+            <a:ext cx="4943704" cy="365760"/>
+          </a:xfrm>
+          <a:prstGeom prst="rect">
+            <a:avLst/>
+          </a:prstGeom>
+          <a:noFill/>
+          <a:ln/>
+        </p:spPr>
+        <p:txBody>
+          <a:bodyPr wrap="square" lIns="0" tIns="0" rIns="0" bIns="0" rtlCol="0" anchor="ctr">
+            <a:normAutofit/>
+          </a:bodyPr>
           <a:lstStyle/>
           <a:p>
             <a:pPr indent="0" marL="0">
-              <a:lnSpc>
-                <a:spcPct val="110000"/>
-              </a:lnSpc>
-              <a:buNone/>
-            </a:pPr>
-            <a:r>
-              <a:rPr lang="en-US" sz="950" dirty="0">
+              <a:buNone/>
+            </a:pPr>
+            <a:r>
+              <a:rPr lang="en-US" sz="1250" b="1" dirty="0">
                 <a:solidFill>
                   <a:srgbClr val="10161F"/>
                 </a:solidFill>
@@ -4155,32 +4027,79 @@
                 <a:ea typeface="Pretendard" pitchFamily="34" charset="-122"/>
                 <a:cs typeface="Pretendard" pitchFamily="34" charset="-120"/>
               </a:rPr>
-              <a:t>임대차 원본 계약서 대조 (보증금, 월임대료, 관리비 실입금 내역 및 제소전화해조서)</a:t>
-            </a:r>
-            <a:endParaRPr lang="en-US" sz="950" dirty="0"/>
-          </a:p>
-        </p:txBody>
-      </p:sp>
-      <p:sp>
-        <p:nvSpPr>
-          <p:cNvPr id="15" name="Shape 13"/>
-          <p:cNvSpPr/>
-          <p:nvPr/>
-        </p:nvSpPr>
-        <p:spPr>
-          <a:xfrm>
-            <a:off x="566928" y="3712464"/>
-            <a:ext cx="5368900" cy="868680"/>
-          </a:xfrm>
-          <a:prstGeom prst="rect">
-            <a:avLst/>
+              <a:t>4.1% 고정</a:t>
+            </a:r>
+            <a:endParaRPr lang="en-US" sz="1250" dirty="0"/>
+          </a:p>
+        </p:txBody>
+      </p:sp>
+      <p:sp>
+        <p:nvSpPr>
+          <p:cNvPr id="15" name="Text 13"/>
+          <p:cNvSpPr/>
+          <p:nvPr/>
+        </p:nvSpPr>
+        <p:spPr>
+          <a:xfrm>
+            <a:off x="6388456" y="2377440"/>
+            <a:ext cx="4943704" cy="2606040"/>
+          </a:xfrm>
+          <a:prstGeom prst="rect">
+            <a:avLst/>
+          </a:prstGeom>
+          <a:noFill/>
+          <a:ln/>
+        </p:spPr>
+        <p:txBody>
+          <a:bodyPr wrap="square" lIns="0" tIns="0" rIns="0" bIns="0" rtlCol="0" anchor="t">
+            <a:normAutofit/>
+          </a:bodyPr>
+          <a:lstStyle/>
+          <a:p>
+            <a:pPr marL="342900" indent="-342900">
+              <a:lnSpc>
+                <a:spcPct val="115000"/>
+              </a:lnSpc>
+              <a:buSzPct val="100000"/>
+              <a:buChar char="•"/>
+            </a:pPr>
+            <a:r>
+              <a:rPr lang="en-US" sz="1100" dirty="0">
+                <a:solidFill>
+                  <a:srgbClr val="10161F"/>
+                </a:solidFill>
+                <a:latin typeface="Pretendard" pitchFamily="34" charset="0"/>
+                <a:ea typeface="Pretendard" pitchFamily="34" charset="-122"/>
+                <a:cs typeface="Pretendard" pitchFamily="34" charset="-120"/>
+              </a:rPr>
+              <a:t>승계 대출 활용</a:t>
+            </a:r>
+            <a:endParaRPr lang="en-US" sz="1100" dirty="0"/>
+          </a:p>
+        </p:txBody>
+      </p:sp>
+      <p:sp>
+        <p:nvSpPr>
+          <p:cNvPr id="16" name="Shape 14"/>
+          <p:cNvSpPr/>
+          <p:nvPr/>
+        </p:nvSpPr>
+        <p:spPr>
+          <a:xfrm>
+            <a:off x="502920" y="5193792"/>
+            <a:ext cx="11057839" cy="621792"/>
+          </a:xfrm>
+          <a:prstGeom prst="roundRect">
+            <a:avLst>
+              <a:gd name="adj" fmla="val 8824"/>
+            </a:avLst>
           </a:prstGeom>
           <a:solidFill>
             <a:srgbClr val="F7FAFC"/>
           </a:solidFill>
           <a:ln w="6350">
             <a:solidFill>
-              <a:srgbClr val="D9B668"/>
+              <a:srgbClr val="CBD5E0"/>
             </a:solidFill>
             <a:prstDash val="solid"/>
           </a:ln>
@@ -4188,58 +4107,38 @@
       </p:sp>
       <p:sp>
         <p:nvSpPr>
-          <p:cNvPr id="16" name="Shape 14"/>
-          <p:cNvSpPr/>
-          <p:nvPr/>
-        </p:nvSpPr>
-        <p:spPr>
-          <a:xfrm>
-            <a:off x="704088" y="3877056"/>
-            <a:ext cx="320040" cy="320040"/>
-          </a:xfrm>
-          <a:prstGeom prst="rect">
-            <a:avLst/>
-          </a:prstGeom>
-          <a:solidFill>
-            <a:srgbClr val="977024"/>
-          </a:solidFill>
-          <a:ln/>
-        </p:spPr>
-      </p:sp>
-      <p:sp>
-        <p:nvSpPr>
           <p:cNvPr id="17" name="Text 15"/>
           <p:cNvSpPr/>
           <p:nvPr/>
         </p:nvSpPr>
         <p:spPr>
           <a:xfrm>
-            <a:off x="704088" y="3877056"/>
-            <a:ext cx="320040" cy="320040"/>
-          </a:xfrm>
-          <a:prstGeom prst="rect">
-            <a:avLst/>
-          </a:prstGeom>
-          <a:noFill/>
-          <a:ln/>
-        </p:spPr>
-        <p:txBody>
-          <a:bodyPr wrap="square" rtlCol="0" anchor="ctr"/>
-          <a:lstStyle/>
-          <a:p>
-            <a:pPr algn="ctr" indent="0" marL="0">
-              <a:buNone/>
-            </a:pPr>
-            <a:r>
-              <a:rPr lang="en-US" sz="1100" b="1" dirty="0">
-                <a:solidFill>
-                  <a:srgbClr val="000000"/>
+            <a:off x="731520" y="5193792"/>
+            <a:ext cx="10600639" cy="621792"/>
+          </a:xfrm>
+          <a:prstGeom prst="rect">
+            <a:avLst/>
+          </a:prstGeom>
+          <a:noFill/>
+          <a:ln/>
+        </p:spPr>
+        <p:txBody>
+          <a:bodyPr wrap="square" lIns="0" tIns="0" rIns="0" bIns="0" rtlCol="0" anchor="ctr"/>
+          <a:lstStyle/>
+          <a:p>
+            <a:pPr indent="0" marL="0">
+              <a:buNone/>
+            </a:pPr>
+            <a:r>
+              <a:rPr lang="en-US" sz="1100" dirty="0">
+                <a:solidFill>
+                  <a:srgbClr val="10161F"/>
                 </a:solidFill>
                 <a:latin typeface="Pretendard" pitchFamily="34" charset="0"/>
                 <a:ea typeface="Pretendard" pitchFamily="34" charset="-122"/>
                 <a:cs typeface="Pretendard" pitchFamily="34" charset="-120"/>
               </a:rPr>
-              <a:t>✓</a:t>
+              <a:t>※ 본 리스크 체크는 공부 및 브로커 확인 기반이며, 매수 전 전문 실사팀(변호사/건축사)을 통한 정밀 실사가 필요합니다.</a:t>
             </a:r>
             <a:endParaRPr lang="en-US" sz="1100" dirty="0"/>
           </a:p>
@@ -4253,510 +4152,31 @@
         </p:nvSpPr>
         <p:spPr>
           <a:xfrm>
-            <a:off x="1115568" y="3803904"/>
-            <a:ext cx="4683100" cy="722376"/>
-          </a:xfrm>
-          <a:prstGeom prst="rect">
-            <a:avLst/>
-          </a:prstGeom>
-          <a:noFill/>
-          <a:ln/>
-        </p:spPr>
-        <p:txBody>
-          <a:bodyPr wrap="square" rtlCol="0" anchor="ctr"/>
+            <a:off x="502920" y="6382512"/>
+            <a:ext cx="7315200" cy="219456"/>
+          </a:xfrm>
+          <a:prstGeom prst="rect">
+            <a:avLst/>
+          </a:prstGeom>
+          <a:noFill/>
+          <a:ln/>
+        </p:spPr>
+        <p:txBody>
+          <a:bodyPr wrap="square" lIns="0" tIns="0" rIns="0" bIns="0" rtlCol="0" anchor="ctr"/>
           <a:lstStyle/>
           <a:p>
             <a:pPr indent="0" marL="0">
-              <a:lnSpc>
-                <a:spcPct val="110000"/>
-              </a:lnSpc>
-              <a:buNone/>
-            </a:pPr>
-            <a:r>
-              <a:rPr lang="en-US" sz="950" dirty="0">
-                <a:solidFill>
-                  <a:srgbClr val="10161F"/>
+              <a:buNone/>
+            </a:pPr>
+            <a:r>
+              <a:rPr lang="en-US" sz="800" dirty="0">
+                <a:solidFill>
+                  <a:srgbClr val="718096"/>
                 </a:solidFill>
                 <a:latin typeface="Pretendard" pitchFamily="34" charset="0"/>
                 <a:ea typeface="Pretendard" pitchFamily="34" charset="-122"/>
                 <a:cs typeface="Pretendard" pitchFamily="34" charset="-120"/>
               </a:rPr>
-              <a:t>건축물대장상 위반건축물 등재 여부 및 불법 증축·용도변경 이행강제금 납부 이력 점검</a:t>
-            </a:r>
-            <a:endParaRPr lang="en-US" sz="950" dirty="0"/>
-          </a:p>
-        </p:txBody>
-      </p:sp>
-      <p:sp>
-        <p:nvSpPr>
-          <p:cNvPr id="19" name="Shape 17"/>
-          <p:cNvSpPr/>
-          <p:nvPr/>
-        </p:nvSpPr>
-        <p:spPr>
-          <a:xfrm>
-            <a:off x="6255868" y="1719072"/>
-            <a:ext cx="5368900" cy="868680"/>
-          </a:xfrm>
-          <a:prstGeom prst="rect">
-            <a:avLst/>
-          </a:prstGeom>
-          <a:solidFill>
-            <a:srgbClr val="F7FAFC"/>
-          </a:solidFill>
-          <a:ln w="6350">
-            <a:solidFill>
-              <a:srgbClr val="D9B668"/>
-            </a:solidFill>
-            <a:prstDash val="solid"/>
-          </a:ln>
-        </p:spPr>
-      </p:sp>
-      <p:sp>
-        <p:nvSpPr>
-          <p:cNvPr id="20" name="Shape 18"/>
-          <p:cNvSpPr/>
-          <p:nvPr/>
-        </p:nvSpPr>
-        <p:spPr>
-          <a:xfrm>
-            <a:off x="6393028" y="1883664"/>
-            <a:ext cx="320040" cy="320040"/>
-          </a:xfrm>
-          <a:prstGeom prst="rect">
-            <a:avLst/>
-          </a:prstGeom>
-          <a:solidFill>
-            <a:srgbClr val="977024"/>
-          </a:solidFill>
-          <a:ln/>
-        </p:spPr>
-      </p:sp>
-      <p:sp>
-        <p:nvSpPr>
-          <p:cNvPr id="21" name="Text 19"/>
-          <p:cNvSpPr/>
-          <p:nvPr/>
-        </p:nvSpPr>
-        <p:spPr>
-          <a:xfrm>
-            <a:off x="6393028" y="1883664"/>
-            <a:ext cx="320040" cy="320040"/>
-          </a:xfrm>
-          <a:prstGeom prst="rect">
-            <a:avLst/>
-          </a:prstGeom>
-          <a:noFill/>
-          <a:ln/>
-        </p:spPr>
-        <p:txBody>
-          <a:bodyPr wrap="square" rtlCol="0" anchor="ctr"/>
-          <a:lstStyle/>
-          <a:p>
-            <a:pPr algn="ctr" indent="0" marL="0">
-              <a:buNone/>
-            </a:pPr>
-            <a:r>
-              <a:rPr lang="en-US" sz="1100" b="1" dirty="0">
-                <a:solidFill>
-                  <a:srgbClr val="000000"/>
-                </a:solidFill>
-                <a:latin typeface="Pretendard" pitchFamily="34" charset="0"/>
-                <a:ea typeface="Pretendard" pitchFamily="34" charset="-122"/>
-                <a:cs typeface="Pretendard" pitchFamily="34" charset="-120"/>
-              </a:rPr>
-              <a:t>✓</a:t>
-            </a:r>
-            <a:endParaRPr lang="en-US" sz="1100" dirty="0"/>
-          </a:p>
-        </p:txBody>
-      </p:sp>
-      <p:sp>
-        <p:nvSpPr>
-          <p:cNvPr id="22" name="Text 20"/>
-          <p:cNvSpPr/>
-          <p:nvPr/>
-        </p:nvSpPr>
-        <p:spPr>
-          <a:xfrm>
-            <a:off x="6804508" y="1810512"/>
-            <a:ext cx="4683100" cy="722376"/>
-          </a:xfrm>
-          <a:prstGeom prst="rect">
-            <a:avLst/>
-          </a:prstGeom>
-          <a:noFill/>
-          <a:ln/>
-        </p:spPr>
-        <p:txBody>
-          <a:bodyPr wrap="square" rtlCol="0" anchor="ctr"/>
-          <a:lstStyle/>
-          <a:p>
-            <a:pPr indent="0" marL="0">
-              <a:lnSpc>
-                <a:spcPct val="110000"/>
-              </a:lnSpc>
-              <a:buNone/>
-            </a:pPr>
-            <a:r>
-              <a:rPr lang="en-US" sz="950" dirty="0">
-                <a:solidFill>
-                  <a:srgbClr val="10161F"/>
-                </a:solidFill>
-                <a:latin typeface="Pretendard" pitchFamily="34" charset="0"/>
-                <a:ea typeface="Pretendard" pitchFamily="34" charset="-122"/>
-                <a:cs typeface="Pretendard" pitchFamily="34" charset="-120"/>
-              </a:rPr>
-              <a:t>토지이용계획확인원상 도시계획시설 저촉, 건축선 후퇴, 지구단위계획 특별계획구역 확인</a:t>
-            </a:r>
-            <a:endParaRPr lang="en-US" sz="950" dirty="0"/>
-          </a:p>
-        </p:txBody>
-      </p:sp>
-      <p:sp>
-        <p:nvSpPr>
-          <p:cNvPr id="23" name="Shape 21"/>
-          <p:cNvSpPr/>
-          <p:nvPr/>
-        </p:nvSpPr>
-        <p:spPr>
-          <a:xfrm>
-            <a:off x="6255868" y="2715768"/>
-            <a:ext cx="5368900" cy="868680"/>
-          </a:xfrm>
-          <a:prstGeom prst="rect">
-            <a:avLst/>
-          </a:prstGeom>
-          <a:solidFill>
-            <a:srgbClr val="F7FAFC"/>
-          </a:solidFill>
-          <a:ln w="6350">
-            <a:solidFill>
-              <a:srgbClr val="D9B668"/>
-            </a:solidFill>
-            <a:prstDash val="solid"/>
-          </a:ln>
-        </p:spPr>
-      </p:sp>
-      <p:sp>
-        <p:nvSpPr>
-          <p:cNvPr id="24" name="Shape 22"/>
-          <p:cNvSpPr/>
-          <p:nvPr/>
-        </p:nvSpPr>
-        <p:spPr>
-          <a:xfrm>
-            <a:off x="6393028" y="2880360"/>
-            <a:ext cx="320040" cy="320040"/>
-          </a:xfrm>
-          <a:prstGeom prst="rect">
-            <a:avLst/>
-          </a:prstGeom>
-          <a:solidFill>
-            <a:srgbClr val="977024"/>
-          </a:solidFill>
-          <a:ln/>
-        </p:spPr>
-      </p:sp>
-      <p:sp>
-        <p:nvSpPr>
-          <p:cNvPr id="25" name="Text 23"/>
-          <p:cNvSpPr/>
-          <p:nvPr/>
-        </p:nvSpPr>
-        <p:spPr>
-          <a:xfrm>
-            <a:off x="6393028" y="2880360"/>
-            <a:ext cx="320040" cy="320040"/>
-          </a:xfrm>
-          <a:prstGeom prst="rect">
-            <a:avLst/>
-          </a:prstGeom>
-          <a:noFill/>
-          <a:ln/>
-        </p:spPr>
-        <p:txBody>
-          <a:bodyPr wrap="square" rtlCol="0" anchor="ctr"/>
-          <a:lstStyle/>
-          <a:p>
-            <a:pPr algn="ctr" indent="0" marL="0">
-              <a:buNone/>
-            </a:pPr>
-            <a:r>
-              <a:rPr lang="en-US" sz="1100" b="1" dirty="0">
-                <a:solidFill>
-                  <a:srgbClr val="000000"/>
-                </a:solidFill>
-                <a:latin typeface="Pretendard" pitchFamily="34" charset="0"/>
-                <a:ea typeface="Pretendard" pitchFamily="34" charset="-122"/>
-                <a:cs typeface="Pretendard" pitchFamily="34" charset="-120"/>
-              </a:rPr>
-              <a:t>✓</a:t>
-            </a:r>
-            <a:endParaRPr lang="en-US" sz="1100" dirty="0"/>
-          </a:p>
-        </p:txBody>
-      </p:sp>
-      <p:sp>
-        <p:nvSpPr>
-          <p:cNvPr id="26" name="Text 24"/>
-          <p:cNvSpPr/>
-          <p:nvPr/>
-        </p:nvSpPr>
-        <p:spPr>
-          <a:xfrm>
-            <a:off x="6804508" y="2807208"/>
-            <a:ext cx="4683100" cy="722376"/>
-          </a:xfrm>
-          <a:prstGeom prst="rect">
-            <a:avLst/>
-          </a:prstGeom>
-          <a:noFill/>
-          <a:ln/>
-        </p:spPr>
-        <p:txBody>
-          <a:bodyPr wrap="square" rtlCol="0" anchor="ctr"/>
-          <a:lstStyle/>
-          <a:p>
-            <a:pPr indent="0" marL="0">
-              <a:lnSpc>
-                <a:spcPct val="110000"/>
-              </a:lnSpc>
-              <a:buNone/>
-            </a:pPr>
-            <a:r>
-              <a:rPr lang="en-US" sz="950" dirty="0">
-                <a:solidFill>
-                  <a:srgbClr val="10161F"/>
-                </a:solidFill>
-                <a:latin typeface="Pretendard" pitchFamily="34" charset="0"/>
-                <a:ea typeface="Pretendard" pitchFamily="34" charset="-122"/>
-                <a:cs typeface="Pretendard" pitchFamily="34" charset="-120"/>
-              </a:rPr>
-              <a:t>기계식 주차기 정기 안전점검 합격증, 승강기 검사필증, 소방 완비증명서 실물 실사</a:t>
-            </a:r>
-            <a:endParaRPr lang="en-US" sz="950" dirty="0"/>
-          </a:p>
-        </p:txBody>
-      </p:sp>
-      <p:sp>
-        <p:nvSpPr>
-          <p:cNvPr id="27" name="Shape 25"/>
-          <p:cNvSpPr/>
-          <p:nvPr/>
-        </p:nvSpPr>
-        <p:spPr>
-          <a:xfrm>
-            <a:off x="6255868" y="3712464"/>
-            <a:ext cx="5368900" cy="868680"/>
-          </a:xfrm>
-          <a:prstGeom prst="rect">
-            <a:avLst/>
-          </a:prstGeom>
-          <a:solidFill>
-            <a:srgbClr val="F7FAFC"/>
-          </a:solidFill>
-          <a:ln w="6350">
-            <a:solidFill>
-              <a:srgbClr val="D9B668"/>
-            </a:solidFill>
-            <a:prstDash val="solid"/>
-          </a:ln>
-        </p:spPr>
-      </p:sp>
-      <p:sp>
-        <p:nvSpPr>
-          <p:cNvPr id="28" name="Shape 26"/>
-          <p:cNvSpPr/>
-          <p:nvPr/>
-        </p:nvSpPr>
-        <p:spPr>
-          <a:xfrm>
-            <a:off x="6393028" y="3877056"/>
-            <a:ext cx="320040" cy="320040"/>
-          </a:xfrm>
-          <a:prstGeom prst="rect">
-            <a:avLst/>
-          </a:prstGeom>
-          <a:solidFill>
-            <a:srgbClr val="977024"/>
-          </a:solidFill>
-          <a:ln/>
-        </p:spPr>
-      </p:sp>
-      <p:sp>
-        <p:nvSpPr>
-          <p:cNvPr id="29" name="Text 27"/>
-          <p:cNvSpPr/>
-          <p:nvPr/>
-        </p:nvSpPr>
-        <p:spPr>
-          <a:xfrm>
-            <a:off x="6393028" y="3877056"/>
-            <a:ext cx="320040" cy="320040"/>
-          </a:xfrm>
-          <a:prstGeom prst="rect">
-            <a:avLst/>
-          </a:prstGeom>
-          <a:noFill/>
-          <a:ln/>
-        </p:spPr>
-        <p:txBody>
-          <a:bodyPr wrap="square" rtlCol="0" anchor="ctr"/>
-          <a:lstStyle/>
-          <a:p>
-            <a:pPr algn="ctr" indent="0" marL="0">
-              <a:buNone/>
-            </a:pPr>
-            <a:r>
-              <a:rPr lang="en-US" sz="1100" b="1" dirty="0">
-                <a:solidFill>
-                  <a:srgbClr val="000000"/>
-                </a:solidFill>
-                <a:latin typeface="Pretendard" pitchFamily="34" charset="0"/>
-                <a:ea typeface="Pretendard" pitchFamily="34" charset="-122"/>
-                <a:cs typeface="Pretendard" pitchFamily="34" charset="-120"/>
-              </a:rPr>
-              <a:t>✓</a:t>
-            </a:r>
-            <a:endParaRPr lang="en-US" sz="1100" dirty="0"/>
-          </a:p>
-        </p:txBody>
-      </p:sp>
-      <p:sp>
-        <p:nvSpPr>
-          <p:cNvPr id="30" name="Text 28"/>
-          <p:cNvSpPr/>
-          <p:nvPr/>
-        </p:nvSpPr>
-        <p:spPr>
-          <a:xfrm>
-            <a:off x="6804508" y="3803904"/>
-            <a:ext cx="4683100" cy="722376"/>
-          </a:xfrm>
-          <a:prstGeom prst="rect">
-            <a:avLst/>
-          </a:prstGeom>
-          <a:noFill/>
-          <a:ln/>
-        </p:spPr>
-        <p:txBody>
-          <a:bodyPr wrap="square" rtlCol="0" anchor="ctr"/>
-          <a:lstStyle/>
-          <a:p>
-            <a:pPr indent="0" marL="0">
-              <a:lnSpc>
-                <a:spcPct val="110000"/>
-              </a:lnSpc>
-              <a:buNone/>
-            </a:pPr>
-            <a:r>
-              <a:rPr lang="en-US" sz="950" dirty="0">
-                <a:solidFill>
-                  <a:srgbClr val="10161F"/>
-                </a:solidFill>
-                <a:latin typeface="Pretendard" pitchFamily="34" charset="0"/>
-                <a:ea typeface="Pretendard" pitchFamily="34" charset="-122"/>
-                <a:cs typeface="Pretendard" pitchFamily="34" charset="-120"/>
-              </a:rPr>
-              <a:t>정화조 용량 대비 현 업종 적합성 및 하수도 원인자부담금 추가 부과 대상 여부 확인</a:t>
-            </a:r>
-            <a:endParaRPr lang="en-US" sz="950" dirty="0"/>
-          </a:p>
-        </p:txBody>
-      </p:sp>
-      <p:sp>
-        <p:nvSpPr>
-          <p:cNvPr id="31" name="Shape 29"/>
-          <p:cNvSpPr/>
-          <p:nvPr/>
-        </p:nvSpPr>
-        <p:spPr>
-          <a:xfrm>
-            <a:off x="566928" y="5760720"/>
-            <a:ext cx="11057839" cy="594360"/>
-          </a:xfrm>
-          <a:prstGeom prst="rect">
-            <a:avLst/>
-          </a:prstGeom>
-          <a:solidFill>
-            <a:srgbClr val="D9B668"/>
-          </a:solidFill>
-          <a:ln/>
-        </p:spPr>
-      </p:sp>
-      <p:sp>
-        <p:nvSpPr>
-          <p:cNvPr id="32" name="Text 30"/>
-          <p:cNvSpPr/>
-          <p:nvPr/>
-        </p:nvSpPr>
-        <p:spPr>
-          <a:xfrm>
-            <a:off x="749808" y="5833872"/>
-            <a:ext cx="10692079" cy="448056"/>
-          </a:xfrm>
-          <a:prstGeom prst="rect">
-            <a:avLst/>
-          </a:prstGeom>
-          <a:noFill/>
-          <a:ln/>
-        </p:spPr>
-        <p:txBody>
-          <a:bodyPr wrap="square" rtlCol="0" anchor="ctr"/>
-          <a:lstStyle/>
-          <a:p>
-            <a:pPr indent="0" marL="0">
-              <a:buNone/>
-            </a:pPr>
-            <a:r>
-              <a:rPr lang="en-US" sz="950" b="1" dirty="0">
-                <a:solidFill>
-                  <a:srgbClr val="977024"/>
-                </a:solidFill>
-                <a:latin typeface="Pretendard" pitchFamily="34" charset="0"/>
-                <a:ea typeface="Pretendard" pitchFamily="34" charset="-122"/>
-                <a:cs typeface="Pretendard" pitchFamily="34" charset="-120"/>
-              </a:rPr>
-              <a:t>※ 본 체크리스트는 계약 전 매수인의 안전한 자산 인수를 위한 필수 확인 사항이며, 실사(Due Diligence) 결과에 따라 매매 조건 및 잔금 일정이 조정될 수 있습니다.</a:t>
-            </a:r>
-            <a:endParaRPr lang="en-US" sz="950" dirty="0"/>
-          </a:p>
-        </p:txBody>
-      </p:sp>
-      <p:sp>
-        <p:nvSpPr>
-          <p:cNvPr id="33" name="Text 31"/>
-          <p:cNvSpPr/>
-          <p:nvPr/>
-        </p:nvSpPr>
-        <p:spPr>
-          <a:xfrm>
-            <a:off x="566928" y="6382512"/>
-            <a:ext cx="7315200" cy="219456"/>
-          </a:xfrm>
-          <a:prstGeom prst="rect">
-            <a:avLst/>
-          </a:prstGeom>
-          <a:noFill/>
-          <a:ln/>
-        </p:spPr>
-        <p:txBody>
-          <a:bodyPr wrap="square" lIns="0" tIns="0" rIns="0" bIns="0" rtlCol="0" anchor="ctr"/>
-          <a:lstStyle/>
-          <a:p>
-            <a:pPr indent="0" marL="0">
-              <a:buNone/>
-            </a:pPr>
-            <a:r>
-              <a:rPr lang="en-US" sz="800" dirty="0">
-                <a:solidFill>
-                  <a:srgbClr val="718096"/>
-                </a:solidFill>
-                <a:latin typeface="Pretendard" pitchFamily="34" charset="0"/>
-                <a:ea typeface="Pretendard" pitchFamily="34" charset="-122"/>
-                <a:cs typeface="Pretendard" pitchFamily="34" charset="-120"/>
-              </a:rPr>
               <a:t>크리딜   |   </a:t>
             </a:r>
             <a:endParaRPr lang="en-US" sz="800" dirty="0"/>
@@ -4765,13 +4185,13 @@
       </p:sp>
       <p:sp>
         <p:nvSpPr>
-          <p:cNvPr id="34" name="Text 32"/>
-          <p:cNvSpPr/>
-          <p:nvPr/>
-        </p:nvSpPr>
-        <p:spPr>
-          <a:xfrm>
-            <a:off x="10710367" y="6382512"/>
+          <p:cNvPr id="19" name="Text 17"/>
+          <p:cNvSpPr/>
+          <p:nvPr/>
+        </p:nvSpPr>
+        <p:spPr>
+          <a:xfrm>
+            <a:off x="10774375" y="6382512"/>
             <a:ext cx="914400" cy="219456"/>
           </a:xfrm>
           <a:prstGeom prst="rect">
@@ -4842,7 +4262,7 @@
         </p:nvSpPr>
         <p:spPr>
           <a:xfrm>
-            <a:off x="566928" y="457200"/>
+            <a:off x="502920" y="457200"/>
             <a:ext cx="384048" cy="384048"/>
           </a:xfrm>
           <a:prstGeom prst="ellipse">
@@ -4862,7 +4282,7 @@
         </p:nvSpPr>
         <p:spPr>
           <a:xfrm>
-            <a:off x="566928" y="457200"/>
+            <a:off x="502920" y="457200"/>
             <a:ext cx="384048" cy="384048"/>
           </a:xfrm>
           <a:prstGeom prst="rect">
@@ -4901,7 +4321,7 @@
         </p:nvSpPr>
         <p:spPr>
           <a:xfrm>
-            <a:off x="1133856" y="457200"/>
+            <a:off x="1069848" y="457200"/>
             <a:ext cx="10490911" cy="182880"/>
           </a:xfrm>
           <a:prstGeom prst="rect">
@@ -4926,7 +4346,7 @@
                 <a:ea typeface="Arial" pitchFamily="34" charset="-122"/>
                 <a:cs typeface="Arial" pitchFamily="34" charset="-120"/>
               </a:rPr>
-              <a:t>Process</a:t>
+              <a:t>Checklist</a:t>
             </a:r>
             <a:endParaRPr lang="en-US" sz="950" dirty="0"/>
           </a:p>
@@ -4940,7 +4360,7 @@
         </p:nvSpPr>
         <p:spPr>
           <a:xfrm>
-            <a:off x="1133856" y="640080"/>
+            <a:off x="1069848" y="640080"/>
             <a:ext cx="10490911" cy="365760"/>
           </a:xfrm>
           <a:prstGeom prst="rect">
@@ -4965,7 +4385,7 @@
                 <a:ea typeface="Pretendard" pitchFamily="34" charset="-122"/>
                 <a:cs typeface="Pretendard" pitchFamily="34" charset="-120"/>
               </a:rPr>
-              <a:t>진행 절차</a:t>
+              <a:t>실사 체크리스트</a:t>
             </a:r>
             <a:endParaRPr lang="en-US" sz="2300" dirty="0"/>
           </a:p>
@@ -4973,26 +4393,63 @@
       </p:sp>
       <p:sp>
         <p:nvSpPr>
-          <p:cNvPr id="6" name="Shape 4"/>
-          <p:cNvSpPr/>
-          <p:nvPr/>
-        </p:nvSpPr>
-        <p:spPr>
-          <a:xfrm>
-            <a:off x="566928" y="1572768"/>
-            <a:ext cx="11057839" cy="3200400"/>
-          </a:xfrm>
-          <a:prstGeom prst="roundRect">
-            <a:avLst>
-              <a:gd name="adj" fmla="val 1714"/>
-            </a:avLst>
+          <p:cNvPr id="6" name="Text 4"/>
+          <p:cNvSpPr/>
+          <p:nvPr/>
+        </p:nvSpPr>
+        <p:spPr>
+          <a:xfrm>
+            <a:off x="502920" y="1371600"/>
+            <a:ext cx="11057839" cy="237744"/>
+          </a:xfrm>
+          <a:prstGeom prst="rect">
+            <a:avLst/>
+          </a:prstGeom>
+          <a:noFill/>
+          <a:ln/>
+        </p:spPr>
+        <p:txBody>
+          <a:bodyPr wrap="square" lIns="0" tIns="0" rIns="0" bIns="0" rtlCol="0" anchor="ctr"/>
+          <a:lstStyle/>
+          <a:p>
+            <a:pPr indent="0" marL="0">
+              <a:buNone/>
+            </a:pPr>
+            <a:r>
+              <a:rPr lang="en-US" sz="1100" b="1" dirty="0">
+                <a:solidFill>
+                  <a:srgbClr val="10161F"/>
+                </a:solidFill>
+                <a:latin typeface="Pretendard" pitchFamily="34" charset="0"/>
+                <a:ea typeface="Pretendard" pitchFamily="34" charset="-122"/>
+                <a:cs typeface="Pretendard" pitchFamily="34" charset="-120"/>
+              </a:rPr>
+              <a:t>거래 안정성 확보를 위한 필수 법률·물리·임대차 실사 점검 항목 (총 6건)</a:t>
+            </a:r>
+            <a:endParaRPr lang="en-US" sz="1100" dirty="0"/>
+          </a:p>
+        </p:txBody>
+      </p:sp>
+      <p:sp>
+        <p:nvSpPr>
+          <p:cNvPr id="7" name="Shape 5"/>
+          <p:cNvSpPr/>
+          <p:nvPr/>
+        </p:nvSpPr>
+        <p:spPr>
+          <a:xfrm>
+            <a:off x="502920" y="1719072"/>
+            <a:ext cx="5368900" cy="868680"/>
+          </a:xfrm>
+          <a:prstGeom prst="rect">
+            <a:avLst/>
           </a:prstGeom>
           <a:solidFill>
             <a:srgbClr val="F7FAFC"/>
           </a:solidFill>
           <a:ln w="6350">
             <a:solidFill>
-              <a:srgbClr val="CBD5E0"/>
+              <a:srgbClr val="D9B668"/>
             </a:solidFill>
             <a:prstDash val="solid"/>
           </a:ln>
@@ -5000,99 +4457,60 @@
       </p:sp>
       <p:sp>
         <p:nvSpPr>
-          <p:cNvPr id="7" name="Shape 5"/>
-          <p:cNvSpPr/>
-          <p:nvPr/>
-        </p:nvSpPr>
-        <p:spPr>
-          <a:xfrm>
-            <a:off x="786384" y="1792224"/>
-            <a:ext cx="438912" cy="438912"/>
-          </a:xfrm>
-          <a:prstGeom prst="ellipse">
+          <p:cNvPr id="8" name="Shape 6"/>
+          <p:cNvSpPr/>
+          <p:nvPr/>
+        </p:nvSpPr>
+        <p:spPr>
+          <a:xfrm>
+            <a:off x="640080" y="1883664"/>
+            <a:ext cx="320040" cy="320040"/>
+          </a:xfrm>
+          <a:prstGeom prst="rect">
             <a:avLst/>
           </a:prstGeom>
           <a:solidFill>
-            <a:srgbClr val="B98A2E"/>
+            <a:srgbClr val="977024"/>
           </a:solidFill>
           <a:ln/>
         </p:spPr>
       </p:sp>
       <p:sp>
         <p:nvSpPr>
-          <p:cNvPr id="8" name="Text 6"/>
-          <p:cNvSpPr/>
-          <p:nvPr/>
-        </p:nvSpPr>
-        <p:spPr>
-          <a:xfrm>
-            <a:off x="786384" y="1792224"/>
-            <a:ext cx="438912" cy="438912"/>
-          </a:xfrm>
-          <a:prstGeom prst="rect">
-            <a:avLst/>
-          </a:prstGeom>
-          <a:noFill/>
-          <a:ln/>
-        </p:spPr>
-        <p:txBody>
-          <a:bodyPr wrap="square" lIns="0" tIns="0" rIns="0" bIns="0" rtlCol="0" anchor="ctr"/>
+          <p:cNvPr id="9" name="Text 7"/>
+          <p:cNvSpPr/>
+          <p:nvPr/>
+        </p:nvSpPr>
+        <p:spPr>
+          <a:xfrm>
+            <a:off x="640080" y="1883664"/>
+            <a:ext cx="320040" cy="320040"/>
+          </a:xfrm>
+          <a:prstGeom prst="rect">
+            <a:avLst/>
+          </a:prstGeom>
+          <a:noFill/>
+          <a:ln/>
+        </p:spPr>
+        <p:txBody>
+          <a:bodyPr wrap="square" rtlCol="0" anchor="ctr"/>
           <a:lstStyle/>
           <a:p>
             <a:pPr algn="ctr" indent="0" marL="0">
               <a:buNone/>
             </a:pPr>
             <a:r>
-              <a:rPr lang="en-US" sz="1400" b="1" dirty="0">
+              <a:rPr lang="en-US" sz="1100" b="1" dirty="0">
                 <a:solidFill>
                   <a:srgbClr val="FFFFFF"/>
-                </a:solidFill>
-                <a:latin typeface="Arial" pitchFamily="34" charset="0"/>
-                <a:ea typeface="Arial" pitchFamily="34" charset="-122"/>
-                <a:cs typeface="Arial" pitchFamily="34" charset="-120"/>
-              </a:rPr>
-              <a:t>01</a:t>
-            </a:r>
-            <a:endParaRPr lang="en-US" sz="1400" dirty="0"/>
-          </a:p>
-        </p:txBody>
-      </p:sp>
-      <p:sp>
-        <p:nvSpPr>
-          <p:cNvPr id="9" name="Text 7"/>
-          <p:cNvSpPr/>
-          <p:nvPr/>
-        </p:nvSpPr>
-        <p:spPr>
-          <a:xfrm>
-            <a:off x="786384" y="2304288"/>
-            <a:ext cx="10618927" cy="365760"/>
-          </a:xfrm>
-          <a:prstGeom prst="rect">
-            <a:avLst/>
-          </a:prstGeom>
-          <a:noFill/>
-          <a:ln/>
-        </p:spPr>
-        <p:txBody>
-          <a:bodyPr wrap="square" rtlCol="0" anchor="ctr"/>
-          <a:lstStyle/>
-          <a:p>
-            <a:pPr indent="0" marL="0">
-              <a:buNone/>
-            </a:pPr>
-            <a:r>
-              <a:rPr lang="en-US" sz="1600" b="1" dirty="0">
-                <a:solidFill>
-                  <a:srgbClr val="10161F"/>
                 </a:solidFill>
                 <a:latin typeface="Pretendard" pitchFamily="34" charset="0"/>
                 <a:ea typeface="Pretendard" pitchFamily="34" charset="-122"/>
                 <a:cs typeface="Pretendard" pitchFamily="34" charset="-120"/>
               </a:rPr>
-              <a:t>1단계</a:t>
-            </a:r>
-            <a:endParaRPr lang="en-US" sz="1600" dirty="0"/>
+              <a:t>✓</a:t>
+            </a:r>
+            <a:endParaRPr lang="en-US" sz="1100" dirty="0"/>
           </a:p>
         </p:txBody>
       </p:sp>
@@ -5104,24 +4522,27 @@
         </p:nvSpPr>
         <p:spPr>
           <a:xfrm>
-            <a:off x="786384" y="2761488"/>
-            <a:ext cx="10618927" cy="1828800"/>
-          </a:xfrm>
-          <a:prstGeom prst="rect">
-            <a:avLst/>
-          </a:prstGeom>
-          <a:noFill/>
-          <a:ln/>
-        </p:spPr>
-        <p:txBody>
-          <a:bodyPr wrap="square" rtlCol="0" anchor="t"/>
+            <a:off x="1051560" y="1810512"/>
+            <a:ext cx="4683100" cy="722376"/>
+          </a:xfrm>
+          <a:prstGeom prst="rect">
+            <a:avLst/>
+          </a:prstGeom>
+          <a:noFill/>
+          <a:ln/>
+        </p:spPr>
+        <p:txBody>
+          <a:bodyPr wrap="square" rtlCol="0" anchor="ctr"/>
           <a:lstStyle/>
           <a:p>
             <a:pPr indent="0" marL="0">
-              <a:buNone/>
-            </a:pPr>
-            <a:r>
-              <a:rPr lang="en-US" sz="1100" dirty="0">
+              <a:lnSpc>
+                <a:spcPct val="110000"/>
+              </a:lnSpc>
+              <a:buNone/>
+            </a:pPr>
+            <a:r>
+              <a:rPr lang="en-US" sz="950" dirty="0">
                 <a:solidFill>
                   <a:srgbClr val="10161F"/>
                 </a:solidFill>
@@ -5129,24 +4550,91 @@
                 <a:ea typeface="Pretendard" pitchFamily="34" charset="-122"/>
                 <a:cs typeface="Pretendard" pitchFamily="34" charset="-120"/>
               </a:rPr>
-              <a:t>현장 실사 및 임대차계약서 원본 확인을 권장합니다.</a:t>
-            </a:r>
-            <a:endParaRPr lang="en-US" sz="1100" dirty="0"/>
-          </a:p>
-          <a:p>
-            <a:pPr indent="0" marL="0">
-              <a:buNone/>
-            </a:pPr>
-            <a:r>
-              <a:rPr lang="en-US" sz="1100" dirty="0">
-                <a:solidFill>
-                  <a:srgbClr val="10161F"/>
+              <a:t>등기부등본 갑구/을구 권리관계 및 근저당 채권최고액 전액 말소 조건 원본 대조</a:t>
+            </a:r>
+            <a:endParaRPr lang="en-US" sz="950" dirty="0"/>
+          </a:p>
+        </p:txBody>
+      </p:sp>
+      <p:sp>
+        <p:nvSpPr>
+          <p:cNvPr id="11" name="Shape 9"/>
+          <p:cNvSpPr/>
+          <p:nvPr/>
+        </p:nvSpPr>
+        <p:spPr>
+          <a:xfrm>
+            <a:off x="502920" y="2715768"/>
+            <a:ext cx="5368900" cy="868680"/>
+          </a:xfrm>
+          <a:prstGeom prst="rect">
+            <a:avLst/>
+          </a:prstGeom>
+          <a:solidFill>
+            <a:srgbClr val="F7FAFC"/>
+          </a:solidFill>
+          <a:ln w="6350">
+            <a:solidFill>
+              <a:srgbClr val="D9B668"/>
+            </a:solidFill>
+            <a:prstDash val="solid"/>
+          </a:ln>
+        </p:spPr>
+      </p:sp>
+      <p:sp>
+        <p:nvSpPr>
+          <p:cNvPr id="12" name="Shape 10"/>
+          <p:cNvSpPr/>
+          <p:nvPr/>
+        </p:nvSpPr>
+        <p:spPr>
+          <a:xfrm>
+            <a:off x="640080" y="2880360"/>
+            <a:ext cx="320040" cy="320040"/>
+          </a:xfrm>
+          <a:prstGeom prst="rect">
+            <a:avLst/>
+          </a:prstGeom>
+          <a:solidFill>
+            <a:srgbClr val="977024"/>
+          </a:solidFill>
+          <a:ln/>
+        </p:spPr>
+      </p:sp>
+      <p:sp>
+        <p:nvSpPr>
+          <p:cNvPr id="13" name="Text 11"/>
+          <p:cNvSpPr/>
+          <p:nvPr/>
+        </p:nvSpPr>
+        <p:spPr>
+          <a:xfrm>
+            <a:off x="640080" y="2880360"/>
+            <a:ext cx="320040" cy="320040"/>
+          </a:xfrm>
+          <a:prstGeom prst="rect">
+            <a:avLst/>
+          </a:prstGeom>
+          <a:noFill/>
+          <a:ln/>
+        </p:spPr>
+        <p:txBody>
+          <a:bodyPr wrap="square" rtlCol="0" anchor="ctr"/>
+          <a:lstStyle/>
+          <a:p>
+            <a:pPr algn="ctr" indent="0" marL="0">
+              <a:buNone/>
+            </a:pPr>
+            <a:r>
+              <a:rPr lang="en-US" sz="1100" b="1" dirty="0">
+                <a:solidFill>
+                  <a:srgbClr val="FFFFFF"/>
                 </a:solidFill>
                 <a:latin typeface="Pretendard" pitchFamily="34" charset="0"/>
                 <a:ea typeface="Pretendard" pitchFamily="34" charset="-122"/>
                 <a:cs typeface="Pretendard" pitchFamily="34" charset="-120"/>
               </a:rPr>
-              <a:t>현장 실사 및 임대차계약서 원본 확인을 권장합니다.</a:t>
+              <a:t>✓</a:t>
             </a:r>
             <a:endParaRPr lang="en-US" sz="1100" dirty="0"/>
           </a:p>
@@ -5154,37 +4642,642 @@
       </p:sp>
       <p:sp>
         <p:nvSpPr>
-          <p:cNvPr id="11" name="Text 9"/>
-          <p:cNvSpPr/>
-          <p:nvPr/>
-        </p:nvSpPr>
-        <p:spPr>
-          <a:xfrm>
-            <a:off x="566928" y="6382512"/>
-            <a:ext cx="7315200" cy="219456"/>
-          </a:xfrm>
-          <a:prstGeom prst="rect">
-            <a:avLst/>
-          </a:prstGeom>
-          <a:noFill/>
-          <a:ln/>
-        </p:spPr>
-        <p:txBody>
-          <a:bodyPr wrap="square" lIns="0" tIns="0" rIns="0" bIns="0" rtlCol="0" anchor="ctr"/>
+          <p:cNvPr id="14" name="Text 12"/>
+          <p:cNvSpPr/>
+          <p:nvPr/>
+        </p:nvSpPr>
+        <p:spPr>
+          <a:xfrm>
+            <a:off x="1051560" y="2807208"/>
+            <a:ext cx="4683100" cy="722376"/>
+          </a:xfrm>
+          <a:prstGeom prst="rect">
+            <a:avLst/>
+          </a:prstGeom>
+          <a:noFill/>
+          <a:ln/>
+        </p:spPr>
+        <p:txBody>
+          <a:bodyPr wrap="square" rtlCol="0" anchor="ctr"/>
           <a:lstStyle/>
           <a:p>
             <a:pPr indent="0" marL="0">
-              <a:buNone/>
-            </a:pPr>
-            <a:r>
-              <a:rPr lang="en-US" sz="800" dirty="0">
-                <a:solidFill>
-                  <a:srgbClr val="718096"/>
+              <a:lnSpc>
+                <a:spcPct val="110000"/>
+              </a:lnSpc>
+              <a:buNone/>
+            </a:pPr>
+            <a:r>
+              <a:rPr lang="en-US" sz="950" dirty="0">
+                <a:solidFill>
+                  <a:srgbClr val="10161F"/>
                 </a:solidFill>
                 <a:latin typeface="Pretendard" pitchFamily="34" charset="0"/>
                 <a:ea typeface="Pretendard" pitchFamily="34" charset="-122"/>
                 <a:cs typeface="Pretendard" pitchFamily="34" charset="-120"/>
               </a:rPr>
+              <a:t>임대차 원본 계약서 대조 (보증금, 월임대료, 관리비 실입금 내역 및 제소전화해조서)</a:t>
+            </a:r>
+            <a:endParaRPr lang="en-US" sz="950" dirty="0"/>
+          </a:p>
+        </p:txBody>
+      </p:sp>
+      <p:sp>
+        <p:nvSpPr>
+          <p:cNvPr id="15" name="Shape 13"/>
+          <p:cNvSpPr/>
+          <p:nvPr/>
+        </p:nvSpPr>
+        <p:spPr>
+          <a:xfrm>
+            <a:off x="502920" y="3712464"/>
+            <a:ext cx="5368900" cy="868680"/>
+          </a:xfrm>
+          <a:prstGeom prst="rect">
+            <a:avLst/>
+          </a:prstGeom>
+          <a:solidFill>
+            <a:srgbClr val="F7FAFC"/>
+          </a:solidFill>
+          <a:ln w="6350">
+            <a:solidFill>
+              <a:srgbClr val="D9B668"/>
+            </a:solidFill>
+            <a:prstDash val="solid"/>
+          </a:ln>
+        </p:spPr>
+      </p:sp>
+      <p:sp>
+        <p:nvSpPr>
+          <p:cNvPr id="16" name="Shape 14"/>
+          <p:cNvSpPr/>
+          <p:nvPr/>
+        </p:nvSpPr>
+        <p:spPr>
+          <a:xfrm>
+            <a:off x="640080" y="3877056"/>
+            <a:ext cx="320040" cy="320040"/>
+          </a:xfrm>
+          <a:prstGeom prst="rect">
+            <a:avLst/>
+          </a:prstGeom>
+          <a:solidFill>
+            <a:srgbClr val="977024"/>
+          </a:solidFill>
+          <a:ln/>
+        </p:spPr>
+      </p:sp>
+      <p:sp>
+        <p:nvSpPr>
+          <p:cNvPr id="17" name="Text 15"/>
+          <p:cNvSpPr/>
+          <p:nvPr/>
+        </p:nvSpPr>
+        <p:spPr>
+          <a:xfrm>
+            <a:off x="640080" y="3877056"/>
+            <a:ext cx="320040" cy="320040"/>
+          </a:xfrm>
+          <a:prstGeom prst="rect">
+            <a:avLst/>
+          </a:prstGeom>
+          <a:noFill/>
+          <a:ln/>
+        </p:spPr>
+        <p:txBody>
+          <a:bodyPr wrap="square" rtlCol="0" anchor="ctr"/>
+          <a:lstStyle/>
+          <a:p>
+            <a:pPr algn="ctr" indent="0" marL="0">
+              <a:buNone/>
+            </a:pPr>
+            <a:r>
+              <a:rPr lang="en-US" sz="1100" b="1" dirty="0">
+                <a:solidFill>
+                  <a:srgbClr val="FFFFFF"/>
+                </a:solidFill>
+                <a:latin typeface="Pretendard" pitchFamily="34" charset="0"/>
+                <a:ea typeface="Pretendard" pitchFamily="34" charset="-122"/>
+                <a:cs typeface="Pretendard" pitchFamily="34" charset="-120"/>
+              </a:rPr>
+              <a:t>✓</a:t>
+            </a:r>
+            <a:endParaRPr lang="en-US" sz="1100" dirty="0"/>
+          </a:p>
+        </p:txBody>
+      </p:sp>
+      <p:sp>
+        <p:nvSpPr>
+          <p:cNvPr id="18" name="Text 16"/>
+          <p:cNvSpPr/>
+          <p:nvPr/>
+        </p:nvSpPr>
+        <p:spPr>
+          <a:xfrm>
+            <a:off x="1051560" y="3803904"/>
+            <a:ext cx="4683100" cy="722376"/>
+          </a:xfrm>
+          <a:prstGeom prst="rect">
+            <a:avLst/>
+          </a:prstGeom>
+          <a:noFill/>
+          <a:ln/>
+        </p:spPr>
+        <p:txBody>
+          <a:bodyPr wrap="square" rtlCol="0" anchor="ctr"/>
+          <a:lstStyle/>
+          <a:p>
+            <a:pPr indent="0" marL="0">
+              <a:lnSpc>
+                <a:spcPct val="110000"/>
+              </a:lnSpc>
+              <a:buNone/>
+            </a:pPr>
+            <a:r>
+              <a:rPr lang="en-US" sz="950" dirty="0">
+                <a:solidFill>
+                  <a:srgbClr val="10161F"/>
+                </a:solidFill>
+                <a:latin typeface="Pretendard" pitchFamily="34" charset="0"/>
+                <a:ea typeface="Pretendard" pitchFamily="34" charset="-122"/>
+                <a:cs typeface="Pretendard" pitchFamily="34" charset="-120"/>
+              </a:rPr>
+              <a:t>건축물대장상 위반건축물 등재 여부 및 불법 증축·용도변경 이행강제금 납부 이력 점검</a:t>
+            </a:r>
+            <a:endParaRPr lang="en-US" sz="950" dirty="0"/>
+          </a:p>
+        </p:txBody>
+      </p:sp>
+      <p:sp>
+        <p:nvSpPr>
+          <p:cNvPr id="19" name="Shape 17"/>
+          <p:cNvSpPr/>
+          <p:nvPr/>
+        </p:nvSpPr>
+        <p:spPr>
+          <a:xfrm>
+            <a:off x="6191860" y="1719072"/>
+            <a:ext cx="5368900" cy="868680"/>
+          </a:xfrm>
+          <a:prstGeom prst="rect">
+            <a:avLst/>
+          </a:prstGeom>
+          <a:solidFill>
+            <a:srgbClr val="F7FAFC"/>
+          </a:solidFill>
+          <a:ln w="6350">
+            <a:solidFill>
+              <a:srgbClr val="D9B668"/>
+            </a:solidFill>
+            <a:prstDash val="solid"/>
+          </a:ln>
+        </p:spPr>
+      </p:sp>
+      <p:sp>
+        <p:nvSpPr>
+          <p:cNvPr id="20" name="Shape 18"/>
+          <p:cNvSpPr/>
+          <p:nvPr/>
+        </p:nvSpPr>
+        <p:spPr>
+          <a:xfrm>
+            <a:off x="6329020" y="1883664"/>
+            <a:ext cx="320040" cy="320040"/>
+          </a:xfrm>
+          <a:prstGeom prst="rect">
+            <a:avLst/>
+          </a:prstGeom>
+          <a:solidFill>
+            <a:srgbClr val="977024"/>
+          </a:solidFill>
+          <a:ln/>
+        </p:spPr>
+      </p:sp>
+      <p:sp>
+        <p:nvSpPr>
+          <p:cNvPr id="21" name="Text 19"/>
+          <p:cNvSpPr/>
+          <p:nvPr/>
+        </p:nvSpPr>
+        <p:spPr>
+          <a:xfrm>
+            <a:off x="6329020" y="1883664"/>
+            <a:ext cx="320040" cy="320040"/>
+          </a:xfrm>
+          <a:prstGeom prst="rect">
+            <a:avLst/>
+          </a:prstGeom>
+          <a:noFill/>
+          <a:ln/>
+        </p:spPr>
+        <p:txBody>
+          <a:bodyPr wrap="square" rtlCol="0" anchor="ctr"/>
+          <a:lstStyle/>
+          <a:p>
+            <a:pPr algn="ctr" indent="0" marL="0">
+              <a:buNone/>
+            </a:pPr>
+            <a:r>
+              <a:rPr lang="en-US" sz="1100" b="1" dirty="0">
+                <a:solidFill>
+                  <a:srgbClr val="FFFFFF"/>
+                </a:solidFill>
+                <a:latin typeface="Pretendard" pitchFamily="34" charset="0"/>
+                <a:ea typeface="Pretendard" pitchFamily="34" charset="-122"/>
+                <a:cs typeface="Pretendard" pitchFamily="34" charset="-120"/>
+              </a:rPr>
+              <a:t>✓</a:t>
+            </a:r>
+            <a:endParaRPr lang="en-US" sz="1100" dirty="0"/>
+          </a:p>
+        </p:txBody>
+      </p:sp>
+      <p:sp>
+        <p:nvSpPr>
+          <p:cNvPr id="22" name="Text 20"/>
+          <p:cNvSpPr/>
+          <p:nvPr/>
+        </p:nvSpPr>
+        <p:spPr>
+          <a:xfrm>
+            <a:off x="6740500" y="1810512"/>
+            <a:ext cx="4683100" cy="722376"/>
+          </a:xfrm>
+          <a:prstGeom prst="rect">
+            <a:avLst/>
+          </a:prstGeom>
+          <a:noFill/>
+          <a:ln/>
+        </p:spPr>
+        <p:txBody>
+          <a:bodyPr wrap="square" rtlCol="0" anchor="ctr"/>
+          <a:lstStyle/>
+          <a:p>
+            <a:pPr indent="0" marL="0">
+              <a:lnSpc>
+                <a:spcPct val="110000"/>
+              </a:lnSpc>
+              <a:buNone/>
+            </a:pPr>
+            <a:r>
+              <a:rPr lang="en-US" sz="950" dirty="0">
+                <a:solidFill>
+                  <a:srgbClr val="10161F"/>
+                </a:solidFill>
+                <a:latin typeface="Pretendard" pitchFamily="34" charset="0"/>
+                <a:ea typeface="Pretendard" pitchFamily="34" charset="-122"/>
+                <a:cs typeface="Pretendard" pitchFamily="34" charset="-120"/>
+              </a:rPr>
+              <a:t>토지이용계획확인원상 도시계획시설 저촉, 건축선 후퇴, 지구단위계획 특별계획구역 확인</a:t>
+            </a:r>
+            <a:endParaRPr lang="en-US" sz="950" dirty="0"/>
+          </a:p>
+        </p:txBody>
+      </p:sp>
+      <p:sp>
+        <p:nvSpPr>
+          <p:cNvPr id="23" name="Shape 21"/>
+          <p:cNvSpPr/>
+          <p:nvPr/>
+        </p:nvSpPr>
+        <p:spPr>
+          <a:xfrm>
+            <a:off x="6191860" y="2715768"/>
+            <a:ext cx="5368900" cy="868680"/>
+          </a:xfrm>
+          <a:prstGeom prst="rect">
+            <a:avLst/>
+          </a:prstGeom>
+          <a:solidFill>
+            <a:srgbClr val="F7FAFC"/>
+          </a:solidFill>
+          <a:ln w="6350">
+            <a:solidFill>
+              <a:srgbClr val="D9B668"/>
+            </a:solidFill>
+            <a:prstDash val="solid"/>
+          </a:ln>
+        </p:spPr>
+      </p:sp>
+      <p:sp>
+        <p:nvSpPr>
+          <p:cNvPr id="24" name="Shape 22"/>
+          <p:cNvSpPr/>
+          <p:nvPr/>
+        </p:nvSpPr>
+        <p:spPr>
+          <a:xfrm>
+            <a:off x="6329020" y="2880360"/>
+            <a:ext cx="320040" cy="320040"/>
+          </a:xfrm>
+          <a:prstGeom prst="rect">
+            <a:avLst/>
+          </a:prstGeom>
+          <a:solidFill>
+            <a:srgbClr val="977024"/>
+          </a:solidFill>
+          <a:ln/>
+        </p:spPr>
+      </p:sp>
+      <p:sp>
+        <p:nvSpPr>
+          <p:cNvPr id="25" name="Text 23"/>
+          <p:cNvSpPr/>
+          <p:nvPr/>
+        </p:nvSpPr>
+        <p:spPr>
+          <a:xfrm>
+            <a:off x="6329020" y="2880360"/>
+            <a:ext cx="320040" cy="320040"/>
+          </a:xfrm>
+          <a:prstGeom prst="rect">
+            <a:avLst/>
+          </a:prstGeom>
+          <a:noFill/>
+          <a:ln/>
+        </p:spPr>
+        <p:txBody>
+          <a:bodyPr wrap="square" rtlCol="0" anchor="ctr"/>
+          <a:lstStyle/>
+          <a:p>
+            <a:pPr algn="ctr" indent="0" marL="0">
+              <a:buNone/>
+            </a:pPr>
+            <a:r>
+              <a:rPr lang="en-US" sz="1100" b="1" dirty="0">
+                <a:solidFill>
+                  <a:srgbClr val="FFFFFF"/>
+                </a:solidFill>
+                <a:latin typeface="Pretendard" pitchFamily="34" charset="0"/>
+                <a:ea typeface="Pretendard" pitchFamily="34" charset="-122"/>
+                <a:cs typeface="Pretendard" pitchFamily="34" charset="-120"/>
+              </a:rPr>
+              <a:t>✓</a:t>
+            </a:r>
+            <a:endParaRPr lang="en-US" sz="1100" dirty="0"/>
+          </a:p>
+        </p:txBody>
+      </p:sp>
+      <p:sp>
+        <p:nvSpPr>
+          <p:cNvPr id="26" name="Text 24"/>
+          <p:cNvSpPr/>
+          <p:nvPr/>
+        </p:nvSpPr>
+        <p:spPr>
+          <a:xfrm>
+            <a:off x="6740500" y="2807208"/>
+            <a:ext cx="4683100" cy="722376"/>
+          </a:xfrm>
+          <a:prstGeom prst="rect">
+            <a:avLst/>
+          </a:prstGeom>
+          <a:noFill/>
+          <a:ln/>
+        </p:spPr>
+        <p:txBody>
+          <a:bodyPr wrap="square" rtlCol="0" anchor="ctr"/>
+          <a:lstStyle/>
+          <a:p>
+            <a:pPr indent="0" marL="0">
+              <a:lnSpc>
+                <a:spcPct val="110000"/>
+              </a:lnSpc>
+              <a:buNone/>
+            </a:pPr>
+            <a:r>
+              <a:rPr lang="en-US" sz="950" dirty="0">
+                <a:solidFill>
+                  <a:srgbClr val="10161F"/>
+                </a:solidFill>
+                <a:latin typeface="Pretendard" pitchFamily="34" charset="0"/>
+                <a:ea typeface="Pretendard" pitchFamily="34" charset="-122"/>
+                <a:cs typeface="Pretendard" pitchFamily="34" charset="-120"/>
+              </a:rPr>
+              <a:t>기계식 주차기 정기 안전점검 합격증, 승강기 검사필증, 소방 완비증명서 실물 실사</a:t>
+            </a:r>
+            <a:endParaRPr lang="en-US" sz="950" dirty="0"/>
+          </a:p>
+        </p:txBody>
+      </p:sp>
+      <p:sp>
+        <p:nvSpPr>
+          <p:cNvPr id="27" name="Shape 25"/>
+          <p:cNvSpPr/>
+          <p:nvPr/>
+        </p:nvSpPr>
+        <p:spPr>
+          <a:xfrm>
+            <a:off x="6191860" y="3712464"/>
+            <a:ext cx="5368900" cy="868680"/>
+          </a:xfrm>
+          <a:prstGeom prst="rect">
+            <a:avLst/>
+          </a:prstGeom>
+          <a:solidFill>
+            <a:srgbClr val="F7FAFC"/>
+          </a:solidFill>
+          <a:ln w="6350">
+            <a:solidFill>
+              <a:srgbClr val="D9B668"/>
+            </a:solidFill>
+            <a:prstDash val="solid"/>
+          </a:ln>
+        </p:spPr>
+      </p:sp>
+      <p:sp>
+        <p:nvSpPr>
+          <p:cNvPr id="28" name="Shape 26"/>
+          <p:cNvSpPr/>
+          <p:nvPr/>
+        </p:nvSpPr>
+        <p:spPr>
+          <a:xfrm>
+            <a:off x="6329020" y="3877056"/>
+            <a:ext cx="320040" cy="320040"/>
+          </a:xfrm>
+          <a:prstGeom prst="rect">
+            <a:avLst/>
+          </a:prstGeom>
+          <a:solidFill>
+            <a:srgbClr val="977024"/>
+          </a:solidFill>
+          <a:ln/>
+        </p:spPr>
+      </p:sp>
+      <p:sp>
+        <p:nvSpPr>
+          <p:cNvPr id="29" name="Text 27"/>
+          <p:cNvSpPr/>
+          <p:nvPr/>
+        </p:nvSpPr>
+        <p:spPr>
+          <a:xfrm>
+            <a:off x="6329020" y="3877056"/>
+            <a:ext cx="320040" cy="320040"/>
+          </a:xfrm>
+          <a:prstGeom prst="rect">
+            <a:avLst/>
+          </a:prstGeom>
+          <a:noFill/>
+          <a:ln/>
+        </p:spPr>
+        <p:txBody>
+          <a:bodyPr wrap="square" rtlCol="0" anchor="ctr"/>
+          <a:lstStyle/>
+          <a:p>
+            <a:pPr algn="ctr" indent="0" marL="0">
+              <a:buNone/>
+            </a:pPr>
+            <a:r>
+              <a:rPr lang="en-US" sz="1100" b="1" dirty="0">
+                <a:solidFill>
+                  <a:srgbClr val="FFFFFF"/>
+                </a:solidFill>
+                <a:latin typeface="Pretendard" pitchFamily="34" charset="0"/>
+                <a:ea typeface="Pretendard" pitchFamily="34" charset="-122"/>
+                <a:cs typeface="Pretendard" pitchFamily="34" charset="-120"/>
+              </a:rPr>
+              <a:t>✓</a:t>
+            </a:r>
+            <a:endParaRPr lang="en-US" sz="1100" dirty="0"/>
+          </a:p>
+        </p:txBody>
+      </p:sp>
+      <p:sp>
+        <p:nvSpPr>
+          <p:cNvPr id="30" name="Text 28"/>
+          <p:cNvSpPr/>
+          <p:nvPr/>
+        </p:nvSpPr>
+        <p:spPr>
+          <a:xfrm>
+            <a:off x="6740500" y="3803904"/>
+            <a:ext cx="4683100" cy="722376"/>
+          </a:xfrm>
+          <a:prstGeom prst="rect">
+            <a:avLst/>
+          </a:prstGeom>
+          <a:noFill/>
+          <a:ln/>
+        </p:spPr>
+        <p:txBody>
+          <a:bodyPr wrap="square" rtlCol="0" anchor="ctr"/>
+          <a:lstStyle/>
+          <a:p>
+            <a:pPr indent="0" marL="0">
+              <a:lnSpc>
+                <a:spcPct val="110000"/>
+              </a:lnSpc>
+              <a:buNone/>
+            </a:pPr>
+            <a:r>
+              <a:rPr lang="en-US" sz="950" dirty="0">
+                <a:solidFill>
+                  <a:srgbClr val="10161F"/>
+                </a:solidFill>
+                <a:latin typeface="Pretendard" pitchFamily="34" charset="0"/>
+                <a:ea typeface="Pretendard" pitchFamily="34" charset="-122"/>
+                <a:cs typeface="Pretendard" pitchFamily="34" charset="-120"/>
+              </a:rPr>
+              <a:t>정화조 용량 대비 현 업종 적합성 및 하수도 원인자부담금 추가 부과 대상 여부 확인</a:t>
+            </a:r>
+            <a:endParaRPr lang="en-US" sz="950" dirty="0"/>
+          </a:p>
+        </p:txBody>
+      </p:sp>
+      <p:sp>
+        <p:nvSpPr>
+          <p:cNvPr id="31" name="Shape 29"/>
+          <p:cNvSpPr/>
+          <p:nvPr/>
+        </p:nvSpPr>
+        <p:spPr>
+          <a:xfrm>
+            <a:off x="502920" y="5349240"/>
+            <a:ext cx="11057839" cy="457200"/>
+          </a:xfrm>
+          <a:prstGeom prst="rect">
+            <a:avLst/>
+          </a:prstGeom>
+          <a:solidFill>
+            <a:srgbClr val="D9B668"/>
+          </a:solidFill>
+          <a:ln/>
+        </p:spPr>
+      </p:sp>
+      <p:sp>
+        <p:nvSpPr>
+          <p:cNvPr id="32" name="Text 30"/>
+          <p:cNvSpPr/>
+          <p:nvPr/>
+        </p:nvSpPr>
+        <p:spPr>
+          <a:xfrm>
+            <a:off x="685800" y="5422392"/>
+            <a:ext cx="10692079" cy="310896"/>
+          </a:xfrm>
+          <a:prstGeom prst="rect">
+            <a:avLst/>
+          </a:prstGeom>
+          <a:noFill/>
+          <a:ln/>
+        </p:spPr>
+        <p:txBody>
+          <a:bodyPr wrap="square" rtlCol="0" anchor="ctr"/>
+          <a:lstStyle/>
+          <a:p>
+            <a:pPr indent="0" marL="0">
+              <a:buNone/>
+            </a:pPr>
+            <a:r>
+              <a:rPr lang="en-US" sz="950" b="1" dirty="0">
+                <a:solidFill>
+                  <a:srgbClr val="977024"/>
+                </a:solidFill>
+                <a:latin typeface="Pretendard" pitchFamily="34" charset="0"/>
+                <a:ea typeface="Pretendard" pitchFamily="34" charset="-122"/>
+                <a:cs typeface="Pretendard" pitchFamily="34" charset="-120"/>
+              </a:rPr>
+              <a:t>※ 본 체크리스트는 계약 전 매수인의 안전한 자산 인수를 위한 필수 확인 사항이며, 실사(Due Diligence) 결과에 따라 매매 조건 및 잔금 일정이 조정될 수 있습니다.</a:t>
+            </a:r>
+            <a:endParaRPr lang="en-US" sz="950" dirty="0"/>
+          </a:p>
+        </p:txBody>
+      </p:sp>
+      <p:sp>
+        <p:nvSpPr>
+          <p:cNvPr id="33" name="Text 31"/>
+          <p:cNvSpPr/>
+          <p:nvPr/>
+        </p:nvSpPr>
+        <p:spPr>
+          <a:xfrm>
+            <a:off x="502920" y="6382512"/>
+            <a:ext cx="7315200" cy="219456"/>
+          </a:xfrm>
+          <a:prstGeom prst="rect">
+            <a:avLst/>
+          </a:prstGeom>
+          <a:noFill/>
+          <a:ln/>
+        </p:spPr>
+        <p:txBody>
+          <a:bodyPr wrap="square" lIns="0" tIns="0" rIns="0" bIns="0" rtlCol="0" anchor="ctr"/>
+          <a:lstStyle/>
+          <a:p>
+            <a:pPr indent="0" marL="0">
+              <a:buNone/>
+            </a:pPr>
+            <a:r>
+              <a:rPr lang="en-US" sz="800" dirty="0">
+                <a:solidFill>
+                  <a:srgbClr val="718096"/>
+                </a:solidFill>
+                <a:latin typeface="Pretendard" pitchFamily="34" charset="0"/>
+                <a:ea typeface="Pretendard" pitchFamily="34" charset="-122"/>
+                <a:cs typeface="Pretendard" pitchFamily="34" charset="-120"/>
+              </a:rPr>
               <a:t>크리딜   |   </a:t>
             </a:r>
             <a:endParaRPr lang="en-US" sz="800" dirty="0"/>
@@ -5193,13 +5286,13 @@
       </p:sp>
       <p:sp>
         <p:nvSpPr>
-          <p:cNvPr id="12" name="Text 10"/>
-          <p:cNvSpPr/>
-          <p:nvPr/>
-        </p:nvSpPr>
-        <p:spPr>
-          <a:xfrm>
-            <a:off x="10710367" y="6382512"/>
+          <p:cNvPr id="34" name="Text 32"/>
+          <p:cNvSpPr/>
+          <p:nvPr/>
+        </p:nvSpPr>
+        <p:spPr>
+          <a:xfrm>
+            <a:off x="10774375" y="6382512"/>
             <a:ext cx="914400" cy="219456"/>
           </a:xfrm>
           <a:prstGeom prst="rect">
@@ -5241,6 +5334,434 @@
 <file path=ppt/slides/slide14.xml><?xml version="1.0" encoding="utf-8"?>
 <p:sld xmlns:a="http://schemas.openxmlformats.org/drawingml/2006/main" xmlns:r="http://schemas.openxmlformats.org/officeDocument/2006/relationships" xmlns:p="http://schemas.openxmlformats.org/presentationml/2006/main">
   <p:cSld name="Slide 14">
+    <p:bg>
+      <p:bgPr>
+        <a:solidFill>
+          <a:srgbClr val="FFFFFF"/>
+        </a:solidFill>
+      </p:bgPr>
+    </p:bg>
+    <p:spTree>
+      <p:nvGrpSpPr>
+        <p:cNvPr id="1" name=""/>
+        <p:cNvGrpSpPr/>
+        <p:nvPr/>
+      </p:nvGrpSpPr>
+      <p:grpSpPr>
+        <a:xfrm>
+          <a:off x="0" y="0"/>
+          <a:ext cx="0" cy="0"/>
+          <a:chOff x="0" y="0"/>
+          <a:chExt cx="0" cy="0"/>
+        </a:xfrm>
+      </p:grpSpPr>
+      <p:sp>
+        <p:nvSpPr>
+          <p:cNvPr id="2" name="Shape 0"/>
+          <p:cNvSpPr/>
+          <p:nvPr/>
+        </p:nvSpPr>
+        <p:spPr>
+          <a:xfrm>
+            <a:off x="502920" y="457200"/>
+            <a:ext cx="384048" cy="384048"/>
+          </a:xfrm>
+          <a:prstGeom prst="ellipse">
+            <a:avLst/>
+          </a:prstGeom>
+          <a:solidFill>
+            <a:srgbClr val="B98A2E"/>
+          </a:solidFill>
+          <a:ln/>
+        </p:spPr>
+      </p:sp>
+      <p:sp>
+        <p:nvSpPr>
+          <p:cNvPr id="3" name="Text 1"/>
+          <p:cNvSpPr/>
+          <p:nvPr/>
+        </p:nvSpPr>
+        <p:spPr>
+          <a:xfrm>
+            <a:off x="502920" y="457200"/>
+            <a:ext cx="384048" cy="384048"/>
+          </a:xfrm>
+          <a:prstGeom prst="rect">
+            <a:avLst/>
+          </a:prstGeom>
+          <a:noFill/>
+          <a:ln/>
+        </p:spPr>
+        <p:txBody>
+          <a:bodyPr wrap="square" lIns="0" tIns="0" rIns="0" bIns="0" rtlCol="0" anchor="ctr"/>
+          <a:lstStyle/>
+          <a:p>
+            <a:pPr algn="ctr" indent="0" marL="0">
+              <a:buNone/>
+            </a:pPr>
+            <a:r>
+              <a:rPr lang="en-US" sz="1300" b="1" dirty="0">
+                <a:solidFill>
+                  <a:srgbClr val="FFFFFF"/>
+                </a:solidFill>
+                <a:latin typeface="Arial" pitchFamily="34" charset="0"/>
+                <a:ea typeface="Arial" pitchFamily="34" charset="-122"/>
+                <a:cs typeface="Arial" pitchFamily="34" charset="-120"/>
+              </a:rPr>
+              <a:t>14</a:t>
+            </a:r>
+            <a:endParaRPr lang="en-US" sz="1300" dirty="0"/>
+          </a:p>
+        </p:txBody>
+      </p:sp>
+      <p:sp>
+        <p:nvSpPr>
+          <p:cNvPr id="4" name="Text 2"/>
+          <p:cNvSpPr/>
+          <p:nvPr/>
+        </p:nvSpPr>
+        <p:spPr>
+          <a:xfrm>
+            <a:off x="1069848" y="457200"/>
+            <a:ext cx="10490911" cy="182880"/>
+          </a:xfrm>
+          <a:prstGeom prst="rect">
+            <a:avLst/>
+          </a:prstGeom>
+          <a:noFill/>
+          <a:ln/>
+        </p:spPr>
+        <p:txBody>
+          <a:bodyPr wrap="square" lIns="0" tIns="0" rIns="0" bIns="0" rtlCol="0" anchor="ctr"/>
+          <a:lstStyle/>
+          <a:p>
+            <a:pPr indent="0" marL="0">
+              <a:buNone/>
+            </a:pPr>
+            <a:r>
+              <a:rPr lang="en-US" sz="950" b="1" spc="200" kern="0" dirty="0">
+                <a:solidFill>
+                  <a:srgbClr val="B98A2E"/>
+                </a:solidFill>
+                <a:latin typeface="Arial" pitchFamily="34" charset="0"/>
+                <a:ea typeface="Arial" pitchFamily="34" charset="-122"/>
+                <a:cs typeface="Arial" pitchFamily="34" charset="-120"/>
+              </a:rPr>
+              <a:t>Process</a:t>
+            </a:r>
+            <a:endParaRPr lang="en-US" sz="950" dirty="0"/>
+          </a:p>
+        </p:txBody>
+      </p:sp>
+      <p:sp>
+        <p:nvSpPr>
+          <p:cNvPr id="5" name="Text 3"/>
+          <p:cNvSpPr/>
+          <p:nvPr/>
+        </p:nvSpPr>
+        <p:spPr>
+          <a:xfrm>
+            <a:off x="1069848" y="640080"/>
+            <a:ext cx="10490911" cy="365760"/>
+          </a:xfrm>
+          <a:prstGeom prst="rect">
+            <a:avLst/>
+          </a:prstGeom>
+          <a:noFill/>
+          <a:ln/>
+        </p:spPr>
+        <p:txBody>
+          <a:bodyPr wrap="square" lIns="0" tIns="0" rIns="0" bIns="0" rtlCol="0" anchor="ctr"/>
+          <a:lstStyle/>
+          <a:p>
+            <a:pPr indent="0" marL="0">
+              <a:buNone/>
+            </a:pPr>
+            <a:r>
+              <a:rPr lang="en-US" sz="2300" b="1" dirty="0">
+                <a:solidFill>
+                  <a:srgbClr val="10161F"/>
+                </a:solidFill>
+                <a:latin typeface="Pretendard" pitchFamily="34" charset="0"/>
+                <a:ea typeface="Pretendard" pitchFamily="34" charset="-122"/>
+                <a:cs typeface="Pretendard" pitchFamily="34" charset="-120"/>
+              </a:rPr>
+              <a:t>진행 절차</a:t>
+            </a:r>
+            <a:endParaRPr lang="en-US" sz="2300" dirty="0"/>
+          </a:p>
+        </p:txBody>
+      </p:sp>
+      <p:sp>
+        <p:nvSpPr>
+          <p:cNvPr id="6" name="Shape 4"/>
+          <p:cNvSpPr/>
+          <p:nvPr/>
+        </p:nvSpPr>
+        <p:spPr>
+          <a:xfrm>
+            <a:off x="502920" y="1572768"/>
+            <a:ext cx="11057839" cy="3200400"/>
+          </a:xfrm>
+          <a:prstGeom prst="roundRect">
+            <a:avLst>
+              <a:gd name="adj" fmla="val 1714"/>
+            </a:avLst>
+          </a:prstGeom>
+          <a:solidFill>
+            <a:srgbClr val="F7FAFC"/>
+          </a:solidFill>
+          <a:ln w="6350">
+            <a:solidFill>
+              <a:srgbClr val="CBD5E0"/>
+            </a:solidFill>
+            <a:prstDash val="solid"/>
+          </a:ln>
+        </p:spPr>
+      </p:sp>
+      <p:sp>
+        <p:nvSpPr>
+          <p:cNvPr id="7" name="Shape 5"/>
+          <p:cNvSpPr/>
+          <p:nvPr/>
+        </p:nvSpPr>
+        <p:spPr>
+          <a:xfrm>
+            <a:off x="722376" y="1792224"/>
+            <a:ext cx="438912" cy="438912"/>
+          </a:xfrm>
+          <a:prstGeom prst="ellipse">
+            <a:avLst/>
+          </a:prstGeom>
+          <a:solidFill>
+            <a:srgbClr val="B98A2E"/>
+          </a:solidFill>
+          <a:ln/>
+        </p:spPr>
+      </p:sp>
+      <p:sp>
+        <p:nvSpPr>
+          <p:cNvPr id="8" name="Text 6"/>
+          <p:cNvSpPr/>
+          <p:nvPr/>
+        </p:nvSpPr>
+        <p:spPr>
+          <a:xfrm>
+            <a:off x="722376" y="1792224"/>
+            <a:ext cx="438912" cy="438912"/>
+          </a:xfrm>
+          <a:prstGeom prst="rect">
+            <a:avLst/>
+          </a:prstGeom>
+          <a:noFill/>
+          <a:ln/>
+        </p:spPr>
+        <p:txBody>
+          <a:bodyPr wrap="square" lIns="0" tIns="0" rIns="0" bIns="0" rtlCol="0" anchor="ctr"/>
+          <a:lstStyle/>
+          <a:p>
+            <a:pPr algn="ctr" indent="0" marL="0">
+              <a:buNone/>
+            </a:pPr>
+            <a:r>
+              <a:rPr lang="en-US" sz="1400" b="1" dirty="0">
+                <a:solidFill>
+                  <a:srgbClr val="FFFFFF"/>
+                </a:solidFill>
+                <a:latin typeface="Arial" pitchFamily="34" charset="0"/>
+                <a:ea typeface="Arial" pitchFamily="34" charset="-122"/>
+                <a:cs typeface="Arial" pitchFamily="34" charset="-120"/>
+              </a:rPr>
+              <a:t>01</a:t>
+            </a:r>
+            <a:endParaRPr lang="en-US" sz="1400" dirty="0"/>
+          </a:p>
+        </p:txBody>
+      </p:sp>
+      <p:sp>
+        <p:nvSpPr>
+          <p:cNvPr id="9" name="Text 7"/>
+          <p:cNvSpPr/>
+          <p:nvPr/>
+        </p:nvSpPr>
+        <p:spPr>
+          <a:xfrm>
+            <a:off x="722376" y="2304288"/>
+            <a:ext cx="10618927" cy="365760"/>
+          </a:xfrm>
+          <a:prstGeom prst="rect">
+            <a:avLst/>
+          </a:prstGeom>
+          <a:noFill/>
+          <a:ln/>
+        </p:spPr>
+        <p:txBody>
+          <a:bodyPr wrap="square" rtlCol="0" anchor="ctr"/>
+          <a:lstStyle/>
+          <a:p>
+            <a:pPr indent="0" marL="0">
+              <a:buNone/>
+            </a:pPr>
+            <a:r>
+              <a:rPr lang="en-US" sz="1600" b="1" dirty="0">
+                <a:solidFill>
+                  <a:srgbClr val="10161F"/>
+                </a:solidFill>
+                <a:latin typeface="Pretendard" pitchFamily="34" charset="0"/>
+                <a:ea typeface="Pretendard" pitchFamily="34" charset="-122"/>
+                <a:cs typeface="Pretendard" pitchFamily="34" charset="-120"/>
+              </a:rPr>
+              <a:t>1단계</a:t>
+            </a:r>
+            <a:endParaRPr lang="en-US" sz="1600" dirty="0"/>
+          </a:p>
+        </p:txBody>
+      </p:sp>
+      <p:sp>
+        <p:nvSpPr>
+          <p:cNvPr id="10" name="Text 8"/>
+          <p:cNvSpPr/>
+          <p:nvPr/>
+        </p:nvSpPr>
+        <p:spPr>
+          <a:xfrm>
+            <a:off x="722376" y="2761488"/>
+            <a:ext cx="10618927" cy="1828800"/>
+          </a:xfrm>
+          <a:prstGeom prst="rect">
+            <a:avLst/>
+          </a:prstGeom>
+          <a:noFill/>
+          <a:ln/>
+        </p:spPr>
+        <p:txBody>
+          <a:bodyPr wrap="square" rtlCol="0" anchor="t"/>
+          <a:lstStyle/>
+          <a:p>
+            <a:pPr indent="0" marL="0">
+              <a:buNone/>
+            </a:pPr>
+            <a:r>
+              <a:rPr lang="en-US" sz="1100" dirty="0">
+                <a:solidFill>
+                  <a:srgbClr val="10161F"/>
+                </a:solidFill>
+                <a:latin typeface="Pretendard" pitchFamily="34" charset="0"/>
+                <a:ea typeface="Pretendard" pitchFamily="34" charset="-122"/>
+                <a:cs typeface="Pretendard" pitchFamily="34" charset="-120"/>
+              </a:rPr>
+              <a:t>현장 실사 및 임대차계약서 원본 확인을 권장합니다.</a:t>
+            </a:r>
+            <a:endParaRPr lang="en-US" sz="1100" dirty="0"/>
+          </a:p>
+          <a:p>
+            <a:pPr indent="0" marL="0">
+              <a:buNone/>
+            </a:pPr>
+            <a:r>
+              <a:rPr lang="en-US" sz="1100" dirty="0">
+                <a:solidFill>
+                  <a:srgbClr val="10161F"/>
+                </a:solidFill>
+                <a:latin typeface="Pretendard" pitchFamily="34" charset="0"/>
+                <a:ea typeface="Pretendard" pitchFamily="34" charset="-122"/>
+                <a:cs typeface="Pretendard" pitchFamily="34" charset="-120"/>
+              </a:rPr>
+              <a:t>현장 실사 및 임대차계약서 원본 확인을 권장합니다.</a:t>
+            </a:r>
+            <a:endParaRPr lang="en-US" sz="1100" dirty="0"/>
+          </a:p>
+        </p:txBody>
+      </p:sp>
+      <p:sp>
+        <p:nvSpPr>
+          <p:cNvPr id="11" name="Text 9"/>
+          <p:cNvSpPr/>
+          <p:nvPr/>
+        </p:nvSpPr>
+        <p:spPr>
+          <a:xfrm>
+            <a:off x="502920" y="6382512"/>
+            <a:ext cx="7315200" cy="219456"/>
+          </a:xfrm>
+          <a:prstGeom prst="rect">
+            <a:avLst/>
+          </a:prstGeom>
+          <a:noFill/>
+          <a:ln/>
+        </p:spPr>
+        <p:txBody>
+          <a:bodyPr wrap="square" lIns="0" tIns="0" rIns="0" bIns="0" rtlCol="0" anchor="ctr"/>
+          <a:lstStyle/>
+          <a:p>
+            <a:pPr indent="0" marL="0">
+              <a:buNone/>
+            </a:pPr>
+            <a:r>
+              <a:rPr lang="en-US" sz="800" dirty="0">
+                <a:solidFill>
+                  <a:srgbClr val="718096"/>
+                </a:solidFill>
+                <a:latin typeface="Pretendard" pitchFamily="34" charset="0"/>
+                <a:ea typeface="Pretendard" pitchFamily="34" charset="-122"/>
+                <a:cs typeface="Pretendard" pitchFamily="34" charset="-120"/>
+              </a:rPr>
+              <a:t>크리딜   |   </a:t>
+            </a:r>
+            <a:endParaRPr lang="en-US" sz="800" dirty="0"/>
+          </a:p>
+        </p:txBody>
+      </p:sp>
+      <p:sp>
+        <p:nvSpPr>
+          <p:cNvPr id="12" name="Text 10"/>
+          <p:cNvSpPr/>
+          <p:nvPr/>
+        </p:nvSpPr>
+        <p:spPr>
+          <a:xfrm>
+            <a:off x="10774375" y="6382512"/>
+            <a:ext cx="914400" cy="219456"/>
+          </a:xfrm>
+          <a:prstGeom prst="rect">
+            <a:avLst/>
+          </a:prstGeom>
+          <a:noFill/>
+          <a:ln/>
+        </p:spPr>
+        <p:txBody>
+          <a:bodyPr wrap="square" lIns="0" tIns="0" rIns="0" bIns="0" rtlCol="0" anchor="ctr"/>
+          <a:lstStyle/>
+          <a:p>
+            <a:pPr algn="r" indent="0" marL="0">
+              <a:buNone/>
+            </a:pPr>
+            <a:r>
+              <a:rPr lang="en-US" sz="900" b="1" dirty="0">
+                <a:solidFill>
+                  <a:srgbClr val="B98A2E"/>
+                </a:solidFill>
+                <a:latin typeface="Arial" pitchFamily="34" charset="0"/>
+                <a:ea typeface="Arial" pitchFamily="34" charset="-122"/>
+                <a:cs typeface="Arial" pitchFamily="34" charset="-120"/>
+              </a:rPr>
+              <a:t>14</a:t>
+            </a:r>
+            <a:endParaRPr lang="en-US" sz="900" dirty="0"/>
+          </a:p>
+        </p:txBody>
+      </p:sp>
+    </p:spTree>
+  </p:cSld>
+  <p:clrMapOvr>
+    <a:masterClrMapping/>
+  </p:clrMapOvr>
+</p:sld>
+</file>
+
+<file path=ppt/slides/slide15.xml><?xml version="1.0" encoding="utf-8"?>
+<p:sld xmlns:a="http://schemas.openxmlformats.org/drawingml/2006/main" xmlns:r="http://schemas.openxmlformats.org/officeDocument/2006/relationships" xmlns:p="http://schemas.openxmlformats.org/presentationml/2006/main">
+  <p:cSld name="Slide 15">
     <p:bg>
       <p:bgPr>
         <a:solidFill>
@@ -5270,7 +5791,7 @@
         </p:nvSpPr>
         <p:spPr>
           <a:xfrm>
-            <a:off x="566928" y="457200"/>
+            <a:off x="502920" y="457200"/>
             <a:ext cx="384048" cy="384048"/>
           </a:xfrm>
           <a:prstGeom prst="ellipse">
@@ -5290,7 +5811,7 @@
         </p:nvSpPr>
         <p:spPr>
           <a:xfrm>
-            <a:off x="566928" y="457200"/>
+            <a:off x="502920" y="457200"/>
             <a:ext cx="384048" cy="384048"/>
           </a:xfrm>
           <a:prstGeom prst="rect">
@@ -5315,7 +5836,7 @@
                 <a:ea typeface="Arial" pitchFamily="34" charset="-122"/>
                 <a:cs typeface="Arial" pitchFamily="34" charset="-120"/>
               </a:rPr>
-              <a:t>14</a:t>
+              <a:t>15</a:t>
             </a:r>
             <a:endParaRPr lang="en-US" sz="1300" dirty="0"/>
           </a:p>
@@ -5329,7 +5850,7 @@
         </p:nvSpPr>
         <p:spPr>
           <a:xfrm>
-            <a:off x="1133856" y="457200"/>
+            <a:off x="1069848" y="457200"/>
             <a:ext cx="10490911" cy="182880"/>
           </a:xfrm>
           <a:prstGeom prst="rect">
@@ -5368,7 +5889,7 @@
         </p:nvSpPr>
         <p:spPr>
           <a:xfrm>
-            <a:off x="1133856" y="658368"/>
+            <a:off x="1069848" y="658368"/>
             <a:ext cx="10490911" cy="420624"/>
           </a:xfrm>
           <a:prstGeom prst="rect">
@@ -5407,7 +5928,7 @@
         </p:nvSpPr>
         <p:spPr>
           <a:xfrm>
-            <a:off x="566928" y="1463040"/>
+            <a:off x="502920" y="1463040"/>
             <a:ext cx="3588410" cy="658368"/>
           </a:xfrm>
           <a:prstGeom prst="roundRect">
@@ -5429,7 +5950,7 @@
         </p:nvSpPr>
         <p:spPr>
           <a:xfrm>
-            <a:off x="676656" y="1572768"/>
+            <a:off x="612648" y="1572768"/>
             <a:ext cx="438912" cy="438912"/>
           </a:xfrm>
           <a:prstGeom prst="ellipse">
@@ -5449,7 +5970,7 @@
         </p:nvSpPr>
         <p:spPr>
           <a:xfrm>
-            <a:off x="676656" y="1572768"/>
+            <a:off x="612648" y="1572768"/>
             <a:ext cx="438912" cy="438912"/>
           </a:xfrm>
           <a:prstGeom prst="rect">
@@ -5488,7 +6009,7 @@
         </p:nvSpPr>
         <p:spPr>
           <a:xfrm>
-            <a:off x="1225296" y="1554480"/>
+            <a:off x="1161288" y="1554480"/>
             <a:ext cx="2820314" cy="237744"/>
           </a:xfrm>
           <a:prstGeom prst="rect">
@@ -5527,7 +6048,7 @@
         </p:nvSpPr>
         <p:spPr>
           <a:xfrm>
-            <a:off x="1225296" y="1792224"/>
+            <a:off x="1161288" y="1792224"/>
             <a:ext cx="2820314" cy="256032"/>
           </a:xfrm>
           <a:prstGeom prst="rect">
@@ -5566,7 +6087,7 @@
         </p:nvSpPr>
         <p:spPr>
           <a:xfrm>
-            <a:off x="4155338" y="1600200"/>
+            <a:off x="4091330" y="1600200"/>
             <a:ext cx="146304" cy="384048"/>
           </a:xfrm>
           <a:prstGeom prst="rect">
@@ -5605,7 +6126,7 @@
         </p:nvSpPr>
         <p:spPr>
           <a:xfrm>
-            <a:off x="4301642" y="1463040"/>
+            <a:off x="4237634" y="1463040"/>
             <a:ext cx="3588410" cy="658368"/>
           </a:xfrm>
           <a:prstGeom prst="roundRect">
@@ -5627,7 +6148,7 @@
         </p:nvSpPr>
         <p:spPr>
           <a:xfrm>
-            <a:off x="4411370" y="1572768"/>
+            <a:off x="4347362" y="1572768"/>
             <a:ext cx="438912" cy="438912"/>
           </a:xfrm>
           <a:prstGeom prst="ellipse">
@@ -5647,7 +6168,7 @@
         </p:nvSpPr>
         <p:spPr>
           <a:xfrm>
-            <a:off x="4411370" y="1572768"/>
+            <a:off x="4347362" y="1572768"/>
             <a:ext cx="438912" cy="438912"/>
           </a:xfrm>
           <a:prstGeom prst="rect">
@@ -5686,7 +6207,7 @@
         </p:nvSpPr>
         <p:spPr>
           <a:xfrm>
-            <a:off x="4960010" y="1554480"/>
+            <a:off x="4896002" y="1554480"/>
             <a:ext cx="2820314" cy="237744"/>
           </a:xfrm>
           <a:prstGeom prst="rect">
@@ -5725,7 +6246,7 @@
         </p:nvSpPr>
         <p:spPr>
           <a:xfrm>
-            <a:off x="4960010" y="1792224"/>
+            <a:off x="4896002" y="1792224"/>
             <a:ext cx="2820314" cy="256032"/>
           </a:xfrm>
           <a:prstGeom prst="rect">
@@ -5764,7 +6285,7 @@
         </p:nvSpPr>
         <p:spPr>
           <a:xfrm>
-            <a:off x="7890053" y="1600200"/>
+            <a:off x="7826045" y="1600200"/>
             <a:ext cx="146304" cy="384048"/>
           </a:xfrm>
           <a:prstGeom prst="rect">
@@ -5803,7 +6324,7 @@
         </p:nvSpPr>
         <p:spPr>
           <a:xfrm>
-            <a:off x="8036357" y="1463040"/>
+            <a:off x="7972349" y="1463040"/>
             <a:ext cx="3588410" cy="658368"/>
           </a:xfrm>
           <a:prstGeom prst="roundRect">
@@ -5825,7 +6346,7 @@
         </p:nvSpPr>
         <p:spPr>
           <a:xfrm>
-            <a:off x="8146085" y="1572768"/>
+            <a:off x="8082077" y="1572768"/>
             <a:ext cx="438912" cy="438912"/>
           </a:xfrm>
           <a:prstGeom prst="ellipse">
@@ -5845,7 +6366,7 @@
         </p:nvSpPr>
         <p:spPr>
           <a:xfrm>
-            <a:off x="8146085" y="1572768"/>
+            <a:off x="8082077" y="1572768"/>
             <a:ext cx="438912" cy="438912"/>
           </a:xfrm>
           <a:prstGeom prst="rect">
@@ -5884,7 +6405,7 @@
         </p:nvSpPr>
         <p:spPr>
           <a:xfrm>
-            <a:off x="8694725" y="1554480"/>
+            <a:off x="8630717" y="1554480"/>
             <a:ext cx="2820314" cy="237744"/>
           </a:xfrm>
           <a:prstGeom prst="rect">
@@ -5923,7 +6444,7 @@
         </p:nvSpPr>
         <p:spPr>
           <a:xfrm>
-            <a:off x="8694725" y="1792224"/>
+            <a:off x="8630717" y="1792224"/>
             <a:ext cx="2820314" cy="256032"/>
           </a:xfrm>
           <a:prstGeom prst="rect">
@@ -5962,7 +6483,7 @@
         </p:nvSpPr>
         <p:spPr>
           <a:xfrm>
-            <a:off x="566928" y="2395728"/>
+            <a:off x="502920" y="2395728"/>
             <a:ext cx="5486400" cy="237744"/>
           </a:xfrm>
           <a:prstGeom prst="rect">
@@ -6001,7 +6522,7 @@
         </p:nvSpPr>
         <p:spPr>
           <a:xfrm>
-            <a:off x="566928" y="2724912"/>
+            <a:off x="502920" y="2724912"/>
             <a:ext cx="1280160" cy="292608"/>
           </a:xfrm>
           <a:prstGeom prst="roundRect">
@@ -6023,7 +6544,7 @@
         </p:nvSpPr>
         <p:spPr>
           <a:xfrm>
-            <a:off x="566928" y="2724912"/>
+            <a:off x="502920" y="2724912"/>
             <a:ext cx="1280160" cy="292608"/>
           </a:xfrm>
           <a:prstGeom prst="rect">
@@ -6062,7 +6583,7 @@
         </p:nvSpPr>
         <p:spPr>
           <a:xfrm>
-            <a:off x="1993392" y="2706624"/>
+            <a:off x="1929384" y="2706624"/>
             <a:ext cx="3840480" cy="329184"/>
           </a:xfrm>
           <a:prstGeom prst="rect">
@@ -6101,7 +6622,7 @@
         </p:nvSpPr>
         <p:spPr>
           <a:xfrm>
-            <a:off x="566928" y="3200400"/>
+            <a:off x="502920" y="3127248"/>
             <a:ext cx="1280160" cy="292608"/>
           </a:xfrm>
           <a:prstGeom prst="roundRect">
@@ -6123,7 +6644,7 @@
         </p:nvSpPr>
         <p:spPr>
           <a:xfrm>
-            <a:off x="566928" y="3200400"/>
+            <a:off x="502920" y="3127248"/>
             <a:ext cx="1280160" cy="292608"/>
           </a:xfrm>
           <a:prstGeom prst="rect">
@@ -6162,7 +6683,7 @@
         </p:nvSpPr>
         <p:spPr>
           <a:xfrm>
-            <a:off x="1993392" y="3182112"/>
+            <a:off x="1929384" y="3108960"/>
             <a:ext cx="3840480" cy="329184"/>
           </a:xfrm>
           <a:prstGeom prst="rect">
@@ -6201,7 +6722,7 @@
         </p:nvSpPr>
         <p:spPr>
           <a:xfrm>
-            <a:off x="566928" y="3675888"/>
+            <a:off x="502920" y="3529584"/>
             <a:ext cx="1280160" cy="292608"/>
           </a:xfrm>
           <a:prstGeom prst="roundRect">
@@ -6223,7 +6744,7 @@
         </p:nvSpPr>
         <p:spPr>
           <a:xfrm>
-            <a:off x="566928" y="3675888"/>
+            <a:off x="502920" y="3529584"/>
             <a:ext cx="1280160" cy="292608"/>
           </a:xfrm>
           <a:prstGeom prst="rect">
@@ -6262,7 +6783,7 @@
         </p:nvSpPr>
         <p:spPr>
           <a:xfrm>
-            <a:off x="1993392" y="3657600"/>
+            <a:off x="1929384" y="3511296"/>
             <a:ext cx="3840480" cy="329184"/>
           </a:xfrm>
           <a:prstGeom prst="rect">
@@ -6301,7 +6822,7 @@
         </p:nvSpPr>
         <p:spPr>
           <a:xfrm>
-            <a:off x="566928" y="4151376"/>
+            <a:off x="502920" y="3931920"/>
             <a:ext cx="1280160" cy="292608"/>
           </a:xfrm>
           <a:prstGeom prst="roundRect">
@@ -6323,7 +6844,7 @@
         </p:nvSpPr>
         <p:spPr>
           <a:xfrm>
-            <a:off x="566928" y="4151376"/>
+            <a:off x="502920" y="3931920"/>
             <a:ext cx="1280160" cy="292608"/>
           </a:xfrm>
           <a:prstGeom prst="rect">
@@ -6362,7 +6883,7 @@
         </p:nvSpPr>
         <p:spPr>
           <a:xfrm>
-            <a:off x="1993392" y="4133088"/>
+            <a:off x="1929384" y="3913632"/>
             <a:ext cx="3840480" cy="329184"/>
           </a:xfrm>
           <a:prstGeom prst="rect">
@@ -6401,7 +6922,7 @@
         </p:nvSpPr>
         <p:spPr>
           <a:xfrm>
-            <a:off x="566928" y="4626864"/>
+            <a:off x="502920" y="4334256"/>
             <a:ext cx="1280160" cy="292608"/>
           </a:xfrm>
           <a:prstGeom prst="roundRect">
@@ -6423,7 +6944,7 @@
         </p:nvSpPr>
         <p:spPr>
           <a:xfrm>
-            <a:off x="566928" y="4626864"/>
+            <a:off x="502920" y="4334256"/>
             <a:ext cx="1280160" cy="292608"/>
           </a:xfrm>
           <a:prstGeom prst="rect">
@@ -6462,7 +6983,7 @@
         </p:nvSpPr>
         <p:spPr>
           <a:xfrm>
-            <a:off x="1993392" y="4608576"/>
+            <a:off x="1929384" y="4315968"/>
             <a:ext cx="3840480" cy="329184"/>
           </a:xfrm>
           <a:prstGeom prst="rect">
@@ -6604,7 +7125,7 @@
         </p:nvSpPr>
         <p:spPr>
           <a:xfrm>
-            <a:off x="566928" y="5760720"/>
+            <a:off x="502920" y="5760720"/>
             <a:ext cx="11057839" cy="457200"/>
           </a:xfrm>
           <a:prstGeom prst="rect">
@@ -6624,7 +7145,7 @@
         </p:nvSpPr>
         <p:spPr>
           <a:xfrm>
-            <a:off x="749808" y="5806440"/>
+            <a:off x="685800" y="5806440"/>
             <a:ext cx="10692079" cy="365760"/>
           </a:xfrm>
           <a:prstGeom prst="rect">
@@ -6663,7 +7184,7 @@
         </p:nvSpPr>
         <p:spPr>
           <a:xfrm>
-            <a:off x="566928" y="6382512"/>
+            <a:off x="502920" y="6382512"/>
             <a:ext cx="7315200" cy="219456"/>
           </a:xfrm>
           <a:prstGeom prst="rect">
@@ -6702,7 +7223,7 @@
         </p:nvSpPr>
         <p:spPr>
           <a:xfrm>
-            <a:off x="10710367" y="6382512"/>
+            <a:off x="10774375" y="6382512"/>
             <a:ext cx="914400" cy="219456"/>
           </a:xfrm>
           <a:prstGeom prst="rect">
@@ -6727,7 +7248,7 @@
                 <a:ea typeface="Arial" pitchFamily="34" charset="-122"/>
                 <a:cs typeface="Arial" pitchFamily="34" charset="-120"/>
               </a:rPr>
-              <a:t>14</a:t>
+              <a:t>15</a:t>
             </a:r>
             <a:endParaRPr lang="en-US" sz="900" dirty="0"/>
           </a:p>
@@ -6773,7 +7294,7 @@
         </p:nvSpPr>
         <p:spPr>
           <a:xfrm>
-            <a:off x="566928" y="457200"/>
+            <a:off x="502920" y="457200"/>
             <a:ext cx="384048" cy="384048"/>
           </a:xfrm>
           <a:prstGeom prst="ellipse">
@@ -6793,7 +7314,7 @@
         </p:nvSpPr>
         <p:spPr>
           <a:xfrm>
-            <a:off x="566928" y="457200"/>
+            <a:off x="502920" y="457200"/>
             <a:ext cx="384048" cy="384048"/>
           </a:xfrm>
           <a:prstGeom prst="rect">
@@ -6832,7 +7353,7 @@
         </p:nvSpPr>
         <p:spPr>
           <a:xfrm>
-            <a:off x="1133856" y="457200"/>
+            <a:off x="1069848" y="457200"/>
             <a:ext cx="10490911" cy="182880"/>
           </a:xfrm>
           <a:prstGeom prst="rect">
@@ -6871,7 +7392,7 @@
         </p:nvSpPr>
         <p:spPr>
           <a:xfrm>
-            <a:off x="1133856" y="640080"/>
+            <a:off x="1069848" y="640080"/>
             <a:ext cx="10490911" cy="365760"/>
           </a:xfrm>
           <a:prstGeom prst="rect">
@@ -6910,7 +7431,7 @@
         </p:nvSpPr>
         <p:spPr>
           <a:xfrm>
-            <a:off x="566928" y="1188720"/>
+            <a:off x="502920" y="1188720"/>
             <a:ext cx="11057839" cy="457200"/>
           </a:xfrm>
           <a:prstGeom prst="rect">
@@ -6949,7 +7470,7 @@
         </p:nvSpPr>
         <p:spPr>
           <a:xfrm>
-            <a:off x="566928" y="1691640"/>
+            <a:off x="502920" y="1691640"/>
             <a:ext cx="11057839" cy="0"/>
           </a:xfrm>
           <a:prstGeom prst="line">
@@ -6972,7 +7493,7 @@
         </p:nvSpPr>
         <p:spPr>
           <a:xfrm>
-            <a:off x="566928" y="1965960"/>
+            <a:off x="502920" y="1965960"/>
             <a:ext cx="2641016" cy="960120"/>
           </a:xfrm>
           <a:prstGeom prst="roundRect">
@@ -6999,7 +7520,7 @@
         </p:nvSpPr>
         <p:spPr>
           <a:xfrm>
-            <a:off x="731520" y="2093976"/>
+            <a:off x="667512" y="2093976"/>
             <a:ext cx="2311832" cy="201168"/>
           </a:xfrm>
           <a:prstGeom prst="rect">
@@ -7038,7 +7559,7 @@
         </p:nvSpPr>
         <p:spPr>
           <a:xfrm>
-            <a:off x="731520" y="2313432"/>
+            <a:off x="667512" y="2313432"/>
             <a:ext cx="2311832" cy="274320"/>
           </a:xfrm>
           <a:prstGeom prst="rect">
@@ -7079,7 +7600,7 @@
         </p:nvSpPr>
         <p:spPr>
           <a:xfrm>
-            <a:off x="3372536" y="1965960"/>
+            <a:off x="3308528" y="1965960"/>
             <a:ext cx="2641016" cy="960120"/>
           </a:xfrm>
           <a:prstGeom prst="roundRect">
@@ -7106,7 +7627,7 @@
         </p:nvSpPr>
         <p:spPr>
           <a:xfrm>
-            <a:off x="3537128" y="2093976"/>
+            <a:off x="3473120" y="2093976"/>
             <a:ext cx="2311832" cy="201168"/>
           </a:xfrm>
           <a:prstGeom prst="rect">
@@ -7145,7 +7666,7 @@
         </p:nvSpPr>
         <p:spPr>
           <a:xfrm>
-            <a:off x="3537128" y="2313432"/>
+            <a:off x="3473120" y="2313432"/>
             <a:ext cx="2311832" cy="274320"/>
           </a:xfrm>
           <a:prstGeom prst="rect">
@@ -7186,7 +7707,7 @@
         </p:nvSpPr>
         <p:spPr>
           <a:xfrm>
-            <a:off x="6178144" y="1965960"/>
+            <a:off x="6114136" y="1965960"/>
             <a:ext cx="2641016" cy="960120"/>
           </a:xfrm>
           <a:prstGeom prst="roundRect">
@@ -7213,7 +7734,7 @@
         </p:nvSpPr>
         <p:spPr>
           <a:xfrm>
-            <a:off x="6342736" y="2093976"/>
+            <a:off x="6278728" y="2093976"/>
             <a:ext cx="2311832" cy="201168"/>
           </a:xfrm>
           <a:prstGeom prst="rect">
@@ -7252,7 +7773,7 @@
         </p:nvSpPr>
         <p:spPr>
           <a:xfrm>
-            <a:off x="6342736" y="2313432"/>
+            <a:off x="6278728" y="2313432"/>
             <a:ext cx="2311832" cy="274320"/>
           </a:xfrm>
           <a:prstGeom prst="rect">
@@ -7293,7 +7814,7 @@
         </p:nvSpPr>
         <p:spPr>
           <a:xfrm>
-            <a:off x="8983751" y="1965960"/>
+            <a:off x="8919743" y="1965960"/>
             <a:ext cx="2641016" cy="960120"/>
           </a:xfrm>
           <a:prstGeom prst="roundRect">
@@ -7320,7 +7841,7 @@
         </p:nvSpPr>
         <p:spPr>
           <a:xfrm>
-            <a:off x="9148343" y="2093976"/>
+            <a:off x="9084335" y="2093976"/>
             <a:ext cx="2311832" cy="201168"/>
           </a:xfrm>
           <a:prstGeom prst="rect">
@@ -7359,7 +7880,7 @@
         </p:nvSpPr>
         <p:spPr>
           <a:xfrm>
-            <a:off x="9148343" y="2313432"/>
+            <a:off x="9084335" y="2313432"/>
             <a:ext cx="2311832" cy="274320"/>
           </a:xfrm>
           <a:prstGeom prst="rect">
@@ -7400,7 +7921,7 @@
         </p:nvSpPr>
         <p:spPr>
           <a:xfrm>
-            <a:off x="566928" y="3090672"/>
+            <a:off x="502920" y="3090672"/>
             <a:ext cx="2641016" cy="960120"/>
           </a:xfrm>
           <a:prstGeom prst="roundRect">
@@ -7427,7 +7948,7 @@
         </p:nvSpPr>
         <p:spPr>
           <a:xfrm>
-            <a:off x="731520" y="3218688"/>
+            <a:off x="667512" y="3218688"/>
             <a:ext cx="2311832" cy="201168"/>
           </a:xfrm>
           <a:prstGeom prst="rect">
@@ -7466,7 +7987,7 @@
         </p:nvSpPr>
         <p:spPr>
           <a:xfrm>
-            <a:off x="731520" y="3438144"/>
+            <a:off x="667512" y="3438144"/>
             <a:ext cx="2311832" cy="274320"/>
           </a:xfrm>
           <a:prstGeom prst="rect">
@@ -7507,7 +8028,7 @@
         </p:nvSpPr>
         <p:spPr>
           <a:xfrm>
-            <a:off x="3372536" y="3090672"/>
+            <a:off x="3308528" y="3090672"/>
             <a:ext cx="2641016" cy="960120"/>
           </a:xfrm>
           <a:prstGeom prst="roundRect">
@@ -7534,7 +8055,7 @@
         </p:nvSpPr>
         <p:spPr>
           <a:xfrm>
-            <a:off x="3537128" y="3218688"/>
+            <a:off x="3473120" y="3218688"/>
             <a:ext cx="2311832" cy="201168"/>
           </a:xfrm>
           <a:prstGeom prst="rect">
@@ -7573,7 +8094,7 @@
         </p:nvSpPr>
         <p:spPr>
           <a:xfrm>
-            <a:off x="3537128" y="3438144"/>
+            <a:off x="3473120" y="3438144"/>
             <a:ext cx="2311832" cy="274320"/>
           </a:xfrm>
           <a:prstGeom prst="rect">
@@ -7614,7 +8135,7 @@
         </p:nvSpPr>
         <p:spPr>
           <a:xfrm>
-            <a:off x="6178144" y="3090672"/>
+            <a:off x="6114136" y="3090672"/>
             <a:ext cx="2641016" cy="960120"/>
           </a:xfrm>
           <a:prstGeom prst="roundRect">
@@ -7641,7 +8162,7 @@
         </p:nvSpPr>
         <p:spPr>
           <a:xfrm>
-            <a:off x="6342736" y="3218688"/>
+            <a:off x="6278728" y="3218688"/>
             <a:ext cx="2311832" cy="201168"/>
           </a:xfrm>
           <a:prstGeom prst="rect">
@@ -7680,7 +8201,7 @@
         </p:nvSpPr>
         <p:spPr>
           <a:xfrm>
-            <a:off x="6342736" y="3438144"/>
+            <a:off x="6278728" y="3438144"/>
             <a:ext cx="2311832" cy="274320"/>
           </a:xfrm>
           <a:prstGeom prst="rect">
@@ -7721,7 +8242,7 @@
         </p:nvSpPr>
         <p:spPr>
           <a:xfrm>
-            <a:off x="8983751" y="3090672"/>
+            <a:off x="8919743" y="3090672"/>
             <a:ext cx="2641016" cy="960120"/>
           </a:xfrm>
           <a:prstGeom prst="roundRect">
@@ -7748,7 +8269,7 @@
         </p:nvSpPr>
         <p:spPr>
           <a:xfrm>
-            <a:off x="9148343" y="3218688"/>
+            <a:off x="9084335" y="3218688"/>
             <a:ext cx="2311832" cy="201168"/>
           </a:xfrm>
           <a:prstGeom prst="rect">
@@ -7787,7 +8308,7 @@
         </p:nvSpPr>
         <p:spPr>
           <a:xfrm>
-            <a:off x="9148343" y="3438144"/>
+            <a:off x="9084335" y="3438144"/>
             <a:ext cx="2311832" cy="274320"/>
           </a:xfrm>
           <a:prstGeom prst="rect">
@@ -7828,7 +8349,7 @@
         </p:nvSpPr>
         <p:spPr>
           <a:xfrm>
-            <a:off x="566928" y="4306824"/>
+            <a:off x="502920" y="4306824"/>
             <a:ext cx="11057839" cy="274320"/>
           </a:xfrm>
           <a:prstGeom prst="rect">
@@ -7867,7 +8388,7 @@
         </p:nvSpPr>
         <p:spPr>
           <a:xfrm>
-            <a:off x="566928" y="4636008"/>
+            <a:off x="502920" y="4636008"/>
             <a:ext cx="11057839" cy="396240"/>
           </a:xfrm>
           <a:prstGeom prst="roundRect">
@@ -7894,7 +8415,7 @@
         </p:nvSpPr>
         <p:spPr>
           <a:xfrm>
-            <a:off x="676656" y="4709160"/>
+            <a:off x="612648" y="4709160"/>
             <a:ext cx="411480" cy="249936"/>
           </a:xfrm>
           <a:prstGeom prst="roundRect">
@@ -7921,7 +8442,7 @@
         </p:nvSpPr>
         <p:spPr>
           <a:xfrm>
-            <a:off x="676656" y="4709160"/>
+            <a:off x="612648" y="4709160"/>
             <a:ext cx="411480" cy="249936"/>
           </a:xfrm>
           <a:prstGeom prst="rect">
@@ -7960,7 +8481,7 @@
         </p:nvSpPr>
         <p:spPr>
           <a:xfrm>
-            <a:off x="1207008" y="4672584"/>
+            <a:off x="1143000" y="4672584"/>
             <a:ext cx="10280599" cy="323088"/>
           </a:xfrm>
           <a:prstGeom prst="rect">
@@ -7999,7 +8520,7 @@
         </p:nvSpPr>
         <p:spPr>
           <a:xfrm>
-            <a:off x="566928" y="5114544"/>
+            <a:off x="502920" y="5114544"/>
             <a:ext cx="11057839" cy="396240"/>
           </a:xfrm>
           <a:prstGeom prst="roundRect">
@@ -8026,7 +8547,7 @@
         </p:nvSpPr>
         <p:spPr>
           <a:xfrm>
-            <a:off x="676656" y="5187696"/>
+            <a:off x="612648" y="5187696"/>
             <a:ext cx="411480" cy="249936"/>
           </a:xfrm>
           <a:prstGeom prst="roundRect">
@@ -8053,7 +8574,7 @@
         </p:nvSpPr>
         <p:spPr>
           <a:xfrm>
-            <a:off x="676656" y="5187696"/>
+            <a:off x="612648" y="5187696"/>
             <a:ext cx="411480" cy="249936"/>
           </a:xfrm>
           <a:prstGeom prst="rect">
@@ -8092,7 +8613,7 @@
         </p:nvSpPr>
         <p:spPr>
           <a:xfrm>
-            <a:off x="1207008" y="5151120"/>
+            <a:off x="1143000" y="5151120"/>
             <a:ext cx="10280599" cy="323088"/>
           </a:xfrm>
           <a:prstGeom prst="rect">
@@ -8131,7 +8652,7 @@
         </p:nvSpPr>
         <p:spPr>
           <a:xfrm>
-            <a:off x="566928" y="5593080"/>
+            <a:off x="502920" y="5593080"/>
             <a:ext cx="11057839" cy="396240"/>
           </a:xfrm>
           <a:prstGeom prst="roundRect">
@@ -8158,7 +8679,7 @@
         </p:nvSpPr>
         <p:spPr>
           <a:xfrm>
-            <a:off x="676656" y="5666232"/>
+            <a:off x="612648" y="5666232"/>
             <a:ext cx="411480" cy="249936"/>
           </a:xfrm>
           <a:prstGeom prst="roundRect">
@@ -8185,7 +8706,7 @@
         </p:nvSpPr>
         <p:spPr>
           <a:xfrm>
-            <a:off x="676656" y="5666232"/>
+            <a:off x="612648" y="5666232"/>
             <a:ext cx="411480" cy="249936"/>
           </a:xfrm>
           <a:prstGeom prst="rect">
@@ -8224,7 +8745,7 @@
         </p:nvSpPr>
         <p:spPr>
           <a:xfrm>
-            <a:off x="1207008" y="5629656"/>
+            <a:off x="1143000" y="5629656"/>
             <a:ext cx="10280599" cy="323088"/>
           </a:xfrm>
           <a:prstGeom prst="rect">
@@ -8263,7 +8784,7 @@
         </p:nvSpPr>
         <p:spPr>
           <a:xfrm>
-            <a:off x="566928" y="6382512"/>
+            <a:off x="502920" y="6382512"/>
             <a:ext cx="7315200" cy="219456"/>
           </a:xfrm>
           <a:prstGeom prst="rect">
@@ -8302,7 +8823,7 @@
         </p:nvSpPr>
         <p:spPr>
           <a:xfrm>
-            <a:off x="10710367" y="6382512"/>
+            <a:off x="10774375" y="6382512"/>
             <a:ext cx="914400" cy="219456"/>
           </a:xfrm>
           <a:prstGeom prst="rect">
@@ -8373,7 +8894,7 @@
         </p:nvSpPr>
         <p:spPr>
           <a:xfrm>
-            <a:off x="566928" y="457200"/>
+            <a:off x="502920" y="457200"/>
             <a:ext cx="384048" cy="384048"/>
           </a:xfrm>
           <a:prstGeom prst="ellipse">
@@ -8393,7 +8914,7 @@
         </p:nvSpPr>
         <p:spPr>
           <a:xfrm>
-            <a:off x="566928" y="457200"/>
+            <a:off x="502920" y="457200"/>
             <a:ext cx="384048" cy="384048"/>
           </a:xfrm>
           <a:prstGeom prst="rect">
@@ -8432,7 +8953,7 @@
         </p:nvSpPr>
         <p:spPr>
           <a:xfrm>
-            <a:off x="1133856" y="457200"/>
+            <a:off x="1069848" y="457200"/>
             <a:ext cx="10490911" cy="182880"/>
           </a:xfrm>
           <a:prstGeom prst="rect">
@@ -8457,7 +8978,7 @@
                 <a:ea typeface="Arial" pitchFamily="34" charset="-122"/>
                 <a:cs typeface="Arial" pitchFamily="34" charset="-120"/>
               </a:rPr>
-              <a:t>Land</a:t>
+              <a:t>Location</a:t>
             </a:r>
             <a:endParaRPr lang="en-US" sz="950" dirty="0"/>
           </a:p>
@@ -8471,7 +8992,7 @@
         </p:nvSpPr>
         <p:spPr>
           <a:xfrm>
-            <a:off x="1133856" y="640080"/>
+            <a:off x="1069848" y="640080"/>
             <a:ext cx="10490911" cy="365760"/>
           </a:xfrm>
           <a:prstGeom prst="rect">
@@ -8496,22 +9017,46 @@
                 <a:ea typeface="Pretendard" pitchFamily="34" charset="-122"/>
                 <a:cs typeface="Pretendard" pitchFamily="34" charset="-120"/>
               </a:rPr>
-              <a:t>토지 현황</a:t>
+              <a:t>입지 분석</a:t>
             </a:r>
             <a:endParaRPr lang="en-US" sz="2300" dirty="0"/>
           </a:p>
         </p:txBody>
       </p:sp>
-      <p:sp>
-        <p:nvSpPr>
-          <p:cNvPr id="6" name="Text 4"/>
-          <p:cNvSpPr/>
-          <p:nvPr/>
-        </p:nvSpPr>
-        <p:spPr>
-          <a:xfrm>
-            <a:off x="566928" y="1371600"/>
-            <a:ext cx="6858000" cy="237744"/>
+      <p:pic>
+        <p:nvPicPr>
+          <p:cNvPr id="6" name="Image 0" descr="preencoded.png">    </p:cNvPr>
+          <p:cNvPicPr>
+            <a:picLocks noChangeAspect="1"/>
+          </p:cNvPicPr>
+          <p:nvPr/>
+        </p:nvPicPr>
+        <p:blipFill>
+          <a:blip r:embed="rId1"/>
+          <a:stretch>
+            <a:fillRect/>
+          </a:stretch>
+        </p:blipFill>
+        <p:spPr>
+          <a:xfrm>
+            <a:off x="502920" y="1481328"/>
+            <a:ext cx="5120640" cy="4114800"/>
+          </a:xfrm>
+          <a:prstGeom prst="rect">
+            <a:avLst/>
+          </a:prstGeom>
+        </p:spPr>
+      </p:pic>
+      <p:sp>
+        <p:nvSpPr>
+          <p:cNvPr id="7" name="Text 4"/>
+          <p:cNvSpPr/>
+          <p:nvPr/>
+        </p:nvSpPr>
+        <p:spPr>
+          <a:xfrm>
+            <a:off x="5989320" y="1481328"/>
+            <a:ext cx="1560003" cy="493776"/>
           </a:xfrm>
           <a:prstGeom prst="rect">
             <a:avLst/>
@@ -8524,33 +9069,36 @@
           <a:lstStyle/>
           <a:p>
             <a:pPr indent="0" marL="0">
-              <a:buNone/>
-            </a:pPr>
-            <a:r>
-              <a:rPr lang="en-US" sz="1100" b="1" dirty="0">
-                <a:solidFill>
-                  <a:srgbClr val="10161F"/>
+              <a:lnSpc>
+                <a:spcPct val="115000"/>
+              </a:lnSpc>
+              <a:buNone/>
+            </a:pPr>
+            <a:r>
+              <a:rPr lang="en-US" sz="1300" dirty="0">
+                <a:solidFill>
+                  <a:srgbClr val="718096"/>
                 </a:solidFill>
                 <a:latin typeface="Pretendard" pitchFamily="34" charset="0"/>
                 <a:ea typeface="Pretendard" pitchFamily="34" charset="-122"/>
                 <a:cs typeface="Pretendard" pitchFamily="34" charset="-120"/>
               </a:rPr>
-              <a:t>토지 현황</a:t>
-            </a:r>
-            <a:endParaRPr lang="en-US" sz="1100" dirty="0"/>
-          </a:p>
-        </p:txBody>
-      </p:sp>
-      <p:sp>
-        <p:nvSpPr>
-          <p:cNvPr id="7" name="Text 5"/>
-          <p:cNvSpPr/>
-          <p:nvPr/>
-        </p:nvSpPr>
-        <p:spPr>
-          <a:xfrm>
-            <a:off x="566928" y="1645920"/>
-            <a:ext cx="2606040" cy="438912"/>
+              <a:t>대중교통</a:t>
+            </a:r>
+            <a:endParaRPr lang="en-US" sz="1300" dirty="0"/>
+          </a:p>
+        </p:txBody>
+      </p:sp>
+      <p:sp>
+        <p:nvSpPr>
+          <p:cNvPr id="8" name="Text 5"/>
+          <p:cNvSpPr/>
+          <p:nvPr/>
+        </p:nvSpPr>
+        <p:spPr>
+          <a:xfrm>
+            <a:off x="7549323" y="1481328"/>
+            <a:ext cx="4011436" cy="493776"/>
           </a:xfrm>
           <a:prstGeom prst="rect">
             <a:avLst/>
@@ -8564,77 +9112,35 @@
           <a:p>
             <a:pPr indent="0" marL="0">
               <a:lnSpc>
-                <a:spcPct val="120000"/>
+                <a:spcPct val="115000"/>
               </a:lnSpc>
               <a:buNone/>
             </a:pPr>
             <a:r>
-              <a:rPr lang="en-US" sz="1350" dirty="0">
-                <a:solidFill>
-                  <a:srgbClr val="718096"/>
+              <a:rPr lang="en-US" sz="1300" b="1" dirty="0">
+                <a:solidFill>
+                  <a:srgbClr val="10161F"/>
                 </a:solidFill>
                 <a:latin typeface="Pretendard" pitchFamily="34" charset="0"/>
                 <a:ea typeface="Pretendard" pitchFamily="34" charset="-122"/>
                 <a:cs typeface="Pretendard" pitchFamily="34" charset="-120"/>
               </a:rPr>
-              <a:t>대지면적</a:t>
-            </a:r>
-            <a:endParaRPr lang="en-US" sz="1350" dirty="0"/>
-          </a:p>
-        </p:txBody>
-      </p:sp>
-      <p:sp>
-        <p:nvSpPr>
-          <p:cNvPr id="8" name="Text 6"/>
-          <p:cNvSpPr/>
-          <p:nvPr/>
-        </p:nvSpPr>
-        <p:spPr>
-          <a:xfrm>
-            <a:off x="3172968" y="1645920"/>
-            <a:ext cx="4251960" cy="438912"/>
-          </a:xfrm>
-          <a:prstGeom prst="rect">
-            <a:avLst/>
-          </a:prstGeom>
-          <a:noFill/>
-          <a:ln/>
-        </p:spPr>
-        <p:txBody>
-          <a:bodyPr wrap="square" lIns="0" tIns="0" rIns="0" bIns="0" rtlCol="0" anchor="ctr"/>
-          <a:lstStyle/>
-          <a:p>
-            <a:pPr indent="0" marL="0">
-              <a:lnSpc>
-                <a:spcPct val="120000"/>
-              </a:lnSpc>
-              <a:buNone/>
-            </a:pPr>
-            <a:r>
-              <a:rPr lang="en-US" sz="1350" b="1" dirty="0">
-                <a:solidFill>
-                  <a:srgbClr val="10161F"/>
-                </a:solidFill>
-                <a:latin typeface="Pretendard" pitchFamily="34" charset="0"/>
-                <a:ea typeface="Pretendard" pitchFamily="34" charset="-122"/>
-                <a:cs typeface="Pretendard" pitchFamily="34" charset="-120"/>
-              </a:rPr>
-              <a:t>142.5평</a:t>
-            </a:r>
-            <a:endParaRPr lang="en-US" sz="1350" dirty="0"/>
-          </a:p>
-        </p:txBody>
-      </p:sp>
-      <p:sp>
-        <p:nvSpPr>
-          <p:cNvPr id="9" name="Shape 7"/>
-          <p:cNvSpPr/>
-          <p:nvPr/>
-        </p:nvSpPr>
-        <p:spPr>
-          <a:xfrm>
-            <a:off x="566928" y="2084832"/>
-            <a:ext cx="6858000" cy="0"/>
+              <a:t>인접 지하철역 역세권 (상세 확인 필요)</a:t>
+            </a:r>
+            <a:endParaRPr lang="en-US" sz="1300" dirty="0"/>
+          </a:p>
+        </p:txBody>
+      </p:sp>
+      <p:sp>
+        <p:nvSpPr>
+          <p:cNvPr id="9" name="Shape 6"/>
+          <p:cNvSpPr/>
+          <p:nvPr/>
+        </p:nvSpPr>
+        <p:spPr>
+          <a:xfrm>
+            <a:off x="5989320" y="1975104"/>
+            <a:ext cx="5571439" cy="0"/>
           </a:xfrm>
           <a:prstGeom prst="line">
             <a:avLst/>
@@ -8650,14 +9156,14 @@
       </p:sp>
       <p:sp>
         <p:nvSpPr>
-          <p:cNvPr id="10" name="Text 8"/>
-          <p:cNvSpPr/>
-          <p:nvPr/>
-        </p:nvSpPr>
-        <p:spPr>
-          <a:xfrm>
-            <a:off x="566928" y="2084832"/>
-            <a:ext cx="2606040" cy="438912"/>
+          <p:cNvPr id="10" name="Text 7"/>
+          <p:cNvSpPr/>
+          <p:nvPr/>
+        </p:nvSpPr>
+        <p:spPr>
+          <a:xfrm>
+            <a:off x="5989320" y="1975104"/>
+            <a:ext cx="1560003" cy="493776"/>
           </a:xfrm>
           <a:prstGeom prst="rect">
             <a:avLst/>
@@ -8671,12 +9177,12 @@
           <a:p>
             <a:pPr indent="0" marL="0">
               <a:lnSpc>
-                <a:spcPct val="120000"/>
+                <a:spcPct val="115000"/>
               </a:lnSpc>
               <a:buNone/>
             </a:pPr>
             <a:r>
-              <a:rPr lang="en-US" sz="1350" dirty="0">
+              <a:rPr lang="en-US" sz="1300" dirty="0">
                 <a:solidFill>
                   <a:srgbClr val="718096"/>
                 </a:solidFill>
@@ -8684,22 +9190,22 @@
                 <a:ea typeface="Pretendard" pitchFamily="34" charset="-122"/>
                 <a:cs typeface="Pretendard" pitchFamily="34" charset="-120"/>
               </a:rPr>
-              <a:t>연면적</a:t>
-            </a:r>
-            <a:endParaRPr lang="en-US" sz="1350" dirty="0"/>
-          </a:p>
-        </p:txBody>
-      </p:sp>
-      <p:sp>
-        <p:nvSpPr>
-          <p:cNvPr id="11" name="Text 9"/>
-          <p:cNvSpPr/>
-          <p:nvPr/>
-        </p:nvSpPr>
-        <p:spPr>
-          <a:xfrm>
-            <a:off x="3172968" y="2084832"/>
-            <a:ext cx="4251960" cy="438912"/>
+              <a:t>상권권역</a:t>
+            </a:r>
+            <a:endParaRPr lang="en-US" sz="1300" dirty="0"/>
+          </a:p>
+        </p:txBody>
+      </p:sp>
+      <p:sp>
+        <p:nvSpPr>
+          <p:cNvPr id="11" name="Text 8"/>
+          <p:cNvSpPr/>
+          <p:nvPr/>
+        </p:nvSpPr>
+        <p:spPr>
+          <a:xfrm>
+            <a:off x="7549323" y="1975104"/>
+            <a:ext cx="4011436" cy="493776"/>
           </a:xfrm>
           <a:prstGeom prst="rect">
             <a:avLst/>
@@ -8713,12 +9219,12 @@
           <a:p>
             <a:pPr indent="0" marL="0">
               <a:lnSpc>
-                <a:spcPct val="120000"/>
+                <a:spcPct val="115000"/>
               </a:lnSpc>
               <a:buNone/>
             </a:pPr>
             <a:r>
-              <a:rPr lang="en-US" sz="1350" b="1" dirty="0">
+              <a:rPr lang="en-US" sz="1300" b="1" dirty="0">
                 <a:solidFill>
                   <a:srgbClr val="10161F"/>
                 </a:solidFill>
@@ -8726,49 +9232,26 @@
                 <a:ea typeface="Pretendard" pitchFamily="34" charset="-122"/>
                 <a:cs typeface="Pretendard" pitchFamily="34" charset="-120"/>
               </a:rPr>
-              <a:t>620.8평</a:t>
-            </a:r>
-            <a:endParaRPr lang="en-US" sz="1350" dirty="0"/>
-          </a:p>
-        </p:txBody>
-      </p:sp>
-      <p:sp>
-        <p:nvSpPr>
-          <p:cNvPr id="12" name="Shape 10"/>
-          <p:cNvSpPr/>
-          <p:nvPr/>
-        </p:nvSpPr>
-        <p:spPr>
-          <a:xfrm>
-            <a:off x="7604608" y="1371600"/>
-            <a:ext cx="0" cy="4754880"/>
-          </a:xfrm>
-          <a:prstGeom prst="line">
-            <a:avLst/>
-          </a:prstGeom>
-          <a:noFill/>
-          <a:ln w="8890">
-            <a:solidFill>
-              <a:srgbClr val="B98A2E"/>
-            </a:solidFill>
-            <a:prstDash val="solid"/>
-          </a:ln>
-        </p:spPr>
-      </p:sp>
-      <p:sp>
-        <p:nvSpPr>
-          <p:cNvPr id="13" name="Shape 11"/>
-          <p:cNvSpPr/>
-          <p:nvPr/>
-        </p:nvSpPr>
-        <p:spPr>
-          <a:xfrm>
-            <a:off x="7784287" y="1645920"/>
-            <a:ext cx="3840480" cy="2103120"/>
+              <a:t>서초권역 주요 상업·업무 권역</a:t>
+            </a:r>
+            <a:endParaRPr lang="en-US" sz="1300" dirty="0"/>
+          </a:p>
+        </p:txBody>
+      </p:sp>
+      <p:sp>
+        <p:nvSpPr>
+          <p:cNvPr id="12" name="Shape 9"/>
+          <p:cNvSpPr/>
+          <p:nvPr/>
+        </p:nvSpPr>
+        <p:spPr>
+          <a:xfrm>
+            <a:off x="5989320" y="2606040"/>
+            <a:ext cx="5571439" cy="658368"/>
           </a:xfrm>
           <a:prstGeom prst="roundRect">
             <a:avLst>
-              <a:gd name="adj" fmla="val 2609"/>
+              <a:gd name="adj" fmla="val 8333"/>
             </a:avLst>
           </a:prstGeom>
           <a:solidFill>
@@ -8779,14 +9262,14 @@
       </p:sp>
       <p:sp>
         <p:nvSpPr>
-          <p:cNvPr id="14" name="Shape 12"/>
-          <p:cNvSpPr/>
-          <p:nvPr/>
-        </p:nvSpPr>
-        <p:spPr>
-          <a:xfrm>
-            <a:off x="7784287" y="1700784"/>
-            <a:ext cx="36576" cy="1993392"/>
+          <p:cNvPr id="13" name="Shape 10"/>
+          <p:cNvSpPr/>
+          <p:nvPr/>
+        </p:nvSpPr>
+        <p:spPr>
+          <a:xfrm>
+            <a:off x="5989320" y="2660904"/>
+            <a:ext cx="36576" cy="548640"/>
           </a:xfrm>
           <a:prstGeom prst="rect">
             <a:avLst/>
@@ -8799,14 +9282,14 @@
       </p:sp>
       <p:sp>
         <p:nvSpPr>
-          <p:cNvPr id="15" name="Text 13"/>
-          <p:cNvSpPr/>
-          <p:nvPr/>
-        </p:nvSpPr>
-        <p:spPr>
-          <a:xfrm>
-            <a:off x="7967167" y="1755648"/>
-            <a:ext cx="3511296" cy="201168"/>
+          <p:cNvPr id="14" name="Text 11"/>
+          <p:cNvSpPr/>
+          <p:nvPr/>
+        </p:nvSpPr>
+        <p:spPr>
+          <a:xfrm>
+            <a:off x="6135624" y="2697480"/>
+            <a:ext cx="5315407" cy="201168"/>
           </a:xfrm>
           <a:prstGeom prst="rect">
             <a:avLst/>
@@ -8830,7 +9313,7 @@
                 <a:ea typeface="Pretendard" pitchFamily="34" charset="-122"/>
                 <a:cs typeface="Pretendard" pitchFamily="34" charset="-120"/>
               </a:rPr>
-              <a:t>토지 및 건축 규제 포인트</a:t>
+              <a:t>입지 종합 분석</a:t>
             </a:r>
             <a:endParaRPr lang="en-US" sz="1050" dirty="0"/>
           </a:p>
@@ -8838,14 +9321,14 @@
       </p:sp>
       <p:sp>
         <p:nvSpPr>
-          <p:cNvPr id="16" name="Text 14"/>
-          <p:cNvSpPr/>
-          <p:nvPr/>
-        </p:nvSpPr>
-        <p:spPr>
-          <a:xfrm>
-            <a:off x="7967167" y="1975104"/>
-            <a:ext cx="3511296" cy="1700784"/>
+          <p:cNvPr id="15" name="Text 12"/>
+          <p:cNvSpPr/>
+          <p:nvPr/>
+        </p:nvSpPr>
+        <p:spPr>
+          <a:xfrm>
+            <a:off x="6135624" y="2898648"/>
+            <a:ext cx="5315407" cy="329184"/>
           </a:xfrm>
           <a:prstGeom prst="rect">
             <a:avLst/>
@@ -8859,13 +9342,13 @@
           <a:p>
             <a:pPr marL="342900" indent="-342900">
               <a:lnSpc>
-                <a:spcPct val="120000"/>
+                <a:spcPct val="108000"/>
               </a:lnSpc>
               <a:buSzPct val="100000"/>
               <a:buChar char="•"/>
             </a:pPr>
             <a:r>
-              <a:rPr lang="en-US" sz="930" dirty="0">
+              <a:rPr lang="en-US" sz="980" dirty="0">
                 <a:solidFill>
                   <a:srgbClr val="10161F"/>
                 </a:solidFill>
@@ -8873,253 +9356,45 @@
                 <a:ea typeface="Pretendard" pitchFamily="34" charset="-122"/>
                 <a:cs typeface="Pretendard" pitchFamily="34" charset="-120"/>
               </a:rPr>
-              <a:t>용도지역·용도지구 기준 건폐율/용적률 상한 확인</a:t>
-            </a:r>
-            <a:endParaRPr lang="en-US" sz="930" dirty="0"/>
-          </a:p>
-          <a:p>
-            <a:pPr marL="342900" indent="-342900">
-              <a:lnSpc>
-                <a:spcPct val="120000"/>
-              </a:lnSpc>
-              <a:buSzPct val="100000"/>
-              <a:buChar char="•"/>
-            </a:pPr>
-            <a:r>
-              <a:rPr lang="en-US" sz="930" dirty="0">
-                <a:solidFill>
-                  <a:srgbClr val="10161F"/>
+              <a:t>서초권역 배후 상권 기반 안정적 임대 수요</a:t>
+            </a:r>
+            <a:endParaRPr lang="en-US" sz="980" dirty="0"/>
+          </a:p>
+        </p:txBody>
+      </p:sp>
+      <p:sp>
+        <p:nvSpPr>
+          <p:cNvPr id="16" name="Text 13"/>
+          <p:cNvSpPr/>
+          <p:nvPr/>
+        </p:nvSpPr>
+        <p:spPr>
+          <a:xfrm>
+            <a:off x="502920" y="6382512"/>
+            <a:ext cx="7315200" cy="219456"/>
+          </a:xfrm>
+          <a:prstGeom prst="rect">
+            <a:avLst/>
+          </a:prstGeom>
+          <a:noFill/>
+          <a:ln/>
+        </p:spPr>
+        <p:txBody>
+          <a:bodyPr wrap="square" lIns="0" tIns="0" rIns="0" bIns="0" rtlCol="0" anchor="ctr"/>
+          <a:lstStyle/>
+          <a:p>
+            <a:pPr indent="0" marL="0">
+              <a:buNone/>
+            </a:pPr>
+            <a:r>
+              <a:rPr lang="en-US" sz="800" dirty="0">
+                <a:solidFill>
+                  <a:srgbClr val="718096"/>
                 </a:solidFill>
                 <a:latin typeface="Pretendard" pitchFamily="34" charset="0"/>
                 <a:ea typeface="Pretendard" pitchFamily="34" charset="-122"/>
                 <a:cs typeface="Pretendard" pitchFamily="34" charset="-120"/>
               </a:rPr>
-              <a:t>필지 형상 및 접도 조건에 따른 건축 가능 면적 검토</a:t>
-            </a:r>
-            <a:endParaRPr lang="en-US" sz="930" dirty="0"/>
-          </a:p>
-          <a:p>
-            <a:pPr marL="342900" indent="-342900">
-              <a:lnSpc>
-                <a:spcPct val="120000"/>
-              </a:lnSpc>
-              <a:buSzPct val="100000"/>
-              <a:buChar char="•"/>
-            </a:pPr>
-            <a:r>
-              <a:rPr lang="en-US" sz="930" dirty="0">
-                <a:solidFill>
-                  <a:srgbClr val="10161F"/>
-                </a:solidFill>
-                <a:latin typeface="Pretendard" pitchFamily="34" charset="0"/>
-                <a:ea typeface="Pretendard" pitchFamily="34" charset="-122"/>
-                <a:cs typeface="Pretendard" pitchFamily="34" charset="-120"/>
-              </a:rPr>
-              <a:t>토지이용계획 열람 및 개발행위허가 제한 여부 확인</a:t>
-            </a:r>
-            <a:endParaRPr lang="en-US" sz="930" dirty="0"/>
-          </a:p>
-        </p:txBody>
-      </p:sp>
-      <p:sp>
-        <p:nvSpPr>
-          <p:cNvPr id="17" name="Shape 15"/>
-          <p:cNvSpPr/>
-          <p:nvPr/>
-        </p:nvSpPr>
-        <p:spPr>
-          <a:xfrm>
-            <a:off x="7784287" y="3977640"/>
-            <a:ext cx="3840480" cy="2148840"/>
-          </a:xfrm>
-          <a:prstGeom prst="roundRect">
-            <a:avLst>
-              <a:gd name="adj" fmla="val 2553"/>
-            </a:avLst>
-          </a:prstGeom>
-          <a:solidFill>
-            <a:srgbClr val="BEE3F8"/>
-          </a:solidFill>
-          <a:ln/>
-        </p:spPr>
-      </p:sp>
-      <p:sp>
-        <p:nvSpPr>
-          <p:cNvPr id="18" name="Shape 16"/>
-          <p:cNvSpPr/>
-          <p:nvPr/>
-        </p:nvSpPr>
-        <p:spPr>
-          <a:xfrm>
-            <a:off x="7784287" y="4032504"/>
-            <a:ext cx="36576" cy="2039112"/>
-          </a:xfrm>
-          <a:prstGeom prst="rect">
-            <a:avLst/>
-          </a:prstGeom>
-          <a:solidFill>
-            <a:srgbClr val="2B6CB0"/>
-          </a:solidFill>
-          <a:ln/>
-        </p:spPr>
-      </p:sp>
-      <p:sp>
-        <p:nvSpPr>
-          <p:cNvPr id="19" name="Text 17"/>
-          <p:cNvSpPr/>
-          <p:nvPr/>
-        </p:nvSpPr>
-        <p:spPr>
-          <a:xfrm>
-            <a:off x="7967167" y="4087368"/>
-            <a:ext cx="3511296" cy="201168"/>
-          </a:xfrm>
-          <a:prstGeom prst="rect">
-            <a:avLst/>
-          </a:prstGeom>
-          <a:noFill/>
-          <a:ln/>
-        </p:spPr>
-        <p:txBody>
-          <a:bodyPr wrap="square" lIns="0" tIns="0" rIns="0" bIns="0" rtlCol="0" anchor="ctr"/>
-          <a:lstStyle/>
-          <a:p>
-            <a:pPr indent="0" marL="0">
-              <a:buNone/>
-            </a:pPr>
-            <a:r>
-              <a:rPr lang="en-US" sz="1050" b="1" dirty="0">
-                <a:solidFill>
-                  <a:srgbClr val="2B6CB0"/>
-                </a:solidFill>
-                <a:latin typeface="Pretendard" pitchFamily="34" charset="0"/>
-                <a:ea typeface="Pretendard" pitchFamily="34" charset="-122"/>
-                <a:cs typeface="Pretendard" pitchFamily="34" charset="-120"/>
-              </a:rPr>
-              <a:t>권리관계 및 공적장부</a:t>
-            </a:r>
-            <a:endParaRPr lang="en-US" sz="1050" dirty="0"/>
-          </a:p>
-        </p:txBody>
-      </p:sp>
-      <p:sp>
-        <p:nvSpPr>
-          <p:cNvPr id="20" name="Text 18"/>
-          <p:cNvSpPr/>
-          <p:nvPr/>
-        </p:nvSpPr>
-        <p:spPr>
-          <a:xfrm>
-            <a:off x="7967167" y="4306824"/>
-            <a:ext cx="3511296" cy="1746504"/>
-          </a:xfrm>
-          <a:prstGeom prst="rect">
-            <a:avLst/>
-          </a:prstGeom>
-          <a:noFill/>
-          <a:ln/>
-        </p:spPr>
-        <p:txBody>
-          <a:bodyPr wrap="square" lIns="0" tIns="0" rIns="0" bIns="0" rtlCol="0" anchor="t"/>
-          <a:lstStyle/>
-          <a:p>
-            <a:pPr marL="342900" indent="-342900">
-              <a:lnSpc>
-                <a:spcPct val="120000"/>
-              </a:lnSpc>
-              <a:buSzPct val="100000"/>
-              <a:buChar char="•"/>
-            </a:pPr>
-            <a:r>
-              <a:rPr lang="en-US" sz="930" dirty="0">
-                <a:solidFill>
-                  <a:srgbClr val="10161F"/>
-                </a:solidFill>
-                <a:latin typeface="Pretendard" pitchFamily="34" charset="0"/>
-                <a:ea typeface="Pretendard" pitchFamily="34" charset="-122"/>
-                <a:cs typeface="Pretendard" pitchFamily="34" charset="-120"/>
-              </a:rPr>
-              <a:t>등기부등본 갑구 소유권 및 을구 근저당·가압류 확인</a:t>
-            </a:r>
-            <a:endParaRPr lang="en-US" sz="930" dirty="0"/>
-          </a:p>
-          <a:p>
-            <a:pPr marL="342900" indent="-342900">
-              <a:lnSpc>
-                <a:spcPct val="120000"/>
-              </a:lnSpc>
-              <a:buSzPct val="100000"/>
-              <a:buChar char="•"/>
-            </a:pPr>
-            <a:r>
-              <a:rPr lang="en-US" sz="930" dirty="0">
-                <a:solidFill>
-                  <a:srgbClr val="10161F"/>
-                </a:solidFill>
-                <a:latin typeface="Pretendard" pitchFamily="34" charset="0"/>
-                <a:ea typeface="Pretendard" pitchFamily="34" charset="-122"/>
-                <a:cs typeface="Pretendard" pitchFamily="34" charset="-120"/>
-              </a:rPr>
-              <a:t>건축물대장 기재 사항과 실물 현황 대조 점검</a:t>
-            </a:r>
-            <a:endParaRPr lang="en-US" sz="930" dirty="0"/>
-          </a:p>
-          <a:p>
-            <a:pPr marL="342900" indent="-342900">
-              <a:lnSpc>
-                <a:spcPct val="120000"/>
-              </a:lnSpc>
-              <a:buSzPct val="100000"/>
-              <a:buChar char="•"/>
-            </a:pPr>
-            <a:r>
-              <a:rPr lang="en-US" sz="930" dirty="0">
-                <a:solidFill>
-                  <a:srgbClr val="10161F"/>
-                </a:solidFill>
-                <a:latin typeface="Pretendard" pitchFamily="34" charset="0"/>
-                <a:ea typeface="Pretendard" pitchFamily="34" charset="-122"/>
-                <a:cs typeface="Pretendard" pitchFamily="34" charset="-120"/>
-              </a:rPr>
-              <a:t>개별공시지가 및 실거래가 비교 분석</a:t>
-            </a:r>
-            <a:endParaRPr lang="en-US" sz="930" dirty="0"/>
-          </a:p>
-        </p:txBody>
-      </p:sp>
-      <p:sp>
-        <p:nvSpPr>
-          <p:cNvPr id="21" name="Text 19"/>
-          <p:cNvSpPr/>
-          <p:nvPr/>
-        </p:nvSpPr>
-        <p:spPr>
-          <a:xfrm>
-            <a:off x="566928" y="6382512"/>
-            <a:ext cx="7315200" cy="219456"/>
-          </a:xfrm>
-          <a:prstGeom prst="rect">
-            <a:avLst/>
-          </a:prstGeom>
-          <a:noFill/>
-          <a:ln/>
-        </p:spPr>
-        <p:txBody>
-          <a:bodyPr wrap="square" lIns="0" tIns="0" rIns="0" bIns="0" rtlCol="0" anchor="ctr"/>
-          <a:lstStyle/>
-          <a:p>
-            <a:pPr indent="0" marL="0">
-              <a:buNone/>
-            </a:pPr>
-            <a:r>
-              <a:rPr lang="en-US" sz="800" dirty="0">
-                <a:solidFill>
-                  <a:srgbClr val="718096"/>
-                </a:solidFill>
-                <a:latin typeface="Pretendard" pitchFamily="34" charset="0"/>
-                <a:ea typeface="Pretendard" pitchFamily="34" charset="-122"/>
-                <a:cs typeface="Pretendard" pitchFamily="34" charset="-120"/>
-              </a:rPr>
               <a:t>크리딜   |   </a:t>
             </a:r>
             <a:endParaRPr lang="en-US" sz="800" dirty="0"/>
@@ -9128,13 +9403,13 @@
       </p:sp>
       <p:sp>
         <p:nvSpPr>
-          <p:cNvPr id="22" name="Text 20"/>
-          <p:cNvSpPr/>
-          <p:nvPr/>
-        </p:nvSpPr>
-        <p:spPr>
-          <a:xfrm>
-            <a:off x="10710367" y="6382512"/>
+          <p:cNvPr id="17" name="Text 14"/>
+          <p:cNvSpPr/>
+          <p:nvPr/>
+        </p:nvSpPr>
+        <p:spPr>
+          <a:xfrm>
+            <a:off x="10774375" y="6382512"/>
             <a:ext cx="914400" cy="219456"/>
           </a:xfrm>
           <a:prstGeom prst="rect">
@@ -9205,7 +9480,7 @@
         </p:nvSpPr>
         <p:spPr>
           <a:xfrm>
-            <a:off x="566928" y="457200"/>
+            <a:off x="502920" y="457200"/>
             <a:ext cx="384048" cy="384048"/>
           </a:xfrm>
           <a:prstGeom prst="ellipse">
@@ -9225,7 +9500,7 @@
         </p:nvSpPr>
         <p:spPr>
           <a:xfrm>
-            <a:off x="566928" y="457200"/>
+            <a:off x="502920" y="457200"/>
             <a:ext cx="384048" cy="384048"/>
           </a:xfrm>
           <a:prstGeom prst="rect">
@@ -9264,7 +9539,7 @@
         </p:nvSpPr>
         <p:spPr>
           <a:xfrm>
-            <a:off x="1133856" y="457200"/>
+            <a:off x="1069848" y="457200"/>
             <a:ext cx="10490911" cy="182880"/>
           </a:xfrm>
           <a:prstGeom prst="rect">
@@ -9289,7 +9564,7 @@
                 <a:ea typeface="Arial" pitchFamily="34" charset="-122"/>
                 <a:cs typeface="Arial" pitchFamily="34" charset="-120"/>
               </a:rPr>
-              <a:t>Building</a:t>
+              <a:t>Land</a:t>
             </a:r>
             <a:endParaRPr lang="en-US" sz="950" dirty="0"/>
           </a:p>
@@ -9303,7 +9578,7 @@
         </p:nvSpPr>
         <p:spPr>
           <a:xfrm>
-            <a:off x="1133856" y="640080"/>
+            <a:off x="1069848" y="640080"/>
             <a:ext cx="10490911" cy="365760"/>
           </a:xfrm>
           <a:prstGeom prst="rect">
@@ -9328,7 +9603,7 @@
                 <a:ea typeface="Pretendard" pitchFamily="34" charset="-122"/>
                 <a:cs typeface="Pretendard" pitchFamily="34" charset="-120"/>
               </a:rPr>
-              <a:t>건물 개요</a:t>
+              <a:t>토지 현황</a:t>
             </a:r>
             <a:endParaRPr lang="en-US" sz="2300" dirty="0"/>
           </a:p>
@@ -9342,7 +9617,7 @@
         </p:nvSpPr>
         <p:spPr>
           <a:xfrm>
-            <a:off x="566928" y="1371600"/>
+            <a:off x="502920" y="1371600"/>
             <a:ext cx="6858000" cy="237744"/>
           </a:xfrm>
           <a:prstGeom prst="rect">
@@ -9367,7 +9642,7 @@
                 <a:ea typeface="Pretendard" pitchFamily="34" charset="-122"/>
                 <a:cs typeface="Pretendard" pitchFamily="34" charset="-120"/>
               </a:rPr>
-              <a:t>건축물 개요 및 물리 스펙</a:t>
+              <a:t>토지 현황</a:t>
             </a:r>
             <a:endParaRPr lang="en-US" sz="1100" dirty="0"/>
           </a:p>
@@ -9381,8 +9656,8 @@
         </p:nvSpPr>
         <p:spPr>
           <a:xfrm>
-            <a:off x="566928" y="1645920"/>
-            <a:ext cx="2606040" cy="438912"/>
+            <a:off x="502920" y="1645920"/>
+            <a:ext cx="1920240" cy="420624"/>
           </a:xfrm>
           <a:prstGeom prst="rect">
             <a:avLst/>
@@ -9396,7 +9671,7 @@
           <a:p>
             <a:pPr indent="0" marL="0">
               <a:lnSpc>
-                <a:spcPct val="120000"/>
+                <a:spcPct val="115000"/>
               </a:lnSpc>
               <a:buNone/>
             </a:pPr>
@@ -9423,8 +9698,8 @@
         </p:nvSpPr>
         <p:spPr>
           <a:xfrm>
-            <a:off x="3172968" y="1645920"/>
-            <a:ext cx="4251960" cy="438912"/>
+            <a:off x="2423160" y="1645920"/>
+            <a:ext cx="4937760" cy="420624"/>
           </a:xfrm>
           <a:prstGeom prst="rect">
             <a:avLst/>
@@ -9438,7 +9713,7 @@
           <a:p>
             <a:pPr indent="0" marL="0">
               <a:lnSpc>
-                <a:spcPct val="120000"/>
+                <a:spcPct val="115000"/>
               </a:lnSpc>
               <a:buNone/>
             </a:pPr>
@@ -9465,7 +9740,7 @@
         </p:nvSpPr>
         <p:spPr>
           <a:xfrm>
-            <a:off x="566928" y="2084832"/>
+            <a:off x="502920" y="2066544"/>
             <a:ext cx="6858000" cy="0"/>
           </a:xfrm>
           <a:prstGeom prst="line">
@@ -9488,8 +9763,8 @@
         </p:nvSpPr>
         <p:spPr>
           <a:xfrm>
-            <a:off x="566928" y="2084832"/>
-            <a:ext cx="2606040" cy="438912"/>
+            <a:off x="502920" y="2066544"/>
+            <a:ext cx="1920240" cy="420624"/>
           </a:xfrm>
           <a:prstGeom prst="rect">
             <a:avLst/>
@@ -9503,7 +9778,7 @@
           <a:p>
             <a:pPr indent="0" marL="0">
               <a:lnSpc>
-                <a:spcPct val="120000"/>
+                <a:spcPct val="115000"/>
               </a:lnSpc>
               <a:buNone/>
             </a:pPr>
@@ -9530,8 +9805,8 @@
         </p:nvSpPr>
         <p:spPr>
           <a:xfrm>
-            <a:off x="3172968" y="2084832"/>
-            <a:ext cx="4251960" cy="438912"/>
+            <a:off x="2423160" y="2066544"/>
+            <a:ext cx="4937760" cy="420624"/>
           </a:xfrm>
           <a:prstGeom prst="rect">
             <a:avLst/>
@@ -9545,7 +9820,7 @@
           <a:p>
             <a:pPr indent="0" marL="0">
               <a:lnSpc>
-                <a:spcPct val="120000"/>
+                <a:spcPct val="115000"/>
               </a:lnSpc>
               <a:buNone/>
             </a:pPr>
@@ -9572,114 +9847,7 @@
         </p:nvSpPr>
         <p:spPr>
           <a:xfrm>
-            <a:off x="566928" y="2523744"/>
-            <a:ext cx="6858000" cy="0"/>
-          </a:xfrm>
-          <a:prstGeom prst="line">
-            <a:avLst/>
-          </a:prstGeom>
-          <a:noFill/>
-          <a:ln w="3810">
-            <a:solidFill>
-              <a:srgbClr val="CBD5E0"/>
-            </a:solidFill>
-            <a:prstDash val="solid"/>
-          </a:ln>
-        </p:spPr>
-      </p:sp>
-      <p:sp>
-        <p:nvSpPr>
-          <p:cNvPr id="13" name="Text 11"/>
-          <p:cNvSpPr/>
-          <p:nvPr/>
-        </p:nvSpPr>
-        <p:spPr>
-          <a:xfrm>
-            <a:off x="566928" y="2523744"/>
-            <a:ext cx="2606040" cy="438912"/>
-          </a:xfrm>
-          <a:prstGeom prst="rect">
-            <a:avLst/>
-          </a:prstGeom>
-          <a:noFill/>
-          <a:ln/>
-        </p:spPr>
-        <p:txBody>
-          <a:bodyPr wrap="square" lIns="0" tIns="0" rIns="0" bIns="0" rtlCol="0" anchor="ctr"/>
-          <a:lstStyle/>
-          <a:p>
-            <a:pPr indent="0" marL="0">
-              <a:lnSpc>
-                <a:spcPct val="120000"/>
-              </a:lnSpc>
-              <a:buNone/>
-            </a:pPr>
-            <a:r>
-              <a:rPr lang="en-US" sz="1350" dirty="0">
-                <a:solidFill>
-                  <a:srgbClr val="718096"/>
-                </a:solidFill>
-                <a:latin typeface="Pretendard" pitchFamily="34" charset="0"/>
-                <a:ea typeface="Pretendard" pitchFamily="34" charset="-122"/>
-                <a:cs typeface="Pretendard" pitchFamily="34" charset="-120"/>
-              </a:rPr>
-              <a:t>준공</a:t>
-            </a:r>
-            <a:endParaRPr lang="en-US" sz="1350" dirty="0"/>
-          </a:p>
-        </p:txBody>
-      </p:sp>
-      <p:sp>
-        <p:nvSpPr>
-          <p:cNvPr id="14" name="Text 12"/>
-          <p:cNvSpPr/>
-          <p:nvPr/>
-        </p:nvSpPr>
-        <p:spPr>
-          <a:xfrm>
-            <a:off x="3172968" y="2523744"/>
-            <a:ext cx="4251960" cy="438912"/>
-          </a:xfrm>
-          <a:prstGeom prst="rect">
-            <a:avLst/>
-          </a:prstGeom>
-          <a:noFill/>
-          <a:ln/>
-        </p:spPr>
-        <p:txBody>
-          <a:bodyPr wrap="square" lIns="0" tIns="0" rIns="0" bIns="0" rtlCol="0" anchor="ctr"/>
-          <a:lstStyle/>
-          <a:p>
-            <a:pPr indent="0" marL="0">
-              <a:lnSpc>
-                <a:spcPct val="120000"/>
-              </a:lnSpc>
-              <a:buNone/>
-            </a:pPr>
-            <a:r>
-              <a:rPr lang="en-US" sz="1350" b="1" dirty="0">
-                <a:solidFill>
-                  <a:srgbClr val="10161F"/>
-                </a:solidFill>
-                <a:latin typeface="Pretendard" pitchFamily="34" charset="0"/>
-                <a:ea typeface="Pretendard" pitchFamily="34" charset="-122"/>
-                <a:cs typeface="Pretendard" pitchFamily="34" charset="-120"/>
-              </a:rPr>
-              <a:t>2017년</a:t>
-            </a:r>
-            <a:endParaRPr lang="en-US" sz="1350" dirty="0"/>
-          </a:p>
-        </p:txBody>
-      </p:sp>
-      <p:sp>
-        <p:nvSpPr>
-          <p:cNvPr id="15" name="Shape 13"/>
-          <p:cNvSpPr/>
-          <p:nvPr/>
-        </p:nvSpPr>
-        <p:spPr>
-          <a:xfrm>
-            <a:off x="7604608" y="1371600"/>
+            <a:off x="7540600" y="1371600"/>
             <a:ext cx="0" cy="4754880"/>
           </a:xfrm>
           <a:prstGeom prst="line">
@@ -9696,56 +9864,56 @@
       </p:sp>
       <p:sp>
         <p:nvSpPr>
-          <p:cNvPr id="16" name="Shape 14"/>
-          <p:cNvSpPr/>
-          <p:nvPr/>
-        </p:nvSpPr>
-        <p:spPr>
-          <a:xfrm>
-            <a:off x="7784287" y="1645920"/>
-            <a:ext cx="3840480" cy="1645920"/>
+          <p:cNvPr id="13" name="Shape 11"/>
+          <p:cNvSpPr/>
+          <p:nvPr/>
+        </p:nvSpPr>
+        <p:spPr>
+          <a:xfrm>
+            <a:off x="7720279" y="1645920"/>
+            <a:ext cx="3840480" cy="2103120"/>
           </a:xfrm>
           <a:prstGeom prst="roundRect">
             <a:avLst>
-              <a:gd name="adj" fmla="val 3333"/>
+              <a:gd name="adj" fmla="val 2609"/>
             </a:avLst>
           </a:prstGeom>
           <a:solidFill>
-            <a:srgbClr val="F3EBDA"/>
+            <a:srgbClr val="BEE3F8"/>
           </a:solidFill>
           <a:ln/>
         </p:spPr>
       </p:sp>
       <p:sp>
         <p:nvSpPr>
-          <p:cNvPr id="17" name="Shape 15"/>
-          <p:cNvSpPr/>
-          <p:nvPr/>
-        </p:nvSpPr>
-        <p:spPr>
-          <a:xfrm>
-            <a:off x="7784287" y="1700784"/>
-            <a:ext cx="36576" cy="1536192"/>
+          <p:cNvPr id="14" name="Shape 12"/>
+          <p:cNvSpPr/>
+          <p:nvPr/>
+        </p:nvSpPr>
+        <p:spPr>
+          <a:xfrm>
+            <a:off x="7720279" y="1700784"/>
+            <a:ext cx="36576" cy="1993392"/>
           </a:xfrm>
           <a:prstGeom prst="rect">
             <a:avLst/>
           </a:prstGeom>
           <a:solidFill>
-            <a:srgbClr val="977024"/>
+            <a:srgbClr val="2B6CB0"/>
           </a:solidFill>
           <a:ln/>
         </p:spPr>
       </p:sp>
       <p:sp>
         <p:nvSpPr>
-          <p:cNvPr id="18" name="Text 16"/>
-          <p:cNvSpPr/>
-          <p:nvPr/>
-        </p:nvSpPr>
-        <p:spPr>
-          <a:xfrm>
-            <a:off x="7967167" y="1755648"/>
-            <a:ext cx="3511296" cy="201168"/>
+          <p:cNvPr id="15" name="Text 13"/>
+          <p:cNvSpPr/>
+          <p:nvPr/>
+        </p:nvSpPr>
+        <p:spPr>
+          <a:xfrm>
+            <a:off x="7866583" y="1737360"/>
+            <a:ext cx="3584448" cy="201168"/>
           </a:xfrm>
           <a:prstGeom prst="rect">
             <a:avLst/>
@@ -9760,85 +9928,317 @@
             <a:pPr indent="0" marL="0">
               <a:buNone/>
             </a:pPr>
-            <a:endParaRPr lang="en-US" sz="1050" dirty="0"/>
-          </a:p>
-        </p:txBody>
-      </p:sp>
-      <p:sp>
-        <p:nvSpPr>
-          <p:cNvPr id="19" name="Text 17"/>
-          <p:cNvSpPr/>
-          <p:nvPr/>
-        </p:nvSpPr>
-        <p:spPr>
-          <a:xfrm>
-            <a:off x="7967167" y="1975104"/>
-            <a:ext cx="3511296" cy="1243584"/>
-          </a:xfrm>
-          <a:prstGeom prst="rect">
-            <a:avLst/>
-          </a:prstGeom>
-          <a:noFill/>
-          <a:ln/>
-        </p:spPr>
-        <p:txBody>
-          <a:bodyPr wrap="square" lIns="0" tIns="0" rIns="0" bIns="0" rtlCol="0" anchor="t"/>
-          <a:lstStyle/>
-          <a:p>
-            <a:pPr indent="0" marL="0">
-              <a:lnSpc>
-                <a:spcPct val="120000"/>
-              </a:lnSpc>
-              <a:buNone/>
-            </a:pPr>
-            <a:r>
-              <a:rPr lang="en-US" sz="930" dirty="0">
-                <a:solidFill>
-                  <a:srgbClr val="10161F"/>
+            <a:r>
+              <a:rPr lang="en-US" sz="1050" b="1" dirty="0">
+                <a:solidFill>
+                  <a:srgbClr val="2B6CB0"/>
                 </a:solidFill>
                 <a:latin typeface="Pretendard" pitchFamily="34" charset="0"/>
                 <a:ea typeface="Pretendard" pitchFamily="34" charset="-122"/>
                 <a:cs typeface="Pretendard" pitchFamily="34" charset="-120"/>
               </a:rPr>
-              <a:t>서초 메디컬 빌딩은 지하2층~지상7층 규모의 올근생 빌딩입니다.</a:t>
-            </a:r>
-            <a:endParaRPr lang="en-US" sz="930" dirty="0"/>
-          </a:p>
-        </p:txBody>
-      </p:sp>
-      <p:sp>
-        <p:nvSpPr>
-          <p:cNvPr id="20" name="Text 18"/>
-          <p:cNvSpPr/>
-          <p:nvPr/>
-        </p:nvSpPr>
-        <p:spPr>
-          <a:xfrm>
-            <a:off x="566928" y="6382512"/>
-            <a:ext cx="7315200" cy="219456"/>
-          </a:xfrm>
-          <a:prstGeom prst="rect">
-            <a:avLst/>
-          </a:prstGeom>
-          <a:noFill/>
-          <a:ln/>
-        </p:spPr>
-        <p:txBody>
-          <a:bodyPr wrap="square" lIns="0" tIns="0" rIns="0" bIns="0" rtlCol="0" anchor="ctr"/>
-          <a:lstStyle/>
-          <a:p>
-            <a:pPr indent="0" marL="0">
-              <a:buNone/>
-            </a:pPr>
-            <a:r>
-              <a:rPr lang="en-US" sz="800" dirty="0">
-                <a:solidFill>
-                  <a:srgbClr val="718096"/>
+              <a:t>토지 및 건축 규제 포인트</a:t>
+            </a:r>
+            <a:endParaRPr lang="en-US" sz="1050" dirty="0"/>
+          </a:p>
+        </p:txBody>
+      </p:sp>
+      <p:sp>
+        <p:nvSpPr>
+          <p:cNvPr id="16" name="Text 14"/>
+          <p:cNvSpPr/>
+          <p:nvPr/>
+        </p:nvSpPr>
+        <p:spPr>
+          <a:xfrm>
+            <a:off x="7866583" y="1938528"/>
+            <a:ext cx="3584448" cy="1773936"/>
+          </a:xfrm>
+          <a:prstGeom prst="rect">
+            <a:avLst/>
+          </a:prstGeom>
+          <a:noFill/>
+          <a:ln/>
+        </p:spPr>
+        <p:txBody>
+          <a:bodyPr wrap="square" lIns="0" tIns="0" rIns="0" bIns="0" rtlCol="0" anchor="t"/>
+          <a:lstStyle/>
+          <a:p>
+            <a:pPr marL="342900" indent="-342900">
+              <a:lnSpc>
+                <a:spcPct val="108000"/>
+              </a:lnSpc>
+              <a:buSzPct val="100000"/>
+              <a:buChar char="•"/>
+            </a:pPr>
+            <a:r>
+              <a:rPr lang="en-US" sz="980" dirty="0">
+                <a:solidFill>
+                  <a:srgbClr val="10161F"/>
                 </a:solidFill>
                 <a:latin typeface="Pretendard" pitchFamily="34" charset="0"/>
                 <a:ea typeface="Pretendard" pitchFamily="34" charset="-122"/>
                 <a:cs typeface="Pretendard" pitchFamily="34" charset="-120"/>
               </a:rPr>
+              <a:t>용도지역·용도지구 기준 건폐율/용적률 상한 확인</a:t>
+            </a:r>
+            <a:endParaRPr lang="en-US" sz="980" dirty="0"/>
+          </a:p>
+          <a:p>
+            <a:pPr marL="342900" indent="-342900">
+              <a:lnSpc>
+                <a:spcPct val="108000"/>
+              </a:lnSpc>
+              <a:spcBef>
+                <a:spcPts val="300"/>
+              </a:spcBef>
+              <a:buSzPct val="100000"/>
+              <a:buChar char="•"/>
+            </a:pPr>
+            <a:r>
+              <a:rPr lang="en-US" sz="980" dirty="0">
+                <a:solidFill>
+                  <a:srgbClr val="10161F"/>
+                </a:solidFill>
+                <a:latin typeface="Pretendard" pitchFamily="34" charset="0"/>
+                <a:ea typeface="Pretendard" pitchFamily="34" charset="-122"/>
+                <a:cs typeface="Pretendard" pitchFamily="34" charset="-120"/>
+              </a:rPr>
+              <a:t>필지 형상 및 접도 조건에 따른 건축 가능 면적 검토</a:t>
+            </a:r>
+            <a:endParaRPr lang="en-US" sz="980" dirty="0"/>
+          </a:p>
+          <a:p>
+            <a:pPr marL="342900" indent="-342900">
+              <a:lnSpc>
+                <a:spcPct val="108000"/>
+              </a:lnSpc>
+              <a:spcBef>
+                <a:spcPts val="300"/>
+              </a:spcBef>
+              <a:buSzPct val="100000"/>
+              <a:buChar char="•"/>
+            </a:pPr>
+            <a:r>
+              <a:rPr lang="en-US" sz="980" dirty="0">
+                <a:solidFill>
+                  <a:srgbClr val="10161F"/>
+                </a:solidFill>
+                <a:latin typeface="Pretendard" pitchFamily="34" charset="0"/>
+                <a:ea typeface="Pretendard" pitchFamily="34" charset="-122"/>
+                <a:cs typeface="Pretendard" pitchFamily="34" charset="-120"/>
+              </a:rPr>
+              <a:t>토지이용계획 열람 및 개발행위허가 제한 여부 확인</a:t>
+            </a:r>
+            <a:endParaRPr lang="en-US" sz="980" dirty="0"/>
+          </a:p>
+        </p:txBody>
+      </p:sp>
+      <p:sp>
+        <p:nvSpPr>
+          <p:cNvPr id="17" name="Shape 15"/>
+          <p:cNvSpPr/>
+          <p:nvPr/>
+        </p:nvSpPr>
+        <p:spPr>
+          <a:xfrm>
+            <a:off x="7720279" y="3977640"/>
+            <a:ext cx="3840480" cy="2148840"/>
+          </a:xfrm>
+          <a:prstGeom prst="roundRect">
+            <a:avLst>
+              <a:gd name="adj" fmla="val 2553"/>
+            </a:avLst>
+          </a:prstGeom>
+          <a:solidFill>
+            <a:srgbClr val="BEE3F8"/>
+          </a:solidFill>
+          <a:ln/>
+        </p:spPr>
+      </p:sp>
+      <p:sp>
+        <p:nvSpPr>
+          <p:cNvPr id="18" name="Shape 16"/>
+          <p:cNvSpPr/>
+          <p:nvPr/>
+        </p:nvSpPr>
+        <p:spPr>
+          <a:xfrm>
+            <a:off x="7720279" y="4032504"/>
+            <a:ext cx="36576" cy="2039112"/>
+          </a:xfrm>
+          <a:prstGeom prst="rect">
+            <a:avLst/>
+          </a:prstGeom>
+          <a:solidFill>
+            <a:srgbClr val="2B6CB0"/>
+          </a:solidFill>
+          <a:ln/>
+        </p:spPr>
+      </p:sp>
+      <p:sp>
+        <p:nvSpPr>
+          <p:cNvPr id="19" name="Text 17"/>
+          <p:cNvSpPr/>
+          <p:nvPr/>
+        </p:nvSpPr>
+        <p:spPr>
+          <a:xfrm>
+            <a:off x="7866583" y="4069080"/>
+            <a:ext cx="3584448" cy="201168"/>
+          </a:xfrm>
+          <a:prstGeom prst="rect">
+            <a:avLst/>
+          </a:prstGeom>
+          <a:noFill/>
+          <a:ln/>
+        </p:spPr>
+        <p:txBody>
+          <a:bodyPr wrap="square" lIns="0" tIns="0" rIns="0" bIns="0" rtlCol="0" anchor="ctr"/>
+          <a:lstStyle/>
+          <a:p>
+            <a:pPr indent="0" marL="0">
+              <a:buNone/>
+            </a:pPr>
+            <a:r>
+              <a:rPr lang="en-US" sz="1050" b="1" dirty="0">
+                <a:solidFill>
+                  <a:srgbClr val="2B6CB0"/>
+                </a:solidFill>
+                <a:latin typeface="Pretendard" pitchFamily="34" charset="0"/>
+                <a:ea typeface="Pretendard" pitchFamily="34" charset="-122"/>
+                <a:cs typeface="Pretendard" pitchFamily="34" charset="-120"/>
+              </a:rPr>
+              <a:t>권리관계 및 공적장부</a:t>
+            </a:r>
+            <a:endParaRPr lang="en-US" sz="1050" dirty="0"/>
+          </a:p>
+        </p:txBody>
+      </p:sp>
+      <p:sp>
+        <p:nvSpPr>
+          <p:cNvPr id="20" name="Text 18"/>
+          <p:cNvSpPr/>
+          <p:nvPr/>
+        </p:nvSpPr>
+        <p:spPr>
+          <a:xfrm>
+            <a:off x="7866583" y="4270248"/>
+            <a:ext cx="3584448" cy="1819656"/>
+          </a:xfrm>
+          <a:prstGeom prst="rect">
+            <a:avLst/>
+          </a:prstGeom>
+          <a:noFill/>
+          <a:ln/>
+        </p:spPr>
+        <p:txBody>
+          <a:bodyPr wrap="square" lIns="0" tIns="0" rIns="0" bIns="0" rtlCol="0" anchor="t"/>
+          <a:lstStyle/>
+          <a:p>
+            <a:pPr marL="342900" indent="-342900">
+              <a:lnSpc>
+                <a:spcPct val="108000"/>
+              </a:lnSpc>
+              <a:buSzPct val="100000"/>
+              <a:buChar char="•"/>
+            </a:pPr>
+            <a:r>
+              <a:rPr lang="en-US" sz="980" dirty="0">
+                <a:solidFill>
+                  <a:srgbClr val="10161F"/>
+                </a:solidFill>
+                <a:latin typeface="Pretendard" pitchFamily="34" charset="0"/>
+                <a:ea typeface="Pretendard" pitchFamily="34" charset="-122"/>
+                <a:cs typeface="Pretendard" pitchFamily="34" charset="-120"/>
+              </a:rPr>
+              <a:t>등기부등본 갑구 소유권 및 을구 근저당·가압류 확인</a:t>
+            </a:r>
+            <a:endParaRPr lang="en-US" sz="980" dirty="0"/>
+          </a:p>
+          <a:p>
+            <a:pPr marL="342900" indent="-342900">
+              <a:lnSpc>
+                <a:spcPct val="108000"/>
+              </a:lnSpc>
+              <a:spcBef>
+                <a:spcPts val="300"/>
+              </a:spcBef>
+              <a:buSzPct val="100000"/>
+              <a:buChar char="•"/>
+            </a:pPr>
+            <a:r>
+              <a:rPr lang="en-US" sz="980" dirty="0">
+                <a:solidFill>
+                  <a:srgbClr val="10161F"/>
+                </a:solidFill>
+                <a:latin typeface="Pretendard" pitchFamily="34" charset="0"/>
+                <a:ea typeface="Pretendard" pitchFamily="34" charset="-122"/>
+                <a:cs typeface="Pretendard" pitchFamily="34" charset="-120"/>
+              </a:rPr>
+              <a:t>건축물대장 기재 사항과 실물 현황 대조 점검</a:t>
+            </a:r>
+            <a:endParaRPr lang="en-US" sz="980" dirty="0"/>
+          </a:p>
+          <a:p>
+            <a:pPr marL="342900" indent="-342900">
+              <a:lnSpc>
+                <a:spcPct val="108000"/>
+              </a:lnSpc>
+              <a:spcBef>
+                <a:spcPts val="300"/>
+              </a:spcBef>
+              <a:buSzPct val="100000"/>
+              <a:buChar char="•"/>
+            </a:pPr>
+            <a:r>
+              <a:rPr lang="en-US" sz="980" dirty="0">
+                <a:solidFill>
+                  <a:srgbClr val="10161F"/>
+                </a:solidFill>
+                <a:latin typeface="Pretendard" pitchFamily="34" charset="0"/>
+                <a:ea typeface="Pretendard" pitchFamily="34" charset="-122"/>
+                <a:cs typeface="Pretendard" pitchFamily="34" charset="-120"/>
+              </a:rPr>
+              <a:t>개별공시지가 및 실거래가 비교 분석</a:t>
+            </a:r>
+            <a:endParaRPr lang="en-US" sz="980" dirty="0"/>
+          </a:p>
+        </p:txBody>
+      </p:sp>
+      <p:sp>
+        <p:nvSpPr>
+          <p:cNvPr id="21" name="Text 19"/>
+          <p:cNvSpPr/>
+          <p:nvPr/>
+        </p:nvSpPr>
+        <p:spPr>
+          <a:xfrm>
+            <a:off x="502920" y="6382512"/>
+            <a:ext cx="7315200" cy="219456"/>
+          </a:xfrm>
+          <a:prstGeom prst="rect">
+            <a:avLst/>
+          </a:prstGeom>
+          <a:noFill/>
+          <a:ln/>
+        </p:spPr>
+        <p:txBody>
+          <a:bodyPr wrap="square" lIns="0" tIns="0" rIns="0" bIns="0" rtlCol="0" anchor="ctr"/>
+          <a:lstStyle/>
+          <a:p>
+            <a:pPr indent="0" marL="0">
+              <a:buNone/>
+            </a:pPr>
+            <a:r>
+              <a:rPr lang="en-US" sz="800" dirty="0">
+                <a:solidFill>
+                  <a:srgbClr val="718096"/>
+                </a:solidFill>
+                <a:latin typeface="Pretendard" pitchFamily="34" charset="0"/>
+                <a:ea typeface="Pretendard" pitchFamily="34" charset="-122"/>
+                <a:cs typeface="Pretendard" pitchFamily="34" charset="-120"/>
+              </a:rPr>
               <a:t>크리딜   |   </a:t>
             </a:r>
             <a:endParaRPr lang="en-US" sz="800" dirty="0"/>
@@ -9847,13 +10247,13 @@
       </p:sp>
       <p:sp>
         <p:nvSpPr>
-          <p:cNvPr id="21" name="Text 19"/>
-          <p:cNvSpPr/>
-          <p:nvPr/>
-        </p:nvSpPr>
-        <p:spPr>
-          <a:xfrm>
-            <a:off x="10710367" y="6382512"/>
+          <p:cNvPr id="22" name="Text 20"/>
+          <p:cNvSpPr/>
+          <p:nvPr/>
+        </p:nvSpPr>
+        <p:spPr>
+          <a:xfrm>
+            <a:off x="10774375" y="6382512"/>
             <a:ext cx="914400" cy="219456"/>
           </a:xfrm>
           <a:prstGeom prst="rect">
@@ -9924,7 +10324,7 @@
         </p:nvSpPr>
         <p:spPr>
           <a:xfrm>
-            <a:off x="566928" y="457200"/>
+            <a:off x="502920" y="457200"/>
             <a:ext cx="384048" cy="384048"/>
           </a:xfrm>
           <a:prstGeom prst="ellipse">
@@ -9944,7 +10344,7 @@
         </p:nvSpPr>
         <p:spPr>
           <a:xfrm>
-            <a:off x="566928" y="457200"/>
+            <a:off x="502920" y="457200"/>
             <a:ext cx="384048" cy="384048"/>
           </a:xfrm>
           <a:prstGeom prst="rect">
@@ -9983,7 +10383,7 @@
         </p:nvSpPr>
         <p:spPr>
           <a:xfrm>
-            <a:off x="1133856" y="457200"/>
+            <a:off x="1069848" y="457200"/>
             <a:ext cx="10490911" cy="182880"/>
           </a:xfrm>
           <a:prstGeom prst="rect">
@@ -10008,7 +10408,7 @@
                 <a:ea typeface="Arial" pitchFamily="34" charset="-122"/>
                 <a:cs typeface="Arial" pitchFamily="34" charset="-120"/>
               </a:rPr>
-              <a:t>Rent Roll</a:t>
+              <a:t>Building</a:t>
             </a:r>
             <a:endParaRPr lang="en-US" sz="950" dirty="0"/>
           </a:p>
@@ -10022,7 +10422,7 @@
         </p:nvSpPr>
         <p:spPr>
           <a:xfrm>
-            <a:off x="1133856" y="640080"/>
+            <a:off x="1069848" y="640080"/>
             <a:ext cx="10490911" cy="365760"/>
           </a:xfrm>
           <a:prstGeom prst="rect">
@@ -10047,6 +10447,725 @@
                 <a:ea typeface="Pretendard" pitchFamily="34" charset="-122"/>
                 <a:cs typeface="Pretendard" pitchFamily="34" charset="-120"/>
               </a:rPr>
+              <a:t>건물 개요</a:t>
+            </a:r>
+            <a:endParaRPr lang="en-US" sz="2300" dirty="0"/>
+          </a:p>
+        </p:txBody>
+      </p:sp>
+      <p:sp>
+        <p:nvSpPr>
+          <p:cNvPr id="6" name="Text 4"/>
+          <p:cNvSpPr/>
+          <p:nvPr/>
+        </p:nvSpPr>
+        <p:spPr>
+          <a:xfrm>
+            <a:off x="502920" y="1371600"/>
+            <a:ext cx="6858000" cy="237744"/>
+          </a:xfrm>
+          <a:prstGeom prst="rect">
+            <a:avLst/>
+          </a:prstGeom>
+          <a:noFill/>
+          <a:ln/>
+        </p:spPr>
+        <p:txBody>
+          <a:bodyPr wrap="square" lIns="0" tIns="0" rIns="0" bIns="0" rtlCol="0" anchor="ctr"/>
+          <a:lstStyle/>
+          <a:p>
+            <a:pPr indent="0" marL="0">
+              <a:buNone/>
+            </a:pPr>
+            <a:r>
+              <a:rPr lang="en-US" sz="1100" b="1" dirty="0">
+                <a:solidFill>
+                  <a:srgbClr val="10161F"/>
+                </a:solidFill>
+                <a:latin typeface="Pretendard" pitchFamily="34" charset="0"/>
+                <a:ea typeface="Pretendard" pitchFamily="34" charset="-122"/>
+                <a:cs typeface="Pretendard" pitchFamily="34" charset="-120"/>
+              </a:rPr>
+              <a:t>건축물 개요 및 물리 스펙</a:t>
+            </a:r>
+            <a:endParaRPr lang="en-US" sz="1100" dirty="0"/>
+          </a:p>
+        </p:txBody>
+      </p:sp>
+      <p:sp>
+        <p:nvSpPr>
+          <p:cNvPr id="7" name="Text 5"/>
+          <p:cNvSpPr/>
+          <p:nvPr/>
+        </p:nvSpPr>
+        <p:spPr>
+          <a:xfrm>
+            <a:off x="502920" y="1645920"/>
+            <a:ext cx="1920240" cy="420624"/>
+          </a:xfrm>
+          <a:prstGeom prst="rect">
+            <a:avLst/>
+          </a:prstGeom>
+          <a:noFill/>
+          <a:ln/>
+        </p:spPr>
+        <p:txBody>
+          <a:bodyPr wrap="square" lIns="0" tIns="0" rIns="0" bIns="0" rtlCol="0" anchor="ctr"/>
+          <a:lstStyle/>
+          <a:p>
+            <a:pPr indent="0" marL="0">
+              <a:lnSpc>
+                <a:spcPct val="115000"/>
+              </a:lnSpc>
+              <a:buNone/>
+            </a:pPr>
+            <a:r>
+              <a:rPr lang="en-US" sz="1350" dirty="0">
+                <a:solidFill>
+                  <a:srgbClr val="718096"/>
+                </a:solidFill>
+                <a:latin typeface="Pretendard" pitchFamily="34" charset="0"/>
+                <a:ea typeface="Pretendard" pitchFamily="34" charset="-122"/>
+                <a:cs typeface="Pretendard" pitchFamily="34" charset="-120"/>
+              </a:rPr>
+              <a:t>대지면적</a:t>
+            </a:r>
+            <a:endParaRPr lang="en-US" sz="1350" dirty="0"/>
+          </a:p>
+        </p:txBody>
+      </p:sp>
+      <p:sp>
+        <p:nvSpPr>
+          <p:cNvPr id="8" name="Text 6"/>
+          <p:cNvSpPr/>
+          <p:nvPr/>
+        </p:nvSpPr>
+        <p:spPr>
+          <a:xfrm>
+            <a:off x="2423160" y="1645920"/>
+            <a:ext cx="4937760" cy="420624"/>
+          </a:xfrm>
+          <a:prstGeom prst="rect">
+            <a:avLst/>
+          </a:prstGeom>
+          <a:noFill/>
+          <a:ln/>
+        </p:spPr>
+        <p:txBody>
+          <a:bodyPr wrap="square" lIns="0" tIns="0" rIns="0" bIns="0" rtlCol="0" anchor="ctr"/>
+          <a:lstStyle/>
+          <a:p>
+            <a:pPr indent="0" marL="0">
+              <a:lnSpc>
+                <a:spcPct val="115000"/>
+              </a:lnSpc>
+              <a:buNone/>
+            </a:pPr>
+            <a:r>
+              <a:rPr lang="en-US" sz="1350" b="1" dirty="0">
+                <a:solidFill>
+                  <a:srgbClr val="10161F"/>
+                </a:solidFill>
+                <a:latin typeface="Pretendard" pitchFamily="34" charset="0"/>
+                <a:ea typeface="Pretendard" pitchFamily="34" charset="-122"/>
+                <a:cs typeface="Pretendard" pitchFamily="34" charset="-120"/>
+              </a:rPr>
+              <a:t>142.5평</a:t>
+            </a:r>
+            <a:endParaRPr lang="en-US" sz="1350" dirty="0"/>
+          </a:p>
+        </p:txBody>
+      </p:sp>
+      <p:sp>
+        <p:nvSpPr>
+          <p:cNvPr id="9" name="Shape 7"/>
+          <p:cNvSpPr/>
+          <p:nvPr/>
+        </p:nvSpPr>
+        <p:spPr>
+          <a:xfrm>
+            <a:off x="502920" y="2066544"/>
+            <a:ext cx="6858000" cy="0"/>
+          </a:xfrm>
+          <a:prstGeom prst="line">
+            <a:avLst/>
+          </a:prstGeom>
+          <a:noFill/>
+          <a:ln w="3810">
+            <a:solidFill>
+              <a:srgbClr val="CBD5E0"/>
+            </a:solidFill>
+            <a:prstDash val="solid"/>
+          </a:ln>
+        </p:spPr>
+      </p:sp>
+      <p:sp>
+        <p:nvSpPr>
+          <p:cNvPr id="10" name="Text 8"/>
+          <p:cNvSpPr/>
+          <p:nvPr/>
+        </p:nvSpPr>
+        <p:spPr>
+          <a:xfrm>
+            <a:off x="502920" y="2066544"/>
+            <a:ext cx="1920240" cy="420624"/>
+          </a:xfrm>
+          <a:prstGeom prst="rect">
+            <a:avLst/>
+          </a:prstGeom>
+          <a:noFill/>
+          <a:ln/>
+        </p:spPr>
+        <p:txBody>
+          <a:bodyPr wrap="square" lIns="0" tIns="0" rIns="0" bIns="0" rtlCol="0" anchor="ctr"/>
+          <a:lstStyle/>
+          <a:p>
+            <a:pPr indent="0" marL="0">
+              <a:lnSpc>
+                <a:spcPct val="115000"/>
+              </a:lnSpc>
+              <a:buNone/>
+            </a:pPr>
+            <a:r>
+              <a:rPr lang="en-US" sz="1350" dirty="0">
+                <a:solidFill>
+                  <a:srgbClr val="718096"/>
+                </a:solidFill>
+                <a:latin typeface="Pretendard" pitchFamily="34" charset="0"/>
+                <a:ea typeface="Pretendard" pitchFamily="34" charset="-122"/>
+                <a:cs typeface="Pretendard" pitchFamily="34" charset="-120"/>
+              </a:rPr>
+              <a:t>연면적</a:t>
+            </a:r>
+            <a:endParaRPr lang="en-US" sz="1350" dirty="0"/>
+          </a:p>
+        </p:txBody>
+      </p:sp>
+      <p:sp>
+        <p:nvSpPr>
+          <p:cNvPr id="11" name="Text 9"/>
+          <p:cNvSpPr/>
+          <p:nvPr/>
+        </p:nvSpPr>
+        <p:spPr>
+          <a:xfrm>
+            <a:off x="2423160" y="2066544"/>
+            <a:ext cx="4937760" cy="420624"/>
+          </a:xfrm>
+          <a:prstGeom prst="rect">
+            <a:avLst/>
+          </a:prstGeom>
+          <a:noFill/>
+          <a:ln/>
+        </p:spPr>
+        <p:txBody>
+          <a:bodyPr wrap="square" lIns="0" tIns="0" rIns="0" bIns="0" rtlCol="0" anchor="ctr"/>
+          <a:lstStyle/>
+          <a:p>
+            <a:pPr indent="0" marL="0">
+              <a:lnSpc>
+                <a:spcPct val="115000"/>
+              </a:lnSpc>
+              <a:buNone/>
+            </a:pPr>
+            <a:r>
+              <a:rPr lang="en-US" sz="1350" b="1" dirty="0">
+                <a:solidFill>
+                  <a:srgbClr val="10161F"/>
+                </a:solidFill>
+                <a:latin typeface="Pretendard" pitchFamily="34" charset="0"/>
+                <a:ea typeface="Pretendard" pitchFamily="34" charset="-122"/>
+                <a:cs typeface="Pretendard" pitchFamily="34" charset="-120"/>
+              </a:rPr>
+              <a:t>620.8평</a:t>
+            </a:r>
+            <a:endParaRPr lang="en-US" sz="1350" dirty="0"/>
+          </a:p>
+        </p:txBody>
+      </p:sp>
+      <p:sp>
+        <p:nvSpPr>
+          <p:cNvPr id="12" name="Shape 10"/>
+          <p:cNvSpPr/>
+          <p:nvPr/>
+        </p:nvSpPr>
+        <p:spPr>
+          <a:xfrm>
+            <a:off x="502920" y="2487168"/>
+            <a:ext cx="6858000" cy="0"/>
+          </a:xfrm>
+          <a:prstGeom prst="line">
+            <a:avLst/>
+          </a:prstGeom>
+          <a:noFill/>
+          <a:ln w="3810">
+            <a:solidFill>
+              <a:srgbClr val="CBD5E0"/>
+            </a:solidFill>
+            <a:prstDash val="solid"/>
+          </a:ln>
+        </p:spPr>
+      </p:sp>
+      <p:sp>
+        <p:nvSpPr>
+          <p:cNvPr id="13" name="Text 11"/>
+          <p:cNvSpPr/>
+          <p:nvPr/>
+        </p:nvSpPr>
+        <p:spPr>
+          <a:xfrm>
+            <a:off x="502920" y="2487168"/>
+            <a:ext cx="1920240" cy="420624"/>
+          </a:xfrm>
+          <a:prstGeom prst="rect">
+            <a:avLst/>
+          </a:prstGeom>
+          <a:noFill/>
+          <a:ln/>
+        </p:spPr>
+        <p:txBody>
+          <a:bodyPr wrap="square" lIns="0" tIns="0" rIns="0" bIns="0" rtlCol="0" anchor="ctr"/>
+          <a:lstStyle/>
+          <a:p>
+            <a:pPr indent="0" marL="0">
+              <a:lnSpc>
+                <a:spcPct val="115000"/>
+              </a:lnSpc>
+              <a:buNone/>
+            </a:pPr>
+            <a:r>
+              <a:rPr lang="en-US" sz="1350" dirty="0">
+                <a:solidFill>
+                  <a:srgbClr val="718096"/>
+                </a:solidFill>
+                <a:latin typeface="Pretendard" pitchFamily="34" charset="0"/>
+                <a:ea typeface="Pretendard" pitchFamily="34" charset="-122"/>
+                <a:cs typeface="Pretendard" pitchFamily="34" charset="-120"/>
+              </a:rPr>
+              <a:t>준공</a:t>
+            </a:r>
+            <a:endParaRPr lang="en-US" sz="1350" dirty="0"/>
+          </a:p>
+        </p:txBody>
+      </p:sp>
+      <p:sp>
+        <p:nvSpPr>
+          <p:cNvPr id="14" name="Text 12"/>
+          <p:cNvSpPr/>
+          <p:nvPr/>
+        </p:nvSpPr>
+        <p:spPr>
+          <a:xfrm>
+            <a:off x="2423160" y="2487168"/>
+            <a:ext cx="4937760" cy="420624"/>
+          </a:xfrm>
+          <a:prstGeom prst="rect">
+            <a:avLst/>
+          </a:prstGeom>
+          <a:noFill/>
+          <a:ln/>
+        </p:spPr>
+        <p:txBody>
+          <a:bodyPr wrap="square" lIns="0" tIns="0" rIns="0" bIns="0" rtlCol="0" anchor="ctr"/>
+          <a:lstStyle/>
+          <a:p>
+            <a:pPr indent="0" marL="0">
+              <a:lnSpc>
+                <a:spcPct val="115000"/>
+              </a:lnSpc>
+              <a:buNone/>
+            </a:pPr>
+            <a:r>
+              <a:rPr lang="en-US" sz="1350" b="1" dirty="0">
+                <a:solidFill>
+                  <a:srgbClr val="10161F"/>
+                </a:solidFill>
+                <a:latin typeface="Pretendard" pitchFamily="34" charset="0"/>
+                <a:ea typeface="Pretendard" pitchFamily="34" charset="-122"/>
+                <a:cs typeface="Pretendard" pitchFamily="34" charset="-120"/>
+              </a:rPr>
+              <a:t>2017년</a:t>
+            </a:r>
+            <a:endParaRPr lang="en-US" sz="1350" dirty="0"/>
+          </a:p>
+        </p:txBody>
+      </p:sp>
+      <p:sp>
+        <p:nvSpPr>
+          <p:cNvPr id="15" name="Shape 13"/>
+          <p:cNvSpPr/>
+          <p:nvPr/>
+        </p:nvSpPr>
+        <p:spPr>
+          <a:xfrm>
+            <a:off x="7540600" y="1371600"/>
+            <a:ext cx="0" cy="4754880"/>
+          </a:xfrm>
+          <a:prstGeom prst="line">
+            <a:avLst/>
+          </a:prstGeom>
+          <a:noFill/>
+          <a:ln w="8890">
+            <a:solidFill>
+              <a:srgbClr val="B98A2E"/>
+            </a:solidFill>
+            <a:prstDash val="solid"/>
+          </a:ln>
+        </p:spPr>
+      </p:sp>
+      <p:sp>
+        <p:nvSpPr>
+          <p:cNvPr id="16" name="Shape 14"/>
+          <p:cNvSpPr/>
+          <p:nvPr/>
+        </p:nvSpPr>
+        <p:spPr>
+          <a:xfrm>
+            <a:off x="7720279" y="1645920"/>
+            <a:ext cx="3840480" cy="1645920"/>
+          </a:xfrm>
+          <a:prstGeom prst="roundRect">
+            <a:avLst>
+              <a:gd name="adj" fmla="val 3333"/>
+            </a:avLst>
+          </a:prstGeom>
+          <a:solidFill>
+            <a:srgbClr val="F3EBDA"/>
+          </a:solidFill>
+          <a:ln/>
+        </p:spPr>
+      </p:sp>
+      <p:sp>
+        <p:nvSpPr>
+          <p:cNvPr id="17" name="Shape 15"/>
+          <p:cNvSpPr/>
+          <p:nvPr/>
+        </p:nvSpPr>
+        <p:spPr>
+          <a:xfrm>
+            <a:off x="7720279" y="1700784"/>
+            <a:ext cx="36576" cy="1536192"/>
+          </a:xfrm>
+          <a:prstGeom prst="rect">
+            <a:avLst/>
+          </a:prstGeom>
+          <a:solidFill>
+            <a:srgbClr val="977024"/>
+          </a:solidFill>
+          <a:ln/>
+        </p:spPr>
+      </p:sp>
+      <p:sp>
+        <p:nvSpPr>
+          <p:cNvPr id="18" name="Text 16"/>
+          <p:cNvSpPr/>
+          <p:nvPr/>
+        </p:nvSpPr>
+        <p:spPr>
+          <a:xfrm>
+            <a:off x="7866583" y="1737360"/>
+            <a:ext cx="3584448" cy="201168"/>
+          </a:xfrm>
+          <a:prstGeom prst="rect">
+            <a:avLst/>
+          </a:prstGeom>
+          <a:noFill/>
+          <a:ln/>
+        </p:spPr>
+        <p:txBody>
+          <a:bodyPr wrap="square" lIns="0" tIns="0" rIns="0" bIns="0" rtlCol="0" anchor="ctr"/>
+          <a:lstStyle/>
+          <a:p>
+            <a:pPr indent="0" marL="0">
+              <a:buNone/>
+            </a:pPr>
+            <a:endParaRPr lang="en-US" sz="1050" dirty="0"/>
+          </a:p>
+        </p:txBody>
+      </p:sp>
+      <p:sp>
+        <p:nvSpPr>
+          <p:cNvPr id="19" name="Text 17"/>
+          <p:cNvSpPr/>
+          <p:nvPr/>
+        </p:nvSpPr>
+        <p:spPr>
+          <a:xfrm>
+            <a:off x="7866583" y="1938528"/>
+            <a:ext cx="3584448" cy="1316736"/>
+          </a:xfrm>
+          <a:prstGeom prst="rect">
+            <a:avLst/>
+          </a:prstGeom>
+          <a:noFill/>
+          <a:ln/>
+        </p:spPr>
+        <p:txBody>
+          <a:bodyPr wrap="square" lIns="0" tIns="0" rIns="0" bIns="0" rtlCol="0" anchor="t"/>
+          <a:lstStyle/>
+          <a:p>
+            <a:pPr indent="0" marL="0">
+              <a:lnSpc>
+                <a:spcPct val="108000"/>
+              </a:lnSpc>
+              <a:buNone/>
+            </a:pPr>
+            <a:r>
+              <a:rPr lang="en-US" sz="980" dirty="0">
+                <a:solidFill>
+                  <a:srgbClr val="10161F"/>
+                </a:solidFill>
+                <a:latin typeface="Pretendard" pitchFamily="34" charset="0"/>
+                <a:ea typeface="Pretendard" pitchFamily="34" charset="-122"/>
+                <a:cs typeface="Pretendard" pitchFamily="34" charset="-120"/>
+              </a:rPr>
+              <a:t>서초 메디컬 빌딩은 지하2층~지상7층 규모의 올근생 빌딩입니다.</a:t>
+            </a:r>
+            <a:endParaRPr lang="en-US" sz="980" dirty="0"/>
+          </a:p>
+        </p:txBody>
+      </p:sp>
+      <p:sp>
+        <p:nvSpPr>
+          <p:cNvPr id="20" name="Text 18"/>
+          <p:cNvSpPr/>
+          <p:nvPr/>
+        </p:nvSpPr>
+        <p:spPr>
+          <a:xfrm>
+            <a:off x="502920" y="6382512"/>
+            <a:ext cx="7315200" cy="219456"/>
+          </a:xfrm>
+          <a:prstGeom prst="rect">
+            <a:avLst/>
+          </a:prstGeom>
+          <a:noFill/>
+          <a:ln/>
+        </p:spPr>
+        <p:txBody>
+          <a:bodyPr wrap="square" lIns="0" tIns="0" rIns="0" bIns="0" rtlCol="0" anchor="ctr"/>
+          <a:lstStyle/>
+          <a:p>
+            <a:pPr indent="0" marL="0">
+              <a:buNone/>
+            </a:pPr>
+            <a:r>
+              <a:rPr lang="en-US" sz="800" dirty="0">
+                <a:solidFill>
+                  <a:srgbClr val="718096"/>
+                </a:solidFill>
+                <a:latin typeface="Pretendard" pitchFamily="34" charset="0"/>
+                <a:ea typeface="Pretendard" pitchFamily="34" charset="-122"/>
+                <a:cs typeface="Pretendard" pitchFamily="34" charset="-120"/>
+              </a:rPr>
+              <a:t>크리딜   |   </a:t>
+            </a:r>
+            <a:endParaRPr lang="en-US" sz="800" dirty="0"/>
+          </a:p>
+        </p:txBody>
+      </p:sp>
+      <p:sp>
+        <p:nvSpPr>
+          <p:cNvPr id="21" name="Text 19"/>
+          <p:cNvSpPr/>
+          <p:nvPr/>
+        </p:nvSpPr>
+        <p:spPr>
+          <a:xfrm>
+            <a:off x="10774375" y="6382512"/>
+            <a:ext cx="914400" cy="219456"/>
+          </a:xfrm>
+          <a:prstGeom prst="rect">
+            <a:avLst/>
+          </a:prstGeom>
+          <a:noFill/>
+          <a:ln/>
+        </p:spPr>
+        <p:txBody>
+          <a:bodyPr wrap="square" lIns="0" tIns="0" rIns="0" bIns="0" rtlCol="0" anchor="ctr"/>
+          <a:lstStyle/>
+          <a:p>
+            <a:pPr algn="r" indent="0" marL="0">
+              <a:buNone/>
+            </a:pPr>
+            <a:r>
+              <a:rPr lang="en-US" sz="900" b="1" dirty="0">
+                <a:solidFill>
+                  <a:srgbClr val="B98A2E"/>
+                </a:solidFill>
+                <a:latin typeface="Arial" pitchFamily="34" charset="0"/>
+                <a:ea typeface="Arial" pitchFamily="34" charset="-122"/>
+                <a:cs typeface="Arial" pitchFamily="34" charset="-120"/>
+              </a:rPr>
+              <a:t>5</a:t>
+            </a:r>
+            <a:endParaRPr lang="en-US" sz="900" dirty="0"/>
+          </a:p>
+        </p:txBody>
+      </p:sp>
+    </p:spTree>
+  </p:cSld>
+  <p:clrMapOvr>
+    <a:masterClrMapping/>
+  </p:clrMapOvr>
+</p:sld>
+</file>
+
+<file path=ppt/slides/slide6.xml><?xml version="1.0" encoding="utf-8"?>
+<p:sld xmlns:a="http://schemas.openxmlformats.org/drawingml/2006/main" xmlns:r="http://schemas.openxmlformats.org/officeDocument/2006/relationships" xmlns:p="http://schemas.openxmlformats.org/presentationml/2006/main">
+  <p:cSld name="Slide 6">
+    <p:bg>
+      <p:bgPr>
+        <a:solidFill>
+          <a:srgbClr val="FFFFFF"/>
+        </a:solidFill>
+      </p:bgPr>
+    </p:bg>
+    <p:spTree>
+      <p:nvGrpSpPr>
+        <p:cNvPr id="1" name=""/>
+        <p:cNvGrpSpPr/>
+        <p:nvPr/>
+      </p:nvGrpSpPr>
+      <p:grpSpPr>
+        <a:xfrm>
+          <a:off x="0" y="0"/>
+          <a:ext cx="0" cy="0"/>
+          <a:chOff x="0" y="0"/>
+          <a:chExt cx="0" cy="0"/>
+        </a:xfrm>
+      </p:grpSpPr>
+      <p:sp>
+        <p:nvSpPr>
+          <p:cNvPr id="2" name="Shape 0"/>
+          <p:cNvSpPr/>
+          <p:nvPr/>
+        </p:nvSpPr>
+        <p:spPr>
+          <a:xfrm>
+            <a:off x="502920" y="457200"/>
+            <a:ext cx="384048" cy="384048"/>
+          </a:xfrm>
+          <a:prstGeom prst="ellipse">
+            <a:avLst/>
+          </a:prstGeom>
+          <a:solidFill>
+            <a:srgbClr val="B98A2E"/>
+          </a:solidFill>
+          <a:ln/>
+        </p:spPr>
+      </p:sp>
+      <p:sp>
+        <p:nvSpPr>
+          <p:cNvPr id="3" name="Text 1"/>
+          <p:cNvSpPr/>
+          <p:nvPr/>
+        </p:nvSpPr>
+        <p:spPr>
+          <a:xfrm>
+            <a:off x="502920" y="457200"/>
+            <a:ext cx="384048" cy="384048"/>
+          </a:xfrm>
+          <a:prstGeom prst="rect">
+            <a:avLst/>
+          </a:prstGeom>
+          <a:noFill/>
+          <a:ln/>
+        </p:spPr>
+        <p:txBody>
+          <a:bodyPr wrap="square" lIns="0" tIns="0" rIns="0" bIns="0" rtlCol="0" anchor="ctr"/>
+          <a:lstStyle/>
+          <a:p>
+            <a:pPr algn="ctr" indent="0" marL="0">
+              <a:buNone/>
+            </a:pPr>
+            <a:r>
+              <a:rPr lang="en-US" sz="1300" b="1" dirty="0">
+                <a:solidFill>
+                  <a:srgbClr val="FFFFFF"/>
+                </a:solidFill>
+                <a:latin typeface="Arial" pitchFamily="34" charset="0"/>
+                <a:ea typeface="Arial" pitchFamily="34" charset="-122"/>
+                <a:cs typeface="Arial" pitchFamily="34" charset="-120"/>
+              </a:rPr>
+              <a:t>06</a:t>
+            </a:r>
+            <a:endParaRPr lang="en-US" sz="1300" dirty="0"/>
+          </a:p>
+        </p:txBody>
+      </p:sp>
+      <p:sp>
+        <p:nvSpPr>
+          <p:cNvPr id="4" name="Text 2"/>
+          <p:cNvSpPr/>
+          <p:nvPr/>
+        </p:nvSpPr>
+        <p:spPr>
+          <a:xfrm>
+            <a:off x="1069848" y="457200"/>
+            <a:ext cx="10490911" cy="182880"/>
+          </a:xfrm>
+          <a:prstGeom prst="rect">
+            <a:avLst/>
+          </a:prstGeom>
+          <a:noFill/>
+          <a:ln/>
+        </p:spPr>
+        <p:txBody>
+          <a:bodyPr wrap="square" lIns="0" tIns="0" rIns="0" bIns="0" rtlCol="0" anchor="ctr"/>
+          <a:lstStyle/>
+          <a:p>
+            <a:pPr indent="0" marL="0">
+              <a:buNone/>
+            </a:pPr>
+            <a:r>
+              <a:rPr lang="en-US" sz="950" b="1" spc="200" kern="0" dirty="0">
+                <a:solidFill>
+                  <a:srgbClr val="B98A2E"/>
+                </a:solidFill>
+                <a:latin typeface="Arial" pitchFamily="34" charset="0"/>
+                <a:ea typeface="Arial" pitchFamily="34" charset="-122"/>
+                <a:cs typeface="Arial" pitchFamily="34" charset="-120"/>
+              </a:rPr>
+              <a:t>Rent Roll</a:t>
+            </a:r>
+            <a:endParaRPr lang="en-US" sz="950" dirty="0"/>
+          </a:p>
+        </p:txBody>
+      </p:sp>
+      <p:sp>
+        <p:nvSpPr>
+          <p:cNvPr id="5" name="Text 3"/>
+          <p:cNvSpPr/>
+          <p:nvPr/>
+        </p:nvSpPr>
+        <p:spPr>
+          <a:xfrm>
+            <a:off x="1069848" y="640080"/>
+            <a:ext cx="10490911" cy="365760"/>
+          </a:xfrm>
+          <a:prstGeom prst="rect">
+            <a:avLst/>
+          </a:prstGeom>
+          <a:noFill/>
+          <a:ln/>
+        </p:spPr>
+        <p:txBody>
+          <a:bodyPr wrap="square" lIns="0" tIns="0" rIns="0" bIns="0" rtlCol="0" anchor="ctr"/>
+          <a:lstStyle/>
+          <a:p>
+            <a:pPr indent="0" marL="0">
+              <a:buNone/>
+            </a:pPr>
+            <a:r>
+              <a:rPr lang="en-US" sz="2300" b="1" dirty="0">
+                <a:solidFill>
+                  <a:srgbClr val="10161F"/>
+                </a:solidFill>
+                <a:latin typeface="Pretendard" pitchFamily="34" charset="0"/>
+                <a:ea typeface="Pretendard" pitchFamily="34" charset="-122"/>
+                <a:cs typeface="Pretendard" pitchFamily="34" charset="-120"/>
+              </a:rPr>
               <a:t>렌트롤</a:t>
             </a:r>
             <a:endParaRPr lang="en-US" sz="2300" dirty="0"/>
@@ -10055,7 +11174,7 @@
       </p:sp>
       <p:graphicFrame>
         <p:nvGraphicFramePr>
-          <p:cNvPr id="6" name="Table 0"/>
+          <p:cNvPr id="7" name="Table 0"/>
           <p:cNvGraphicFramePr>
             <a:graphicFrameLocks noGrp="1"/>
           </p:cNvGraphicFramePr>
@@ -10068,7 +11187,7 @@
           </p:nvPr>
         </p:nvGraphicFramePr>
         <p:xfrm>
-          <a:off x="566928" y="1645920"/>
+          <a:off x="502920" y="1645920"/>
           <a:ext cx="11057839" cy="914400"/>
         </p:xfrm>
         <a:graphic>
@@ -10093,7 +11212,7 @@
                       <a:r>
                         <a:rPr lang="en-US" sz="1300" b="1" dirty="0">
                           <a:solidFill>
-                            <a:srgbClr val="718096"/>
+                            <a:srgbClr val="FFFFFF"/>
                           </a:solidFill>
                           <a:latin typeface="Pretendard" pitchFamily="34" charset="0"/>
                           <a:ea typeface="Pretendard" pitchFamily="34" charset="-122"/>
@@ -10146,7 +11265,7 @@
                       <a:tailEnd type="none" w="med" len="med"/>
                     </a:lnB>
                     <a:solidFill>
-                      <a:srgbClr val="F7FAFC"/>
+                      <a:srgbClr val="10161F"/>
                     </a:solidFill>
                   </a:tcPr>
                 </a:tc>
@@ -10161,7 +11280,7 @@
                       <a:r>
                         <a:rPr lang="en-US" sz="1300" b="1" dirty="0">
                           <a:solidFill>
-                            <a:srgbClr val="718096"/>
+                            <a:srgbClr val="FFFFFF"/>
                           </a:solidFill>
                           <a:latin typeface="Pretendard" pitchFamily="34" charset="0"/>
                           <a:ea typeface="Pretendard" pitchFamily="34" charset="-122"/>
@@ -10214,7 +11333,7 @@
                       <a:tailEnd type="none" w="med" len="med"/>
                     </a:lnB>
                     <a:solidFill>
-                      <a:srgbClr val="F7FAFC"/>
+                      <a:srgbClr val="10161F"/>
                     </a:solidFill>
                   </a:tcPr>
                 </a:tc>
@@ -10229,7 +11348,7 @@
                       <a:r>
                         <a:rPr lang="en-US" sz="1300" b="1" dirty="0">
                           <a:solidFill>
-                            <a:srgbClr val="718096"/>
+                            <a:srgbClr val="FFFFFF"/>
                           </a:solidFill>
                           <a:latin typeface="Pretendard" pitchFamily="34" charset="0"/>
                           <a:ea typeface="Pretendard" pitchFamily="34" charset="-122"/>
@@ -10282,7 +11401,7 @@
                       <a:tailEnd type="none" w="med" len="med"/>
                     </a:lnB>
                     <a:solidFill>
-                      <a:srgbClr val="F7FAFC"/>
+                      <a:srgbClr val="10161F"/>
                     </a:solidFill>
                   </a:tcPr>
                 </a:tc>
@@ -10297,7 +11416,7 @@
                       <a:r>
                         <a:rPr lang="en-US" sz="1300" b="1" dirty="0">
                           <a:solidFill>
-                            <a:srgbClr val="718096"/>
+                            <a:srgbClr val="FFFFFF"/>
                           </a:solidFill>
                           <a:latin typeface="Pretendard" pitchFamily="34" charset="0"/>
                           <a:ea typeface="Pretendard" pitchFamily="34" charset="-122"/>
@@ -10350,7 +11469,7 @@
                       <a:tailEnd type="none" w="med" len="med"/>
                     </a:lnB>
                     <a:solidFill>
-                      <a:srgbClr val="F7FAFC"/>
+                      <a:srgbClr val="10161F"/>
                     </a:solidFill>
                   </a:tcPr>
                 </a:tc>
@@ -10915,7 +12034,7 @@
         </p:nvSpPr>
         <p:spPr>
           <a:xfrm>
-            <a:off x="566928" y="6382512"/>
+            <a:off x="502920" y="6382512"/>
             <a:ext cx="7315200" cy="219456"/>
           </a:xfrm>
           <a:prstGeom prst="rect">
@@ -10954,619 +12073,7 @@
         </p:nvSpPr>
         <p:spPr>
           <a:xfrm>
-            <a:off x="10710367" y="6382512"/>
-            <a:ext cx="914400" cy="219456"/>
-          </a:xfrm>
-          <a:prstGeom prst="rect">
-            <a:avLst/>
-          </a:prstGeom>
-          <a:noFill/>
-          <a:ln/>
-        </p:spPr>
-        <p:txBody>
-          <a:bodyPr wrap="square" lIns="0" tIns="0" rIns="0" bIns="0" rtlCol="0" anchor="ctr"/>
-          <a:lstStyle/>
-          <a:p>
-            <a:pPr algn="r" indent="0" marL="0">
-              <a:buNone/>
-            </a:pPr>
-            <a:r>
-              <a:rPr lang="en-US" sz="900" b="1" dirty="0">
-                <a:solidFill>
-                  <a:srgbClr val="B98A2E"/>
-                </a:solidFill>
-                <a:latin typeface="Arial" pitchFamily="34" charset="0"/>
-                <a:ea typeface="Arial" pitchFamily="34" charset="-122"/>
-                <a:cs typeface="Arial" pitchFamily="34" charset="-120"/>
-              </a:rPr>
-              <a:t>5</a:t>
-            </a:r>
-            <a:endParaRPr lang="en-US" sz="900" dirty="0"/>
-          </a:p>
-        </p:txBody>
-      </p:sp>
-    </p:spTree>
-  </p:cSld>
-  <p:clrMapOvr>
-    <a:masterClrMapping/>
-  </p:clrMapOvr>
-</p:sld>
-</file>
-
-<file path=ppt/slides/slide6.xml><?xml version="1.0" encoding="utf-8"?>
-<p:sld xmlns:a="http://schemas.openxmlformats.org/drawingml/2006/main" xmlns:r="http://schemas.openxmlformats.org/officeDocument/2006/relationships" xmlns:p="http://schemas.openxmlformats.org/presentationml/2006/main">
-  <p:cSld name="Slide 6">
-    <p:bg>
-      <p:bgPr>
-        <a:solidFill>
-          <a:srgbClr val="FFFFFF"/>
-        </a:solidFill>
-      </p:bgPr>
-    </p:bg>
-    <p:spTree>
-      <p:nvGrpSpPr>
-        <p:cNvPr id="1" name=""/>
-        <p:cNvGrpSpPr/>
-        <p:nvPr/>
-      </p:nvGrpSpPr>
-      <p:grpSpPr>
-        <a:xfrm>
-          <a:off x="0" y="0"/>
-          <a:ext cx="0" cy="0"/>
-          <a:chOff x="0" y="0"/>
-          <a:chExt cx="0" cy="0"/>
-        </a:xfrm>
-      </p:grpSpPr>
-      <p:sp>
-        <p:nvSpPr>
-          <p:cNvPr id="2" name="Shape 0"/>
-          <p:cNvSpPr/>
-          <p:nvPr/>
-        </p:nvSpPr>
-        <p:spPr>
-          <a:xfrm>
-            <a:off x="566928" y="457200"/>
-            <a:ext cx="384048" cy="384048"/>
-          </a:xfrm>
-          <a:prstGeom prst="ellipse">
-            <a:avLst/>
-          </a:prstGeom>
-          <a:solidFill>
-            <a:srgbClr val="B98A2E"/>
-          </a:solidFill>
-          <a:ln/>
-        </p:spPr>
-      </p:sp>
-      <p:sp>
-        <p:nvSpPr>
-          <p:cNvPr id="3" name="Text 1"/>
-          <p:cNvSpPr/>
-          <p:nvPr/>
-        </p:nvSpPr>
-        <p:spPr>
-          <a:xfrm>
-            <a:off x="566928" y="457200"/>
-            <a:ext cx="384048" cy="384048"/>
-          </a:xfrm>
-          <a:prstGeom prst="rect">
-            <a:avLst/>
-          </a:prstGeom>
-          <a:noFill/>
-          <a:ln/>
-        </p:spPr>
-        <p:txBody>
-          <a:bodyPr wrap="square" lIns="0" tIns="0" rIns="0" bIns="0" rtlCol="0" anchor="ctr"/>
-          <a:lstStyle/>
-          <a:p>
-            <a:pPr algn="ctr" indent="0" marL="0">
-              <a:buNone/>
-            </a:pPr>
-            <a:r>
-              <a:rPr lang="en-US" sz="1300" b="1" dirty="0">
-                <a:solidFill>
-                  <a:srgbClr val="FFFFFF"/>
-                </a:solidFill>
-                <a:latin typeface="Arial" pitchFamily="34" charset="0"/>
-                <a:ea typeface="Arial" pitchFamily="34" charset="-122"/>
-                <a:cs typeface="Arial" pitchFamily="34" charset="-120"/>
-              </a:rPr>
-              <a:t>06</a:t>
-            </a:r>
-            <a:endParaRPr lang="en-US" sz="1300" dirty="0"/>
-          </a:p>
-        </p:txBody>
-      </p:sp>
-      <p:sp>
-        <p:nvSpPr>
-          <p:cNvPr id="4" name="Text 2"/>
-          <p:cNvSpPr/>
-          <p:nvPr/>
-        </p:nvSpPr>
-        <p:spPr>
-          <a:xfrm>
-            <a:off x="1133856" y="457200"/>
-            <a:ext cx="10490911" cy="182880"/>
-          </a:xfrm>
-          <a:prstGeom prst="rect">
-            <a:avLst/>
-          </a:prstGeom>
-          <a:noFill/>
-          <a:ln/>
-        </p:spPr>
-        <p:txBody>
-          <a:bodyPr wrap="square" lIns="0" tIns="0" rIns="0" bIns="0" rtlCol="0" anchor="ctr"/>
-          <a:lstStyle/>
-          <a:p>
-            <a:pPr indent="0" marL="0">
-              <a:buNone/>
-            </a:pPr>
-            <a:r>
-              <a:rPr lang="en-US" sz="950" b="1" spc="200" kern="0" dirty="0">
-                <a:solidFill>
-                  <a:srgbClr val="B98A2E"/>
-                </a:solidFill>
-                <a:latin typeface="Arial" pitchFamily="34" charset="0"/>
-                <a:ea typeface="Arial" pitchFamily="34" charset="-122"/>
-                <a:cs typeface="Arial" pitchFamily="34" charset="-120"/>
-              </a:rPr>
-              <a:t>Stability</a:t>
-            </a:r>
-            <a:endParaRPr lang="en-US" sz="950" dirty="0"/>
-          </a:p>
-        </p:txBody>
-      </p:sp>
-      <p:sp>
-        <p:nvSpPr>
-          <p:cNvPr id="5" name="Text 3"/>
-          <p:cNvSpPr/>
-          <p:nvPr/>
-        </p:nvSpPr>
-        <p:spPr>
-          <a:xfrm>
-            <a:off x="1133856" y="640080"/>
-            <a:ext cx="10490911" cy="365760"/>
-          </a:xfrm>
-          <a:prstGeom prst="rect">
-            <a:avLst/>
-          </a:prstGeom>
-          <a:noFill/>
-          <a:ln/>
-        </p:spPr>
-        <p:txBody>
-          <a:bodyPr wrap="square" lIns="0" tIns="0" rIns="0" bIns="0" rtlCol="0" anchor="ctr"/>
-          <a:lstStyle/>
-          <a:p>
-            <a:pPr indent="0" marL="0">
-              <a:buNone/>
-            </a:pPr>
-            <a:r>
-              <a:rPr lang="en-US" sz="2300" b="1" dirty="0">
-                <a:solidFill>
-                  <a:srgbClr val="10161F"/>
-                </a:solidFill>
-                <a:latin typeface="Pretendard" pitchFamily="34" charset="0"/>
-                <a:ea typeface="Pretendard" pitchFamily="34" charset="-122"/>
-                <a:cs typeface="Pretendard" pitchFamily="34" charset="-120"/>
-              </a:rPr>
-              <a:t>임대안정성</a:t>
-            </a:r>
-            <a:endParaRPr lang="en-US" sz="2300" dirty="0"/>
-          </a:p>
-        </p:txBody>
-      </p:sp>
-      <p:sp>
-        <p:nvSpPr>
-          <p:cNvPr id="6" name="Text 4"/>
-          <p:cNvSpPr/>
-          <p:nvPr/>
-        </p:nvSpPr>
-        <p:spPr>
-          <a:xfrm>
-            <a:off x="566928" y="1371600"/>
-            <a:ext cx="6858000" cy="237744"/>
-          </a:xfrm>
-          <a:prstGeom prst="rect">
-            <a:avLst/>
-          </a:prstGeom>
-          <a:noFill/>
-          <a:ln/>
-        </p:spPr>
-        <p:txBody>
-          <a:bodyPr wrap="square" lIns="0" tIns="0" rIns="0" bIns="0" rtlCol="0" anchor="ctr"/>
-          <a:lstStyle/>
-          <a:p>
-            <a:pPr indent="0" marL="0">
-              <a:buNone/>
-            </a:pPr>
-            <a:r>
-              <a:rPr lang="en-US" sz="1100" b="1" dirty="0">
-                <a:solidFill>
-                  <a:srgbClr val="10161F"/>
-                </a:solidFill>
-                <a:latin typeface="Pretendard" pitchFamily="34" charset="0"/>
-                <a:ea typeface="Pretendard" pitchFamily="34" charset="-122"/>
-                <a:cs typeface="Pretendard" pitchFamily="34" charset="-120"/>
-              </a:rPr>
-              <a:t>건축물 개요 및 물리 스펙</a:t>
-            </a:r>
-            <a:endParaRPr lang="en-US" sz="1100" dirty="0"/>
-          </a:p>
-        </p:txBody>
-      </p:sp>
-      <p:sp>
-        <p:nvSpPr>
-          <p:cNvPr id="7" name="Text 5"/>
-          <p:cNvSpPr/>
-          <p:nvPr/>
-        </p:nvSpPr>
-        <p:spPr>
-          <a:xfrm>
-            <a:off x="566928" y="1645920"/>
-            <a:ext cx="2606040" cy="438912"/>
-          </a:xfrm>
-          <a:prstGeom prst="rect">
-            <a:avLst/>
-          </a:prstGeom>
-          <a:noFill/>
-          <a:ln/>
-        </p:spPr>
-        <p:txBody>
-          <a:bodyPr wrap="square" lIns="0" tIns="0" rIns="0" bIns="0" rtlCol="0" anchor="ctr"/>
-          <a:lstStyle/>
-          <a:p>
-            <a:pPr indent="0" marL="0">
-              <a:lnSpc>
-                <a:spcPct val="120000"/>
-              </a:lnSpc>
-              <a:buNone/>
-            </a:pPr>
-            <a:r>
-              <a:rPr lang="en-US" sz="1350" dirty="0">
-                <a:solidFill>
-                  <a:srgbClr val="718096"/>
-                </a:solidFill>
-                <a:latin typeface="Pretendard" pitchFamily="34" charset="0"/>
-                <a:ea typeface="Pretendard" pitchFamily="34" charset="-122"/>
-                <a:cs typeface="Pretendard" pitchFamily="34" charset="-120"/>
-              </a:rPr>
-              <a:t>1F</a:t>
-            </a:r>
-            <a:endParaRPr lang="en-US" sz="1350" dirty="0"/>
-          </a:p>
-        </p:txBody>
-      </p:sp>
-      <p:sp>
-        <p:nvSpPr>
-          <p:cNvPr id="8" name="Text 6"/>
-          <p:cNvSpPr/>
-          <p:nvPr/>
-        </p:nvSpPr>
-        <p:spPr>
-          <a:xfrm>
-            <a:off x="3172968" y="1645920"/>
-            <a:ext cx="4251960" cy="438912"/>
-          </a:xfrm>
-          <a:prstGeom prst="rect">
-            <a:avLst/>
-          </a:prstGeom>
-          <a:noFill/>
-          <a:ln/>
-        </p:spPr>
-        <p:txBody>
-          <a:bodyPr wrap="square" lIns="0" tIns="0" rIns="0" bIns="0" rtlCol="0" anchor="ctr"/>
-          <a:lstStyle/>
-          <a:p>
-            <a:pPr indent="0" marL="0">
-              <a:lnSpc>
-                <a:spcPct val="120000"/>
-              </a:lnSpc>
-              <a:buNone/>
-            </a:pPr>
-            <a:r>
-              <a:rPr lang="en-US" sz="1350" b="1" dirty="0">
-                <a:solidFill>
-                  <a:srgbClr val="10161F"/>
-                </a:solidFill>
-                <a:latin typeface="Pretendard" pitchFamily="34" charset="0"/>
-                <a:ea typeface="Pretendard" pitchFamily="34" charset="-122"/>
-                <a:cs typeface="Pretendard" pitchFamily="34" charset="-120"/>
-              </a:rPr>
-              <a:t>약국 (3억)</a:t>
-            </a:r>
-            <a:endParaRPr lang="en-US" sz="1350" dirty="0"/>
-          </a:p>
-        </p:txBody>
-      </p:sp>
-      <p:sp>
-        <p:nvSpPr>
-          <p:cNvPr id="9" name="Shape 7"/>
-          <p:cNvSpPr/>
-          <p:nvPr/>
-        </p:nvSpPr>
-        <p:spPr>
-          <a:xfrm>
-            <a:off x="566928" y="2084832"/>
-            <a:ext cx="6858000" cy="0"/>
-          </a:xfrm>
-          <a:prstGeom prst="line">
-            <a:avLst/>
-          </a:prstGeom>
-          <a:noFill/>
-          <a:ln w="3810">
-            <a:solidFill>
-              <a:srgbClr val="CBD5E0"/>
-            </a:solidFill>
-            <a:prstDash val="solid"/>
-          </a:ln>
-        </p:spPr>
-      </p:sp>
-      <p:sp>
-        <p:nvSpPr>
-          <p:cNvPr id="10" name="Text 8"/>
-          <p:cNvSpPr/>
-          <p:nvPr/>
-        </p:nvSpPr>
-        <p:spPr>
-          <a:xfrm>
-            <a:off x="566928" y="2084832"/>
-            <a:ext cx="2606040" cy="438912"/>
-          </a:xfrm>
-          <a:prstGeom prst="rect">
-            <a:avLst/>
-          </a:prstGeom>
-          <a:noFill/>
-          <a:ln/>
-        </p:spPr>
-        <p:txBody>
-          <a:bodyPr wrap="square" lIns="0" tIns="0" rIns="0" bIns="0" rtlCol="0" anchor="ctr"/>
-          <a:lstStyle/>
-          <a:p>
-            <a:pPr indent="0" marL="0">
-              <a:lnSpc>
-                <a:spcPct val="120000"/>
-              </a:lnSpc>
-              <a:buNone/>
-            </a:pPr>
-            <a:r>
-              <a:rPr lang="en-US" sz="1350" dirty="0">
-                <a:solidFill>
-                  <a:srgbClr val="718096"/>
-                </a:solidFill>
-                <a:latin typeface="Pretendard" pitchFamily="34" charset="0"/>
-                <a:ea typeface="Pretendard" pitchFamily="34" charset="-122"/>
-                <a:cs typeface="Pretendard" pitchFamily="34" charset="-120"/>
-              </a:rPr>
-              <a:t>2F</a:t>
-            </a:r>
-            <a:endParaRPr lang="en-US" sz="1350" dirty="0"/>
-          </a:p>
-        </p:txBody>
-      </p:sp>
-      <p:sp>
-        <p:nvSpPr>
-          <p:cNvPr id="11" name="Text 9"/>
-          <p:cNvSpPr/>
-          <p:nvPr/>
-        </p:nvSpPr>
-        <p:spPr>
-          <a:xfrm>
-            <a:off x="3172968" y="2084832"/>
-            <a:ext cx="4251960" cy="438912"/>
-          </a:xfrm>
-          <a:prstGeom prst="rect">
-            <a:avLst/>
-          </a:prstGeom>
-          <a:noFill/>
-          <a:ln/>
-        </p:spPr>
-        <p:txBody>
-          <a:bodyPr wrap="square" lIns="0" tIns="0" rIns="0" bIns="0" rtlCol="0" anchor="ctr"/>
-          <a:lstStyle/>
-          <a:p>
-            <a:pPr indent="0" marL="0">
-              <a:lnSpc>
-                <a:spcPct val="120000"/>
-              </a:lnSpc>
-              <a:buNone/>
-            </a:pPr>
-            <a:r>
-              <a:rPr lang="en-US" sz="1350" b="1" dirty="0">
-                <a:solidFill>
-                  <a:srgbClr val="10161F"/>
-                </a:solidFill>
-                <a:latin typeface="Pretendard" pitchFamily="34" charset="0"/>
-                <a:ea typeface="Pretendard" pitchFamily="34" charset="-122"/>
-                <a:cs typeface="Pretendard" pitchFamily="34" charset="-120"/>
-              </a:rPr>
-              <a:t>안과 (2억)</a:t>
-            </a:r>
-            <a:endParaRPr lang="en-US" sz="1350" dirty="0"/>
-          </a:p>
-        </p:txBody>
-      </p:sp>
-      <p:sp>
-        <p:nvSpPr>
-          <p:cNvPr id="12" name="Shape 10"/>
-          <p:cNvSpPr/>
-          <p:nvPr/>
-        </p:nvSpPr>
-        <p:spPr>
-          <a:xfrm>
-            <a:off x="7604608" y="1371600"/>
-            <a:ext cx="0" cy="4754880"/>
-          </a:xfrm>
-          <a:prstGeom prst="line">
-            <a:avLst/>
-          </a:prstGeom>
-          <a:noFill/>
-          <a:ln w="8890">
-            <a:solidFill>
-              <a:srgbClr val="B98A2E"/>
-            </a:solidFill>
-            <a:prstDash val="solid"/>
-          </a:ln>
-        </p:spPr>
-      </p:sp>
-      <p:sp>
-        <p:nvSpPr>
-          <p:cNvPr id="13" name="Shape 11"/>
-          <p:cNvSpPr/>
-          <p:nvPr/>
-        </p:nvSpPr>
-        <p:spPr>
-          <a:xfrm>
-            <a:off x="7784287" y="1645920"/>
-            <a:ext cx="3840480" cy="1645920"/>
-          </a:xfrm>
-          <a:prstGeom prst="roundRect">
-            <a:avLst>
-              <a:gd name="adj" fmla="val 3333"/>
-            </a:avLst>
-          </a:prstGeom>
-          <a:solidFill>
-            <a:srgbClr val="F3EBDA"/>
-          </a:solidFill>
-          <a:ln/>
-        </p:spPr>
-      </p:sp>
-      <p:sp>
-        <p:nvSpPr>
-          <p:cNvPr id="14" name="Shape 12"/>
-          <p:cNvSpPr/>
-          <p:nvPr/>
-        </p:nvSpPr>
-        <p:spPr>
-          <a:xfrm>
-            <a:off x="7784287" y="1700784"/>
-            <a:ext cx="36576" cy="1536192"/>
-          </a:xfrm>
-          <a:prstGeom prst="rect">
-            <a:avLst/>
-          </a:prstGeom>
-          <a:solidFill>
-            <a:srgbClr val="977024"/>
-          </a:solidFill>
-          <a:ln/>
-        </p:spPr>
-      </p:sp>
-      <p:sp>
-        <p:nvSpPr>
-          <p:cNvPr id="15" name="Text 13"/>
-          <p:cNvSpPr/>
-          <p:nvPr/>
-        </p:nvSpPr>
-        <p:spPr>
-          <a:xfrm>
-            <a:off x="7967167" y="1755648"/>
-            <a:ext cx="3511296" cy="201168"/>
-          </a:xfrm>
-          <a:prstGeom prst="rect">
-            <a:avLst/>
-          </a:prstGeom>
-          <a:noFill/>
-          <a:ln/>
-        </p:spPr>
-        <p:txBody>
-          <a:bodyPr wrap="square" lIns="0" tIns="0" rIns="0" bIns="0" rtlCol="0" anchor="ctr"/>
-          <a:lstStyle/>
-          <a:p>
-            <a:pPr indent="0" marL="0">
-              <a:buNone/>
-            </a:pPr>
-            <a:endParaRPr lang="en-US" sz="1050" dirty="0"/>
-          </a:p>
-        </p:txBody>
-      </p:sp>
-      <p:sp>
-        <p:nvSpPr>
-          <p:cNvPr id="16" name="Text 14"/>
-          <p:cNvSpPr/>
-          <p:nvPr/>
-        </p:nvSpPr>
-        <p:spPr>
-          <a:xfrm>
-            <a:off x="7967167" y="1975104"/>
-            <a:ext cx="3511296" cy="1243584"/>
-          </a:xfrm>
-          <a:prstGeom prst="rect">
-            <a:avLst/>
-          </a:prstGeom>
-          <a:noFill/>
-          <a:ln/>
-        </p:spPr>
-        <p:txBody>
-          <a:bodyPr wrap="square" lIns="0" tIns="0" rIns="0" bIns="0" rtlCol="0" anchor="t"/>
-          <a:lstStyle/>
-          <a:p>
-            <a:pPr indent="0" marL="0">
-              <a:lnSpc>
-                <a:spcPct val="120000"/>
-              </a:lnSpc>
-              <a:buNone/>
-            </a:pPr>
-            <a:r>
-              <a:rPr lang="en-US" sz="930" dirty="0">
-                <a:solidFill>
-                  <a:srgbClr val="10161F"/>
-                </a:solidFill>
-                <a:latin typeface="Pretendard" pitchFamily="34" charset="0"/>
-                <a:ea typeface="Pretendard" pitchFamily="34" charset="-122"/>
-                <a:cs typeface="Pretendard" pitchFamily="34" charset="-120"/>
-              </a:rPr>
-              <a:t>전층 메디컬 만실 운영 중이며 WALE 평균 3.5년입니다.</a:t>
-            </a:r>
-            <a:endParaRPr lang="en-US" sz="930" dirty="0"/>
-          </a:p>
-        </p:txBody>
-      </p:sp>
-      <p:sp>
-        <p:nvSpPr>
-          <p:cNvPr id="17" name="Text 15"/>
-          <p:cNvSpPr/>
-          <p:nvPr/>
-        </p:nvSpPr>
-        <p:spPr>
-          <a:xfrm>
-            <a:off x="566928" y="6382512"/>
-            <a:ext cx="7315200" cy="219456"/>
-          </a:xfrm>
-          <a:prstGeom prst="rect">
-            <a:avLst/>
-          </a:prstGeom>
-          <a:noFill/>
-          <a:ln/>
-        </p:spPr>
-        <p:txBody>
-          <a:bodyPr wrap="square" lIns="0" tIns="0" rIns="0" bIns="0" rtlCol="0" anchor="ctr"/>
-          <a:lstStyle/>
-          <a:p>
-            <a:pPr indent="0" marL="0">
-              <a:buNone/>
-            </a:pPr>
-            <a:r>
-              <a:rPr lang="en-US" sz="800" dirty="0">
-                <a:solidFill>
-                  <a:srgbClr val="718096"/>
-                </a:solidFill>
-                <a:latin typeface="Pretendard" pitchFamily="34" charset="0"/>
-                <a:ea typeface="Pretendard" pitchFamily="34" charset="-122"/>
-                <a:cs typeface="Pretendard" pitchFamily="34" charset="-120"/>
-              </a:rPr>
-              <a:t>크리딜   |   </a:t>
-            </a:r>
-            <a:endParaRPr lang="en-US" sz="800" dirty="0"/>
-          </a:p>
-        </p:txBody>
-      </p:sp>
-      <p:sp>
-        <p:nvSpPr>
-          <p:cNvPr id="18" name="Text 16"/>
-          <p:cNvSpPr/>
-          <p:nvPr/>
-        </p:nvSpPr>
-        <p:spPr>
-          <a:xfrm>
-            <a:off x="10710367" y="6382512"/>
+            <a:off x="10774375" y="6382512"/>
             <a:ext cx="914400" cy="219456"/>
           </a:xfrm>
           <a:prstGeom prst="rect">
@@ -11637,7 +12144,7 @@
         </p:nvSpPr>
         <p:spPr>
           <a:xfrm>
-            <a:off x="566928" y="457200"/>
+            <a:off x="502920" y="457200"/>
             <a:ext cx="384048" cy="384048"/>
           </a:xfrm>
           <a:prstGeom prst="ellipse">
@@ -11657,7 +12164,7 @@
         </p:nvSpPr>
         <p:spPr>
           <a:xfrm>
-            <a:off x="566928" y="457200"/>
+            <a:off x="502920" y="457200"/>
             <a:ext cx="384048" cy="384048"/>
           </a:xfrm>
           <a:prstGeom prst="rect">
@@ -11696,7 +12203,7 @@
         </p:nvSpPr>
         <p:spPr>
           <a:xfrm>
-            <a:off x="1133856" y="457200"/>
+            <a:off x="1069848" y="457200"/>
             <a:ext cx="10490911" cy="182880"/>
           </a:xfrm>
           <a:prstGeom prst="rect">
@@ -11721,7 +12228,7 @@
                 <a:ea typeface="Arial" pitchFamily="34" charset="-122"/>
                 <a:cs typeface="Arial" pitchFamily="34" charset="-120"/>
               </a:rPr>
-              <a:t>Capital</a:t>
+              <a:t>Stability</a:t>
             </a:r>
             <a:endParaRPr lang="en-US" sz="950" dirty="0"/>
           </a:p>
@@ -11735,7 +12242,7 @@
         </p:nvSpPr>
         <p:spPr>
           <a:xfrm>
-            <a:off x="1133856" y="640080"/>
+            <a:off x="1069848" y="640080"/>
             <a:ext cx="10490911" cy="365760"/>
           </a:xfrm>
           <a:prstGeom prst="rect">
@@ -11760,6 +12267,618 @@
                 <a:ea typeface="Pretendard" pitchFamily="34" charset="-122"/>
                 <a:cs typeface="Pretendard" pitchFamily="34" charset="-120"/>
               </a:rPr>
+              <a:t>임대안정성</a:t>
+            </a:r>
+            <a:endParaRPr lang="en-US" sz="2300" dirty="0"/>
+          </a:p>
+        </p:txBody>
+      </p:sp>
+      <p:sp>
+        <p:nvSpPr>
+          <p:cNvPr id="6" name="Text 4"/>
+          <p:cNvSpPr/>
+          <p:nvPr/>
+        </p:nvSpPr>
+        <p:spPr>
+          <a:xfrm>
+            <a:off x="502920" y="1371600"/>
+            <a:ext cx="6858000" cy="237744"/>
+          </a:xfrm>
+          <a:prstGeom prst="rect">
+            <a:avLst/>
+          </a:prstGeom>
+          <a:noFill/>
+          <a:ln/>
+        </p:spPr>
+        <p:txBody>
+          <a:bodyPr wrap="square" lIns="0" tIns="0" rIns="0" bIns="0" rtlCol="0" anchor="ctr"/>
+          <a:lstStyle/>
+          <a:p>
+            <a:pPr indent="0" marL="0">
+              <a:buNone/>
+            </a:pPr>
+            <a:r>
+              <a:rPr lang="en-US" sz="1100" b="1" dirty="0">
+                <a:solidFill>
+                  <a:srgbClr val="10161F"/>
+                </a:solidFill>
+                <a:latin typeface="Pretendard" pitchFamily="34" charset="0"/>
+                <a:ea typeface="Pretendard" pitchFamily="34" charset="-122"/>
+                <a:cs typeface="Pretendard" pitchFamily="34" charset="-120"/>
+              </a:rPr>
+              <a:t>건축물 개요 및 물리 스펙</a:t>
+            </a:r>
+            <a:endParaRPr lang="en-US" sz="1100" dirty="0"/>
+          </a:p>
+        </p:txBody>
+      </p:sp>
+      <p:sp>
+        <p:nvSpPr>
+          <p:cNvPr id="7" name="Text 5"/>
+          <p:cNvSpPr/>
+          <p:nvPr/>
+        </p:nvSpPr>
+        <p:spPr>
+          <a:xfrm>
+            <a:off x="502920" y="1645920"/>
+            <a:ext cx="1920240" cy="420624"/>
+          </a:xfrm>
+          <a:prstGeom prst="rect">
+            <a:avLst/>
+          </a:prstGeom>
+          <a:noFill/>
+          <a:ln/>
+        </p:spPr>
+        <p:txBody>
+          <a:bodyPr wrap="square" lIns="0" tIns="0" rIns="0" bIns="0" rtlCol="0" anchor="ctr"/>
+          <a:lstStyle/>
+          <a:p>
+            <a:pPr indent="0" marL="0">
+              <a:lnSpc>
+                <a:spcPct val="115000"/>
+              </a:lnSpc>
+              <a:buNone/>
+            </a:pPr>
+            <a:r>
+              <a:rPr lang="en-US" sz="1350" dirty="0">
+                <a:solidFill>
+                  <a:srgbClr val="718096"/>
+                </a:solidFill>
+                <a:latin typeface="Pretendard" pitchFamily="34" charset="0"/>
+                <a:ea typeface="Pretendard" pitchFamily="34" charset="-122"/>
+                <a:cs typeface="Pretendard" pitchFamily="34" charset="-120"/>
+              </a:rPr>
+              <a:t>1F</a:t>
+            </a:r>
+            <a:endParaRPr lang="en-US" sz="1350" dirty="0"/>
+          </a:p>
+        </p:txBody>
+      </p:sp>
+      <p:sp>
+        <p:nvSpPr>
+          <p:cNvPr id="8" name="Text 6"/>
+          <p:cNvSpPr/>
+          <p:nvPr/>
+        </p:nvSpPr>
+        <p:spPr>
+          <a:xfrm>
+            <a:off x="2423160" y="1645920"/>
+            <a:ext cx="4937760" cy="420624"/>
+          </a:xfrm>
+          <a:prstGeom prst="rect">
+            <a:avLst/>
+          </a:prstGeom>
+          <a:noFill/>
+          <a:ln/>
+        </p:spPr>
+        <p:txBody>
+          <a:bodyPr wrap="square" lIns="0" tIns="0" rIns="0" bIns="0" rtlCol="0" anchor="ctr"/>
+          <a:lstStyle/>
+          <a:p>
+            <a:pPr indent="0" marL="0">
+              <a:lnSpc>
+                <a:spcPct val="115000"/>
+              </a:lnSpc>
+              <a:buNone/>
+            </a:pPr>
+            <a:r>
+              <a:rPr lang="en-US" sz="1350" b="1" dirty="0">
+                <a:solidFill>
+                  <a:srgbClr val="10161F"/>
+                </a:solidFill>
+                <a:latin typeface="Pretendard" pitchFamily="34" charset="0"/>
+                <a:ea typeface="Pretendard" pitchFamily="34" charset="-122"/>
+                <a:cs typeface="Pretendard" pitchFamily="34" charset="-120"/>
+              </a:rPr>
+              <a:t>약국 (3억)</a:t>
+            </a:r>
+            <a:endParaRPr lang="en-US" sz="1350" dirty="0"/>
+          </a:p>
+        </p:txBody>
+      </p:sp>
+      <p:sp>
+        <p:nvSpPr>
+          <p:cNvPr id="9" name="Shape 7"/>
+          <p:cNvSpPr/>
+          <p:nvPr/>
+        </p:nvSpPr>
+        <p:spPr>
+          <a:xfrm>
+            <a:off x="502920" y="2066544"/>
+            <a:ext cx="6858000" cy="0"/>
+          </a:xfrm>
+          <a:prstGeom prst="line">
+            <a:avLst/>
+          </a:prstGeom>
+          <a:noFill/>
+          <a:ln w="3810">
+            <a:solidFill>
+              <a:srgbClr val="CBD5E0"/>
+            </a:solidFill>
+            <a:prstDash val="solid"/>
+          </a:ln>
+        </p:spPr>
+      </p:sp>
+      <p:sp>
+        <p:nvSpPr>
+          <p:cNvPr id="10" name="Text 8"/>
+          <p:cNvSpPr/>
+          <p:nvPr/>
+        </p:nvSpPr>
+        <p:spPr>
+          <a:xfrm>
+            <a:off x="502920" y="2066544"/>
+            <a:ext cx="1920240" cy="420624"/>
+          </a:xfrm>
+          <a:prstGeom prst="rect">
+            <a:avLst/>
+          </a:prstGeom>
+          <a:noFill/>
+          <a:ln/>
+        </p:spPr>
+        <p:txBody>
+          <a:bodyPr wrap="square" lIns="0" tIns="0" rIns="0" bIns="0" rtlCol="0" anchor="ctr"/>
+          <a:lstStyle/>
+          <a:p>
+            <a:pPr indent="0" marL="0">
+              <a:lnSpc>
+                <a:spcPct val="115000"/>
+              </a:lnSpc>
+              <a:buNone/>
+            </a:pPr>
+            <a:r>
+              <a:rPr lang="en-US" sz="1350" dirty="0">
+                <a:solidFill>
+                  <a:srgbClr val="718096"/>
+                </a:solidFill>
+                <a:latin typeface="Pretendard" pitchFamily="34" charset="0"/>
+                <a:ea typeface="Pretendard" pitchFamily="34" charset="-122"/>
+                <a:cs typeface="Pretendard" pitchFamily="34" charset="-120"/>
+              </a:rPr>
+              <a:t>2F</a:t>
+            </a:r>
+            <a:endParaRPr lang="en-US" sz="1350" dirty="0"/>
+          </a:p>
+        </p:txBody>
+      </p:sp>
+      <p:sp>
+        <p:nvSpPr>
+          <p:cNvPr id="11" name="Text 9"/>
+          <p:cNvSpPr/>
+          <p:nvPr/>
+        </p:nvSpPr>
+        <p:spPr>
+          <a:xfrm>
+            <a:off x="2423160" y="2066544"/>
+            <a:ext cx="4937760" cy="420624"/>
+          </a:xfrm>
+          <a:prstGeom prst="rect">
+            <a:avLst/>
+          </a:prstGeom>
+          <a:noFill/>
+          <a:ln/>
+        </p:spPr>
+        <p:txBody>
+          <a:bodyPr wrap="square" lIns="0" tIns="0" rIns="0" bIns="0" rtlCol="0" anchor="ctr"/>
+          <a:lstStyle/>
+          <a:p>
+            <a:pPr indent="0" marL="0">
+              <a:lnSpc>
+                <a:spcPct val="115000"/>
+              </a:lnSpc>
+              <a:buNone/>
+            </a:pPr>
+            <a:r>
+              <a:rPr lang="en-US" sz="1350" b="1" dirty="0">
+                <a:solidFill>
+                  <a:srgbClr val="10161F"/>
+                </a:solidFill>
+                <a:latin typeface="Pretendard" pitchFamily="34" charset="0"/>
+                <a:ea typeface="Pretendard" pitchFamily="34" charset="-122"/>
+                <a:cs typeface="Pretendard" pitchFamily="34" charset="-120"/>
+              </a:rPr>
+              <a:t>안과 (2억)</a:t>
+            </a:r>
+            <a:endParaRPr lang="en-US" sz="1350" dirty="0"/>
+          </a:p>
+        </p:txBody>
+      </p:sp>
+      <p:sp>
+        <p:nvSpPr>
+          <p:cNvPr id="12" name="Shape 10"/>
+          <p:cNvSpPr/>
+          <p:nvPr/>
+        </p:nvSpPr>
+        <p:spPr>
+          <a:xfrm>
+            <a:off x="7540600" y="1371600"/>
+            <a:ext cx="0" cy="4754880"/>
+          </a:xfrm>
+          <a:prstGeom prst="line">
+            <a:avLst/>
+          </a:prstGeom>
+          <a:noFill/>
+          <a:ln w="8890">
+            <a:solidFill>
+              <a:srgbClr val="B98A2E"/>
+            </a:solidFill>
+            <a:prstDash val="solid"/>
+          </a:ln>
+        </p:spPr>
+      </p:sp>
+      <p:sp>
+        <p:nvSpPr>
+          <p:cNvPr id="13" name="Shape 11"/>
+          <p:cNvSpPr/>
+          <p:nvPr/>
+        </p:nvSpPr>
+        <p:spPr>
+          <a:xfrm>
+            <a:off x="7720279" y="1645920"/>
+            <a:ext cx="3840480" cy="1645920"/>
+          </a:xfrm>
+          <a:prstGeom prst="roundRect">
+            <a:avLst>
+              <a:gd name="adj" fmla="val 3333"/>
+            </a:avLst>
+          </a:prstGeom>
+          <a:solidFill>
+            <a:srgbClr val="F3EBDA"/>
+          </a:solidFill>
+          <a:ln/>
+        </p:spPr>
+      </p:sp>
+      <p:sp>
+        <p:nvSpPr>
+          <p:cNvPr id="14" name="Shape 12"/>
+          <p:cNvSpPr/>
+          <p:nvPr/>
+        </p:nvSpPr>
+        <p:spPr>
+          <a:xfrm>
+            <a:off x="7720279" y="1700784"/>
+            <a:ext cx="36576" cy="1536192"/>
+          </a:xfrm>
+          <a:prstGeom prst="rect">
+            <a:avLst/>
+          </a:prstGeom>
+          <a:solidFill>
+            <a:srgbClr val="977024"/>
+          </a:solidFill>
+          <a:ln/>
+        </p:spPr>
+      </p:sp>
+      <p:sp>
+        <p:nvSpPr>
+          <p:cNvPr id="15" name="Text 13"/>
+          <p:cNvSpPr/>
+          <p:nvPr/>
+        </p:nvSpPr>
+        <p:spPr>
+          <a:xfrm>
+            <a:off x="7866583" y="1737360"/>
+            <a:ext cx="3584448" cy="201168"/>
+          </a:xfrm>
+          <a:prstGeom prst="rect">
+            <a:avLst/>
+          </a:prstGeom>
+          <a:noFill/>
+          <a:ln/>
+        </p:spPr>
+        <p:txBody>
+          <a:bodyPr wrap="square" lIns="0" tIns="0" rIns="0" bIns="0" rtlCol="0" anchor="ctr"/>
+          <a:lstStyle/>
+          <a:p>
+            <a:pPr indent="0" marL="0">
+              <a:buNone/>
+            </a:pPr>
+            <a:endParaRPr lang="en-US" sz="1050" dirty="0"/>
+          </a:p>
+        </p:txBody>
+      </p:sp>
+      <p:sp>
+        <p:nvSpPr>
+          <p:cNvPr id="16" name="Text 14"/>
+          <p:cNvSpPr/>
+          <p:nvPr/>
+        </p:nvSpPr>
+        <p:spPr>
+          <a:xfrm>
+            <a:off x="7866583" y="1938528"/>
+            <a:ext cx="3584448" cy="1316736"/>
+          </a:xfrm>
+          <a:prstGeom prst="rect">
+            <a:avLst/>
+          </a:prstGeom>
+          <a:noFill/>
+          <a:ln/>
+        </p:spPr>
+        <p:txBody>
+          <a:bodyPr wrap="square" lIns="0" tIns="0" rIns="0" bIns="0" rtlCol="0" anchor="t"/>
+          <a:lstStyle/>
+          <a:p>
+            <a:pPr indent="0" marL="0">
+              <a:lnSpc>
+                <a:spcPct val="108000"/>
+              </a:lnSpc>
+              <a:buNone/>
+            </a:pPr>
+            <a:r>
+              <a:rPr lang="en-US" sz="980" dirty="0">
+                <a:solidFill>
+                  <a:srgbClr val="10161F"/>
+                </a:solidFill>
+                <a:latin typeface="Pretendard" pitchFamily="34" charset="0"/>
+                <a:ea typeface="Pretendard" pitchFamily="34" charset="-122"/>
+                <a:cs typeface="Pretendard" pitchFamily="34" charset="-120"/>
+              </a:rPr>
+              <a:t>전층 메디컬 만실 운영 중이며 WALE 평균 3.5년입니다.</a:t>
+            </a:r>
+            <a:endParaRPr lang="en-US" sz="980" dirty="0"/>
+          </a:p>
+        </p:txBody>
+      </p:sp>
+      <p:sp>
+        <p:nvSpPr>
+          <p:cNvPr id="17" name="Text 15"/>
+          <p:cNvSpPr/>
+          <p:nvPr/>
+        </p:nvSpPr>
+        <p:spPr>
+          <a:xfrm>
+            <a:off x="502920" y="6382512"/>
+            <a:ext cx="7315200" cy="219456"/>
+          </a:xfrm>
+          <a:prstGeom prst="rect">
+            <a:avLst/>
+          </a:prstGeom>
+          <a:noFill/>
+          <a:ln/>
+        </p:spPr>
+        <p:txBody>
+          <a:bodyPr wrap="square" lIns="0" tIns="0" rIns="0" bIns="0" rtlCol="0" anchor="ctr"/>
+          <a:lstStyle/>
+          <a:p>
+            <a:pPr indent="0" marL="0">
+              <a:buNone/>
+            </a:pPr>
+            <a:r>
+              <a:rPr lang="en-US" sz="800" dirty="0">
+                <a:solidFill>
+                  <a:srgbClr val="718096"/>
+                </a:solidFill>
+                <a:latin typeface="Pretendard" pitchFamily="34" charset="0"/>
+                <a:ea typeface="Pretendard" pitchFamily="34" charset="-122"/>
+                <a:cs typeface="Pretendard" pitchFamily="34" charset="-120"/>
+              </a:rPr>
+              <a:t>크리딜   |   </a:t>
+            </a:r>
+            <a:endParaRPr lang="en-US" sz="800" dirty="0"/>
+          </a:p>
+        </p:txBody>
+      </p:sp>
+      <p:sp>
+        <p:nvSpPr>
+          <p:cNvPr id="18" name="Text 16"/>
+          <p:cNvSpPr/>
+          <p:nvPr/>
+        </p:nvSpPr>
+        <p:spPr>
+          <a:xfrm>
+            <a:off x="10774375" y="6382512"/>
+            <a:ext cx="914400" cy="219456"/>
+          </a:xfrm>
+          <a:prstGeom prst="rect">
+            <a:avLst/>
+          </a:prstGeom>
+          <a:noFill/>
+          <a:ln/>
+        </p:spPr>
+        <p:txBody>
+          <a:bodyPr wrap="square" lIns="0" tIns="0" rIns="0" bIns="0" rtlCol="0" anchor="ctr"/>
+          <a:lstStyle/>
+          <a:p>
+            <a:pPr algn="r" indent="0" marL="0">
+              <a:buNone/>
+            </a:pPr>
+            <a:r>
+              <a:rPr lang="en-US" sz="900" b="1" dirty="0">
+                <a:solidFill>
+                  <a:srgbClr val="B98A2E"/>
+                </a:solidFill>
+                <a:latin typeface="Arial" pitchFamily="34" charset="0"/>
+                <a:ea typeface="Arial" pitchFamily="34" charset="-122"/>
+                <a:cs typeface="Arial" pitchFamily="34" charset="-120"/>
+              </a:rPr>
+              <a:t>7</a:t>
+            </a:r>
+            <a:endParaRPr lang="en-US" sz="900" dirty="0"/>
+          </a:p>
+        </p:txBody>
+      </p:sp>
+    </p:spTree>
+  </p:cSld>
+  <p:clrMapOvr>
+    <a:masterClrMapping/>
+  </p:clrMapOvr>
+</p:sld>
+</file>
+
+<file path=ppt/slides/slide8.xml><?xml version="1.0" encoding="utf-8"?>
+<p:sld xmlns:a="http://schemas.openxmlformats.org/drawingml/2006/main" xmlns:r="http://schemas.openxmlformats.org/officeDocument/2006/relationships" xmlns:p="http://schemas.openxmlformats.org/presentationml/2006/main">
+  <p:cSld name="Slide 8">
+    <p:bg>
+      <p:bgPr>
+        <a:solidFill>
+          <a:srgbClr val="FFFFFF"/>
+        </a:solidFill>
+      </p:bgPr>
+    </p:bg>
+    <p:spTree>
+      <p:nvGrpSpPr>
+        <p:cNvPr id="1" name=""/>
+        <p:cNvGrpSpPr/>
+        <p:nvPr/>
+      </p:nvGrpSpPr>
+      <p:grpSpPr>
+        <a:xfrm>
+          <a:off x="0" y="0"/>
+          <a:ext cx="0" cy="0"/>
+          <a:chOff x="0" y="0"/>
+          <a:chExt cx="0" cy="0"/>
+        </a:xfrm>
+      </p:grpSpPr>
+      <p:sp>
+        <p:nvSpPr>
+          <p:cNvPr id="2" name="Shape 0"/>
+          <p:cNvSpPr/>
+          <p:nvPr/>
+        </p:nvSpPr>
+        <p:spPr>
+          <a:xfrm>
+            <a:off x="502920" y="457200"/>
+            <a:ext cx="384048" cy="384048"/>
+          </a:xfrm>
+          <a:prstGeom prst="ellipse">
+            <a:avLst/>
+          </a:prstGeom>
+          <a:solidFill>
+            <a:srgbClr val="B98A2E"/>
+          </a:solidFill>
+          <a:ln/>
+        </p:spPr>
+      </p:sp>
+      <p:sp>
+        <p:nvSpPr>
+          <p:cNvPr id="3" name="Text 1"/>
+          <p:cNvSpPr/>
+          <p:nvPr/>
+        </p:nvSpPr>
+        <p:spPr>
+          <a:xfrm>
+            <a:off x="502920" y="457200"/>
+            <a:ext cx="384048" cy="384048"/>
+          </a:xfrm>
+          <a:prstGeom prst="rect">
+            <a:avLst/>
+          </a:prstGeom>
+          <a:noFill/>
+          <a:ln/>
+        </p:spPr>
+        <p:txBody>
+          <a:bodyPr wrap="square" lIns="0" tIns="0" rIns="0" bIns="0" rtlCol="0" anchor="ctr"/>
+          <a:lstStyle/>
+          <a:p>
+            <a:pPr algn="ctr" indent="0" marL="0">
+              <a:buNone/>
+            </a:pPr>
+            <a:r>
+              <a:rPr lang="en-US" sz="1300" b="1" dirty="0">
+                <a:solidFill>
+                  <a:srgbClr val="FFFFFF"/>
+                </a:solidFill>
+                <a:latin typeface="Arial" pitchFamily="34" charset="0"/>
+                <a:ea typeface="Arial" pitchFamily="34" charset="-122"/>
+                <a:cs typeface="Arial" pitchFamily="34" charset="-120"/>
+              </a:rPr>
+              <a:t>08</a:t>
+            </a:r>
+            <a:endParaRPr lang="en-US" sz="1300" dirty="0"/>
+          </a:p>
+        </p:txBody>
+      </p:sp>
+      <p:sp>
+        <p:nvSpPr>
+          <p:cNvPr id="4" name="Text 2"/>
+          <p:cNvSpPr/>
+          <p:nvPr/>
+        </p:nvSpPr>
+        <p:spPr>
+          <a:xfrm>
+            <a:off x="1069848" y="457200"/>
+            <a:ext cx="10490911" cy="182880"/>
+          </a:xfrm>
+          <a:prstGeom prst="rect">
+            <a:avLst/>
+          </a:prstGeom>
+          <a:noFill/>
+          <a:ln/>
+        </p:spPr>
+        <p:txBody>
+          <a:bodyPr wrap="square" lIns="0" tIns="0" rIns="0" bIns="0" rtlCol="0" anchor="ctr"/>
+          <a:lstStyle/>
+          <a:p>
+            <a:pPr indent="0" marL="0">
+              <a:buNone/>
+            </a:pPr>
+            <a:r>
+              <a:rPr lang="en-US" sz="950" b="1" spc="200" kern="0" dirty="0">
+                <a:solidFill>
+                  <a:srgbClr val="B98A2E"/>
+                </a:solidFill>
+                <a:latin typeface="Arial" pitchFamily="34" charset="0"/>
+                <a:ea typeface="Arial" pitchFamily="34" charset="-122"/>
+                <a:cs typeface="Arial" pitchFamily="34" charset="-120"/>
+              </a:rPr>
+              <a:t>Capital</a:t>
+            </a:r>
+            <a:endParaRPr lang="en-US" sz="950" dirty="0"/>
+          </a:p>
+        </p:txBody>
+      </p:sp>
+      <p:sp>
+        <p:nvSpPr>
+          <p:cNvPr id="5" name="Text 3"/>
+          <p:cNvSpPr/>
+          <p:nvPr/>
+        </p:nvSpPr>
+        <p:spPr>
+          <a:xfrm>
+            <a:off x="1069848" y="640080"/>
+            <a:ext cx="10490911" cy="365760"/>
+          </a:xfrm>
+          <a:prstGeom prst="rect">
+            <a:avLst/>
+          </a:prstGeom>
+          <a:noFill/>
+          <a:ln/>
+        </p:spPr>
+        <p:txBody>
+          <a:bodyPr wrap="square" lIns="0" tIns="0" rIns="0" bIns="0" rtlCol="0" anchor="ctr"/>
+          <a:lstStyle/>
+          <a:p>
+            <a:pPr indent="0" marL="0">
+              <a:buNone/>
+            </a:pPr>
+            <a:r>
+              <a:rPr lang="en-US" sz="2300" b="1" dirty="0">
+                <a:solidFill>
+                  <a:srgbClr val="10161F"/>
+                </a:solidFill>
+                <a:latin typeface="Pretendard" pitchFamily="34" charset="0"/>
+                <a:ea typeface="Pretendard" pitchFamily="34" charset="-122"/>
+                <a:cs typeface="Pretendard" pitchFamily="34" charset="-120"/>
+              </a:rPr>
               <a:t>자본구조</a:t>
             </a:r>
             <a:endParaRPr lang="en-US" sz="2300" dirty="0"/>
@@ -11774,7 +12893,7 @@
         </p:nvSpPr>
         <p:spPr>
           <a:xfrm>
-            <a:off x="566928" y="1417320"/>
+            <a:off x="502920" y="1417320"/>
             <a:ext cx="5391760" cy="4389120"/>
           </a:xfrm>
           <a:prstGeom prst="roundRect">
@@ -11801,7 +12920,7 @@
         </p:nvSpPr>
         <p:spPr>
           <a:xfrm>
-            <a:off x="795528" y="1618488"/>
+            <a:off x="731520" y="1618488"/>
             <a:ext cx="4934560" cy="320040"/>
           </a:xfrm>
           <a:prstGeom prst="rect">
@@ -11840,8 +12959,8 @@
         </p:nvSpPr>
         <p:spPr>
           <a:xfrm>
-            <a:off x="795528" y="2011680"/>
-            <a:ext cx="1875133" cy="475488"/>
+            <a:off x="731520" y="2011680"/>
+            <a:ext cx="2269897" cy="475488"/>
           </a:xfrm>
           <a:prstGeom prst="rect">
             <a:avLst/>
@@ -11855,7 +12974,7 @@
           <a:p>
             <a:pPr indent="0" marL="0">
               <a:lnSpc>
-                <a:spcPct val="120000"/>
+                <a:spcPct val="115000"/>
               </a:lnSpc>
               <a:buNone/>
             </a:pPr>
@@ -11882,8 +13001,8 @@
         </p:nvSpPr>
         <p:spPr>
           <a:xfrm>
-            <a:off x="2670661" y="2011680"/>
-            <a:ext cx="3059427" cy="475488"/>
+            <a:off x="3001417" y="2011680"/>
+            <a:ext cx="2664662" cy="475488"/>
           </a:xfrm>
           <a:prstGeom prst="rect">
             <a:avLst/>
@@ -11897,7 +13016,7 @@
           <a:p>
             <a:pPr indent="0" marL="0">
               <a:lnSpc>
-                <a:spcPct val="120000"/>
+                <a:spcPct val="115000"/>
               </a:lnSpc>
               <a:buNone/>
             </a:pPr>
@@ -11924,7 +13043,7 @@
         </p:nvSpPr>
         <p:spPr>
           <a:xfrm>
-            <a:off x="795528" y="2487168"/>
+            <a:off x="731520" y="2487168"/>
             <a:ext cx="4934560" cy="0"/>
           </a:xfrm>
           <a:prstGeom prst="line">
@@ -11947,8 +13066,8 @@
         </p:nvSpPr>
         <p:spPr>
           <a:xfrm>
-            <a:off x="795528" y="2487168"/>
-            <a:ext cx="1875133" cy="475488"/>
+            <a:off x="731520" y="2487168"/>
+            <a:ext cx="2269897" cy="475488"/>
           </a:xfrm>
           <a:prstGeom prst="rect">
             <a:avLst/>
@@ -11962,7 +13081,7 @@
           <a:p>
             <a:pPr indent="0" marL="0">
               <a:lnSpc>
-                <a:spcPct val="120000"/>
+                <a:spcPct val="115000"/>
               </a:lnSpc>
               <a:buNone/>
             </a:pPr>
@@ -11989,8 +13108,8 @@
         </p:nvSpPr>
         <p:spPr>
           <a:xfrm>
-            <a:off x="2670661" y="2487168"/>
-            <a:ext cx="3059427" cy="475488"/>
+            <a:off x="3001417" y="2487168"/>
+            <a:ext cx="2664662" cy="475488"/>
           </a:xfrm>
           <a:prstGeom prst="rect">
             <a:avLst/>
@@ -12004,7 +13123,7 @@
           <a:p>
             <a:pPr indent="0" marL="0">
               <a:lnSpc>
-                <a:spcPct val="120000"/>
+                <a:spcPct val="115000"/>
               </a:lnSpc>
               <a:buNone/>
             </a:pPr>
@@ -12031,7 +13150,7 @@
         </p:nvSpPr>
         <p:spPr>
           <a:xfrm>
-            <a:off x="795528" y="2962656"/>
+            <a:off x="731520" y="2962656"/>
             <a:ext cx="4934560" cy="0"/>
           </a:xfrm>
           <a:prstGeom prst="line">
@@ -12054,8 +13173,8 @@
         </p:nvSpPr>
         <p:spPr>
           <a:xfrm>
-            <a:off x="795528" y="2962656"/>
-            <a:ext cx="1875133" cy="475488"/>
+            <a:off x="731520" y="2962656"/>
+            <a:ext cx="2269897" cy="475488"/>
           </a:xfrm>
           <a:prstGeom prst="rect">
             <a:avLst/>
@@ -12069,7 +13188,7 @@
           <a:p>
             <a:pPr indent="0" marL="0">
               <a:lnSpc>
-                <a:spcPct val="120000"/>
+                <a:spcPct val="115000"/>
               </a:lnSpc>
               <a:buNone/>
             </a:pPr>
@@ -12096,8 +13215,8 @@
         </p:nvSpPr>
         <p:spPr>
           <a:xfrm>
-            <a:off x="2670661" y="2962656"/>
-            <a:ext cx="3059427" cy="475488"/>
+            <a:off x="3001417" y="2962656"/>
+            <a:ext cx="2664662" cy="475488"/>
           </a:xfrm>
           <a:prstGeom prst="rect">
             <a:avLst/>
@@ -12111,7 +13230,7 @@
           <a:p>
             <a:pPr indent="0" marL="0">
               <a:lnSpc>
-                <a:spcPct val="120000"/>
+                <a:spcPct val="115000"/>
               </a:lnSpc>
               <a:buNone/>
             </a:pPr>
@@ -12138,7 +13257,7 @@
         </p:nvSpPr>
         <p:spPr>
           <a:xfrm>
-            <a:off x="795528" y="3438144"/>
+            <a:off x="731520" y="3438144"/>
             <a:ext cx="4934560" cy="0"/>
           </a:xfrm>
           <a:prstGeom prst="line">
@@ -12161,8 +13280,8 @@
         </p:nvSpPr>
         <p:spPr>
           <a:xfrm>
-            <a:off x="795528" y="3438144"/>
-            <a:ext cx="1875133" cy="475488"/>
+            <a:off x="731520" y="3438144"/>
+            <a:ext cx="2269897" cy="475488"/>
           </a:xfrm>
           <a:prstGeom prst="rect">
             <a:avLst/>
@@ -12176,7 +13295,7 @@
           <a:p>
             <a:pPr indent="0" marL="0">
               <a:lnSpc>
-                <a:spcPct val="120000"/>
+                <a:spcPct val="115000"/>
               </a:lnSpc>
               <a:buNone/>
             </a:pPr>
@@ -12203,8 +13322,8 @@
         </p:nvSpPr>
         <p:spPr>
           <a:xfrm>
-            <a:off x="2670661" y="3438144"/>
-            <a:ext cx="3059427" cy="475488"/>
+            <a:off x="3001417" y="3438144"/>
+            <a:ext cx="2664662" cy="475488"/>
           </a:xfrm>
           <a:prstGeom prst="rect">
             <a:avLst/>
@@ -12218,7 +13337,7 @@
           <a:p>
             <a:pPr indent="0" marL="0">
               <a:lnSpc>
-                <a:spcPct val="120000"/>
+                <a:spcPct val="115000"/>
               </a:lnSpc>
               <a:buNone/>
             </a:pPr>
@@ -12245,7 +13364,7 @@
         </p:nvSpPr>
         <p:spPr>
           <a:xfrm>
-            <a:off x="795528" y="3913632"/>
+            <a:off x="731520" y="3913632"/>
             <a:ext cx="4934560" cy="0"/>
           </a:xfrm>
           <a:prstGeom prst="line">
@@ -12268,8 +13387,8 @@
         </p:nvSpPr>
         <p:spPr>
           <a:xfrm>
-            <a:off x="795528" y="3913632"/>
-            <a:ext cx="1875133" cy="475488"/>
+            <a:off x="731520" y="3913632"/>
+            <a:ext cx="2269897" cy="475488"/>
           </a:xfrm>
           <a:prstGeom prst="rect">
             <a:avLst/>
@@ -12283,7 +13402,7 @@
           <a:p>
             <a:pPr indent="0" marL="0">
               <a:lnSpc>
-                <a:spcPct val="120000"/>
+                <a:spcPct val="115000"/>
               </a:lnSpc>
               <a:buNone/>
             </a:pPr>
@@ -12310,8 +13429,8 @@
         </p:nvSpPr>
         <p:spPr>
           <a:xfrm>
-            <a:off x="2670661" y="3913632"/>
-            <a:ext cx="3059427" cy="475488"/>
+            <a:off x="3001417" y="3913632"/>
+            <a:ext cx="2664662" cy="475488"/>
           </a:xfrm>
           <a:prstGeom prst="rect">
             <a:avLst/>
@@ -12325,7 +13444,7 @@
           <a:p>
             <a:pPr indent="0" marL="0">
               <a:lnSpc>
-                <a:spcPct val="120000"/>
+                <a:spcPct val="115000"/>
               </a:lnSpc>
               <a:buNone/>
             </a:pPr>
@@ -12338,7 +13457,7 @@
                 <a:ea typeface="Pretendard" pitchFamily="34" charset="-122"/>
                 <a:cs typeface="Pretendard" pitchFamily="34" charset="-120"/>
               </a:rPr>
-              <a:t>8.3억 원</a:t>
+              <a:t>0.0억 원</a:t>
             </a:r>
             <a:endParaRPr lang="en-US" sz="1150" dirty="0"/>
           </a:p>
@@ -12352,7 +13471,7 @@
         </p:nvSpPr>
         <p:spPr>
           <a:xfrm>
-            <a:off x="795528" y="4389120"/>
+            <a:off x="731520" y="4389120"/>
             <a:ext cx="4934560" cy="0"/>
           </a:xfrm>
           <a:prstGeom prst="line">
@@ -12375,8 +13494,8 @@
         </p:nvSpPr>
         <p:spPr>
           <a:xfrm>
-            <a:off x="795528" y="4389120"/>
-            <a:ext cx="1875133" cy="475488"/>
+            <a:off x="731520" y="4389120"/>
+            <a:ext cx="2269897" cy="475488"/>
           </a:xfrm>
           <a:prstGeom prst="rect">
             <a:avLst/>
@@ -12390,7 +13509,7 @@
           <a:p>
             <a:pPr indent="0" marL="0">
               <a:lnSpc>
-                <a:spcPct val="120000"/>
+                <a:spcPct val="115000"/>
               </a:lnSpc>
               <a:buNone/>
             </a:pPr>
@@ -12417,8 +13536,8 @@
         </p:nvSpPr>
         <p:spPr>
           <a:xfrm>
-            <a:off x="2670661" y="4389120"/>
-            <a:ext cx="3059427" cy="475488"/>
+            <a:off x="3001417" y="4389120"/>
+            <a:ext cx="2664662" cy="475488"/>
           </a:xfrm>
           <a:prstGeom prst="rect">
             <a:avLst/>
@@ -12432,7 +13551,7 @@
           <a:p>
             <a:pPr indent="0" marL="0">
               <a:lnSpc>
-                <a:spcPct val="120000"/>
+                <a:spcPct val="115000"/>
               </a:lnSpc>
               <a:buNone/>
             </a:pPr>
@@ -12459,7 +13578,7 @@
         </p:nvSpPr>
         <p:spPr>
           <a:xfrm>
-            <a:off x="795528" y="4864608"/>
+            <a:off x="731520" y="4864608"/>
             <a:ext cx="4934560" cy="0"/>
           </a:xfrm>
           <a:prstGeom prst="line">
@@ -12482,8 +13601,8 @@
         </p:nvSpPr>
         <p:spPr>
           <a:xfrm>
-            <a:off x="795528" y="4864608"/>
-            <a:ext cx="1875133" cy="475488"/>
+            <a:off x="731520" y="4864608"/>
+            <a:ext cx="2269897" cy="475488"/>
           </a:xfrm>
           <a:prstGeom prst="rect">
             <a:avLst/>
@@ -12497,7 +13616,7 @@
           <a:p>
             <a:pPr indent="0" marL="0">
               <a:lnSpc>
-                <a:spcPct val="120000"/>
+                <a:spcPct val="115000"/>
               </a:lnSpc>
               <a:buNone/>
             </a:pPr>
@@ -12524,8 +13643,8 @@
         </p:nvSpPr>
         <p:spPr>
           <a:xfrm>
-            <a:off x="2670661" y="4864608"/>
-            <a:ext cx="3059427" cy="475488"/>
+            <a:off x="3001417" y="4864608"/>
+            <a:ext cx="2664662" cy="475488"/>
           </a:xfrm>
           <a:prstGeom prst="rect">
             <a:avLst/>
@@ -12539,7 +13658,7 @@
           <a:p>
             <a:pPr indent="0" marL="0">
               <a:lnSpc>
-                <a:spcPct val="120000"/>
+                <a:spcPct val="115000"/>
               </a:lnSpc>
               <a:buNone/>
             </a:pPr>
@@ -12552,7 +13671,7 @@
                 <a:ea typeface="Pretendard" pitchFamily="34" charset="-122"/>
                 <a:cs typeface="Pretendard" pitchFamily="34" charset="-120"/>
               </a:rPr>
-              <a:t>83.3억 원</a:t>
+              <a:t>91.6억 원</a:t>
             </a:r>
             <a:endParaRPr lang="en-US" sz="1150" dirty="0"/>
           </a:p>
@@ -12566,7 +13685,7 @@
         </p:nvSpPr>
         <p:spPr>
           <a:xfrm>
-            <a:off x="6233008" y="1417320"/>
+            <a:off x="6169000" y="1417320"/>
             <a:ext cx="5391760" cy="4389120"/>
           </a:xfrm>
           <a:prstGeom prst="roundRect">
@@ -12593,7 +13712,7 @@
         </p:nvSpPr>
         <p:spPr>
           <a:xfrm>
-            <a:off x="6461608" y="1618488"/>
+            <a:off x="6397600" y="1618488"/>
             <a:ext cx="4934560" cy="320040"/>
           </a:xfrm>
           <a:prstGeom prst="rect">
@@ -12626,7 +13745,7 @@
       </p:sp>
       <p:graphicFrame>
         <p:nvGraphicFramePr>
-          <p:cNvPr id="8" name="Table 0"/>
+          <p:cNvPr id="9" name="Table 0"/>
           <p:cNvGraphicFramePr>
             <a:graphicFrameLocks noGrp="1"/>
           </p:cNvGraphicFramePr>
@@ -12639,7 +13758,7 @@
           </p:nvPr>
         </p:nvGraphicFramePr>
         <p:xfrm>
-          <a:off x="6461608" y="2057400"/>
+          <a:off x="6397600" y="2057400"/>
           <a:ext cx="4934560" cy="914400"/>
         </p:xfrm>
         <a:graphic>
@@ -12664,7 +13783,7 @@
                       <a:r>
                         <a:rPr lang="en-US" sz="1100" b="1" dirty="0">
                           <a:solidFill>
-                            <a:srgbClr val="718096"/>
+                            <a:srgbClr val="FFFFFF"/>
                           </a:solidFill>
                           <a:latin typeface="Pretendard" pitchFamily="34" charset="0"/>
                           <a:ea typeface="Pretendard" pitchFamily="34" charset="-122"/>
@@ -12717,7 +13836,7 @@
                       <a:tailEnd type="none" w="med" len="med"/>
                     </a:lnB>
                     <a:solidFill>
-                      <a:srgbClr val="F7FAFC"/>
+                      <a:srgbClr val="10161F"/>
                     </a:solidFill>
                   </a:tcPr>
                 </a:tc>
@@ -12732,7 +13851,7 @@
                       <a:r>
                         <a:rPr lang="en-US" sz="1100" b="1" dirty="0">
                           <a:solidFill>
-                            <a:srgbClr val="718096"/>
+                            <a:srgbClr val="FFFFFF"/>
                           </a:solidFill>
                           <a:latin typeface="Pretendard" pitchFamily="34" charset="0"/>
                           <a:ea typeface="Pretendard" pitchFamily="34" charset="-122"/>
@@ -12785,7 +13904,7 @@
                       <a:tailEnd type="none" w="med" len="med"/>
                     </a:lnB>
                     <a:solidFill>
-                      <a:srgbClr val="F7FAFC"/>
+                      <a:srgbClr val="10161F"/>
                     </a:solidFill>
                   </a:tcPr>
                 </a:tc>
@@ -12800,7 +13919,7 @@
                       <a:r>
                         <a:rPr lang="en-US" sz="1100" b="1" dirty="0">
                           <a:solidFill>
-                            <a:srgbClr val="718096"/>
+                            <a:srgbClr val="FFFFFF"/>
                           </a:solidFill>
                           <a:latin typeface="Pretendard" pitchFamily="34" charset="0"/>
                           <a:ea typeface="Pretendard" pitchFamily="34" charset="-122"/>
@@ -12853,7 +13972,7 @@
                       <a:tailEnd type="none" w="med" len="med"/>
                     </a:lnB>
                     <a:solidFill>
-                      <a:srgbClr val="F7FAFC"/>
+                      <a:srgbClr val="10161F"/>
                     </a:solidFill>
                   </a:tcPr>
                 </a:tc>
@@ -12868,7 +13987,7 @@
                       <a:r>
                         <a:rPr lang="en-US" sz="1100" b="1" dirty="0">
                           <a:solidFill>
-                            <a:srgbClr val="718096"/>
+                            <a:srgbClr val="FFFFFF"/>
                           </a:solidFill>
                           <a:latin typeface="Pretendard" pitchFamily="34" charset="0"/>
                           <a:ea typeface="Pretendard" pitchFamily="34" charset="-122"/>
@@ -12921,7 +14040,7 @@
                       <a:tailEnd type="none" w="med" len="med"/>
                     </a:lnB>
                     <a:solidFill>
-                      <a:srgbClr val="F7FAFC"/>
+                      <a:srgbClr val="10161F"/>
                     </a:solidFill>
                   </a:tcPr>
                 </a:tc>
@@ -13108,7 +14227,7 @@
                           <a:ea typeface="Pretendard" pitchFamily="34" charset="-122"/>
                           <a:cs typeface="Pretendard" pitchFamily="34" charset="-120"/>
                         </a:rPr>
-                        <a:t>165.8억</a:t>
+                        <a:t>174.1억</a:t>
                       </a:r>
                       <a:endParaRPr lang="en-US" sz="1100" dirty="0">
                         <a:latin typeface="Pretendard" charset="0"/>
@@ -13176,7 +14295,7 @@
                           <a:ea typeface="Pretendard" pitchFamily="34" charset="-122"/>
                           <a:cs typeface="Pretendard" pitchFamily="34" charset="-120"/>
                         </a:rPr>
-                        <a:t>3.78%</a:t>
+                        <a:t>0.00%</a:t>
                       </a:r>
                       <a:endParaRPr lang="en-US" sz="1100" dirty="0">
                         <a:latin typeface="Pretendard" charset="0"/>
@@ -13410,7 +14529,7 @@
                           <a:ea typeface="Pretendard" pitchFamily="34" charset="-122"/>
                           <a:cs typeface="Pretendard" pitchFamily="34" charset="-120"/>
                         </a:rPr>
-                        <a:t>99.8억</a:t>
+                        <a:t>108.1억</a:t>
                       </a:r>
                       <a:endParaRPr lang="en-US" sz="1100" dirty="0">
                         <a:latin typeface="Pretendard" charset="0"/>
@@ -13478,7 +14597,7 @@
                           <a:ea typeface="Pretendard" pitchFamily="34" charset="-122"/>
                           <a:cs typeface="Pretendard" pitchFamily="34" charset="-120"/>
                         </a:rPr>
-                        <a:t>3.11%</a:t>
+                        <a:t>0.00%</a:t>
                       </a:r>
                       <a:endParaRPr lang="en-US" sz="1100" dirty="0">
                         <a:latin typeface="Pretendard" charset="0"/>
@@ -13712,7 +14831,7 @@
                           <a:ea typeface="Pretendard" pitchFamily="34" charset="-122"/>
                           <a:cs typeface="Pretendard" pitchFamily="34" charset="-120"/>
                         </a:rPr>
-                        <a:t>83.3억</a:t>
+                        <a:t>91.6억</a:t>
                       </a:r>
                       <a:endParaRPr lang="en-US" sz="1100" dirty="0">
                         <a:latin typeface="Pretendard" charset="0"/>
@@ -13780,7 +14899,7 @@
                           <a:ea typeface="Pretendard" pitchFamily="34" charset="-122"/>
                           <a:cs typeface="Pretendard" pitchFamily="34" charset="-120"/>
                         </a:rPr>
-                        <a:t>2.77%</a:t>
+                        <a:t>0.00%</a:t>
                       </a:r>
                       <a:endParaRPr lang="en-US" sz="1100" dirty="0">
                         <a:latin typeface="Pretendard" charset="0"/>
@@ -14014,7 +15133,7 @@
                           <a:ea typeface="Pretendard" pitchFamily="34" charset="-122"/>
                           <a:cs typeface="Pretendard" pitchFamily="34" charset="-120"/>
                         </a:rPr>
-                        <a:t>66.8억</a:t>
+                        <a:t>75.1억</a:t>
                       </a:r>
                       <a:endParaRPr lang="en-US" sz="1100" dirty="0">
                         <a:latin typeface="Pretendard" charset="0"/>
@@ -14082,7 +15201,7 @@
                           <a:ea typeface="Pretendard" pitchFamily="34" charset="-122"/>
                           <a:cs typeface="Pretendard" pitchFamily="34" charset="-120"/>
                         </a:rPr>
-                        <a:t>2.27%</a:t>
+                        <a:t>0.00%</a:t>
                       </a:r>
                       <a:endParaRPr lang="en-US" sz="1100" dirty="0">
                         <a:latin typeface="Pretendard" charset="0"/>
@@ -14146,7 +15265,7 @@
         </p:nvSpPr>
         <p:spPr>
           <a:xfrm>
-            <a:off x="6461608" y="4069080"/>
+            <a:off x="6397600" y="4069080"/>
             <a:ext cx="4934560" cy="1463040"/>
           </a:xfrm>
           <a:prstGeom prst="roundRect">
@@ -14168,7 +15287,7 @@
         </p:nvSpPr>
         <p:spPr>
           <a:xfrm>
-            <a:off x="6461608" y="4123944"/>
+            <a:off x="6397600" y="4123944"/>
             <a:ext cx="36576" cy="1353312"/>
           </a:xfrm>
           <a:prstGeom prst="rect">
@@ -14188,8 +15307,8 @@
         </p:nvSpPr>
         <p:spPr>
           <a:xfrm>
-            <a:off x="6644488" y="4178808"/>
-            <a:ext cx="4605376" cy="201168"/>
+            <a:off x="6543904" y="4160520"/>
+            <a:ext cx="4678528" cy="201168"/>
           </a:xfrm>
           <a:prstGeom prst="rect">
             <a:avLst/>
@@ -14227,8 +15346,8 @@
         </p:nvSpPr>
         <p:spPr>
           <a:xfrm>
-            <a:off x="6644488" y="4398264"/>
-            <a:ext cx="4605376" cy="1060704"/>
+            <a:off x="6543904" y="4361688"/>
+            <a:ext cx="4678528" cy="1133856"/>
           </a:xfrm>
           <a:prstGeom prst="rect">
             <a:avLst/>
@@ -14242,12 +15361,12 @@
           <a:p>
             <a:pPr indent="0" marL="0">
               <a:lnSpc>
-                <a:spcPct val="120000"/>
+                <a:spcPct val="108000"/>
               </a:lnSpc>
               <a:buNone/>
             </a:pPr>
             <a:r>
-              <a:rPr lang="en-US" sz="930" dirty="0">
+              <a:rPr lang="en-US" sz="980" dirty="0">
                 <a:solidFill>
                   <a:srgbClr val="10161F"/>
                 </a:solidFill>
@@ -14257,7 +15376,7 @@
               </a:rPr>
               <a:t>차입 금리가 자산 총수익률을 상회하여 대출 실행 시 자기자본수익률이 하락할 수 있습니다. 에쿼티 비중 확대를 권장합니다.</a:t>
             </a:r>
-            <a:endParaRPr lang="en-US" sz="930" dirty="0"/>
+            <a:endParaRPr lang="en-US" sz="980" dirty="0"/>
           </a:p>
         </p:txBody>
       </p:sp>
@@ -14269,7 +15388,7 @@
         </p:nvSpPr>
         <p:spPr>
           <a:xfrm>
-            <a:off x="566928" y="6382512"/>
+            <a:off x="502920" y="6382512"/>
             <a:ext cx="7315200" cy="219456"/>
           </a:xfrm>
           <a:prstGeom prst="rect">
@@ -14308,277 +15427,7 @@
         </p:nvSpPr>
         <p:spPr>
           <a:xfrm>
-            <a:off x="10710367" y="6382512"/>
-            <a:ext cx="914400" cy="219456"/>
-          </a:xfrm>
-          <a:prstGeom prst="rect">
-            <a:avLst/>
-          </a:prstGeom>
-          <a:noFill/>
-          <a:ln/>
-        </p:spPr>
-        <p:txBody>
-          <a:bodyPr wrap="square" lIns="0" tIns="0" rIns="0" bIns="0" rtlCol="0" anchor="ctr"/>
-          <a:lstStyle/>
-          <a:p>
-            <a:pPr algn="r" indent="0" marL="0">
-              <a:buNone/>
-            </a:pPr>
-            <a:r>
-              <a:rPr lang="en-US" sz="900" b="1" dirty="0">
-                <a:solidFill>
-                  <a:srgbClr val="B98A2E"/>
-                </a:solidFill>
-                <a:latin typeface="Arial" pitchFamily="34" charset="0"/>
-                <a:ea typeface="Arial" pitchFamily="34" charset="-122"/>
-                <a:cs typeface="Arial" pitchFamily="34" charset="-120"/>
-              </a:rPr>
-              <a:t>7</a:t>
-            </a:r>
-            <a:endParaRPr lang="en-US" sz="900" dirty="0"/>
-          </a:p>
-        </p:txBody>
-      </p:sp>
-    </p:spTree>
-  </p:cSld>
-  <p:clrMapOvr>
-    <a:masterClrMapping/>
-  </p:clrMapOvr>
-</p:sld>
-</file>
-
-<file path=ppt/slides/slide8.xml><?xml version="1.0" encoding="utf-8"?>
-<p:sld xmlns:a="http://schemas.openxmlformats.org/drawingml/2006/main" xmlns:r="http://schemas.openxmlformats.org/officeDocument/2006/relationships" xmlns:p="http://schemas.openxmlformats.org/presentationml/2006/main">
-  <p:cSld name="Slide 8">
-    <p:bg>
-      <p:bgPr>
-        <a:solidFill>
-          <a:srgbClr val="FFFFFF"/>
-        </a:solidFill>
-      </p:bgPr>
-    </p:bg>
-    <p:spTree>
-      <p:nvGrpSpPr>
-        <p:cNvPr id="1" name=""/>
-        <p:cNvGrpSpPr/>
-        <p:nvPr/>
-      </p:nvGrpSpPr>
-      <p:grpSpPr>
-        <a:xfrm>
-          <a:off x="0" y="0"/>
-          <a:ext cx="0" cy="0"/>
-          <a:chOff x="0" y="0"/>
-          <a:chExt cx="0" cy="0"/>
-        </a:xfrm>
-      </p:grpSpPr>
-      <p:sp>
-        <p:nvSpPr>
-          <p:cNvPr id="2" name="Shape 0"/>
-          <p:cNvSpPr/>
-          <p:nvPr/>
-        </p:nvSpPr>
-        <p:spPr>
-          <a:xfrm>
-            <a:off x="566928" y="457200"/>
-            <a:ext cx="384048" cy="384048"/>
-          </a:xfrm>
-          <a:prstGeom prst="ellipse">
-            <a:avLst/>
-          </a:prstGeom>
-          <a:solidFill>
-            <a:srgbClr val="B98A2E"/>
-          </a:solidFill>
-          <a:ln/>
-        </p:spPr>
-      </p:sp>
-      <p:sp>
-        <p:nvSpPr>
-          <p:cNvPr id="3" name="Text 1"/>
-          <p:cNvSpPr/>
-          <p:nvPr/>
-        </p:nvSpPr>
-        <p:spPr>
-          <a:xfrm>
-            <a:off x="566928" y="457200"/>
-            <a:ext cx="384048" cy="384048"/>
-          </a:xfrm>
-          <a:prstGeom prst="rect">
-            <a:avLst/>
-          </a:prstGeom>
-          <a:noFill/>
-          <a:ln/>
-        </p:spPr>
-        <p:txBody>
-          <a:bodyPr wrap="square" lIns="0" tIns="0" rIns="0" bIns="0" rtlCol="0" anchor="ctr"/>
-          <a:lstStyle/>
-          <a:p>
-            <a:pPr algn="ctr" indent="0" marL="0">
-              <a:buNone/>
-            </a:pPr>
-            <a:r>
-              <a:rPr lang="en-US" sz="1300" b="1" dirty="0">
-                <a:solidFill>
-                  <a:srgbClr val="FFFFFF"/>
-                </a:solidFill>
-                <a:latin typeface="Arial" pitchFamily="34" charset="0"/>
-                <a:ea typeface="Arial" pitchFamily="34" charset="-122"/>
-                <a:cs typeface="Arial" pitchFamily="34" charset="-120"/>
-              </a:rPr>
-              <a:t>08</a:t>
-            </a:r>
-            <a:endParaRPr lang="en-US" sz="1300" dirty="0"/>
-          </a:p>
-        </p:txBody>
-      </p:sp>
-      <p:sp>
-        <p:nvSpPr>
-          <p:cNvPr id="4" name="Text 2"/>
-          <p:cNvSpPr/>
-          <p:nvPr/>
-        </p:nvSpPr>
-        <p:spPr>
-          <a:xfrm>
-            <a:off x="1133856" y="457200"/>
-            <a:ext cx="10490911" cy="182880"/>
-          </a:xfrm>
-          <a:prstGeom prst="rect">
-            <a:avLst/>
-          </a:prstGeom>
-          <a:noFill/>
-          <a:ln/>
-        </p:spPr>
-        <p:txBody>
-          <a:bodyPr wrap="square" lIns="0" tIns="0" rIns="0" bIns="0" rtlCol="0" anchor="ctr"/>
-          <a:lstStyle/>
-          <a:p>
-            <a:pPr indent="0" marL="0">
-              <a:buNone/>
-            </a:pPr>
-            <a:r>
-              <a:rPr lang="en-US" sz="950" b="1" spc="200" kern="0" dirty="0">
-                <a:solidFill>
-                  <a:srgbClr val="B98A2E"/>
-                </a:solidFill>
-                <a:latin typeface="Arial" pitchFamily="34" charset="0"/>
-                <a:ea typeface="Arial" pitchFamily="34" charset="-122"/>
-                <a:cs typeface="Arial" pitchFamily="34" charset="-120"/>
-              </a:rPr>
-              <a:t>DCF</a:t>
-            </a:r>
-            <a:endParaRPr lang="en-US" sz="950" dirty="0"/>
-          </a:p>
-        </p:txBody>
-      </p:sp>
-      <p:sp>
-        <p:nvSpPr>
-          <p:cNvPr id="5" name="Text 3"/>
-          <p:cNvSpPr/>
-          <p:nvPr/>
-        </p:nvSpPr>
-        <p:spPr>
-          <a:xfrm>
-            <a:off x="1133856" y="640080"/>
-            <a:ext cx="10490911" cy="365760"/>
-          </a:xfrm>
-          <a:prstGeom prst="rect">
-            <a:avLst/>
-          </a:prstGeom>
-          <a:noFill/>
-          <a:ln/>
-        </p:spPr>
-        <p:txBody>
-          <a:bodyPr wrap="square" lIns="0" tIns="0" rIns="0" bIns="0" rtlCol="0" anchor="ctr"/>
-          <a:lstStyle/>
-          <a:p>
-            <a:pPr indent="0" marL="0">
-              <a:buNone/>
-            </a:pPr>
-            <a:r>
-              <a:rPr lang="en-US" sz="2300" b="1" dirty="0">
-                <a:solidFill>
-                  <a:srgbClr val="10161F"/>
-                </a:solidFill>
-                <a:latin typeface="Pretendard" pitchFamily="34" charset="0"/>
-                <a:ea typeface="Pretendard" pitchFamily="34" charset="-122"/>
-                <a:cs typeface="Pretendard" pitchFamily="34" charset="-120"/>
-              </a:rPr>
-              <a:t>DCF 분석</a:t>
-            </a:r>
-            <a:endParaRPr lang="en-US" sz="2300" dirty="0"/>
-          </a:p>
-        </p:txBody>
-      </p:sp>
-      <p:sp>
-        <p:nvSpPr>
-          <p:cNvPr id="6" name="Shape 4"/>
-          <p:cNvSpPr/>
-          <p:nvPr/>
-        </p:nvSpPr>
-        <p:spPr>
-          <a:xfrm>
-            <a:off x="566928" y="1325880"/>
-            <a:ext cx="11057839" cy="0"/>
-          </a:xfrm>
-          <a:prstGeom prst="line">
-            <a:avLst/>
-          </a:prstGeom>
-          <a:noFill/>
-          <a:ln w="19050">
-            <a:solidFill>
-              <a:srgbClr val="B98A2E"/>
-            </a:solidFill>
-            <a:prstDash val="solid"/>
-          </a:ln>
-        </p:spPr>
-      </p:sp>
-      <p:sp>
-        <p:nvSpPr>
-          <p:cNvPr id="7" name="Text 5"/>
-          <p:cNvSpPr/>
-          <p:nvPr/>
-        </p:nvSpPr>
-        <p:spPr>
-          <a:xfrm>
-            <a:off x="566928" y="6382512"/>
-            <a:ext cx="7315200" cy="219456"/>
-          </a:xfrm>
-          <a:prstGeom prst="rect">
-            <a:avLst/>
-          </a:prstGeom>
-          <a:noFill/>
-          <a:ln/>
-        </p:spPr>
-        <p:txBody>
-          <a:bodyPr wrap="square" lIns="0" tIns="0" rIns="0" bIns="0" rtlCol="0" anchor="ctr"/>
-          <a:lstStyle/>
-          <a:p>
-            <a:pPr indent="0" marL="0">
-              <a:buNone/>
-            </a:pPr>
-            <a:r>
-              <a:rPr lang="en-US" sz="800" dirty="0">
-                <a:solidFill>
-                  <a:srgbClr val="718096"/>
-                </a:solidFill>
-                <a:latin typeface="Pretendard" pitchFamily="34" charset="0"/>
-                <a:ea typeface="Pretendard" pitchFamily="34" charset="-122"/>
-                <a:cs typeface="Pretendard" pitchFamily="34" charset="-120"/>
-              </a:rPr>
-              <a:t>크리딜   |   </a:t>
-            </a:r>
-            <a:endParaRPr lang="en-US" sz="800" dirty="0"/>
-          </a:p>
-        </p:txBody>
-      </p:sp>
-      <p:sp>
-        <p:nvSpPr>
-          <p:cNvPr id="8" name="Text 6"/>
-          <p:cNvSpPr/>
-          <p:nvPr/>
-        </p:nvSpPr>
-        <p:spPr>
-          <a:xfrm>
-            <a:off x="10710367" y="6382512"/>
+            <a:off x="10774375" y="6382512"/>
             <a:ext cx="914400" cy="219456"/>
           </a:xfrm>
           <a:prstGeom prst="rect">
@@ -14649,7 +15498,7 @@
         </p:nvSpPr>
         <p:spPr>
           <a:xfrm>
-            <a:off x="566928" y="457200"/>
+            <a:off x="502920" y="457200"/>
             <a:ext cx="384048" cy="384048"/>
           </a:xfrm>
           <a:prstGeom prst="ellipse">
@@ -14669,7 +15518,7 @@
         </p:nvSpPr>
         <p:spPr>
           <a:xfrm>
-            <a:off x="566928" y="457200"/>
+            <a:off x="502920" y="457200"/>
             <a:ext cx="384048" cy="384048"/>
           </a:xfrm>
           <a:prstGeom prst="rect">
@@ -14708,7 +15557,7 @@
         </p:nvSpPr>
         <p:spPr>
           <a:xfrm>
-            <a:off x="1133856" y="457200"/>
+            <a:off x="1069848" y="457200"/>
             <a:ext cx="10490911" cy="182880"/>
           </a:xfrm>
           <a:prstGeom prst="rect">
@@ -14733,7 +15582,7 @@
                 <a:ea typeface="Arial" pitchFamily="34" charset="-122"/>
                 <a:cs typeface="Arial" pitchFamily="34" charset="-120"/>
               </a:rPr>
-              <a:t>Sensitivity</a:t>
+              <a:t>DCF</a:t>
             </a:r>
             <a:endParaRPr lang="en-US" sz="950" dirty="0"/>
           </a:p>
@@ -14747,7 +15596,7 @@
         </p:nvSpPr>
         <p:spPr>
           <a:xfrm>
-            <a:off x="1133856" y="640080"/>
+            <a:off x="1069848" y="640080"/>
             <a:ext cx="10490911" cy="365760"/>
           </a:xfrm>
           <a:prstGeom prst="rect">
@@ -14772,7 +15621,7 @@
                 <a:ea typeface="Pretendard" pitchFamily="34" charset="-122"/>
                 <a:cs typeface="Pretendard" pitchFamily="34" charset="-120"/>
               </a:rPr>
-              <a:t>수익률 민감도</a:t>
+              <a:t>DCF 분석</a:t>
             </a:r>
             <a:endParaRPr lang="en-US" sz="2300" dirty="0"/>
           </a:p>
@@ -14780,52 +15629,13 @@
       </p:sp>
       <p:sp>
         <p:nvSpPr>
-          <p:cNvPr id="6" name="Text 4"/>
-          <p:cNvSpPr/>
-          <p:nvPr/>
-        </p:nvSpPr>
-        <p:spPr>
-          <a:xfrm>
-            <a:off x="566928" y="1325880"/>
-            <a:ext cx="11057839" cy="237744"/>
-          </a:xfrm>
-          <a:prstGeom prst="rect">
-            <a:avLst/>
-          </a:prstGeom>
-          <a:noFill/>
-          <a:ln/>
-        </p:spPr>
-        <p:txBody>
-          <a:bodyPr wrap="square" lIns="0" tIns="0" rIns="0" bIns="0" rtlCol="0" anchor="ctr"/>
-          <a:lstStyle/>
-          <a:p>
-            <a:pPr indent="0" marL="0">
-              <a:buNone/>
-            </a:pPr>
-            <a:r>
-              <a:rPr lang="en-US" sz="1100" b="1" dirty="0">
-                <a:solidFill>
-                  <a:srgbClr val="10161F"/>
-                </a:solidFill>
-                <a:latin typeface="Pretendard" pitchFamily="34" charset="0"/>
-                <a:ea typeface="Pretendard" pitchFamily="34" charset="-122"/>
-                <a:cs typeface="Pretendard" pitchFamily="34" charset="-120"/>
-              </a:rPr>
-              <a:t>수익률 민감도 분석</a:t>
-            </a:r>
-            <a:endParaRPr lang="en-US" sz="1100" dirty="0"/>
-          </a:p>
-        </p:txBody>
-      </p:sp>
-      <p:sp>
-        <p:nvSpPr>
-          <p:cNvPr id="7" name="Shape 5"/>
-          <p:cNvSpPr/>
-          <p:nvPr/>
-        </p:nvSpPr>
-        <p:spPr>
-          <a:xfrm>
-            <a:off x="566928" y="1737360"/>
+          <p:cNvPr id="6" name="Shape 4"/>
+          <p:cNvSpPr/>
+          <p:nvPr/>
+        </p:nvSpPr>
+        <p:spPr>
+          <a:xfrm>
+            <a:off x="502920" y="1325880"/>
             <a:ext cx="11057839" cy="0"/>
           </a:xfrm>
           <a:prstGeom prst="line">
@@ -14842,56 +15652,14 @@
       </p:sp>
       <p:sp>
         <p:nvSpPr>
-          <p:cNvPr id="8" name="Shape 6"/>
-          <p:cNvSpPr/>
-          <p:nvPr/>
-        </p:nvSpPr>
-        <p:spPr>
-          <a:xfrm>
-            <a:off x="566928" y="2057400"/>
-            <a:ext cx="11057839" cy="1280160"/>
-          </a:xfrm>
-          <a:prstGeom prst="roundRect">
-            <a:avLst>
-              <a:gd name="adj" fmla="val 4286"/>
-            </a:avLst>
-          </a:prstGeom>
-          <a:solidFill>
-            <a:srgbClr val="BEE3F8"/>
-          </a:solidFill>
-          <a:ln/>
-        </p:spPr>
-      </p:sp>
-      <p:sp>
-        <p:nvSpPr>
-          <p:cNvPr id="9" name="Shape 7"/>
-          <p:cNvSpPr/>
-          <p:nvPr/>
-        </p:nvSpPr>
-        <p:spPr>
-          <a:xfrm>
-            <a:off x="566928" y="2112264"/>
-            <a:ext cx="36576" cy="1170432"/>
-          </a:xfrm>
-          <a:prstGeom prst="rect">
-            <a:avLst/>
-          </a:prstGeom>
-          <a:solidFill>
-            <a:srgbClr val="2B6CB0"/>
-          </a:solidFill>
-          <a:ln/>
-        </p:spPr>
-      </p:sp>
-      <p:sp>
-        <p:nvSpPr>
-          <p:cNvPr id="10" name="Text 8"/>
-          <p:cNvSpPr/>
-          <p:nvPr/>
-        </p:nvSpPr>
-        <p:spPr>
-          <a:xfrm>
-            <a:off x="749808" y="2167128"/>
-            <a:ext cx="10728655" cy="201168"/>
+          <p:cNvPr id="7" name="Text 5"/>
+          <p:cNvSpPr/>
+          <p:nvPr/>
+        </p:nvSpPr>
+        <p:spPr>
+          <a:xfrm>
+            <a:off x="502920" y="6382512"/>
+            <a:ext cx="7315200" cy="219456"/>
           </a:xfrm>
           <a:prstGeom prst="rect">
             <a:avLst/>
@@ -14907,95 +15675,14 @@
               <a:buNone/>
             </a:pPr>
             <a:r>
-              <a:rPr lang="en-US" sz="1050" b="1" dirty="0">
-                <a:solidFill>
-                  <a:srgbClr val="2B6CB0"/>
+              <a:rPr lang="en-US" sz="800" dirty="0">
+                <a:solidFill>
+                  <a:srgbClr val="718096"/>
                 </a:solidFill>
                 <a:latin typeface="Pretendard" pitchFamily="34" charset="0"/>
                 <a:ea typeface="Pretendard" pitchFamily="34" charset="-122"/>
                 <a:cs typeface="Pretendard" pitchFamily="34" charset="-120"/>
               </a:rPr>
-              <a:t>주의</a:t>
-            </a:r>
-            <a:endParaRPr lang="en-US" sz="1050" dirty="0"/>
-          </a:p>
-        </p:txBody>
-      </p:sp>
-      <p:sp>
-        <p:nvSpPr>
-          <p:cNvPr id="11" name="Text 9"/>
-          <p:cNvSpPr/>
-          <p:nvPr/>
-        </p:nvSpPr>
-        <p:spPr>
-          <a:xfrm>
-            <a:off x="749808" y="2386584"/>
-            <a:ext cx="10728655" cy="877824"/>
-          </a:xfrm>
-          <a:prstGeom prst="rect">
-            <a:avLst/>
-          </a:prstGeom>
-          <a:noFill/>
-          <a:ln/>
-        </p:spPr>
-        <p:txBody>
-          <a:bodyPr wrap="square" lIns="0" tIns="0" rIns="0" bIns="0" rtlCol="0" anchor="t"/>
-          <a:lstStyle/>
-          <a:p>
-            <a:pPr indent="0" marL="0">
-              <a:lnSpc>
-                <a:spcPct val="120000"/>
-              </a:lnSpc>
-              <a:buNone/>
-            </a:pPr>
-            <a:r>
-              <a:rPr lang="en-US" sz="930" dirty="0">
-                <a:solidFill>
-                  <a:srgbClr val="10161F"/>
-                </a:solidFill>
-                <a:latin typeface="Pretendard" pitchFamily="34" charset="0"/>
-                <a:ea typeface="Pretendard" pitchFamily="34" charset="-122"/>
-                <a:cs typeface="Pretendard" pitchFamily="34" charset="-120"/>
-              </a:rPr>
-              <a:t>실제 민감도는 Pro IM 상세 정보 입력 후 산출됩니다.</a:t>
-            </a:r>
-            <a:endParaRPr lang="en-US" sz="930" dirty="0"/>
-          </a:p>
-        </p:txBody>
-      </p:sp>
-      <p:sp>
-        <p:nvSpPr>
-          <p:cNvPr id="12" name="Text 10"/>
-          <p:cNvSpPr/>
-          <p:nvPr/>
-        </p:nvSpPr>
-        <p:spPr>
-          <a:xfrm>
-            <a:off x="566928" y="6382512"/>
-            <a:ext cx="7315200" cy="219456"/>
-          </a:xfrm>
-          <a:prstGeom prst="rect">
-            <a:avLst/>
-          </a:prstGeom>
-          <a:noFill/>
-          <a:ln/>
-        </p:spPr>
-        <p:txBody>
-          <a:bodyPr wrap="square" lIns="0" tIns="0" rIns="0" bIns="0" rtlCol="0" anchor="ctr"/>
-          <a:lstStyle/>
-          <a:p>
-            <a:pPr indent="0" marL="0">
-              <a:buNone/>
-            </a:pPr>
-            <a:r>
-              <a:rPr lang="en-US" sz="800" dirty="0">
-                <a:solidFill>
-                  <a:srgbClr val="718096"/>
-                </a:solidFill>
-                <a:latin typeface="Pretendard" pitchFamily="34" charset="0"/>
-                <a:ea typeface="Pretendard" pitchFamily="34" charset="-122"/>
-                <a:cs typeface="Pretendard" pitchFamily="34" charset="-120"/>
-              </a:rPr>
               <a:t>크리딜   |   </a:t>
             </a:r>
             <a:endParaRPr lang="en-US" sz="800" dirty="0"/>
@@ -15004,13 +15691,13 @@
       </p:sp>
       <p:sp>
         <p:nvSpPr>
-          <p:cNvPr id="13" name="Text 11"/>
-          <p:cNvSpPr/>
-          <p:nvPr/>
-        </p:nvSpPr>
-        <p:spPr>
-          <a:xfrm>
-            <a:off x="10710367" y="6382512"/>
+          <p:cNvPr id="8" name="Text 6"/>
+          <p:cNvSpPr/>
+          <p:nvPr/>
+        </p:nvSpPr>
+        <p:spPr>
+          <a:xfrm>
+            <a:off x="10774375" y="6382512"/>
             <a:ext cx="914400" cy="219456"/>
           </a:xfrm>
           <a:prstGeom prst="rect">

--- a/docs/test/stress/e2e-outputs/income_pro_pr02.pptx
+++ b/docs/test/stress/e2e-outputs/income_pro_pr02.pptx
@@ -2404,7 +2404,7 @@
         <p:spPr>
           <a:xfrm>
             <a:off x="502920" y="3090672"/>
-            <a:ext cx="7315200" cy="365760"/>
+            <a:ext cx="7315200" cy="329184"/>
           </a:xfrm>
           <a:prstGeom prst="rect">
             <a:avLst/>
@@ -2442,7 +2442,7 @@
         </p:nvSpPr>
         <p:spPr>
           <a:xfrm>
-            <a:off x="502920" y="3685032"/>
+            <a:off x="502920" y="3639312"/>
             <a:ext cx="1097280" cy="292608"/>
           </a:xfrm>
           <a:prstGeom prst="roundRect">
@@ -2464,7 +2464,7 @@
         </p:nvSpPr>
         <p:spPr>
           <a:xfrm>
-            <a:off x="502920" y="3685032"/>
+            <a:off x="502920" y="3639312"/>
             <a:ext cx="1097280" cy="292608"/>
           </a:xfrm>
           <a:prstGeom prst="rect">
@@ -2503,7 +2503,7 @@
         </p:nvSpPr>
         <p:spPr>
           <a:xfrm>
-            <a:off x="1691640" y="3685032"/>
+            <a:off x="1691640" y="3639312"/>
             <a:ext cx="1005840" cy="292608"/>
           </a:xfrm>
           <a:prstGeom prst="roundRect">
@@ -2525,7 +2525,7 @@
         </p:nvSpPr>
         <p:spPr>
           <a:xfrm>
-            <a:off x="1691640" y="3685032"/>
+            <a:off x="1691640" y="3639312"/>
             <a:ext cx="1005840" cy="292608"/>
           </a:xfrm>
           <a:prstGeom prst="rect">
@@ -2564,7 +2564,7 @@
         </p:nvSpPr>
         <p:spPr>
           <a:xfrm>
-            <a:off x="502920" y="4187952"/>
+            <a:off x="502920" y="4078224"/>
             <a:ext cx="6858000" cy="1051560"/>
           </a:xfrm>
           <a:prstGeom prst="roundRect">
@@ -2591,7 +2591,7 @@
         </p:nvSpPr>
         <p:spPr>
           <a:xfrm>
-            <a:off x="758952" y="4297680"/>
+            <a:off x="758952" y="4187952"/>
             <a:ext cx="6345936" cy="832104"/>
           </a:xfrm>
           <a:prstGeom prst="rect">
@@ -2733,7 +2733,7 @@
                 <a:ea typeface="Pretendard" pitchFamily="34" charset="-122"/>
                 <a:cs typeface="Pretendard" pitchFamily="34" charset="-120"/>
               </a:rPr>
-              <a:t>크리딜   |   </a:t>
+              <a:t>크리딜</a:t>
             </a:r>
             <a:endParaRPr lang="en-US" sz="800" dirty="0"/>
           </a:p>
@@ -3165,7 +3165,7 @@
                 <a:ea typeface="Pretendard" pitchFamily="34" charset="-122"/>
                 <a:cs typeface="Pretendard" pitchFamily="34" charset="-120"/>
               </a:rPr>
-              <a:t>크리딜   |   </a:t>
+              <a:t>크리딜</a:t>
             </a:r>
             <a:endParaRPr lang="en-US" sz="800" dirty="0"/>
           </a:p>
@@ -3520,7 +3520,7 @@
                 <a:ea typeface="Pretendard" pitchFamily="34" charset="-122"/>
                 <a:cs typeface="Pretendard" pitchFamily="34" charset="-120"/>
               </a:rPr>
-              <a:t>크리딜   |   </a:t>
+              <a:t>크리딜</a:t>
             </a:r>
             <a:endParaRPr lang="en-US" sz="800" dirty="0"/>
           </a:p>
@@ -4177,7 +4177,7 @@
                 <a:ea typeface="Pretendard" pitchFamily="34" charset="-122"/>
                 <a:cs typeface="Pretendard" pitchFamily="34" charset="-120"/>
               </a:rPr>
-              <a:t>크리딜   |   </a:t>
+              <a:t>크리딜</a:t>
             </a:r>
             <a:endParaRPr lang="en-US" sz="800" dirty="0"/>
           </a:p>
@@ -4439,7 +4439,7 @@
         <p:spPr>
           <a:xfrm>
             <a:off x="502920" y="1719072"/>
-            <a:ext cx="5368900" cy="868680"/>
+            <a:ext cx="5368900" cy="749808"/>
           </a:xfrm>
           <a:prstGeom prst="rect">
             <a:avLst/>
@@ -4463,8 +4463,8 @@
         </p:nvSpPr>
         <p:spPr>
           <a:xfrm>
-            <a:off x="640080" y="1883664"/>
-            <a:ext cx="320040" cy="320040"/>
+            <a:off x="640080" y="1947672"/>
+            <a:ext cx="292608" cy="292608"/>
           </a:xfrm>
           <a:prstGeom prst="rect">
             <a:avLst/>
@@ -4483,8 +4483,8 @@
         </p:nvSpPr>
         <p:spPr>
           <a:xfrm>
-            <a:off x="640080" y="1883664"/>
-            <a:ext cx="320040" cy="320040"/>
+            <a:off x="640080" y="1947672"/>
+            <a:ext cx="292608" cy="292608"/>
           </a:xfrm>
           <a:prstGeom prst="rect">
             <a:avLst/>
@@ -4500,7 +4500,7 @@
               <a:buNone/>
             </a:pPr>
             <a:r>
-              <a:rPr lang="en-US" sz="1100" b="1" dirty="0">
+              <a:rPr lang="en-US" sz="1050" b="1" dirty="0">
                 <a:solidFill>
                   <a:srgbClr val="FFFFFF"/>
                 </a:solidFill>
@@ -4510,7 +4510,7 @@
               </a:rPr>
               <a:t>✓</a:t>
             </a:r>
-            <a:endParaRPr lang="en-US" sz="1100" dirty="0"/>
+            <a:endParaRPr lang="en-US" sz="1050" dirty="0"/>
           </a:p>
         </p:txBody>
       </p:sp>
@@ -4522,8 +4522,8 @@
         </p:nvSpPr>
         <p:spPr>
           <a:xfrm>
-            <a:off x="1051560" y="1810512"/>
-            <a:ext cx="4683100" cy="722376"/>
+            <a:off x="1033272" y="1792224"/>
+            <a:ext cx="4710532" cy="603504"/>
           </a:xfrm>
           <a:prstGeom prst="rect">
             <a:avLst/>
@@ -4564,8 +4564,8 @@
         </p:nvSpPr>
         <p:spPr>
           <a:xfrm>
-            <a:off x="502920" y="2715768"/>
-            <a:ext cx="5368900" cy="868680"/>
+            <a:off x="502920" y="2542032"/>
+            <a:ext cx="5368900" cy="749808"/>
           </a:xfrm>
           <a:prstGeom prst="rect">
             <a:avLst/>
@@ -4589,8 +4589,8 @@
         </p:nvSpPr>
         <p:spPr>
           <a:xfrm>
-            <a:off x="640080" y="2880360"/>
-            <a:ext cx="320040" cy="320040"/>
+            <a:off x="640080" y="2770632"/>
+            <a:ext cx="292608" cy="292608"/>
           </a:xfrm>
           <a:prstGeom prst="rect">
             <a:avLst/>
@@ -4609,8 +4609,8 @@
         </p:nvSpPr>
         <p:spPr>
           <a:xfrm>
-            <a:off x="640080" y="2880360"/>
-            <a:ext cx="320040" cy="320040"/>
+            <a:off x="640080" y="2770632"/>
+            <a:ext cx="292608" cy="292608"/>
           </a:xfrm>
           <a:prstGeom prst="rect">
             <a:avLst/>
@@ -4626,7 +4626,7 @@
               <a:buNone/>
             </a:pPr>
             <a:r>
-              <a:rPr lang="en-US" sz="1100" b="1" dirty="0">
+              <a:rPr lang="en-US" sz="1050" b="1" dirty="0">
                 <a:solidFill>
                   <a:srgbClr val="FFFFFF"/>
                 </a:solidFill>
@@ -4636,7 +4636,7 @@
               </a:rPr>
               <a:t>✓</a:t>
             </a:r>
-            <a:endParaRPr lang="en-US" sz="1100" dirty="0"/>
+            <a:endParaRPr lang="en-US" sz="1050" dirty="0"/>
           </a:p>
         </p:txBody>
       </p:sp>
@@ -4648,8 +4648,8 @@
         </p:nvSpPr>
         <p:spPr>
           <a:xfrm>
-            <a:off x="1051560" y="2807208"/>
-            <a:ext cx="4683100" cy="722376"/>
+            <a:off x="1033272" y="2615184"/>
+            <a:ext cx="4710532" cy="603504"/>
           </a:xfrm>
           <a:prstGeom prst="rect">
             <a:avLst/>
@@ -4690,8 +4690,8 @@
         </p:nvSpPr>
         <p:spPr>
           <a:xfrm>
-            <a:off x="502920" y="3712464"/>
-            <a:ext cx="5368900" cy="868680"/>
+            <a:off x="502920" y="3364992"/>
+            <a:ext cx="5368900" cy="749808"/>
           </a:xfrm>
           <a:prstGeom prst="rect">
             <a:avLst/>
@@ -4715,8 +4715,8 @@
         </p:nvSpPr>
         <p:spPr>
           <a:xfrm>
-            <a:off x="640080" y="3877056"/>
-            <a:ext cx="320040" cy="320040"/>
+            <a:off x="640080" y="3593592"/>
+            <a:ext cx="292608" cy="292608"/>
           </a:xfrm>
           <a:prstGeom prst="rect">
             <a:avLst/>
@@ -4735,8 +4735,8 @@
         </p:nvSpPr>
         <p:spPr>
           <a:xfrm>
-            <a:off x="640080" y="3877056"/>
-            <a:ext cx="320040" cy="320040"/>
+            <a:off x="640080" y="3593592"/>
+            <a:ext cx="292608" cy="292608"/>
           </a:xfrm>
           <a:prstGeom prst="rect">
             <a:avLst/>
@@ -4752,7 +4752,7 @@
               <a:buNone/>
             </a:pPr>
             <a:r>
-              <a:rPr lang="en-US" sz="1100" b="1" dirty="0">
+              <a:rPr lang="en-US" sz="1050" b="1" dirty="0">
                 <a:solidFill>
                   <a:srgbClr val="FFFFFF"/>
                 </a:solidFill>
@@ -4762,7 +4762,7 @@
               </a:rPr>
               <a:t>✓</a:t>
             </a:r>
-            <a:endParaRPr lang="en-US" sz="1100" dirty="0"/>
+            <a:endParaRPr lang="en-US" sz="1050" dirty="0"/>
           </a:p>
         </p:txBody>
       </p:sp>
@@ -4774,8 +4774,8 @@
         </p:nvSpPr>
         <p:spPr>
           <a:xfrm>
-            <a:off x="1051560" y="3803904"/>
-            <a:ext cx="4683100" cy="722376"/>
+            <a:off x="1033272" y="3438144"/>
+            <a:ext cx="4710532" cy="603504"/>
           </a:xfrm>
           <a:prstGeom prst="rect">
             <a:avLst/>
@@ -4817,7 +4817,7 @@
         <p:spPr>
           <a:xfrm>
             <a:off x="6191860" y="1719072"/>
-            <a:ext cx="5368900" cy="868680"/>
+            <a:ext cx="5368900" cy="749808"/>
           </a:xfrm>
           <a:prstGeom prst="rect">
             <a:avLst/>
@@ -4841,8 +4841,8 @@
         </p:nvSpPr>
         <p:spPr>
           <a:xfrm>
-            <a:off x="6329020" y="1883664"/>
-            <a:ext cx="320040" cy="320040"/>
+            <a:off x="6329020" y="1947672"/>
+            <a:ext cx="292608" cy="292608"/>
           </a:xfrm>
           <a:prstGeom prst="rect">
             <a:avLst/>
@@ -4861,8 +4861,8 @@
         </p:nvSpPr>
         <p:spPr>
           <a:xfrm>
-            <a:off x="6329020" y="1883664"/>
-            <a:ext cx="320040" cy="320040"/>
+            <a:off x="6329020" y="1947672"/>
+            <a:ext cx="292608" cy="292608"/>
           </a:xfrm>
           <a:prstGeom prst="rect">
             <a:avLst/>
@@ -4878,7 +4878,7 @@
               <a:buNone/>
             </a:pPr>
             <a:r>
-              <a:rPr lang="en-US" sz="1100" b="1" dirty="0">
+              <a:rPr lang="en-US" sz="1050" b="1" dirty="0">
                 <a:solidFill>
                   <a:srgbClr val="FFFFFF"/>
                 </a:solidFill>
@@ -4888,7 +4888,7 @@
               </a:rPr>
               <a:t>✓</a:t>
             </a:r>
-            <a:endParaRPr lang="en-US" sz="1100" dirty="0"/>
+            <a:endParaRPr lang="en-US" sz="1050" dirty="0"/>
           </a:p>
         </p:txBody>
       </p:sp>
@@ -4900,8 +4900,8 @@
         </p:nvSpPr>
         <p:spPr>
           <a:xfrm>
-            <a:off x="6740500" y="1810512"/>
-            <a:ext cx="4683100" cy="722376"/>
+            <a:off x="6722212" y="1792224"/>
+            <a:ext cx="4710532" cy="603504"/>
           </a:xfrm>
           <a:prstGeom prst="rect">
             <a:avLst/>
@@ -4942,8 +4942,8 @@
         </p:nvSpPr>
         <p:spPr>
           <a:xfrm>
-            <a:off x="6191860" y="2715768"/>
-            <a:ext cx="5368900" cy="868680"/>
+            <a:off x="6191860" y="2542032"/>
+            <a:ext cx="5368900" cy="749808"/>
           </a:xfrm>
           <a:prstGeom prst="rect">
             <a:avLst/>
@@ -4967,8 +4967,8 @@
         </p:nvSpPr>
         <p:spPr>
           <a:xfrm>
-            <a:off x="6329020" y="2880360"/>
-            <a:ext cx="320040" cy="320040"/>
+            <a:off x="6329020" y="2770632"/>
+            <a:ext cx="292608" cy="292608"/>
           </a:xfrm>
           <a:prstGeom prst="rect">
             <a:avLst/>
@@ -4987,8 +4987,8 @@
         </p:nvSpPr>
         <p:spPr>
           <a:xfrm>
-            <a:off x="6329020" y="2880360"/>
-            <a:ext cx="320040" cy="320040"/>
+            <a:off x="6329020" y="2770632"/>
+            <a:ext cx="292608" cy="292608"/>
           </a:xfrm>
           <a:prstGeom prst="rect">
             <a:avLst/>
@@ -5004,7 +5004,7 @@
               <a:buNone/>
             </a:pPr>
             <a:r>
-              <a:rPr lang="en-US" sz="1100" b="1" dirty="0">
+              <a:rPr lang="en-US" sz="1050" b="1" dirty="0">
                 <a:solidFill>
                   <a:srgbClr val="FFFFFF"/>
                 </a:solidFill>
@@ -5014,7 +5014,7 @@
               </a:rPr>
               <a:t>✓</a:t>
             </a:r>
-            <a:endParaRPr lang="en-US" sz="1100" dirty="0"/>
+            <a:endParaRPr lang="en-US" sz="1050" dirty="0"/>
           </a:p>
         </p:txBody>
       </p:sp>
@@ -5026,8 +5026,8 @@
         </p:nvSpPr>
         <p:spPr>
           <a:xfrm>
-            <a:off x="6740500" y="2807208"/>
-            <a:ext cx="4683100" cy="722376"/>
+            <a:off x="6722212" y="2615184"/>
+            <a:ext cx="4710532" cy="603504"/>
           </a:xfrm>
           <a:prstGeom prst="rect">
             <a:avLst/>
@@ -5068,8 +5068,8 @@
         </p:nvSpPr>
         <p:spPr>
           <a:xfrm>
-            <a:off x="6191860" y="3712464"/>
-            <a:ext cx="5368900" cy="868680"/>
+            <a:off x="6191860" y="3364992"/>
+            <a:ext cx="5368900" cy="749808"/>
           </a:xfrm>
           <a:prstGeom prst="rect">
             <a:avLst/>
@@ -5093,8 +5093,8 @@
         </p:nvSpPr>
         <p:spPr>
           <a:xfrm>
-            <a:off x="6329020" y="3877056"/>
-            <a:ext cx="320040" cy="320040"/>
+            <a:off x="6329020" y="3593592"/>
+            <a:ext cx="292608" cy="292608"/>
           </a:xfrm>
           <a:prstGeom prst="rect">
             <a:avLst/>
@@ -5113,8 +5113,8 @@
         </p:nvSpPr>
         <p:spPr>
           <a:xfrm>
-            <a:off x="6329020" y="3877056"/>
-            <a:ext cx="320040" cy="320040"/>
+            <a:off x="6329020" y="3593592"/>
+            <a:ext cx="292608" cy="292608"/>
           </a:xfrm>
           <a:prstGeom prst="rect">
             <a:avLst/>
@@ -5130,7 +5130,7 @@
               <a:buNone/>
             </a:pPr>
             <a:r>
-              <a:rPr lang="en-US" sz="1100" b="1" dirty="0">
+              <a:rPr lang="en-US" sz="1050" b="1" dirty="0">
                 <a:solidFill>
                   <a:srgbClr val="FFFFFF"/>
                 </a:solidFill>
@@ -5140,7 +5140,7 @@
               </a:rPr>
               <a:t>✓</a:t>
             </a:r>
-            <a:endParaRPr lang="en-US" sz="1100" dirty="0"/>
+            <a:endParaRPr lang="en-US" sz="1050" dirty="0"/>
           </a:p>
         </p:txBody>
       </p:sp>
@@ -5152,8 +5152,8 @@
         </p:nvSpPr>
         <p:spPr>
           <a:xfrm>
-            <a:off x="6740500" y="3803904"/>
-            <a:ext cx="4683100" cy="722376"/>
+            <a:off x="6722212" y="3438144"/>
+            <a:ext cx="4710532" cy="603504"/>
           </a:xfrm>
           <a:prstGeom prst="rect">
             <a:avLst/>
@@ -5278,7 +5278,7 @@
                 <a:ea typeface="Pretendard" pitchFamily="34" charset="-122"/>
                 <a:cs typeface="Pretendard" pitchFamily="34" charset="-120"/>
               </a:rPr>
-              <a:t>크리딜   |   </a:t>
+              <a:t>크리딜</a:t>
             </a:r>
             <a:endParaRPr lang="en-US" sz="800" dirty="0"/>
           </a:p>
@@ -5706,7 +5706,7 @@
                 <a:ea typeface="Pretendard" pitchFamily="34" charset="-122"/>
                 <a:cs typeface="Pretendard" pitchFamily="34" charset="-120"/>
               </a:rPr>
-              <a:t>크리딜   |   </a:t>
+              <a:t>크리딜</a:t>
             </a:r>
             <a:endParaRPr lang="en-US" sz="800" dirty="0"/>
           </a:p>
@@ -7209,7 +7209,7 @@
                 <a:ea typeface="Pretendard" pitchFamily="34" charset="-122"/>
                 <a:cs typeface="Pretendard" pitchFamily="34" charset="-120"/>
               </a:rPr>
-              <a:t>크리딜   |   </a:t>
+              <a:t>크리딜</a:t>
             </a:r>
             <a:endParaRPr lang="en-US" sz="800" dirty="0"/>
           </a:p>
@@ -7575,10 +7575,13 @@
           <a:lstStyle/>
           <a:p>
             <a:pPr indent="0" marL="0">
-              <a:buNone/>
-            </a:pPr>
-            <a:r>
-              <a:rPr lang="en-US" sz="1700" b="1" dirty="0">
+              <a:lnSpc>
+                <a:spcPct val="100000"/>
+              </a:lnSpc>
+              <a:buNone/>
+            </a:pPr>
+            <a:r>
+              <a:rPr lang="en-US" sz="2200" b="1" dirty="0">
                 <a:solidFill>
                   <a:srgbClr val="10161F"/>
                 </a:solidFill>
@@ -7588,7 +7591,7 @@
               </a:rPr>
               <a:t>-</a:t>
             </a:r>
-            <a:endParaRPr lang="en-US" sz="1700" dirty="0"/>
+            <a:endParaRPr lang="en-US" sz="2200" dirty="0"/>
           </a:p>
         </p:txBody>
       </p:sp>
@@ -7682,10 +7685,13 @@
           <a:lstStyle/>
           <a:p>
             <a:pPr indent="0" marL="0">
-              <a:buNone/>
-            </a:pPr>
-            <a:r>
-              <a:rPr lang="en-US" sz="1700" b="1" dirty="0">
+              <a:lnSpc>
+                <a:spcPct val="100000"/>
+              </a:lnSpc>
+              <a:buNone/>
+            </a:pPr>
+            <a:r>
+              <a:rPr lang="en-US" sz="2200" b="1" dirty="0">
                 <a:solidFill>
                   <a:srgbClr val="10161F"/>
                 </a:solidFill>
@@ -7695,7 +7701,7 @@
               </a:rPr>
               <a:t>142.5평</a:t>
             </a:r>
-            <a:endParaRPr lang="en-US" sz="1700" dirty="0"/>
+            <a:endParaRPr lang="en-US" sz="2200" dirty="0"/>
           </a:p>
         </p:txBody>
       </p:sp>
@@ -7789,10 +7795,13 @@
           <a:lstStyle/>
           <a:p>
             <a:pPr indent="0" marL="0">
-              <a:buNone/>
-            </a:pPr>
-            <a:r>
-              <a:rPr lang="en-US" sz="1700" b="1" dirty="0">
+              <a:lnSpc>
+                <a:spcPct val="100000"/>
+              </a:lnSpc>
+              <a:buNone/>
+            </a:pPr>
+            <a:r>
+              <a:rPr lang="en-US" sz="2200" b="1" dirty="0">
                 <a:solidFill>
                   <a:srgbClr val="10161F"/>
                 </a:solidFill>
@@ -7802,7 +7811,7 @@
               </a:rPr>
               <a:t>620.8평</a:t>
             </a:r>
-            <a:endParaRPr lang="en-US" sz="1700" dirty="0"/>
+            <a:endParaRPr lang="en-US" sz="2200" dirty="0"/>
           </a:p>
         </p:txBody>
       </p:sp>
@@ -7896,10 +7905,13 @@
           <a:lstStyle/>
           <a:p>
             <a:pPr indent="0" marL="0">
-              <a:buNone/>
-            </a:pPr>
-            <a:r>
-              <a:rPr lang="en-US" sz="1700" b="1" dirty="0">
+              <a:lnSpc>
+                <a:spcPct val="100000"/>
+              </a:lnSpc>
+              <a:buNone/>
+            </a:pPr>
+            <a:r>
+              <a:rPr lang="en-US" sz="2200" b="1" dirty="0">
                 <a:solidFill>
                   <a:srgbClr val="10161F"/>
                 </a:solidFill>
@@ -7909,7 +7921,7 @@
               </a:rPr>
               <a:t>2017년</a:t>
             </a:r>
-            <a:endParaRPr lang="en-US" sz="1700" dirty="0"/>
+            <a:endParaRPr lang="en-US" sz="2200" dirty="0"/>
           </a:p>
         </p:txBody>
       </p:sp>
@@ -7965,7 +7977,7 @@
               <a:buNone/>
             </a:pPr>
             <a:r>
-              <a:rPr lang="en-US" sz="950" dirty="0">
+              <a:rPr lang="en-US" sz="850" dirty="0">
                 <a:solidFill>
                   <a:srgbClr val="718096"/>
                 </a:solidFill>
@@ -7975,7 +7987,7 @@
               </a:rPr>
               <a:t>서초 메디컬 빌딩은 지하2</a:t>
             </a:r>
-            <a:endParaRPr lang="en-US" sz="950" dirty="0"/>
+            <a:endParaRPr lang="en-US" sz="850" dirty="0"/>
           </a:p>
         </p:txBody>
       </p:sp>
@@ -8003,10 +8015,13 @@
           <a:lstStyle/>
           <a:p>
             <a:pPr indent="0" marL="0">
-              <a:buNone/>
-            </a:pPr>
-            <a:r>
-              <a:rPr lang="en-US" sz="1700" b="1" dirty="0">
+              <a:lnSpc>
+                <a:spcPct val="100000"/>
+              </a:lnSpc>
+              <a:buNone/>
+            </a:pPr>
+            <a:r>
+              <a:rPr lang="en-US" sz="2200" b="1" dirty="0">
                 <a:solidFill>
                   <a:srgbClr val="10161F"/>
                 </a:solidFill>
@@ -8016,7 +8031,7 @@
               </a:rPr>
               <a:t>2층</a:t>
             </a:r>
-            <a:endParaRPr lang="en-US" sz="1700" dirty="0"/>
+            <a:endParaRPr lang="en-US" sz="2200" dirty="0"/>
           </a:p>
         </p:txBody>
       </p:sp>
@@ -8072,7 +8087,7 @@
               <a:buNone/>
             </a:pPr>
             <a:r>
-              <a:rPr lang="en-US" sz="950" dirty="0">
+              <a:rPr lang="en-US" sz="850" dirty="0">
                 <a:solidFill>
                   <a:srgbClr val="718096"/>
                 </a:solidFill>
@@ -8082,7 +8097,7 @@
               </a:rPr>
               <a:t>연 수익률(Cap Rate)</a:t>
             </a:r>
-            <a:endParaRPr lang="en-US" sz="950" dirty="0"/>
+            <a:endParaRPr lang="en-US" sz="850" dirty="0"/>
           </a:p>
         </p:txBody>
       </p:sp>
@@ -8110,10 +8125,13 @@
           <a:lstStyle/>
           <a:p>
             <a:pPr indent="0" marL="0">
-              <a:buNone/>
-            </a:pPr>
-            <a:r>
-              <a:rPr lang="en-US" sz="1700" b="1" dirty="0">
+              <a:lnSpc>
+                <a:spcPct val="100000"/>
+              </a:lnSpc>
+              <a:buNone/>
+            </a:pPr>
+            <a:r>
+              <a:rPr lang="en-US" sz="2200" b="1" dirty="0">
                 <a:solidFill>
                   <a:srgbClr val="10161F"/>
                 </a:solidFill>
@@ -8123,7 +8141,7 @@
               </a:rPr>
               <a:t>-</a:t>
             </a:r>
-            <a:endParaRPr lang="en-US" sz="1700" dirty="0"/>
+            <a:endParaRPr lang="en-US" sz="2200" dirty="0"/>
           </a:p>
         </p:txBody>
       </p:sp>
@@ -8217,10 +8235,13 @@
           <a:lstStyle/>
           <a:p>
             <a:pPr indent="0" marL="0">
-              <a:buNone/>
-            </a:pPr>
-            <a:r>
-              <a:rPr lang="en-US" sz="1700" b="1" dirty="0">
+              <a:lnSpc>
+                <a:spcPct val="100000"/>
+              </a:lnSpc>
+              <a:buNone/>
+            </a:pPr>
+            <a:r>
+              <a:rPr lang="en-US" sz="2200" b="1" dirty="0">
                 <a:solidFill>
                   <a:srgbClr val="10161F"/>
                 </a:solidFill>
@@ -8230,7 +8251,7 @@
               </a:rPr>
               <a:t>-</a:t>
             </a:r>
-            <a:endParaRPr lang="en-US" sz="1700" dirty="0"/>
+            <a:endParaRPr lang="en-US" sz="2200" dirty="0"/>
           </a:p>
         </p:txBody>
       </p:sp>
@@ -8324,10 +8345,13 @@
           <a:lstStyle/>
           <a:p>
             <a:pPr indent="0" marL="0">
-              <a:buNone/>
-            </a:pPr>
-            <a:r>
-              <a:rPr lang="en-US" sz="1700" b="1" dirty="0">
+              <a:lnSpc>
+                <a:spcPct val="100000"/>
+              </a:lnSpc>
+              <a:buNone/>
+            </a:pPr>
+            <a:r>
+              <a:rPr lang="en-US" sz="2200" b="1" dirty="0">
                 <a:solidFill>
                   <a:srgbClr val="10161F"/>
                 </a:solidFill>
@@ -8337,7 +8361,7 @@
               </a:rPr>
               <a:t>확인 중</a:t>
             </a:r>
-            <a:endParaRPr lang="en-US" sz="1700" dirty="0"/>
+            <a:endParaRPr lang="en-US" sz="2200" dirty="0"/>
           </a:p>
         </p:txBody>
       </p:sp>
@@ -8809,7 +8833,7 @@
                 <a:ea typeface="Pretendard" pitchFamily="34" charset="-122"/>
                 <a:cs typeface="Pretendard" pitchFamily="34" charset="-120"/>
               </a:rPr>
-              <a:t>크리딜   |   </a:t>
+              <a:t>크리딜</a:t>
             </a:r>
             <a:endParaRPr lang="en-US" sz="800" dirty="0"/>
           </a:p>
@@ -9056,7 +9080,7 @@
         <p:spPr>
           <a:xfrm>
             <a:off x="5989320" y="1481328"/>
-            <a:ext cx="1560003" cy="493776"/>
+            <a:ext cx="1560003" cy="457200"/>
           </a:xfrm>
           <a:prstGeom prst="rect">
             <a:avLst/>
@@ -9075,7 +9099,7 @@
               <a:buNone/>
             </a:pPr>
             <a:r>
-              <a:rPr lang="en-US" sz="1300" dirty="0">
+              <a:rPr lang="en-US" sz="1250" dirty="0">
                 <a:solidFill>
                   <a:srgbClr val="718096"/>
                 </a:solidFill>
@@ -9085,7 +9109,7 @@
               </a:rPr>
               <a:t>대중교통</a:t>
             </a:r>
-            <a:endParaRPr lang="en-US" sz="1300" dirty="0"/>
+            <a:endParaRPr lang="en-US" sz="1250" dirty="0"/>
           </a:p>
         </p:txBody>
       </p:sp>
@@ -9098,7 +9122,7 @@
         <p:spPr>
           <a:xfrm>
             <a:off x="7549323" y="1481328"/>
-            <a:ext cx="4011436" cy="493776"/>
+            <a:ext cx="4011436" cy="457200"/>
           </a:xfrm>
           <a:prstGeom prst="rect">
             <a:avLst/>
@@ -9117,7 +9141,7 @@
               <a:buNone/>
             </a:pPr>
             <a:r>
-              <a:rPr lang="en-US" sz="1300" b="1" dirty="0">
+              <a:rPr lang="en-US" sz="1250" b="1" dirty="0">
                 <a:solidFill>
                   <a:srgbClr val="10161F"/>
                 </a:solidFill>
@@ -9125,9 +9149,9 @@
                 <a:ea typeface="Pretendard" pitchFamily="34" charset="-122"/>
                 <a:cs typeface="Pretendard" pitchFamily="34" charset="-120"/>
               </a:rPr>
-              <a:t>인접 지하철역 역세권 (상세 확인 필요)</a:t>
-            </a:r>
-            <a:endParaRPr lang="en-US" sz="1300" dirty="0"/>
+              <a:t>지하철 및 간선버스 인접</a:t>
+            </a:r>
+            <a:endParaRPr lang="en-US" sz="1250" dirty="0"/>
           </a:p>
         </p:txBody>
       </p:sp>
@@ -9139,7 +9163,7 @@
         </p:nvSpPr>
         <p:spPr>
           <a:xfrm>
-            <a:off x="5989320" y="1975104"/>
+            <a:off x="5989320" y="1938528"/>
             <a:ext cx="5571439" cy="0"/>
           </a:xfrm>
           <a:prstGeom prst="line">
@@ -9162,8 +9186,8 @@
         </p:nvSpPr>
         <p:spPr>
           <a:xfrm>
-            <a:off x="5989320" y="1975104"/>
-            <a:ext cx="1560003" cy="493776"/>
+            <a:off x="5989320" y="1938528"/>
+            <a:ext cx="1560003" cy="457200"/>
           </a:xfrm>
           <a:prstGeom prst="rect">
             <a:avLst/>
@@ -9182,7 +9206,7 @@
               <a:buNone/>
             </a:pPr>
             <a:r>
-              <a:rPr lang="en-US" sz="1300" dirty="0">
+              <a:rPr lang="en-US" sz="1250" dirty="0">
                 <a:solidFill>
                   <a:srgbClr val="718096"/>
                 </a:solidFill>
@@ -9192,7 +9216,7 @@
               </a:rPr>
               <a:t>상권권역</a:t>
             </a:r>
-            <a:endParaRPr lang="en-US" sz="1300" dirty="0"/>
+            <a:endParaRPr lang="en-US" sz="1250" dirty="0"/>
           </a:p>
         </p:txBody>
       </p:sp>
@@ -9204,8 +9228,8 @@
         </p:nvSpPr>
         <p:spPr>
           <a:xfrm>
-            <a:off x="7549323" y="1975104"/>
-            <a:ext cx="4011436" cy="493776"/>
+            <a:off x="7549323" y="1938528"/>
+            <a:ext cx="4011436" cy="457200"/>
           </a:xfrm>
           <a:prstGeom prst="rect">
             <a:avLst/>
@@ -9224,7 +9248,7 @@
               <a:buNone/>
             </a:pPr>
             <a:r>
-              <a:rPr lang="en-US" sz="1300" b="1" dirty="0">
+              <a:rPr lang="en-US" sz="1250" b="1" dirty="0">
                 <a:solidFill>
                   <a:srgbClr val="10161F"/>
                 </a:solidFill>
@@ -9234,7 +9258,7 @@
               </a:rPr>
               <a:t>서초권역 주요 상업·업무 권역</a:t>
             </a:r>
-            <a:endParaRPr lang="en-US" sz="1300" dirty="0"/>
+            <a:endParaRPr lang="en-US" sz="1250" dirty="0"/>
           </a:p>
         </p:txBody>
       </p:sp>
@@ -9246,7 +9270,7 @@
         </p:nvSpPr>
         <p:spPr>
           <a:xfrm>
-            <a:off x="5989320" y="2606040"/>
+            <a:off x="5989320" y="2505456"/>
             <a:ext cx="5571439" cy="658368"/>
           </a:xfrm>
           <a:prstGeom prst="roundRect">
@@ -9268,7 +9292,7 @@
         </p:nvSpPr>
         <p:spPr>
           <a:xfrm>
-            <a:off x="5989320" y="2660904"/>
+            <a:off x="5989320" y="2560320"/>
             <a:ext cx="36576" cy="548640"/>
           </a:xfrm>
           <a:prstGeom prst="rect">
@@ -9288,7 +9312,7 @@
         </p:nvSpPr>
         <p:spPr>
           <a:xfrm>
-            <a:off x="6135624" y="2697480"/>
+            <a:off x="6135624" y="2596896"/>
             <a:ext cx="5315407" cy="201168"/>
           </a:xfrm>
           <a:prstGeom prst="rect">
@@ -9327,7 +9351,7 @@
         </p:nvSpPr>
         <p:spPr>
           <a:xfrm>
-            <a:off x="6135624" y="2898648"/>
+            <a:off x="6135624" y="2798064"/>
             <a:ext cx="5315407" cy="329184"/>
           </a:xfrm>
           <a:prstGeom prst="rect">
@@ -9395,7 +9419,7 @@
                 <a:ea typeface="Pretendard" pitchFamily="34" charset="-122"/>
                 <a:cs typeface="Pretendard" pitchFamily="34" charset="-120"/>
               </a:rPr>
-              <a:t>크리딜   |   </a:t>
+              <a:t>크리딜</a:t>
             </a:r>
             <a:endParaRPr lang="en-US" sz="800" dirty="0"/>
           </a:p>
@@ -9657,7 +9681,7 @@
         <p:spPr>
           <a:xfrm>
             <a:off x="502920" y="1645920"/>
-            <a:ext cx="1920240" cy="420624"/>
+            <a:ext cx="1920240" cy="402336"/>
           </a:xfrm>
           <a:prstGeom prst="rect">
             <a:avLst/>
@@ -9699,7 +9723,7 @@
         <p:spPr>
           <a:xfrm>
             <a:off x="2423160" y="1645920"/>
-            <a:ext cx="4937760" cy="420624"/>
+            <a:ext cx="4937760" cy="402336"/>
           </a:xfrm>
           <a:prstGeom prst="rect">
             <a:avLst/>
@@ -9740,7 +9764,7 @@
         </p:nvSpPr>
         <p:spPr>
           <a:xfrm>
-            <a:off x="502920" y="2066544"/>
+            <a:off x="502920" y="2048256"/>
             <a:ext cx="6858000" cy="0"/>
           </a:xfrm>
           <a:prstGeom prst="line">
@@ -9763,8 +9787,8 @@
         </p:nvSpPr>
         <p:spPr>
           <a:xfrm>
-            <a:off x="502920" y="2066544"/>
-            <a:ext cx="1920240" cy="420624"/>
+            <a:off x="502920" y="2048256"/>
+            <a:ext cx="1920240" cy="402336"/>
           </a:xfrm>
           <a:prstGeom prst="rect">
             <a:avLst/>
@@ -9805,8 +9829,8 @@
         </p:nvSpPr>
         <p:spPr>
           <a:xfrm>
-            <a:off x="2423160" y="2066544"/>
-            <a:ext cx="4937760" cy="420624"/>
+            <a:off x="2423160" y="2048256"/>
+            <a:ext cx="4937760" cy="402336"/>
           </a:xfrm>
           <a:prstGeom prst="rect">
             <a:avLst/>
@@ -9937,7 +9961,7 @@
                 <a:ea typeface="Pretendard" pitchFamily="34" charset="-122"/>
                 <a:cs typeface="Pretendard" pitchFamily="34" charset="-120"/>
               </a:rPr>
-              <a:t>토지 및 건축 규제 포인트</a:t>
+              <a:t>토지 및 건축 규제</a:t>
             </a:r>
             <a:endParaRPr lang="en-US" sz="1050" dirty="0"/>
           </a:p>
@@ -9980,7 +10004,131 @@
                 <a:ea typeface="Pretendard" pitchFamily="34" charset="-122"/>
                 <a:cs typeface="Pretendard" pitchFamily="34" charset="-120"/>
               </a:rPr>
-              <a:t>용도지역·용도지구 기준 건폐율/용적률 상한 확인</a:t>
+              <a:t>토지이용계획 열람 및 건축 규제 확인 필요</a:t>
+            </a:r>
+            <a:endParaRPr lang="en-US" sz="980" dirty="0"/>
+          </a:p>
+        </p:txBody>
+      </p:sp>
+      <p:sp>
+        <p:nvSpPr>
+          <p:cNvPr id="17" name="Shape 15"/>
+          <p:cNvSpPr/>
+          <p:nvPr/>
+        </p:nvSpPr>
+        <p:spPr>
+          <a:xfrm>
+            <a:off x="7720279" y="3977640"/>
+            <a:ext cx="3840480" cy="2148840"/>
+          </a:xfrm>
+          <a:prstGeom prst="roundRect">
+            <a:avLst>
+              <a:gd name="adj" fmla="val 2553"/>
+            </a:avLst>
+          </a:prstGeom>
+          <a:solidFill>
+            <a:srgbClr val="BEE3F8"/>
+          </a:solidFill>
+          <a:ln/>
+        </p:spPr>
+      </p:sp>
+      <p:sp>
+        <p:nvSpPr>
+          <p:cNvPr id="18" name="Shape 16"/>
+          <p:cNvSpPr/>
+          <p:nvPr/>
+        </p:nvSpPr>
+        <p:spPr>
+          <a:xfrm>
+            <a:off x="7720279" y="4032504"/>
+            <a:ext cx="36576" cy="2039112"/>
+          </a:xfrm>
+          <a:prstGeom prst="rect">
+            <a:avLst/>
+          </a:prstGeom>
+          <a:solidFill>
+            <a:srgbClr val="2B6CB0"/>
+          </a:solidFill>
+          <a:ln/>
+        </p:spPr>
+      </p:sp>
+      <p:sp>
+        <p:nvSpPr>
+          <p:cNvPr id="19" name="Text 17"/>
+          <p:cNvSpPr/>
+          <p:nvPr/>
+        </p:nvSpPr>
+        <p:spPr>
+          <a:xfrm>
+            <a:off x="7866583" y="4069080"/>
+            <a:ext cx="3584448" cy="201168"/>
+          </a:xfrm>
+          <a:prstGeom prst="rect">
+            <a:avLst/>
+          </a:prstGeom>
+          <a:noFill/>
+          <a:ln/>
+        </p:spPr>
+        <p:txBody>
+          <a:bodyPr wrap="square" lIns="0" tIns="0" rIns="0" bIns="0" rtlCol="0" anchor="ctr"/>
+          <a:lstStyle/>
+          <a:p>
+            <a:pPr indent="0" marL="0">
+              <a:buNone/>
+            </a:pPr>
+            <a:r>
+              <a:rPr lang="en-US" sz="1050" b="1" dirty="0">
+                <a:solidFill>
+                  <a:srgbClr val="2B6CB0"/>
+                </a:solidFill>
+                <a:latin typeface="Pretendard" pitchFamily="34" charset="0"/>
+                <a:ea typeface="Pretendard" pitchFamily="34" charset="-122"/>
+                <a:cs typeface="Pretendard" pitchFamily="34" charset="-120"/>
+              </a:rPr>
+              <a:t>권리관계 및 공적장부</a:t>
+            </a:r>
+            <a:endParaRPr lang="en-US" sz="1050" dirty="0"/>
+          </a:p>
+        </p:txBody>
+      </p:sp>
+      <p:sp>
+        <p:nvSpPr>
+          <p:cNvPr id="20" name="Text 18"/>
+          <p:cNvSpPr/>
+          <p:nvPr/>
+        </p:nvSpPr>
+        <p:spPr>
+          <a:xfrm>
+            <a:off x="7866583" y="4270248"/>
+            <a:ext cx="3584448" cy="1819656"/>
+          </a:xfrm>
+          <a:prstGeom prst="rect">
+            <a:avLst/>
+          </a:prstGeom>
+          <a:noFill/>
+          <a:ln/>
+        </p:spPr>
+        <p:txBody>
+          <a:bodyPr wrap="square" lIns="0" tIns="0" rIns="0" bIns="0" rtlCol="0" anchor="t"/>
+          <a:lstStyle/>
+          <a:p>
+            <a:pPr marL="342900" indent="-342900">
+              <a:lnSpc>
+                <a:spcPct val="108000"/>
+              </a:lnSpc>
+              <a:buSzPct val="100000"/>
+              <a:buChar char="•"/>
+            </a:pPr>
+            <a:r>
+              <a:rPr lang="en-US" sz="980" dirty="0">
+                <a:solidFill>
+                  <a:srgbClr val="10161F"/>
+                </a:solidFill>
+                <a:latin typeface="Pretendard" pitchFamily="34" charset="0"/>
+                <a:ea typeface="Pretendard" pitchFamily="34" charset="-122"/>
+                <a:cs typeface="Pretendard" pitchFamily="34" charset="-120"/>
+              </a:rPr>
+              <a:t>등기부등본 갑구 소유권 확인</a:t>
             </a:r>
             <a:endParaRPr lang="en-US" sz="980" dirty="0"/>
           </a:p>
@@ -10004,7 +10152,7 @@
                 <a:ea typeface="Pretendard" pitchFamily="34" charset="-122"/>
                 <a:cs typeface="Pretendard" pitchFamily="34" charset="-120"/>
               </a:rPr>
-              <a:t>필지 형상 및 접도 조건에 따른 건축 가능 면적 검토</a:t>
+              <a:t>건축물대장 기재 사항 실물 대조</a:t>
             </a:r>
             <a:endParaRPr lang="en-US" sz="980" dirty="0"/>
           </a:p>
@@ -10028,7 +10176,7 @@
                 <a:ea typeface="Pretendard" pitchFamily="34" charset="-122"/>
                 <a:cs typeface="Pretendard" pitchFamily="34" charset="-120"/>
               </a:rPr>
-              <a:t>토지이용계획 열람 및 개발행위허가 제한 여부 확인</a:t>
+              <a:t>개별공시지가 및 실거래가 비교</a:t>
             </a:r>
             <a:endParaRPr lang="en-US" sz="980" dirty="0"/>
           </a:p>
@@ -10036,56 +10184,14 @@
       </p:sp>
       <p:sp>
         <p:nvSpPr>
-          <p:cNvPr id="17" name="Shape 15"/>
-          <p:cNvSpPr/>
-          <p:nvPr/>
-        </p:nvSpPr>
-        <p:spPr>
-          <a:xfrm>
-            <a:off x="7720279" y="3977640"/>
-            <a:ext cx="3840480" cy="2148840"/>
-          </a:xfrm>
-          <a:prstGeom prst="roundRect">
-            <a:avLst>
-              <a:gd name="adj" fmla="val 2553"/>
-            </a:avLst>
-          </a:prstGeom>
-          <a:solidFill>
-            <a:srgbClr val="BEE3F8"/>
-          </a:solidFill>
-          <a:ln/>
-        </p:spPr>
-      </p:sp>
-      <p:sp>
-        <p:nvSpPr>
-          <p:cNvPr id="18" name="Shape 16"/>
-          <p:cNvSpPr/>
-          <p:nvPr/>
-        </p:nvSpPr>
-        <p:spPr>
-          <a:xfrm>
-            <a:off x="7720279" y="4032504"/>
-            <a:ext cx="36576" cy="2039112"/>
-          </a:xfrm>
-          <a:prstGeom prst="rect">
-            <a:avLst/>
-          </a:prstGeom>
-          <a:solidFill>
-            <a:srgbClr val="2B6CB0"/>
-          </a:solidFill>
-          <a:ln/>
-        </p:spPr>
-      </p:sp>
-      <p:sp>
-        <p:nvSpPr>
-          <p:cNvPr id="19" name="Text 17"/>
-          <p:cNvSpPr/>
-          <p:nvPr/>
-        </p:nvSpPr>
-        <p:spPr>
-          <a:xfrm>
-            <a:off x="7866583" y="4069080"/>
-            <a:ext cx="3584448" cy="201168"/>
+          <p:cNvPr id="21" name="Text 19"/>
+          <p:cNvSpPr/>
+          <p:nvPr/>
+        </p:nvSpPr>
+        <p:spPr>
+          <a:xfrm>
+            <a:off x="502920" y="6382512"/>
+            <a:ext cx="7315200" cy="219456"/>
           </a:xfrm>
           <a:prstGeom prst="rect">
             <a:avLst/>
@@ -10101,145 +10207,15 @@
               <a:buNone/>
             </a:pPr>
             <a:r>
-              <a:rPr lang="en-US" sz="1050" b="1" dirty="0">
-                <a:solidFill>
-                  <a:srgbClr val="2B6CB0"/>
+              <a:rPr lang="en-US" sz="800" dirty="0">
+                <a:solidFill>
+                  <a:srgbClr val="718096"/>
                 </a:solidFill>
                 <a:latin typeface="Pretendard" pitchFamily="34" charset="0"/>
                 <a:ea typeface="Pretendard" pitchFamily="34" charset="-122"/>
                 <a:cs typeface="Pretendard" pitchFamily="34" charset="-120"/>
               </a:rPr>
-              <a:t>권리관계 및 공적장부</a:t>
-            </a:r>
-            <a:endParaRPr lang="en-US" sz="1050" dirty="0"/>
-          </a:p>
-        </p:txBody>
-      </p:sp>
-      <p:sp>
-        <p:nvSpPr>
-          <p:cNvPr id="20" name="Text 18"/>
-          <p:cNvSpPr/>
-          <p:nvPr/>
-        </p:nvSpPr>
-        <p:spPr>
-          <a:xfrm>
-            <a:off x="7866583" y="4270248"/>
-            <a:ext cx="3584448" cy="1819656"/>
-          </a:xfrm>
-          <a:prstGeom prst="rect">
-            <a:avLst/>
-          </a:prstGeom>
-          <a:noFill/>
-          <a:ln/>
-        </p:spPr>
-        <p:txBody>
-          <a:bodyPr wrap="square" lIns="0" tIns="0" rIns="0" bIns="0" rtlCol="0" anchor="t"/>
-          <a:lstStyle/>
-          <a:p>
-            <a:pPr marL="342900" indent="-342900">
-              <a:lnSpc>
-                <a:spcPct val="108000"/>
-              </a:lnSpc>
-              <a:buSzPct val="100000"/>
-              <a:buChar char="•"/>
-            </a:pPr>
-            <a:r>
-              <a:rPr lang="en-US" sz="980" dirty="0">
-                <a:solidFill>
-                  <a:srgbClr val="10161F"/>
-                </a:solidFill>
-                <a:latin typeface="Pretendard" pitchFamily="34" charset="0"/>
-                <a:ea typeface="Pretendard" pitchFamily="34" charset="-122"/>
-                <a:cs typeface="Pretendard" pitchFamily="34" charset="-120"/>
-              </a:rPr>
-              <a:t>등기부등본 갑구 소유권 및 을구 근저당·가압류 확인</a:t>
-            </a:r>
-            <a:endParaRPr lang="en-US" sz="980" dirty="0"/>
-          </a:p>
-          <a:p>
-            <a:pPr marL="342900" indent="-342900">
-              <a:lnSpc>
-                <a:spcPct val="108000"/>
-              </a:lnSpc>
-              <a:spcBef>
-                <a:spcPts val="300"/>
-              </a:spcBef>
-              <a:buSzPct val="100000"/>
-              <a:buChar char="•"/>
-            </a:pPr>
-            <a:r>
-              <a:rPr lang="en-US" sz="980" dirty="0">
-                <a:solidFill>
-                  <a:srgbClr val="10161F"/>
-                </a:solidFill>
-                <a:latin typeface="Pretendard" pitchFamily="34" charset="0"/>
-                <a:ea typeface="Pretendard" pitchFamily="34" charset="-122"/>
-                <a:cs typeface="Pretendard" pitchFamily="34" charset="-120"/>
-              </a:rPr>
-              <a:t>건축물대장 기재 사항과 실물 현황 대조 점검</a:t>
-            </a:r>
-            <a:endParaRPr lang="en-US" sz="980" dirty="0"/>
-          </a:p>
-          <a:p>
-            <a:pPr marL="342900" indent="-342900">
-              <a:lnSpc>
-                <a:spcPct val="108000"/>
-              </a:lnSpc>
-              <a:spcBef>
-                <a:spcPts val="300"/>
-              </a:spcBef>
-              <a:buSzPct val="100000"/>
-              <a:buChar char="•"/>
-            </a:pPr>
-            <a:r>
-              <a:rPr lang="en-US" sz="980" dirty="0">
-                <a:solidFill>
-                  <a:srgbClr val="10161F"/>
-                </a:solidFill>
-                <a:latin typeface="Pretendard" pitchFamily="34" charset="0"/>
-                <a:ea typeface="Pretendard" pitchFamily="34" charset="-122"/>
-                <a:cs typeface="Pretendard" pitchFamily="34" charset="-120"/>
-              </a:rPr>
-              <a:t>개별공시지가 및 실거래가 비교 분석</a:t>
-            </a:r>
-            <a:endParaRPr lang="en-US" sz="980" dirty="0"/>
-          </a:p>
-        </p:txBody>
-      </p:sp>
-      <p:sp>
-        <p:nvSpPr>
-          <p:cNvPr id="21" name="Text 19"/>
-          <p:cNvSpPr/>
-          <p:nvPr/>
-        </p:nvSpPr>
-        <p:spPr>
-          <a:xfrm>
-            <a:off x="502920" y="6382512"/>
-            <a:ext cx="7315200" cy="219456"/>
-          </a:xfrm>
-          <a:prstGeom prst="rect">
-            <a:avLst/>
-          </a:prstGeom>
-          <a:noFill/>
-          <a:ln/>
-        </p:spPr>
-        <p:txBody>
-          <a:bodyPr wrap="square" lIns="0" tIns="0" rIns="0" bIns="0" rtlCol="0" anchor="ctr"/>
-          <a:lstStyle/>
-          <a:p>
-            <a:pPr indent="0" marL="0">
-              <a:buNone/>
-            </a:pPr>
-            <a:r>
-              <a:rPr lang="en-US" sz="800" dirty="0">
-                <a:solidFill>
-                  <a:srgbClr val="718096"/>
-                </a:solidFill>
-                <a:latin typeface="Pretendard" pitchFamily="34" charset="0"/>
-                <a:ea typeface="Pretendard" pitchFamily="34" charset="-122"/>
-                <a:cs typeface="Pretendard" pitchFamily="34" charset="-120"/>
-              </a:rPr>
-              <a:t>크리딜   |   </a:t>
+              <a:t>크리딜</a:t>
             </a:r>
             <a:endParaRPr lang="en-US" sz="800" dirty="0"/>
           </a:p>
@@ -10501,7 +10477,7 @@
         <p:spPr>
           <a:xfrm>
             <a:off x="502920" y="1645920"/>
-            <a:ext cx="1920240" cy="420624"/>
+            <a:ext cx="1920240" cy="402336"/>
           </a:xfrm>
           <a:prstGeom prst="rect">
             <a:avLst/>
@@ -10543,7 +10519,7 @@
         <p:spPr>
           <a:xfrm>
             <a:off x="2423160" y="1645920"/>
-            <a:ext cx="4937760" cy="420624"/>
+            <a:ext cx="4937760" cy="402336"/>
           </a:xfrm>
           <a:prstGeom prst="rect">
             <a:avLst/>
@@ -10584,7 +10560,7 @@
         </p:nvSpPr>
         <p:spPr>
           <a:xfrm>
-            <a:off x="502920" y="2066544"/>
+            <a:off x="502920" y="2048256"/>
             <a:ext cx="6858000" cy="0"/>
           </a:xfrm>
           <a:prstGeom prst="line">
@@ -10607,8 +10583,8 @@
         </p:nvSpPr>
         <p:spPr>
           <a:xfrm>
-            <a:off x="502920" y="2066544"/>
-            <a:ext cx="1920240" cy="420624"/>
+            <a:off x="502920" y="2048256"/>
+            <a:ext cx="1920240" cy="402336"/>
           </a:xfrm>
           <a:prstGeom prst="rect">
             <a:avLst/>
@@ -10649,8 +10625,8 @@
         </p:nvSpPr>
         <p:spPr>
           <a:xfrm>
-            <a:off x="2423160" y="2066544"/>
-            <a:ext cx="4937760" cy="420624"/>
+            <a:off x="2423160" y="2048256"/>
+            <a:ext cx="4937760" cy="402336"/>
           </a:xfrm>
           <a:prstGeom prst="rect">
             <a:avLst/>
@@ -10691,7 +10667,7 @@
         </p:nvSpPr>
         <p:spPr>
           <a:xfrm>
-            <a:off x="502920" y="2487168"/>
+            <a:off x="502920" y="2450592"/>
             <a:ext cx="6858000" cy="0"/>
           </a:xfrm>
           <a:prstGeom prst="line">
@@ -10714,8 +10690,8 @@
         </p:nvSpPr>
         <p:spPr>
           <a:xfrm>
-            <a:off x="502920" y="2487168"/>
-            <a:ext cx="1920240" cy="420624"/>
+            <a:off x="502920" y="2450592"/>
+            <a:ext cx="1920240" cy="402336"/>
           </a:xfrm>
           <a:prstGeom prst="rect">
             <a:avLst/>
@@ -10756,8 +10732,8 @@
         </p:nvSpPr>
         <p:spPr>
           <a:xfrm>
-            <a:off x="2423160" y="2487168"/>
-            <a:ext cx="4937760" cy="420624"/>
+            <a:off x="2423160" y="2450592"/>
+            <a:ext cx="4937760" cy="402336"/>
           </a:xfrm>
           <a:prstGeom prst="rect">
             <a:avLst/>
@@ -10958,7 +10934,7 @@
                 <a:ea typeface="Pretendard" pitchFamily="34" charset="-122"/>
                 <a:cs typeface="Pretendard" pitchFamily="34" charset="-120"/>
               </a:rPr>
-              <a:t>크리딜   |   </a:t>
+              <a:t>크리딜</a:t>
             </a:r>
             <a:endParaRPr lang="en-US" sz="800" dirty="0"/>
           </a:p>
@@ -12059,7 +12035,7 @@
                 <a:ea typeface="Pretendard" pitchFamily="34" charset="-122"/>
                 <a:cs typeface="Pretendard" pitchFamily="34" charset="-120"/>
               </a:rPr>
-              <a:t>크리딜   |   </a:t>
+              <a:t>크리딜</a:t>
             </a:r>
             <a:endParaRPr lang="en-US" sz="800" dirty="0"/>
           </a:p>
@@ -12321,7 +12297,7 @@
         <p:spPr>
           <a:xfrm>
             <a:off x="502920" y="1645920"/>
-            <a:ext cx="1920240" cy="420624"/>
+            <a:ext cx="1920240" cy="402336"/>
           </a:xfrm>
           <a:prstGeom prst="rect">
             <a:avLst/>
@@ -12363,7 +12339,7 @@
         <p:spPr>
           <a:xfrm>
             <a:off x="2423160" y="1645920"/>
-            <a:ext cx="4937760" cy="420624"/>
+            <a:ext cx="4937760" cy="402336"/>
           </a:xfrm>
           <a:prstGeom prst="rect">
             <a:avLst/>
@@ -12404,7 +12380,7 @@
         </p:nvSpPr>
         <p:spPr>
           <a:xfrm>
-            <a:off x="502920" y="2066544"/>
+            <a:off x="502920" y="2048256"/>
             <a:ext cx="6858000" cy="0"/>
           </a:xfrm>
           <a:prstGeom prst="line">
@@ -12427,8 +12403,8 @@
         </p:nvSpPr>
         <p:spPr>
           <a:xfrm>
-            <a:off x="502920" y="2066544"/>
-            <a:ext cx="1920240" cy="420624"/>
+            <a:off x="502920" y="2048256"/>
+            <a:ext cx="1920240" cy="402336"/>
           </a:xfrm>
           <a:prstGeom prst="rect">
             <a:avLst/>
@@ -12469,8 +12445,8 @@
         </p:nvSpPr>
         <p:spPr>
           <a:xfrm>
-            <a:off x="2423160" y="2066544"/>
-            <a:ext cx="4937760" cy="420624"/>
+            <a:off x="2423160" y="2048256"/>
+            <a:ext cx="4937760" cy="402336"/>
           </a:xfrm>
           <a:prstGeom prst="rect">
             <a:avLst/>
@@ -12671,7 +12647,7 @@
                 <a:ea typeface="Pretendard" pitchFamily="34" charset="-122"/>
                 <a:cs typeface="Pretendard" pitchFamily="34" charset="-120"/>
               </a:rPr>
-              <a:t>크리딜   |   </a:t>
+              <a:t>크리딜</a:t>
             </a:r>
             <a:endParaRPr lang="en-US" sz="800" dirty="0"/>
           </a:p>
@@ -13029,7 +13005,7 @@
                 <a:ea typeface="Pretendard" pitchFamily="34" charset="-122"/>
                 <a:cs typeface="Pretendard" pitchFamily="34" charset="-120"/>
               </a:rPr>
-              <a:t>165.0억 원</a:t>
+              <a:t>165억 원</a:t>
             </a:r>
             <a:endParaRPr lang="en-US" sz="1150" dirty="0"/>
           </a:p>
@@ -13457,7 +13433,7 @@
                 <a:ea typeface="Pretendard" pitchFamily="34" charset="-122"/>
                 <a:cs typeface="Pretendard" pitchFamily="34" charset="-120"/>
               </a:rPr>
-              <a:t>0.0억 원</a:t>
+              <a:t>-</a:t>
             </a:r>
             <a:endParaRPr lang="en-US" sz="1150" dirty="0"/>
           </a:p>
@@ -14295,7 +14271,7 @@
                           <a:ea typeface="Pretendard" pitchFamily="34" charset="-122"/>
                           <a:cs typeface="Pretendard" pitchFamily="34" charset="-120"/>
                         </a:rPr>
-                        <a:t>0.00%</a:t>
+                        <a:t>-</a:t>
                       </a:r>
                       <a:endParaRPr lang="en-US" sz="1100" dirty="0">
                         <a:latin typeface="Pretendard" charset="0"/>
@@ -14597,7 +14573,7 @@
                           <a:ea typeface="Pretendard" pitchFamily="34" charset="-122"/>
                           <a:cs typeface="Pretendard" pitchFamily="34" charset="-120"/>
                         </a:rPr>
-                        <a:t>0.00%</a:t>
+                        <a:t>-</a:t>
                       </a:r>
                       <a:endParaRPr lang="en-US" sz="1100" dirty="0">
                         <a:latin typeface="Pretendard" charset="0"/>
@@ -14899,7 +14875,7 @@
                           <a:ea typeface="Pretendard" pitchFamily="34" charset="-122"/>
                           <a:cs typeface="Pretendard" pitchFamily="34" charset="-120"/>
                         </a:rPr>
-                        <a:t>0.00%</a:t>
+                        <a:t>-</a:t>
                       </a:r>
                       <a:endParaRPr lang="en-US" sz="1100" dirty="0">
                         <a:latin typeface="Pretendard" charset="0"/>
@@ -15201,7 +15177,7 @@
                           <a:ea typeface="Pretendard" pitchFamily="34" charset="-122"/>
                           <a:cs typeface="Pretendard" pitchFamily="34" charset="-120"/>
                         </a:rPr>
-                        <a:t>0.00%</a:t>
+                        <a:t>-</a:t>
                       </a:r>
                       <a:endParaRPr lang="en-US" sz="1100" dirty="0">
                         <a:latin typeface="Pretendard" charset="0"/>
@@ -15413,7 +15389,7 @@
                 <a:ea typeface="Pretendard" pitchFamily="34" charset="-122"/>
                 <a:cs typeface="Pretendard" pitchFamily="34" charset="-120"/>
               </a:rPr>
-              <a:t>크리딜   |   </a:t>
+              <a:t>크리딜</a:t>
             </a:r>
             <a:endParaRPr lang="en-US" sz="800" dirty="0"/>
           </a:p>
@@ -15683,7 +15659,7 @@
                 <a:ea typeface="Pretendard" pitchFamily="34" charset="-122"/>
                 <a:cs typeface="Pretendard" pitchFamily="34" charset="-120"/>
               </a:rPr>
-              <a:t>크리딜   |   </a:t>
+              <a:t>크리딜</a:t>
             </a:r>
             <a:endParaRPr lang="en-US" sz="800" dirty="0"/>
           </a:p>

--- a/docs/test/stress/e2e-outputs/income_pro_pr02.pptx
+++ b/docs/test/stress/e2e-outputs/income_pro_pr02.pptx
@@ -4676,7 +4676,7 @@
                 <a:ea typeface="Pretendard" pitchFamily="34" charset="-122"/>
                 <a:cs typeface="Pretendard" pitchFamily="34" charset="-120"/>
               </a:rPr>
-              <a:t>임대차 원본 계약서 대조 (보증금, 월임대료, 관리비 실입금 내역 및 제소전화해조서)</a:t>
+              <a:t>임대차 원본 계약서 검토 (보증금, 월임대료, 관리비 실입금 내역 및 제소전화해조서)</a:t>
             </a:r>
             <a:endParaRPr lang="en-US" sz="950" dirty="0"/>
           </a:p>

--- a/docs/test/stress/e2e-outputs/income_pro_pr02.pptx
+++ b/docs/test/stress/e2e-outputs/income_pro_pr02.pptx
@@ -2272,7 +2272,7 @@
         </p:nvSpPr>
         <p:spPr>
           <a:xfrm>
-            <a:off x="502920" y="475488"/>
+            <a:off x="566928" y="475488"/>
             <a:ext cx="2743200" cy="365760"/>
           </a:xfrm>
           <a:prstGeom prst="rect">
@@ -2325,7 +2325,7 @@
         </p:nvSpPr>
         <p:spPr>
           <a:xfrm>
-            <a:off x="502920" y="2029968"/>
+            <a:off x="566928" y="2029968"/>
             <a:ext cx="7315200" cy="274320"/>
           </a:xfrm>
           <a:prstGeom prst="rect">
@@ -2364,8 +2364,8 @@
         </p:nvSpPr>
         <p:spPr>
           <a:xfrm>
-            <a:off x="502920" y="2304288"/>
-            <a:ext cx="7315200" cy="731520"/>
+            <a:off x="566928" y="2304288"/>
+            <a:ext cx="7315200" cy="1051560"/>
           </a:xfrm>
           <a:prstGeom prst="rect">
             <a:avLst/>
@@ -2381,7 +2381,7 @@
               <a:buNone/>
             </a:pPr>
             <a:r>
-              <a:rPr lang="en-US" sz="4000" b="1" dirty="0">
+              <a:rPr lang="en-US" sz="3000" b="1" dirty="0">
                 <a:solidFill>
                   <a:srgbClr val="FFFFFF"/>
                 </a:solidFill>
@@ -2391,7 +2391,7 @@
               </a:rPr>
               <a:t>income 포스처 테스트 문서</a:t>
             </a:r>
-            <a:endParaRPr lang="en-US" sz="4000" dirty="0"/>
+            <a:endParaRPr lang="en-US" sz="3000" dirty="0"/>
           </a:p>
         </p:txBody>
       </p:sp>
@@ -2403,7 +2403,7 @@
         </p:nvSpPr>
         <p:spPr>
           <a:xfrm>
-            <a:off x="502920" y="3090672"/>
+            <a:off x="566928" y="3410712"/>
             <a:ext cx="7315200" cy="329184"/>
           </a:xfrm>
           <a:prstGeom prst="rect">
@@ -2442,7 +2442,7 @@
         </p:nvSpPr>
         <p:spPr>
           <a:xfrm>
-            <a:off x="502920" y="3639312"/>
+            <a:off x="566928" y="3959352"/>
             <a:ext cx="1097280" cy="292608"/>
           </a:xfrm>
           <a:prstGeom prst="roundRect">
@@ -2464,7 +2464,7 @@
         </p:nvSpPr>
         <p:spPr>
           <a:xfrm>
-            <a:off x="502920" y="3639312"/>
+            <a:off x="566928" y="3959352"/>
             <a:ext cx="1097280" cy="292608"/>
           </a:xfrm>
           <a:prstGeom prst="rect">
@@ -2503,7 +2503,7 @@
         </p:nvSpPr>
         <p:spPr>
           <a:xfrm>
-            <a:off x="1691640" y="3639312"/>
+            <a:off x="1755648" y="3959352"/>
             <a:ext cx="1005840" cy="292608"/>
           </a:xfrm>
           <a:prstGeom prst="roundRect">
@@ -2525,7 +2525,7 @@
         </p:nvSpPr>
         <p:spPr>
           <a:xfrm>
-            <a:off x="1691640" y="3639312"/>
+            <a:off x="1755648" y="3959352"/>
             <a:ext cx="1005840" cy="292608"/>
           </a:xfrm>
           <a:prstGeom prst="rect">
@@ -2564,7 +2564,7 @@
         </p:nvSpPr>
         <p:spPr>
           <a:xfrm>
-            <a:off x="502920" y="4078224"/>
+            <a:off x="566928" y="4398264"/>
             <a:ext cx="6858000" cy="1051560"/>
           </a:xfrm>
           <a:prstGeom prst="roundRect">
@@ -2591,7 +2591,7 @@
         </p:nvSpPr>
         <p:spPr>
           <a:xfrm>
-            <a:off x="758952" y="4187952"/>
+            <a:off x="822960" y="4507992"/>
             <a:ext cx="6345936" cy="832104"/>
           </a:xfrm>
           <a:prstGeom prst="rect">
@@ -2630,7 +2630,7 @@
         </p:nvSpPr>
         <p:spPr>
           <a:xfrm>
-            <a:off x="502920" y="1700784"/>
+            <a:off x="566928" y="1700784"/>
             <a:ext cx="7315200" cy="256032"/>
           </a:xfrm>
           <a:prstGeom prst="rect">
@@ -2669,8 +2669,8 @@
         </p:nvSpPr>
         <p:spPr>
           <a:xfrm>
-            <a:off x="502920" y="6035040"/>
-            <a:ext cx="11057839" cy="274320"/>
+            <a:off x="566928" y="5943600"/>
+            <a:ext cx="11057839" cy="201168"/>
           </a:xfrm>
           <a:prstGeom prst="rect">
             <a:avLst/>
@@ -2708,7 +2708,7 @@
         </p:nvSpPr>
         <p:spPr>
           <a:xfrm>
-            <a:off x="502920" y="6382512"/>
+            <a:off x="566928" y="6382512"/>
             <a:ext cx="7315200" cy="219456"/>
           </a:xfrm>
           <a:prstGeom prst="rect">
@@ -2747,7 +2747,7 @@
         </p:nvSpPr>
         <p:spPr>
           <a:xfrm>
-            <a:off x="10774375" y="6382512"/>
+            <a:off x="10710367" y="6382512"/>
             <a:ext cx="914400" cy="219456"/>
           </a:xfrm>
           <a:prstGeom prst="rect">
@@ -2818,7 +2818,7 @@
         </p:nvSpPr>
         <p:spPr>
           <a:xfrm>
-            <a:off x="502920" y="457200"/>
+            <a:off x="566928" y="457200"/>
             <a:ext cx="384048" cy="384048"/>
           </a:xfrm>
           <a:prstGeom prst="ellipse">
@@ -2838,7 +2838,7 @@
         </p:nvSpPr>
         <p:spPr>
           <a:xfrm>
-            <a:off x="502920" y="457200"/>
+            <a:off x="566928" y="457200"/>
             <a:ext cx="384048" cy="384048"/>
           </a:xfrm>
           <a:prstGeom prst="rect">
@@ -2877,7 +2877,7 @@
         </p:nvSpPr>
         <p:spPr>
           <a:xfrm>
-            <a:off x="1069848" y="457200"/>
+            <a:off x="1133856" y="457200"/>
             <a:ext cx="10490911" cy="182880"/>
           </a:xfrm>
           <a:prstGeom prst="rect">
@@ -2916,7 +2916,7 @@
         </p:nvSpPr>
         <p:spPr>
           <a:xfrm>
-            <a:off x="1069848" y="640080"/>
+            <a:off x="1133856" y="640080"/>
             <a:ext cx="10490911" cy="365760"/>
           </a:xfrm>
           <a:prstGeom prst="rect">
@@ -2926,7 +2926,9 @@
           <a:ln/>
         </p:spPr>
         <p:txBody>
-          <a:bodyPr wrap="square" lIns="0" tIns="0" rIns="0" bIns="0" rtlCol="0" anchor="ctr"/>
+          <a:bodyPr wrap="square" lIns="0" tIns="0" rIns="0" bIns="0" rtlCol="0" anchor="ctr">
+            <a:normAutofit/>
+          </a:bodyPr>
           <a:lstStyle/>
           <a:p>
             <a:pPr indent="0" marL="0">
@@ -2955,7 +2957,7 @@
         </p:nvSpPr>
         <p:spPr>
           <a:xfrm>
-            <a:off x="502920" y="1325880"/>
+            <a:off x="566928" y="1325880"/>
             <a:ext cx="11057839" cy="237744"/>
           </a:xfrm>
           <a:prstGeom prst="rect">
@@ -2994,7 +2996,7 @@
         </p:nvSpPr>
         <p:spPr>
           <a:xfrm>
-            <a:off x="502920" y="1737360"/>
+            <a:off x="566928" y="1737360"/>
             <a:ext cx="11057839" cy="0"/>
           </a:xfrm>
           <a:prstGeom prst="line">
@@ -3017,7 +3019,7 @@
         </p:nvSpPr>
         <p:spPr>
           <a:xfrm>
-            <a:off x="502920" y="2057400"/>
+            <a:off x="566928" y="2057400"/>
             <a:ext cx="11057839" cy="1280160"/>
           </a:xfrm>
           <a:prstGeom prst="roundRect">
@@ -3039,7 +3041,7 @@
         </p:nvSpPr>
         <p:spPr>
           <a:xfrm>
-            <a:off x="502920" y="2112264"/>
+            <a:off x="566928" y="2112264"/>
             <a:ext cx="36576" cy="1170432"/>
           </a:xfrm>
           <a:prstGeom prst="rect">
@@ -3059,7 +3061,7 @@
         </p:nvSpPr>
         <p:spPr>
           <a:xfrm>
-            <a:off x="649224" y="2148840"/>
+            <a:off x="713232" y="2148840"/>
             <a:ext cx="10801807" cy="201168"/>
           </a:xfrm>
           <a:prstGeom prst="rect">
@@ -3098,7 +3100,7 @@
         </p:nvSpPr>
         <p:spPr>
           <a:xfrm>
-            <a:off x="649224" y="2350008"/>
+            <a:off x="713232" y="2350008"/>
             <a:ext cx="10801807" cy="950976"/>
           </a:xfrm>
           <a:prstGeom prst="rect">
@@ -3140,7 +3142,7 @@
         </p:nvSpPr>
         <p:spPr>
           <a:xfrm>
-            <a:off x="502920" y="6382512"/>
+            <a:off x="566928" y="6382512"/>
             <a:ext cx="7315200" cy="219456"/>
           </a:xfrm>
           <a:prstGeom prst="rect">
@@ -3179,7 +3181,7 @@
         </p:nvSpPr>
         <p:spPr>
           <a:xfrm>
-            <a:off x="10774375" y="6382512"/>
+            <a:off x="10710367" y="6382512"/>
             <a:ext cx="914400" cy="219456"/>
           </a:xfrm>
           <a:prstGeom prst="rect">
@@ -3250,7 +3252,7 @@
         </p:nvSpPr>
         <p:spPr>
           <a:xfrm>
-            <a:off x="502920" y="457200"/>
+            <a:off x="566928" y="457200"/>
             <a:ext cx="384048" cy="384048"/>
           </a:xfrm>
           <a:prstGeom prst="ellipse">
@@ -3270,7 +3272,7 @@
         </p:nvSpPr>
         <p:spPr>
           <a:xfrm>
-            <a:off x="502920" y="457200"/>
+            <a:off x="566928" y="457200"/>
             <a:ext cx="384048" cy="384048"/>
           </a:xfrm>
           <a:prstGeom prst="rect">
@@ -3309,7 +3311,7 @@
         </p:nvSpPr>
         <p:spPr>
           <a:xfrm>
-            <a:off x="1069848" y="457200"/>
+            <a:off x="1133856" y="457200"/>
             <a:ext cx="10490911" cy="182880"/>
           </a:xfrm>
           <a:prstGeom prst="rect">
@@ -3348,7 +3350,7 @@
         </p:nvSpPr>
         <p:spPr>
           <a:xfrm>
-            <a:off x="1069848" y="640080"/>
+            <a:off x="1133856" y="640080"/>
             <a:ext cx="10490911" cy="365760"/>
           </a:xfrm>
           <a:prstGeom prst="rect">
@@ -3358,7 +3360,9 @@
           <a:ln/>
         </p:spPr>
         <p:txBody>
-          <a:bodyPr wrap="square" lIns="0" tIns="0" rIns="0" bIns="0" rtlCol="0" anchor="ctr"/>
+          <a:bodyPr wrap="square" lIns="0" tIns="0" rIns="0" bIns="0" rtlCol="0" anchor="ctr">
+            <a:normAutofit/>
+          </a:bodyPr>
           <a:lstStyle/>
           <a:p>
             <a:pPr indent="0" marL="0">
@@ -3387,7 +3391,7 @@
         </p:nvSpPr>
         <p:spPr>
           <a:xfrm>
-            <a:off x="502920" y="4937760"/>
+            <a:off x="566928" y="4937760"/>
             <a:ext cx="11057839" cy="804672"/>
           </a:xfrm>
           <a:prstGeom prst="roundRect">
@@ -3414,7 +3418,7 @@
         </p:nvSpPr>
         <p:spPr>
           <a:xfrm>
-            <a:off x="685800" y="5047488"/>
+            <a:off x="749808" y="5047488"/>
             <a:ext cx="1691640" cy="256032"/>
           </a:xfrm>
           <a:prstGeom prst="rect">
@@ -3453,7 +3457,7 @@
         </p:nvSpPr>
         <p:spPr>
           <a:xfrm>
-            <a:off x="2423160" y="5010912"/>
+            <a:off x="2487168" y="5010912"/>
             <a:ext cx="8954719" cy="658368"/>
           </a:xfrm>
           <a:prstGeom prst="rect">
@@ -3495,7 +3499,7 @@
         </p:nvSpPr>
         <p:spPr>
           <a:xfrm>
-            <a:off x="502920" y="6382512"/>
+            <a:off x="566928" y="6382512"/>
             <a:ext cx="7315200" cy="219456"/>
           </a:xfrm>
           <a:prstGeom prst="rect">
@@ -3534,7 +3538,7 @@
         </p:nvSpPr>
         <p:spPr>
           <a:xfrm>
-            <a:off x="10774375" y="6382512"/>
+            <a:off x="10710367" y="6382512"/>
             <a:ext cx="914400" cy="219456"/>
           </a:xfrm>
           <a:prstGeom prst="rect">
@@ -3605,7 +3609,7 @@
         </p:nvSpPr>
         <p:spPr>
           <a:xfrm>
-            <a:off x="502920" y="457200"/>
+            <a:off x="566928" y="457200"/>
             <a:ext cx="384048" cy="384048"/>
           </a:xfrm>
           <a:prstGeom prst="ellipse">
@@ -3625,7 +3629,7 @@
         </p:nvSpPr>
         <p:spPr>
           <a:xfrm>
-            <a:off x="502920" y="457200"/>
+            <a:off x="566928" y="457200"/>
             <a:ext cx="384048" cy="384048"/>
           </a:xfrm>
           <a:prstGeom prst="rect">
@@ -3664,7 +3668,7 @@
         </p:nvSpPr>
         <p:spPr>
           <a:xfrm>
-            <a:off x="1069848" y="457200"/>
+            <a:off x="1133856" y="457200"/>
             <a:ext cx="10490911" cy="182880"/>
           </a:xfrm>
           <a:prstGeom prst="rect">
@@ -3703,7 +3707,7 @@
         </p:nvSpPr>
         <p:spPr>
           <a:xfrm>
-            <a:off x="1069848" y="640080"/>
+            <a:off x="1133856" y="640080"/>
             <a:ext cx="10490911" cy="365760"/>
           </a:xfrm>
           <a:prstGeom prst="rect">
@@ -3713,7 +3717,9 @@
           <a:ln/>
         </p:spPr>
         <p:txBody>
-          <a:bodyPr wrap="square" lIns="0" tIns="0" rIns="0" bIns="0" rtlCol="0" anchor="ctr"/>
+          <a:bodyPr wrap="square" lIns="0" tIns="0" rIns="0" bIns="0" rtlCol="0" anchor="ctr">
+            <a:normAutofit/>
+          </a:bodyPr>
           <a:lstStyle/>
           <a:p>
             <a:pPr indent="0" marL="0">
@@ -3742,7 +3748,7 @@
         </p:nvSpPr>
         <p:spPr>
           <a:xfrm>
-            <a:off x="502920" y="1417320"/>
+            <a:off x="566928" y="1417320"/>
             <a:ext cx="5400904" cy="3657600"/>
           </a:xfrm>
           <a:prstGeom prst="roundRect">
@@ -3769,7 +3775,7 @@
         </p:nvSpPr>
         <p:spPr>
           <a:xfrm>
-            <a:off x="502920" y="1417320"/>
+            <a:off x="566928" y="1417320"/>
             <a:ext cx="5400904" cy="45720"/>
           </a:xfrm>
           <a:prstGeom prst="rect">
@@ -3789,7 +3795,7 @@
         </p:nvSpPr>
         <p:spPr>
           <a:xfrm>
-            <a:off x="731520" y="1618488"/>
+            <a:off x="795528" y="1618488"/>
             <a:ext cx="4943704" cy="292608"/>
           </a:xfrm>
           <a:prstGeom prst="rect">
@@ -3828,7 +3834,7 @@
         </p:nvSpPr>
         <p:spPr>
           <a:xfrm>
-            <a:off x="731520" y="1947672"/>
+            <a:off x="795528" y="1947672"/>
             <a:ext cx="4943704" cy="365760"/>
           </a:xfrm>
           <a:prstGeom prst="rect">
@@ -3869,7 +3875,7 @@
         </p:nvSpPr>
         <p:spPr>
           <a:xfrm>
-            <a:off x="731520" y="2377440"/>
+            <a:off x="795528" y="2377440"/>
             <a:ext cx="4943704" cy="2606040"/>
           </a:xfrm>
           <a:prstGeom prst="rect">
@@ -3914,7 +3920,7 @@
         </p:nvSpPr>
         <p:spPr>
           <a:xfrm>
-            <a:off x="6159856" y="1417320"/>
+            <a:off x="6223864" y="1417320"/>
             <a:ext cx="5400904" cy="3657600"/>
           </a:xfrm>
           <a:prstGeom prst="roundRect">
@@ -3941,7 +3947,7 @@
         </p:nvSpPr>
         <p:spPr>
           <a:xfrm>
-            <a:off x="6159856" y="1417320"/>
+            <a:off x="6223864" y="1417320"/>
             <a:ext cx="5400904" cy="45720"/>
           </a:xfrm>
           <a:prstGeom prst="rect">
@@ -3961,7 +3967,7 @@
         </p:nvSpPr>
         <p:spPr>
           <a:xfrm>
-            <a:off x="6388456" y="1618488"/>
+            <a:off x="6452464" y="1618488"/>
             <a:ext cx="4943704" cy="292608"/>
           </a:xfrm>
           <a:prstGeom prst="rect">
@@ -4000,7 +4006,7 @@
         </p:nvSpPr>
         <p:spPr>
           <a:xfrm>
-            <a:off x="6388456" y="1947672"/>
+            <a:off x="6452464" y="1947672"/>
             <a:ext cx="4943704" cy="365760"/>
           </a:xfrm>
           <a:prstGeom prst="rect">
@@ -4041,7 +4047,7 @@
         </p:nvSpPr>
         <p:spPr>
           <a:xfrm>
-            <a:off x="6388456" y="2377440"/>
+            <a:off x="6452464" y="2377440"/>
             <a:ext cx="4943704" cy="2606040"/>
           </a:xfrm>
           <a:prstGeom prst="rect">
@@ -4086,7 +4092,7 @@
         </p:nvSpPr>
         <p:spPr>
           <a:xfrm>
-            <a:off x="502920" y="5193792"/>
+            <a:off x="566928" y="5193792"/>
             <a:ext cx="11057839" cy="621792"/>
           </a:xfrm>
           <a:prstGeom prst="roundRect">
@@ -4113,7 +4119,7 @@
         </p:nvSpPr>
         <p:spPr>
           <a:xfrm>
-            <a:off x="731520" y="5193792"/>
+            <a:off x="795528" y="5193792"/>
             <a:ext cx="10600639" cy="621792"/>
           </a:xfrm>
           <a:prstGeom prst="rect">
@@ -4152,7 +4158,7 @@
         </p:nvSpPr>
         <p:spPr>
           <a:xfrm>
-            <a:off x="502920" y="6382512"/>
+            <a:off x="566928" y="6382512"/>
             <a:ext cx="7315200" cy="219456"/>
           </a:xfrm>
           <a:prstGeom prst="rect">
@@ -4191,7 +4197,7 @@
         </p:nvSpPr>
         <p:spPr>
           <a:xfrm>
-            <a:off x="10774375" y="6382512"/>
+            <a:off x="10710367" y="6382512"/>
             <a:ext cx="914400" cy="219456"/>
           </a:xfrm>
           <a:prstGeom prst="rect">
@@ -4262,7 +4268,7 @@
         </p:nvSpPr>
         <p:spPr>
           <a:xfrm>
-            <a:off x="502920" y="457200"/>
+            <a:off x="566928" y="457200"/>
             <a:ext cx="384048" cy="384048"/>
           </a:xfrm>
           <a:prstGeom prst="ellipse">
@@ -4282,7 +4288,7 @@
         </p:nvSpPr>
         <p:spPr>
           <a:xfrm>
-            <a:off x="502920" y="457200"/>
+            <a:off x="566928" y="457200"/>
             <a:ext cx="384048" cy="384048"/>
           </a:xfrm>
           <a:prstGeom prst="rect">
@@ -4321,7 +4327,7 @@
         </p:nvSpPr>
         <p:spPr>
           <a:xfrm>
-            <a:off x="1069848" y="457200"/>
+            <a:off x="1133856" y="457200"/>
             <a:ext cx="10490911" cy="182880"/>
           </a:xfrm>
           <a:prstGeom prst="rect">
@@ -4360,7 +4366,7 @@
         </p:nvSpPr>
         <p:spPr>
           <a:xfrm>
-            <a:off x="1069848" y="640080"/>
+            <a:off x="1133856" y="640080"/>
             <a:ext cx="10490911" cy="365760"/>
           </a:xfrm>
           <a:prstGeom prst="rect">
@@ -4370,7 +4376,9 @@
           <a:ln/>
         </p:spPr>
         <p:txBody>
-          <a:bodyPr wrap="square" lIns="0" tIns="0" rIns="0" bIns="0" rtlCol="0" anchor="ctr"/>
+          <a:bodyPr wrap="square" lIns="0" tIns="0" rIns="0" bIns="0" rtlCol="0" anchor="ctr">
+            <a:normAutofit/>
+          </a:bodyPr>
           <a:lstStyle/>
           <a:p>
             <a:pPr indent="0" marL="0">
@@ -4399,7 +4407,7 @@
         </p:nvSpPr>
         <p:spPr>
           <a:xfrm>
-            <a:off x="502920" y="1371600"/>
+            <a:off x="566928" y="1371600"/>
             <a:ext cx="11057839" cy="237744"/>
           </a:xfrm>
           <a:prstGeom prst="rect">
@@ -4438,7 +4446,7 @@
         </p:nvSpPr>
         <p:spPr>
           <a:xfrm>
-            <a:off x="502920" y="1719072"/>
+            <a:off x="566928" y="1719072"/>
             <a:ext cx="5368900" cy="749808"/>
           </a:xfrm>
           <a:prstGeom prst="rect">
@@ -4463,7 +4471,7 @@
         </p:nvSpPr>
         <p:spPr>
           <a:xfrm>
-            <a:off x="640080" y="1947672"/>
+            <a:off x="704088" y="1947672"/>
             <a:ext cx="292608" cy="292608"/>
           </a:xfrm>
           <a:prstGeom prst="rect">
@@ -4483,7 +4491,7 @@
         </p:nvSpPr>
         <p:spPr>
           <a:xfrm>
-            <a:off x="640080" y="1947672"/>
+            <a:off x="704088" y="1947672"/>
             <a:ext cx="292608" cy="292608"/>
           </a:xfrm>
           <a:prstGeom prst="rect">
@@ -4522,7 +4530,7 @@
         </p:nvSpPr>
         <p:spPr>
           <a:xfrm>
-            <a:off x="1033272" y="1792224"/>
+            <a:off x="1097280" y="1792224"/>
             <a:ext cx="4710532" cy="603504"/>
           </a:xfrm>
           <a:prstGeom prst="rect">
@@ -4564,7 +4572,7 @@
         </p:nvSpPr>
         <p:spPr>
           <a:xfrm>
-            <a:off x="502920" y="2542032"/>
+            <a:off x="566928" y="2542032"/>
             <a:ext cx="5368900" cy="749808"/>
           </a:xfrm>
           <a:prstGeom prst="rect">
@@ -4589,7 +4597,7 @@
         </p:nvSpPr>
         <p:spPr>
           <a:xfrm>
-            <a:off x="640080" y="2770632"/>
+            <a:off x="704088" y="2770632"/>
             <a:ext cx="292608" cy="292608"/>
           </a:xfrm>
           <a:prstGeom prst="rect">
@@ -4609,7 +4617,7 @@
         </p:nvSpPr>
         <p:spPr>
           <a:xfrm>
-            <a:off x="640080" y="2770632"/>
+            <a:off x="704088" y="2770632"/>
             <a:ext cx="292608" cy="292608"/>
           </a:xfrm>
           <a:prstGeom prst="rect">
@@ -4648,7 +4656,7 @@
         </p:nvSpPr>
         <p:spPr>
           <a:xfrm>
-            <a:off x="1033272" y="2615184"/>
+            <a:off x="1097280" y="2615184"/>
             <a:ext cx="4710532" cy="603504"/>
           </a:xfrm>
           <a:prstGeom prst="rect">
@@ -4690,7 +4698,7 @@
         </p:nvSpPr>
         <p:spPr>
           <a:xfrm>
-            <a:off x="502920" y="3364992"/>
+            <a:off x="566928" y="3364992"/>
             <a:ext cx="5368900" cy="749808"/>
           </a:xfrm>
           <a:prstGeom prst="rect">
@@ -4715,7 +4723,7 @@
         </p:nvSpPr>
         <p:spPr>
           <a:xfrm>
-            <a:off x="640080" y="3593592"/>
+            <a:off x="704088" y="3593592"/>
             <a:ext cx="292608" cy="292608"/>
           </a:xfrm>
           <a:prstGeom prst="rect">
@@ -4735,7 +4743,7 @@
         </p:nvSpPr>
         <p:spPr>
           <a:xfrm>
-            <a:off x="640080" y="3593592"/>
+            <a:off x="704088" y="3593592"/>
             <a:ext cx="292608" cy="292608"/>
           </a:xfrm>
           <a:prstGeom prst="rect">
@@ -4774,7 +4782,7 @@
         </p:nvSpPr>
         <p:spPr>
           <a:xfrm>
-            <a:off x="1033272" y="3438144"/>
+            <a:off x="1097280" y="3438144"/>
             <a:ext cx="4710532" cy="603504"/>
           </a:xfrm>
           <a:prstGeom prst="rect">
@@ -4816,7 +4824,7 @@
         </p:nvSpPr>
         <p:spPr>
           <a:xfrm>
-            <a:off x="6191860" y="1719072"/>
+            <a:off x="6255868" y="1719072"/>
             <a:ext cx="5368900" cy="749808"/>
           </a:xfrm>
           <a:prstGeom prst="rect">
@@ -4841,7 +4849,7 @@
         </p:nvSpPr>
         <p:spPr>
           <a:xfrm>
-            <a:off x="6329020" y="1947672"/>
+            <a:off x="6393028" y="1947672"/>
             <a:ext cx="292608" cy="292608"/>
           </a:xfrm>
           <a:prstGeom prst="rect">
@@ -4861,7 +4869,7 @@
         </p:nvSpPr>
         <p:spPr>
           <a:xfrm>
-            <a:off x="6329020" y="1947672"/>
+            <a:off x="6393028" y="1947672"/>
             <a:ext cx="292608" cy="292608"/>
           </a:xfrm>
           <a:prstGeom prst="rect">
@@ -4900,7 +4908,7 @@
         </p:nvSpPr>
         <p:spPr>
           <a:xfrm>
-            <a:off x="6722212" y="1792224"/>
+            <a:off x="6786220" y="1792224"/>
             <a:ext cx="4710532" cy="603504"/>
           </a:xfrm>
           <a:prstGeom prst="rect">
@@ -4942,7 +4950,7 @@
         </p:nvSpPr>
         <p:spPr>
           <a:xfrm>
-            <a:off x="6191860" y="2542032"/>
+            <a:off x="6255868" y="2542032"/>
             <a:ext cx="5368900" cy="749808"/>
           </a:xfrm>
           <a:prstGeom prst="rect">
@@ -4967,7 +4975,7 @@
         </p:nvSpPr>
         <p:spPr>
           <a:xfrm>
-            <a:off x="6329020" y="2770632"/>
+            <a:off x="6393028" y="2770632"/>
             <a:ext cx="292608" cy="292608"/>
           </a:xfrm>
           <a:prstGeom prst="rect">
@@ -4987,7 +4995,7 @@
         </p:nvSpPr>
         <p:spPr>
           <a:xfrm>
-            <a:off x="6329020" y="2770632"/>
+            <a:off x="6393028" y="2770632"/>
             <a:ext cx="292608" cy="292608"/>
           </a:xfrm>
           <a:prstGeom prst="rect">
@@ -5026,7 +5034,7 @@
         </p:nvSpPr>
         <p:spPr>
           <a:xfrm>
-            <a:off x="6722212" y="2615184"/>
+            <a:off x="6786220" y="2615184"/>
             <a:ext cx="4710532" cy="603504"/>
           </a:xfrm>
           <a:prstGeom prst="rect">
@@ -5068,7 +5076,7 @@
         </p:nvSpPr>
         <p:spPr>
           <a:xfrm>
-            <a:off x="6191860" y="3364992"/>
+            <a:off x="6255868" y="3364992"/>
             <a:ext cx="5368900" cy="749808"/>
           </a:xfrm>
           <a:prstGeom prst="rect">
@@ -5093,7 +5101,7 @@
         </p:nvSpPr>
         <p:spPr>
           <a:xfrm>
-            <a:off x="6329020" y="3593592"/>
+            <a:off x="6393028" y="3593592"/>
             <a:ext cx="292608" cy="292608"/>
           </a:xfrm>
           <a:prstGeom prst="rect">
@@ -5113,7 +5121,7 @@
         </p:nvSpPr>
         <p:spPr>
           <a:xfrm>
-            <a:off x="6329020" y="3593592"/>
+            <a:off x="6393028" y="3593592"/>
             <a:ext cx="292608" cy="292608"/>
           </a:xfrm>
           <a:prstGeom prst="rect">
@@ -5152,7 +5160,7 @@
         </p:nvSpPr>
         <p:spPr>
           <a:xfrm>
-            <a:off x="6722212" y="3438144"/>
+            <a:off x="6786220" y="3438144"/>
             <a:ext cx="4710532" cy="603504"/>
           </a:xfrm>
           <a:prstGeom prst="rect">
@@ -5194,7 +5202,7 @@
         </p:nvSpPr>
         <p:spPr>
           <a:xfrm>
-            <a:off x="502920" y="5349240"/>
+            <a:off x="566928" y="5349240"/>
             <a:ext cx="11057839" cy="457200"/>
           </a:xfrm>
           <a:prstGeom prst="rect">
@@ -5214,7 +5222,7 @@
         </p:nvSpPr>
         <p:spPr>
           <a:xfrm>
-            <a:off x="685800" y="5422392"/>
+            <a:off x="749808" y="5422392"/>
             <a:ext cx="10692079" cy="310896"/>
           </a:xfrm>
           <a:prstGeom prst="rect">
@@ -5253,7 +5261,7 @@
         </p:nvSpPr>
         <p:spPr>
           <a:xfrm>
-            <a:off x="502920" y="6382512"/>
+            <a:off x="566928" y="6382512"/>
             <a:ext cx="7315200" cy="219456"/>
           </a:xfrm>
           <a:prstGeom prst="rect">
@@ -5292,7 +5300,7 @@
         </p:nvSpPr>
         <p:spPr>
           <a:xfrm>
-            <a:off x="10774375" y="6382512"/>
+            <a:off x="10710367" y="6382512"/>
             <a:ext cx="914400" cy="219456"/>
           </a:xfrm>
           <a:prstGeom prst="rect">
@@ -5363,7 +5371,7 @@
         </p:nvSpPr>
         <p:spPr>
           <a:xfrm>
-            <a:off x="502920" y="457200"/>
+            <a:off x="566928" y="457200"/>
             <a:ext cx="384048" cy="384048"/>
           </a:xfrm>
           <a:prstGeom prst="ellipse">
@@ -5383,7 +5391,7 @@
         </p:nvSpPr>
         <p:spPr>
           <a:xfrm>
-            <a:off x="502920" y="457200"/>
+            <a:off x="566928" y="457200"/>
             <a:ext cx="384048" cy="384048"/>
           </a:xfrm>
           <a:prstGeom prst="rect">
@@ -5422,7 +5430,7 @@
         </p:nvSpPr>
         <p:spPr>
           <a:xfrm>
-            <a:off x="1069848" y="457200"/>
+            <a:off x="1133856" y="457200"/>
             <a:ext cx="10490911" cy="182880"/>
           </a:xfrm>
           <a:prstGeom prst="rect">
@@ -5461,7 +5469,7 @@
         </p:nvSpPr>
         <p:spPr>
           <a:xfrm>
-            <a:off x="1069848" y="640080"/>
+            <a:off x="1133856" y="640080"/>
             <a:ext cx="10490911" cy="365760"/>
           </a:xfrm>
           <a:prstGeom prst="rect">
@@ -5471,7 +5479,9 @@
           <a:ln/>
         </p:spPr>
         <p:txBody>
-          <a:bodyPr wrap="square" lIns="0" tIns="0" rIns="0" bIns="0" rtlCol="0" anchor="ctr"/>
+          <a:bodyPr wrap="square" lIns="0" tIns="0" rIns="0" bIns="0" rtlCol="0" anchor="ctr">
+            <a:normAutofit/>
+          </a:bodyPr>
           <a:lstStyle/>
           <a:p>
             <a:pPr indent="0" marL="0">
@@ -5500,7 +5510,7 @@
         </p:nvSpPr>
         <p:spPr>
           <a:xfrm>
-            <a:off x="502920" y="1572768"/>
+            <a:off x="566928" y="1572768"/>
             <a:ext cx="11057839" cy="3200400"/>
           </a:xfrm>
           <a:prstGeom prst="roundRect">
@@ -5527,7 +5537,7 @@
         </p:nvSpPr>
         <p:spPr>
           <a:xfrm>
-            <a:off x="722376" y="1792224"/>
+            <a:off x="786384" y="1792224"/>
             <a:ext cx="438912" cy="438912"/>
           </a:xfrm>
           <a:prstGeom prst="ellipse">
@@ -5547,7 +5557,7 @@
         </p:nvSpPr>
         <p:spPr>
           <a:xfrm>
-            <a:off x="722376" y="1792224"/>
+            <a:off x="786384" y="1792224"/>
             <a:ext cx="438912" cy="438912"/>
           </a:xfrm>
           <a:prstGeom prst="rect">
@@ -5586,7 +5596,7 @@
         </p:nvSpPr>
         <p:spPr>
           <a:xfrm>
-            <a:off x="722376" y="2304288"/>
+            <a:off x="786384" y="2304288"/>
             <a:ext cx="10618927" cy="365760"/>
           </a:xfrm>
           <a:prstGeom prst="rect">
@@ -5625,7 +5635,7 @@
         </p:nvSpPr>
         <p:spPr>
           <a:xfrm>
-            <a:off x="722376" y="2761488"/>
+            <a:off x="786384" y="2761488"/>
             <a:ext cx="10618927" cy="1828800"/>
           </a:xfrm>
           <a:prstGeom prst="rect">
@@ -5681,7 +5691,7 @@
         </p:nvSpPr>
         <p:spPr>
           <a:xfrm>
-            <a:off x="502920" y="6382512"/>
+            <a:off x="566928" y="6382512"/>
             <a:ext cx="7315200" cy="219456"/>
           </a:xfrm>
           <a:prstGeom prst="rect">
@@ -5720,7 +5730,7 @@
         </p:nvSpPr>
         <p:spPr>
           <a:xfrm>
-            <a:off x="10774375" y="6382512"/>
+            <a:off x="10710367" y="6382512"/>
             <a:ext cx="914400" cy="219456"/>
           </a:xfrm>
           <a:prstGeom prst="rect">
@@ -5791,7 +5801,7 @@
         </p:nvSpPr>
         <p:spPr>
           <a:xfrm>
-            <a:off x="502920" y="457200"/>
+            <a:off x="566928" y="457200"/>
             <a:ext cx="384048" cy="384048"/>
           </a:xfrm>
           <a:prstGeom prst="ellipse">
@@ -5811,7 +5821,7 @@
         </p:nvSpPr>
         <p:spPr>
           <a:xfrm>
-            <a:off x="502920" y="457200"/>
+            <a:off x="566928" y="457200"/>
             <a:ext cx="384048" cy="384048"/>
           </a:xfrm>
           <a:prstGeom prst="rect">
@@ -5850,7 +5860,7 @@
         </p:nvSpPr>
         <p:spPr>
           <a:xfrm>
-            <a:off x="1069848" y="457200"/>
+            <a:off x="1133856" y="457200"/>
             <a:ext cx="10490911" cy="182880"/>
           </a:xfrm>
           <a:prstGeom prst="rect">
@@ -5889,7 +5899,7 @@
         </p:nvSpPr>
         <p:spPr>
           <a:xfrm>
-            <a:off x="1069848" y="658368"/>
+            <a:off x="1133856" y="658368"/>
             <a:ext cx="10490911" cy="420624"/>
           </a:xfrm>
           <a:prstGeom prst="rect">
@@ -5899,7 +5909,9 @@
           <a:ln/>
         </p:spPr>
         <p:txBody>
-          <a:bodyPr wrap="square" lIns="0" tIns="0" rIns="0" bIns="0" rtlCol="0" anchor="ctr"/>
+          <a:bodyPr wrap="square" lIns="0" tIns="0" rIns="0" bIns="0" rtlCol="0" anchor="ctr">
+            <a:normAutofit/>
+          </a:bodyPr>
           <a:lstStyle/>
           <a:p>
             <a:pPr indent="0" marL="0">
@@ -5928,7 +5940,7 @@
         </p:nvSpPr>
         <p:spPr>
           <a:xfrm>
-            <a:off x="502920" y="1463040"/>
+            <a:off x="566928" y="1463040"/>
             <a:ext cx="3588410" cy="658368"/>
           </a:xfrm>
           <a:prstGeom prst="roundRect">
@@ -5950,7 +5962,7 @@
         </p:nvSpPr>
         <p:spPr>
           <a:xfrm>
-            <a:off x="612648" y="1572768"/>
+            <a:off x="676656" y="1572768"/>
             <a:ext cx="438912" cy="438912"/>
           </a:xfrm>
           <a:prstGeom prst="ellipse">
@@ -5970,7 +5982,7 @@
         </p:nvSpPr>
         <p:spPr>
           <a:xfrm>
-            <a:off x="612648" y="1572768"/>
+            <a:off x="676656" y="1572768"/>
             <a:ext cx="438912" cy="438912"/>
           </a:xfrm>
           <a:prstGeom prst="rect">
@@ -6009,7 +6021,7 @@
         </p:nvSpPr>
         <p:spPr>
           <a:xfrm>
-            <a:off x="1161288" y="1554480"/>
+            <a:off x="1225296" y="1554480"/>
             <a:ext cx="2820314" cy="237744"/>
           </a:xfrm>
           <a:prstGeom prst="rect">
@@ -6048,7 +6060,7 @@
         </p:nvSpPr>
         <p:spPr>
           <a:xfrm>
-            <a:off x="1161288" y="1792224"/>
+            <a:off x="1225296" y="1792224"/>
             <a:ext cx="2820314" cy="256032"/>
           </a:xfrm>
           <a:prstGeom prst="rect">
@@ -6087,7 +6099,7 @@
         </p:nvSpPr>
         <p:spPr>
           <a:xfrm>
-            <a:off x="4091330" y="1600200"/>
+            <a:off x="4155338" y="1600200"/>
             <a:ext cx="146304" cy="384048"/>
           </a:xfrm>
           <a:prstGeom prst="rect">
@@ -6126,7 +6138,7 @@
         </p:nvSpPr>
         <p:spPr>
           <a:xfrm>
-            <a:off x="4237634" y="1463040"/>
+            <a:off x="4301642" y="1463040"/>
             <a:ext cx="3588410" cy="658368"/>
           </a:xfrm>
           <a:prstGeom prst="roundRect">
@@ -6148,7 +6160,7 @@
         </p:nvSpPr>
         <p:spPr>
           <a:xfrm>
-            <a:off x="4347362" y="1572768"/>
+            <a:off x="4411370" y="1572768"/>
             <a:ext cx="438912" cy="438912"/>
           </a:xfrm>
           <a:prstGeom prst="ellipse">
@@ -6168,7 +6180,7 @@
         </p:nvSpPr>
         <p:spPr>
           <a:xfrm>
-            <a:off x="4347362" y="1572768"/>
+            <a:off x="4411370" y="1572768"/>
             <a:ext cx="438912" cy="438912"/>
           </a:xfrm>
           <a:prstGeom prst="rect">
@@ -6207,7 +6219,7 @@
         </p:nvSpPr>
         <p:spPr>
           <a:xfrm>
-            <a:off x="4896002" y="1554480"/>
+            <a:off x="4960010" y="1554480"/>
             <a:ext cx="2820314" cy="237744"/>
           </a:xfrm>
           <a:prstGeom prst="rect">
@@ -6246,7 +6258,7 @@
         </p:nvSpPr>
         <p:spPr>
           <a:xfrm>
-            <a:off x="4896002" y="1792224"/>
+            <a:off x="4960010" y="1792224"/>
             <a:ext cx="2820314" cy="256032"/>
           </a:xfrm>
           <a:prstGeom prst="rect">
@@ -6285,7 +6297,7 @@
         </p:nvSpPr>
         <p:spPr>
           <a:xfrm>
-            <a:off x="7826045" y="1600200"/>
+            <a:off x="7890053" y="1600200"/>
             <a:ext cx="146304" cy="384048"/>
           </a:xfrm>
           <a:prstGeom prst="rect">
@@ -6324,7 +6336,7 @@
         </p:nvSpPr>
         <p:spPr>
           <a:xfrm>
-            <a:off x="7972349" y="1463040"/>
+            <a:off x="8036357" y="1463040"/>
             <a:ext cx="3588410" cy="658368"/>
           </a:xfrm>
           <a:prstGeom prst="roundRect">
@@ -6346,7 +6358,7 @@
         </p:nvSpPr>
         <p:spPr>
           <a:xfrm>
-            <a:off x="8082077" y="1572768"/>
+            <a:off x="8146085" y="1572768"/>
             <a:ext cx="438912" cy="438912"/>
           </a:xfrm>
           <a:prstGeom prst="ellipse">
@@ -6366,7 +6378,7 @@
         </p:nvSpPr>
         <p:spPr>
           <a:xfrm>
-            <a:off x="8082077" y="1572768"/>
+            <a:off x="8146085" y="1572768"/>
             <a:ext cx="438912" cy="438912"/>
           </a:xfrm>
           <a:prstGeom prst="rect">
@@ -6405,7 +6417,7 @@
         </p:nvSpPr>
         <p:spPr>
           <a:xfrm>
-            <a:off x="8630717" y="1554480"/>
+            <a:off x="8694725" y="1554480"/>
             <a:ext cx="2820314" cy="237744"/>
           </a:xfrm>
           <a:prstGeom prst="rect">
@@ -6444,7 +6456,7 @@
         </p:nvSpPr>
         <p:spPr>
           <a:xfrm>
-            <a:off x="8630717" y="1792224"/>
+            <a:off x="8694725" y="1792224"/>
             <a:ext cx="2820314" cy="256032"/>
           </a:xfrm>
           <a:prstGeom prst="rect">
@@ -6483,7 +6495,7 @@
         </p:nvSpPr>
         <p:spPr>
           <a:xfrm>
-            <a:off x="502920" y="2395728"/>
+            <a:off x="566928" y="2395728"/>
             <a:ext cx="5486400" cy="237744"/>
           </a:xfrm>
           <a:prstGeom prst="rect">
@@ -6522,7 +6534,7 @@
         </p:nvSpPr>
         <p:spPr>
           <a:xfrm>
-            <a:off x="502920" y="2724912"/>
+            <a:off x="566928" y="2724912"/>
             <a:ext cx="1280160" cy="292608"/>
           </a:xfrm>
           <a:prstGeom prst="roundRect">
@@ -6544,7 +6556,7 @@
         </p:nvSpPr>
         <p:spPr>
           <a:xfrm>
-            <a:off x="502920" y="2724912"/>
+            <a:off x="566928" y="2724912"/>
             <a:ext cx="1280160" cy="292608"/>
           </a:xfrm>
           <a:prstGeom prst="rect">
@@ -6583,7 +6595,7 @@
         </p:nvSpPr>
         <p:spPr>
           <a:xfrm>
-            <a:off x="1929384" y="2706624"/>
+            <a:off x="1993392" y="2706624"/>
             <a:ext cx="3840480" cy="329184"/>
           </a:xfrm>
           <a:prstGeom prst="rect">
@@ -6622,7 +6634,7 @@
         </p:nvSpPr>
         <p:spPr>
           <a:xfrm>
-            <a:off x="502920" y="3127248"/>
+            <a:off x="566928" y="3127248"/>
             <a:ext cx="1280160" cy="292608"/>
           </a:xfrm>
           <a:prstGeom prst="roundRect">
@@ -6644,7 +6656,7 @@
         </p:nvSpPr>
         <p:spPr>
           <a:xfrm>
-            <a:off x="502920" y="3127248"/>
+            <a:off x="566928" y="3127248"/>
             <a:ext cx="1280160" cy="292608"/>
           </a:xfrm>
           <a:prstGeom prst="rect">
@@ -6683,7 +6695,7 @@
         </p:nvSpPr>
         <p:spPr>
           <a:xfrm>
-            <a:off x="1929384" y="3108960"/>
+            <a:off x="1993392" y="3108960"/>
             <a:ext cx="3840480" cy="329184"/>
           </a:xfrm>
           <a:prstGeom prst="rect">
@@ -6722,7 +6734,7 @@
         </p:nvSpPr>
         <p:spPr>
           <a:xfrm>
-            <a:off x="502920" y="3529584"/>
+            <a:off x="566928" y="3529584"/>
             <a:ext cx="1280160" cy="292608"/>
           </a:xfrm>
           <a:prstGeom prst="roundRect">
@@ -6744,7 +6756,7 @@
         </p:nvSpPr>
         <p:spPr>
           <a:xfrm>
-            <a:off x="502920" y="3529584"/>
+            <a:off x="566928" y="3529584"/>
             <a:ext cx="1280160" cy="292608"/>
           </a:xfrm>
           <a:prstGeom prst="rect">
@@ -6783,7 +6795,7 @@
         </p:nvSpPr>
         <p:spPr>
           <a:xfrm>
-            <a:off x="1929384" y="3511296"/>
+            <a:off x="1993392" y="3511296"/>
             <a:ext cx="3840480" cy="329184"/>
           </a:xfrm>
           <a:prstGeom prst="rect">
@@ -6822,7 +6834,7 @@
         </p:nvSpPr>
         <p:spPr>
           <a:xfrm>
-            <a:off x="502920" y="3931920"/>
+            <a:off x="566928" y="3931920"/>
             <a:ext cx="1280160" cy="292608"/>
           </a:xfrm>
           <a:prstGeom prst="roundRect">
@@ -6844,7 +6856,7 @@
         </p:nvSpPr>
         <p:spPr>
           <a:xfrm>
-            <a:off x="502920" y="3931920"/>
+            <a:off x="566928" y="3931920"/>
             <a:ext cx="1280160" cy="292608"/>
           </a:xfrm>
           <a:prstGeom prst="rect">
@@ -6883,7 +6895,7 @@
         </p:nvSpPr>
         <p:spPr>
           <a:xfrm>
-            <a:off x="1929384" y="3913632"/>
+            <a:off x="1993392" y="3913632"/>
             <a:ext cx="3840480" cy="329184"/>
           </a:xfrm>
           <a:prstGeom prst="rect">
@@ -6922,7 +6934,7 @@
         </p:nvSpPr>
         <p:spPr>
           <a:xfrm>
-            <a:off x="502920" y="4334256"/>
+            <a:off x="566928" y="4334256"/>
             <a:ext cx="1280160" cy="292608"/>
           </a:xfrm>
           <a:prstGeom prst="roundRect">
@@ -6944,7 +6956,7 @@
         </p:nvSpPr>
         <p:spPr>
           <a:xfrm>
-            <a:off x="502920" y="4334256"/>
+            <a:off x="566928" y="4334256"/>
             <a:ext cx="1280160" cy="292608"/>
           </a:xfrm>
           <a:prstGeom prst="rect">
@@ -6983,7 +6995,7 @@
         </p:nvSpPr>
         <p:spPr>
           <a:xfrm>
-            <a:off x="1929384" y="4315968"/>
+            <a:off x="1993392" y="4315968"/>
             <a:ext cx="3840480" cy="329184"/>
           </a:xfrm>
           <a:prstGeom prst="rect">
@@ -7125,7 +7137,7 @@
         </p:nvSpPr>
         <p:spPr>
           <a:xfrm>
-            <a:off x="502920" y="5760720"/>
+            <a:off x="566928" y="5760720"/>
             <a:ext cx="11057839" cy="457200"/>
           </a:xfrm>
           <a:prstGeom prst="rect">
@@ -7145,7 +7157,7 @@
         </p:nvSpPr>
         <p:spPr>
           <a:xfrm>
-            <a:off x="685800" y="5806440"/>
+            <a:off x="749808" y="5806440"/>
             <a:ext cx="10692079" cy="365760"/>
           </a:xfrm>
           <a:prstGeom prst="rect">
@@ -7184,7 +7196,7 @@
         </p:nvSpPr>
         <p:spPr>
           <a:xfrm>
-            <a:off x="502920" y="6382512"/>
+            <a:off x="566928" y="6382512"/>
             <a:ext cx="7315200" cy="219456"/>
           </a:xfrm>
           <a:prstGeom prst="rect">
@@ -7223,7 +7235,7 @@
         </p:nvSpPr>
         <p:spPr>
           <a:xfrm>
-            <a:off x="10774375" y="6382512"/>
+            <a:off x="10710367" y="6382512"/>
             <a:ext cx="914400" cy="219456"/>
           </a:xfrm>
           <a:prstGeom prst="rect">
@@ -7294,7 +7306,7 @@
         </p:nvSpPr>
         <p:spPr>
           <a:xfrm>
-            <a:off x="502920" y="457200"/>
+            <a:off x="566928" y="457200"/>
             <a:ext cx="384048" cy="384048"/>
           </a:xfrm>
           <a:prstGeom prst="ellipse">
@@ -7314,7 +7326,7 @@
         </p:nvSpPr>
         <p:spPr>
           <a:xfrm>
-            <a:off x="502920" y="457200"/>
+            <a:off x="566928" y="457200"/>
             <a:ext cx="384048" cy="384048"/>
           </a:xfrm>
           <a:prstGeom prst="rect">
@@ -7353,7 +7365,7 @@
         </p:nvSpPr>
         <p:spPr>
           <a:xfrm>
-            <a:off x="1069848" y="457200"/>
+            <a:off x="1133856" y="457200"/>
             <a:ext cx="10490911" cy="182880"/>
           </a:xfrm>
           <a:prstGeom prst="rect">
@@ -7392,7 +7404,7 @@
         </p:nvSpPr>
         <p:spPr>
           <a:xfrm>
-            <a:off x="1069848" y="640080"/>
+            <a:off x="1133856" y="640080"/>
             <a:ext cx="10490911" cy="365760"/>
           </a:xfrm>
           <a:prstGeom prst="rect">
@@ -7402,7 +7414,9 @@
           <a:ln/>
         </p:spPr>
         <p:txBody>
-          <a:bodyPr wrap="square" lIns="0" tIns="0" rIns="0" bIns="0" rtlCol="0" anchor="ctr"/>
+          <a:bodyPr wrap="square" lIns="0" tIns="0" rIns="0" bIns="0" rtlCol="0" anchor="ctr">
+            <a:normAutofit/>
+          </a:bodyPr>
           <a:lstStyle/>
           <a:p>
             <a:pPr indent="0" marL="0">
@@ -7431,17 +7445,19 @@
         </p:nvSpPr>
         <p:spPr>
           <a:xfrm>
-            <a:off x="502920" y="1188720"/>
-            <a:ext cx="11057839" cy="457200"/>
-          </a:xfrm>
-          <a:prstGeom prst="rect">
-            <a:avLst/>
-          </a:prstGeom>
-          <a:noFill/>
-          <a:ln/>
-        </p:spPr>
-        <p:txBody>
-          <a:bodyPr wrap="square" rtlCol="0" anchor="ctr"/>
+            <a:off x="566928" y="1188720"/>
+            <a:ext cx="11057839" cy="219075"/>
+          </a:xfrm>
+          <a:prstGeom prst="rect">
+            <a:avLst/>
+          </a:prstGeom>
+          <a:noFill/>
+          <a:ln/>
+        </p:spPr>
+        <p:txBody>
+          <a:bodyPr wrap="square" lIns="0" tIns="0" rIns="0" bIns="0" rtlCol="0" anchor="ctr">
+            <a:normAutofit/>
+          </a:bodyPr>
           <a:lstStyle/>
           <a:p>
             <a:pPr indent="0" marL="0">
@@ -7470,7 +7486,7 @@
         </p:nvSpPr>
         <p:spPr>
           <a:xfrm>
-            <a:off x="502920" y="1691640"/>
+            <a:off x="566928" y="1480947"/>
             <a:ext cx="11057839" cy="0"/>
           </a:xfrm>
           <a:prstGeom prst="line">
@@ -7493,7 +7509,7 @@
         </p:nvSpPr>
         <p:spPr>
           <a:xfrm>
-            <a:off x="502920" y="1965960"/>
+            <a:off x="566928" y="1618107"/>
             <a:ext cx="2641016" cy="960120"/>
           </a:xfrm>
           <a:prstGeom prst="roundRect">
@@ -7520,7 +7536,7 @@
         </p:nvSpPr>
         <p:spPr>
           <a:xfrm>
-            <a:off x="667512" y="2093976"/>
+            <a:off x="731520" y="1746123"/>
             <a:ext cx="2311832" cy="201168"/>
           </a:xfrm>
           <a:prstGeom prst="rect">
@@ -7530,7 +7546,9 @@
           <a:ln/>
         </p:spPr>
         <p:txBody>
-          <a:bodyPr wrap="square" lIns="0" tIns="0" rIns="0" bIns="0" rtlCol="0" anchor="ctr"/>
+          <a:bodyPr wrap="square" lIns="0" tIns="0" rIns="0" bIns="0" rtlCol="0" anchor="ctr">
+            <a:normAutofit/>
+          </a:bodyPr>
           <a:lstStyle/>
           <a:p>
             <a:pPr indent="0" marL="0">
@@ -7559,8 +7577,8 @@
         </p:nvSpPr>
         <p:spPr>
           <a:xfrm>
-            <a:off x="667512" y="2313432"/>
-            <a:ext cx="2311832" cy="274320"/>
+            <a:off x="731520" y="1965579"/>
+            <a:ext cx="2311832" cy="279400"/>
           </a:xfrm>
           <a:prstGeom prst="rect">
             <a:avLst/>
@@ -7603,7 +7621,7 @@
         </p:nvSpPr>
         <p:spPr>
           <a:xfrm>
-            <a:off x="3308528" y="1965960"/>
+            <a:off x="3372536" y="1618107"/>
             <a:ext cx="2641016" cy="960120"/>
           </a:xfrm>
           <a:prstGeom prst="roundRect">
@@ -7630,7 +7648,7 @@
         </p:nvSpPr>
         <p:spPr>
           <a:xfrm>
-            <a:off x="3473120" y="2093976"/>
+            <a:off x="3537128" y="1746123"/>
             <a:ext cx="2311832" cy="201168"/>
           </a:xfrm>
           <a:prstGeom prst="rect">
@@ -7640,7 +7658,9 @@
           <a:ln/>
         </p:spPr>
         <p:txBody>
-          <a:bodyPr wrap="square" lIns="0" tIns="0" rIns="0" bIns="0" rtlCol="0" anchor="ctr"/>
+          <a:bodyPr wrap="square" lIns="0" tIns="0" rIns="0" bIns="0" rtlCol="0" anchor="ctr">
+            <a:normAutofit/>
+          </a:bodyPr>
           <a:lstStyle/>
           <a:p>
             <a:pPr indent="0" marL="0">
@@ -7669,8 +7689,8 @@
         </p:nvSpPr>
         <p:spPr>
           <a:xfrm>
-            <a:off x="3473120" y="2313432"/>
-            <a:ext cx="2311832" cy="274320"/>
+            <a:off x="3537128" y="1965579"/>
+            <a:ext cx="2311832" cy="279400"/>
           </a:xfrm>
           <a:prstGeom prst="rect">
             <a:avLst/>
@@ -7713,7 +7733,7 @@
         </p:nvSpPr>
         <p:spPr>
           <a:xfrm>
-            <a:off x="6114136" y="1965960"/>
+            <a:off x="6178144" y="1618107"/>
             <a:ext cx="2641016" cy="960120"/>
           </a:xfrm>
           <a:prstGeom prst="roundRect">
@@ -7740,7 +7760,7 @@
         </p:nvSpPr>
         <p:spPr>
           <a:xfrm>
-            <a:off x="6278728" y="2093976"/>
+            <a:off x="6342736" y="1746123"/>
             <a:ext cx="2311832" cy="201168"/>
           </a:xfrm>
           <a:prstGeom prst="rect">
@@ -7750,7 +7770,9 @@
           <a:ln/>
         </p:spPr>
         <p:txBody>
-          <a:bodyPr wrap="square" lIns="0" tIns="0" rIns="0" bIns="0" rtlCol="0" anchor="ctr"/>
+          <a:bodyPr wrap="square" lIns="0" tIns="0" rIns="0" bIns="0" rtlCol="0" anchor="ctr">
+            <a:normAutofit/>
+          </a:bodyPr>
           <a:lstStyle/>
           <a:p>
             <a:pPr indent="0" marL="0">
@@ -7779,8 +7801,8 @@
         </p:nvSpPr>
         <p:spPr>
           <a:xfrm>
-            <a:off x="6278728" y="2313432"/>
-            <a:ext cx="2311832" cy="274320"/>
+            <a:off x="6342736" y="1965579"/>
+            <a:ext cx="2311832" cy="279400"/>
           </a:xfrm>
           <a:prstGeom prst="rect">
             <a:avLst/>
@@ -7823,7 +7845,7 @@
         </p:nvSpPr>
         <p:spPr>
           <a:xfrm>
-            <a:off x="8919743" y="1965960"/>
+            <a:off x="8983751" y="1618107"/>
             <a:ext cx="2641016" cy="960120"/>
           </a:xfrm>
           <a:prstGeom prst="roundRect">
@@ -7850,7 +7872,7 @@
         </p:nvSpPr>
         <p:spPr>
           <a:xfrm>
-            <a:off x="9084335" y="2093976"/>
+            <a:off x="9148343" y="1746123"/>
             <a:ext cx="2311832" cy="201168"/>
           </a:xfrm>
           <a:prstGeom prst="rect">
@@ -7860,7 +7882,9 @@
           <a:ln/>
         </p:spPr>
         <p:txBody>
-          <a:bodyPr wrap="square" lIns="0" tIns="0" rIns="0" bIns="0" rtlCol="0" anchor="ctr"/>
+          <a:bodyPr wrap="square" lIns="0" tIns="0" rIns="0" bIns="0" rtlCol="0" anchor="ctr">
+            <a:normAutofit/>
+          </a:bodyPr>
           <a:lstStyle/>
           <a:p>
             <a:pPr indent="0" marL="0">
@@ -7889,8 +7913,8 @@
         </p:nvSpPr>
         <p:spPr>
           <a:xfrm>
-            <a:off x="9084335" y="2313432"/>
-            <a:ext cx="2311832" cy="274320"/>
+            <a:off x="9148343" y="1965579"/>
+            <a:ext cx="2311832" cy="279400"/>
           </a:xfrm>
           <a:prstGeom prst="rect">
             <a:avLst/>
@@ -7933,7 +7957,7 @@
         </p:nvSpPr>
         <p:spPr>
           <a:xfrm>
-            <a:off x="502920" y="3090672"/>
+            <a:off x="566928" y="2742819"/>
             <a:ext cx="2641016" cy="960120"/>
           </a:xfrm>
           <a:prstGeom prst="roundRect">
@@ -7960,7 +7984,7 @@
         </p:nvSpPr>
         <p:spPr>
           <a:xfrm>
-            <a:off x="667512" y="3218688"/>
+            <a:off x="731520" y="2870835"/>
             <a:ext cx="2311832" cy="201168"/>
           </a:xfrm>
           <a:prstGeom prst="rect">
@@ -7970,7 +7994,9 @@
           <a:ln/>
         </p:spPr>
         <p:txBody>
-          <a:bodyPr wrap="square" lIns="0" tIns="0" rIns="0" bIns="0" rtlCol="0" anchor="ctr"/>
+          <a:bodyPr wrap="square" lIns="0" tIns="0" rIns="0" bIns="0" rtlCol="0" anchor="ctr">
+            <a:normAutofit/>
+          </a:bodyPr>
           <a:lstStyle/>
           <a:p>
             <a:pPr indent="0" marL="0">
@@ -7999,8 +8025,8 @@
         </p:nvSpPr>
         <p:spPr>
           <a:xfrm>
-            <a:off x="667512" y="3438144"/>
-            <a:ext cx="2311832" cy="274320"/>
+            <a:off x="731520" y="3090291"/>
+            <a:ext cx="2311832" cy="279400"/>
           </a:xfrm>
           <a:prstGeom prst="rect">
             <a:avLst/>
@@ -8043,7 +8069,7 @@
         </p:nvSpPr>
         <p:spPr>
           <a:xfrm>
-            <a:off x="3308528" y="3090672"/>
+            <a:off x="3372536" y="2742819"/>
             <a:ext cx="2641016" cy="960120"/>
           </a:xfrm>
           <a:prstGeom prst="roundRect">
@@ -8070,7 +8096,7 @@
         </p:nvSpPr>
         <p:spPr>
           <a:xfrm>
-            <a:off x="3473120" y="3218688"/>
+            <a:off x="3537128" y="2870835"/>
             <a:ext cx="2311832" cy="201168"/>
           </a:xfrm>
           <a:prstGeom prst="rect">
@@ -8080,7 +8106,9 @@
           <a:ln/>
         </p:spPr>
         <p:txBody>
-          <a:bodyPr wrap="square" lIns="0" tIns="0" rIns="0" bIns="0" rtlCol="0" anchor="ctr"/>
+          <a:bodyPr wrap="square" lIns="0" tIns="0" rIns="0" bIns="0" rtlCol="0" anchor="ctr">
+            <a:normAutofit/>
+          </a:bodyPr>
           <a:lstStyle/>
           <a:p>
             <a:pPr indent="0" marL="0">
@@ -8109,8 +8137,8 @@
         </p:nvSpPr>
         <p:spPr>
           <a:xfrm>
-            <a:off x="3473120" y="3438144"/>
-            <a:ext cx="2311832" cy="274320"/>
+            <a:off x="3537128" y="3090291"/>
+            <a:ext cx="2311832" cy="279400"/>
           </a:xfrm>
           <a:prstGeom prst="rect">
             <a:avLst/>
@@ -8153,7 +8181,7 @@
         </p:nvSpPr>
         <p:spPr>
           <a:xfrm>
-            <a:off x="6114136" y="3090672"/>
+            <a:off x="6178144" y="2742819"/>
             <a:ext cx="2641016" cy="960120"/>
           </a:xfrm>
           <a:prstGeom prst="roundRect">
@@ -8180,7 +8208,7 @@
         </p:nvSpPr>
         <p:spPr>
           <a:xfrm>
-            <a:off x="6278728" y="3218688"/>
+            <a:off x="6342736" y="2870835"/>
             <a:ext cx="2311832" cy="201168"/>
           </a:xfrm>
           <a:prstGeom prst="rect">
@@ -8190,7 +8218,9 @@
           <a:ln/>
         </p:spPr>
         <p:txBody>
-          <a:bodyPr wrap="square" lIns="0" tIns="0" rIns="0" bIns="0" rtlCol="0" anchor="ctr"/>
+          <a:bodyPr wrap="square" lIns="0" tIns="0" rIns="0" bIns="0" rtlCol="0" anchor="ctr">
+            <a:normAutofit/>
+          </a:bodyPr>
           <a:lstStyle/>
           <a:p>
             <a:pPr indent="0" marL="0">
@@ -8219,8 +8249,8 @@
         </p:nvSpPr>
         <p:spPr>
           <a:xfrm>
-            <a:off x="6278728" y="3438144"/>
-            <a:ext cx="2311832" cy="274320"/>
+            <a:off x="6342736" y="3090291"/>
+            <a:ext cx="2311832" cy="279400"/>
           </a:xfrm>
           <a:prstGeom prst="rect">
             <a:avLst/>
@@ -8263,7 +8293,7 @@
         </p:nvSpPr>
         <p:spPr>
           <a:xfrm>
-            <a:off x="8919743" y="3090672"/>
+            <a:off x="8983751" y="2742819"/>
             <a:ext cx="2641016" cy="960120"/>
           </a:xfrm>
           <a:prstGeom prst="roundRect">
@@ -8290,7 +8320,7 @@
         </p:nvSpPr>
         <p:spPr>
           <a:xfrm>
-            <a:off x="9084335" y="3218688"/>
+            <a:off x="9148343" y="2870835"/>
             <a:ext cx="2311832" cy="201168"/>
           </a:xfrm>
           <a:prstGeom prst="rect">
@@ -8300,7 +8330,9 @@
           <a:ln/>
         </p:spPr>
         <p:txBody>
-          <a:bodyPr wrap="square" lIns="0" tIns="0" rIns="0" bIns="0" rtlCol="0" anchor="ctr"/>
+          <a:bodyPr wrap="square" lIns="0" tIns="0" rIns="0" bIns="0" rtlCol="0" anchor="ctr">
+            <a:normAutofit/>
+          </a:bodyPr>
           <a:lstStyle/>
           <a:p>
             <a:pPr indent="0" marL="0">
@@ -8329,8 +8361,8 @@
         </p:nvSpPr>
         <p:spPr>
           <a:xfrm>
-            <a:off x="9084335" y="3438144"/>
-            <a:ext cx="2311832" cy="274320"/>
+            <a:off x="9148343" y="3090291"/>
+            <a:ext cx="2311832" cy="279400"/>
           </a:xfrm>
           <a:prstGeom prst="rect">
             <a:avLst/>
@@ -8373,7 +8405,7 @@
         </p:nvSpPr>
         <p:spPr>
           <a:xfrm>
-            <a:off x="502920" y="4306824"/>
+            <a:off x="566928" y="3958971"/>
             <a:ext cx="11057839" cy="274320"/>
           </a:xfrm>
           <a:prstGeom prst="rect">
@@ -8412,12 +8444,12 @@
         </p:nvSpPr>
         <p:spPr>
           <a:xfrm>
-            <a:off x="502920" y="4636008"/>
-            <a:ext cx="11057839" cy="396240"/>
+            <a:off x="566928" y="4288155"/>
+            <a:ext cx="11057839" cy="512191"/>
           </a:xfrm>
           <a:prstGeom prst="roundRect">
             <a:avLst>
-              <a:gd name="adj" fmla="val 11538"/>
+              <a:gd name="adj" fmla="val 8926"/>
             </a:avLst>
           </a:prstGeom>
           <a:solidFill>
@@ -8439,12 +8471,12 @@
         </p:nvSpPr>
         <p:spPr>
           <a:xfrm>
-            <a:off x="612648" y="4709160"/>
-            <a:ext cx="411480" cy="249936"/>
+            <a:off x="676656" y="4361371"/>
+            <a:ext cx="411480" cy="365760"/>
           </a:xfrm>
           <a:prstGeom prst="roundRect">
             <a:avLst>
-              <a:gd name="adj" fmla="val 14634"/>
+              <a:gd name="adj" fmla="val 10000"/>
             </a:avLst>
           </a:prstGeom>
           <a:solidFill>
@@ -8466,8 +8498,8 @@
         </p:nvSpPr>
         <p:spPr>
           <a:xfrm>
-            <a:off x="612648" y="4709160"/>
-            <a:ext cx="411480" cy="249936"/>
+            <a:off x="676656" y="4361371"/>
+            <a:ext cx="411480" cy="365760"/>
           </a:xfrm>
           <a:prstGeom prst="rect">
             <a:avLst/>
@@ -8505,8 +8537,8 @@
         </p:nvSpPr>
         <p:spPr>
           <a:xfrm>
-            <a:off x="1143000" y="4672584"/>
-            <a:ext cx="10280599" cy="323088"/>
+            <a:off x="1207008" y="4324731"/>
+            <a:ext cx="10280599" cy="439039"/>
           </a:xfrm>
           <a:prstGeom prst="rect">
             <a:avLst/>
@@ -8522,7 +8554,7 @@
               <a:buNone/>
             </a:pPr>
             <a:r>
-              <a:rPr lang="en-US" sz="1000" dirty="0">
+              <a:rPr lang="en-US" sz="1150" dirty="0">
                 <a:solidFill>
                   <a:srgbClr val="10161F"/>
                 </a:solidFill>
@@ -8532,7 +8564,7 @@
               </a:rPr>
               <a:t>입지 가치: 대중교통 역세권 입지, 해당 권역 업무·상업 중심지 배후 수요 확보</a:t>
             </a:r>
-            <a:endParaRPr lang="en-US" sz="1000" dirty="0"/>
+            <a:endParaRPr lang="en-US" sz="1150" dirty="0"/>
           </a:p>
         </p:txBody>
       </p:sp>
@@ -8544,12 +8576,12 @@
         </p:nvSpPr>
         <p:spPr>
           <a:xfrm>
-            <a:off x="502920" y="5114544"/>
-            <a:ext cx="11057839" cy="396240"/>
+            <a:off x="566928" y="4882642"/>
+            <a:ext cx="11057839" cy="512191"/>
           </a:xfrm>
           <a:prstGeom prst="roundRect">
             <a:avLst>
-              <a:gd name="adj" fmla="val 11538"/>
+              <a:gd name="adj" fmla="val 8926"/>
             </a:avLst>
           </a:prstGeom>
           <a:solidFill>
@@ -8571,12 +8603,12 @@
         </p:nvSpPr>
         <p:spPr>
           <a:xfrm>
-            <a:off x="612648" y="5187696"/>
-            <a:ext cx="411480" cy="249936"/>
+            <a:off x="676656" y="4955858"/>
+            <a:ext cx="411480" cy="365760"/>
           </a:xfrm>
           <a:prstGeom prst="roundRect">
             <a:avLst>
-              <a:gd name="adj" fmla="val 14634"/>
+              <a:gd name="adj" fmla="val 10000"/>
             </a:avLst>
           </a:prstGeom>
           <a:solidFill>
@@ -8598,8 +8630,8 @@
         </p:nvSpPr>
         <p:spPr>
           <a:xfrm>
-            <a:off x="612648" y="5187696"/>
-            <a:ext cx="411480" cy="249936"/>
+            <a:off x="676656" y="4955858"/>
+            <a:ext cx="411480" cy="365760"/>
           </a:xfrm>
           <a:prstGeom prst="rect">
             <a:avLst/>
@@ -8637,8 +8669,8 @@
         </p:nvSpPr>
         <p:spPr>
           <a:xfrm>
-            <a:off x="1143000" y="5151120"/>
-            <a:ext cx="10280599" cy="323088"/>
+            <a:off x="1207008" y="4919218"/>
+            <a:ext cx="10280599" cy="439039"/>
           </a:xfrm>
           <a:prstGeom prst="rect">
             <a:avLst/>
@@ -8654,7 +8686,7 @@
               <a:buNone/>
             </a:pPr>
             <a:r>
-              <a:rPr lang="en-US" sz="1000" dirty="0">
+              <a:rPr lang="en-US" sz="1150" dirty="0">
                 <a:solidFill>
                   <a:srgbClr val="10161F"/>
                 </a:solidFill>
@@ -8664,7 +8696,7 @@
               </a:rPr>
               <a:t>자산 규모: 해당 권역 소재 단독 빌딩 매입 기회</a:t>
             </a:r>
-            <a:endParaRPr lang="en-US" sz="1000" dirty="0"/>
+            <a:endParaRPr lang="en-US" sz="1150" dirty="0"/>
           </a:p>
         </p:txBody>
       </p:sp>
@@ -8676,12 +8708,12 @@
         </p:nvSpPr>
         <p:spPr>
           <a:xfrm>
-            <a:off x="502920" y="5593080"/>
-            <a:ext cx="11057839" cy="396240"/>
+            <a:off x="566928" y="5477129"/>
+            <a:ext cx="11057839" cy="512191"/>
           </a:xfrm>
           <a:prstGeom prst="roundRect">
             <a:avLst>
-              <a:gd name="adj" fmla="val 11538"/>
+              <a:gd name="adj" fmla="val 8926"/>
             </a:avLst>
           </a:prstGeom>
           <a:solidFill>
@@ -8703,12 +8735,12 @@
         </p:nvSpPr>
         <p:spPr>
           <a:xfrm>
-            <a:off x="612648" y="5666232"/>
-            <a:ext cx="411480" cy="249936"/>
+            <a:off x="676656" y="5550345"/>
+            <a:ext cx="411480" cy="365760"/>
           </a:xfrm>
           <a:prstGeom prst="roundRect">
             <a:avLst>
-              <a:gd name="adj" fmla="val 14634"/>
+              <a:gd name="adj" fmla="val 10000"/>
             </a:avLst>
           </a:prstGeom>
           <a:solidFill>
@@ -8730,8 +8762,8 @@
         </p:nvSpPr>
         <p:spPr>
           <a:xfrm>
-            <a:off x="612648" y="5666232"/>
-            <a:ext cx="411480" cy="249936"/>
+            <a:off x="676656" y="5550345"/>
+            <a:ext cx="411480" cy="365760"/>
           </a:xfrm>
           <a:prstGeom prst="rect">
             <a:avLst/>
@@ -8769,8 +8801,8 @@
         </p:nvSpPr>
         <p:spPr>
           <a:xfrm>
-            <a:off x="1143000" y="5629656"/>
-            <a:ext cx="10280599" cy="323088"/>
+            <a:off x="1207008" y="5513705"/>
+            <a:ext cx="10280599" cy="439039"/>
           </a:xfrm>
           <a:prstGeom prst="rect">
             <a:avLst/>
@@ -8786,7 +8818,7 @@
               <a:buNone/>
             </a:pPr>
             <a:r>
-              <a:rPr lang="en-US" sz="1000" dirty="0">
+              <a:rPr lang="en-US" sz="1150" dirty="0">
                 <a:solidFill>
                   <a:srgbClr val="10161F"/>
                 </a:solidFill>
@@ -8796,7 +8828,7 @@
               </a:rPr>
               <a:t>수익 안정성: 안정적 임대수익 기반 투자 매물</a:t>
             </a:r>
-            <a:endParaRPr lang="en-US" sz="1000" dirty="0"/>
+            <a:endParaRPr lang="en-US" sz="1150" dirty="0"/>
           </a:p>
         </p:txBody>
       </p:sp>
@@ -8808,7 +8840,7 @@
         </p:nvSpPr>
         <p:spPr>
           <a:xfrm>
-            <a:off x="502920" y="6382512"/>
+            <a:off x="566928" y="6382512"/>
             <a:ext cx="7315200" cy="219456"/>
           </a:xfrm>
           <a:prstGeom prst="rect">
@@ -8847,7 +8879,7 @@
         </p:nvSpPr>
         <p:spPr>
           <a:xfrm>
-            <a:off x="10774375" y="6382512"/>
+            <a:off x="10710367" y="6382512"/>
             <a:ext cx="914400" cy="219456"/>
           </a:xfrm>
           <a:prstGeom prst="rect">
@@ -8918,7 +8950,7 @@
         </p:nvSpPr>
         <p:spPr>
           <a:xfrm>
-            <a:off x="502920" y="457200"/>
+            <a:off x="566928" y="457200"/>
             <a:ext cx="384048" cy="384048"/>
           </a:xfrm>
           <a:prstGeom prst="ellipse">
@@ -8938,7 +8970,7 @@
         </p:nvSpPr>
         <p:spPr>
           <a:xfrm>
-            <a:off x="502920" y="457200"/>
+            <a:off x="566928" y="457200"/>
             <a:ext cx="384048" cy="384048"/>
           </a:xfrm>
           <a:prstGeom prst="rect">
@@ -8977,7 +9009,7 @@
         </p:nvSpPr>
         <p:spPr>
           <a:xfrm>
-            <a:off x="1069848" y="457200"/>
+            <a:off x="1133856" y="457200"/>
             <a:ext cx="10490911" cy="182880"/>
           </a:xfrm>
           <a:prstGeom prst="rect">
@@ -9016,7 +9048,7 @@
         </p:nvSpPr>
         <p:spPr>
           <a:xfrm>
-            <a:off x="1069848" y="640080"/>
+            <a:off x="1133856" y="640080"/>
             <a:ext cx="10490911" cy="365760"/>
           </a:xfrm>
           <a:prstGeom prst="rect">
@@ -9026,7 +9058,9 @@
           <a:ln/>
         </p:spPr>
         <p:txBody>
-          <a:bodyPr wrap="square" lIns="0" tIns="0" rIns="0" bIns="0" rtlCol="0" anchor="ctr"/>
+          <a:bodyPr wrap="square" lIns="0" tIns="0" rIns="0" bIns="0" rtlCol="0" anchor="ctr">
+            <a:normAutofit/>
+          </a:bodyPr>
           <a:lstStyle/>
           <a:p>
             <a:pPr indent="0" marL="0">
@@ -9063,7 +9097,7 @@
         </p:blipFill>
         <p:spPr>
           <a:xfrm>
-            <a:off x="502920" y="1481328"/>
+            <a:off x="566928" y="1481328"/>
             <a:ext cx="5120640" cy="4114800"/>
           </a:xfrm>
           <a:prstGeom prst="rect">
@@ -9079,7 +9113,7 @@
         </p:nvSpPr>
         <p:spPr>
           <a:xfrm>
-            <a:off x="5989320" y="1481328"/>
+            <a:off x="6053328" y="1481328"/>
             <a:ext cx="1560003" cy="457200"/>
           </a:xfrm>
           <a:prstGeom prst="rect">
@@ -9089,7 +9123,9 @@
           <a:ln/>
         </p:spPr>
         <p:txBody>
-          <a:bodyPr wrap="square" lIns="0" tIns="0" rIns="0" bIns="0" rtlCol="0" anchor="ctr"/>
+          <a:bodyPr wrap="square" lIns="0" tIns="0" rIns="0" bIns="0" rtlCol="0" anchor="ctr">
+            <a:normAutofit/>
+          </a:bodyPr>
           <a:lstStyle/>
           <a:p>
             <a:pPr indent="0" marL="0">
@@ -9121,7 +9157,7 @@
         </p:nvSpPr>
         <p:spPr>
           <a:xfrm>
-            <a:off x="7549323" y="1481328"/>
+            <a:off x="7613331" y="1481328"/>
             <a:ext cx="4011436" cy="457200"/>
           </a:xfrm>
           <a:prstGeom prst="rect">
@@ -9131,7 +9167,9 @@
           <a:ln/>
         </p:spPr>
         <p:txBody>
-          <a:bodyPr wrap="square" lIns="0" tIns="0" rIns="0" bIns="0" rtlCol="0" anchor="ctr"/>
+          <a:bodyPr wrap="square" lIns="0" tIns="0" rIns="0" bIns="0" rtlCol="0" anchor="ctr">
+            <a:normAutofit/>
+          </a:bodyPr>
           <a:lstStyle/>
           <a:p>
             <a:pPr indent="0" marL="0">
@@ -9163,7 +9201,7 @@
         </p:nvSpPr>
         <p:spPr>
           <a:xfrm>
-            <a:off x="5989320" y="1938528"/>
+            <a:off x="6053328" y="1938528"/>
             <a:ext cx="5571439" cy="0"/>
           </a:xfrm>
           <a:prstGeom prst="line">
@@ -9186,7 +9224,7 @@
         </p:nvSpPr>
         <p:spPr>
           <a:xfrm>
-            <a:off x="5989320" y="1938528"/>
+            <a:off x="6053328" y="1938528"/>
             <a:ext cx="1560003" cy="457200"/>
           </a:xfrm>
           <a:prstGeom prst="rect">
@@ -9196,7 +9234,9 @@
           <a:ln/>
         </p:spPr>
         <p:txBody>
-          <a:bodyPr wrap="square" lIns="0" tIns="0" rIns="0" bIns="0" rtlCol="0" anchor="ctr"/>
+          <a:bodyPr wrap="square" lIns="0" tIns="0" rIns="0" bIns="0" rtlCol="0" anchor="ctr">
+            <a:normAutofit/>
+          </a:bodyPr>
           <a:lstStyle/>
           <a:p>
             <a:pPr indent="0" marL="0">
@@ -9228,7 +9268,7 @@
         </p:nvSpPr>
         <p:spPr>
           <a:xfrm>
-            <a:off x="7549323" y="1938528"/>
+            <a:off x="7613331" y="1938528"/>
             <a:ext cx="4011436" cy="457200"/>
           </a:xfrm>
           <a:prstGeom prst="rect">
@@ -9238,7 +9278,9 @@
           <a:ln/>
         </p:spPr>
         <p:txBody>
-          <a:bodyPr wrap="square" lIns="0" tIns="0" rIns="0" bIns="0" rtlCol="0" anchor="ctr"/>
+          <a:bodyPr wrap="square" lIns="0" tIns="0" rIns="0" bIns="0" rtlCol="0" anchor="ctr">
+            <a:normAutofit/>
+          </a:bodyPr>
           <a:lstStyle/>
           <a:p>
             <a:pPr indent="0" marL="0">
@@ -9270,7 +9312,7 @@
         </p:nvSpPr>
         <p:spPr>
           <a:xfrm>
-            <a:off x="5989320" y="2505456"/>
+            <a:off x="6053328" y="2505456"/>
             <a:ext cx="5571439" cy="658368"/>
           </a:xfrm>
           <a:prstGeom prst="roundRect">
@@ -9292,7 +9334,7 @@
         </p:nvSpPr>
         <p:spPr>
           <a:xfrm>
-            <a:off x="5989320" y="2560320"/>
+            <a:off x="6053328" y="2560320"/>
             <a:ext cx="36576" cy="548640"/>
           </a:xfrm>
           <a:prstGeom prst="rect">
@@ -9312,7 +9354,7 @@
         </p:nvSpPr>
         <p:spPr>
           <a:xfrm>
-            <a:off x="6135624" y="2596896"/>
+            <a:off x="6199632" y="2596896"/>
             <a:ext cx="5315407" cy="201168"/>
           </a:xfrm>
           <a:prstGeom prst="rect">
@@ -9351,7 +9393,7 @@
         </p:nvSpPr>
         <p:spPr>
           <a:xfrm>
-            <a:off x="6135624" y="2798064"/>
+            <a:off x="6199632" y="2798064"/>
             <a:ext cx="5315407" cy="329184"/>
           </a:xfrm>
           <a:prstGeom prst="rect">
@@ -9394,7 +9436,7 @@
         </p:nvSpPr>
         <p:spPr>
           <a:xfrm>
-            <a:off x="502920" y="6382512"/>
+            <a:off x="566928" y="6382512"/>
             <a:ext cx="7315200" cy="219456"/>
           </a:xfrm>
           <a:prstGeom prst="rect">
@@ -9433,7 +9475,7 @@
         </p:nvSpPr>
         <p:spPr>
           <a:xfrm>
-            <a:off x="10774375" y="6382512"/>
+            <a:off x="10710367" y="6382512"/>
             <a:ext cx="914400" cy="219456"/>
           </a:xfrm>
           <a:prstGeom prst="rect">
@@ -9504,7 +9546,7 @@
         </p:nvSpPr>
         <p:spPr>
           <a:xfrm>
-            <a:off x="502920" y="457200"/>
+            <a:off x="566928" y="457200"/>
             <a:ext cx="384048" cy="384048"/>
           </a:xfrm>
           <a:prstGeom prst="ellipse">
@@ -9524,7 +9566,7 @@
         </p:nvSpPr>
         <p:spPr>
           <a:xfrm>
-            <a:off x="502920" y="457200"/>
+            <a:off x="566928" y="457200"/>
             <a:ext cx="384048" cy="384048"/>
           </a:xfrm>
           <a:prstGeom prst="rect">
@@ -9563,7 +9605,7 @@
         </p:nvSpPr>
         <p:spPr>
           <a:xfrm>
-            <a:off x="1069848" y="457200"/>
+            <a:off x="1133856" y="457200"/>
             <a:ext cx="10490911" cy="182880"/>
           </a:xfrm>
           <a:prstGeom prst="rect">
@@ -9602,7 +9644,7 @@
         </p:nvSpPr>
         <p:spPr>
           <a:xfrm>
-            <a:off x="1069848" y="640080"/>
+            <a:off x="1133856" y="640080"/>
             <a:ext cx="10490911" cy="365760"/>
           </a:xfrm>
           <a:prstGeom prst="rect">
@@ -9612,7 +9654,9 @@
           <a:ln/>
         </p:spPr>
         <p:txBody>
-          <a:bodyPr wrap="square" lIns="0" tIns="0" rIns="0" bIns="0" rtlCol="0" anchor="ctr"/>
+          <a:bodyPr wrap="square" lIns="0" tIns="0" rIns="0" bIns="0" rtlCol="0" anchor="ctr">
+            <a:normAutofit/>
+          </a:bodyPr>
           <a:lstStyle/>
           <a:p>
             <a:pPr indent="0" marL="0">
@@ -9641,7 +9685,7 @@
         </p:nvSpPr>
         <p:spPr>
           <a:xfrm>
-            <a:off x="502920" y="1371600"/>
+            <a:off x="566928" y="1371600"/>
             <a:ext cx="6858000" cy="237744"/>
           </a:xfrm>
           <a:prstGeom prst="rect">
@@ -9680,7 +9724,7 @@
         </p:nvSpPr>
         <p:spPr>
           <a:xfrm>
-            <a:off x="502920" y="1645920"/>
+            <a:off x="566928" y="1645920"/>
             <a:ext cx="1920240" cy="402336"/>
           </a:xfrm>
           <a:prstGeom prst="rect">
@@ -9690,7 +9734,9 @@
           <a:ln/>
         </p:spPr>
         <p:txBody>
-          <a:bodyPr wrap="square" lIns="0" tIns="0" rIns="0" bIns="0" rtlCol="0" anchor="ctr"/>
+          <a:bodyPr wrap="square" lIns="0" tIns="0" rIns="0" bIns="0" rtlCol="0" anchor="ctr">
+            <a:normAutofit/>
+          </a:bodyPr>
           <a:lstStyle/>
           <a:p>
             <a:pPr indent="0" marL="0">
@@ -9722,7 +9768,7 @@
         </p:nvSpPr>
         <p:spPr>
           <a:xfrm>
-            <a:off x="2423160" y="1645920"/>
+            <a:off x="2487168" y="1645920"/>
             <a:ext cx="4937760" cy="402336"/>
           </a:xfrm>
           <a:prstGeom prst="rect">
@@ -9732,7 +9778,9 @@
           <a:ln/>
         </p:spPr>
         <p:txBody>
-          <a:bodyPr wrap="square" lIns="0" tIns="0" rIns="0" bIns="0" rtlCol="0" anchor="ctr"/>
+          <a:bodyPr wrap="square" lIns="0" tIns="0" rIns="0" bIns="0" rtlCol="0" anchor="ctr">
+            <a:normAutofit/>
+          </a:bodyPr>
           <a:lstStyle/>
           <a:p>
             <a:pPr indent="0" marL="0">
@@ -9764,7 +9812,7 @@
         </p:nvSpPr>
         <p:spPr>
           <a:xfrm>
-            <a:off x="502920" y="2048256"/>
+            <a:off x="566928" y="2048256"/>
             <a:ext cx="6858000" cy="0"/>
           </a:xfrm>
           <a:prstGeom prst="line">
@@ -9787,7 +9835,7 @@
         </p:nvSpPr>
         <p:spPr>
           <a:xfrm>
-            <a:off x="502920" y="2048256"/>
+            <a:off x="566928" y="2048256"/>
             <a:ext cx="1920240" cy="402336"/>
           </a:xfrm>
           <a:prstGeom prst="rect">
@@ -9797,7 +9845,9 @@
           <a:ln/>
         </p:spPr>
         <p:txBody>
-          <a:bodyPr wrap="square" lIns="0" tIns="0" rIns="0" bIns="0" rtlCol="0" anchor="ctr"/>
+          <a:bodyPr wrap="square" lIns="0" tIns="0" rIns="0" bIns="0" rtlCol="0" anchor="ctr">
+            <a:normAutofit/>
+          </a:bodyPr>
           <a:lstStyle/>
           <a:p>
             <a:pPr indent="0" marL="0">
@@ -9829,7 +9879,7 @@
         </p:nvSpPr>
         <p:spPr>
           <a:xfrm>
-            <a:off x="2423160" y="2048256"/>
+            <a:off x="2487168" y="2048256"/>
             <a:ext cx="4937760" cy="402336"/>
           </a:xfrm>
           <a:prstGeom prst="rect">
@@ -9839,7 +9889,9 @@
           <a:ln/>
         </p:spPr>
         <p:txBody>
-          <a:bodyPr wrap="square" lIns="0" tIns="0" rIns="0" bIns="0" rtlCol="0" anchor="ctr"/>
+          <a:bodyPr wrap="square" lIns="0" tIns="0" rIns="0" bIns="0" rtlCol="0" anchor="ctr">
+            <a:normAutofit/>
+          </a:bodyPr>
           <a:lstStyle/>
           <a:p>
             <a:pPr indent="0" marL="0">
@@ -9871,7 +9923,7 @@
         </p:nvSpPr>
         <p:spPr>
           <a:xfrm>
-            <a:off x="7540600" y="1371600"/>
+            <a:off x="7604608" y="1371600"/>
             <a:ext cx="0" cy="4754880"/>
           </a:xfrm>
           <a:prstGeom prst="line">
@@ -9894,7 +9946,7 @@
         </p:nvSpPr>
         <p:spPr>
           <a:xfrm>
-            <a:off x="7720279" y="1645920"/>
+            <a:off x="7784287" y="1645920"/>
             <a:ext cx="3840480" cy="2103120"/>
           </a:xfrm>
           <a:prstGeom prst="roundRect">
@@ -9916,7 +9968,7 @@
         </p:nvSpPr>
         <p:spPr>
           <a:xfrm>
-            <a:off x="7720279" y="1700784"/>
+            <a:off x="7784287" y="1700784"/>
             <a:ext cx="36576" cy="1993392"/>
           </a:xfrm>
           <a:prstGeom prst="rect">
@@ -9936,7 +9988,7 @@
         </p:nvSpPr>
         <p:spPr>
           <a:xfrm>
-            <a:off x="7866583" y="1737360"/>
+            <a:off x="7930591" y="1737360"/>
             <a:ext cx="3584448" cy="201168"/>
           </a:xfrm>
           <a:prstGeom prst="rect">
@@ -9975,7 +10027,7 @@
         </p:nvSpPr>
         <p:spPr>
           <a:xfrm>
-            <a:off x="7866583" y="1938528"/>
+            <a:off x="7930591" y="1938528"/>
             <a:ext cx="3584448" cy="1773936"/>
           </a:xfrm>
           <a:prstGeom prst="rect">
@@ -10018,7 +10070,7 @@
         </p:nvSpPr>
         <p:spPr>
           <a:xfrm>
-            <a:off x="7720279" y="3977640"/>
+            <a:off x="7784287" y="3977640"/>
             <a:ext cx="3840480" cy="2148840"/>
           </a:xfrm>
           <a:prstGeom prst="roundRect">
@@ -10040,7 +10092,7 @@
         </p:nvSpPr>
         <p:spPr>
           <a:xfrm>
-            <a:off x="7720279" y="4032504"/>
+            <a:off x="7784287" y="4032504"/>
             <a:ext cx="36576" cy="2039112"/>
           </a:xfrm>
           <a:prstGeom prst="rect">
@@ -10060,7 +10112,7 @@
         </p:nvSpPr>
         <p:spPr>
           <a:xfrm>
-            <a:off x="7866583" y="4069080"/>
+            <a:off x="7930591" y="4069080"/>
             <a:ext cx="3584448" cy="201168"/>
           </a:xfrm>
           <a:prstGeom prst="rect">
@@ -10099,7 +10151,7 @@
         </p:nvSpPr>
         <p:spPr>
           <a:xfrm>
-            <a:off x="7866583" y="4270248"/>
+            <a:off x="7930591" y="4270248"/>
             <a:ext cx="3584448" cy="1819656"/>
           </a:xfrm>
           <a:prstGeom prst="rect">
@@ -10190,7 +10242,7 @@
         </p:nvSpPr>
         <p:spPr>
           <a:xfrm>
-            <a:off x="502920" y="6382512"/>
+            <a:off x="566928" y="6382512"/>
             <a:ext cx="7315200" cy="219456"/>
           </a:xfrm>
           <a:prstGeom prst="rect">
@@ -10229,7 +10281,7 @@
         </p:nvSpPr>
         <p:spPr>
           <a:xfrm>
-            <a:off x="10774375" y="6382512"/>
+            <a:off x="10710367" y="6382512"/>
             <a:ext cx="914400" cy="219456"/>
           </a:xfrm>
           <a:prstGeom prst="rect">
@@ -10300,7 +10352,7 @@
         </p:nvSpPr>
         <p:spPr>
           <a:xfrm>
-            <a:off x="502920" y="457200"/>
+            <a:off x="566928" y="457200"/>
             <a:ext cx="384048" cy="384048"/>
           </a:xfrm>
           <a:prstGeom prst="ellipse">
@@ -10320,7 +10372,7 @@
         </p:nvSpPr>
         <p:spPr>
           <a:xfrm>
-            <a:off x="502920" y="457200"/>
+            <a:off x="566928" y="457200"/>
             <a:ext cx="384048" cy="384048"/>
           </a:xfrm>
           <a:prstGeom prst="rect">
@@ -10359,7 +10411,7 @@
         </p:nvSpPr>
         <p:spPr>
           <a:xfrm>
-            <a:off x="1069848" y="457200"/>
+            <a:off x="1133856" y="457200"/>
             <a:ext cx="10490911" cy="182880"/>
           </a:xfrm>
           <a:prstGeom prst="rect">
@@ -10398,7 +10450,7 @@
         </p:nvSpPr>
         <p:spPr>
           <a:xfrm>
-            <a:off x="1069848" y="640080"/>
+            <a:off x="1133856" y="640080"/>
             <a:ext cx="10490911" cy="365760"/>
           </a:xfrm>
           <a:prstGeom prst="rect">
@@ -10408,7 +10460,9 @@
           <a:ln/>
         </p:spPr>
         <p:txBody>
-          <a:bodyPr wrap="square" lIns="0" tIns="0" rIns="0" bIns="0" rtlCol="0" anchor="ctr"/>
+          <a:bodyPr wrap="square" lIns="0" tIns="0" rIns="0" bIns="0" rtlCol="0" anchor="ctr">
+            <a:normAutofit/>
+          </a:bodyPr>
           <a:lstStyle/>
           <a:p>
             <a:pPr indent="0" marL="0">
@@ -10437,7 +10491,7 @@
         </p:nvSpPr>
         <p:spPr>
           <a:xfrm>
-            <a:off x="502920" y="1371600"/>
+            <a:off x="566928" y="1371600"/>
             <a:ext cx="6858000" cy="237744"/>
           </a:xfrm>
           <a:prstGeom prst="rect">
@@ -10476,7 +10530,7 @@
         </p:nvSpPr>
         <p:spPr>
           <a:xfrm>
-            <a:off x="502920" y="1645920"/>
+            <a:off x="566928" y="1645920"/>
             <a:ext cx="1920240" cy="402336"/>
           </a:xfrm>
           <a:prstGeom prst="rect">
@@ -10486,7 +10540,9 @@
           <a:ln/>
         </p:spPr>
         <p:txBody>
-          <a:bodyPr wrap="square" lIns="0" tIns="0" rIns="0" bIns="0" rtlCol="0" anchor="ctr"/>
+          <a:bodyPr wrap="square" lIns="0" tIns="0" rIns="0" bIns="0" rtlCol="0" anchor="ctr">
+            <a:normAutofit/>
+          </a:bodyPr>
           <a:lstStyle/>
           <a:p>
             <a:pPr indent="0" marL="0">
@@ -10518,7 +10574,7 @@
         </p:nvSpPr>
         <p:spPr>
           <a:xfrm>
-            <a:off x="2423160" y="1645920"/>
+            <a:off x="2487168" y="1645920"/>
             <a:ext cx="4937760" cy="402336"/>
           </a:xfrm>
           <a:prstGeom prst="rect">
@@ -10528,7 +10584,9 @@
           <a:ln/>
         </p:spPr>
         <p:txBody>
-          <a:bodyPr wrap="square" lIns="0" tIns="0" rIns="0" bIns="0" rtlCol="0" anchor="ctr"/>
+          <a:bodyPr wrap="square" lIns="0" tIns="0" rIns="0" bIns="0" rtlCol="0" anchor="ctr">
+            <a:normAutofit/>
+          </a:bodyPr>
           <a:lstStyle/>
           <a:p>
             <a:pPr indent="0" marL="0">
@@ -10560,7 +10618,7 @@
         </p:nvSpPr>
         <p:spPr>
           <a:xfrm>
-            <a:off x="502920" y="2048256"/>
+            <a:off x="566928" y="2048256"/>
             <a:ext cx="6858000" cy="0"/>
           </a:xfrm>
           <a:prstGeom prst="line">
@@ -10583,7 +10641,7 @@
         </p:nvSpPr>
         <p:spPr>
           <a:xfrm>
-            <a:off x="502920" y="2048256"/>
+            <a:off x="566928" y="2048256"/>
             <a:ext cx="1920240" cy="402336"/>
           </a:xfrm>
           <a:prstGeom prst="rect">
@@ -10593,7 +10651,9 @@
           <a:ln/>
         </p:spPr>
         <p:txBody>
-          <a:bodyPr wrap="square" lIns="0" tIns="0" rIns="0" bIns="0" rtlCol="0" anchor="ctr"/>
+          <a:bodyPr wrap="square" lIns="0" tIns="0" rIns="0" bIns="0" rtlCol="0" anchor="ctr">
+            <a:normAutofit/>
+          </a:bodyPr>
           <a:lstStyle/>
           <a:p>
             <a:pPr indent="0" marL="0">
@@ -10625,7 +10685,7 @@
         </p:nvSpPr>
         <p:spPr>
           <a:xfrm>
-            <a:off x="2423160" y="2048256"/>
+            <a:off x="2487168" y="2048256"/>
             <a:ext cx="4937760" cy="402336"/>
           </a:xfrm>
           <a:prstGeom prst="rect">
@@ -10635,7 +10695,9 @@
           <a:ln/>
         </p:spPr>
         <p:txBody>
-          <a:bodyPr wrap="square" lIns="0" tIns="0" rIns="0" bIns="0" rtlCol="0" anchor="ctr"/>
+          <a:bodyPr wrap="square" lIns="0" tIns="0" rIns="0" bIns="0" rtlCol="0" anchor="ctr">
+            <a:normAutofit/>
+          </a:bodyPr>
           <a:lstStyle/>
           <a:p>
             <a:pPr indent="0" marL="0">
@@ -10667,7 +10729,7 @@
         </p:nvSpPr>
         <p:spPr>
           <a:xfrm>
-            <a:off x="502920" y="2450592"/>
+            <a:off x="566928" y="2450592"/>
             <a:ext cx="6858000" cy="0"/>
           </a:xfrm>
           <a:prstGeom prst="line">
@@ -10690,7 +10752,7 @@
         </p:nvSpPr>
         <p:spPr>
           <a:xfrm>
-            <a:off x="502920" y="2450592"/>
+            <a:off x="566928" y="2450592"/>
             <a:ext cx="1920240" cy="402336"/>
           </a:xfrm>
           <a:prstGeom prst="rect">
@@ -10700,7 +10762,9 @@
           <a:ln/>
         </p:spPr>
         <p:txBody>
-          <a:bodyPr wrap="square" lIns="0" tIns="0" rIns="0" bIns="0" rtlCol="0" anchor="ctr"/>
+          <a:bodyPr wrap="square" lIns="0" tIns="0" rIns="0" bIns="0" rtlCol="0" anchor="ctr">
+            <a:normAutofit/>
+          </a:bodyPr>
           <a:lstStyle/>
           <a:p>
             <a:pPr indent="0" marL="0">
@@ -10732,7 +10796,7 @@
         </p:nvSpPr>
         <p:spPr>
           <a:xfrm>
-            <a:off x="2423160" y="2450592"/>
+            <a:off x="2487168" y="2450592"/>
             <a:ext cx="4937760" cy="402336"/>
           </a:xfrm>
           <a:prstGeom prst="rect">
@@ -10742,7 +10806,9 @@
           <a:ln/>
         </p:spPr>
         <p:txBody>
-          <a:bodyPr wrap="square" lIns="0" tIns="0" rIns="0" bIns="0" rtlCol="0" anchor="ctr"/>
+          <a:bodyPr wrap="square" lIns="0" tIns="0" rIns="0" bIns="0" rtlCol="0" anchor="ctr">
+            <a:normAutofit/>
+          </a:bodyPr>
           <a:lstStyle/>
           <a:p>
             <a:pPr indent="0" marL="0">
@@ -10774,7 +10840,7 @@
         </p:nvSpPr>
         <p:spPr>
           <a:xfrm>
-            <a:off x="7540600" y="1371600"/>
+            <a:off x="7604608" y="1371600"/>
             <a:ext cx="0" cy="4754880"/>
           </a:xfrm>
           <a:prstGeom prst="line">
@@ -10797,7 +10863,7 @@
         </p:nvSpPr>
         <p:spPr>
           <a:xfrm>
-            <a:off x="7720279" y="1645920"/>
+            <a:off x="7784287" y="1645920"/>
             <a:ext cx="3840480" cy="1645920"/>
           </a:xfrm>
           <a:prstGeom prst="roundRect">
@@ -10819,7 +10885,7 @@
         </p:nvSpPr>
         <p:spPr>
           <a:xfrm>
-            <a:off x="7720279" y="1700784"/>
+            <a:off x="7784287" y="1700784"/>
             <a:ext cx="36576" cy="1536192"/>
           </a:xfrm>
           <a:prstGeom prst="rect">
@@ -10839,7 +10905,7 @@
         </p:nvSpPr>
         <p:spPr>
           <a:xfrm>
-            <a:off x="7866583" y="1737360"/>
+            <a:off x="7930591" y="1737360"/>
             <a:ext cx="3584448" cy="201168"/>
           </a:xfrm>
           <a:prstGeom prst="rect">
@@ -10867,7 +10933,7 @@
         </p:nvSpPr>
         <p:spPr>
           <a:xfrm>
-            <a:off x="7866583" y="1938528"/>
+            <a:off x="7930591" y="1938528"/>
             <a:ext cx="3584448" cy="1316736"/>
           </a:xfrm>
           <a:prstGeom prst="rect">
@@ -10909,7 +10975,7 @@
         </p:nvSpPr>
         <p:spPr>
           <a:xfrm>
-            <a:off x="502920" y="6382512"/>
+            <a:off x="566928" y="6382512"/>
             <a:ext cx="7315200" cy="219456"/>
           </a:xfrm>
           <a:prstGeom prst="rect">
@@ -10948,7 +11014,7 @@
         </p:nvSpPr>
         <p:spPr>
           <a:xfrm>
-            <a:off x="10774375" y="6382512"/>
+            <a:off x="10710367" y="6382512"/>
             <a:ext cx="914400" cy="219456"/>
           </a:xfrm>
           <a:prstGeom prst="rect">
@@ -11019,7 +11085,7 @@
         </p:nvSpPr>
         <p:spPr>
           <a:xfrm>
-            <a:off x="502920" y="457200"/>
+            <a:off x="566928" y="457200"/>
             <a:ext cx="384048" cy="384048"/>
           </a:xfrm>
           <a:prstGeom prst="ellipse">
@@ -11039,7 +11105,7 @@
         </p:nvSpPr>
         <p:spPr>
           <a:xfrm>
-            <a:off x="502920" y="457200"/>
+            <a:off x="566928" y="457200"/>
             <a:ext cx="384048" cy="384048"/>
           </a:xfrm>
           <a:prstGeom prst="rect">
@@ -11078,7 +11144,7 @@
         </p:nvSpPr>
         <p:spPr>
           <a:xfrm>
-            <a:off x="1069848" y="457200"/>
+            <a:off x="1133856" y="457200"/>
             <a:ext cx="10490911" cy="182880"/>
           </a:xfrm>
           <a:prstGeom prst="rect">
@@ -11117,7 +11183,7 @@
         </p:nvSpPr>
         <p:spPr>
           <a:xfrm>
-            <a:off x="1069848" y="640080"/>
+            <a:off x="1133856" y="640080"/>
             <a:ext cx="10490911" cy="365760"/>
           </a:xfrm>
           <a:prstGeom prst="rect">
@@ -11127,7 +11193,9 @@
           <a:ln/>
         </p:spPr>
         <p:txBody>
-          <a:bodyPr wrap="square" lIns="0" tIns="0" rIns="0" bIns="0" rtlCol="0" anchor="ctr"/>
+          <a:bodyPr wrap="square" lIns="0" tIns="0" rIns="0" bIns="0" rtlCol="0" anchor="ctr">
+            <a:normAutofit/>
+          </a:bodyPr>
           <a:lstStyle/>
           <a:p>
             <a:pPr indent="0" marL="0">
@@ -11163,7 +11231,7 @@
           </p:nvPr>
         </p:nvGraphicFramePr>
         <p:xfrm>
-          <a:off x="502920" y="1645920"/>
+          <a:off x="566928" y="1645920"/>
           <a:ext cx="11057839" cy="914400"/>
         </p:xfrm>
         <a:graphic>
@@ -11182,7 +11250,7 @@
                     <a:bodyPr/>
                     <a:lstStyle/>
                     <a:p>
-                      <a:pPr indent="0" marL="0">
+                      <a:pPr algn="ctr" indent="0" marL="0">
                         <a:buNone/>
                       </a:pPr>
                       <a:r>
@@ -11250,7 +11318,7 @@
                     <a:bodyPr/>
                     <a:lstStyle/>
                     <a:p>
-                      <a:pPr indent="0" marL="0">
+                      <a:pPr algn="l" indent="0" marL="0">
                         <a:buNone/>
                       </a:pPr>
                       <a:r>
@@ -11318,7 +11386,7 @@
                     <a:bodyPr/>
                     <a:lstStyle/>
                     <a:p>
-                      <a:pPr indent="0" marL="0">
+                      <a:pPr algn="r" indent="0" marL="0">
                         <a:buNone/>
                       </a:pPr>
                       <a:r>
@@ -11386,7 +11454,7 @@
                     <a:bodyPr/>
                     <a:lstStyle/>
                     <a:p>
-                      <a:pPr indent="0" marL="0">
+                      <a:pPr algn="r" indent="0" marL="0">
                         <a:buNone/>
                       </a:pPr>
                       <a:r>
@@ -11456,7 +11524,7 @@
                     <a:bodyPr/>
                     <a:lstStyle/>
                     <a:p>
-                      <a:pPr indent="0" marL="0">
+                      <a:pPr algn="ctr" indent="0" marL="0">
                         <a:buNone/>
                       </a:pPr>
                       <a:r>
@@ -11524,7 +11592,7 @@
                     <a:bodyPr/>
                     <a:lstStyle/>
                     <a:p>
-                      <a:pPr indent="0" marL="0">
+                      <a:pPr algn="l" indent="0" marL="0">
                         <a:buNone/>
                       </a:pPr>
                       <a:r>
@@ -11592,7 +11660,7 @@
                     <a:bodyPr/>
                     <a:lstStyle/>
                     <a:p>
-                      <a:pPr indent="0" marL="0">
+                      <a:pPr algn="r" indent="0" marL="0">
                         <a:buNone/>
                       </a:pPr>
                       <a:r>
@@ -11660,7 +11728,7 @@
                     <a:bodyPr/>
                     <a:lstStyle/>
                     <a:p>
-                      <a:pPr indent="0" marL="0">
+                      <a:pPr algn="r" indent="0" marL="0">
                         <a:buNone/>
                       </a:pPr>
                       <a:r>
@@ -11730,7 +11798,7 @@
                     <a:bodyPr/>
                     <a:lstStyle/>
                     <a:p>
-                      <a:pPr indent="0" marL="0">
+                      <a:pPr algn="ctr" indent="0" marL="0">
                         <a:buNone/>
                       </a:pPr>
                       <a:r>
@@ -11798,7 +11866,7 @@
                     <a:bodyPr/>
                     <a:lstStyle/>
                     <a:p>
-                      <a:pPr indent="0" marL="0">
+                      <a:pPr algn="l" indent="0" marL="0">
                         <a:buNone/>
                       </a:pPr>
                       <a:r>
@@ -11866,7 +11934,7 @@
                     <a:bodyPr/>
                     <a:lstStyle/>
                     <a:p>
-                      <a:pPr indent="0" marL="0">
+                      <a:pPr algn="r" indent="0" marL="0">
                         <a:buNone/>
                       </a:pPr>
                       <a:r>
@@ -11934,7 +12002,7 @@
                     <a:bodyPr/>
                     <a:lstStyle/>
                     <a:p>
-                      <a:pPr indent="0" marL="0">
+                      <a:pPr algn="r" indent="0" marL="0">
                         <a:buNone/>
                       </a:pPr>
                       <a:r>
@@ -12010,7 +12078,7 @@
         </p:nvSpPr>
         <p:spPr>
           <a:xfrm>
-            <a:off x="502920" y="6382512"/>
+            <a:off x="566928" y="6382512"/>
             <a:ext cx="7315200" cy="219456"/>
           </a:xfrm>
           <a:prstGeom prst="rect">
@@ -12049,7 +12117,7 @@
         </p:nvSpPr>
         <p:spPr>
           <a:xfrm>
-            <a:off x="10774375" y="6382512"/>
+            <a:off x="10710367" y="6382512"/>
             <a:ext cx="914400" cy="219456"/>
           </a:xfrm>
           <a:prstGeom prst="rect">
@@ -12120,7 +12188,7 @@
         </p:nvSpPr>
         <p:spPr>
           <a:xfrm>
-            <a:off x="502920" y="457200"/>
+            <a:off x="566928" y="457200"/>
             <a:ext cx="384048" cy="384048"/>
           </a:xfrm>
           <a:prstGeom prst="ellipse">
@@ -12140,7 +12208,7 @@
         </p:nvSpPr>
         <p:spPr>
           <a:xfrm>
-            <a:off x="502920" y="457200"/>
+            <a:off x="566928" y="457200"/>
             <a:ext cx="384048" cy="384048"/>
           </a:xfrm>
           <a:prstGeom prst="rect">
@@ -12179,7 +12247,7 @@
         </p:nvSpPr>
         <p:spPr>
           <a:xfrm>
-            <a:off x="1069848" y="457200"/>
+            <a:off x="1133856" y="457200"/>
             <a:ext cx="10490911" cy="182880"/>
           </a:xfrm>
           <a:prstGeom prst="rect">
@@ -12218,7 +12286,7 @@
         </p:nvSpPr>
         <p:spPr>
           <a:xfrm>
-            <a:off x="1069848" y="640080"/>
+            <a:off x="1133856" y="640080"/>
             <a:ext cx="10490911" cy="365760"/>
           </a:xfrm>
           <a:prstGeom prst="rect">
@@ -12228,7 +12296,9 @@
           <a:ln/>
         </p:spPr>
         <p:txBody>
-          <a:bodyPr wrap="square" lIns="0" tIns="0" rIns="0" bIns="0" rtlCol="0" anchor="ctr"/>
+          <a:bodyPr wrap="square" lIns="0" tIns="0" rIns="0" bIns="0" rtlCol="0" anchor="ctr">
+            <a:normAutofit/>
+          </a:bodyPr>
           <a:lstStyle/>
           <a:p>
             <a:pPr indent="0" marL="0">
@@ -12257,7 +12327,7 @@
         </p:nvSpPr>
         <p:spPr>
           <a:xfrm>
-            <a:off x="502920" y="1371600"/>
+            <a:off x="566928" y="1371600"/>
             <a:ext cx="6858000" cy="237744"/>
           </a:xfrm>
           <a:prstGeom prst="rect">
@@ -12296,7 +12366,7 @@
         </p:nvSpPr>
         <p:spPr>
           <a:xfrm>
-            <a:off x="502920" y="1645920"/>
+            <a:off x="566928" y="1645920"/>
             <a:ext cx="1920240" cy="402336"/>
           </a:xfrm>
           <a:prstGeom prst="rect">
@@ -12306,7 +12376,9 @@
           <a:ln/>
         </p:spPr>
         <p:txBody>
-          <a:bodyPr wrap="square" lIns="0" tIns="0" rIns="0" bIns="0" rtlCol="0" anchor="ctr"/>
+          <a:bodyPr wrap="square" lIns="0" tIns="0" rIns="0" bIns="0" rtlCol="0" anchor="ctr">
+            <a:normAutofit/>
+          </a:bodyPr>
           <a:lstStyle/>
           <a:p>
             <a:pPr indent="0" marL="0">
@@ -12338,7 +12410,7 @@
         </p:nvSpPr>
         <p:spPr>
           <a:xfrm>
-            <a:off x="2423160" y="1645920"/>
+            <a:off x="2487168" y="1645920"/>
             <a:ext cx="4937760" cy="402336"/>
           </a:xfrm>
           <a:prstGeom prst="rect">
@@ -12348,7 +12420,9 @@
           <a:ln/>
         </p:spPr>
         <p:txBody>
-          <a:bodyPr wrap="square" lIns="0" tIns="0" rIns="0" bIns="0" rtlCol="0" anchor="ctr"/>
+          <a:bodyPr wrap="square" lIns="0" tIns="0" rIns="0" bIns="0" rtlCol="0" anchor="ctr">
+            <a:normAutofit/>
+          </a:bodyPr>
           <a:lstStyle/>
           <a:p>
             <a:pPr indent="0" marL="0">
@@ -12380,7 +12454,7 @@
         </p:nvSpPr>
         <p:spPr>
           <a:xfrm>
-            <a:off x="502920" y="2048256"/>
+            <a:off x="566928" y="2048256"/>
             <a:ext cx="6858000" cy="0"/>
           </a:xfrm>
           <a:prstGeom prst="line">
@@ -12403,7 +12477,7 @@
         </p:nvSpPr>
         <p:spPr>
           <a:xfrm>
-            <a:off x="502920" y="2048256"/>
+            <a:off x="566928" y="2048256"/>
             <a:ext cx="1920240" cy="402336"/>
           </a:xfrm>
           <a:prstGeom prst="rect">
@@ -12413,7 +12487,9 @@
           <a:ln/>
         </p:spPr>
         <p:txBody>
-          <a:bodyPr wrap="square" lIns="0" tIns="0" rIns="0" bIns="0" rtlCol="0" anchor="ctr"/>
+          <a:bodyPr wrap="square" lIns="0" tIns="0" rIns="0" bIns="0" rtlCol="0" anchor="ctr">
+            <a:normAutofit/>
+          </a:bodyPr>
           <a:lstStyle/>
           <a:p>
             <a:pPr indent="0" marL="0">
@@ -12445,7 +12521,7 @@
         </p:nvSpPr>
         <p:spPr>
           <a:xfrm>
-            <a:off x="2423160" y="2048256"/>
+            <a:off x="2487168" y="2048256"/>
             <a:ext cx="4937760" cy="402336"/>
           </a:xfrm>
           <a:prstGeom prst="rect">
@@ -12455,7 +12531,9 @@
           <a:ln/>
         </p:spPr>
         <p:txBody>
-          <a:bodyPr wrap="square" lIns="0" tIns="0" rIns="0" bIns="0" rtlCol="0" anchor="ctr"/>
+          <a:bodyPr wrap="square" lIns="0" tIns="0" rIns="0" bIns="0" rtlCol="0" anchor="ctr">
+            <a:normAutofit/>
+          </a:bodyPr>
           <a:lstStyle/>
           <a:p>
             <a:pPr indent="0" marL="0">
@@ -12487,7 +12565,7 @@
         </p:nvSpPr>
         <p:spPr>
           <a:xfrm>
-            <a:off x="7540600" y="1371600"/>
+            <a:off x="7604608" y="1371600"/>
             <a:ext cx="0" cy="4754880"/>
           </a:xfrm>
           <a:prstGeom prst="line">
@@ -12510,7 +12588,7 @@
         </p:nvSpPr>
         <p:spPr>
           <a:xfrm>
-            <a:off x="7720279" y="1645920"/>
+            <a:off x="7784287" y="1645920"/>
             <a:ext cx="3840480" cy="1645920"/>
           </a:xfrm>
           <a:prstGeom prst="roundRect">
@@ -12532,7 +12610,7 @@
         </p:nvSpPr>
         <p:spPr>
           <a:xfrm>
-            <a:off x="7720279" y="1700784"/>
+            <a:off x="7784287" y="1700784"/>
             <a:ext cx="36576" cy="1536192"/>
           </a:xfrm>
           <a:prstGeom prst="rect">
@@ -12552,7 +12630,7 @@
         </p:nvSpPr>
         <p:spPr>
           <a:xfrm>
-            <a:off x="7866583" y="1737360"/>
+            <a:off x="7930591" y="1737360"/>
             <a:ext cx="3584448" cy="201168"/>
           </a:xfrm>
           <a:prstGeom prst="rect">
@@ -12580,7 +12658,7 @@
         </p:nvSpPr>
         <p:spPr>
           <a:xfrm>
-            <a:off x="7866583" y="1938528"/>
+            <a:off x="7930591" y="1938528"/>
             <a:ext cx="3584448" cy="1316736"/>
           </a:xfrm>
           <a:prstGeom prst="rect">
@@ -12622,7 +12700,7 @@
         </p:nvSpPr>
         <p:spPr>
           <a:xfrm>
-            <a:off x="502920" y="6382512"/>
+            <a:off x="566928" y="6382512"/>
             <a:ext cx="7315200" cy="219456"/>
           </a:xfrm>
           <a:prstGeom prst="rect">
@@ -12661,7 +12739,7 @@
         </p:nvSpPr>
         <p:spPr>
           <a:xfrm>
-            <a:off x="10774375" y="6382512"/>
+            <a:off x="10710367" y="6382512"/>
             <a:ext cx="914400" cy="219456"/>
           </a:xfrm>
           <a:prstGeom prst="rect">
@@ -12732,7 +12810,7 @@
         </p:nvSpPr>
         <p:spPr>
           <a:xfrm>
-            <a:off x="502920" y="457200"/>
+            <a:off x="566928" y="457200"/>
             <a:ext cx="384048" cy="384048"/>
           </a:xfrm>
           <a:prstGeom prst="ellipse">
@@ -12752,7 +12830,7 @@
         </p:nvSpPr>
         <p:spPr>
           <a:xfrm>
-            <a:off x="502920" y="457200"/>
+            <a:off x="566928" y="457200"/>
             <a:ext cx="384048" cy="384048"/>
           </a:xfrm>
           <a:prstGeom prst="rect">
@@ -12791,7 +12869,7 @@
         </p:nvSpPr>
         <p:spPr>
           <a:xfrm>
-            <a:off x="1069848" y="457200"/>
+            <a:off x="1133856" y="457200"/>
             <a:ext cx="10490911" cy="182880"/>
           </a:xfrm>
           <a:prstGeom prst="rect">
@@ -12830,7 +12908,7 @@
         </p:nvSpPr>
         <p:spPr>
           <a:xfrm>
-            <a:off x="1069848" y="640080"/>
+            <a:off x="1133856" y="640080"/>
             <a:ext cx="10490911" cy="365760"/>
           </a:xfrm>
           <a:prstGeom prst="rect">
@@ -12840,7 +12918,9 @@
           <a:ln/>
         </p:spPr>
         <p:txBody>
-          <a:bodyPr wrap="square" lIns="0" tIns="0" rIns="0" bIns="0" rtlCol="0" anchor="ctr"/>
+          <a:bodyPr wrap="square" lIns="0" tIns="0" rIns="0" bIns="0" rtlCol="0" anchor="ctr">
+            <a:normAutofit/>
+          </a:bodyPr>
           <a:lstStyle/>
           <a:p>
             <a:pPr indent="0" marL="0">
@@ -12869,7 +12949,7 @@
         </p:nvSpPr>
         <p:spPr>
           <a:xfrm>
-            <a:off x="502920" y="1417320"/>
+            <a:off x="566928" y="1417320"/>
             <a:ext cx="5391760" cy="4389120"/>
           </a:xfrm>
           <a:prstGeom prst="roundRect">
@@ -12896,7 +12976,7 @@
         </p:nvSpPr>
         <p:spPr>
           <a:xfrm>
-            <a:off x="731520" y="1618488"/>
+            <a:off x="795528" y="1618488"/>
             <a:ext cx="4934560" cy="320040"/>
           </a:xfrm>
           <a:prstGeom prst="rect">
@@ -12935,7 +13015,7 @@
         </p:nvSpPr>
         <p:spPr>
           <a:xfrm>
-            <a:off x="731520" y="2011680"/>
+            <a:off x="795528" y="2011680"/>
             <a:ext cx="2269897" cy="475488"/>
           </a:xfrm>
           <a:prstGeom prst="rect">
@@ -12945,7 +13025,9 @@
           <a:ln/>
         </p:spPr>
         <p:txBody>
-          <a:bodyPr wrap="square" lIns="0" tIns="0" rIns="0" bIns="0" rtlCol="0" anchor="ctr"/>
+          <a:bodyPr wrap="square" lIns="0" tIns="0" rIns="0" bIns="0" rtlCol="0" anchor="ctr">
+            <a:normAutofit/>
+          </a:bodyPr>
           <a:lstStyle/>
           <a:p>
             <a:pPr indent="0" marL="0">
@@ -12977,7 +13059,7 @@
         </p:nvSpPr>
         <p:spPr>
           <a:xfrm>
-            <a:off x="3001417" y="2011680"/>
+            <a:off x="3065425" y="2011680"/>
             <a:ext cx="2664662" cy="475488"/>
           </a:xfrm>
           <a:prstGeom prst="rect">
@@ -12987,7 +13069,9 @@
           <a:ln/>
         </p:spPr>
         <p:txBody>
-          <a:bodyPr wrap="square" lIns="0" tIns="0" rIns="0" bIns="0" rtlCol="0" anchor="ctr"/>
+          <a:bodyPr wrap="square" lIns="0" tIns="0" rIns="0" bIns="0" rtlCol="0" anchor="ctr">
+            <a:normAutofit/>
+          </a:bodyPr>
           <a:lstStyle/>
           <a:p>
             <a:pPr indent="0" marL="0">
@@ -13019,7 +13103,7 @@
         </p:nvSpPr>
         <p:spPr>
           <a:xfrm>
-            <a:off x="731520" y="2487168"/>
+            <a:off x="795528" y="2487168"/>
             <a:ext cx="4934560" cy="0"/>
           </a:xfrm>
           <a:prstGeom prst="line">
@@ -13042,7 +13126,7 @@
         </p:nvSpPr>
         <p:spPr>
           <a:xfrm>
-            <a:off x="731520" y="2487168"/>
+            <a:off x="795528" y="2487168"/>
             <a:ext cx="2269897" cy="475488"/>
           </a:xfrm>
           <a:prstGeom prst="rect">
@@ -13052,7 +13136,9 @@
           <a:ln/>
         </p:spPr>
         <p:txBody>
-          <a:bodyPr wrap="square" lIns="0" tIns="0" rIns="0" bIns="0" rtlCol="0" anchor="ctr"/>
+          <a:bodyPr wrap="square" lIns="0" tIns="0" rIns="0" bIns="0" rtlCol="0" anchor="ctr">
+            <a:normAutofit/>
+          </a:bodyPr>
           <a:lstStyle/>
           <a:p>
             <a:pPr indent="0" marL="0">
@@ -13084,7 +13170,7 @@
         </p:nvSpPr>
         <p:spPr>
           <a:xfrm>
-            <a:off x="3001417" y="2487168"/>
+            <a:off x="3065425" y="2487168"/>
             <a:ext cx="2664662" cy="475488"/>
           </a:xfrm>
           <a:prstGeom prst="rect">
@@ -13094,7 +13180,9 @@
           <a:ln/>
         </p:spPr>
         <p:txBody>
-          <a:bodyPr wrap="square" lIns="0" tIns="0" rIns="0" bIns="0" rtlCol="0" anchor="ctr"/>
+          <a:bodyPr wrap="square" lIns="0" tIns="0" rIns="0" bIns="0" rtlCol="0" anchor="ctr">
+            <a:normAutofit/>
+          </a:bodyPr>
           <a:lstStyle/>
           <a:p>
             <a:pPr indent="0" marL="0">
@@ -13126,7 +13214,7 @@
         </p:nvSpPr>
         <p:spPr>
           <a:xfrm>
-            <a:off x="731520" y="2962656"/>
+            <a:off x="795528" y="2962656"/>
             <a:ext cx="4934560" cy="0"/>
           </a:xfrm>
           <a:prstGeom prst="line">
@@ -13149,7 +13237,7 @@
         </p:nvSpPr>
         <p:spPr>
           <a:xfrm>
-            <a:off x="731520" y="2962656"/>
+            <a:off x="795528" y="2962656"/>
             <a:ext cx="2269897" cy="475488"/>
           </a:xfrm>
           <a:prstGeom prst="rect">
@@ -13159,7 +13247,9 @@
           <a:ln/>
         </p:spPr>
         <p:txBody>
-          <a:bodyPr wrap="square" lIns="0" tIns="0" rIns="0" bIns="0" rtlCol="0" anchor="ctr"/>
+          <a:bodyPr wrap="square" lIns="0" tIns="0" rIns="0" bIns="0" rtlCol="0" anchor="ctr">
+            <a:normAutofit/>
+          </a:bodyPr>
           <a:lstStyle/>
           <a:p>
             <a:pPr indent="0" marL="0">
@@ -13191,7 +13281,7 @@
         </p:nvSpPr>
         <p:spPr>
           <a:xfrm>
-            <a:off x="3001417" y="2962656"/>
+            <a:off x="3065425" y="2962656"/>
             <a:ext cx="2664662" cy="475488"/>
           </a:xfrm>
           <a:prstGeom prst="rect">
@@ -13201,7 +13291,9 @@
           <a:ln/>
         </p:spPr>
         <p:txBody>
-          <a:bodyPr wrap="square" lIns="0" tIns="0" rIns="0" bIns="0" rtlCol="0" anchor="ctr"/>
+          <a:bodyPr wrap="square" lIns="0" tIns="0" rIns="0" bIns="0" rtlCol="0" anchor="ctr">
+            <a:normAutofit/>
+          </a:bodyPr>
           <a:lstStyle/>
           <a:p>
             <a:pPr indent="0" marL="0">
@@ -13233,7 +13325,7 @@
         </p:nvSpPr>
         <p:spPr>
           <a:xfrm>
-            <a:off x="731520" y="3438144"/>
+            <a:off x="795528" y="3438144"/>
             <a:ext cx="4934560" cy="0"/>
           </a:xfrm>
           <a:prstGeom prst="line">
@@ -13256,7 +13348,7 @@
         </p:nvSpPr>
         <p:spPr>
           <a:xfrm>
-            <a:off x="731520" y="3438144"/>
+            <a:off x="795528" y="3438144"/>
             <a:ext cx="2269897" cy="475488"/>
           </a:xfrm>
           <a:prstGeom prst="rect">
@@ -13266,7 +13358,9 @@
           <a:ln/>
         </p:spPr>
         <p:txBody>
-          <a:bodyPr wrap="square" lIns="0" tIns="0" rIns="0" bIns="0" rtlCol="0" anchor="ctr"/>
+          <a:bodyPr wrap="square" lIns="0" tIns="0" rIns="0" bIns="0" rtlCol="0" anchor="ctr">
+            <a:normAutofit/>
+          </a:bodyPr>
           <a:lstStyle/>
           <a:p>
             <a:pPr indent="0" marL="0">
@@ -13298,7 +13392,7 @@
         </p:nvSpPr>
         <p:spPr>
           <a:xfrm>
-            <a:off x="3001417" y="3438144"/>
+            <a:off x="3065425" y="3438144"/>
             <a:ext cx="2664662" cy="475488"/>
           </a:xfrm>
           <a:prstGeom prst="rect">
@@ -13308,7 +13402,9 @@
           <a:ln/>
         </p:spPr>
         <p:txBody>
-          <a:bodyPr wrap="square" lIns="0" tIns="0" rIns="0" bIns="0" rtlCol="0" anchor="ctr"/>
+          <a:bodyPr wrap="square" lIns="0" tIns="0" rIns="0" bIns="0" rtlCol="0" anchor="ctr">
+            <a:normAutofit/>
+          </a:bodyPr>
           <a:lstStyle/>
           <a:p>
             <a:pPr indent="0" marL="0">
@@ -13340,7 +13436,7 @@
         </p:nvSpPr>
         <p:spPr>
           <a:xfrm>
-            <a:off x="731520" y="3913632"/>
+            <a:off x="795528" y="3913632"/>
             <a:ext cx="4934560" cy="0"/>
           </a:xfrm>
           <a:prstGeom prst="line">
@@ -13363,7 +13459,7 @@
         </p:nvSpPr>
         <p:spPr>
           <a:xfrm>
-            <a:off x="731520" y="3913632"/>
+            <a:off x="795528" y="3913632"/>
             <a:ext cx="2269897" cy="475488"/>
           </a:xfrm>
           <a:prstGeom prst="rect">
@@ -13373,7 +13469,9 @@
           <a:ln/>
         </p:spPr>
         <p:txBody>
-          <a:bodyPr wrap="square" lIns="0" tIns="0" rIns="0" bIns="0" rtlCol="0" anchor="ctr"/>
+          <a:bodyPr wrap="square" lIns="0" tIns="0" rIns="0" bIns="0" rtlCol="0" anchor="ctr">
+            <a:normAutofit/>
+          </a:bodyPr>
           <a:lstStyle/>
           <a:p>
             <a:pPr indent="0" marL="0">
@@ -13405,7 +13503,7 @@
         </p:nvSpPr>
         <p:spPr>
           <a:xfrm>
-            <a:off x="3001417" y="3913632"/>
+            <a:off x="3065425" y="3913632"/>
             <a:ext cx="2664662" cy="475488"/>
           </a:xfrm>
           <a:prstGeom prst="rect">
@@ -13415,7 +13513,9 @@
           <a:ln/>
         </p:spPr>
         <p:txBody>
-          <a:bodyPr wrap="square" lIns="0" tIns="0" rIns="0" bIns="0" rtlCol="0" anchor="ctr"/>
+          <a:bodyPr wrap="square" lIns="0" tIns="0" rIns="0" bIns="0" rtlCol="0" anchor="ctr">
+            <a:normAutofit/>
+          </a:bodyPr>
           <a:lstStyle/>
           <a:p>
             <a:pPr indent="0" marL="0">
@@ -13447,7 +13547,7 @@
         </p:nvSpPr>
         <p:spPr>
           <a:xfrm>
-            <a:off x="731520" y="4389120"/>
+            <a:off x="795528" y="4389120"/>
             <a:ext cx="4934560" cy="0"/>
           </a:xfrm>
           <a:prstGeom prst="line">
@@ -13470,7 +13570,7 @@
         </p:nvSpPr>
         <p:spPr>
           <a:xfrm>
-            <a:off x="731520" y="4389120"/>
+            <a:off x="795528" y="4389120"/>
             <a:ext cx="2269897" cy="475488"/>
           </a:xfrm>
           <a:prstGeom prst="rect">
@@ -13480,7 +13580,9 @@
           <a:ln/>
         </p:spPr>
         <p:txBody>
-          <a:bodyPr wrap="square" lIns="0" tIns="0" rIns="0" bIns="0" rtlCol="0" anchor="ctr"/>
+          <a:bodyPr wrap="square" lIns="0" tIns="0" rIns="0" bIns="0" rtlCol="0" anchor="ctr">
+            <a:normAutofit/>
+          </a:bodyPr>
           <a:lstStyle/>
           <a:p>
             <a:pPr indent="0" marL="0">
@@ -13512,7 +13614,7 @@
         </p:nvSpPr>
         <p:spPr>
           <a:xfrm>
-            <a:off x="3001417" y="4389120"/>
+            <a:off x="3065425" y="4389120"/>
             <a:ext cx="2664662" cy="475488"/>
           </a:xfrm>
           <a:prstGeom prst="rect">
@@ -13522,7 +13624,9 @@
           <a:ln/>
         </p:spPr>
         <p:txBody>
-          <a:bodyPr wrap="square" lIns="0" tIns="0" rIns="0" bIns="0" rtlCol="0" anchor="ctr"/>
+          <a:bodyPr wrap="square" lIns="0" tIns="0" rIns="0" bIns="0" rtlCol="0" anchor="ctr">
+            <a:normAutofit/>
+          </a:bodyPr>
           <a:lstStyle/>
           <a:p>
             <a:pPr indent="0" marL="0">
@@ -13554,7 +13658,7 @@
         </p:nvSpPr>
         <p:spPr>
           <a:xfrm>
-            <a:off x="731520" y="4864608"/>
+            <a:off x="795528" y="4864608"/>
             <a:ext cx="4934560" cy="0"/>
           </a:xfrm>
           <a:prstGeom prst="line">
@@ -13577,7 +13681,7 @@
         </p:nvSpPr>
         <p:spPr>
           <a:xfrm>
-            <a:off x="731520" y="4864608"/>
+            <a:off x="795528" y="4864608"/>
             <a:ext cx="2269897" cy="475488"/>
           </a:xfrm>
           <a:prstGeom prst="rect">
@@ -13587,7 +13691,9 @@
           <a:ln/>
         </p:spPr>
         <p:txBody>
-          <a:bodyPr wrap="square" lIns="0" tIns="0" rIns="0" bIns="0" rtlCol="0" anchor="ctr"/>
+          <a:bodyPr wrap="square" lIns="0" tIns="0" rIns="0" bIns="0" rtlCol="0" anchor="ctr">
+            <a:normAutofit/>
+          </a:bodyPr>
           <a:lstStyle/>
           <a:p>
             <a:pPr indent="0" marL="0">
@@ -13619,7 +13725,7 @@
         </p:nvSpPr>
         <p:spPr>
           <a:xfrm>
-            <a:off x="3001417" y="4864608"/>
+            <a:off x="3065425" y="4864608"/>
             <a:ext cx="2664662" cy="475488"/>
           </a:xfrm>
           <a:prstGeom prst="rect">
@@ -13629,7 +13735,9 @@
           <a:ln/>
         </p:spPr>
         <p:txBody>
-          <a:bodyPr wrap="square" lIns="0" tIns="0" rIns="0" bIns="0" rtlCol="0" anchor="ctr"/>
+          <a:bodyPr wrap="square" lIns="0" tIns="0" rIns="0" bIns="0" rtlCol="0" anchor="ctr">
+            <a:normAutofit/>
+          </a:bodyPr>
           <a:lstStyle/>
           <a:p>
             <a:pPr indent="0" marL="0">
@@ -13661,7 +13769,7 @@
         </p:nvSpPr>
         <p:spPr>
           <a:xfrm>
-            <a:off x="6169000" y="1417320"/>
+            <a:off x="6233008" y="1417320"/>
             <a:ext cx="5391760" cy="4389120"/>
           </a:xfrm>
           <a:prstGeom prst="roundRect">
@@ -13688,7 +13796,7 @@
         </p:nvSpPr>
         <p:spPr>
           <a:xfrm>
-            <a:off x="6397600" y="1618488"/>
+            <a:off x="6461608" y="1618488"/>
             <a:ext cx="4934560" cy="320040"/>
           </a:xfrm>
           <a:prstGeom prst="rect">
@@ -13734,7 +13842,7 @@
           </p:nvPr>
         </p:nvGraphicFramePr>
         <p:xfrm>
-          <a:off x="6397600" y="2057400"/>
+          <a:off x="6461608" y="2057400"/>
           <a:ext cx="4934560" cy="914400"/>
         </p:xfrm>
         <a:graphic>
@@ -15241,7 +15349,7 @@
         </p:nvSpPr>
         <p:spPr>
           <a:xfrm>
-            <a:off x="6397600" y="4069080"/>
+            <a:off x="6461608" y="4069080"/>
             <a:ext cx="4934560" cy="1463040"/>
           </a:xfrm>
           <a:prstGeom prst="roundRect">
@@ -15263,7 +15371,7 @@
         </p:nvSpPr>
         <p:spPr>
           <a:xfrm>
-            <a:off x="6397600" y="4123944"/>
+            <a:off x="6461608" y="4123944"/>
             <a:ext cx="36576" cy="1353312"/>
           </a:xfrm>
           <a:prstGeom prst="rect">
@@ -15283,7 +15391,7 @@
         </p:nvSpPr>
         <p:spPr>
           <a:xfrm>
-            <a:off x="6543904" y="4160520"/>
+            <a:off x="6607912" y="4160520"/>
             <a:ext cx="4678528" cy="201168"/>
           </a:xfrm>
           <a:prstGeom prst="rect">
@@ -15322,7 +15430,7 @@
         </p:nvSpPr>
         <p:spPr>
           <a:xfrm>
-            <a:off x="6543904" y="4361688"/>
+            <a:off x="6607912" y="4361688"/>
             <a:ext cx="4678528" cy="1133856"/>
           </a:xfrm>
           <a:prstGeom prst="rect">
@@ -15364,7 +15472,7 @@
         </p:nvSpPr>
         <p:spPr>
           <a:xfrm>
-            <a:off x="502920" y="6382512"/>
+            <a:off x="566928" y="6382512"/>
             <a:ext cx="7315200" cy="219456"/>
           </a:xfrm>
           <a:prstGeom prst="rect">
@@ -15403,7 +15511,7 @@
         </p:nvSpPr>
         <p:spPr>
           <a:xfrm>
-            <a:off x="10774375" y="6382512"/>
+            <a:off x="10710367" y="6382512"/>
             <a:ext cx="914400" cy="219456"/>
           </a:xfrm>
           <a:prstGeom prst="rect">
@@ -15474,7 +15582,7 @@
         </p:nvSpPr>
         <p:spPr>
           <a:xfrm>
-            <a:off x="502920" y="457200"/>
+            <a:off x="566928" y="457200"/>
             <a:ext cx="384048" cy="384048"/>
           </a:xfrm>
           <a:prstGeom prst="ellipse">
@@ -15494,7 +15602,7 @@
         </p:nvSpPr>
         <p:spPr>
           <a:xfrm>
-            <a:off x="502920" y="457200"/>
+            <a:off x="566928" y="457200"/>
             <a:ext cx="384048" cy="384048"/>
           </a:xfrm>
           <a:prstGeom prst="rect">
@@ -15533,7 +15641,7 @@
         </p:nvSpPr>
         <p:spPr>
           <a:xfrm>
-            <a:off x="1069848" y="457200"/>
+            <a:off x="1133856" y="457200"/>
             <a:ext cx="10490911" cy="182880"/>
           </a:xfrm>
           <a:prstGeom prst="rect">
@@ -15572,7 +15680,7 @@
         </p:nvSpPr>
         <p:spPr>
           <a:xfrm>
-            <a:off x="1069848" y="640080"/>
+            <a:off x="1133856" y="640080"/>
             <a:ext cx="10490911" cy="365760"/>
           </a:xfrm>
           <a:prstGeom prst="rect">
@@ -15582,7 +15690,9 @@
           <a:ln/>
         </p:spPr>
         <p:txBody>
-          <a:bodyPr wrap="square" lIns="0" tIns="0" rIns="0" bIns="0" rtlCol="0" anchor="ctr"/>
+          <a:bodyPr wrap="square" lIns="0" tIns="0" rIns="0" bIns="0" rtlCol="0" anchor="ctr">
+            <a:normAutofit/>
+          </a:bodyPr>
           <a:lstStyle/>
           <a:p>
             <a:pPr indent="0" marL="0">
@@ -15611,7 +15721,7 @@
         </p:nvSpPr>
         <p:spPr>
           <a:xfrm>
-            <a:off x="502920" y="1325880"/>
+            <a:off x="566928" y="1325880"/>
             <a:ext cx="11057839" cy="0"/>
           </a:xfrm>
           <a:prstGeom prst="line">
@@ -15634,7 +15744,7 @@
         </p:nvSpPr>
         <p:spPr>
           <a:xfrm>
-            <a:off x="502920" y="6382512"/>
+            <a:off x="566928" y="6382512"/>
             <a:ext cx="7315200" cy="219456"/>
           </a:xfrm>
           <a:prstGeom prst="rect">
@@ -15673,7 +15783,7 @@
         </p:nvSpPr>
         <p:spPr>
           <a:xfrm>
-            <a:off x="10774375" y="6382512"/>
+            <a:off x="10710367" y="6382512"/>
             <a:ext cx="914400" cy="219456"/>
           </a:xfrm>
           <a:prstGeom prst="rect">

--- a/docs/test/stress/e2e-outputs/income_pro_pr02.pptx
+++ b/docs/test/stress/e2e-outputs/income_pro_pr02.pptx
@@ -2374,10 +2374,15 @@
           <a:ln/>
         </p:spPr>
         <p:txBody>
-          <a:bodyPr wrap="square" lIns="0" tIns="0" rIns="0" bIns="0" rtlCol="0" anchor="ctr"/>
+          <a:bodyPr wrap="square" lIns="0" tIns="0" rIns="0" bIns="0" rtlCol="0" anchor="ctr">
+            <a:normAutofit/>
+          </a:bodyPr>
           <a:lstStyle/>
           <a:p>
             <a:pPr algn="l" indent="0" marL="0">
+              <a:lnSpc>
+                <a:spcPct val="100000"/>
+              </a:lnSpc>
               <a:buNone/>
             </a:pPr>
             <a:r>
@@ -8115,7 +8120,7 @@
               <a:buNone/>
             </a:pPr>
             <a:r>
-              <a:rPr lang="en-US" sz="850" dirty="0">
+              <a:rPr lang="en-US" sz="950" dirty="0">
                 <a:solidFill>
                   <a:srgbClr val="718096"/>
                 </a:solidFill>
@@ -8123,9 +8128,9 @@
                 <a:ea typeface="Pretendard" pitchFamily="34" charset="-122"/>
                 <a:cs typeface="Pretendard" pitchFamily="34" charset="-120"/>
               </a:rPr>
-              <a:t>연 수익률(Cap Rate)</a:t>
-            </a:r>
-            <a:endParaRPr lang="en-US" sz="850" dirty="0"/>
+              <a:t>연 수익률</a:t>
+            </a:r>
+            <a:endParaRPr lang="en-US" sz="950" dirty="0"/>
           </a:p>
         </p:txBody>
       </p:sp>
@@ -8227,7 +8232,7 @@
               <a:buNone/>
             </a:pPr>
             <a:r>
-              <a:rPr lang="en-US" sz="950" dirty="0">
+              <a:rPr lang="en-US" sz="850" dirty="0">
                 <a:solidFill>
                   <a:srgbClr val="718096"/>
                 </a:solidFill>
@@ -8235,9 +8240,9 @@
                 <a:ea typeface="Pretendard" pitchFamily="34" charset="-122"/>
                 <a:cs typeface="Pretendard" pitchFamily="34" charset="-120"/>
               </a:rPr>
-              <a:t>실투자금</a:t>
-            </a:r>
-            <a:endParaRPr lang="en-US" sz="950" dirty="0"/>
+              <a:t>실투자금 (취득비용 포함)</a:t>
+            </a:r>
+            <a:endParaRPr lang="en-US" sz="850" dirty="0"/>
           </a:p>
         </p:txBody>
       </p:sp>
@@ -8387,11 +8392,11 @@
                 <a:solidFill>
                   <a:srgbClr val="10161F"/>
                 </a:solidFill>
-                <a:latin typeface="Pretendard" pitchFamily="34" charset="0"/>
-                <a:ea typeface="Pretendard" pitchFamily="34" charset="-122"/>
-                <a:cs typeface="Pretendard" pitchFamily="34" charset="-120"/>
-              </a:rPr>
-              <a:t>확인 중</a:t>
+                <a:latin typeface="Arial" pitchFamily="34" charset="0"/>
+                <a:ea typeface="Arial" pitchFamily="34" charset="-122"/>
+                <a:cs typeface="Arial" pitchFamily="34" charset="-120"/>
+              </a:rPr>
+              <a:t>-</a:t>
             </a:r>
             <a:endParaRPr lang="en-US" sz="2200" dirty="0"/>
           </a:p>
@@ -8547,7 +8552,9 @@
           <a:ln/>
         </p:spPr>
         <p:txBody>
-          <a:bodyPr wrap="square" lIns="0" tIns="0" rIns="0" bIns="0" rtlCol="0" anchor="ctr"/>
+          <a:bodyPr wrap="square" lIns="0" tIns="0" rIns="0" bIns="0" rtlCol="0" anchor="ctr">
+            <a:normAutofit/>
+          </a:bodyPr>
           <a:lstStyle/>
           <a:p>
             <a:pPr indent="0" marL="0">
@@ -8679,7 +8686,9 @@
           <a:ln/>
         </p:spPr>
         <p:txBody>
-          <a:bodyPr wrap="square" lIns="0" tIns="0" rIns="0" bIns="0" rtlCol="0" anchor="ctr"/>
+          <a:bodyPr wrap="square" lIns="0" tIns="0" rIns="0" bIns="0" rtlCol="0" anchor="ctr">
+            <a:normAutofit/>
+          </a:bodyPr>
           <a:lstStyle/>
           <a:p>
             <a:pPr indent="0" marL="0">
@@ -8694,7 +8703,7 @@
                 <a:ea typeface="Pretendard" pitchFamily="34" charset="-122"/>
                 <a:cs typeface="Pretendard" pitchFamily="34" charset="-120"/>
               </a:rPr>
-              <a:t>자산 규모: 해당 권역 소재 단독 빌딩 매입 기회</a:t>
+              <a:t>안정적 현금흐름: 전 층 임차인 운영 기반의 안정적 월 임대수익 창출</a:t>
             </a:r>
             <a:endParaRPr lang="en-US" sz="1150" dirty="0"/>
           </a:p>
@@ -8811,7 +8820,9 @@
           <a:ln/>
         </p:spPr>
         <p:txBody>
-          <a:bodyPr wrap="square" lIns="0" tIns="0" rIns="0" bIns="0" rtlCol="0" anchor="ctr"/>
+          <a:bodyPr wrap="square" lIns="0" tIns="0" rIns="0" bIns="0" rtlCol="0" anchor="ctr">
+            <a:normAutofit/>
+          </a:bodyPr>
           <a:lstStyle/>
           <a:p>
             <a:pPr indent="0" marL="0">
@@ -8826,7 +8837,7 @@
                 <a:ea typeface="Pretendard" pitchFamily="34" charset="-122"/>
                 <a:cs typeface="Pretendard" pitchFamily="34" charset="-120"/>
               </a:rPr>
-              <a:t>수익 안정성: 안정적 임대수익 기반 투자 매물</a:t>
+              <a:t>자산 규모: 해당 권역 소재 단독 빌딩 매입 기회</a:t>
             </a:r>
             <a:endParaRPr lang="en-US" sz="1150" dirty="0"/>
           </a:p>
@@ -9107,7 +9118,183 @@
       </p:pic>
       <p:sp>
         <p:nvSpPr>
-          <p:cNvPr id="7" name="Text 4"/>
+          <p:cNvPr id="7" name="Shape 4"/>
+          <p:cNvSpPr/>
+          <p:nvPr/>
+        </p:nvSpPr>
+        <p:spPr>
+          <a:xfrm>
+            <a:off x="704088" y="5184648"/>
+            <a:ext cx="3200400" cy="320040"/>
+          </a:xfrm>
+          <a:prstGeom prst="roundRect">
+            <a:avLst>
+              <a:gd name="adj" fmla="val 11429"/>
+            </a:avLst>
+          </a:prstGeom>
+          <a:solidFill>
+            <a:srgbClr val="FFFFFF">
+              <a:alpha val="90000"/>
+            </a:srgbClr>
+          </a:solidFill>
+          <a:ln w="10160">
+            <a:solidFill>
+              <a:srgbClr val="CBD5E1"/>
+            </a:solidFill>
+            <a:prstDash val="solid"/>
+          </a:ln>
+        </p:spPr>
+      </p:sp>
+      <p:sp>
+        <p:nvSpPr>
+          <p:cNvPr id="8" name="Text 5"/>
+          <p:cNvSpPr/>
+          <p:nvPr/>
+        </p:nvSpPr>
+        <p:spPr>
+          <a:xfrm>
+            <a:off x="749808" y="5202936"/>
+            <a:ext cx="3108960" cy="274320"/>
+          </a:xfrm>
+          <a:prstGeom prst="rect">
+            <a:avLst/>
+          </a:prstGeom>
+          <a:noFill/>
+          <a:ln/>
+        </p:spPr>
+        <p:txBody>
+          <a:bodyPr wrap="square" rtlCol="0" anchor="ctr"/>
+          <a:lstStyle/>
+          <a:p>
+            <a:pPr indent="0" marL="0">
+              <a:buNone/>
+            </a:pPr>
+            <a:r>
+              <a:rPr lang="en-US" sz="900" b="1" dirty="0">
+                <a:solidFill>
+                  <a:srgbClr val="B8860B"/>
+                </a:solidFill>
+                <a:latin typeface="Pretendard" pitchFamily="34" charset="0"/>
+                <a:ea typeface="Pretendard" pitchFamily="34" charset="-122"/>
+                <a:cs typeface="Pretendard" pitchFamily="34" charset="-120"/>
+              </a:rPr>
+              <a:t>★ </a:t>
+            </a:r>
+            <a:pPr indent="0" marL="0">
+              <a:buNone/>
+            </a:pPr>
+            <a:r>
+              <a:rPr lang="en-US" sz="850" b="1" dirty="0">
+                <a:solidFill>
+                  <a:srgbClr val="1E293B"/>
+                </a:solidFill>
+                <a:latin typeface="Pretendard" pitchFamily="34" charset="0"/>
+                <a:ea typeface="Pretendard" pitchFamily="34" charset="-122"/>
+                <a:cs typeface="Pretendard" pitchFamily="34" charset="-120"/>
+              </a:rPr>
+              <a:t>대상 자산(본건)   </a:t>
+            </a:r>
+            <a:pPr indent="0" marL="0">
+              <a:buNone/>
+            </a:pPr>
+            <a:r>
+              <a:rPr lang="en-US" sz="1000" b="1" dirty="0">
+                <a:solidFill>
+                  <a:srgbClr val="B8860B"/>
+                </a:solidFill>
+                <a:latin typeface="Pretendard" pitchFamily="34" charset="0"/>
+                <a:ea typeface="Pretendard" pitchFamily="34" charset="-122"/>
+                <a:cs typeface="Pretendard" pitchFamily="34" charset="-120"/>
+              </a:rPr>
+              <a:t>╌ </a:t>
+            </a:r>
+            <a:pPr indent="0" marL="0">
+              <a:buNone/>
+            </a:pPr>
+            <a:r>
+              <a:rPr lang="en-US" sz="850" dirty="0">
+                <a:solidFill>
+                  <a:srgbClr val="475569"/>
+                </a:solidFill>
+                <a:latin typeface="Pretendard" pitchFamily="34" charset="0"/>
+                <a:ea typeface="Pretendard" pitchFamily="34" charset="-122"/>
+                <a:cs typeface="Pretendard" pitchFamily="34" charset="-120"/>
+              </a:rPr>
+              <a:t>도보 5분 반경 (약 400m)</a:t>
+            </a:r>
+            <a:endParaRPr lang="en-US" sz="900" dirty="0"/>
+          </a:p>
+        </p:txBody>
+      </p:sp>
+      <p:sp>
+        <p:nvSpPr>
+          <p:cNvPr id="9" name="Shape 6"/>
+          <p:cNvSpPr/>
+          <p:nvPr/>
+        </p:nvSpPr>
+        <p:spPr>
+          <a:xfrm>
+            <a:off x="2715768" y="3739896"/>
+            <a:ext cx="822960" cy="219456"/>
+          </a:xfrm>
+          <a:prstGeom prst="roundRect">
+            <a:avLst>
+              <a:gd name="adj" fmla="val 16667"/>
+            </a:avLst>
+          </a:prstGeom>
+          <a:solidFill>
+            <a:srgbClr val="132A3A"/>
+          </a:solidFill>
+          <a:ln w="12700">
+            <a:solidFill>
+              <a:srgbClr val="FFFFFF"/>
+            </a:solidFill>
+            <a:prstDash val="solid"/>
+          </a:ln>
+        </p:spPr>
+      </p:sp>
+      <p:sp>
+        <p:nvSpPr>
+          <p:cNvPr id="10" name="Text 7"/>
+          <p:cNvSpPr/>
+          <p:nvPr/>
+        </p:nvSpPr>
+        <p:spPr>
+          <a:xfrm>
+            <a:off x="2715768" y="3739896"/>
+            <a:ext cx="822960" cy="219456"/>
+          </a:xfrm>
+          <a:prstGeom prst="rect">
+            <a:avLst/>
+          </a:prstGeom>
+          <a:noFill/>
+          <a:ln/>
+        </p:spPr>
+        <p:txBody>
+          <a:bodyPr wrap="square" rtlCol="0" anchor="ctr"/>
+          <a:lstStyle/>
+          <a:p>
+            <a:pPr algn="ctr" indent="0" marL="0">
+              <a:buNone/>
+            </a:pPr>
+            <a:r>
+              <a:rPr lang="en-US" sz="900" b="1" dirty="0">
+                <a:solidFill>
+                  <a:srgbClr val="FFFFFF"/>
+                </a:solidFill>
+                <a:latin typeface="Pretendard" pitchFamily="34" charset="0"/>
+                <a:ea typeface="Pretendard" pitchFamily="34" charset="-122"/>
+                <a:cs typeface="Pretendard" pitchFamily="34" charset="-120"/>
+              </a:rPr>
+              <a:t>★ 본건</a:t>
+            </a:r>
+            <a:endParaRPr lang="en-US" sz="900" dirty="0"/>
+          </a:p>
+        </p:txBody>
+      </p:sp>
+      <p:sp>
+        <p:nvSpPr>
+          <p:cNvPr id="11" name="Text 8"/>
           <p:cNvSpPr/>
           <p:nvPr/>
         </p:nvSpPr>
@@ -9151,7 +9338,7 @@
       </p:sp>
       <p:sp>
         <p:nvSpPr>
-          <p:cNvPr id="8" name="Text 5"/>
+          <p:cNvPr id="12" name="Text 9"/>
           <p:cNvSpPr/>
           <p:nvPr/>
         </p:nvSpPr>
@@ -9195,7 +9382,7 @@
       </p:sp>
       <p:sp>
         <p:nvSpPr>
-          <p:cNvPr id="9" name="Shape 6"/>
+          <p:cNvPr id="13" name="Shape 10"/>
           <p:cNvSpPr/>
           <p:nvPr/>
         </p:nvSpPr>
@@ -9218,7 +9405,7 @@
       </p:sp>
       <p:sp>
         <p:nvSpPr>
-          <p:cNvPr id="10" name="Text 7"/>
+          <p:cNvPr id="14" name="Text 11"/>
           <p:cNvSpPr/>
           <p:nvPr/>
         </p:nvSpPr>
@@ -9262,7 +9449,7 @@
       </p:sp>
       <p:sp>
         <p:nvSpPr>
-          <p:cNvPr id="11" name="Text 8"/>
+          <p:cNvPr id="15" name="Text 12"/>
           <p:cNvSpPr/>
           <p:nvPr/>
         </p:nvSpPr>
@@ -9306,7 +9493,7 @@
       </p:sp>
       <p:sp>
         <p:nvSpPr>
-          <p:cNvPr id="12" name="Shape 9"/>
+          <p:cNvPr id="16" name="Shape 13"/>
           <p:cNvSpPr/>
           <p:nvPr/>
         </p:nvSpPr>
@@ -9328,7 +9515,7 @@
       </p:sp>
       <p:sp>
         <p:nvSpPr>
-          <p:cNvPr id="13" name="Shape 10"/>
+          <p:cNvPr id="17" name="Shape 14"/>
           <p:cNvSpPr/>
           <p:nvPr/>
         </p:nvSpPr>
@@ -9348,7 +9535,7 @@
       </p:sp>
       <p:sp>
         <p:nvSpPr>
-          <p:cNvPr id="14" name="Text 11"/>
+          <p:cNvPr id="18" name="Text 15"/>
           <p:cNvSpPr/>
           <p:nvPr/>
         </p:nvSpPr>
@@ -9387,7 +9574,7 @@
       </p:sp>
       <p:sp>
         <p:nvSpPr>
-          <p:cNvPr id="15" name="Text 12"/>
+          <p:cNvPr id="19" name="Text 16"/>
           <p:cNvSpPr/>
           <p:nvPr/>
         </p:nvSpPr>
@@ -9430,7 +9617,7 @@
       </p:sp>
       <p:sp>
         <p:nvSpPr>
-          <p:cNvPr id="16" name="Text 13"/>
+          <p:cNvPr id="20" name="Text 17"/>
           <p:cNvSpPr/>
           <p:nvPr/>
         </p:nvSpPr>
@@ -9469,7 +9656,7 @@
       </p:sp>
       <p:sp>
         <p:nvSpPr>
-          <p:cNvPr id="17" name="Text 14"/>
+          <p:cNvPr id="21" name="Text 18"/>
           <p:cNvSpPr/>
           <p:nvPr/>
         </p:nvSpPr>
